--- a/Präsentation/Präsentation_Projekt/HHBKTendo_Praesentation_1.pptx
+++ b/Präsentation/Präsentation_Projekt/HHBKTendo_Praesentation_1.pptx
@@ -11,6 +11,12 @@
     <p:sldId id="256" r:id="rId2"/>
     <p:sldId id="257" r:id="rId3"/>
     <p:sldId id="258" r:id="rId4"/>
+    <p:sldId id="265" r:id="rId16"/>
+    <p:sldId id="266" r:id="rId17"/>
+    <p:sldId id="267" r:id="rId18"/>
+    <p:sldId id="268" r:id="rId19"/>
+    <p:sldId id="269" r:id="rId20"/>
+    <p:sldId id="270" r:id="rId21"/>
     <p:sldId id="259" r:id="rId5"/>
     <p:sldId id="260" r:id="rId6"/>
     <p:sldId id="261" r:id="rId7"/>
@@ -1709,6 +1715,6745 @@
               <a:t>Python 3.10+ · SQLite · tkinter</a:t>
             </a:r>
             <a:endParaRPr lang="en-US" sz="1100" dirty="0"/>
+          </a:p>
+        </p:txBody>
+      </p:sp>
+    </p:spTree>
+  </p:cSld>
+  <p:clrMapOvr>
+    <a:masterClrMapping/>
+  </p:clrMapOvr>
+</p:sld>
+</file>
+
+<file path=ppt/slides/slide10.xml><?xml version="1.0" encoding="utf-8"?>
+<p:sld xmlns:a="http://schemas.openxmlformats.org/drawingml/2006/main" xmlns:p="http://schemas.openxmlformats.org/presentationml/2006/main" xmlns:r="http://schemas.openxmlformats.org/officeDocument/2006/relationships">
+  <p:cSld>
+    <p:bg>
+      <p:bgPr>
+        <a:solidFill>
+          <a:srgbClr val="F0F4FF"/>
+        </a:solidFill>
+        <a:effectLst/>
+      </p:bgPr>
+    </p:bg>
+    <p:spTree>
+      <p:nvGrpSpPr>
+        <p:cNvPr id="1" name=""/>
+        <p:cNvGrpSpPr/>
+        <p:nvPr/>
+      </p:nvGrpSpPr>
+      <p:grpSpPr/>
+      <p:sp>
+        <p:nvSpPr>
+          <p:cNvPr id="2" name="AccentStripe"/>
+          <p:cNvSpPr/>
+          <p:nvPr/>
+        </p:nvSpPr>
+        <p:spPr>
+          <a:xfrm>
+            <a:off x="0" y="0"/>
+            <a:ext cx="91440" cy="5143500"/>
+          </a:xfrm>
+          <a:prstGeom prst="rect">
+            <a:avLst/>
+          </a:prstGeom>
+          <a:solidFill>
+            <a:srgbClr val="4472C4"/>
+          </a:solidFill>
+        </p:spPr>
+      </p:sp>
+      <p:sp>
+        <p:nvSpPr>
+          <p:cNvPr id="3" name="Title"/>
+          <p:cNvSpPr/>
+          <p:nvPr/>
+        </p:nvSpPr>
+        <p:spPr>
+          <a:xfrm>
+            <a:off x="457200" y="256032"/>
+            <a:ext cx="8229600" cy="594360"/>
+          </a:xfrm>
+          <a:prstGeom prst="rect">
+            <a:avLst/>
+          </a:prstGeom>
+          <a:noFill/>
+          <a:ln/>
+        </p:spPr>
+        <p:txBody>
+          <a:bodyPr wrap="square" lIns="114300" tIns="91440" rIns="114300" bIns="91440" rtlCol="0" anchor="ctr"/>
+          <a:lstStyle/>
+          <a:p>
+            <a:pPr marL="0" indent="0" algn="l">
+              <a:buNone/>
+            </a:pPr>
+            <a:r>
+              <a:rPr lang="de-DE" sz="3000" b="1" dirty="0">
+                <a:solidFill>
+                  <a:srgbClr val="1A1A2E"/>
+                </a:solidFill>
+                <a:latin typeface="Arial Black" pitchFamily="49" charset="0"/>
+              </a:rPr>
+              <a:t>database.py – Flexible Datenbankzugriffe</a:t>
+            </a:r>
+          </a:p>
+        </p:txBody>
+      </p:sp>
+      <p:sp>
+        <p:nvSpPr>
+          <p:cNvPr id="4" name="Subtitle"/>
+          <p:cNvSpPr/>
+          <p:nvPr/>
+        </p:nvSpPr>
+        <p:spPr>
+          <a:xfrm>
+            <a:off x="457200" y="804672"/>
+            <a:ext cx="8229600" cy="320040"/>
+          </a:xfrm>
+          <a:prstGeom prst="rect">
+            <a:avLst/>
+          </a:prstGeom>
+          <a:noFill/>
+          <a:ln/>
+        </p:spPr>
+        <p:txBody>
+          <a:bodyPr wrap="square" lIns="114300" tIns="91440" rIns="114300" bIns="91440" rtlCol="0" anchor="ctr"/>
+          <a:lstStyle/>
+          <a:p>
+            <a:pPr marL="0" indent="0" algn="l">
+              <a:buNone/>
+            </a:pPr>
+            <a:r>
+              <a:rPr lang="de-DE" sz="1200" dirty="0">
+                <a:solidFill>
+                  <a:srgbClr val="8892A4"/>
+                </a:solidFill>
+                <a:latin typeface="Calibri" pitchFamily="49" charset="0"/>
+              </a:rPr>
+              <a:t>row_factory · Schema-Migration · SQL-Injection-Schutz</a:t>
+            </a:r>
+          </a:p>
+        </p:txBody>
+      </p:sp>
+      <p:sp>
+        <p:nvSpPr>
+          <p:cNvPr id="5" name="CodeCard"/>
+          <p:cNvSpPr/>
+          <p:nvPr/>
+        </p:nvSpPr>
+        <p:spPr>
+          <a:xfrm>
+            <a:off x="365760" y="1234440"/>
+            <a:ext cx="5250000" cy="3650000"/>
+          </a:xfrm>
+          <a:prstGeom prst="rect">
+            <a:avLst/>
+          </a:prstGeom>
+          <a:solidFill>
+            <a:srgbClr val="121224"/>
+          </a:solidFill>
+          <a:ln w="9525">
+            <a:solidFill>
+              <a:srgbClr val="4472C4"/>
+            </a:solidFill>
+            <a:prstDash val="solid"/>
+          </a:ln>
+        </p:spPr>
+      </p:sp>
+      <p:sp>
+        <p:nvSpPr>
+          <p:cNvPr id="6" name="CodeText"/>
+          <p:cNvSpPr/>
+          <p:nvPr/>
+        </p:nvSpPr>
+        <p:spPr>
+          <a:xfrm>
+            <a:off x="457200" y="1325880"/>
+            <a:ext cx="5067120" cy="3467120"/>
+          </a:xfrm>
+          <a:prstGeom prst="rect">
+            <a:avLst/>
+          </a:prstGeom>
+          <a:noFill/>
+          <a:ln/>
+        </p:spPr>
+        <p:txBody>
+          <a:bodyPr wrap="square" lIns="114300" tIns="91440" rIns="114300" bIns="91440" rtlCol="0" anchor="t"/>
+          <a:lstStyle/>
+          <a:p>
+            <a:pPr marL="0" indent="0" algn="l">
+              <a:buNone/>
+            </a:pPr>
+            <a:r>
+              <a:rPr lang="de-DE" sz="980" i="1" dirty="0">
+                <a:solidFill>
+                  <a:srgbClr val="5C6370"/>
+                </a:solidFill>
+                <a:latin typeface="Consolas" pitchFamily="49" charset="0"/>
+              </a:rPr>
+              <a:t># row_factory: Spaltenzugriff per Name statt Index</a:t>
+            </a:r>
+          </a:p>
+          <a:p>
+            <a:pPr marL="0" indent="0" algn="l">
+              <a:buNone/>
+            </a:pPr>
+            <a:r>
+              <a:rPr lang="de-DE" sz="980" dirty="0">
+                <a:solidFill>
+                  <a:srgbClr val="56B6C2"/>
+                </a:solidFill>
+                <a:latin typeface="Consolas" pitchFamily="49" charset="0"/>
+              </a:rPr>
+              <a:t>conn</a:t>
+            </a:r>
+            <a:r>
+              <a:rPr lang="de-DE" sz="980" dirty="0">
+                <a:solidFill>
+                  <a:srgbClr val="ABB2BF"/>
+                </a:solidFill>
+                <a:latin typeface="Consolas" pitchFamily="49" charset="0"/>
+              </a:rPr>
+              <a:t>.row_factory = </a:t>
+            </a:r>
+            <a:r>
+              <a:rPr lang="de-DE" sz="980" dirty="0">
+                <a:solidFill>
+                  <a:srgbClr val="61AFEF"/>
+                </a:solidFill>
+                <a:latin typeface="Consolas" pitchFamily="49" charset="0"/>
+              </a:rPr>
+              <a:t>sqlite3</a:t>
+            </a:r>
+            <a:r>
+              <a:rPr lang="de-DE" sz="980" dirty="0">
+                <a:solidFill>
+                  <a:srgbClr val="ABB2BF"/>
+                </a:solidFill>
+                <a:latin typeface="Consolas" pitchFamily="49" charset="0"/>
+              </a:rPr>
+              <a:t>.Row</a:t>
+            </a:r>
+          </a:p>
+          <a:p>
+            <a:pPr marL="0" indent="0" algn="l">
+              <a:buNone/>
+            </a:pPr>
+            <a:r>
+              <a:rPr lang="de-DE" sz="980" dirty="0">
+                <a:solidFill>
+                  <a:srgbClr val="56B6C2"/>
+                </a:solidFill>
+                <a:latin typeface="Consolas" pitchFamily="49" charset="0"/>
+              </a:rPr>
+              <a:t>row</a:t>
+            </a:r>
+            <a:r>
+              <a:rPr lang="de-DE" sz="980" dirty="0">
+                <a:solidFill>
+                  <a:srgbClr val="ABB2BF"/>
+                </a:solidFill>
+                <a:latin typeface="Consolas" pitchFamily="49" charset="0"/>
+              </a:rPr>
+              <a:t> = cursor.</a:t>
+            </a:r>
+            <a:r>
+              <a:rPr lang="de-DE" sz="980" dirty="0">
+                <a:solidFill>
+                  <a:srgbClr val="61AFEF"/>
+                </a:solidFill>
+                <a:latin typeface="Consolas" pitchFamily="49" charset="0"/>
+              </a:rPr>
+              <a:t>fetchone</a:t>
+            </a:r>
+            <a:r>
+              <a:rPr lang="de-DE" sz="980" dirty="0">
+                <a:solidFill>
+                  <a:srgbClr val="ABB2BF"/>
+                </a:solidFill>
+                <a:latin typeface="Consolas" pitchFamily="49" charset="0"/>
+              </a:rPr>
+              <a:t>()</a:t>
+            </a:r>
+          </a:p>
+          <a:p>
+            <a:pPr marL="0" indent="0" algn="l">
+              <a:buNone/>
+            </a:pPr>
+            <a:r>
+              <a:rPr lang="de-DE" sz="980" dirty="0">
+                <a:solidFill>
+                  <a:srgbClr val="56B6C2"/>
+                </a:solidFill>
+                <a:latin typeface="Consolas" pitchFamily="49" charset="0"/>
+              </a:rPr>
+              <a:t>print</a:t>
+            </a:r>
+            <a:r>
+              <a:rPr lang="de-DE" sz="980" dirty="0">
+                <a:solidFill>
+                  <a:srgbClr val="ABB2BF"/>
+                </a:solidFill>
+                <a:latin typeface="Consolas" pitchFamily="49" charset="0"/>
+              </a:rPr>
+              <a:t>(row[</a:t>
+            </a:r>
+            <a:r>
+              <a:rPr lang="de-DE" sz="980" dirty="0">
+                <a:solidFill>
+                  <a:srgbClr val="98C379"/>
+                </a:solidFill>
+                <a:latin typeface="Consolas" pitchFamily="49" charset="0"/>
+              </a:rPr>
+              <a:t>"username"</a:t>
+            </a:r>
+            <a:r>
+              <a:rPr lang="de-DE" sz="980" dirty="0">
+                <a:solidFill>
+                  <a:srgbClr val="ABB2BF"/>
+                </a:solidFill>
+                <a:latin typeface="Consolas" pitchFamily="49" charset="0"/>
+              </a:rPr>
+              <a:t>])  </a:t>
+            </a:r>
+            <a:r>
+              <a:rPr lang="de-DE" sz="980" i="1" dirty="0">
+                <a:solidFill>
+                  <a:srgbClr val="5C6370"/>
+                </a:solidFill>
+                <a:latin typeface="Consolas" pitchFamily="49" charset="0"/>
+              </a:rPr>
+              <a:t># statt row[1]</a:t>
+            </a:r>
+          </a:p>
+          <a:p>
+            <a:pPr marL="0" indent="0" algn="l">
+              <a:buNone/>
+            </a:pPr>
+            <a:r>
+              <a:rPr lang="de-DE" sz="980" dirty="0">
+                <a:solidFill>
+                  <a:srgbClr val="56B6C2"/>
+                </a:solidFill>
+                <a:latin typeface="Consolas" pitchFamily="49" charset="0"/>
+              </a:rPr>
+              <a:t>return</a:t>
+            </a:r>
+            <a:r>
+              <a:rPr lang="de-DE" sz="980" dirty="0">
+                <a:solidFill>
+                  <a:srgbClr val="ABB2BF"/>
+                </a:solidFill>
+                <a:latin typeface="Consolas" pitchFamily="49" charset="0"/>
+              </a:rPr>
+              <a:t> </a:t>
+            </a:r>
+            <a:r>
+              <a:rPr lang="de-DE" sz="980" dirty="0">
+                <a:solidFill>
+                  <a:srgbClr val="61AFEF"/>
+                </a:solidFill>
+                <a:latin typeface="Consolas" pitchFamily="49" charset="0"/>
+              </a:rPr>
+              <a:t>dict</a:t>
+            </a:r>
+            <a:r>
+              <a:rPr lang="de-DE" sz="980" dirty="0">
+                <a:solidFill>
+                  <a:srgbClr val="ABB2BF"/>
+                </a:solidFill>
+                <a:latin typeface="Consolas" pitchFamily="49" charset="0"/>
+              </a:rPr>
+              <a:t>(row)      </a:t>
+            </a:r>
+            <a:r>
+              <a:rPr lang="de-DE" sz="980" i="1" dirty="0">
+                <a:solidFill>
+                  <a:srgbClr val="5C6370"/>
+                </a:solidFill>
+                <a:latin typeface="Consolas" pitchFamily="49" charset="0"/>
+              </a:rPr>
+              <a:t># einfache Serialisierung</a:t>
+            </a:r>
+          </a:p>
+          <a:p>
+            <a:pPr>
+              <a:buNone/>
+            </a:pPr>
+            <a:endParaRPr lang="de-DE" sz="600" dirty="0"/>
+          </a:p>
+          <a:p>
+            <a:pPr marL="0" indent="0" algn="l">
+              <a:buNone/>
+            </a:pPr>
+            <a:r>
+              <a:rPr lang="de-DE" sz="980" i="1" dirty="0">
+                <a:solidFill>
+                  <a:srgbClr val="5C6370"/>
+                </a:solidFill>
+                <a:latin typeface="Consolas" pitchFamily="49" charset="0"/>
+              </a:rPr>
+              <a:t># Schema-Migration: neue Spalte nachrüsten</a:t>
+            </a:r>
+          </a:p>
+          <a:p>
+            <a:pPr marL="0" indent="0" algn="l">
+              <a:buNone/>
+            </a:pPr>
+            <a:r>
+              <a:rPr lang="de-DE" sz="980" dirty="0">
+                <a:solidFill>
+                  <a:srgbClr val="56B6C2"/>
+                </a:solidFill>
+                <a:latin typeface="Consolas" pitchFamily="49" charset="0"/>
+              </a:rPr>
+              <a:t>try</a:t>
+            </a:r>
+            <a:r>
+              <a:rPr lang="de-DE" sz="980" dirty="0">
+                <a:solidFill>
+                  <a:srgbClr val="ABB2BF"/>
+                </a:solidFill>
+                <a:latin typeface="Consolas" pitchFamily="49" charset="0"/>
+              </a:rPr>
+              <a:t>:</a:t>
+            </a:r>
+          </a:p>
+          <a:p>
+            <a:pPr marL="0" indent="0" algn="l">
+              <a:buNone/>
+            </a:pPr>
+            <a:r>
+              <a:rPr lang="de-DE" sz="980" dirty="0">
+                <a:solidFill>
+                  <a:srgbClr val="ABB2BF"/>
+                </a:solidFill>
+                <a:latin typeface="Consolas" pitchFamily="49" charset="0"/>
+              </a:rPr>
+              <a:t>    cursor.</a:t>
+            </a:r>
+            <a:r>
+              <a:rPr lang="de-DE" sz="980" dirty="0">
+                <a:solidFill>
+                  <a:srgbClr val="61AFEF"/>
+                </a:solidFill>
+                <a:latin typeface="Consolas" pitchFamily="49" charset="0"/>
+              </a:rPr>
+              <a:t>execute</a:t>
+            </a:r>
+            <a:r>
+              <a:rPr lang="de-DE" sz="980" dirty="0">
+                <a:solidFill>
+                  <a:srgbClr val="ABB2BF"/>
+                </a:solidFill>
+                <a:latin typeface="Consolas" pitchFamily="49" charset="0"/>
+              </a:rPr>
+              <a:t>(</a:t>
+            </a:r>
+          </a:p>
+          <a:p>
+            <a:pPr marL="0" indent="0" algn="l">
+              <a:buNone/>
+            </a:pPr>
+            <a:r>
+              <a:rPr lang="de-DE" sz="980" dirty="0">
+                <a:solidFill>
+                  <a:srgbClr val="ABB2BF"/>
+                </a:solidFill>
+                <a:latin typeface="Consolas" pitchFamily="49" charset="0"/>
+              </a:rPr>
+              <a:t>        </a:t>
+            </a:r>
+            <a:r>
+              <a:rPr lang="de-DE" sz="980" dirty="0">
+                <a:solidFill>
+                  <a:srgbClr val="98C379"/>
+                </a:solidFill>
+                <a:latin typeface="Consolas" pitchFamily="49" charset="0"/>
+              </a:rPr>
+              <a:t>"ALTER TABLE users"</a:t>
+            </a:r>
+          </a:p>
+          <a:p>
+            <a:pPr marL="0" indent="0" algn="l">
+              <a:buNone/>
+            </a:pPr>
+            <a:r>
+              <a:rPr lang="de-DE" sz="980" dirty="0">
+                <a:solidFill>
+                  <a:srgbClr val="ABB2BF"/>
+                </a:solidFill>
+                <a:latin typeface="Consolas" pitchFamily="49" charset="0"/>
+              </a:rPr>
+              <a:t>        </a:t>
+            </a:r>
+            <a:r>
+              <a:rPr lang="de-DE" sz="980" dirty="0">
+                <a:solidFill>
+                  <a:srgbClr val="98C379"/>
+                </a:solidFill>
+                <a:latin typeface="Consolas" pitchFamily="49" charset="0"/>
+              </a:rPr>
+              <a:t>"ADD COLUMN language TEXT DEFAULT 'en'"</a:t>
+            </a:r>
+          </a:p>
+          <a:p>
+            <a:pPr marL="0" indent="0" algn="l">
+              <a:buNone/>
+            </a:pPr>
+            <a:r>
+              <a:rPr lang="de-DE" sz="980" dirty="0">
+                <a:solidFill>
+                  <a:srgbClr val="ABB2BF"/>
+                </a:solidFill>
+                <a:latin typeface="Consolas" pitchFamily="49" charset="0"/>
+              </a:rPr>
+              <a:t>    )</a:t>
+            </a:r>
+          </a:p>
+          <a:p>
+            <a:pPr marL="0" indent="0" algn="l">
+              <a:buNone/>
+            </a:pPr>
+            <a:r>
+              <a:rPr lang="de-DE" sz="980" dirty="0">
+                <a:solidFill>
+                  <a:srgbClr val="ABB2BF"/>
+                </a:solidFill>
+                <a:latin typeface="Consolas" pitchFamily="49" charset="0"/>
+              </a:rPr>
+              <a:t>    conn.</a:t>
+            </a:r>
+            <a:r>
+              <a:rPr lang="de-DE" sz="980" dirty="0">
+                <a:solidFill>
+                  <a:srgbClr val="61AFEF"/>
+                </a:solidFill>
+                <a:latin typeface="Consolas" pitchFamily="49" charset="0"/>
+              </a:rPr>
+              <a:t>commit</a:t>
+            </a:r>
+            <a:r>
+              <a:rPr lang="de-DE" sz="980" dirty="0">
+                <a:solidFill>
+                  <a:srgbClr val="ABB2BF"/>
+                </a:solidFill>
+                <a:latin typeface="Consolas" pitchFamily="49" charset="0"/>
+              </a:rPr>
+              <a:t>()</a:t>
+            </a:r>
+          </a:p>
+          <a:p>
+            <a:pPr marL="0" indent="0" algn="l">
+              <a:buNone/>
+            </a:pPr>
+            <a:r>
+              <a:rPr lang="de-DE" sz="980" dirty="0">
+                <a:solidFill>
+                  <a:srgbClr val="56B6C2"/>
+                </a:solidFill>
+                <a:latin typeface="Consolas" pitchFamily="49" charset="0"/>
+              </a:rPr>
+              <a:t>except</a:t>
+            </a:r>
+            <a:r>
+              <a:rPr lang="de-DE" sz="980" dirty="0">
+                <a:solidFill>
+                  <a:srgbClr val="ABB2BF"/>
+                </a:solidFill>
+                <a:latin typeface="Consolas" pitchFamily="49" charset="0"/>
+              </a:rPr>
+              <a:t> sqlite3.</a:t>
+            </a:r>
+            <a:r>
+              <a:rPr lang="de-DE" sz="980" dirty="0">
+                <a:solidFill>
+                  <a:srgbClr val="61AFEF"/>
+                </a:solidFill>
+                <a:latin typeface="Consolas" pitchFamily="49" charset="0"/>
+              </a:rPr>
+              <a:t>OperationalError</a:t>
+            </a:r>
+            <a:r>
+              <a:rPr lang="de-DE" sz="980" dirty="0">
+                <a:solidFill>
+                  <a:srgbClr val="ABB2BF"/>
+                </a:solidFill>
+                <a:latin typeface="Consolas" pitchFamily="49" charset="0"/>
+              </a:rPr>
+              <a:t>:</a:t>
+            </a:r>
+          </a:p>
+          <a:p>
+            <a:pPr marL="0" indent="0" algn="l">
+              <a:buNone/>
+            </a:pPr>
+            <a:r>
+              <a:rPr lang="de-DE" sz="980" dirty="0">
+                <a:solidFill>
+                  <a:srgbClr val="ABB2BF"/>
+                </a:solidFill>
+                <a:latin typeface="Consolas" pitchFamily="49" charset="0"/>
+              </a:rPr>
+              <a:t>    </a:t>
+            </a:r>
+            <a:r>
+              <a:rPr lang="de-DE" sz="980" dirty="0">
+                <a:solidFill>
+                  <a:srgbClr val="56B6C2"/>
+                </a:solidFill>
+                <a:latin typeface="Consolas" pitchFamily="49" charset="0"/>
+              </a:rPr>
+              <a:t>pass</a:t>
+            </a:r>
+            <a:r>
+              <a:rPr lang="de-DE" sz="980" dirty="0">
+                <a:solidFill>
+                  <a:srgbClr val="ABB2BF"/>
+                </a:solidFill>
+                <a:latin typeface="Consolas" pitchFamily="49" charset="0"/>
+              </a:rPr>
+              <a:t>  </a:t>
+            </a:r>
+            <a:r>
+              <a:rPr lang="de-DE" sz="980" i="1" dirty="0">
+                <a:solidFill>
+                  <a:srgbClr val="5C6370"/>
+                </a:solidFill>
+                <a:latin typeface="Consolas" pitchFamily="49" charset="0"/>
+              </a:rPr>
+              <a:t># Spalte existiert bereits</a:t>
+            </a:r>
+          </a:p>
+          <a:p>
+            <a:pPr>
+              <a:buNone/>
+            </a:pPr>
+            <a:endParaRPr lang="de-DE" sz="600" dirty="0"/>
+          </a:p>
+          <a:p>
+            <a:pPr marL="0" indent="0" algn="l">
+              <a:buNone/>
+            </a:pPr>
+            <a:r>
+              <a:rPr lang="de-DE" sz="980" i="1" dirty="0">
+                <a:solidFill>
+                  <a:srgbClr val="5C6370"/>
+                </a:solidFill>
+                <a:latin typeface="Consolas" pitchFamily="49" charset="0"/>
+              </a:rPr>
+              <a:t># SQL-Injection-Schutz: Parameterized Queries</a:t>
+            </a:r>
+          </a:p>
+          <a:p>
+            <a:pPr marL="0" indent="0" algn="l">
+              <a:buNone/>
+            </a:pPr>
+            <a:r>
+              <a:rPr lang="de-DE" sz="980" dirty="0">
+                <a:solidFill>
+                  <a:srgbClr val="ABB2BF"/>
+                </a:solidFill>
+                <a:latin typeface="Consolas" pitchFamily="49" charset="0"/>
+              </a:rPr>
+              <a:t>cursor.</a:t>
+            </a:r>
+            <a:r>
+              <a:rPr lang="de-DE" sz="980" dirty="0">
+                <a:solidFill>
+                  <a:srgbClr val="61AFEF"/>
+                </a:solidFill>
+                <a:latin typeface="Consolas" pitchFamily="49" charset="0"/>
+              </a:rPr>
+              <a:t>execute</a:t>
+            </a:r>
+            <a:r>
+              <a:rPr lang="de-DE" sz="980" dirty="0">
+                <a:solidFill>
+                  <a:srgbClr val="ABB2BF"/>
+                </a:solidFill>
+                <a:latin typeface="Consolas" pitchFamily="49" charset="0"/>
+              </a:rPr>
+              <a:t>(</a:t>
+            </a:r>
+          </a:p>
+          <a:p>
+            <a:pPr marL="0" indent="0" algn="l">
+              <a:buNone/>
+            </a:pPr>
+            <a:r>
+              <a:rPr lang="de-DE" sz="980" dirty="0">
+                <a:solidFill>
+                  <a:srgbClr val="ABB2BF"/>
+                </a:solidFill>
+                <a:latin typeface="Consolas" pitchFamily="49" charset="0"/>
+              </a:rPr>
+              <a:t>    </a:t>
+            </a:r>
+            <a:r>
+              <a:rPr lang="de-DE" sz="980" dirty="0">
+                <a:solidFill>
+                  <a:srgbClr val="98C379"/>
+                </a:solidFill>
+                <a:latin typeface="Consolas" pitchFamily="49" charset="0"/>
+              </a:rPr>
+              <a:t>"SELECT * FROM users WHERE username = ?"</a:t>
+            </a:r>
+            <a:r>
+              <a:rPr lang="de-DE" sz="980" dirty="0">
+                <a:solidFill>
+                  <a:srgbClr val="ABB2BF"/>
+                </a:solidFill>
+                <a:latin typeface="Consolas" pitchFamily="49" charset="0"/>
+              </a:rPr>
+              <a:t>,</a:t>
+            </a:r>
+          </a:p>
+          <a:p>
+            <a:pPr marL="0" indent="0" algn="l">
+              <a:buNone/>
+            </a:pPr>
+            <a:r>
+              <a:rPr lang="de-DE" sz="980" dirty="0">
+                <a:solidFill>
+                  <a:srgbClr val="ABB2BF"/>
+                </a:solidFill>
+                <a:latin typeface="Consolas" pitchFamily="49" charset="0"/>
+              </a:rPr>
+              <a:t>    (username,)  </a:t>
+            </a:r>
+            <a:r>
+              <a:rPr lang="de-DE" sz="980" i="1" dirty="0">
+                <a:solidFill>
+                  <a:srgbClr val="5C6370"/>
+                </a:solidFill>
+                <a:latin typeface="Consolas" pitchFamily="49" charset="0"/>
+              </a:rPr>
+              <a:t># ? wird sicher ersetzt</a:t>
+            </a:r>
+          </a:p>
+          <a:p>
+            <a:pPr marL="0" indent="0" algn="l">
+              <a:buNone/>
+            </a:pPr>
+            <a:r>
+              <a:rPr lang="de-DE" sz="980" dirty="0">
+                <a:solidFill>
+                  <a:srgbClr val="ABB2BF"/>
+                </a:solidFill>
+                <a:latin typeface="Consolas" pitchFamily="49" charset="0"/>
+              </a:rPr>
+              <a:t>)</a:t>
+            </a:r>
+          </a:p>
+        </p:txBody>
+      </p:sp>
+      <p:sp>
+        <p:nvSpPr>
+          <p:cNvPr id="7" name="BulletCard"/>
+          <p:cNvSpPr/>
+          <p:nvPr/>
+        </p:nvSpPr>
+        <p:spPr>
+          <a:xfrm>
+            <a:off x="5707200" y="1234440"/>
+            <a:ext cx="3071040" cy="3650000"/>
+          </a:xfrm>
+          <a:prstGeom prst="rect">
+            <a:avLst/>
+          </a:prstGeom>
+          <a:solidFill>
+            <a:srgbClr val="FFFFFF"/>
+          </a:solidFill>
+          <a:ln w="6350">
+            <a:solidFill>
+              <a:srgbClr val="D0D7E8"/>
+            </a:solidFill>
+            <a:prstDash val="solid"/>
+          </a:ln>
+        </p:spPr>
+      </p:sp>
+      <p:sp>
+        <p:nvSpPr>
+          <p:cNvPr id="8" name="BulletText"/>
+          <p:cNvSpPr/>
+          <p:nvPr/>
+        </p:nvSpPr>
+        <p:spPr>
+          <a:xfrm>
+            <a:off x="5798640" y="1325880"/>
+            <a:ext cx="2888160" cy="3467120"/>
+          </a:xfrm>
+          <a:prstGeom prst="rect">
+            <a:avLst/>
+          </a:prstGeom>
+          <a:noFill/>
+          <a:ln/>
+        </p:spPr>
+        <p:txBody>
+          <a:bodyPr wrap="square" lIns="114300" tIns="91440" rIns="114300" bIns="91440" rtlCol="0" anchor="t"/>
+          <a:lstStyle/>
+          <a:p>
+            <a:pPr marL="342900" indent="-342900" algn="l">
+              <a:buChar char="▸"/>
+            </a:pPr>
+            <a:r>
+              <a:rPr lang="de-DE" sz="1150" b="1" dirty="0">
+                <a:solidFill>
+                  <a:srgbClr val="2A3A5E"/>
+                </a:solidFill>
+                <a:latin typeface="Calibri" pitchFamily="49" charset="0"/>
+              </a:rPr>
+              <a:t>sqlite3.Row</a:t>
+            </a:r>
+          </a:p>
+          <a:p>
+            <a:pPr marL="342900" indent="0" algn="l">
+              <a:buNone/>
+            </a:pPr>
+            <a:r>
+              <a:rPr lang="de-DE" sz="1000" dirty="0">
+                <a:solidFill>
+                  <a:srgbClr val="8892A4"/>
+                </a:solidFill>
+                <a:latin typeface="Calibri" pitchFamily="49" charset="0"/>
+              </a:rPr>
+              <a:t>Spaltenzugriff per Name: row["username"] statt row[1]</a:t>
+            </a:r>
+          </a:p>
+          <a:p>
+            <a:pPr marL="342900" indent="-342900" algn="l">
+              <a:spcBef>
+                <a:spcPts val="160"/>
+              </a:spcBef>
+              <a:buChar char="▸"/>
+            </a:pPr>
+            <a:r>
+              <a:rPr lang="de-DE" sz="1150" b="1" dirty="0">
+                <a:solidFill>
+                  <a:srgbClr val="2A3A5E"/>
+                </a:solidFill>
+                <a:latin typeface="Calibri" pitchFamily="49" charset="0"/>
+              </a:rPr>
+              <a:t>dict(row)</a:t>
+            </a:r>
+          </a:p>
+          <a:p>
+            <a:pPr marL="342900" indent="0" algn="l">
+              <a:buNone/>
+            </a:pPr>
+            <a:r>
+              <a:rPr lang="de-DE" sz="1000" dirty="0">
+                <a:solidFill>
+                  <a:srgbClr val="8892A4"/>
+                </a:solidFill>
+                <a:latin typeface="Calibri" pitchFamily="49" charset="0"/>
+              </a:rPr>
+              <a:t>Einfache Konvertierung für den Rest der App</a:t>
+            </a:r>
+          </a:p>
+          <a:p>
+            <a:pPr marL="342900" indent="-342900" algn="l">
+              <a:spcBef>
+                <a:spcPts val="160"/>
+              </a:spcBef>
+              <a:buChar char="▸"/>
+            </a:pPr>
+            <a:r>
+              <a:rPr lang="de-DE" sz="1150" b="1" dirty="0">
+                <a:solidFill>
+                  <a:srgbClr val="2A3A5E"/>
+                </a:solidFill>
+                <a:latin typeface="Calibri" pitchFamily="49" charset="0"/>
+              </a:rPr>
+              <a:t>try/except Migration</a:t>
+            </a:r>
+          </a:p>
+          <a:p>
+            <a:pPr marL="342900" indent="0" algn="l">
+              <a:buNone/>
+            </a:pPr>
+            <a:r>
+              <a:rPr lang="de-DE" sz="1000" dirty="0">
+                <a:solidFill>
+                  <a:srgbClr val="8892A4"/>
+                </a:solidFill>
+                <a:latin typeface="Calibri" pitchFamily="49" charset="0"/>
+              </a:rPr>
+              <a:t>DB bleibt kompatibel wenn Spalte schon existiert</a:t>
+            </a:r>
+          </a:p>
+          <a:p>
+            <a:pPr marL="342900" indent="-342900" algn="l">
+              <a:spcBef>
+                <a:spcPts val="160"/>
+              </a:spcBef>
+              <a:buChar char="▸"/>
+            </a:pPr>
+            <a:r>
+              <a:rPr lang="de-DE" sz="1150" b="1" dirty="0">
+                <a:solidFill>
+                  <a:srgbClr val="2A3A5E"/>
+                </a:solidFill>
+                <a:latin typeface="Calibri" pitchFamily="49" charset="0"/>
+              </a:rPr>
+              <a:t>?-Platzhalter</a:t>
+            </a:r>
+          </a:p>
+          <a:p>
+            <a:pPr marL="342900" indent="0" algn="l">
+              <a:buNone/>
+            </a:pPr>
+            <a:r>
+              <a:rPr lang="de-DE" sz="1000" dirty="0">
+                <a:solidFill>
+                  <a:srgbClr val="8892A4"/>
+                </a:solidFill>
+                <a:latin typeface="Calibri" pitchFamily="49" charset="0"/>
+              </a:rPr>
+              <a:t>Schutz vor SQL-Injection (OWASP Top 10)</a:t>
+            </a:r>
+          </a:p>
+          <a:p>
+            <a:pPr marL="342900" indent="-342900" algn="l">
+              <a:spcBef>
+                <a:spcPts val="160"/>
+              </a:spcBef>
+              <a:buChar char="▸"/>
+            </a:pPr>
+            <a:r>
+              <a:rPr lang="de-DE" sz="1150" b="1" dirty="0">
+                <a:solidFill>
+                  <a:srgbClr val="2A3A5E"/>
+                </a:solidFill>
+                <a:latin typeface="Calibri" pitchFamily="49" charset="0"/>
+              </a:rPr>
+              <a:t>IntegrityError</a:t>
+            </a:r>
+          </a:p>
+          <a:p>
+            <a:pPr marL="342900" indent="0" algn="l">
+              <a:buNone/>
+            </a:pPr>
+            <a:r>
+              <a:rPr lang="de-DE" sz="1000" dirty="0">
+                <a:solidFill>
+                  <a:srgbClr val="8892A4"/>
+                </a:solidFill>
+                <a:latin typeface="Calibri" pitchFamily="49" charset="0"/>
+              </a:rPr>
+              <a:t>Doppelte Benutzernamen werden sauber abgefangen</a:t>
+            </a:r>
+          </a:p>
+        </p:txBody>
+      </p:sp>
+    </p:spTree>
+  </p:cSld>
+  <p:clrMapOvr>
+    <a:masterClrMapping/>
+  </p:clrMapOvr>
+</p:sld>
+</file>
+
+<file path=ppt/slides/slide11.xml><?xml version="1.0" encoding="utf-8"?>
+<p:sld xmlns:a="http://schemas.openxmlformats.org/drawingml/2006/main" xmlns:p="http://schemas.openxmlformats.org/presentationml/2006/main" xmlns:r="http://schemas.openxmlformats.org/officeDocument/2006/relationships">
+  <p:cSld>
+    <p:bg>
+      <p:bgPr>
+        <a:solidFill>
+          <a:srgbClr val="0D0D1A"/>
+        </a:solidFill>
+        <a:effectLst/>
+      </p:bgPr>
+    </p:bg>
+    <p:spTree>
+      <p:nvGrpSpPr>
+        <p:cNvPr id="1" name=""/>
+        <p:cNvGrpSpPr/>
+        <p:nvPr/>
+      </p:nvGrpSpPr>
+      <p:grpSpPr/>
+      <p:sp>
+        <p:nvSpPr>
+          <p:cNvPr id="2" name="AccentStripe"/>
+          <p:cNvSpPr/>
+          <p:nvPr/>
+        </p:nvSpPr>
+        <p:spPr>
+          <a:xfrm>
+            <a:off x="0" y="0"/>
+            <a:ext cx="91440" cy="5143500"/>
+          </a:xfrm>
+          <a:prstGeom prst="rect">
+            <a:avLst/>
+          </a:prstGeom>
+          <a:solidFill>
+            <a:srgbClr val="E94560"/>
+          </a:solidFill>
+        </p:spPr>
+      </p:sp>
+      <p:sp>
+        <p:nvSpPr>
+          <p:cNvPr id="3" name="Title"/>
+          <p:cNvSpPr/>
+          <p:nvPr/>
+        </p:nvSpPr>
+        <p:spPr>
+          <a:xfrm>
+            <a:off x="457200" y="256032"/>
+            <a:ext cx="8229600" cy="594360"/>
+          </a:xfrm>
+          <a:prstGeom prst="rect">
+            <a:avLst/>
+          </a:prstGeom>
+          <a:noFill/>
+          <a:ln/>
+        </p:spPr>
+        <p:txBody>
+          <a:bodyPr wrap="square" lIns="114300" tIns="91440" rIns="114300" bIns="91440" rtlCol="0" anchor="ctr"/>
+          <a:lstStyle/>
+          <a:p>
+            <a:pPr marL="0" indent="0" algn="l">
+              <a:buNone/>
+            </a:pPr>
+            <a:r>
+              <a:rPr lang="de-DE" sz="3000" b="1" dirty="0">
+                <a:solidFill>
+                  <a:srgbClr val="FFFFFF"/>
+                </a:solidFill>
+                <a:latin typeface="Arial Black" pitchFamily="49" charset="0"/>
+              </a:rPr>
+              <a:t>auth.py – SHA-256 + Salt</a:t>
+            </a:r>
+          </a:p>
+        </p:txBody>
+      </p:sp>
+      <p:sp>
+        <p:nvSpPr>
+          <p:cNvPr id="4" name="Subtitle"/>
+          <p:cNvSpPr/>
+          <p:nvPr/>
+        </p:nvSpPr>
+        <p:spPr>
+          <a:xfrm>
+            <a:off x="457200" y="804672"/>
+            <a:ext cx="8229600" cy="320040"/>
+          </a:xfrm>
+          <a:prstGeom prst="rect">
+            <a:avLst/>
+          </a:prstGeom>
+          <a:noFill/>
+          <a:ln/>
+        </p:spPr>
+        <p:txBody>
+          <a:bodyPr wrap="square" lIns="114300" tIns="91440" rIns="114300" bIns="91440" rtlCol="0" anchor="ctr"/>
+          <a:lstStyle/>
+          <a:p>
+            <a:pPr marL="0" indent="0" algn="l">
+              <a:buNone/>
+            </a:pPr>
+            <a:r>
+              <a:rPr lang="de-DE" sz="1200" dirty="0">
+                <a:solidFill>
+                  <a:srgbClr val="8892A4"/>
+                </a:solidFill>
+                <a:latin typeface="Calibri" pitchFamily="49" charset="0"/>
+              </a:rPr>
+              <a:t>Sichere Passwortspeicherung ohne Klartext</a:t>
+            </a:r>
+          </a:p>
+        </p:txBody>
+      </p:sp>
+      <p:sp>
+        <p:nvSpPr>
+          <p:cNvPr id="5" name="CodeCard"/>
+          <p:cNvSpPr/>
+          <p:nvPr/>
+        </p:nvSpPr>
+        <p:spPr>
+          <a:xfrm>
+            <a:off x="365760" y="1234440"/>
+            <a:ext cx="5250000" cy="3650000"/>
+          </a:xfrm>
+          <a:prstGeom prst="rect">
+            <a:avLst/>
+          </a:prstGeom>
+          <a:solidFill>
+            <a:srgbClr val="121224"/>
+          </a:solidFill>
+          <a:ln w="9525">
+            <a:solidFill>
+              <a:srgbClr val="4472C4"/>
+            </a:solidFill>
+            <a:prstDash val="solid"/>
+          </a:ln>
+        </p:spPr>
+      </p:sp>
+      <p:sp>
+        <p:nvSpPr>
+          <p:cNvPr id="6" name="CodeText"/>
+          <p:cNvSpPr/>
+          <p:nvPr/>
+        </p:nvSpPr>
+        <p:spPr>
+          <a:xfrm>
+            <a:off x="457200" y="1325880"/>
+            <a:ext cx="5067120" cy="3467120"/>
+          </a:xfrm>
+          <a:prstGeom prst="rect">
+            <a:avLst/>
+          </a:prstGeom>
+          <a:noFill/>
+          <a:ln/>
+        </p:spPr>
+        <p:txBody>
+          <a:bodyPr wrap="square" lIns="114300" tIns="91440" rIns="114300" bIns="91440" rtlCol="0" anchor="t"/>
+          <a:lstStyle/>
+          <a:p>
+            <a:pPr marL="0" indent="0" algn="l">
+              <a:buNone/>
+            </a:pPr>
+            <a:r>
+              <a:rPr lang="de-DE" sz="980" dirty="0">
+                <a:solidFill>
+                  <a:srgbClr val="56B6C2"/>
+                </a:solidFill>
+                <a:latin typeface="Consolas" pitchFamily="49" charset="0"/>
+              </a:rPr>
+              <a:t>import</a:t>
+            </a:r>
+            <a:r>
+              <a:rPr lang="de-DE" sz="980" dirty="0">
+                <a:solidFill>
+                  <a:srgbClr val="ABB2BF"/>
+                </a:solidFill>
+                <a:latin typeface="Consolas" pitchFamily="49" charset="0"/>
+              </a:rPr>
+              <a:t> hashlib, os</a:t>
+            </a:r>
+          </a:p>
+          <a:p>
+            <a:pPr>
+              <a:buNone/>
+            </a:pPr>
+            <a:endParaRPr lang="de-DE" sz="600" dirty="0"/>
+          </a:p>
+          <a:p>
+            <a:pPr marL="0" indent="0" algn="l">
+              <a:buNone/>
+            </a:pPr>
+            <a:r>
+              <a:rPr lang="de-DE" sz="980" dirty="0">
+                <a:solidFill>
+                  <a:srgbClr val="56B6C2"/>
+                </a:solidFill>
+                <a:latin typeface="Consolas" pitchFamily="49" charset="0"/>
+              </a:rPr>
+              <a:t>def</a:t>
+            </a:r>
+            <a:r>
+              <a:rPr lang="de-DE" sz="980" dirty="0">
+                <a:solidFill>
+                  <a:srgbClr val="ABB2BF"/>
+                </a:solidFill>
+                <a:latin typeface="Consolas" pitchFamily="49" charset="0"/>
+              </a:rPr>
+              <a:t> </a:t>
+            </a:r>
+            <a:r>
+              <a:rPr lang="de-DE" sz="980" dirty="0">
+                <a:solidFill>
+                  <a:srgbClr val="61AFEF"/>
+                </a:solidFill>
+                <a:latin typeface="Consolas" pitchFamily="49" charset="0"/>
+              </a:rPr>
+              <a:t>hash_password</a:t>
+            </a:r>
+            <a:r>
+              <a:rPr lang="de-DE" sz="980" dirty="0">
+                <a:solidFill>
+                  <a:srgbClr val="ABB2BF"/>
+                </a:solidFill>
+                <a:latin typeface="Consolas" pitchFamily="49" charset="0"/>
+              </a:rPr>
+              <a:t>(password):</a:t>
+            </a:r>
+          </a:p>
+          <a:p>
+            <a:pPr marL="0" indent="0" algn="l">
+              <a:buNone/>
+            </a:pPr>
+            <a:r>
+              <a:rPr lang="de-DE" sz="980" i="1" dirty="0">
+                <a:solidFill>
+                  <a:srgbClr val="5C6370"/>
+                </a:solidFill>
+                <a:latin typeface="Consolas" pitchFamily="49" charset="0"/>
+              </a:rPr>
+              <a:t>    # 16 zufällige Bytes → Rainbow-Tables nutzlos</a:t>
+            </a:r>
+          </a:p>
+          <a:p>
+            <a:pPr marL="0" indent="0" algn="l">
+              <a:buNone/>
+            </a:pPr>
+            <a:r>
+              <a:rPr lang="de-DE" sz="980" dirty="0">
+                <a:solidFill>
+                  <a:srgbClr val="ABB2BF"/>
+                </a:solidFill>
+                <a:latin typeface="Consolas" pitchFamily="49" charset="0"/>
+              </a:rPr>
+              <a:t>    salt = os.</a:t>
+            </a:r>
+            <a:r>
+              <a:rPr lang="de-DE" sz="980" dirty="0">
+                <a:solidFill>
+                  <a:srgbClr val="61AFEF"/>
+                </a:solidFill>
+                <a:latin typeface="Consolas" pitchFamily="49" charset="0"/>
+              </a:rPr>
+              <a:t>urandom</a:t>
+            </a:r>
+            <a:r>
+              <a:rPr lang="de-DE" sz="980" dirty="0">
+                <a:solidFill>
+                  <a:srgbClr val="ABB2BF"/>
+                </a:solidFill>
+                <a:latin typeface="Consolas" pitchFamily="49" charset="0"/>
+              </a:rPr>
+              <a:t>(</a:t>
+            </a:r>
+            <a:r>
+              <a:rPr lang="de-DE" sz="980" dirty="0">
+                <a:solidFill>
+                  <a:srgbClr val="98C379"/>
+                </a:solidFill>
+                <a:latin typeface="Consolas" pitchFamily="49" charset="0"/>
+              </a:rPr>
+              <a:t>16</a:t>
+            </a:r>
+            <a:r>
+              <a:rPr lang="de-DE" sz="980" dirty="0">
+                <a:solidFill>
+                  <a:srgbClr val="ABB2BF"/>
+                </a:solidFill>
+                <a:latin typeface="Consolas" pitchFamily="49" charset="0"/>
+              </a:rPr>
+              <a:t>).</a:t>
+            </a:r>
+            <a:r>
+              <a:rPr lang="de-DE" sz="980" dirty="0">
+                <a:solidFill>
+                  <a:srgbClr val="61AFEF"/>
+                </a:solidFill>
+                <a:latin typeface="Consolas" pitchFamily="49" charset="0"/>
+              </a:rPr>
+              <a:t>hex</a:t>
+            </a:r>
+            <a:r>
+              <a:rPr lang="de-DE" sz="980" dirty="0">
+                <a:solidFill>
+                  <a:srgbClr val="ABB2BF"/>
+                </a:solidFill>
+                <a:latin typeface="Consolas" pitchFamily="49" charset="0"/>
+              </a:rPr>
+              <a:t>()</a:t>
+            </a:r>
+          </a:p>
+          <a:p>
+            <a:pPr marL="0" indent="0" algn="l">
+              <a:buNone/>
+            </a:pPr>
+            <a:r>
+              <a:rPr lang="de-DE" sz="980" dirty="0">
+                <a:solidFill>
+                  <a:srgbClr val="ABB2BF"/>
+                </a:solidFill>
+                <a:latin typeface="Consolas" pitchFamily="49" charset="0"/>
+              </a:rPr>
+              <a:t>    pw_hash = hashlib.</a:t>
+            </a:r>
+            <a:r>
+              <a:rPr lang="de-DE" sz="980" dirty="0">
+                <a:solidFill>
+                  <a:srgbClr val="61AFEF"/>
+                </a:solidFill>
+                <a:latin typeface="Consolas" pitchFamily="49" charset="0"/>
+              </a:rPr>
+              <a:t>sha256</a:t>
+            </a:r>
+            <a:r>
+              <a:rPr lang="de-DE" sz="980" dirty="0">
+                <a:solidFill>
+                  <a:srgbClr val="ABB2BF"/>
+                </a:solidFill>
+                <a:latin typeface="Consolas" pitchFamily="49" charset="0"/>
+              </a:rPr>
+              <a:t>(</a:t>
+            </a:r>
+          </a:p>
+          <a:p>
+            <a:pPr marL="0" indent="0" algn="l">
+              <a:buNone/>
+            </a:pPr>
+            <a:r>
+              <a:rPr lang="de-DE" sz="980" dirty="0">
+                <a:solidFill>
+                  <a:srgbClr val="ABB2BF"/>
+                </a:solidFill>
+                <a:latin typeface="Consolas" pitchFamily="49" charset="0"/>
+              </a:rPr>
+              <a:t>        (salt + password).</a:t>
+            </a:r>
+            <a:r>
+              <a:rPr lang="de-DE" sz="980" dirty="0">
+                <a:solidFill>
+                  <a:srgbClr val="61AFEF"/>
+                </a:solidFill>
+                <a:latin typeface="Consolas" pitchFamily="49" charset="0"/>
+              </a:rPr>
+              <a:t>encode</a:t>
+            </a:r>
+            <a:r>
+              <a:rPr lang="de-DE" sz="980" dirty="0">
+                <a:solidFill>
+                  <a:srgbClr val="ABB2BF"/>
+                </a:solidFill>
+                <a:latin typeface="Consolas" pitchFamily="49" charset="0"/>
+              </a:rPr>
+              <a:t>()</a:t>
+            </a:r>
+          </a:p>
+          <a:p>
+            <a:pPr marL="0" indent="0" algn="l">
+              <a:buNone/>
+            </a:pPr>
+            <a:r>
+              <a:rPr lang="de-DE" sz="980" dirty="0">
+                <a:solidFill>
+                  <a:srgbClr val="ABB2BF"/>
+                </a:solidFill>
+                <a:latin typeface="Consolas" pitchFamily="49" charset="0"/>
+              </a:rPr>
+              <a:t>    ).</a:t>
+            </a:r>
+            <a:r>
+              <a:rPr lang="de-DE" sz="980" dirty="0">
+                <a:solidFill>
+                  <a:srgbClr val="61AFEF"/>
+                </a:solidFill>
+                <a:latin typeface="Consolas" pitchFamily="49" charset="0"/>
+              </a:rPr>
+              <a:t>hexdigest</a:t>
+            </a:r>
+            <a:r>
+              <a:rPr lang="de-DE" sz="980" dirty="0">
+                <a:solidFill>
+                  <a:srgbClr val="ABB2BF"/>
+                </a:solidFill>
+                <a:latin typeface="Consolas" pitchFamily="49" charset="0"/>
+              </a:rPr>
+              <a:t>()</a:t>
+            </a:r>
+          </a:p>
+          <a:p>
+            <a:pPr marL="0" indent="0" algn="l">
+              <a:buNone/>
+            </a:pPr>
+            <a:r>
+              <a:rPr lang="de-DE" sz="980" dirty="0">
+                <a:solidFill>
+                  <a:srgbClr val="56B6C2"/>
+                </a:solidFill>
+                <a:latin typeface="Consolas" pitchFamily="49" charset="0"/>
+              </a:rPr>
+              <a:t>    return</a:t>
+            </a:r>
+            <a:r>
+              <a:rPr lang="de-DE" sz="980" dirty="0">
+                <a:solidFill>
+                  <a:srgbClr val="ABB2BF"/>
+                </a:solidFill>
+                <a:latin typeface="Consolas" pitchFamily="49" charset="0"/>
+              </a:rPr>
+              <a:t> </a:t>
+            </a:r>
+            <a:r>
+              <a:rPr lang="de-DE" sz="980" dirty="0">
+                <a:solidFill>
+                  <a:srgbClr val="61AFEF"/>
+                </a:solidFill>
+                <a:latin typeface="Consolas" pitchFamily="49" charset="0"/>
+              </a:rPr>
+              <a:t>f</a:t>
+            </a:r>
+            <a:r>
+              <a:rPr lang="de-DE" sz="980" dirty="0">
+                <a:solidFill>
+                  <a:srgbClr val="98C379"/>
+                </a:solidFill>
+                <a:latin typeface="Consolas" pitchFamily="49" charset="0"/>
+              </a:rPr>
+              <a:t>"{salt}:{pw_hash}"</a:t>
+            </a:r>
+            <a:r>
+              <a:rPr lang="de-DE" sz="980" i="1" dirty="0">
+                <a:solidFill>
+                  <a:srgbClr val="5C6370"/>
+                </a:solidFill>
+                <a:latin typeface="Consolas" pitchFamily="49" charset="0"/>
+              </a:rPr>
+              <a:t>  # zusammen gespeichert</a:t>
+            </a:r>
+          </a:p>
+          <a:p>
+            <a:pPr>
+              <a:buNone/>
+            </a:pPr>
+            <a:endParaRPr lang="de-DE" sz="600" dirty="0"/>
+          </a:p>
+          <a:p>
+            <a:pPr marL="0" indent="0" algn="l">
+              <a:buNone/>
+            </a:pPr>
+            <a:r>
+              <a:rPr lang="de-DE" sz="980" dirty="0">
+                <a:solidFill>
+                  <a:srgbClr val="56B6C2"/>
+                </a:solidFill>
+                <a:latin typeface="Consolas" pitchFamily="49" charset="0"/>
+              </a:rPr>
+              <a:t>def</a:t>
+            </a:r>
+            <a:r>
+              <a:rPr lang="de-DE" sz="980" dirty="0">
+                <a:solidFill>
+                  <a:srgbClr val="ABB2BF"/>
+                </a:solidFill>
+                <a:latin typeface="Consolas" pitchFamily="49" charset="0"/>
+              </a:rPr>
+              <a:t> </a:t>
+            </a:r>
+            <a:r>
+              <a:rPr lang="de-DE" sz="980" dirty="0">
+                <a:solidFill>
+                  <a:srgbClr val="61AFEF"/>
+                </a:solidFill>
+                <a:latin typeface="Consolas" pitchFamily="49" charset="0"/>
+              </a:rPr>
+              <a:t>verify_password</a:t>
+            </a:r>
+            <a:r>
+              <a:rPr lang="de-DE" sz="980" dirty="0">
+                <a:solidFill>
+                  <a:srgbClr val="ABB2BF"/>
+                </a:solidFill>
+                <a:latin typeface="Consolas" pitchFamily="49" charset="0"/>
+              </a:rPr>
+              <a:t>(password, stored_hash):</a:t>
+            </a:r>
+          </a:p>
+          <a:p>
+            <a:pPr marL="0" indent="0" algn="l">
+              <a:buNone/>
+            </a:pPr>
+            <a:r>
+              <a:rPr lang="de-DE" sz="980" dirty="0">
+                <a:solidFill>
+                  <a:srgbClr val="ABB2BF"/>
+                </a:solidFill>
+                <a:latin typeface="Consolas" pitchFamily="49" charset="0"/>
+              </a:rPr>
+              <a:t>    salt, pw_hash = stored_hash.</a:t>
+            </a:r>
+            <a:r>
+              <a:rPr lang="de-DE" sz="980" dirty="0">
+                <a:solidFill>
+                  <a:srgbClr val="61AFEF"/>
+                </a:solidFill>
+                <a:latin typeface="Consolas" pitchFamily="49" charset="0"/>
+              </a:rPr>
+              <a:t>split</a:t>
+            </a:r>
+            <a:r>
+              <a:rPr lang="de-DE" sz="980" dirty="0">
+                <a:solidFill>
+                  <a:srgbClr val="ABB2BF"/>
+                </a:solidFill>
+                <a:latin typeface="Consolas" pitchFamily="49" charset="0"/>
+              </a:rPr>
+              <a:t>(</a:t>
+            </a:r>
+            <a:r>
+              <a:rPr lang="de-DE" sz="980" dirty="0">
+                <a:solidFill>
+                  <a:srgbClr val="98C379"/>
+                </a:solidFill>
+                <a:latin typeface="Consolas" pitchFamily="49" charset="0"/>
+              </a:rPr>
+              <a:t>":"</a:t>
+            </a:r>
+            <a:r>
+              <a:rPr lang="de-DE" sz="980" dirty="0">
+                <a:solidFill>
+                  <a:srgbClr val="ABB2BF"/>
+                </a:solidFill>
+                <a:latin typeface="Consolas" pitchFamily="49" charset="0"/>
+              </a:rPr>
+              <a:t>)</a:t>
+            </a:r>
+          </a:p>
+          <a:p>
+            <a:pPr marL="0" indent="0" algn="l">
+              <a:buNone/>
+            </a:pPr>
+            <a:r>
+              <a:rPr lang="de-DE" sz="980" dirty="0">
+                <a:solidFill>
+                  <a:srgbClr val="ABB2BF"/>
+                </a:solidFill>
+                <a:latin typeface="Consolas" pitchFamily="49" charset="0"/>
+              </a:rPr>
+              <a:t>    check = hashlib.</a:t>
+            </a:r>
+            <a:r>
+              <a:rPr lang="de-DE" sz="980" dirty="0">
+                <a:solidFill>
+                  <a:srgbClr val="61AFEF"/>
+                </a:solidFill>
+                <a:latin typeface="Consolas" pitchFamily="49" charset="0"/>
+              </a:rPr>
+              <a:t>sha256</a:t>
+            </a:r>
+            <a:r>
+              <a:rPr lang="de-DE" sz="980" dirty="0">
+                <a:solidFill>
+                  <a:srgbClr val="ABB2BF"/>
+                </a:solidFill>
+                <a:latin typeface="Consolas" pitchFamily="49" charset="0"/>
+              </a:rPr>
+              <a:t>(</a:t>
+            </a:r>
+          </a:p>
+          <a:p>
+            <a:pPr marL="0" indent="0" algn="l">
+              <a:buNone/>
+            </a:pPr>
+            <a:r>
+              <a:rPr lang="de-DE" sz="980" dirty="0">
+                <a:solidFill>
+                  <a:srgbClr val="ABB2BF"/>
+                </a:solidFill>
+                <a:latin typeface="Consolas" pitchFamily="49" charset="0"/>
+              </a:rPr>
+              <a:t>        (salt + password).</a:t>
+            </a:r>
+            <a:r>
+              <a:rPr lang="de-DE" sz="980" dirty="0">
+                <a:solidFill>
+                  <a:srgbClr val="61AFEF"/>
+                </a:solidFill>
+                <a:latin typeface="Consolas" pitchFamily="49" charset="0"/>
+              </a:rPr>
+              <a:t>encode</a:t>
+            </a:r>
+            <a:r>
+              <a:rPr lang="de-DE" sz="980" dirty="0">
+                <a:solidFill>
+                  <a:srgbClr val="ABB2BF"/>
+                </a:solidFill>
+                <a:latin typeface="Consolas" pitchFamily="49" charset="0"/>
+              </a:rPr>
+              <a:t>()</a:t>
+            </a:r>
+          </a:p>
+          <a:p>
+            <a:pPr marL="0" indent="0" algn="l">
+              <a:buNone/>
+            </a:pPr>
+            <a:r>
+              <a:rPr lang="de-DE" sz="980" dirty="0">
+                <a:solidFill>
+                  <a:srgbClr val="ABB2BF"/>
+                </a:solidFill>
+                <a:latin typeface="Consolas" pitchFamily="49" charset="0"/>
+              </a:rPr>
+              <a:t>    ).</a:t>
+            </a:r>
+            <a:r>
+              <a:rPr lang="de-DE" sz="980" dirty="0">
+                <a:solidFill>
+                  <a:srgbClr val="61AFEF"/>
+                </a:solidFill>
+                <a:latin typeface="Consolas" pitchFamily="49" charset="0"/>
+              </a:rPr>
+              <a:t>hexdigest</a:t>
+            </a:r>
+            <a:r>
+              <a:rPr lang="de-DE" sz="980" dirty="0">
+                <a:solidFill>
+                  <a:srgbClr val="ABB2BF"/>
+                </a:solidFill>
+                <a:latin typeface="Consolas" pitchFamily="49" charset="0"/>
+              </a:rPr>
+              <a:t>()</a:t>
+            </a:r>
+          </a:p>
+          <a:p>
+            <a:pPr marL="0" indent="0" algn="l">
+              <a:buNone/>
+            </a:pPr>
+            <a:r>
+              <a:rPr lang="de-DE" sz="980" dirty="0">
+                <a:solidFill>
+                  <a:srgbClr val="56B6C2"/>
+                </a:solidFill>
+                <a:latin typeface="Consolas" pitchFamily="49" charset="0"/>
+              </a:rPr>
+              <a:t>    return</a:t>
+            </a:r>
+            <a:r>
+              <a:rPr lang="de-DE" sz="980" dirty="0">
+                <a:solidFill>
+                  <a:srgbClr val="ABB2BF"/>
+                </a:solidFill>
+                <a:latin typeface="Consolas" pitchFamily="49" charset="0"/>
+              </a:rPr>
+              <a:t> check == pw_hash</a:t>
+            </a:r>
+          </a:p>
+          <a:p>
+            <a:pPr>
+              <a:buNone/>
+            </a:pPr>
+            <a:endParaRPr lang="de-DE" sz="600" dirty="0"/>
+          </a:p>
+          <a:p>
+            <a:pPr marL="0" indent="0" algn="l">
+              <a:buNone/>
+            </a:pPr>
+            <a:r>
+              <a:rPr lang="de-DE" sz="980" i="1" dirty="0">
+                <a:solidFill>
+                  <a:srgbClr val="5C6370"/>
+                </a:solidFill>
+                <a:latin typeface="Consolas" pitchFamily="49" charset="0"/>
+              </a:rPr>
+              <a:t># Session-Persistenz: Auto-Login beim nächsten Start</a:t>
+            </a:r>
+          </a:p>
+          <a:p>
+            <a:pPr marL="0" indent="0" algn="l">
+              <a:buNone/>
+            </a:pPr>
+            <a:r>
+              <a:rPr lang="de-DE" sz="980" dirty="0">
+                <a:solidFill>
+                  <a:srgbClr val="56B6C2"/>
+                </a:solidFill>
+                <a:latin typeface="Consolas" pitchFamily="49" charset="0"/>
+              </a:rPr>
+              <a:t>def</a:t>
+            </a:r>
+            <a:r>
+              <a:rPr lang="de-DE" sz="980" dirty="0">
+                <a:solidFill>
+                  <a:srgbClr val="ABB2BF"/>
+                </a:solidFill>
+                <a:latin typeface="Consolas" pitchFamily="49" charset="0"/>
+              </a:rPr>
+              <a:t> </a:t>
+            </a:r>
+            <a:r>
+              <a:rPr lang="de-DE" sz="980" dirty="0">
+                <a:solidFill>
+                  <a:srgbClr val="61AFEF"/>
+                </a:solidFill>
+                <a:latin typeface="Consolas" pitchFamily="49" charset="0"/>
+              </a:rPr>
+              <a:t>save_session</a:t>
+            </a:r>
+            <a:r>
+              <a:rPr lang="de-DE" sz="980" dirty="0">
+                <a:solidFill>
+                  <a:srgbClr val="ABB2BF"/>
+                </a:solidFill>
+                <a:latin typeface="Consolas" pitchFamily="49" charset="0"/>
+              </a:rPr>
+              <a:t>(user_id):</a:t>
+            </a:r>
+          </a:p>
+          <a:p>
+            <a:pPr marL="0" indent="0" algn="l">
+              <a:buNone/>
+            </a:pPr>
+            <a:r>
+              <a:rPr lang="de-DE" sz="980" dirty="0">
+                <a:solidFill>
+                  <a:srgbClr val="ABB2BF"/>
+                </a:solidFill>
+                <a:latin typeface="Consolas" pitchFamily="49" charset="0"/>
+              </a:rPr>
+              <a:t>    json.</a:t>
+            </a:r>
+            <a:r>
+              <a:rPr lang="de-DE" sz="980" dirty="0">
+                <a:solidFill>
+                  <a:srgbClr val="61AFEF"/>
+                </a:solidFill>
+                <a:latin typeface="Consolas" pitchFamily="49" charset="0"/>
+              </a:rPr>
+              <a:t>dump</a:t>
+            </a:r>
+            <a:r>
+              <a:rPr lang="de-DE" sz="980" dirty="0">
+                <a:solidFill>
+                  <a:srgbClr val="ABB2BF"/>
+                </a:solidFill>
+                <a:latin typeface="Consolas" pitchFamily="49" charset="0"/>
+              </a:rPr>
+              <a:t>({</a:t>
+            </a:r>
+            <a:r>
+              <a:rPr lang="de-DE" sz="980" dirty="0">
+                <a:solidFill>
+                  <a:srgbClr val="98C379"/>
+                </a:solidFill>
+                <a:latin typeface="Consolas" pitchFamily="49" charset="0"/>
+              </a:rPr>
+              <a:t>"user_id"</a:t>
+            </a:r>
+            <a:r>
+              <a:rPr lang="de-DE" sz="980" dirty="0">
+                <a:solidFill>
+                  <a:srgbClr val="ABB2BF"/>
+                </a:solidFill>
+                <a:latin typeface="Consolas" pitchFamily="49" charset="0"/>
+              </a:rPr>
+              <a:t>: user_id}, f)</a:t>
+            </a:r>
+          </a:p>
+        </p:txBody>
+      </p:sp>
+      <p:sp>
+        <p:nvSpPr>
+          <p:cNvPr id="7" name="BulletCard"/>
+          <p:cNvSpPr/>
+          <p:nvPr/>
+        </p:nvSpPr>
+        <p:spPr>
+          <a:xfrm>
+            <a:off x="5707200" y="1234440"/>
+            <a:ext cx="3071040" cy="3650000"/>
+          </a:xfrm>
+          <a:prstGeom prst="rect">
+            <a:avLst/>
+          </a:prstGeom>
+          <a:solidFill>
+            <a:srgbClr val="1E2A4A"/>
+          </a:solidFill>
+          <a:ln w="6350">
+            <a:solidFill>
+              <a:srgbClr val="2A3A5E"/>
+            </a:solidFill>
+            <a:prstDash val="solid"/>
+          </a:ln>
+        </p:spPr>
+      </p:sp>
+      <p:sp>
+        <p:nvSpPr>
+          <p:cNvPr id="8" name="BulletText"/>
+          <p:cNvSpPr/>
+          <p:nvPr/>
+        </p:nvSpPr>
+        <p:spPr>
+          <a:xfrm>
+            <a:off x="5798640" y="1325880"/>
+            <a:ext cx="2888160" cy="3467120"/>
+          </a:xfrm>
+          <a:prstGeom prst="rect">
+            <a:avLst/>
+          </a:prstGeom>
+          <a:noFill/>
+          <a:ln/>
+        </p:spPr>
+        <p:txBody>
+          <a:bodyPr wrap="square" lIns="114300" tIns="91440" rIns="114300" bIns="91440" rtlCol="0" anchor="t"/>
+          <a:lstStyle/>
+          <a:p>
+            <a:pPr marL="342900" indent="-342900" algn="l">
+              <a:buChar char="▸"/>
+            </a:pPr>
+            <a:r>
+              <a:rPr lang="de-DE" sz="1150" b="1" dirty="0">
+                <a:solidFill>
+                  <a:srgbClr val="B0C4DE"/>
+                </a:solidFill>
+                <a:latin typeface="Calibri" pitchFamily="49" charset="0"/>
+              </a:rPr>
+              <a:t>Kein Klartext</a:t>
+            </a:r>
+          </a:p>
+          <a:p>
+            <a:pPr marL="342900" indent="0" algn="l">
+              <a:buNone/>
+            </a:pPr>
+            <a:r>
+              <a:rPr lang="de-DE" sz="1000" dirty="0">
+                <a:solidFill>
+                  <a:srgbClr val="8892A4"/>
+                </a:solidFill>
+                <a:latin typeface="Calibri" pitchFamily="49" charset="0"/>
+              </a:rPr>
+              <a:t>Nur "salt:hash" wird in der Datenbank gespeichert</a:t>
+            </a:r>
+          </a:p>
+          <a:p>
+            <a:pPr marL="342900" indent="-342900" algn="l">
+              <a:spcBef>
+                <a:spcPts val="160"/>
+              </a:spcBef>
+              <a:buChar char="▸"/>
+            </a:pPr>
+            <a:r>
+              <a:rPr lang="de-DE" sz="1150" b="1" dirty="0">
+                <a:solidFill>
+                  <a:srgbClr val="B0C4DE"/>
+                </a:solidFill>
+                <a:latin typeface="Calibri" pitchFamily="49" charset="0"/>
+              </a:rPr>
+              <a:t>os.urandom(16)</a:t>
+            </a:r>
+          </a:p>
+          <a:p>
+            <a:pPr marL="342900" indent="0" algn="l">
+              <a:buNone/>
+            </a:pPr>
+            <a:r>
+              <a:rPr lang="de-DE" sz="1000" dirty="0">
+                <a:solidFill>
+                  <a:srgbClr val="8892A4"/>
+                </a:solidFill>
+                <a:latin typeface="Calibri" pitchFamily="49" charset="0"/>
+              </a:rPr>
+              <a:t>16 kryptografisch zufällige Bytes als Salt</a:t>
+            </a:r>
+          </a:p>
+          <a:p>
+            <a:pPr marL="342900" indent="-342900" algn="l">
+              <a:spcBef>
+                <a:spcPts val="160"/>
+              </a:spcBef>
+              <a:buChar char="▸"/>
+            </a:pPr>
+            <a:r>
+              <a:rPr lang="de-DE" sz="1150" b="1" dirty="0">
+                <a:solidFill>
+                  <a:srgbClr val="B0C4DE"/>
+                </a:solidFill>
+                <a:latin typeface="Calibri" pitchFamily="49" charset="0"/>
+              </a:rPr>
+              <a:t>Rainbow-Tables</a:t>
+            </a:r>
+          </a:p>
+          <a:p>
+            <a:pPr marL="342900" indent="0" algn="l">
+              <a:buNone/>
+            </a:pPr>
+            <a:r>
+              <a:rPr lang="de-DE" sz="1000" dirty="0">
+                <a:solidFill>
+                  <a:srgbClr val="8892A4"/>
+                </a:solidFill>
+                <a:latin typeface="Calibri" pitchFamily="49" charset="0"/>
+              </a:rPr>
+              <a:t>Gleiche Passwörter → verschiedene Hashes durch Salt</a:t>
+            </a:r>
+          </a:p>
+          <a:p>
+            <a:pPr marL="342900" indent="-342900" algn="l">
+              <a:spcBef>
+                <a:spcPts val="160"/>
+              </a:spcBef>
+              <a:buChar char="▸"/>
+            </a:pPr>
+            <a:r>
+              <a:rPr lang="de-DE" sz="1150" b="1" dirty="0">
+                <a:solidFill>
+                  <a:srgbClr val="B0C4DE"/>
+                </a:solidFill>
+                <a:latin typeface="Calibri" pitchFamily="49" charset="0"/>
+              </a:rPr>
+              <a:t>SHA-256</a:t>
+            </a:r>
+          </a:p>
+          <a:p>
+            <a:pPr marL="342900" indent="0" algn="l">
+              <a:buNone/>
+            </a:pPr>
+            <a:r>
+              <a:rPr lang="de-DE" sz="1000" dirty="0">
+                <a:solidFill>
+                  <a:srgbClr val="8892A4"/>
+                </a:solidFill>
+                <a:latin typeface="Calibri" pitchFamily="49" charset="0"/>
+              </a:rPr>
+              <a:t>Einwegfunktion – Hash kann nicht zurückgerechnet werden</a:t>
+            </a:r>
+          </a:p>
+          <a:p>
+            <a:pPr marL="342900" indent="-342900" algn="l">
+              <a:spcBef>
+                <a:spcPts val="160"/>
+              </a:spcBef>
+              <a:buChar char="▸"/>
+            </a:pPr>
+            <a:r>
+              <a:rPr lang="de-DE" sz="1150" b="1" dirty="0">
+                <a:solidFill>
+                  <a:srgbClr val="B0C4DE"/>
+                </a:solidFill>
+                <a:latin typeface="Calibri" pitchFamily="49" charset="0"/>
+              </a:rPr>
+              <a:t>Session-JSON</a:t>
+            </a:r>
+          </a:p>
+          <a:p>
+            <a:pPr marL="342900" indent="0" algn="l">
+              <a:buNone/>
+            </a:pPr>
+            <a:r>
+              <a:rPr lang="de-DE" sz="1000" dirty="0">
+                <a:solidFill>
+                  <a:srgbClr val="8892A4"/>
+                </a:solidFill>
+                <a:latin typeface="Calibri" pitchFamily="49" charset="0"/>
+              </a:rPr>
+              <a:t>user_id in session.json → Auto-Login ohne erneute Eingabe</a:t>
+            </a:r>
+          </a:p>
+        </p:txBody>
+      </p:sp>
+    </p:spTree>
+  </p:cSld>
+  <p:clrMapOvr>
+    <a:masterClrMapping/>
+  </p:clrMapOvr>
+</p:sld>
+</file>
+
+<file path=ppt/slides/slide12.xml><?xml version="1.0" encoding="utf-8"?>
+<p:sld xmlns:a="http://schemas.openxmlformats.org/drawingml/2006/main" xmlns:p="http://schemas.openxmlformats.org/presentationml/2006/main" xmlns:r="http://schemas.openxmlformats.org/officeDocument/2006/relationships">
+  <p:cSld>
+    <p:bg>
+      <p:bgPr>
+        <a:solidFill>
+          <a:srgbClr val="F0F4FF"/>
+        </a:solidFill>
+        <a:effectLst/>
+      </p:bgPr>
+    </p:bg>
+    <p:spTree>
+      <p:nvGrpSpPr>
+        <p:cNvPr id="1" name=""/>
+        <p:cNvGrpSpPr/>
+        <p:nvPr/>
+      </p:nvGrpSpPr>
+      <p:grpSpPr/>
+      <p:sp>
+        <p:nvSpPr>
+          <p:cNvPr id="2" name="AccentStripe"/>
+          <p:cNvSpPr/>
+          <p:nvPr/>
+        </p:nvSpPr>
+        <p:spPr>
+          <a:xfrm>
+            <a:off x="0" y="0"/>
+            <a:ext cx="91440" cy="5143500"/>
+          </a:xfrm>
+          <a:prstGeom prst="rect">
+            <a:avLst/>
+          </a:prstGeom>
+          <a:solidFill>
+            <a:srgbClr val="4472C4"/>
+          </a:solidFill>
+        </p:spPr>
+      </p:sp>
+      <p:sp>
+        <p:nvSpPr>
+          <p:cNvPr id="3" name="Title"/>
+          <p:cNvSpPr/>
+          <p:nvPr/>
+        </p:nvSpPr>
+        <p:spPr>
+          <a:xfrm>
+            <a:off x="457200" y="256032"/>
+            <a:ext cx="8229600" cy="594360"/>
+          </a:xfrm>
+          <a:prstGeom prst="rect">
+            <a:avLst/>
+          </a:prstGeom>
+          <a:noFill/>
+          <a:ln/>
+        </p:spPr>
+        <p:txBody>
+          <a:bodyPr wrap="square" lIns="114300" tIns="91440" rIns="114300" bIns="91440" rtlCol="0" anchor="ctr"/>
+          <a:lstStyle/>
+          <a:p>
+            <a:pPr marL="0" indent="0" algn="l">
+              <a:buNone/>
+            </a:pPr>
+            <a:r>
+              <a:rPr lang="de-DE" sz="3000" b="1" dirty="0">
+                <a:solidFill>
+                  <a:srgbClr val="1A1A2E"/>
+                </a:solidFill>
+                <a:latin typeface="Arial Black" pitchFamily="49" charset="0"/>
+              </a:rPr>
+              <a:t>minimax.py – Ein Algorithmus für alle Spiele</a:t>
+            </a:r>
+          </a:p>
+        </p:txBody>
+      </p:sp>
+      <p:sp>
+        <p:nvSpPr>
+          <p:cNvPr id="4" name="Subtitle"/>
+          <p:cNvSpPr/>
+          <p:nvPr/>
+        </p:nvSpPr>
+        <p:spPr>
+          <a:xfrm>
+            <a:off x="457200" y="804672"/>
+            <a:ext cx="8229600" cy="320040"/>
+          </a:xfrm>
+          <a:prstGeom prst="rect">
+            <a:avLst/>
+          </a:prstGeom>
+          <a:noFill/>
+          <a:ln/>
+        </p:spPr>
+        <p:txBody>
+          <a:bodyPr wrap="square" lIns="114300" tIns="91440" rIns="114300" bIns="91440" rtlCol="0" anchor="ctr"/>
+          <a:lstStyle/>
+          <a:p>
+            <a:pPr marL="0" indent="0" algn="l">
+              <a:buNone/>
+            </a:pPr>
+            <a:r>
+              <a:rPr lang="de-DE" sz="1200" dirty="0">
+                <a:solidFill>
+                  <a:srgbClr val="8892A4"/>
+                </a:solidFill>
+                <a:latin typeface="Calibri" pitchFamily="49" charset="0"/>
+              </a:rPr>
+              <a:t>Callback-basiertes Design · Alpha-Beta-Pruning</a:t>
+            </a:r>
+          </a:p>
+        </p:txBody>
+      </p:sp>
+      <p:sp>
+        <p:nvSpPr>
+          <p:cNvPr id="5" name="CodeCard"/>
+          <p:cNvSpPr/>
+          <p:nvPr/>
+        </p:nvSpPr>
+        <p:spPr>
+          <a:xfrm>
+            <a:off x="365760" y="1234440"/>
+            <a:ext cx="5250000" cy="3650000"/>
+          </a:xfrm>
+          <a:prstGeom prst="rect">
+            <a:avLst/>
+          </a:prstGeom>
+          <a:solidFill>
+            <a:srgbClr val="121224"/>
+          </a:solidFill>
+          <a:ln w="9525">
+            <a:solidFill>
+              <a:srgbClr val="4472C4"/>
+            </a:solidFill>
+            <a:prstDash val="solid"/>
+          </a:ln>
+        </p:spPr>
+      </p:sp>
+      <p:sp>
+        <p:nvSpPr>
+          <p:cNvPr id="6" name="CodeText"/>
+          <p:cNvSpPr/>
+          <p:nvPr/>
+        </p:nvSpPr>
+        <p:spPr>
+          <a:xfrm>
+            <a:off x="457200" y="1325880"/>
+            <a:ext cx="5067120" cy="3467120"/>
+          </a:xfrm>
+          <a:prstGeom prst="rect">
+            <a:avLst/>
+          </a:prstGeom>
+          <a:noFill/>
+          <a:ln/>
+        </p:spPr>
+        <p:txBody>
+          <a:bodyPr wrap="square" lIns="114300" tIns="91440" rIns="114300" bIns="91440" rtlCol="0" anchor="t"/>
+          <a:lstStyle/>
+          <a:p>
+            <a:pPr marL="0" indent="0" algn="l">
+              <a:buNone/>
+            </a:pPr>
+            <a:r>
+              <a:rPr lang="de-DE" sz="980" i="1" dirty="0">
+                <a:solidFill>
+                  <a:srgbClr val="5C6370"/>
+                </a:solidFill>
+                <a:latin typeface="Consolas" pitchFamily="49" charset="0"/>
+              </a:rPr>
+              <a:t># Callbacks machen minimax spielunabhängig</a:t>
+            </a:r>
+          </a:p>
+          <a:p>
+            <a:pPr marL="0" indent="0" algn="l">
+              <a:buNone/>
+            </a:pPr>
+            <a:r>
+              <a:rPr lang="de-DE" sz="980" dirty="0">
+                <a:solidFill>
+                  <a:srgbClr val="56B6C2"/>
+                </a:solidFill>
+                <a:latin typeface="Consolas" pitchFamily="49" charset="0"/>
+              </a:rPr>
+              <a:t>def</a:t>
+            </a:r>
+            <a:r>
+              <a:rPr lang="de-DE" sz="980" dirty="0">
+                <a:solidFill>
+                  <a:srgbClr val="ABB2BF"/>
+                </a:solidFill>
+                <a:latin typeface="Consolas" pitchFamily="49" charset="0"/>
+              </a:rPr>
+              <a:t> </a:t>
+            </a:r>
+            <a:r>
+              <a:rPr lang="de-DE" sz="980" dirty="0">
+                <a:solidFill>
+                  <a:srgbClr val="61AFEF"/>
+                </a:solidFill>
+                <a:latin typeface="Consolas" pitchFamily="49" charset="0"/>
+              </a:rPr>
+              <a:t>get_best_move</a:t>
+            </a:r>
+            <a:r>
+              <a:rPr lang="de-DE" sz="980" dirty="0">
+                <a:solidFill>
+                  <a:srgbClr val="ABB2BF"/>
+                </a:solidFill>
+                <a:latin typeface="Consolas" pitchFamily="49" charset="0"/>
+              </a:rPr>
+              <a:t>(board, depth,</a:t>
+            </a:r>
+          </a:p>
+          <a:p>
+            <a:pPr marL="0" indent="0" algn="l">
+              <a:buNone/>
+            </a:pPr>
+            <a:r>
+              <a:rPr lang="de-DE" sz="980" dirty="0">
+                <a:solidFill>
+                  <a:srgbClr val="ABB2BF"/>
+                </a:solidFill>
+                <a:latin typeface="Consolas" pitchFamily="49" charset="0"/>
+              </a:rPr>
+              <a:t>              </a:t>
+            </a:r>
+            <a:r>
+              <a:rPr lang="de-DE" sz="980" dirty="0">
+                <a:solidFill>
+                  <a:srgbClr val="61AFEF"/>
+                </a:solidFill>
+                <a:latin typeface="Consolas" pitchFamily="49" charset="0"/>
+              </a:rPr>
+              <a:t>get_moves_fn</a:t>
+            </a:r>
+            <a:r>
+              <a:rPr lang="de-DE" sz="980" dirty="0">
+                <a:solidFill>
+                  <a:srgbClr val="ABB2BF"/>
+                </a:solidFill>
+                <a:latin typeface="Consolas" pitchFamily="49" charset="0"/>
+              </a:rPr>
+              <a:t>,  </a:t>
+            </a:r>
+            <a:r>
+              <a:rPr lang="de-DE" sz="980" i="1" dirty="0">
+                <a:solidFill>
+                  <a:srgbClr val="5C6370"/>
+                </a:solidFill>
+                <a:latin typeface="Consolas" pitchFamily="49" charset="0"/>
+              </a:rPr>
+              <a:t># Welche Züge gibt es?</a:t>
+            </a:r>
+          </a:p>
+          <a:p>
+            <a:pPr marL="0" indent="0" algn="l">
+              <a:buNone/>
+            </a:pPr>
+            <a:r>
+              <a:rPr lang="de-DE" sz="980" dirty="0">
+                <a:solidFill>
+                  <a:srgbClr val="ABB2BF"/>
+                </a:solidFill>
+                <a:latin typeface="Consolas" pitchFamily="49" charset="0"/>
+              </a:rPr>
+              <a:t>              </a:t>
+            </a:r>
+            <a:r>
+              <a:rPr lang="de-DE" sz="980" dirty="0">
+                <a:solidFill>
+                  <a:srgbClr val="61AFEF"/>
+                </a:solidFill>
+                <a:latin typeface="Consolas" pitchFamily="49" charset="0"/>
+              </a:rPr>
+              <a:t>apply_move_fn</a:t>
+            </a:r>
+            <a:r>
+              <a:rPr lang="de-DE" sz="980" dirty="0">
+                <a:solidFill>
+                  <a:srgbClr val="ABB2BF"/>
+                </a:solidFill>
+                <a:latin typeface="Consolas" pitchFamily="49" charset="0"/>
+              </a:rPr>
+              <a:t>, </a:t>
+            </a:r>
+            <a:r>
+              <a:rPr lang="de-DE" sz="980" i="1" dirty="0">
+                <a:solidFill>
+                  <a:srgbClr val="5C6370"/>
+                </a:solidFill>
+                <a:latin typeface="Consolas" pitchFamily="49" charset="0"/>
+              </a:rPr>
+              <a:t># Zug ausführen</a:t>
+            </a:r>
+          </a:p>
+          <a:p>
+            <a:pPr marL="0" indent="0" algn="l">
+              <a:buNone/>
+            </a:pPr>
+            <a:r>
+              <a:rPr lang="de-DE" sz="980" dirty="0">
+                <a:solidFill>
+                  <a:srgbClr val="ABB2BF"/>
+                </a:solidFill>
+                <a:latin typeface="Consolas" pitchFamily="49" charset="0"/>
+              </a:rPr>
+              <a:t>              </a:t>
+            </a:r>
+            <a:r>
+              <a:rPr lang="de-DE" sz="980" dirty="0">
+                <a:solidFill>
+                  <a:srgbClr val="61AFEF"/>
+                </a:solidFill>
+                <a:latin typeface="Consolas" pitchFamily="49" charset="0"/>
+              </a:rPr>
+              <a:t>evaluate_fn</a:t>
+            </a:r>
+            <a:r>
+              <a:rPr lang="de-DE" sz="980" dirty="0">
+                <a:solidFill>
+                  <a:srgbClr val="ABB2BF"/>
+                </a:solidFill>
+                <a:latin typeface="Consolas" pitchFamily="49" charset="0"/>
+              </a:rPr>
+              <a:t>,   </a:t>
+            </a:r>
+            <a:r>
+              <a:rPr lang="de-DE" sz="980" i="1" dirty="0">
+                <a:solidFill>
+                  <a:srgbClr val="5C6370"/>
+                </a:solidFill>
+                <a:latin typeface="Consolas" pitchFamily="49" charset="0"/>
+              </a:rPr>
+              <a:t># Stellung bewerten</a:t>
+            </a:r>
+          </a:p>
+          <a:p>
+            <a:pPr marL="0" indent="0" algn="l">
+              <a:buNone/>
+            </a:pPr>
+            <a:r>
+              <a:rPr lang="de-DE" sz="980" dirty="0">
+                <a:solidFill>
+                  <a:srgbClr val="ABB2BF"/>
+                </a:solidFill>
+                <a:latin typeface="Consolas" pitchFamily="49" charset="0"/>
+              </a:rPr>
+              <a:t>              </a:t>
+            </a:r>
+            <a:r>
+              <a:rPr lang="de-DE" sz="980" dirty="0">
+                <a:solidFill>
+                  <a:srgbClr val="61AFEF"/>
+                </a:solidFill>
+                <a:latin typeface="Consolas" pitchFamily="49" charset="0"/>
+              </a:rPr>
+              <a:t>is_terminal_fn</a:t>
+            </a:r>
+            <a:r>
+              <a:rPr lang="de-DE" sz="980" dirty="0">
+                <a:solidFill>
+                  <a:srgbClr val="ABB2BF"/>
+                </a:solidFill>
+                <a:latin typeface="Consolas" pitchFamily="49" charset="0"/>
+              </a:rPr>
+              <a:t>): </a:t>
+            </a:r>
+            <a:r>
+              <a:rPr lang="de-DE" sz="980" i="1" dirty="0">
+                <a:solidFill>
+                  <a:srgbClr val="5C6370"/>
+                </a:solidFill>
+                <a:latin typeface="Consolas" pitchFamily="49" charset="0"/>
+              </a:rPr>
+              <a:t># Spiel beendet?</a:t>
+            </a:r>
+          </a:p>
+          <a:p>
+            <a:pPr marL="0" indent="0" algn="l">
+              <a:buNone/>
+            </a:pPr>
+            <a:r>
+              <a:rPr lang="de-DE" sz="980" dirty="0">
+                <a:solidFill>
+                  <a:srgbClr val="ABB2BF"/>
+                </a:solidFill>
+                <a:latin typeface="Consolas" pitchFamily="49" charset="0"/>
+              </a:rPr>
+              <a:t>    ...</a:t>
+            </a:r>
+          </a:p>
+          <a:p>
+            <a:pPr>
+              <a:buNone/>
+            </a:pPr>
+            <a:endParaRPr lang="de-DE" sz="600" dirty="0"/>
+          </a:p>
+          <a:p>
+            <a:pPr marL="0" indent="0" algn="l">
+              <a:buNone/>
+            </a:pPr>
+            <a:r>
+              <a:rPr lang="de-DE" sz="980" i="1" dirty="0">
+                <a:solidFill>
+                  <a:srgbClr val="5C6370"/>
+                </a:solidFill>
+                <a:latin typeface="Consolas" pitchFamily="49" charset="0"/>
+              </a:rPr>
+              <a:t># Für Bauernschach:</a:t>
+            </a:r>
+          </a:p>
+          <a:p>
+            <a:pPr marL="0" indent="0" algn="l">
+              <a:buNone/>
+            </a:pPr>
+            <a:r>
+              <a:rPr lang="de-DE" sz="980" dirty="0">
+                <a:solidFill>
+                  <a:srgbClr val="61AFEF"/>
+                </a:solidFill>
+                <a:latin typeface="Consolas" pitchFamily="49" charset="0"/>
+              </a:rPr>
+              <a:t>mm</a:t>
+            </a:r>
+            <a:r>
+              <a:rPr lang="de-DE" sz="980" dirty="0">
+                <a:solidFill>
+                  <a:srgbClr val="ABB2BF"/>
+                </a:solidFill>
+                <a:latin typeface="Consolas" pitchFamily="49" charset="0"/>
+              </a:rPr>
+              <a:t>.</a:t>
+            </a:r>
+            <a:r>
+              <a:rPr lang="de-DE" sz="980" dirty="0">
+                <a:solidFill>
+                  <a:srgbClr val="61AFEF"/>
+                </a:solidFill>
+                <a:latin typeface="Consolas" pitchFamily="49" charset="0"/>
+              </a:rPr>
+              <a:t>get_best_move</a:t>
+            </a:r>
+            <a:r>
+              <a:rPr lang="de-DE" sz="980" dirty="0">
+                <a:solidFill>
+                  <a:srgbClr val="ABB2BF"/>
+                </a:solidFill>
+                <a:latin typeface="Consolas" pitchFamily="49" charset="0"/>
+              </a:rPr>
+              <a:t>(board, depth,</a:t>
+            </a:r>
+          </a:p>
+          <a:p>
+            <a:pPr marL="0" indent="0" algn="l">
+              <a:buNone/>
+            </a:pPr>
+            <a:r>
+              <a:rPr lang="de-DE" sz="980" dirty="0">
+                <a:solidFill>
+                  <a:srgbClr val="ABB2BF"/>
+                </a:solidFill>
+                <a:latin typeface="Consolas" pitchFamily="49" charset="0"/>
+              </a:rPr>
+              <a:t>    pc.</a:t>
+            </a:r>
+            <a:r>
+              <a:rPr lang="de-DE" sz="980" dirty="0">
+                <a:solidFill>
+                  <a:srgbClr val="61AFEF"/>
+                </a:solidFill>
+                <a:latin typeface="Consolas" pitchFamily="49" charset="0"/>
+              </a:rPr>
+              <a:t>get_valid_moves</a:t>
+            </a:r>
+            <a:r>
+              <a:rPr lang="de-DE" sz="980" dirty="0">
+                <a:solidFill>
+                  <a:srgbClr val="ABB2BF"/>
+                </a:solidFill>
+                <a:latin typeface="Consolas" pitchFamily="49" charset="0"/>
+              </a:rPr>
+              <a:t>, pc.</a:t>
+            </a:r>
+            <a:r>
+              <a:rPr lang="de-DE" sz="980" dirty="0">
+                <a:solidFill>
+                  <a:srgbClr val="61AFEF"/>
+                </a:solidFill>
+                <a:latin typeface="Consolas" pitchFamily="49" charset="0"/>
+              </a:rPr>
+              <a:t>apply_move</a:t>
+            </a:r>
+            <a:r>
+              <a:rPr lang="de-DE" sz="980" dirty="0">
+                <a:solidFill>
+                  <a:srgbClr val="ABB2BF"/>
+                </a:solidFill>
+                <a:latin typeface="Consolas" pitchFamily="49" charset="0"/>
+              </a:rPr>
+              <a:t>,</a:t>
+            </a:r>
+          </a:p>
+          <a:p>
+            <a:pPr marL="0" indent="0" algn="l">
+              <a:buNone/>
+            </a:pPr>
+            <a:r>
+              <a:rPr lang="de-DE" sz="980" dirty="0">
+                <a:solidFill>
+                  <a:srgbClr val="ABB2BF"/>
+                </a:solidFill>
+                <a:latin typeface="Consolas" pitchFamily="49" charset="0"/>
+              </a:rPr>
+              <a:t>    pc.</a:t>
+            </a:r>
+            <a:r>
+              <a:rPr lang="de-DE" sz="980" dirty="0">
+                <a:solidFill>
+                  <a:srgbClr val="61AFEF"/>
+                </a:solidFill>
+                <a:latin typeface="Consolas" pitchFamily="49" charset="0"/>
+              </a:rPr>
+              <a:t>evaluate</a:t>
+            </a:r>
+            <a:r>
+              <a:rPr lang="de-DE" sz="980" dirty="0">
+                <a:solidFill>
+                  <a:srgbClr val="ABB2BF"/>
+                </a:solidFill>
+                <a:latin typeface="Consolas" pitchFamily="49" charset="0"/>
+              </a:rPr>
+              <a:t>,       pc.</a:t>
+            </a:r>
+            <a:r>
+              <a:rPr lang="de-DE" sz="980" dirty="0">
+                <a:solidFill>
+                  <a:srgbClr val="61AFEF"/>
+                </a:solidFill>
+                <a:latin typeface="Consolas" pitchFamily="49" charset="0"/>
+              </a:rPr>
+              <a:t>is_terminal</a:t>
+            </a:r>
+            <a:r>
+              <a:rPr lang="de-DE" sz="980" dirty="0">
+                <a:solidFill>
+                  <a:srgbClr val="ABB2BF"/>
+                </a:solidFill>
+                <a:latin typeface="Consolas" pitchFamily="49" charset="0"/>
+              </a:rPr>
+              <a:t>)</a:t>
+            </a:r>
+          </a:p>
+          <a:p>
+            <a:pPr>
+              <a:buNone/>
+            </a:pPr>
+            <a:endParaRPr lang="de-DE" sz="600" dirty="0"/>
+          </a:p>
+          <a:p>
+            <a:pPr marL="0" indent="0" algn="l">
+              <a:buNone/>
+            </a:pPr>
+            <a:r>
+              <a:rPr lang="de-DE" sz="980" i="1" dirty="0">
+                <a:solidFill>
+                  <a:srgbClr val="5C6370"/>
+                </a:solidFill>
+                <a:latin typeface="Consolas" pitchFamily="49" charset="0"/>
+              </a:rPr>
+              <a:t># Für Tic-Tac-Toe – IDENTISCHER Aufruf:</a:t>
+            </a:r>
+          </a:p>
+          <a:p>
+            <a:pPr marL="0" indent="0" algn="l">
+              <a:buNone/>
+            </a:pPr>
+            <a:r>
+              <a:rPr lang="de-DE" sz="980" dirty="0">
+                <a:solidFill>
+                  <a:srgbClr val="61AFEF"/>
+                </a:solidFill>
+                <a:latin typeface="Consolas" pitchFamily="49" charset="0"/>
+              </a:rPr>
+              <a:t>mm</a:t>
+            </a:r>
+            <a:r>
+              <a:rPr lang="de-DE" sz="980" dirty="0">
+                <a:solidFill>
+                  <a:srgbClr val="ABB2BF"/>
+                </a:solidFill>
+                <a:latin typeface="Consolas" pitchFamily="49" charset="0"/>
+              </a:rPr>
+              <a:t>.</a:t>
+            </a:r>
+            <a:r>
+              <a:rPr lang="de-DE" sz="980" dirty="0">
+                <a:solidFill>
+                  <a:srgbClr val="61AFEF"/>
+                </a:solidFill>
+                <a:latin typeface="Consolas" pitchFamily="49" charset="0"/>
+              </a:rPr>
+              <a:t>get_best_move</a:t>
+            </a:r>
+            <a:r>
+              <a:rPr lang="de-DE" sz="980" dirty="0">
+                <a:solidFill>
+                  <a:srgbClr val="ABB2BF"/>
+                </a:solidFill>
+                <a:latin typeface="Consolas" pitchFamily="49" charset="0"/>
+              </a:rPr>
+              <a:t>(board, depth,</a:t>
+            </a:r>
+          </a:p>
+          <a:p>
+            <a:pPr marL="0" indent="0" algn="l">
+              <a:buNone/>
+            </a:pPr>
+            <a:r>
+              <a:rPr lang="de-DE" sz="980" dirty="0">
+                <a:solidFill>
+                  <a:srgbClr val="ABB2BF"/>
+                </a:solidFill>
+                <a:latin typeface="Consolas" pitchFamily="49" charset="0"/>
+              </a:rPr>
+              <a:t>    ttt.</a:t>
+            </a:r>
+            <a:r>
+              <a:rPr lang="de-DE" sz="980" dirty="0">
+                <a:solidFill>
+                  <a:srgbClr val="61AFEF"/>
+                </a:solidFill>
+                <a:latin typeface="Consolas" pitchFamily="49" charset="0"/>
+              </a:rPr>
+              <a:t>get_valid_moves</a:t>
+            </a:r>
+            <a:r>
+              <a:rPr lang="de-DE" sz="980" dirty="0">
+                <a:solidFill>
+                  <a:srgbClr val="ABB2BF"/>
+                </a:solidFill>
+                <a:latin typeface="Consolas" pitchFamily="49" charset="0"/>
+              </a:rPr>
+              <a:t>, ttt.</a:t>
+            </a:r>
+            <a:r>
+              <a:rPr lang="de-DE" sz="980" dirty="0">
+                <a:solidFill>
+                  <a:srgbClr val="61AFEF"/>
+                </a:solidFill>
+                <a:latin typeface="Consolas" pitchFamily="49" charset="0"/>
+              </a:rPr>
+              <a:t>apply_move</a:t>
+            </a:r>
+            <a:r>
+              <a:rPr lang="de-DE" sz="980" dirty="0">
+                <a:solidFill>
+                  <a:srgbClr val="ABB2BF"/>
+                </a:solidFill>
+                <a:latin typeface="Consolas" pitchFamily="49" charset="0"/>
+              </a:rPr>
+              <a:t>,</a:t>
+            </a:r>
+          </a:p>
+          <a:p>
+            <a:pPr marL="0" indent="0" algn="l">
+              <a:buNone/>
+            </a:pPr>
+            <a:r>
+              <a:rPr lang="de-DE" sz="980" dirty="0">
+                <a:solidFill>
+                  <a:srgbClr val="ABB2BF"/>
+                </a:solidFill>
+                <a:latin typeface="Consolas" pitchFamily="49" charset="0"/>
+              </a:rPr>
+              <a:t>    ttt.</a:t>
+            </a:r>
+            <a:r>
+              <a:rPr lang="de-DE" sz="980" dirty="0">
+                <a:solidFill>
+                  <a:srgbClr val="61AFEF"/>
+                </a:solidFill>
+                <a:latin typeface="Consolas" pitchFamily="49" charset="0"/>
+              </a:rPr>
+              <a:t>evaluate</a:t>
+            </a:r>
+            <a:r>
+              <a:rPr lang="de-DE" sz="980" dirty="0">
+                <a:solidFill>
+                  <a:srgbClr val="ABB2BF"/>
+                </a:solidFill>
+                <a:latin typeface="Consolas" pitchFamily="49" charset="0"/>
+              </a:rPr>
+              <a:t>,       ttt.</a:t>
+            </a:r>
+            <a:r>
+              <a:rPr lang="de-DE" sz="980" dirty="0">
+                <a:solidFill>
+                  <a:srgbClr val="61AFEF"/>
+                </a:solidFill>
+                <a:latin typeface="Consolas" pitchFamily="49" charset="0"/>
+              </a:rPr>
+              <a:t>is_terminal</a:t>
+            </a:r>
+            <a:r>
+              <a:rPr lang="de-DE" sz="980" dirty="0">
+                <a:solidFill>
+                  <a:srgbClr val="ABB2BF"/>
+                </a:solidFill>
+                <a:latin typeface="Consolas" pitchFamily="49" charset="0"/>
+              </a:rPr>
+              <a:t>)</a:t>
+            </a:r>
+          </a:p>
+          <a:p>
+            <a:pPr>
+              <a:buNone/>
+            </a:pPr>
+            <a:endParaRPr lang="de-DE" sz="600" dirty="0"/>
+          </a:p>
+          <a:p>
+            <a:pPr marL="0" indent="0" algn="l">
+              <a:buNone/>
+            </a:pPr>
+            <a:r>
+              <a:rPr lang="de-DE" sz="980" i="1" dirty="0">
+                <a:solidFill>
+                  <a:srgbClr val="5C6370"/>
+                </a:solidFill>
+                <a:latin typeface="Consolas" pitchFamily="49" charset="0"/>
+              </a:rPr>
+              <a:t># Alpha-Beta-Pruning: Äste abschneiden</a:t>
+            </a:r>
+          </a:p>
+          <a:p>
+            <a:pPr marL="0" indent="0" algn="l">
+              <a:buNone/>
+            </a:pPr>
+            <a:r>
+              <a:rPr lang="de-DE" sz="980" dirty="0">
+                <a:solidFill>
+                  <a:srgbClr val="56B6C2"/>
+                </a:solidFill>
+                <a:latin typeface="Consolas" pitchFamily="49" charset="0"/>
+              </a:rPr>
+              <a:t>if</a:t>
+            </a:r>
+            <a:r>
+              <a:rPr lang="de-DE" sz="980" dirty="0">
+                <a:solidFill>
+                  <a:srgbClr val="ABB2BF"/>
+                </a:solidFill>
+                <a:latin typeface="Consolas" pitchFamily="49" charset="0"/>
+              </a:rPr>
+              <a:t> beta &lt;= alpha:</a:t>
+            </a:r>
+            <a:r>
+              <a:rPr lang="de-DE" sz="980" i="1" dirty="0">
+                <a:solidFill>
+                  <a:srgbClr val="5C6370"/>
+                </a:solidFill>
+                <a:latin typeface="Consolas" pitchFamily="49" charset="0"/>
+              </a:rPr>
+              <a:t>  # kein besserer Zug möglich</a:t>
+            </a:r>
+          </a:p>
+          <a:p>
+            <a:pPr marL="0" indent="0" algn="l">
+              <a:buNone/>
+            </a:pPr>
+            <a:r>
+              <a:rPr lang="de-DE" sz="980" dirty="0">
+                <a:solidFill>
+                  <a:srgbClr val="ABB2BF"/>
+                </a:solidFill>
+                <a:latin typeface="Consolas" pitchFamily="49" charset="0"/>
+              </a:rPr>
+              <a:t>    </a:t>
+            </a:r>
+            <a:r>
+              <a:rPr lang="de-DE" sz="980" dirty="0">
+                <a:solidFill>
+                  <a:srgbClr val="56B6C2"/>
+                </a:solidFill>
+                <a:latin typeface="Consolas" pitchFamily="49" charset="0"/>
+              </a:rPr>
+              <a:t>break</a:t>
+            </a:r>
+            <a:r>
+              <a:rPr lang="de-DE" sz="980" i="1" dirty="0">
+                <a:solidFill>
+                  <a:srgbClr val="5C6370"/>
+                </a:solidFill>
+                <a:latin typeface="Consolas" pitchFamily="49" charset="0"/>
+              </a:rPr>
+              <a:t>          # spart bis zu 90% Rechenzeit</a:t>
+            </a:r>
+          </a:p>
+        </p:txBody>
+      </p:sp>
+      <p:sp>
+        <p:nvSpPr>
+          <p:cNvPr id="7" name="BulletCard"/>
+          <p:cNvSpPr/>
+          <p:nvPr/>
+        </p:nvSpPr>
+        <p:spPr>
+          <a:xfrm>
+            <a:off x="5707200" y="1234440"/>
+            <a:ext cx="3071040" cy="3650000"/>
+          </a:xfrm>
+          <a:prstGeom prst="rect">
+            <a:avLst/>
+          </a:prstGeom>
+          <a:solidFill>
+            <a:srgbClr val="FFFFFF"/>
+          </a:solidFill>
+          <a:ln w="6350">
+            <a:solidFill>
+              <a:srgbClr val="D0D7E8"/>
+            </a:solidFill>
+            <a:prstDash val="solid"/>
+          </a:ln>
+        </p:spPr>
+      </p:sp>
+      <p:sp>
+        <p:nvSpPr>
+          <p:cNvPr id="8" name="BulletText"/>
+          <p:cNvSpPr/>
+          <p:nvPr/>
+        </p:nvSpPr>
+        <p:spPr>
+          <a:xfrm>
+            <a:off x="5798640" y="1325880"/>
+            <a:ext cx="2888160" cy="3467120"/>
+          </a:xfrm>
+          <a:prstGeom prst="rect">
+            <a:avLst/>
+          </a:prstGeom>
+          <a:noFill/>
+          <a:ln/>
+        </p:spPr>
+        <p:txBody>
+          <a:bodyPr wrap="square" lIns="114300" tIns="91440" rIns="114300" bIns="91440" rtlCol="0" anchor="t"/>
+          <a:lstStyle/>
+          <a:p>
+            <a:pPr marL="342900" indent="-342900" algn="l">
+              <a:buChar char="▸"/>
+            </a:pPr>
+            <a:r>
+              <a:rPr lang="de-DE" sz="1150" b="1" dirty="0">
+                <a:solidFill>
+                  <a:srgbClr val="2A3A5E"/>
+                </a:solidFill>
+                <a:latin typeface="Calibri" pitchFamily="49" charset="0"/>
+              </a:rPr>
+              <a:t>Kein Code-Duplikat</a:t>
+            </a:r>
+          </a:p>
+          <a:p>
+            <a:pPr marL="342900" indent="0" algn="l">
+              <a:buNone/>
+            </a:pPr>
+            <a:r>
+              <a:rPr lang="de-DE" sz="1000" dirty="0">
+                <a:solidFill>
+                  <a:srgbClr val="8892A4"/>
+                </a:solidFill>
+                <a:latin typeface="Calibri" pitchFamily="49" charset="0"/>
+              </a:rPr>
+              <a:t>Derselbe MiniMax-Code für beide Spiele</a:t>
+            </a:r>
+          </a:p>
+          <a:p>
+            <a:pPr marL="342900" indent="-342900" algn="l">
+              <a:spcBef>
+                <a:spcPts val="160"/>
+              </a:spcBef>
+              <a:buChar char="▸"/>
+            </a:pPr>
+            <a:r>
+              <a:rPr lang="de-DE" sz="1150" b="1" dirty="0">
+                <a:solidFill>
+                  <a:srgbClr val="2A3A5E"/>
+                </a:solidFill>
+                <a:latin typeface="Calibri" pitchFamily="49" charset="0"/>
+              </a:rPr>
+              <a:t>Single Responsibility</a:t>
+            </a:r>
+          </a:p>
+          <a:p>
+            <a:pPr marL="342900" indent="0" algn="l">
+              <a:buNone/>
+            </a:pPr>
+            <a:r>
+              <a:rPr lang="de-DE" sz="1000" dirty="0">
+                <a:solidFill>
+                  <a:srgbClr val="8892A4"/>
+                </a:solidFill>
+                <a:latin typeface="Calibri" pitchFamily="49" charset="0"/>
+              </a:rPr>
+              <a:t>KI-Logik und Spiellogik vollständig getrennt</a:t>
+            </a:r>
+          </a:p>
+          <a:p>
+            <a:pPr marL="342900" indent="-342900" algn="l">
+              <a:spcBef>
+                <a:spcPts val="160"/>
+              </a:spcBef>
+              <a:buChar char="▸"/>
+            </a:pPr>
+            <a:r>
+              <a:rPr lang="de-DE" sz="1150" b="1" dirty="0">
+                <a:solidFill>
+                  <a:srgbClr val="2A3A5E"/>
+                </a:solidFill>
+                <a:latin typeface="Calibri" pitchFamily="49" charset="0"/>
+              </a:rPr>
+              <a:t>Callbacks</a:t>
+            </a:r>
+          </a:p>
+          <a:p>
+            <a:pPr marL="342900" indent="0" algn="l">
+              <a:buNone/>
+            </a:pPr>
+            <a:r>
+              <a:rPr lang="de-DE" sz="1000" dirty="0">
+                <a:solidFill>
+                  <a:srgbClr val="8892A4"/>
+                </a:solidFill>
+                <a:latin typeface="Calibri" pitchFamily="49" charset="0"/>
+              </a:rPr>
+              <a:t>Einfach erweiterbar: drittes Spiel → neue Callbacks</a:t>
+            </a:r>
+          </a:p>
+          <a:p>
+            <a:pPr marL="342900" indent="-342900" algn="l">
+              <a:spcBef>
+                <a:spcPts val="160"/>
+              </a:spcBef>
+              <a:buChar char="▸"/>
+            </a:pPr>
+            <a:r>
+              <a:rPr lang="de-DE" sz="1150" b="1" dirty="0">
+                <a:solidFill>
+                  <a:srgbClr val="2A3A5E"/>
+                </a:solidFill>
+                <a:latin typeface="Calibri" pitchFamily="49" charset="0"/>
+              </a:rPr>
+              <a:t>Alpha-Beta</a:t>
+            </a:r>
+          </a:p>
+          <a:p>
+            <a:pPr marL="342900" indent="0" algn="l">
+              <a:buNone/>
+            </a:pPr>
+            <a:r>
+              <a:rPr lang="de-DE" sz="1000" dirty="0">
+                <a:solidFill>
+                  <a:srgbClr val="8892A4"/>
+                </a:solidFill>
+                <a:latin typeface="Calibri" pitchFamily="49" charset="0"/>
+              </a:rPr>
+              <a:t>beta ≤ alpha → Ast wird abgebrochen ohne Ergebnis zu ändern</a:t>
+            </a:r>
+          </a:p>
+          <a:p>
+            <a:pPr marL="342900" indent="-342900" algn="l">
+              <a:spcBef>
+                <a:spcPts val="160"/>
+              </a:spcBef>
+              <a:buChar char="▸"/>
+            </a:pPr>
+            <a:r>
+              <a:rPr lang="de-DE" sz="1150" b="1" dirty="0">
+                <a:solidFill>
+                  <a:srgbClr val="2A3A5E"/>
+                </a:solidFill>
+                <a:latin typeface="Calibri" pitchFamily="49" charset="0"/>
+              </a:rPr>
+              <a:t>Spielstärke</a:t>
+            </a:r>
+          </a:p>
+          <a:p>
+            <a:pPr marL="342900" indent="0" algn="l">
+              <a:buNone/>
+            </a:pPr>
+            <a:r>
+              <a:rPr lang="de-DE" sz="1000" dirty="0">
+                <a:solidFill>
+                  <a:srgbClr val="8892A4"/>
+                </a:solidFill>
+                <a:latin typeface="Calibri" pitchFamily="49" charset="0"/>
+              </a:rPr>
+              <a:t>Tiefe 1–5: von kaum strategisch bis mehrere Sekunden</a:t>
+            </a:r>
+          </a:p>
+        </p:txBody>
+      </p:sp>
+    </p:spTree>
+  </p:cSld>
+  <p:clrMapOvr>
+    <a:masterClrMapping/>
+  </p:clrMapOvr>
+</p:sld>
+</file>
+
+<file path=ppt/slides/slide13.xml><?xml version="1.0" encoding="utf-8"?>
+<p:sld xmlns:a="http://schemas.openxmlformats.org/drawingml/2006/main" xmlns:p="http://schemas.openxmlformats.org/presentationml/2006/main" xmlns:r="http://schemas.openxmlformats.org/officeDocument/2006/relationships">
+  <p:cSld>
+    <p:bg>
+      <p:bgPr>
+        <a:solidFill>
+          <a:srgbClr val="0D0D1A"/>
+        </a:solidFill>
+        <a:effectLst/>
+      </p:bgPr>
+    </p:bg>
+    <p:spTree>
+      <p:nvGrpSpPr>
+        <p:cNvPr id="1" name=""/>
+        <p:cNvGrpSpPr/>
+        <p:nvPr/>
+      </p:nvGrpSpPr>
+      <p:grpSpPr/>
+      <p:sp>
+        <p:nvSpPr>
+          <p:cNvPr id="2" name="AccentStripe"/>
+          <p:cNvSpPr/>
+          <p:nvPr/>
+        </p:nvSpPr>
+        <p:spPr>
+          <a:xfrm>
+            <a:off x="0" y="0"/>
+            <a:ext cx="91440" cy="5143500"/>
+          </a:xfrm>
+          <a:prstGeom prst="rect">
+            <a:avLst/>
+          </a:prstGeom>
+          <a:solidFill>
+            <a:srgbClr val="E94560"/>
+          </a:solidFill>
+        </p:spPr>
+      </p:sp>
+      <p:sp>
+        <p:nvSpPr>
+          <p:cNvPr id="3" name="Title"/>
+          <p:cNvSpPr/>
+          <p:nvPr/>
+        </p:nvSpPr>
+        <p:spPr>
+          <a:xfrm>
+            <a:off x="457200" y="256032"/>
+            <a:ext cx="8229600" cy="594360"/>
+          </a:xfrm>
+          <a:prstGeom prst="rect">
+            <a:avLst/>
+          </a:prstGeom>
+          <a:noFill/>
+          <a:ln/>
+        </p:spPr>
+        <p:txBody>
+          <a:bodyPr wrap="square" lIns="114300" tIns="91440" rIns="114300" bIns="91440" rtlCol="0" anchor="ctr"/>
+          <a:lstStyle/>
+          <a:p>
+            <a:pPr marL="0" indent="0" algn="l">
+              <a:buNone/>
+            </a:pPr>
+            <a:r>
+              <a:rPr lang="de-DE" sz="3000" b="1" dirty="0">
+                <a:solidFill>
+                  <a:srgbClr val="FFFFFF"/>
+                </a:solidFill>
+                <a:latin typeface="Arial Black" pitchFamily="49" charset="0"/>
+              </a:rPr>
+              <a:t>pawn_chess.py – Dreistufige Stellungsbewertung</a:t>
+            </a:r>
+          </a:p>
+        </p:txBody>
+      </p:sp>
+      <p:sp>
+        <p:nvSpPr>
+          <p:cNvPr id="4" name="Subtitle"/>
+          <p:cNvSpPr/>
+          <p:nvPr/>
+        </p:nvSpPr>
+        <p:spPr>
+          <a:xfrm>
+            <a:off x="457200" y="804672"/>
+            <a:ext cx="8229600" cy="320040"/>
+          </a:xfrm>
+          <a:prstGeom prst="rect">
+            <a:avLst/>
+          </a:prstGeom>
+          <a:noFill/>
+          <a:ln/>
+        </p:spPr>
+        <p:txBody>
+          <a:bodyPr wrap="square" lIns="114300" tIns="91440" rIns="114300" bIns="91440" rtlCol="0" anchor="ctr"/>
+          <a:lstStyle/>
+          <a:p>
+            <a:pPr marL="0" indent="0" algn="l">
+              <a:buNone/>
+            </a:pPr>
+            <a:r>
+              <a:rPr lang="de-DE" sz="1200" dirty="0">
+                <a:solidFill>
+                  <a:srgbClr val="8892A4"/>
+                </a:solidFill>
+                <a:latin typeface="Calibri" pitchFamily="49" charset="0"/>
+              </a:rPr>
+              <a:t>Heuristik: Figurenzahl · Fortschritt · Zentrumskontrolle</a:t>
+            </a:r>
+          </a:p>
+        </p:txBody>
+      </p:sp>
+      <p:sp>
+        <p:nvSpPr>
+          <p:cNvPr id="5" name="CodeCard"/>
+          <p:cNvSpPr/>
+          <p:nvPr/>
+        </p:nvSpPr>
+        <p:spPr>
+          <a:xfrm>
+            <a:off x="365760" y="1234440"/>
+            <a:ext cx="5250000" cy="3650000"/>
+          </a:xfrm>
+          <a:prstGeom prst="rect">
+            <a:avLst/>
+          </a:prstGeom>
+          <a:solidFill>
+            <a:srgbClr val="121224"/>
+          </a:solidFill>
+          <a:ln w="9525">
+            <a:solidFill>
+              <a:srgbClr val="4472C4"/>
+            </a:solidFill>
+            <a:prstDash val="solid"/>
+          </a:ln>
+        </p:spPr>
+      </p:sp>
+      <p:sp>
+        <p:nvSpPr>
+          <p:cNvPr id="6" name="CodeText"/>
+          <p:cNvSpPr/>
+          <p:nvPr/>
+        </p:nvSpPr>
+        <p:spPr>
+          <a:xfrm>
+            <a:off x="457200" y="1325880"/>
+            <a:ext cx="5067120" cy="3467120"/>
+          </a:xfrm>
+          <a:prstGeom prst="rect">
+            <a:avLst/>
+          </a:prstGeom>
+          <a:noFill/>
+          <a:ln/>
+        </p:spPr>
+        <p:txBody>
+          <a:bodyPr wrap="square" lIns="114300" tIns="91440" rIns="114300" bIns="91440" rtlCol="0" anchor="t"/>
+          <a:lstStyle/>
+          <a:p>
+            <a:pPr marL="0" indent="0" algn="l">
+              <a:buNone/>
+            </a:pPr>
+            <a:r>
+              <a:rPr lang="de-DE" sz="980" i="1" dirty="0">
+                <a:solidFill>
+                  <a:srgbClr val="5C6370"/>
+                </a:solidFill>
+                <a:latin typeface="Consolas" pitchFamily="49" charset="0"/>
+              </a:rPr>
+              <a:t># Zentrums-Bonus-Matrix (Mitte ist wertvoller)</a:t>
+            </a:r>
+          </a:p>
+          <a:p>
+            <a:pPr marL="0" indent="0" algn="l">
+              <a:buNone/>
+            </a:pPr>
+            <a:r>
+              <a:rPr lang="de-DE" sz="980" dirty="0">
+                <a:solidFill>
+                  <a:srgbClr val="61AFEF"/>
+                </a:solidFill>
+                <a:latin typeface="Consolas" pitchFamily="49" charset="0"/>
+              </a:rPr>
+              <a:t>CENTER_BONUS</a:t>
+            </a:r>
+            <a:r>
+              <a:rPr lang="de-DE" sz="980" dirty="0">
+                <a:solidFill>
+                  <a:srgbClr val="ABB2BF"/>
+                </a:solidFill>
+                <a:latin typeface="Consolas" pitchFamily="49" charset="0"/>
+              </a:rPr>
+              <a:t> = [</a:t>
+            </a:r>
+          </a:p>
+          <a:p>
+            <a:pPr marL="0" indent="0" algn="l">
+              <a:buNone/>
+            </a:pPr>
+            <a:r>
+              <a:rPr lang="de-DE" sz="980" dirty="0">
+                <a:solidFill>
+                  <a:srgbClr val="ABB2BF"/>
+                </a:solidFill>
+                <a:latin typeface="Consolas" pitchFamily="49" charset="0"/>
+              </a:rPr>
+              <a:t>    [</a:t>
+            </a:r>
+            <a:r>
+              <a:rPr lang="de-DE" sz="980" dirty="0">
+                <a:solidFill>
+                  <a:srgbClr val="98C379"/>
+                </a:solidFill>
+                <a:latin typeface="Consolas" pitchFamily="49" charset="0"/>
+              </a:rPr>
+              <a:t>0</a:t>
+            </a:r>
+            <a:r>
+              <a:rPr lang="de-DE" sz="980" dirty="0">
+                <a:solidFill>
+                  <a:srgbClr val="ABB2BF"/>
+                </a:solidFill>
+                <a:latin typeface="Consolas" pitchFamily="49" charset="0"/>
+              </a:rPr>
+              <a:t>, </a:t>
+            </a:r>
+            <a:r>
+              <a:rPr lang="de-DE" sz="980" dirty="0">
+                <a:solidFill>
+                  <a:srgbClr val="98C379"/>
+                </a:solidFill>
+                <a:latin typeface="Consolas" pitchFamily="49" charset="0"/>
+              </a:rPr>
+              <a:t>0</a:t>
+            </a:r>
+            <a:r>
+              <a:rPr lang="de-DE" sz="980" dirty="0">
+                <a:solidFill>
+                  <a:srgbClr val="ABB2BF"/>
+                </a:solidFill>
+                <a:latin typeface="Consolas" pitchFamily="49" charset="0"/>
+              </a:rPr>
+              <a:t>, </a:t>
+            </a:r>
+            <a:r>
+              <a:rPr lang="de-DE" sz="980" dirty="0">
+                <a:solidFill>
+                  <a:srgbClr val="98C379"/>
+                </a:solidFill>
+                <a:latin typeface="Consolas" pitchFamily="49" charset="0"/>
+              </a:rPr>
+              <a:t>0</a:t>
+            </a:r>
+            <a:r>
+              <a:rPr lang="de-DE" sz="980" dirty="0">
+                <a:solidFill>
+                  <a:srgbClr val="ABB2BF"/>
+                </a:solidFill>
+                <a:latin typeface="Consolas" pitchFamily="49" charset="0"/>
+              </a:rPr>
+              <a:t>, </a:t>
+            </a:r>
+            <a:r>
+              <a:rPr lang="de-DE" sz="980" dirty="0">
+                <a:solidFill>
+                  <a:srgbClr val="98C379"/>
+                </a:solidFill>
+                <a:latin typeface="Consolas" pitchFamily="49" charset="0"/>
+              </a:rPr>
+              <a:t>0</a:t>
+            </a:r>
+            <a:r>
+              <a:rPr lang="de-DE" sz="980" dirty="0">
+                <a:solidFill>
+                  <a:srgbClr val="ABB2BF"/>
+                </a:solidFill>
+                <a:latin typeface="Consolas" pitchFamily="49" charset="0"/>
+              </a:rPr>
+              <a:t>, </a:t>
+            </a:r>
+            <a:r>
+              <a:rPr lang="de-DE" sz="980" dirty="0">
+                <a:solidFill>
+                  <a:srgbClr val="98C379"/>
+                </a:solidFill>
+                <a:latin typeface="Consolas" pitchFamily="49" charset="0"/>
+              </a:rPr>
+              <a:t>0</a:t>
+            </a:r>
+            <a:r>
+              <a:rPr lang="de-DE" sz="980" dirty="0">
+                <a:solidFill>
+                  <a:srgbClr val="ABB2BF"/>
+                </a:solidFill>
+                <a:latin typeface="Consolas" pitchFamily="49" charset="0"/>
+              </a:rPr>
+              <a:t>, </a:t>
+            </a:r>
+            <a:r>
+              <a:rPr lang="de-DE" sz="980" dirty="0">
+                <a:solidFill>
+                  <a:srgbClr val="98C379"/>
+                </a:solidFill>
+                <a:latin typeface="Consolas" pitchFamily="49" charset="0"/>
+              </a:rPr>
+              <a:t>0</a:t>
+            </a:r>
+            <a:r>
+              <a:rPr lang="de-DE" sz="980" dirty="0">
+                <a:solidFill>
+                  <a:srgbClr val="ABB2BF"/>
+                </a:solidFill>
+                <a:latin typeface="Consolas" pitchFamily="49" charset="0"/>
+              </a:rPr>
+              <a:t>],</a:t>
+            </a:r>
+          </a:p>
+          <a:p>
+            <a:pPr marL="0" indent="0" algn="l">
+              <a:buNone/>
+            </a:pPr>
+            <a:r>
+              <a:rPr lang="de-DE" sz="980" dirty="0">
+                <a:solidFill>
+                  <a:srgbClr val="ABB2BF"/>
+                </a:solidFill>
+                <a:latin typeface="Consolas" pitchFamily="49" charset="0"/>
+              </a:rPr>
+              <a:t>    [</a:t>
+            </a:r>
+            <a:r>
+              <a:rPr lang="de-DE" sz="980" dirty="0">
+                <a:solidFill>
+                  <a:srgbClr val="98C379"/>
+                </a:solidFill>
+                <a:latin typeface="Consolas" pitchFamily="49" charset="0"/>
+              </a:rPr>
+              <a:t>0</a:t>
+            </a:r>
+            <a:r>
+              <a:rPr lang="de-DE" sz="980" dirty="0">
+                <a:solidFill>
+                  <a:srgbClr val="ABB2BF"/>
+                </a:solidFill>
+                <a:latin typeface="Consolas" pitchFamily="49" charset="0"/>
+              </a:rPr>
+              <a:t>, </a:t>
+            </a:r>
+            <a:r>
+              <a:rPr lang="de-DE" sz="980" dirty="0">
+                <a:solidFill>
+                  <a:srgbClr val="98C379"/>
+                </a:solidFill>
+                <a:latin typeface="Consolas" pitchFamily="49" charset="0"/>
+              </a:rPr>
+              <a:t>1</a:t>
+            </a:r>
+            <a:r>
+              <a:rPr lang="de-DE" sz="980" dirty="0">
+                <a:solidFill>
+                  <a:srgbClr val="ABB2BF"/>
+                </a:solidFill>
+                <a:latin typeface="Consolas" pitchFamily="49" charset="0"/>
+              </a:rPr>
+              <a:t>, </a:t>
+            </a:r>
+            <a:r>
+              <a:rPr lang="de-DE" sz="980" dirty="0">
+                <a:solidFill>
+                  <a:srgbClr val="98C379"/>
+                </a:solidFill>
+                <a:latin typeface="Consolas" pitchFamily="49" charset="0"/>
+              </a:rPr>
+              <a:t>1</a:t>
+            </a:r>
+            <a:r>
+              <a:rPr lang="de-DE" sz="980" dirty="0">
+                <a:solidFill>
+                  <a:srgbClr val="ABB2BF"/>
+                </a:solidFill>
+                <a:latin typeface="Consolas" pitchFamily="49" charset="0"/>
+              </a:rPr>
+              <a:t>, </a:t>
+            </a:r>
+            <a:r>
+              <a:rPr lang="de-DE" sz="980" dirty="0">
+                <a:solidFill>
+                  <a:srgbClr val="98C379"/>
+                </a:solidFill>
+                <a:latin typeface="Consolas" pitchFamily="49" charset="0"/>
+              </a:rPr>
+              <a:t>1</a:t>
+            </a:r>
+            <a:r>
+              <a:rPr lang="de-DE" sz="980" dirty="0">
+                <a:solidFill>
+                  <a:srgbClr val="ABB2BF"/>
+                </a:solidFill>
+                <a:latin typeface="Consolas" pitchFamily="49" charset="0"/>
+              </a:rPr>
+              <a:t>, </a:t>
+            </a:r>
+            <a:r>
+              <a:rPr lang="de-DE" sz="980" dirty="0">
+                <a:solidFill>
+                  <a:srgbClr val="98C379"/>
+                </a:solidFill>
+                <a:latin typeface="Consolas" pitchFamily="49" charset="0"/>
+              </a:rPr>
+              <a:t>1</a:t>
+            </a:r>
+            <a:r>
+              <a:rPr lang="de-DE" sz="980" dirty="0">
+                <a:solidFill>
+                  <a:srgbClr val="ABB2BF"/>
+                </a:solidFill>
+                <a:latin typeface="Consolas" pitchFamily="49" charset="0"/>
+              </a:rPr>
+              <a:t>, </a:t>
+            </a:r>
+            <a:r>
+              <a:rPr lang="de-DE" sz="980" dirty="0">
+                <a:solidFill>
+                  <a:srgbClr val="98C379"/>
+                </a:solidFill>
+                <a:latin typeface="Consolas" pitchFamily="49" charset="0"/>
+              </a:rPr>
+              <a:t>0</a:t>
+            </a:r>
+            <a:r>
+              <a:rPr lang="de-DE" sz="980" dirty="0">
+                <a:solidFill>
+                  <a:srgbClr val="ABB2BF"/>
+                </a:solidFill>
+                <a:latin typeface="Consolas" pitchFamily="49" charset="0"/>
+              </a:rPr>
+              <a:t>],</a:t>
+            </a:r>
+          </a:p>
+          <a:p>
+            <a:pPr marL="0" indent="0" algn="l">
+              <a:buNone/>
+            </a:pPr>
+            <a:r>
+              <a:rPr lang="de-DE" sz="980" dirty="0">
+                <a:solidFill>
+                  <a:srgbClr val="ABB2BF"/>
+                </a:solidFill>
+                <a:latin typeface="Consolas" pitchFamily="49" charset="0"/>
+              </a:rPr>
+              <a:t>    [</a:t>
+            </a:r>
+            <a:r>
+              <a:rPr lang="de-DE" sz="980" dirty="0">
+                <a:solidFill>
+                  <a:srgbClr val="98C379"/>
+                </a:solidFill>
+                <a:latin typeface="Consolas" pitchFamily="49" charset="0"/>
+              </a:rPr>
+              <a:t>0</a:t>
+            </a:r>
+            <a:r>
+              <a:rPr lang="de-DE" sz="980" dirty="0">
+                <a:solidFill>
+                  <a:srgbClr val="ABB2BF"/>
+                </a:solidFill>
+                <a:latin typeface="Consolas" pitchFamily="49" charset="0"/>
+              </a:rPr>
+              <a:t>, </a:t>
+            </a:r>
+            <a:r>
+              <a:rPr lang="de-DE" sz="980" dirty="0">
+                <a:solidFill>
+                  <a:srgbClr val="98C379"/>
+                </a:solidFill>
+                <a:latin typeface="Consolas" pitchFamily="49" charset="0"/>
+              </a:rPr>
+              <a:t>1</a:t>
+            </a:r>
+            <a:r>
+              <a:rPr lang="de-DE" sz="980" dirty="0">
+                <a:solidFill>
+                  <a:srgbClr val="ABB2BF"/>
+                </a:solidFill>
+                <a:latin typeface="Consolas" pitchFamily="49" charset="0"/>
+              </a:rPr>
+              <a:t>, </a:t>
+            </a:r>
+            <a:r>
+              <a:rPr lang="de-DE" sz="980" dirty="0">
+                <a:solidFill>
+                  <a:srgbClr val="98C379"/>
+                </a:solidFill>
+                <a:latin typeface="Consolas" pitchFamily="49" charset="0"/>
+              </a:rPr>
+              <a:t>3</a:t>
+            </a:r>
+            <a:r>
+              <a:rPr lang="de-DE" sz="980" dirty="0">
+                <a:solidFill>
+                  <a:srgbClr val="ABB2BF"/>
+                </a:solidFill>
+                <a:latin typeface="Consolas" pitchFamily="49" charset="0"/>
+              </a:rPr>
+              <a:t>, </a:t>
+            </a:r>
+            <a:r>
+              <a:rPr lang="de-DE" sz="980" dirty="0">
+                <a:solidFill>
+                  <a:srgbClr val="98C379"/>
+                </a:solidFill>
+                <a:latin typeface="Consolas" pitchFamily="49" charset="0"/>
+              </a:rPr>
+              <a:t>3</a:t>
+            </a:r>
+            <a:r>
+              <a:rPr lang="de-DE" sz="980" dirty="0">
+                <a:solidFill>
+                  <a:srgbClr val="ABB2BF"/>
+                </a:solidFill>
+                <a:latin typeface="Consolas" pitchFamily="49" charset="0"/>
+              </a:rPr>
+              <a:t>, </a:t>
+            </a:r>
+            <a:r>
+              <a:rPr lang="de-DE" sz="980" dirty="0">
+                <a:solidFill>
+                  <a:srgbClr val="98C379"/>
+                </a:solidFill>
+                <a:latin typeface="Consolas" pitchFamily="49" charset="0"/>
+              </a:rPr>
+              <a:t>1</a:t>
+            </a:r>
+            <a:r>
+              <a:rPr lang="de-DE" sz="980" dirty="0">
+                <a:solidFill>
+                  <a:srgbClr val="ABB2BF"/>
+                </a:solidFill>
+                <a:latin typeface="Consolas" pitchFamily="49" charset="0"/>
+              </a:rPr>
+              <a:t>, </a:t>
+            </a:r>
+            <a:r>
+              <a:rPr lang="de-DE" sz="980" dirty="0">
+                <a:solidFill>
+                  <a:srgbClr val="98C379"/>
+                </a:solidFill>
+                <a:latin typeface="Consolas" pitchFamily="49" charset="0"/>
+              </a:rPr>
+              <a:t>0</a:t>
+            </a:r>
+            <a:r>
+              <a:rPr lang="de-DE" sz="980" dirty="0">
+                <a:solidFill>
+                  <a:srgbClr val="ABB2BF"/>
+                </a:solidFill>
+                <a:latin typeface="Consolas" pitchFamily="49" charset="0"/>
+              </a:rPr>
+              <a:t>],</a:t>
+            </a:r>
+          </a:p>
+          <a:p>
+            <a:pPr marL="0" indent="0" algn="l">
+              <a:buNone/>
+            </a:pPr>
+            <a:r>
+              <a:rPr lang="de-DE" sz="980" dirty="0">
+                <a:solidFill>
+                  <a:srgbClr val="ABB2BF"/>
+                </a:solidFill>
+                <a:latin typeface="Consolas" pitchFamily="49" charset="0"/>
+              </a:rPr>
+              <a:t>    [</a:t>
+            </a:r>
+            <a:r>
+              <a:rPr lang="de-DE" sz="980" dirty="0">
+                <a:solidFill>
+                  <a:srgbClr val="98C379"/>
+                </a:solidFill>
+                <a:latin typeface="Consolas" pitchFamily="49" charset="0"/>
+              </a:rPr>
+              <a:t>0</a:t>
+            </a:r>
+            <a:r>
+              <a:rPr lang="de-DE" sz="980" dirty="0">
+                <a:solidFill>
+                  <a:srgbClr val="ABB2BF"/>
+                </a:solidFill>
+                <a:latin typeface="Consolas" pitchFamily="49" charset="0"/>
+              </a:rPr>
+              <a:t>, </a:t>
+            </a:r>
+            <a:r>
+              <a:rPr lang="de-DE" sz="980" dirty="0">
+                <a:solidFill>
+                  <a:srgbClr val="98C379"/>
+                </a:solidFill>
+                <a:latin typeface="Consolas" pitchFamily="49" charset="0"/>
+              </a:rPr>
+              <a:t>1</a:t>
+            </a:r>
+            <a:r>
+              <a:rPr lang="de-DE" sz="980" dirty="0">
+                <a:solidFill>
+                  <a:srgbClr val="ABB2BF"/>
+                </a:solidFill>
+                <a:latin typeface="Consolas" pitchFamily="49" charset="0"/>
+              </a:rPr>
+              <a:t>, </a:t>
+            </a:r>
+            <a:r>
+              <a:rPr lang="de-DE" sz="980" dirty="0">
+                <a:solidFill>
+                  <a:srgbClr val="98C379"/>
+                </a:solidFill>
+                <a:latin typeface="Consolas" pitchFamily="49" charset="0"/>
+              </a:rPr>
+              <a:t>3</a:t>
+            </a:r>
+            <a:r>
+              <a:rPr lang="de-DE" sz="980" dirty="0">
+                <a:solidFill>
+                  <a:srgbClr val="ABB2BF"/>
+                </a:solidFill>
+                <a:latin typeface="Consolas" pitchFamily="49" charset="0"/>
+              </a:rPr>
+              <a:t>, </a:t>
+            </a:r>
+            <a:r>
+              <a:rPr lang="de-DE" sz="980" dirty="0">
+                <a:solidFill>
+                  <a:srgbClr val="98C379"/>
+                </a:solidFill>
+                <a:latin typeface="Consolas" pitchFamily="49" charset="0"/>
+              </a:rPr>
+              <a:t>3</a:t>
+            </a:r>
+            <a:r>
+              <a:rPr lang="de-DE" sz="980" dirty="0">
+                <a:solidFill>
+                  <a:srgbClr val="ABB2BF"/>
+                </a:solidFill>
+                <a:latin typeface="Consolas" pitchFamily="49" charset="0"/>
+              </a:rPr>
+              <a:t>, </a:t>
+            </a:r>
+            <a:r>
+              <a:rPr lang="de-DE" sz="980" dirty="0">
+                <a:solidFill>
+                  <a:srgbClr val="98C379"/>
+                </a:solidFill>
+                <a:latin typeface="Consolas" pitchFamily="49" charset="0"/>
+              </a:rPr>
+              <a:t>1</a:t>
+            </a:r>
+            <a:r>
+              <a:rPr lang="de-DE" sz="980" dirty="0">
+                <a:solidFill>
+                  <a:srgbClr val="ABB2BF"/>
+                </a:solidFill>
+                <a:latin typeface="Consolas" pitchFamily="49" charset="0"/>
+              </a:rPr>
+              <a:t>, </a:t>
+            </a:r>
+            <a:r>
+              <a:rPr lang="de-DE" sz="980" dirty="0">
+                <a:solidFill>
+                  <a:srgbClr val="98C379"/>
+                </a:solidFill>
+                <a:latin typeface="Consolas" pitchFamily="49" charset="0"/>
+              </a:rPr>
+              <a:t>0</a:t>
+            </a:r>
+            <a:r>
+              <a:rPr lang="de-DE" sz="980" dirty="0">
+                <a:solidFill>
+                  <a:srgbClr val="ABB2BF"/>
+                </a:solidFill>
+                <a:latin typeface="Consolas" pitchFamily="49" charset="0"/>
+              </a:rPr>
+              <a:t>],</a:t>
+            </a:r>
+          </a:p>
+          <a:p>
+            <a:pPr marL="0" indent="0" algn="l">
+              <a:buNone/>
+            </a:pPr>
+            <a:r>
+              <a:rPr lang="de-DE" sz="980" dirty="0">
+                <a:solidFill>
+                  <a:srgbClr val="ABB2BF"/>
+                </a:solidFill>
+                <a:latin typeface="Consolas" pitchFamily="49" charset="0"/>
+              </a:rPr>
+              <a:t>    [</a:t>
+            </a:r>
+            <a:r>
+              <a:rPr lang="de-DE" sz="980" dirty="0">
+                <a:solidFill>
+                  <a:srgbClr val="98C379"/>
+                </a:solidFill>
+                <a:latin typeface="Consolas" pitchFamily="49" charset="0"/>
+              </a:rPr>
+              <a:t>0</a:t>
+            </a:r>
+            <a:r>
+              <a:rPr lang="de-DE" sz="980" dirty="0">
+                <a:solidFill>
+                  <a:srgbClr val="ABB2BF"/>
+                </a:solidFill>
+                <a:latin typeface="Consolas" pitchFamily="49" charset="0"/>
+              </a:rPr>
+              <a:t>, </a:t>
+            </a:r>
+            <a:r>
+              <a:rPr lang="de-DE" sz="980" dirty="0">
+                <a:solidFill>
+                  <a:srgbClr val="98C379"/>
+                </a:solidFill>
+                <a:latin typeface="Consolas" pitchFamily="49" charset="0"/>
+              </a:rPr>
+              <a:t>1</a:t>
+            </a:r>
+            <a:r>
+              <a:rPr lang="de-DE" sz="980" dirty="0">
+                <a:solidFill>
+                  <a:srgbClr val="ABB2BF"/>
+                </a:solidFill>
+                <a:latin typeface="Consolas" pitchFamily="49" charset="0"/>
+              </a:rPr>
+              <a:t>, </a:t>
+            </a:r>
+            <a:r>
+              <a:rPr lang="de-DE" sz="980" dirty="0">
+                <a:solidFill>
+                  <a:srgbClr val="98C379"/>
+                </a:solidFill>
+                <a:latin typeface="Consolas" pitchFamily="49" charset="0"/>
+              </a:rPr>
+              <a:t>1</a:t>
+            </a:r>
+            <a:r>
+              <a:rPr lang="de-DE" sz="980" dirty="0">
+                <a:solidFill>
+                  <a:srgbClr val="ABB2BF"/>
+                </a:solidFill>
+                <a:latin typeface="Consolas" pitchFamily="49" charset="0"/>
+              </a:rPr>
+              <a:t>, </a:t>
+            </a:r>
+            <a:r>
+              <a:rPr lang="de-DE" sz="980" dirty="0">
+                <a:solidFill>
+                  <a:srgbClr val="98C379"/>
+                </a:solidFill>
+                <a:latin typeface="Consolas" pitchFamily="49" charset="0"/>
+              </a:rPr>
+              <a:t>1</a:t>
+            </a:r>
+            <a:r>
+              <a:rPr lang="de-DE" sz="980" dirty="0">
+                <a:solidFill>
+                  <a:srgbClr val="ABB2BF"/>
+                </a:solidFill>
+                <a:latin typeface="Consolas" pitchFamily="49" charset="0"/>
+              </a:rPr>
+              <a:t>, </a:t>
+            </a:r>
+            <a:r>
+              <a:rPr lang="de-DE" sz="980" dirty="0">
+                <a:solidFill>
+                  <a:srgbClr val="98C379"/>
+                </a:solidFill>
+                <a:latin typeface="Consolas" pitchFamily="49" charset="0"/>
+              </a:rPr>
+              <a:t>1</a:t>
+            </a:r>
+            <a:r>
+              <a:rPr lang="de-DE" sz="980" dirty="0">
+                <a:solidFill>
+                  <a:srgbClr val="ABB2BF"/>
+                </a:solidFill>
+                <a:latin typeface="Consolas" pitchFamily="49" charset="0"/>
+              </a:rPr>
+              <a:t>, </a:t>
+            </a:r>
+            <a:r>
+              <a:rPr lang="de-DE" sz="980" dirty="0">
+                <a:solidFill>
+                  <a:srgbClr val="98C379"/>
+                </a:solidFill>
+                <a:latin typeface="Consolas" pitchFamily="49" charset="0"/>
+              </a:rPr>
+              <a:t>0</a:t>
+            </a:r>
+            <a:r>
+              <a:rPr lang="de-DE" sz="980" dirty="0">
+                <a:solidFill>
+                  <a:srgbClr val="ABB2BF"/>
+                </a:solidFill>
+                <a:latin typeface="Consolas" pitchFamily="49" charset="0"/>
+              </a:rPr>
+              <a:t>],</a:t>
+            </a:r>
+          </a:p>
+          <a:p>
+            <a:pPr marL="0" indent="0" algn="l">
+              <a:buNone/>
+            </a:pPr>
+            <a:r>
+              <a:rPr lang="de-DE" sz="980" dirty="0">
+                <a:solidFill>
+                  <a:srgbClr val="ABB2BF"/>
+                </a:solidFill>
+                <a:latin typeface="Consolas" pitchFamily="49" charset="0"/>
+              </a:rPr>
+              <a:t>    [</a:t>
+            </a:r>
+            <a:r>
+              <a:rPr lang="de-DE" sz="980" dirty="0">
+                <a:solidFill>
+                  <a:srgbClr val="98C379"/>
+                </a:solidFill>
+                <a:latin typeface="Consolas" pitchFamily="49" charset="0"/>
+              </a:rPr>
+              <a:t>0</a:t>
+            </a:r>
+            <a:r>
+              <a:rPr lang="de-DE" sz="980" dirty="0">
+                <a:solidFill>
+                  <a:srgbClr val="ABB2BF"/>
+                </a:solidFill>
+                <a:latin typeface="Consolas" pitchFamily="49" charset="0"/>
+              </a:rPr>
+              <a:t>, </a:t>
+            </a:r>
+            <a:r>
+              <a:rPr lang="de-DE" sz="980" dirty="0">
+                <a:solidFill>
+                  <a:srgbClr val="98C379"/>
+                </a:solidFill>
+                <a:latin typeface="Consolas" pitchFamily="49" charset="0"/>
+              </a:rPr>
+              <a:t>0</a:t>
+            </a:r>
+            <a:r>
+              <a:rPr lang="de-DE" sz="980" dirty="0">
+                <a:solidFill>
+                  <a:srgbClr val="ABB2BF"/>
+                </a:solidFill>
+                <a:latin typeface="Consolas" pitchFamily="49" charset="0"/>
+              </a:rPr>
+              <a:t>, </a:t>
+            </a:r>
+            <a:r>
+              <a:rPr lang="de-DE" sz="980" dirty="0">
+                <a:solidFill>
+                  <a:srgbClr val="98C379"/>
+                </a:solidFill>
+                <a:latin typeface="Consolas" pitchFamily="49" charset="0"/>
+              </a:rPr>
+              <a:t>0</a:t>
+            </a:r>
+            <a:r>
+              <a:rPr lang="de-DE" sz="980" dirty="0">
+                <a:solidFill>
+                  <a:srgbClr val="ABB2BF"/>
+                </a:solidFill>
+                <a:latin typeface="Consolas" pitchFamily="49" charset="0"/>
+              </a:rPr>
+              <a:t>, </a:t>
+            </a:r>
+            <a:r>
+              <a:rPr lang="de-DE" sz="980" dirty="0">
+                <a:solidFill>
+                  <a:srgbClr val="98C379"/>
+                </a:solidFill>
+                <a:latin typeface="Consolas" pitchFamily="49" charset="0"/>
+              </a:rPr>
+              <a:t>0</a:t>
+            </a:r>
+            <a:r>
+              <a:rPr lang="de-DE" sz="980" dirty="0">
+                <a:solidFill>
+                  <a:srgbClr val="ABB2BF"/>
+                </a:solidFill>
+                <a:latin typeface="Consolas" pitchFamily="49" charset="0"/>
+              </a:rPr>
+              <a:t>, </a:t>
+            </a:r>
+            <a:r>
+              <a:rPr lang="de-DE" sz="980" dirty="0">
+                <a:solidFill>
+                  <a:srgbClr val="98C379"/>
+                </a:solidFill>
+                <a:latin typeface="Consolas" pitchFamily="49" charset="0"/>
+              </a:rPr>
+              <a:t>0</a:t>
+            </a:r>
+            <a:r>
+              <a:rPr lang="de-DE" sz="980" dirty="0">
+                <a:solidFill>
+                  <a:srgbClr val="ABB2BF"/>
+                </a:solidFill>
+                <a:latin typeface="Consolas" pitchFamily="49" charset="0"/>
+              </a:rPr>
+              <a:t>, </a:t>
+            </a:r>
+            <a:r>
+              <a:rPr lang="de-DE" sz="980" dirty="0">
+                <a:solidFill>
+                  <a:srgbClr val="98C379"/>
+                </a:solidFill>
+                <a:latin typeface="Consolas" pitchFamily="49" charset="0"/>
+              </a:rPr>
+              <a:t>0</a:t>
+            </a:r>
+            <a:r>
+              <a:rPr lang="de-DE" sz="980" dirty="0">
+                <a:solidFill>
+                  <a:srgbClr val="ABB2BF"/>
+                </a:solidFill>
+                <a:latin typeface="Consolas" pitchFamily="49" charset="0"/>
+              </a:rPr>
+              <a:t>],</a:t>
+            </a:r>
+          </a:p>
+          <a:p>
+            <a:pPr marL="0" indent="0" algn="l">
+              <a:buNone/>
+            </a:pPr>
+            <a:r>
+              <a:rPr lang="de-DE" sz="980" dirty="0">
+                <a:solidFill>
+                  <a:srgbClr val="ABB2BF"/>
+                </a:solidFill>
+                <a:latin typeface="Consolas" pitchFamily="49" charset="0"/>
+              </a:rPr>
+              <a:t>]</a:t>
+            </a:r>
+          </a:p>
+          <a:p>
+            <a:pPr>
+              <a:buNone/>
+            </a:pPr>
+            <a:endParaRPr lang="de-DE" sz="600" dirty="0"/>
+          </a:p>
+          <a:p>
+            <a:pPr marL="0" indent="0" algn="l">
+              <a:buNone/>
+            </a:pPr>
+            <a:r>
+              <a:rPr lang="de-DE" sz="980" dirty="0">
+                <a:solidFill>
+                  <a:srgbClr val="56B6C2"/>
+                </a:solidFill>
+                <a:latin typeface="Consolas" pitchFamily="49" charset="0"/>
+              </a:rPr>
+              <a:t>def</a:t>
+            </a:r>
+            <a:r>
+              <a:rPr lang="de-DE" sz="980" dirty="0">
+                <a:solidFill>
+                  <a:srgbClr val="ABB2BF"/>
+                </a:solidFill>
+                <a:latin typeface="Consolas" pitchFamily="49" charset="0"/>
+              </a:rPr>
+              <a:t> </a:t>
+            </a:r>
+            <a:r>
+              <a:rPr lang="de-DE" sz="980" dirty="0">
+                <a:solidFill>
+                  <a:srgbClr val="61AFEF"/>
+                </a:solidFill>
+                <a:latin typeface="Consolas" pitchFamily="49" charset="0"/>
+              </a:rPr>
+              <a:t>evaluate</a:t>
+            </a:r>
+            <a:r>
+              <a:rPr lang="de-DE" sz="980" dirty="0">
+                <a:solidFill>
+                  <a:srgbClr val="ABB2BF"/>
+                </a:solidFill>
+                <a:latin typeface="Consolas" pitchFamily="49" charset="0"/>
+              </a:rPr>
+              <a:t>(board):</a:t>
+            </a:r>
+          </a:p>
+          <a:p>
+            <a:pPr marL="0" indent="0" algn="l">
+              <a:buNone/>
+            </a:pPr>
+            <a:r>
+              <a:rPr lang="de-DE" sz="980" dirty="0">
+                <a:solidFill>
+                  <a:srgbClr val="ABB2BF"/>
+                </a:solidFill>
+                <a:latin typeface="Consolas" pitchFamily="49" charset="0"/>
+              </a:rPr>
+              <a:t>    score = </a:t>
+            </a:r>
+            <a:r>
+              <a:rPr lang="de-DE" sz="980" dirty="0">
+                <a:solidFill>
+                  <a:srgbClr val="98C379"/>
+                </a:solidFill>
+                <a:latin typeface="Consolas" pitchFamily="49" charset="0"/>
+              </a:rPr>
+              <a:t>0</a:t>
+            </a:r>
+          </a:p>
+          <a:p>
+            <a:pPr marL="0" indent="0" algn="l">
+              <a:buNone/>
+            </a:pPr>
+            <a:r>
+              <a:rPr lang="de-DE" sz="980" dirty="0">
+                <a:solidFill>
+                  <a:srgbClr val="56B6C2"/>
+                </a:solidFill>
+                <a:latin typeface="Consolas" pitchFamily="49" charset="0"/>
+              </a:rPr>
+              <a:t>    for</a:t>
+            </a:r>
+            <a:r>
+              <a:rPr lang="de-DE" sz="980" dirty="0">
+                <a:solidFill>
+                  <a:srgbClr val="ABB2BF"/>
+                </a:solidFill>
+                <a:latin typeface="Consolas" pitchFamily="49" charset="0"/>
+              </a:rPr>
+              <a:t> row, col, piece </a:t>
+            </a:r>
+            <a:r>
+              <a:rPr lang="de-DE" sz="980" dirty="0">
+                <a:solidFill>
+                  <a:srgbClr val="56B6C2"/>
+                </a:solidFill>
+                <a:latin typeface="Consolas" pitchFamily="49" charset="0"/>
+              </a:rPr>
+              <a:t>in</a:t>
+            </a:r>
+            <a:r>
+              <a:rPr lang="de-DE" sz="980" dirty="0">
+                <a:solidFill>
+                  <a:srgbClr val="ABB2BF"/>
+                </a:solidFill>
+                <a:latin typeface="Consolas" pitchFamily="49" charset="0"/>
+              </a:rPr>
+              <a:t> all_pieces(board):</a:t>
+            </a:r>
+          </a:p>
+          <a:p>
+            <a:pPr marL="0" indent="0" algn="l">
+              <a:buNone/>
+            </a:pPr>
+            <a:r>
+              <a:rPr lang="de-DE" sz="980" dirty="0">
+                <a:solidFill>
+                  <a:srgbClr val="56B6C2"/>
+                </a:solidFill>
+                <a:latin typeface="Consolas" pitchFamily="49" charset="0"/>
+              </a:rPr>
+              <a:t>        if</a:t>
+            </a:r>
+            <a:r>
+              <a:rPr lang="de-DE" sz="980" dirty="0">
+                <a:solidFill>
+                  <a:srgbClr val="ABB2BF"/>
+                </a:solidFill>
+                <a:latin typeface="Consolas" pitchFamily="49" charset="0"/>
+              </a:rPr>
+              <a:t> piece == BLACK:  </a:t>
+            </a:r>
+            <a:r>
+              <a:rPr lang="de-DE" sz="980" i="1" dirty="0">
+                <a:solidFill>
+                  <a:srgbClr val="5C6370"/>
+                </a:solidFill>
+                <a:latin typeface="Consolas" pitchFamily="49" charset="0"/>
+              </a:rPr>
+              <a:t># KI</a:t>
+            </a:r>
+          </a:p>
+          <a:p>
+            <a:pPr marL="0" indent="0" algn="l">
+              <a:buNone/>
+            </a:pPr>
+            <a:r>
+              <a:rPr lang="de-DE" sz="980" dirty="0">
+                <a:solidFill>
+                  <a:srgbClr val="ABB2BF"/>
+                </a:solidFill>
+                <a:latin typeface="Consolas" pitchFamily="49" charset="0"/>
+              </a:rPr>
+              <a:t>            score += </a:t>
+            </a:r>
+            <a:r>
+              <a:rPr lang="de-DE" sz="980" dirty="0">
+                <a:solidFill>
+                  <a:srgbClr val="98C379"/>
+                </a:solidFill>
+                <a:latin typeface="Consolas" pitchFamily="49" charset="0"/>
+              </a:rPr>
+              <a:t>10</a:t>
+            </a:r>
+            <a:r>
+              <a:rPr lang="de-DE" sz="980" i="1" dirty="0">
+                <a:solidFill>
+                  <a:srgbClr val="5C6370"/>
+                </a:solidFill>
+                <a:latin typeface="Consolas" pitchFamily="49" charset="0"/>
+              </a:rPr>
+              <a:t>              # Figurenzahl</a:t>
+            </a:r>
+          </a:p>
+          <a:p>
+            <a:pPr marL="0" indent="0" algn="l">
+              <a:buNone/>
+            </a:pPr>
+            <a:r>
+              <a:rPr lang="de-DE" sz="980" dirty="0">
+                <a:solidFill>
+                  <a:srgbClr val="ABB2BF"/>
+                </a:solidFill>
+                <a:latin typeface="Consolas" pitchFamily="49" charset="0"/>
+              </a:rPr>
+              <a:t>            score += row * </a:t>
+            </a:r>
+            <a:r>
+              <a:rPr lang="de-DE" sz="980" dirty="0">
+                <a:solidFill>
+                  <a:srgbClr val="98C379"/>
+                </a:solidFill>
+                <a:latin typeface="Consolas" pitchFamily="49" charset="0"/>
+              </a:rPr>
+              <a:t>2</a:t>
+            </a:r>
+            <a:r>
+              <a:rPr lang="de-DE" sz="980" i="1" dirty="0">
+                <a:solidFill>
+                  <a:srgbClr val="5C6370"/>
+                </a:solidFill>
+                <a:latin typeface="Consolas" pitchFamily="49" charset="0"/>
+              </a:rPr>
+              <a:t>         # Fortschritt</a:t>
+            </a:r>
+          </a:p>
+          <a:p>
+            <a:pPr marL="0" indent="0" algn="l">
+              <a:buNone/>
+            </a:pPr>
+            <a:r>
+              <a:rPr lang="de-DE" sz="980" dirty="0">
+                <a:solidFill>
+                  <a:srgbClr val="ABB2BF"/>
+                </a:solidFill>
+                <a:latin typeface="Consolas" pitchFamily="49" charset="0"/>
+              </a:rPr>
+              <a:t>            score += CENTER_BONUS[row][col]  </a:t>
+            </a:r>
+            <a:r>
+              <a:rPr lang="de-DE" sz="980" i="1" dirty="0">
+                <a:solidFill>
+                  <a:srgbClr val="5C6370"/>
+                </a:solidFill>
+                <a:latin typeface="Consolas" pitchFamily="49" charset="0"/>
+              </a:rPr>
+              <a:t># Zentrum</a:t>
+            </a:r>
+          </a:p>
+          <a:p>
+            <a:pPr marL="0" indent="0" algn="l">
+              <a:buNone/>
+            </a:pPr>
+            <a:r>
+              <a:rPr lang="de-DE" sz="980" dirty="0">
+                <a:solidFill>
+                  <a:srgbClr val="56B6C2"/>
+                </a:solidFill>
+                <a:latin typeface="Consolas" pitchFamily="49" charset="0"/>
+              </a:rPr>
+              <a:t>        elif</a:t>
+            </a:r>
+            <a:r>
+              <a:rPr lang="de-DE" sz="980" dirty="0">
+                <a:solidFill>
+                  <a:srgbClr val="ABB2BF"/>
+                </a:solidFill>
+                <a:latin typeface="Consolas" pitchFamily="49" charset="0"/>
+              </a:rPr>
+              <a:t> piece == WHITE:  </a:t>
+            </a:r>
+            <a:r>
+              <a:rPr lang="de-DE" sz="980" i="1" dirty="0">
+                <a:solidFill>
+                  <a:srgbClr val="5C6370"/>
+                </a:solidFill>
+                <a:latin typeface="Consolas" pitchFamily="49" charset="0"/>
+              </a:rPr>
+              <a:t># Mensch → negativ</a:t>
+            </a:r>
+          </a:p>
+          <a:p>
+            <a:pPr marL="0" indent="0" algn="l">
+              <a:buNone/>
+            </a:pPr>
+            <a:r>
+              <a:rPr lang="de-DE" sz="980" dirty="0">
+                <a:solidFill>
+                  <a:srgbClr val="ABB2BF"/>
+                </a:solidFill>
+                <a:latin typeface="Consolas" pitchFamily="49" charset="0"/>
+              </a:rPr>
+              <a:t>            score -= </a:t>
+            </a:r>
+            <a:r>
+              <a:rPr lang="de-DE" sz="980" dirty="0">
+                <a:solidFill>
+                  <a:srgbClr val="98C379"/>
+                </a:solidFill>
+                <a:latin typeface="Consolas" pitchFamily="49" charset="0"/>
+              </a:rPr>
+              <a:t>10</a:t>
+            </a:r>
+            <a:r>
+              <a:rPr lang="de-DE" sz="980" dirty="0">
+                <a:solidFill>
+                  <a:srgbClr val="ABB2BF"/>
+                </a:solidFill>
+                <a:latin typeface="Consolas" pitchFamily="49" charset="0"/>
+              </a:rPr>
+              <a:t> + (BOARD_SIZE-</a:t>
+            </a:r>
+            <a:r>
+              <a:rPr lang="de-DE" sz="980" dirty="0">
+                <a:solidFill>
+                  <a:srgbClr val="98C379"/>
+                </a:solidFill>
+                <a:latin typeface="Consolas" pitchFamily="49" charset="0"/>
+              </a:rPr>
+              <a:t>1</a:t>
+            </a:r>
+            <a:r>
+              <a:rPr lang="de-DE" sz="980" dirty="0">
+                <a:solidFill>
+                  <a:srgbClr val="ABB2BF"/>
+                </a:solidFill>
+                <a:latin typeface="Consolas" pitchFamily="49" charset="0"/>
+              </a:rPr>
+              <a:t>-row)*</a:t>
+            </a:r>
+            <a:r>
+              <a:rPr lang="de-DE" sz="980" dirty="0">
+                <a:solidFill>
+                  <a:srgbClr val="98C379"/>
+                </a:solidFill>
+                <a:latin typeface="Consolas" pitchFamily="49" charset="0"/>
+              </a:rPr>
+              <a:t>2</a:t>
+            </a:r>
+          </a:p>
+          <a:p>
+            <a:pPr marL="0" indent="0" algn="l">
+              <a:buNone/>
+            </a:pPr>
+            <a:r>
+              <a:rPr lang="de-DE" sz="980" dirty="0">
+                <a:solidFill>
+                  <a:srgbClr val="ABB2BF"/>
+                </a:solidFill>
+                <a:latin typeface="Consolas" pitchFamily="49" charset="0"/>
+              </a:rPr>
+              <a:t>            score -= CENTER_BONUS[row][col]</a:t>
+            </a:r>
+          </a:p>
+          <a:p>
+            <a:pPr marL="0" indent="0" algn="l">
+              <a:buNone/>
+            </a:pPr>
+            <a:r>
+              <a:rPr lang="de-DE" sz="980" dirty="0">
+                <a:solidFill>
+                  <a:srgbClr val="56B6C2"/>
+                </a:solidFill>
+                <a:latin typeface="Consolas" pitchFamily="49" charset="0"/>
+              </a:rPr>
+              <a:t>    return</a:t>
+            </a:r>
+            <a:r>
+              <a:rPr lang="de-DE" sz="980" dirty="0">
+                <a:solidFill>
+                  <a:srgbClr val="ABB2BF"/>
+                </a:solidFill>
+                <a:latin typeface="Consolas" pitchFamily="49" charset="0"/>
+              </a:rPr>
+              <a:t> score</a:t>
+            </a:r>
+          </a:p>
+        </p:txBody>
+      </p:sp>
+      <p:sp>
+        <p:nvSpPr>
+          <p:cNvPr id="7" name="BulletCard"/>
+          <p:cNvSpPr/>
+          <p:nvPr/>
+        </p:nvSpPr>
+        <p:spPr>
+          <a:xfrm>
+            <a:off x="5707200" y="1234440"/>
+            <a:ext cx="3071040" cy="3650000"/>
+          </a:xfrm>
+          <a:prstGeom prst="rect">
+            <a:avLst/>
+          </a:prstGeom>
+          <a:solidFill>
+            <a:srgbClr val="1E2A4A"/>
+          </a:solidFill>
+          <a:ln w="6350">
+            <a:solidFill>
+              <a:srgbClr val="2A3A5E"/>
+            </a:solidFill>
+            <a:prstDash val="solid"/>
+          </a:ln>
+        </p:spPr>
+      </p:sp>
+      <p:sp>
+        <p:nvSpPr>
+          <p:cNvPr id="8" name="BulletText"/>
+          <p:cNvSpPr/>
+          <p:nvPr/>
+        </p:nvSpPr>
+        <p:spPr>
+          <a:xfrm>
+            <a:off x="5798640" y="1325880"/>
+            <a:ext cx="2888160" cy="3467120"/>
+          </a:xfrm>
+          <a:prstGeom prst="rect">
+            <a:avLst/>
+          </a:prstGeom>
+          <a:noFill/>
+          <a:ln/>
+        </p:spPr>
+        <p:txBody>
+          <a:bodyPr wrap="square" lIns="114300" tIns="91440" rIns="114300" bIns="91440" rtlCol="0" anchor="t"/>
+          <a:lstStyle/>
+          <a:p>
+            <a:pPr marL="342900" indent="-342900" algn="l">
+              <a:buChar char="▸"/>
+            </a:pPr>
+            <a:r>
+              <a:rPr lang="de-DE" sz="1150" b="1" dirty="0">
+                <a:solidFill>
+                  <a:srgbClr val="B0C4DE"/>
+                </a:solidFill>
+                <a:latin typeface="Calibri" pitchFamily="49" charset="0"/>
+              </a:rPr>
+              <a:t>Figurenzahl +10</a:t>
+            </a:r>
+          </a:p>
+          <a:p>
+            <a:pPr marL="342900" indent="0" algn="l">
+              <a:buNone/>
+            </a:pPr>
+            <a:r>
+              <a:rPr lang="de-DE" sz="1000" dirty="0">
+                <a:solidFill>
+                  <a:srgbClr val="8892A4"/>
+                </a:solidFill>
+                <a:latin typeface="Calibri" pitchFamily="49" charset="0"/>
+              </a:rPr>
+              <a:t>Jeder eigene Bauer zählt +10, jeder gegnerische -10</a:t>
+            </a:r>
+          </a:p>
+          <a:p>
+            <a:pPr marL="342900" indent="-342900" algn="l">
+              <a:spcBef>
+                <a:spcPts val="160"/>
+              </a:spcBef>
+              <a:buChar char="▸"/>
+            </a:pPr>
+            <a:r>
+              <a:rPr lang="de-DE" sz="1150" b="1" dirty="0">
+                <a:solidFill>
+                  <a:srgbClr val="B0C4DE"/>
+                </a:solidFill>
+                <a:latin typeface="Calibri" pitchFamily="49" charset="0"/>
+              </a:rPr>
+              <a:t>Fortschritt +row×2</a:t>
+            </a:r>
+          </a:p>
+          <a:p>
+            <a:pPr marL="342900" indent="0" algn="l">
+              <a:buNone/>
+            </a:pPr>
+            <a:r>
+              <a:rPr lang="de-DE" sz="1000" dirty="0">
+                <a:solidFill>
+                  <a:srgbClr val="8892A4"/>
+                </a:solidFill>
+                <a:latin typeface="Calibri" pitchFamily="49" charset="0"/>
+              </a:rPr>
+              <a:t>KI wird für Vorwärtsbewegung belohnt</a:t>
+            </a:r>
+          </a:p>
+          <a:p>
+            <a:pPr marL="342900" indent="-342900" algn="l">
+              <a:spcBef>
+                <a:spcPts val="160"/>
+              </a:spcBef>
+              <a:buChar char="▸"/>
+            </a:pPr>
+            <a:r>
+              <a:rPr lang="de-DE" sz="1150" b="1" dirty="0">
+                <a:solidFill>
+                  <a:srgbClr val="B0C4DE"/>
+                </a:solidFill>
+                <a:latin typeface="Calibri" pitchFamily="49" charset="0"/>
+              </a:rPr>
+              <a:t>Zentrum +0…+3</a:t>
+            </a:r>
+          </a:p>
+          <a:p>
+            <a:pPr marL="342900" indent="0" algn="l">
+              <a:buNone/>
+            </a:pPr>
+            <a:r>
+              <a:rPr lang="de-DE" sz="1000" dirty="0">
+                <a:solidFill>
+                  <a:srgbClr val="8892A4"/>
+                </a:solidFill>
+                <a:latin typeface="Calibri" pitchFamily="49" charset="0"/>
+              </a:rPr>
+              <a:t>Zentralposition ist strategisch wertvoller</a:t>
+            </a:r>
+          </a:p>
+          <a:p>
+            <a:pPr marL="342900" indent="-342900" algn="l">
+              <a:spcBef>
+                <a:spcPts val="160"/>
+              </a:spcBef>
+              <a:buChar char="▸"/>
+            </a:pPr>
+            <a:r>
+              <a:rPr lang="de-DE" sz="1150" b="1" dirty="0">
+                <a:solidFill>
+                  <a:srgbClr val="B0C4DE"/>
+                </a:solidFill>
+                <a:latin typeface="Calibri" pitchFamily="49" charset="0"/>
+              </a:rPr>
+              <a:t>Positiv = KI gut</a:t>
+            </a:r>
+          </a:p>
+          <a:p>
+            <a:pPr marL="342900" indent="0" algn="l">
+              <a:buNone/>
+            </a:pPr>
+            <a:r>
+              <a:rPr lang="de-DE" sz="1000" dirty="0">
+                <a:solidFill>
+                  <a:srgbClr val="8892A4"/>
+                </a:solidFill>
+                <a:latin typeface="Calibri" pitchFamily="49" charset="0"/>
+              </a:rPr>
+              <a:t>Score &gt; 0 → Vorteil für KI (BLACK = -1)</a:t>
+            </a:r>
+          </a:p>
+          <a:p>
+            <a:pPr marL="342900" indent="-342900" algn="l">
+              <a:spcBef>
+                <a:spcPts val="160"/>
+              </a:spcBef>
+              <a:buChar char="▸"/>
+            </a:pPr>
+            <a:r>
+              <a:rPr lang="de-DE" sz="1150" b="1" dirty="0">
+                <a:solidFill>
+                  <a:srgbClr val="B0C4DE"/>
+                </a:solidFill>
+                <a:latin typeface="Calibri" pitchFamily="49" charset="0"/>
+              </a:rPr>
+              <a:t>Heuristik = Stärke</a:t>
+            </a:r>
+          </a:p>
+          <a:p>
+            <a:pPr marL="342900" indent="0" algn="l">
+              <a:buNone/>
+            </a:pPr>
+            <a:r>
+              <a:rPr lang="de-DE" sz="1000" dirty="0">
+                <a:solidFill>
+                  <a:srgbClr val="8892A4"/>
+                </a:solidFill>
+                <a:latin typeface="Calibri" pitchFamily="49" charset="0"/>
+              </a:rPr>
+              <a:t>Bessere Bewertungsfunktion → stärkere KI</a:t>
+            </a:r>
+          </a:p>
+        </p:txBody>
+      </p:sp>
+    </p:spTree>
+  </p:cSld>
+  <p:clrMapOvr>
+    <a:masterClrMapping/>
+  </p:clrMapOvr>
+</p:sld>
+</file>
+
+<file path=ppt/slides/slide14.xml><?xml version="1.0" encoding="utf-8"?>
+<p:sld xmlns:a="http://schemas.openxmlformats.org/drawingml/2006/main" xmlns:p="http://schemas.openxmlformats.org/presentationml/2006/main" xmlns:r="http://schemas.openxmlformats.org/officeDocument/2006/relationships">
+  <p:cSld>
+    <p:bg>
+      <p:bgPr>
+        <a:solidFill>
+          <a:srgbClr val="F0F4FF"/>
+        </a:solidFill>
+        <a:effectLst/>
+      </p:bgPr>
+    </p:bg>
+    <p:spTree>
+      <p:nvGrpSpPr>
+        <p:cNvPr id="1" name=""/>
+        <p:cNvGrpSpPr/>
+        <p:nvPr/>
+      </p:nvGrpSpPr>
+      <p:grpSpPr/>
+      <p:sp>
+        <p:nvSpPr>
+          <p:cNvPr id="2" name="AccentStripe"/>
+          <p:cNvSpPr/>
+          <p:nvPr/>
+        </p:nvSpPr>
+        <p:spPr>
+          <a:xfrm>
+            <a:off x="0" y="0"/>
+            <a:ext cx="91440" cy="5143500"/>
+          </a:xfrm>
+          <a:prstGeom prst="rect">
+            <a:avLst/>
+          </a:prstGeom>
+          <a:solidFill>
+            <a:srgbClr val="4472C4"/>
+          </a:solidFill>
+        </p:spPr>
+      </p:sp>
+      <p:sp>
+        <p:nvSpPr>
+          <p:cNvPr id="3" name="Title"/>
+          <p:cNvSpPr/>
+          <p:nvPr/>
+        </p:nvSpPr>
+        <p:spPr>
+          <a:xfrm>
+            <a:off x="457200" y="256032"/>
+            <a:ext cx="8229600" cy="594360"/>
+          </a:xfrm>
+          <a:prstGeom prst="rect">
+            <a:avLst/>
+          </a:prstGeom>
+          <a:noFill/>
+          <a:ln/>
+        </p:spPr>
+        <p:txBody>
+          <a:bodyPr wrap="square" lIns="114300" tIns="91440" rIns="114300" bIns="91440" rtlCol="0" anchor="ctr"/>
+          <a:lstStyle/>
+          <a:p>
+            <a:pPr marL="0" indent="0" algn="l">
+              <a:buNone/>
+            </a:pPr>
+            <a:r>
+              <a:rPr lang="de-DE" sz="3000" b="1" dirty="0">
+                <a:solidFill>
+                  <a:srgbClr val="1A1A2E"/>
+                </a:solidFill>
+                <a:latin typeface="Arial Black" pitchFamily="49" charset="0"/>
+              </a:rPr>
+              <a:t>tictactoe.py – Kandidatenzüge statt Brute-Force</a:t>
+            </a:r>
+          </a:p>
+        </p:txBody>
+      </p:sp>
+      <p:sp>
+        <p:nvSpPr>
+          <p:cNvPr id="4" name="Subtitle"/>
+          <p:cNvSpPr/>
+          <p:nvPr/>
+        </p:nvSpPr>
+        <p:spPr>
+          <a:xfrm>
+            <a:off x="457200" y="804672"/>
+            <a:ext cx="8229600" cy="320040"/>
+          </a:xfrm>
+          <a:prstGeom prst="rect">
+            <a:avLst/>
+          </a:prstGeom>
+          <a:noFill/>
+          <a:ln/>
+        </p:spPr>
+        <p:txBody>
+          <a:bodyPr wrap="square" lIns="114300" tIns="91440" rIns="114300" bIns="91440" rtlCol="0" anchor="ctr"/>
+          <a:lstStyle/>
+          <a:p>
+            <a:pPr marL="0" indent="0" algn="l">
+              <a:buNone/>
+            </a:pPr>
+            <a:r>
+              <a:rPr lang="de-DE" sz="1200" dirty="0">
+                <a:solidFill>
+                  <a:srgbClr val="8892A4"/>
+                </a:solidFill>
+                <a:latin typeface="Calibri" pitchFamily="49" charset="0"/>
+              </a:rPr>
+              <a:t>Optimierte Zugauswahl · Center-Sorting · shallow copy</a:t>
+            </a:r>
+          </a:p>
+        </p:txBody>
+      </p:sp>
+      <p:sp>
+        <p:nvSpPr>
+          <p:cNvPr id="5" name="CodeCard"/>
+          <p:cNvSpPr/>
+          <p:nvPr/>
+        </p:nvSpPr>
+        <p:spPr>
+          <a:xfrm>
+            <a:off x="365760" y="1234440"/>
+            <a:ext cx="5250000" cy="3650000"/>
+          </a:xfrm>
+          <a:prstGeom prst="rect">
+            <a:avLst/>
+          </a:prstGeom>
+          <a:solidFill>
+            <a:srgbClr val="121224"/>
+          </a:solidFill>
+          <a:ln w="9525">
+            <a:solidFill>
+              <a:srgbClr val="4472C4"/>
+            </a:solidFill>
+            <a:prstDash val="solid"/>
+          </a:ln>
+        </p:spPr>
+      </p:sp>
+      <p:sp>
+        <p:nvSpPr>
+          <p:cNvPr id="6" name="CodeText"/>
+          <p:cNvSpPr/>
+          <p:nvPr/>
+        </p:nvSpPr>
+        <p:spPr>
+          <a:xfrm>
+            <a:off x="457200" y="1325880"/>
+            <a:ext cx="5067120" cy="3467120"/>
+          </a:xfrm>
+          <a:prstGeom prst="rect">
+            <a:avLst/>
+          </a:prstGeom>
+          <a:noFill/>
+          <a:ln/>
+        </p:spPr>
+        <p:txBody>
+          <a:bodyPr wrap="square" lIns="114300" tIns="91440" rIns="114300" bIns="91440" rtlCol="0" anchor="t"/>
+          <a:lstStyle/>
+          <a:p>
+            <a:pPr marL="0" indent="0" algn="l">
+              <a:buNone/>
+            </a:pPr>
+            <a:r>
+              <a:rPr lang="de-DE" sz="980" dirty="0">
+                <a:solidFill>
+                  <a:srgbClr val="56B6C2"/>
+                </a:solidFill>
+                <a:latin typeface="Consolas" pitchFamily="49" charset="0"/>
+              </a:rPr>
+              <a:t>def</a:t>
+            </a:r>
+            <a:r>
+              <a:rPr lang="de-DE" sz="980" dirty="0">
+                <a:solidFill>
+                  <a:srgbClr val="ABB2BF"/>
+                </a:solidFill>
+                <a:latin typeface="Consolas" pitchFamily="49" charset="0"/>
+              </a:rPr>
+              <a:t> </a:t>
+            </a:r>
+            <a:r>
+              <a:rPr lang="de-DE" sz="980" dirty="0">
+                <a:solidFill>
+                  <a:srgbClr val="61AFEF"/>
+                </a:solidFill>
+                <a:latin typeface="Consolas" pitchFamily="49" charset="0"/>
+              </a:rPr>
+              <a:t>get_valid_moves</a:t>
+            </a:r>
+            <a:r>
+              <a:rPr lang="de-DE" sz="980" dirty="0">
+                <a:solidFill>
+                  <a:srgbClr val="ABB2BF"/>
+                </a:solidFill>
+                <a:latin typeface="Consolas" pitchFamily="49" charset="0"/>
+              </a:rPr>
+              <a:t>(board, is_maximizing):</a:t>
+            </a:r>
+          </a:p>
+          <a:p>
+            <a:pPr marL="0" indent="0" algn="l">
+              <a:buNone/>
+            </a:pPr>
+            <a:r>
+              <a:rPr lang="de-DE" sz="980" i="1" dirty="0">
+                <a:solidFill>
+                  <a:srgbClr val="5C6370"/>
+                </a:solidFill>
+                <a:latin typeface="Consolas" pitchFamily="49" charset="0"/>
+              </a:rPr>
+              <a:t>    # Nur Felder neben bereits besetzten betrachten</a:t>
+            </a:r>
+          </a:p>
+          <a:p>
+            <a:pPr marL="0" indent="0" algn="l">
+              <a:buNone/>
+            </a:pPr>
+            <a:r>
+              <a:rPr lang="de-DE" sz="980" dirty="0">
+                <a:solidFill>
+                  <a:srgbClr val="ABB2BF"/>
+                </a:solidFill>
+                <a:latin typeface="Consolas" pitchFamily="49" charset="0"/>
+              </a:rPr>
+              <a:t>    candidates = </a:t>
+            </a:r>
+            <a:r>
+              <a:rPr lang="de-DE" sz="980" dirty="0">
+                <a:solidFill>
+                  <a:srgbClr val="61AFEF"/>
+                </a:solidFill>
+                <a:latin typeface="Consolas" pitchFamily="49" charset="0"/>
+              </a:rPr>
+              <a:t>set</a:t>
+            </a:r>
+            <a:r>
+              <a:rPr lang="de-DE" sz="980" dirty="0">
+                <a:solidFill>
+                  <a:srgbClr val="ABB2BF"/>
+                </a:solidFill>
+                <a:latin typeface="Consolas" pitchFamily="49" charset="0"/>
+              </a:rPr>
+              <a:t>()</a:t>
+            </a:r>
+          </a:p>
+          <a:p>
+            <a:pPr marL="0" indent="0" algn="l">
+              <a:buNone/>
+            </a:pPr>
+            <a:r>
+              <a:rPr lang="de-DE" sz="980" dirty="0">
+                <a:solidFill>
+                  <a:srgbClr val="56B6C2"/>
+                </a:solidFill>
+                <a:latin typeface="Consolas" pitchFamily="49" charset="0"/>
+              </a:rPr>
+              <a:t>    for</a:t>
+            </a:r>
+            <a:r>
+              <a:rPr lang="de-DE" sz="980" dirty="0">
+                <a:solidFill>
+                  <a:srgbClr val="ABB2BF"/>
+                </a:solidFill>
+                <a:latin typeface="Consolas" pitchFamily="49" charset="0"/>
+              </a:rPr>
+              <a:t> (r, c) </a:t>
+            </a:r>
+            <a:r>
+              <a:rPr lang="de-DE" sz="980" dirty="0">
+                <a:solidFill>
+                  <a:srgbClr val="56B6C2"/>
+                </a:solidFill>
+                <a:latin typeface="Consolas" pitchFamily="49" charset="0"/>
+              </a:rPr>
+              <a:t>in</a:t>
+            </a:r>
+            <a:r>
+              <a:rPr lang="de-DE" sz="980" dirty="0">
+                <a:solidFill>
+                  <a:srgbClr val="ABB2BF"/>
+                </a:solidFill>
+                <a:latin typeface="Consolas" pitchFamily="49" charset="0"/>
+              </a:rPr>
+              <a:t> occupied:</a:t>
+            </a:r>
+          </a:p>
+          <a:p>
+            <a:pPr marL="0" indent="0" algn="l">
+              <a:buNone/>
+            </a:pPr>
+            <a:r>
+              <a:rPr lang="de-DE" sz="980" dirty="0">
+                <a:solidFill>
+                  <a:srgbClr val="56B6C2"/>
+                </a:solidFill>
+                <a:latin typeface="Consolas" pitchFamily="49" charset="0"/>
+              </a:rPr>
+              <a:t>        for</a:t>
+            </a:r>
+            <a:r>
+              <a:rPr lang="de-DE" sz="980" dirty="0">
+                <a:solidFill>
+                  <a:srgbClr val="ABB2BF"/>
+                </a:solidFill>
+                <a:latin typeface="Consolas" pitchFamily="49" charset="0"/>
+              </a:rPr>
+              <a:t> dr </a:t>
+            </a:r>
+            <a:r>
+              <a:rPr lang="de-DE" sz="980" dirty="0">
+                <a:solidFill>
+                  <a:srgbClr val="56B6C2"/>
+                </a:solidFill>
+                <a:latin typeface="Consolas" pitchFamily="49" charset="0"/>
+              </a:rPr>
+              <a:t>in</a:t>
+            </a:r>
+            <a:r>
+              <a:rPr lang="de-DE" sz="980" dirty="0">
+                <a:solidFill>
+                  <a:srgbClr val="ABB2BF"/>
+                </a:solidFill>
+                <a:latin typeface="Consolas" pitchFamily="49" charset="0"/>
+              </a:rPr>
+              <a:t> </a:t>
+            </a:r>
+            <a:r>
+              <a:rPr lang="de-DE" sz="980" dirty="0">
+                <a:solidFill>
+                  <a:srgbClr val="61AFEF"/>
+                </a:solidFill>
+                <a:latin typeface="Consolas" pitchFamily="49" charset="0"/>
+              </a:rPr>
+              <a:t>range</a:t>
+            </a:r>
+            <a:r>
+              <a:rPr lang="de-DE" sz="980" dirty="0">
+                <a:solidFill>
+                  <a:srgbClr val="ABB2BF"/>
+                </a:solidFill>
+                <a:latin typeface="Consolas" pitchFamily="49" charset="0"/>
+              </a:rPr>
+              <a:t>(-</a:t>
+            </a:r>
+            <a:r>
+              <a:rPr lang="de-DE" sz="980" dirty="0">
+                <a:solidFill>
+                  <a:srgbClr val="98C379"/>
+                </a:solidFill>
+                <a:latin typeface="Consolas" pitchFamily="49" charset="0"/>
+              </a:rPr>
+              <a:t>1</a:t>
+            </a:r>
+            <a:r>
+              <a:rPr lang="de-DE" sz="980" dirty="0">
+                <a:solidFill>
+                  <a:srgbClr val="ABB2BF"/>
+                </a:solidFill>
+                <a:latin typeface="Consolas" pitchFamily="49" charset="0"/>
+              </a:rPr>
+              <a:t>, </a:t>
+            </a:r>
+            <a:r>
+              <a:rPr lang="de-DE" sz="980" dirty="0">
+                <a:solidFill>
+                  <a:srgbClr val="98C379"/>
+                </a:solidFill>
+                <a:latin typeface="Consolas" pitchFamily="49" charset="0"/>
+              </a:rPr>
+              <a:t>2</a:t>
+            </a:r>
+            <a:r>
+              <a:rPr lang="de-DE" sz="980" dirty="0">
+                <a:solidFill>
+                  <a:srgbClr val="ABB2BF"/>
+                </a:solidFill>
+                <a:latin typeface="Consolas" pitchFamily="49" charset="0"/>
+              </a:rPr>
+              <a:t>):</a:t>
+            </a:r>
+          </a:p>
+          <a:p>
+            <a:pPr marL="0" indent="0" algn="l">
+              <a:buNone/>
+            </a:pPr>
+            <a:r>
+              <a:rPr lang="de-DE" sz="980" dirty="0">
+                <a:solidFill>
+                  <a:srgbClr val="56B6C2"/>
+                </a:solidFill>
+                <a:latin typeface="Consolas" pitchFamily="49" charset="0"/>
+              </a:rPr>
+              <a:t>            for</a:t>
+            </a:r>
+            <a:r>
+              <a:rPr lang="de-DE" sz="980" dirty="0">
+                <a:solidFill>
+                  <a:srgbClr val="ABB2BF"/>
+                </a:solidFill>
+                <a:latin typeface="Consolas" pitchFamily="49" charset="0"/>
+              </a:rPr>
+              <a:t> dc </a:t>
+            </a:r>
+            <a:r>
+              <a:rPr lang="de-DE" sz="980" dirty="0">
+                <a:solidFill>
+                  <a:srgbClr val="56B6C2"/>
+                </a:solidFill>
+                <a:latin typeface="Consolas" pitchFamily="49" charset="0"/>
+              </a:rPr>
+              <a:t>in</a:t>
+            </a:r>
+            <a:r>
+              <a:rPr lang="de-DE" sz="980" dirty="0">
+                <a:solidFill>
+                  <a:srgbClr val="ABB2BF"/>
+                </a:solidFill>
+                <a:latin typeface="Consolas" pitchFamily="49" charset="0"/>
+              </a:rPr>
+              <a:t> </a:t>
+            </a:r>
+            <a:r>
+              <a:rPr lang="de-DE" sz="980" dirty="0">
+                <a:solidFill>
+                  <a:srgbClr val="61AFEF"/>
+                </a:solidFill>
+                <a:latin typeface="Consolas" pitchFamily="49" charset="0"/>
+              </a:rPr>
+              <a:t>range</a:t>
+            </a:r>
+            <a:r>
+              <a:rPr lang="de-DE" sz="980" dirty="0">
+                <a:solidFill>
+                  <a:srgbClr val="ABB2BF"/>
+                </a:solidFill>
+                <a:latin typeface="Consolas" pitchFamily="49" charset="0"/>
+              </a:rPr>
+              <a:t>(-</a:t>
+            </a:r>
+            <a:r>
+              <a:rPr lang="de-DE" sz="980" dirty="0">
+                <a:solidFill>
+                  <a:srgbClr val="98C379"/>
+                </a:solidFill>
+                <a:latin typeface="Consolas" pitchFamily="49" charset="0"/>
+              </a:rPr>
+              <a:t>1</a:t>
+            </a:r>
+            <a:r>
+              <a:rPr lang="de-DE" sz="980" dirty="0">
+                <a:solidFill>
+                  <a:srgbClr val="ABB2BF"/>
+                </a:solidFill>
+                <a:latin typeface="Consolas" pitchFamily="49" charset="0"/>
+              </a:rPr>
+              <a:t>, </a:t>
+            </a:r>
+            <a:r>
+              <a:rPr lang="de-DE" sz="980" dirty="0">
+                <a:solidFill>
+                  <a:srgbClr val="98C379"/>
+                </a:solidFill>
+                <a:latin typeface="Consolas" pitchFamily="49" charset="0"/>
+              </a:rPr>
+              <a:t>2</a:t>
+            </a:r>
+            <a:r>
+              <a:rPr lang="de-DE" sz="980" dirty="0">
+                <a:solidFill>
+                  <a:srgbClr val="ABB2BF"/>
+                </a:solidFill>
+                <a:latin typeface="Consolas" pitchFamily="49" charset="0"/>
+              </a:rPr>
+              <a:t>):</a:t>
+            </a:r>
+          </a:p>
+          <a:p>
+            <a:pPr marL="0" indent="0" algn="l">
+              <a:buNone/>
+            </a:pPr>
+            <a:r>
+              <a:rPr lang="de-DE" sz="980" dirty="0">
+                <a:solidFill>
+                  <a:srgbClr val="ABB2BF"/>
+                </a:solidFill>
+                <a:latin typeface="Consolas" pitchFamily="49" charset="0"/>
+              </a:rPr>
+              <a:t>                nr, nc = r+dr, c+dc</a:t>
+            </a:r>
+          </a:p>
+          <a:p>
+            <a:pPr marL="0" indent="0" algn="l">
+              <a:buNone/>
+            </a:pPr>
+            <a:r>
+              <a:rPr lang="de-DE" sz="980" dirty="0">
+                <a:solidFill>
+                  <a:srgbClr val="56B6C2"/>
+                </a:solidFill>
+                <a:latin typeface="Consolas" pitchFamily="49" charset="0"/>
+              </a:rPr>
+              <a:t>                if</a:t>
+            </a:r>
+            <a:r>
+              <a:rPr lang="de-DE" sz="980" dirty="0">
+                <a:solidFill>
+                  <a:srgbClr val="ABB2BF"/>
+                </a:solidFill>
+                <a:latin typeface="Consolas" pitchFamily="49" charset="0"/>
+              </a:rPr>
+              <a:t> board[nr][nc] == EMPTY:</a:t>
+            </a:r>
+          </a:p>
+          <a:p>
+            <a:pPr marL="0" indent="0" algn="l">
+              <a:buNone/>
+            </a:pPr>
+            <a:r>
+              <a:rPr lang="de-DE" sz="980" dirty="0">
+                <a:solidFill>
+                  <a:srgbClr val="ABB2BF"/>
+                </a:solidFill>
+                <a:latin typeface="Consolas" pitchFamily="49" charset="0"/>
+              </a:rPr>
+              <a:t>                    candidates.</a:t>
+            </a:r>
+            <a:r>
+              <a:rPr lang="de-DE" sz="980" dirty="0">
+                <a:solidFill>
+                  <a:srgbClr val="61AFEF"/>
+                </a:solidFill>
+                <a:latin typeface="Consolas" pitchFamily="49" charset="0"/>
+              </a:rPr>
+              <a:t>add</a:t>
+            </a:r>
+            <a:r>
+              <a:rPr lang="de-DE" sz="980" dirty="0">
+                <a:solidFill>
+                  <a:srgbClr val="ABB2BF"/>
+                </a:solidFill>
+                <a:latin typeface="Consolas" pitchFamily="49" charset="0"/>
+              </a:rPr>
+              <a:t>((nr, nc))</a:t>
+            </a:r>
+          </a:p>
+          <a:p>
+            <a:pPr>
+              <a:buNone/>
+            </a:pPr>
+            <a:endParaRPr lang="de-DE" sz="600" dirty="0"/>
+          </a:p>
+          <a:p>
+            <a:pPr marL="0" indent="0" algn="l">
+              <a:buNone/>
+            </a:pPr>
+            <a:r>
+              <a:rPr lang="de-DE" sz="980" i="1" dirty="0">
+                <a:solidFill>
+                  <a:srgbClr val="5C6370"/>
+                </a:solidFill>
+                <a:latin typeface="Consolas" pitchFamily="49" charset="0"/>
+              </a:rPr>
+              <a:t>    # Zentrumsnähe-Sortierung → mehr Alpha-Beta-Cuts</a:t>
+            </a:r>
+          </a:p>
+          <a:p>
+            <a:pPr marL="0" indent="0" algn="l">
+              <a:buNone/>
+            </a:pPr>
+            <a:r>
+              <a:rPr lang="de-DE" sz="980" dirty="0">
+                <a:solidFill>
+                  <a:srgbClr val="ABB2BF"/>
+                </a:solidFill>
+                <a:latin typeface="Consolas" pitchFamily="49" charset="0"/>
+              </a:rPr>
+              <a:t>    center = (BOARD_SIZE - </a:t>
+            </a:r>
+            <a:r>
+              <a:rPr lang="de-DE" sz="980" dirty="0">
+                <a:solidFill>
+                  <a:srgbClr val="98C379"/>
+                </a:solidFill>
+                <a:latin typeface="Consolas" pitchFamily="49" charset="0"/>
+              </a:rPr>
+              <a:t>1</a:t>
+            </a:r>
+            <a:r>
+              <a:rPr lang="de-DE" sz="980" dirty="0">
+                <a:solidFill>
+                  <a:srgbClr val="ABB2BF"/>
+                </a:solidFill>
+                <a:latin typeface="Consolas" pitchFamily="49" charset="0"/>
+              </a:rPr>
+              <a:t>) / </a:t>
+            </a:r>
+            <a:r>
+              <a:rPr lang="de-DE" sz="980" dirty="0">
+                <a:solidFill>
+                  <a:srgbClr val="98C379"/>
+                </a:solidFill>
+                <a:latin typeface="Consolas" pitchFamily="49" charset="0"/>
+              </a:rPr>
+              <a:t>2.0</a:t>
+            </a:r>
+          </a:p>
+          <a:p>
+            <a:pPr marL="0" indent="0" algn="l">
+              <a:buNone/>
+            </a:pPr>
+            <a:r>
+              <a:rPr lang="de-DE" sz="980" dirty="0">
+                <a:solidFill>
+                  <a:srgbClr val="56B6C2"/>
+                </a:solidFill>
+                <a:latin typeface="Consolas" pitchFamily="49" charset="0"/>
+              </a:rPr>
+              <a:t>    return</a:t>
+            </a:r>
+            <a:r>
+              <a:rPr lang="de-DE" sz="980" dirty="0">
+                <a:solidFill>
+                  <a:srgbClr val="ABB2BF"/>
+                </a:solidFill>
+                <a:latin typeface="Consolas" pitchFamily="49" charset="0"/>
+              </a:rPr>
+              <a:t> </a:t>
+            </a:r>
+            <a:r>
+              <a:rPr lang="de-DE" sz="980" dirty="0">
+                <a:solidFill>
+                  <a:srgbClr val="61AFEF"/>
+                </a:solidFill>
+                <a:latin typeface="Consolas" pitchFamily="49" charset="0"/>
+              </a:rPr>
+              <a:t>sorted</a:t>
+            </a:r>
+            <a:r>
+              <a:rPr lang="de-DE" sz="980" dirty="0">
+                <a:solidFill>
+                  <a:srgbClr val="ABB2BF"/>
+                </a:solidFill>
+                <a:latin typeface="Consolas" pitchFamily="49" charset="0"/>
+              </a:rPr>
+              <a:t>(candidates,</a:t>
+            </a:r>
+          </a:p>
+          <a:p>
+            <a:pPr marL="0" indent="0" algn="l">
+              <a:buNone/>
+            </a:pPr>
+            <a:r>
+              <a:rPr lang="de-DE" sz="980" dirty="0">
+                <a:solidFill>
+                  <a:srgbClr val="ABB2BF"/>
+                </a:solidFill>
+                <a:latin typeface="Consolas" pitchFamily="49" charset="0"/>
+              </a:rPr>
+              <a:t>        key=</a:t>
+            </a:r>
+            <a:r>
+              <a:rPr lang="de-DE" sz="980" dirty="0">
+                <a:solidFill>
+                  <a:srgbClr val="56B6C2"/>
+                </a:solidFill>
+                <a:latin typeface="Consolas" pitchFamily="49" charset="0"/>
+              </a:rPr>
+              <a:t>lambda</a:t>
+            </a:r>
+            <a:r>
+              <a:rPr lang="de-DE" sz="980" dirty="0">
+                <a:solidFill>
+                  <a:srgbClr val="ABB2BF"/>
+                </a:solidFill>
+                <a:latin typeface="Consolas" pitchFamily="49" charset="0"/>
+              </a:rPr>
+              <a:t> m: </a:t>
+            </a:r>
+          </a:p>
+          <a:p>
+            <a:pPr marL="0" indent="0" algn="l">
+              <a:buNone/>
+            </a:pPr>
+            <a:r>
+              <a:rPr lang="de-DE" sz="980" dirty="0">
+                <a:solidFill>
+                  <a:srgbClr val="ABB2BF"/>
+                </a:solidFill>
+                <a:latin typeface="Consolas" pitchFamily="49" charset="0"/>
+              </a:rPr>
+              <a:t>            </a:t>
+            </a:r>
+            <a:r>
+              <a:rPr lang="de-DE" sz="980" dirty="0">
+                <a:solidFill>
+                  <a:srgbClr val="61AFEF"/>
+                </a:solidFill>
+                <a:latin typeface="Consolas" pitchFamily="49" charset="0"/>
+              </a:rPr>
+              <a:t>abs</a:t>
+            </a:r>
+            <a:r>
+              <a:rPr lang="de-DE" sz="980" dirty="0">
+                <a:solidFill>
+                  <a:srgbClr val="ABB2BF"/>
+                </a:solidFill>
+                <a:latin typeface="Consolas" pitchFamily="49" charset="0"/>
+              </a:rPr>
+              <a:t>(m[</a:t>
+            </a:r>
+            <a:r>
+              <a:rPr lang="de-DE" sz="980" dirty="0">
+                <a:solidFill>
+                  <a:srgbClr val="98C379"/>
+                </a:solidFill>
+                <a:latin typeface="Consolas" pitchFamily="49" charset="0"/>
+              </a:rPr>
+              <a:t>0</a:t>
+            </a:r>
+            <a:r>
+              <a:rPr lang="de-DE" sz="980" dirty="0">
+                <a:solidFill>
+                  <a:srgbClr val="ABB2BF"/>
+                </a:solidFill>
+                <a:latin typeface="Consolas" pitchFamily="49" charset="0"/>
+              </a:rPr>
+              <a:t>]-center) + </a:t>
+            </a:r>
+            <a:r>
+              <a:rPr lang="de-DE" sz="980" dirty="0">
+                <a:solidFill>
+                  <a:srgbClr val="61AFEF"/>
+                </a:solidFill>
+                <a:latin typeface="Consolas" pitchFamily="49" charset="0"/>
+              </a:rPr>
+              <a:t>abs</a:t>
+            </a:r>
+            <a:r>
+              <a:rPr lang="de-DE" sz="980" dirty="0">
+                <a:solidFill>
+                  <a:srgbClr val="ABB2BF"/>
+                </a:solidFill>
+                <a:latin typeface="Consolas" pitchFamily="49" charset="0"/>
+              </a:rPr>
+              <a:t>(m[</a:t>
+            </a:r>
+            <a:r>
+              <a:rPr lang="de-DE" sz="980" dirty="0">
+                <a:solidFill>
+                  <a:srgbClr val="98C379"/>
+                </a:solidFill>
+                <a:latin typeface="Consolas" pitchFamily="49" charset="0"/>
+              </a:rPr>
+              <a:t>1</a:t>
+            </a:r>
+            <a:r>
+              <a:rPr lang="de-DE" sz="980" dirty="0">
+                <a:solidFill>
+                  <a:srgbClr val="ABB2BF"/>
+                </a:solidFill>
+                <a:latin typeface="Consolas" pitchFamily="49" charset="0"/>
+              </a:rPr>
+              <a:t>]-center))</a:t>
+            </a:r>
+          </a:p>
+          <a:p>
+            <a:pPr>
+              <a:buNone/>
+            </a:pPr>
+            <a:endParaRPr lang="de-DE" sz="600" dirty="0"/>
+          </a:p>
+          <a:p>
+            <a:pPr marL="0" indent="0" algn="l">
+              <a:buNone/>
+            </a:pPr>
+            <a:r>
+              <a:rPr lang="de-DE" sz="980" i="1" dirty="0">
+                <a:solidFill>
+                  <a:srgbClr val="5C6370"/>
+                </a:solidFill>
+                <a:latin typeface="Consolas" pitchFamily="49" charset="0"/>
+              </a:rPr>
+              <a:t># shallow copy statt deepcopy – ~5× schneller</a:t>
+            </a:r>
+          </a:p>
+          <a:p>
+            <a:pPr marL="0" indent="0" algn="l">
+              <a:buNone/>
+            </a:pPr>
+            <a:r>
+              <a:rPr lang="de-DE" sz="980" dirty="0">
+                <a:solidFill>
+                  <a:srgbClr val="56B6C2"/>
+                </a:solidFill>
+                <a:latin typeface="Consolas" pitchFamily="49" charset="0"/>
+              </a:rPr>
+              <a:t>def</a:t>
+            </a:r>
+            <a:r>
+              <a:rPr lang="de-DE" sz="980" dirty="0">
+                <a:solidFill>
+                  <a:srgbClr val="ABB2BF"/>
+                </a:solidFill>
+                <a:latin typeface="Consolas" pitchFamily="49" charset="0"/>
+              </a:rPr>
+              <a:t> </a:t>
+            </a:r>
+            <a:r>
+              <a:rPr lang="de-DE" sz="980" dirty="0">
+                <a:solidFill>
+                  <a:srgbClr val="61AFEF"/>
+                </a:solidFill>
+                <a:latin typeface="Consolas" pitchFamily="49" charset="0"/>
+              </a:rPr>
+              <a:t>apply_move</a:t>
+            </a:r>
+            <a:r>
+              <a:rPr lang="de-DE" sz="980" dirty="0">
+                <a:solidFill>
+                  <a:srgbClr val="ABB2BF"/>
+                </a:solidFill>
+                <a:latin typeface="Consolas" pitchFamily="49" charset="0"/>
+              </a:rPr>
+              <a:t>(board, move, is_maximizing):</a:t>
+            </a:r>
+          </a:p>
+          <a:p>
+            <a:pPr marL="0" indent="0" algn="l">
+              <a:buNone/>
+            </a:pPr>
+            <a:r>
+              <a:rPr lang="de-DE" sz="980" dirty="0">
+                <a:solidFill>
+                  <a:srgbClr val="ABB2BF"/>
+                </a:solidFill>
+                <a:latin typeface="Consolas" pitchFamily="49" charset="0"/>
+              </a:rPr>
+              <a:t>    new_board = [row[:] </a:t>
+            </a:r>
+            <a:r>
+              <a:rPr lang="de-DE" sz="980" dirty="0">
+                <a:solidFill>
+                  <a:srgbClr val="56B6C2"/>
+                </a:solidFill>
+                <a:latin typeface="Consolas" pitchFamily="49" charset="0"/>
+              </a:rPr>
+              <a:t>for</a:t>
+            </a:r>
+            <a:r>
+              <a:rPr lang="de-DE" sz="980" dirty="0">
+                <a:solidFill>
+                  <a:srgbClr val="ABB2BF"/>
+                </a:solidFill>
+                <a:latin typeface="Consolas" pitchFamily="49" charset="0"/>
+              </a:rPr>
+              <a:t> row </a:t>
+            </a:r>
+            <a:r>
+              <a:rPr lang="de-DE" sz="980" dirty="0">
+                <a:solidFill>
+                  <a:srgbClr val="56B6C2"/>
+                </a:solidFill>
+                <a:latin typeface="Consolas" pitchFamily="49" charset="0"/>
+              </a:rPr>
+              <a:t>in</a:t>
+            </a:r>
+            <a:r>
+              <a:rPr lang="de-DE" sz="980" dirty="0">
+                <a:solidFill>
+                  <a:srgbClr val="ABB2BF"/>
+                </a:solidFill>
+                <a:latin typeface="Consolas" pitchFamily="49" charset="0"/>
+              </a:rPr>
+              <a:t> board]</a:t>
+            </a:r>
+          </a:p>
+          <a:p>
+            <a:pPr marL="0" indent="0" algn="l">
+              <a:buNone/>
+            </a:pPr>
+            <a:r>
+              <a:rPr lang="de-DE" sz="980" i="1" dirty="0">
+                <a:solidFill>
+                  <a:srgbClr val="5C6370"/>
+                </a:solidFill>
+                <a:latin typeface="Consolas" pitchFamily="49" charset="0"/>
+              </a:rPr>
+              <a:t>    # Nur Zeilenreferenzen kopieren – keine rekursive Kopie</a:t>
+            </a:r>
+          </a:p>
+          <a:p>
+            <a:pPr marL="0" indent="0" algn="l">
+              <a:buNone/>
+            </a:pPr>
+            <a:r>
+              <a:rPr lang="de-DE" sz="980" dirty="0">
+                <a:solidFill>
+                  <a:srgbClr val="ABB2BF"/>
+                </a:solidFill>
+                <a:latin typeface="Consolas" pitchFamily="49" charset="0"/>
+              </a:rPr>
+              <a:t>    new_board[row][col] = AI </a:t>
+            </a:r>
+            <a:r>
+              <a:rPr lang="de-DE" sz="980" dirty="0">
+                <a:solidFill>
+                  <a:srgbClr val="56B6C2"/>
+                </a:solidFill>
+                <a:latin typeface="Consolas" pitchFamily="49" charset="0"/>
+              </a:rPr>
+              <a:t>if</a:t>
+            </a:r>
+            <a:r>
+              <a:rPr lang="de-DE" sz="980" dirty="0">
+                <a:solidFill>
+                  <a:srgbClr val="ABB2BF"/>
+                </a:solidFill>
+                <a:latin typeface="Consolas" pitchFamily="49" charset="0"/>
+              </a:rPr>
+              <a:t> is_maximizing </a:t>
+            </a:r>
+            <a:r>
+              <a:rPr lang="de-DE" sz="980" dirty="0">
+                <a:solidFill>
+                  <a:srgbClr val="56B6C2"/>
+                </a:solidFill>
+                <a:latin typeface="Consolas" pitchFamily="49" charset="0"/>
+              </a:rPr>
+              <a:t>else</a:t>
+            </a:r>
+            <a:r>
+              <a:rPr lang="de-DE" sz="980" dirty="0">
+                <a:solidFill>
+                  <a:srgbClr val="ABB2BF"/>
+                </a:solidFill>
+                <a:latin typeface="Consolas" pitchFamily="49" charset="0"/>
+              </a:rPr>
+              <a:t> HUMAN</a:t>
+            </a:r>
+          </a:p>
+          <a:p>
+            <a:pPr marL="0" indent="0" algn="l">
+              <a:buNone/>
+            </a:pPr>
+            <a:r>
+              <a:rPr lang="de-DE" sz="980" dirty="0">
+                <a:solidFill>
+                  <a:srgbClr val="56B6C2"/>
+                </a:solidFill>
+                <a:latin typeface="Consolas" pitchFamily="49" charset="0"/>
+              </a:rPr>
+              <a:t>    return</a:t>
+            </a:r>
+            <a:r>
+              <a:rPr lang="de-DE" sz="980" dirty="0">
+                <a:solidFill>
+                  <a:srgbClr val="ABB2BF"/>
+                </a:solidFill>
+                <a:latin typeface="Consolas" pitchFamily="49" charset="0"/>
+              </a:rPr>
+              <a:t> new_board</a:t>
+            </a:r>
+          </a:p>
+        </p:txBody>
+      </p:sp>
+      <p:sp>
+        <p:nvSpPr>
+          <p:cNvPr id="7" name="BulletCard"/>
+          <p:cNvSpPr/>
+          <p:nvPr/>
+        </p:nvSpPr>
+        <p:spPr>
+          <a:xfrm>
+            <a:off x="5707200" y="1234440"/>
+            <a:ext cx="3071040" cy="3650000"/>
+          </a:xfrm>
+          <a:prstGeom prst="rect">
+            <a:avLst/>
+          </a:prstGeom>
+          <a:solidFill>
+            <a:srgbClr val="FFFFFF"/>
+          </a:solidFill>
+          <a:ln w="6350">
+            <a:solidFill>
+              <a:srgbClr val="D0D7E8"/>
+            </a:solidFill>
+            <a:prstDash val="solid"/>
+          </a:ln>
+        </p:spPr>
+      </p:sp>
+      <p:sp>
+        <p:nvSpPr>
+          <p:cNvPr id="8" name="BulletText"/>
+          <p:cNvSpPr/>
+          <p:nvPr/>
+        </p:nvSpPr>
+        <p:spPr>
+          <a:xfrm>
+            <a:off x="5798640" y="1325880"/>
+            <a:ext cx="2888160" cy="3467120"/>
+          </a:xfrm>
+          <a:prstGeom prst="rect">
+            <a:avLst/>
+          </a:prstGeom>
+          <a:noFill/>
+          <a:ln/>
+        </p:spPr>
+        <p:txBody>
+          <a:bodyPr wrap="square" lIns="114300" tIns="91440" rIns="114300" bIns="91440" rtlCol="0" anchor="t"/>
+          <a:lstStyle/>
+          <a:p>
+            <a:pPr marL="342900" indent="-342900" algn="l">
+              <a:buChar char="▸"/>
+            </a:pPr>
+            <a:r>
+              <a:rPr lang="de-DE" sz="1150" b="1" dirty="0">
+                <a:solidFill>
+                  <a:srgbClr val="2A3A5E"/>
+                </a:solidFill>
+                <a:latin typeface="Calibri" pitchFamily="49" charset="0"/>
+              </a:rPr>
+              <a:t>36 → 8–15 Züge</a:t>
+            </a:r>
+          </a:p>
+          <a:p>
+            <a:pPr marL="342900" indent="0" algn="l">
+              <a:buNone/>
+            </a:pPr>
+            <a:r>
+              <a:rPr lang="de-DE" sz="1000" dirty="0">
+                <a:solidFill>
+                  <a:srgbClr val="8892A4"/>
+                </a:solidFill>
+                <a:latin typeface="Calibri" pitchFamily="49" charset="0"/>
+              </a:rPr>
+              <a:t>Statt alle leeren Felder nur Nachbarn prüfen</a:t>
+            </a:r>
+          </a:p>
+          <a:p>
+            <a:pPr marL="342900" indent="-342900" algn="l">
+              <a:spcBef>
+                <a:spcPts val="160"/>
+              </a:spcBef>
+              <a:buChar char="▸"/>
+            </a:pPr>
+            <a:r>
+              <a:rPr lang="de-DE" sz="1150" b="1" dirty="0">
+                <a:solidFill>
+                  <a:srgbClr val="2A3A5E"/>
+                </a:solidFill>
+                <a:latin typeface="Calibri" pitchFamily="49" charset="0"/>
+              </a:rPr>
+              <a:t>Center-Sorting</a:t>
+            </a:r>
+          </a:p>
+          <a:p>
+            <a:pPr marL="342900" indent="0" algn="l">
+              <a:buNone/>
+            </a:pPr>
+            <a:r>
+              <a:rPr lang="de-DE" sz="1000" dirty="0">
+                <a:solidFill>
+                  <a:srgbClr val="8892A4"/>
+                </a:solidFill>
+                <a:latin typeface="Calibri" pitchFamily="49" charset="0"/>
+              </a:rPr>
+              <a:t>Zentrumsnähe-Sortierung → Alpha-Beta findet früh gute Äste</a:t>
+            </a:r>
+          </a:p>
+          <a:p>
+            <a:pPr marL="342900" indent="-342900" algn="l">
+              <a:spcBef>
+                <a:spcPts val="160"/>
+              </a:spcBef>
+              <a:buChar char="▸"/>
+            </a:pPr>
+            <a:r>
+              <a:rPr lang="de-DE" sz="1150" b="1" dirty="0">
+                <a:solidFill>
+                  <a:srgbClr val="2A3A5E"/>
+                </a:solidFill>
+                <a:latin typeface="Calibri" pitchFamily="49" charset="0"/>
+              </a:rPr>
+              <a:t>shallow copy</a:t>
+            </a:r>
+          </a:p>
+          <a:p>
+            <a:pPr marL="342900" indent="0" algn="l">
+              <a:buNone/>
+            </a:pPr>
+            <a:r>
+              <a:rPr lang="de-DE" sz="1000" dirty="0">
+                <a:solidFill>
+                  <a:srgbClr val="8892A4"/>
+                </a:solidFill>
+                <a:latin typeface="Calibri" pitchFamily="49" charset="0"/>
+              </a:rPr>
+              <a:t>[row[:] for row in board] statt deepcopy – ~5× schneller</a:t>
+            </a:r>
+          </a:p>
+          <a:p>
+            <a:pPr marL="342900" indent="-342900" algn="l">
+              <a:spcBef>
+                <a:spcPts val="160"/>
+              </a:spcBef>
+              <a:buChar char="▸"/>
+            </a:pPr>
+            <a:r>
+              <a:rPr lang="de-DE" sz="1150" b="1" dirty="0">
+                <a:solidFill>
+                  <a:srgbClr val="2A3A5E"/>
+                </a:solidFill>
+                <a:latin typeface="Calibri" pitchFamily="49" charset="0"/>
+              </a:rPr>
+              <a:t>Leeres Brett</a:t>
+            </a:r>
+          </a:p>
+          <a:p>
+            <a:pPr marL="342900" indent="0" algn="l">
+              <a:buNone/>
+            </a:pPr>
+            <a:r>
+              <a:rPr lang="de-DE" sz="1000" dirty="0">
+                <a:solidFill>
+                  <a:srgbClr val="8892A4"/>
+                </a:solidFill>
+                <a:latin typeface="Calibri" pitchFamily="49" charset="0"/>
+              </a:rPr>
+              <a:t>Nur 4 Mittelfelder als Start → Spielbaum klein halten</a:t>
+            </a:r>
+          </a:p>
+          <a:p>
+            <a:pPr marL="342900" indent="-342900" algn="l">
+              <a:spcBef>
+                <a:spcPts val="160"/>
+              </a:spcBef>
+              <a:buChar char="▸"/>
+            </a:pPr>
+            <a:r>
+              <a:rPr lang="de-DE" sz="1150" b="1" dirty="0">
+                <a:solidFill>
+                  <a:srgbClr val="2A3A5E"/>
+                </a:solidFill>
+                <a:latin typeface="Calibri" pitchFamily="49" charset="0"/>
+              </a:rPr>
+              <a:t>Effekt</a:t>
+            </a:r>
+          </a:p>
+          <a:p>
+            <a:pPr marL="342900" indent="0" algn="l">
+              <a:buNone/>
+            </a:pPr>
+            <a:r>
+              <a:rPr lang="de-DE" sz="1000" dirty="0">
+                <a:solidFill>
+                  <a:srgbClr val="8892A4"/>
+                </a:solidFill>
+                <a:latin typeface="Calibri" pitchFamily="49" charset="0"/>
+              </a:rPr>
+              <a:t>Tiefe 4 in &lt;2 Sek. statt &gt;30 Sek. ohne Optimierung</a:t>
+            </a:r>
+          </a:p>
+        </p:txBody>
+      </p:sp>
+    </p:spTree>
+  </p:cSld>
+  <p:clrMapOvr>
+    <a:masterClrMapping/>
+  </p:clrMapOvr>
+</p:sld>
+</file>
+
+<file path=ppt/slides/slide15.xml><?xml version="1.0" encoding="utf-8"?>
+<p:sld xmlns:a="http://schemas.openxmlformats.org/drawingml/2006/main" xmlns:p="http://schemas.openxmlformats.org/presentationml/2006/main" xmlns:r="http://schemas.openxmlformats.org/officeDocument/2006/relationships">
+  <p:cSld>
+    <p:bg>
+      <p:bgPr>
+        <a:solidFill>
+          <a:srgbClr val="0D0D1A"/>
+        </a:solidFill>
+        <a:effectLst/>
+      </p:bgPr>
+    </p:bg>
+    <p:spTree>
+      <p:nvGrpSpPr>
+        <p:cNvPr id="1" name=""/>
+        <p:cNvGrpSpPr/>
+        <p:nvPr/>
+      </p:nvGrpSpPr>
+      <p:grpSpPr/>
+      <p:sp>
+        <p:nvSpPr>
+          <p:cNvPr id="2" name="AccentStripe"/>
+          <p:cNvSpPr/>
+          <p:nvPr/>
+        </p:nvSpPr>
+        <p:spPr>
+          <a:xfrm>
+            <a:off x="0" y="0"/>
+            <a:ext cx="91440" cy="5143500"/>
+          </a:xfrm>
+          <a:prstGeom prst="rect">
+            <a:avLst/>
+          </a:prstGeom>
+          <a:solidFill>
+            <a:srgbClr val="E94560"/>
+          </a:solidFill>
+        </p:spPr>
+      </p:sp>
+      <p:sp>
+        <p:nvSpPr>
+          <p:cNvPr id="3" name="Title"/>
+          <p:cNvSpPr/>
+          <p:nvPr/>
+        </p:nvSpPr>
+        <p:spPr>
+          <a:xfrm>
+            <a:off x="457200" y="256032"/>
+            <a:ext cx="8229600" cy="594360"/>
+          </a:xfrm>
+          <a:prstGeom prst="rect">
+            <a:avLst/>
+          </a:prstGeom>
+          <a:noFill/>
+          <a:ln/>
+        </p:spPr>
+        <p:txBody>
+          <a:bodyPr wrap="square" lIns="114300" tIns="91440" rIns="114300" bIns="91440" rtlCol="0" anchor="ctr"/>
+          <a:lstStyle/>
+          <a:p>
+            <a:pPr marL="0" indent="0" algn="l">
+              <a:buNone/>
+            </a:pPr>
+            <a:r>
+              <a:rPr lang="de-DE" sz="3000" b="1" dirty="0">
+                <a:solidFill>
+                  <a:srgbClr val="FFFFFF"/>
+                </a:solidFill>
+                <a:latin typeface="Arial Black" pitchFamily="49" charset="0"/>
+              </a:rPr>
+              <a:t>main.py – KI-Berechnung ohne GUI-Blockierung</a:t>
+            </a:r>
+          </a:p>
+        </p:txBody>
+      </p:sp>
+      <p:sp>
+        <p:nvSpPr>
+          <p:cNvPr id="4" name="Subtitle"/>
+          <p:cNvSpPr/>
+          <p:nvPr/>
+        </p:nvSpPr>
+        <p:spPr>
+          <a:xfrm>
+            <a:off x="457200" y="804672"/>
+            <a:ext cx="8229600" cy="320040"/>
+          </a:xfrm>
+          <a:prstGeom prst="rect">
+            <a:avLst/>
+          </a:prstGeom>
+          <a:noFill/>
+          <a:ln/>
+        </p:spPr>
+        <p:txBody>
+          <a:bodyPr wrap="square" lIns="114300" tIns="91440" rIns="114300" bIns="91440" rtlCol="0" anchor="ctr"/>
+          <a:lstStyle/>
+          <a:p>
+            <a:pPr marL="0" indent="0" algn="l">
+              <a:buNone/>
+            </a:pPr>
+            <a:r>
+              <a:rPr lang="de-DE" sz="1200" dirty="0">
+                <a:solidFill>
+                  <a:srgbClr val="8892A4"/>
+                </a:solidFill>
+                <a:latin typeface="Calibri" pitchFamily="49" charset="0"/>
+              </a:rPr>
+              <a:t>daemon Thread · after(0, ...) · app_state</a:t>
+            </a:r>
+          </a:p>
+        </p:txBody>
+      </p:sp>
+      <p:sp>
+        <p:nvSpPr>
+          <p:cNvPr id="5" name="CodeCard"/>
+          <p:cNvSpPr/>
+          <p:nvPr/>
+        </p:nvSpPr>
+        <p:spPr>
+          <a:xfrm>
+            <a:off x="365760" y="1234440"/>
+            <a:ext cx="5250000" cy="3650000"/>
+          </a:xfrm>
+          <a:prstGeom prst="rect">
+            <a:avLst/>
+          </a:prstGeom>
+          <a:solidFill>
+            <a:srgbClr val="121224"/>
+          </a:solidFill>
+          <a:ln w="9525">
+            <a:solidFill>
+              <a:srgbClr val="4472C4"/>
+            </a:solidFill>
+            <a:prstDash val="solid"/>
+          </a:ln>
+        </p:spPr>
+      </p:sp>
+      <p:sp>
+        <p:nvSpPr>
+          <p:cNvPr id="6" name="CodeText"/>
+          <p:cNvSpPr/>
+          <p:nvPr/>
+        </p:nvSpPr>
+        <p:spPr>
+          <a:xfrm>
+            <a:off x="457200" y="1325880"/>
+            <a:ext cx="5067120" cy="3467120"/>
+          </a:xfrm>
+          <a:prstGeom prst="rect">
+            <a:avLst/>
+          </a:prstGeom>
+          <a:noFill/>
+          <a:ln/>
+        </p:spPr>
+        <p:txBody>
+          <a:bodyPr wrap="square" lIns="114300" tIns="91440" rIns="114300" bIns="91440" rtlCol="0" anchor="t"/>
+          <a:lstStyle/>
+          <a:p>
+            <a:pPr marL="0" indent="0" algn="l">
+              <a:buNone/>
+            </a:pPr>
+            <a:r>
+              <a:rPr lang="de-DE" sz="980" i="1" dirty="0">
+                <a:solidFill>
+                  <a:srgbClr val="5C6370"/>
+                </a:solidFill>
+                <a:latin typeface="Consolas" pitchFamily="49" charset="0"/>
+              </a:rPr>
+              <a:t># Globaler Zustand – kein Klassen-Overhead</a:t>
+            </a:r>
+          </a:p>
+          <a:p>
+            <a:pPr marL="0" indent="0" algn="l">
+              <a:buNone/>
+            </a:pPr>
+            <a:r>
+              <a:rPr lang="de-DE" sz="980" dirty="0">
+                <a:solidFill>
+                  <a:srgbClr val="61AFEF"/>
+                </a:solidFill>
+                <a:latin typeface="Consolas" pitchFamily="49" charset="0"/>
+              </a:rPr>
+              <a:t>app_state</a:t>
+            </a:r>
+            <a:r>
+              <a:rPr lang="de-DE" sz="980" dirty="0">
+                <a:solidFill>
+                  <a:srgbClr val="ABB2BF"/>
+                </a:solidFill>
+                <a:latin typeface="Consolas" pitchFamily="49" charset="0"/>
+              </a:rPr>
+              <a:t> = {</a:t>
+            </a:r>
+          </a:p>
+          <a:p>
+            <a:pPr marL="0" indent="0" algn="l">
+              <a:buNone/>
+            </a:pPr>
+            <a:r>
+              <a:rPr lang="de-DE" sz="980" dirty="0">
+                <a:solidFill>
+                  <a:srgbClr val="ABB2BF"/>
+                </a:solidFill>
+                <a:latin typeface="Consolas" pitchFamily="49" charset="0"/>
+              </a:rPr>
+              <a:t>    </a:t>
+            </a:r>
+            <a:r>
+              <a:rPr lang="de-DE" sz="980" dirty="0">
+                <a:solidFill>
+                  <a:srgbClr val="98C379"/>
+                </a:solidFill>
+                <a:latin typeface="Consolas" pitchFamily="49" charset="0"/>
+              </a:rPr>
+              <a:t>"board"</a:t>
+            </a:r>
+            <a:r>
+              <a:rPr lang="de-DE" sz="980" dirty="0">
+                <a:solidFill>
+                  <a:srgbClr val="ABB2BF"/>
+                </a:solidFill>
+                <a:latin typeface="Consolas" pitchFamily="49" charset="0"/>
+              </a:rPr>
+              <a:t>:       </a:t>
+            </a:r>
+            <a:r>
+              <a:rPr lang="de-DE" sz="980" dirty="0">
+                <a:solidFill>
+                  <a:srgbClr val="56B6C2"/>
+                </a:solidFill>
+                <a:latin typeface="Consolas" pitchFamily="49" charset="0"/>
+              </a:rPr>
+              <a:t>None</a:t>
+            </a:r>
+            <a:r>
+              <a:rPr lang="de-DE" sz="980" dirty="0">
+                <a:solidFill>
+                  <a:srgbClr val="ABB2BF"/>
+                </a:solidFill>
+                <a:latin typeface="Consolas" pitchFamily="49" charset="0"/>
+              </a:rPr>
+              <a:t>,  </a:t>
+            </a:r>
+            <a:r>
+              <a:rPr lang="de-DE" sz="980" i="1" dirty="0">
+                <a:solidFill>
+                  <a:srgbClr val="5C6370"/>
+                </a:solidFill>
+                <a:latin typeface="Consolas" pitchFamily="49" charset="0"/>
+              </a:rPr>
+              <a:t># aktuelles Spielfeld</a:t>
+            </a:r>
+          </a:p>
+          <a:p>
+            <a:pPr marL="0" indent="0" algn="l">
+              <a:buNone/>
+            </a:pPr>
+            <a:r>
+              <a:rPr lang="de-DE" sz="980" dirty="0">
+                <a:solidFill>
+                  <a:srgbClr val="ABB2BF"/>
+                </a:solidFill>
+                <a:latin typeface="Consolas" pitchFamily="49" charset="0"/>
+              </a:rPr>
+              <a:t>    </a:t>
+            </a:r>
+            <a:r>
+              <a:rPr lang="de-DE" sz="980" dirty="0">
+                <a:solidFill>
+                  <a:srgbClr val="98C379"/>
+                </a:solidFill>
+                <a:latin typeface="Consolas" pitchFamily="49" charset="0"/>
+              </a:rPr>
+              <a:t>"ai_thinking"</a:t>
+            </a:r>
+            <a:r>
+              <a:rPr lang="de-DE" sz="980" dirty="0">
+                <a:solidFill>
+                  <a:srgbClr val="ABB2BF"/>
+                </a:solidFill>
+                <a:latin typeface="Consolas" pitchFamily="49" charset="0"/>
+              </a:rPr>
+              <a:t>: </a:t>
+            </a:r>
+            <a:r>
+              <a:rPr lang="de-DE" sz="980" dirty="0">
+                <a:solidFill>
+                  <a:srgbClr val="56B6C2"/>
+                </a:solidFill>
+                <a:latin typeface="Consolas" pitchFamily="49" charset="0"/>
+              </a:rPr>
+              <a:t>False</a:t>
+            </a:r>
+            <a:r>
+              <a:rPr lang="de-DE" sz="980" dirty="0">
+                <a:solidFill>
+                  <a:srgbClr val="ABB2BF"/>
+                </a:solidFill>
+                <a:latin typeface="Consolas" pitchFamily="49" charset="0"/>
+              </a:rPr>
+              <a:t>, </a:t>
+            </a:r>
+            <a:r>
+              <a:rPr lang="de-DE" sz="980" i="1" dirty="0">
+                <a:solidFill>
+                  <a:srgbClr val="5C6370"/>
+                </a:solidFill>
+                <a:latin typeface="Consolas" pitchFamily="49" charset="0"/>
+              </a:rPr>
+              <a:t># GUI sperren</a:t>
+            </a:r>
+          </a:p>
+          <a:p>
+            <a:pPr marL="0" indent="0" algn="l">
+              <a:buNone/>
+            </a:pPr>
+            <a:r>
+              <a:rPr lang="de-DE" sz="980" dirty="0">
+                <a:solidFill>
+                  <a:srgbClr val="ABB2BF"/>
+                </a:solidFill>
+                <a:latin typeface="Consolas" pitchFamily="49" charset="0"/>
+              </a:rPr>
+              <a:t>    </a:t>
+            </a:r>
+            <a:r>
+              <a:rPr lang="de-DE" sz="980" dirty="0">
+                <a:solidFill>
+                  <a:srgbClr val="98C379"/>
+                </a:solidFill>
+                <a:latin typeface="Consolas" pitchFamily="49" charset="0"/>
+              </a:rPr>
+              <a:t>"difficulty"</a:t>
+            </a:r>
+            <a:r>
+              <a:rPr lang="de-DE" sz="980" dirty="0">
+                <a:solidFill>
+                  <a:srgbClr val="ABB2BF"/>
+                </a:solidFill>
+                <a:latin typeface="Consolas" pitchFamily="49" charset="0"/>
+              </a:rPr>
+              <a:t>:  </a:t>
+            </a:r>
+            <a:r>
+              <a:rPr lang="de-DE" sz="980" dirty="0">
+                <a:solidFill>
+                  <a:srgbClr val="98C379"/>
+                </a:solidFill>
+                <a:latin typeface="Consolas" pitchFamily="49" charset="0"/>
+              </a:rPr>
+              <a:t>3</a:t>
+            </a:r>
+            <a:r>
+              <a:rPr lang="de-DE" sz="980" dirty="0">
+                <a:solidFill>
+                  <a:srgbClr val="ABB2BF"/>
+                </a:solidFill>
+                <a:latin typeface="Consolas" pitchFamily="49" charset="0"/>
+              </a:rPr>
+              <a:t>,     </a:t>
+            </a:r>
+            <a:r>
+              <a:rPr lang="de-DE" sz="980" i="1" dirty="0">
+                <a:solidFill>
+                  <a:srgbClr val="5C6370"/>
+                </a:solidFill>
+                <a:latin typeface="Consolas" pitchFamily="49" charset="0"/>
+              </a:rPr>
+              <a:t># Suchtiefe 1-5</a:t>
+            </a:r>
+          </a:p>
+          <a:p>
+            <a:pPr marL="0" indent="0" algn="l">
+              <a:buNone/>
+            </a:pPr>
+            <a:r>
+              <a:rPr lang="de-DE" sz="980" dirty="0">
+                <a:solidFill>
+                  <a:srgbClr val="ABB2BF"/>
+                </a:solidFill>
+                <a:latin typeface="Consolas" pitchFamily="49" charset="0"/>
+              </a:rPr>
+              <a:t>    ...}</a:t>
+            </a:r>
+          </a:p>
+          <a:p>
+            <a:pPr>
+              <a:buNone/>
+            </a:pPr>
+            <a:endParaRPr lang="de-DE" sz="600" dirty="0"/>
+          </a:p>
+          <a:p>
+            <a:pPr marL="0" indent="0" algn="l">
+              <a:buNone/>
+            </a:pPr>
+            <a:r>
+              <a:rPr lang="de-DE" sz="980" dirty="0">
+                <a:solidFill>
+                  <a:srgbClr val="56B6C2"/>
+                </a:solidFill>
+                <a:latin typeface="Consolas" pitchFamily="49" charset="0"/>
+              </a:rPr>
+              <a:t>def</a:t>
+            </a:r>
+            <a:r>
+              <a:rPr lang="de-DE" sz="980" dirty="0">
+                <a:solidFill>
+                  <a:srgbClr val="ABB2BF"/>
+                </a:solidFill>
+                <a:latin typeface="Consolas" pitchFamily="49" charset="0"/>
+              </a:rPr>
+              <a:t> </a:t>
+            </a:r>
+            <a:r>
+              <a:rPr lang="de-DE" sz="980" dirty="0">
+                <a:solidFill>
+                  <a:srgbClr val="61AFEF"/>
+                </a:solidFill>
+                <a:latin typeface="Consolas" pitchFamily="49" charset="0"/>
+              </a:rPr>
+              <a:t>start_ai_turn</a:t>
+            </a:r>
+            <a:r>
+              <a:rPr lang="de-DE" sz="980" dirty="0">
+                <a:solidFill>
+                  <a:srgbClr val="ABB2BF"/>
+                </a:solidFill>
+                <a:latin typeface="Consolas" pitchFamily="49" charset="0"/>
+              </a:rPr>
+              <a:t>():</a:t>
+            </a:r>
+          </a:p>
+          <a:p>
+            <a:pPr marL="0" indent="0" algn="l">
+              <a:buNone/>
+            </a:pPr>
+            <a:r>
+              <a:rPr lang="de-DE" sz="980" dirty="0">
+                <a:solidFill>
+                  <a:srgbClr val="ABB2BF"/>
+                </a:solidFill>
+                <a:latin typeface="Consolas" pitchFamily="49" charset="0"/>
+              </a:rPr>
+              <a:t>    app_state[</a:t>
+            </a:r>
+            <a:r>
+              <a:rPr lang="de-DE" sz="980" dirty="0">
+                <a:solidFill>
+                  <a:srgbClr val="98C379"/>
+                </a:solidFill>
+                <a:latin typeface="Consolas" pitchFamily="49" charset="0"/>
+              </a:rPr>
+              <a:t>"ai_thinking"</a:t>
+            </a:r>
+            <a:r>
+              <a:rPr lang="de-DE" sz="980" dirty="0">
+                <a:solidFill>
+                  <a:srgbClr val="ABB2BF"/>
+                </a:solidFill>
+                <a:latin typeface="Consolas" pitchFamily="49" charset="0"/>
+              </a:rPr>
+              <a:t>] = </a:t>
+            </a:r>
+            <a:r>
+              <a:rPr lang="de-DE" sz="980" dirty="0">
+                <a:solidFill>
+                  <a:srgbClr val="56B6C2"/>
+                </a:solidFill>
+                <a:latin typeface="Consolas" pitchFamily="49" charset="0"/>
+              </a:rPr>
+              <a:t>True</a:t>
+            </a:r>
+          </a:p>
+          <a:p>
+            <a:pPr>
+              <a:buNone/>
+            </a:pPr>
+            <a:endParaRPr lang="de-DE" sz="600" dirty="0"/>
+          </a:p>
+          <a:p>
+            <a:pPr marL="0" indent="0" algn="l">
+              <a:buNone/>
+            </a:pPr>
+            <a:r>
+              <a:rPr lang="de-DE" sz="980" dirty="0">
+                <a:solidFill>
+                  <a:srgbClr val="56B6C2"/>
+                </a:solidFill>
+                <a:latin typeface="Consolas" pitchFamily="49" charset="0"/>
+              </a:rPr>
+              <a:t>    def</a:t>
+            </a:r>
+            <a:r>
+              <a:rPr lang="de-DE" sz="980" dirty="0">
+                <a:solidFill>
+                  <a:srgbClr val="ABB2BF"/>
+                </a:solidFill>
+                <a:latin typeface="Consolas" pitchFamily="49" charset="0"/>
+              </a:rPr>
+              <a:t> </a:t>
+            </a:r>
+            <a:r>
+              <a:rPr lang="de-DE" sz="980" dirty="0">
+                <a:solidFill>
+                  <a:srgbClr val="61AFEF"/>
+                </a:solidFill>
+                <a:latin typeface="Consolas" pitchFamily="49" charset="0"/>
+              </a:rPr>
+              <a:t>ai_worker</a:t>
+            </a:r>
+            <a:r>
+              <a:rPr lang="de-DE" sz="980" dirty="0">
+                <a:solidFill>
+                  <a:srgbClr val="ABB2BF"/>
+                </a:solidFill>
+                <a:latin typeface="Consolas" pitchFamily="49" charset="0"/>
+              </a:rPr>
+              <a:t>():  </a:t>
+            </a:r>
+            <a:r>
+              <a:rPr lang="de-DE" sz="980" i="1" dirty="0">
+                <a:solidFill>
+                  <a:srgbClr val="5C6370"/>
+                </a:solidFill>
+                <a:latin typeface="Consolas" pitchFamily="49" charset="0"/>
+              </a:rPr>
+              <a:t># läuft im Hintergrund</a:t>
+            </a:r>
+          </a:p>
+          <a:p>
+            <a:pPr marL="0" indent="0" algn="l">
+              <a:buNone/>
+            </a:pPr>
+            <a:r>
+              <a:rPr lang="de-DE" sz="980" dirty="0">
+                <a:solidFill>
+                  <a:srgbClr val="ABB2BF"/>
+                </a:solidFill>
+                <a:latin typeface="Consolas" pitchFamily="49" charset="0"/>
+              </a:rPr>
+              <a:t>        best_move = mm.</a:t>
+            </a:r>
+            <a:r>
+              <a:rPr lang="de-DE" sz="980" dirty="0">
+                <a:solidFill>
+                  <a:srgbClr val="61AFEF"/>
+                </a:solidFill>
+                <a:latin typeface="Consolas" pitchFamily="49" charset="0"/>
+              </a:rPr>
+              <a:t>get_best_move</a:t>
+            </a:r>
+            <a:r>
+              <a:rPr lang="de-DE" sz="980" dirty="0">
+                <a:solidFill>
+                  <a:srgbClr val="ABB2BF"/>
+                </a:solidFill>
+                <a:latin typeface="Consolas" pitchFamily="49" charset="0"/>
+              </a:rPr>
+              <a:t>(board, depth, ...)</a:t>
+            </a:r>
+          </a:p>
+          <a:p>
+            <a:pPr marL="0" indent="0" algn="l">
+              <a:buNone/>
+            </a:pPr>
+            <a:r>
+              <a:rPr lang="de-DE" sz="980" dirty="0">
+                <a:solidFill>
+                  <a:srgbClr val="ABB2BF"/>
+                </a:solidFill>
+                <a:latin typeface="Consolas" pitchFamily="49" charset="0"/>
+              </a:rPr>
+              <a:t>        app_state[</a:t>
+            </a:r>
+            <a:r>
+              <a:rPr lang="de-DE" sz="980" dirty="0">
+                <a:solidFill>
+                  <a:srgbClr val="98C379"/>
+                </a:solidFill>
+                <a:latin typeface="Consolas" pitchFamily="49" charset="0"/>
+              </a:rPr>
+              <a:t>"board"</a:t>
+            </a:r>
+            <a:r>
+              <a:rPr lang="de-DE" sz="980" dirty="0">
+                <a:solidFill>
+                  <a:srgbClr val="ABB2BF"/>
+                </a:solidFill>
+                <a:latin typeface="Consolas" pitchFamily="49" charset="0"/>
+              </a:rPr>
+              <a:t>] = game.</a:t>
+            </a:r>
+            <a:r>
+              <a:rPr lang="de-DE" sz="980" dirty="0">
+                <a:solidFill>
+                  <a:srgbClr val="61AFEF"/>
+                </a:solidFill>
+                <a:latin typeface="Consolas" pitchFamily="49" charset="0"/>
+              </a:rPr>
+              <a:t>apply_move</a:t>
+            </a:r>
+            <a:r>
+              <a:rPr lang="de-DE" sz="980" dirty="0">
+                <a:solidFill>
+                  <a:srgbClr val="ABB2BF"/>
+                </a:solidFill>
+                <a:latin typeface="Consolas" pitchFamily="49" charset="0"/>
+              </a:rPr>
+              <a:t>(...)</a:t>
+            </a:r>
+          </a:p>
+          <a:p>
+            <a:pPr marL="0" indent="0" algn="l">
+              <a:buNone/>
+            </a:pPr>
+            <a:r>
+              <a:rPr lang="de-DE" sz="980" dirty="0">
+                <a:solidFill>
+                  <a:srgbClr val="ABB2BF"/>
+                </a:solidFill>
+                <a:latin typeface="Consolas" pitchFamily="49" charset="0"/>
+              </a:rPr>
+              <a:t>        winner = game.</a:t>
+            </a:r>
+            <a:r>
+              <a:rPr lang="de-DE" sz="980" dirty="0">
+                <a:solidFill>
+                  <a:srgbClr val="61AFEF"/>
+                </a:solidFill>
+                <a:latin typeface="Consolas" pitchFamily="49" charset="0"/>
+              </a:rPr>
+              <a:t>check_winner</a:t>
+            </a:r>
+            <a:r>
+              <a:rPr lang="de-DE" sz="980" dirty="0">
+                <a:solidFill>
+                  <a:srgbClr val="ABB2BF"/>
+                </a:solidFill>
+                <a:latin typeface="Consolas" pitchFamily="49" charset="0"/>
+              </a:rPr>
+              <a:t>(app_state[</a:t>
+            </a:r>
+            <a:r>
+              <a:rPr lang="de-DE" sz="980" dirty="0">
+                <a:solidFill>
+                  <a:srgbClr val="98C379"/>
+                </a:solidFill>
+                <a:latin typeface="Consolas" pitchFamily="49" charset="0"/>
+              </a:rPr>
+              <a:t>"board"</a:t>
+            </a:r>
+            <a:r>
+              <a:rPr lang="de-DE" sz="980" dirty="0">
+                <a:solidFill>
+                  <a:srgbClr val="ABB2BF"/>
+                </a:solidFill>
+                <a:latin typeface="Consolas" pitchFamily="49" charset="0"/>
+              </a:rPr>
+              <a:t>])</a:t>
+            </a:r>
+          </a:p>
+          <a:p>
+            <a:pPr marL="0" indent="0" algn="l">
+              <a:buNone/>
+            </a:pPr>
+            <a:r>
+              <a:rPr lang="de-DE" sz="980" dirty="0">
+                <a:solidFill>
+                  <a:srgbClr val="ABB2BF"/>
+                </a:solidFill>
+                <a:latin typeface="Consolas" pitchFamily="49" charset="0"/>
+              </a:rPr>
+              <a:t>        app_state[</a:t>
+            </a:r>
+            <a:r>
+              <a:rPr lang="de-DE" sz="980" dirty="0">
+                <a:solidFill>
+                  <a:srgbClr val="98C379"/>
+                </a:solidFill>
+                <a:latin typeface="Consolas" pitchFamily="49" charset="0"/>
+              </a:rPr>
+              <a:t>"ai_thinking"</a:t>
+            </a:r>
+            <a:r>
+              <a:rPr lang="de-DE" sz="980" dirty="0">
+                <a:solidFill>
+                  <a:srgbClr val="ABB2BF"/>
+                </a:solidFill>
+                <a:latin typeface="Consolas" pitchFamily="49" charset="0"/>
+              </a:rPr>
+              <a:t>] = </a:t>
+            </a:r>
+            <a:r>
+              <a:rPr lang="de-DE" sz="980" dirty="0">
+                <a:solidFill>
+                  <a:srgbClr val="56B6C2"/>
+                </a:solidFill>
+                <a:latin typeface="Consolas" pitchFamily="49" charset="0"/>
+              </a:rPr>
+              <a:t>False</a:t>
+            </a:r>
+          </a:p>
+          <a:p>
+            <a:pPr>
+              <a:buNone/>
+            </a:pPr>
+            <a:endParaRPr lang="de-DE" sz="600" dirty="0"/>
+          </a:p>
+          <a:p>
+            <a:pPr marL="0" indent="0" algn="l">
+              <a:buNone/>
+            </a:pPr>
+            <a:r>
+              <a:rPr lang="de-DE" sz="980" i="1" dirty="0">
+                <a:solidFill>
+                  <a:srgbClr val="5C6370"/>
+                </a:solidFill>
+                <a:latin typeface="Consolas" pitchFamily="49" charset="0"/>
+              </a:rPr>
+              <a:t>        # ⚠ GUI-Update NUR im Hauptthread!</a:t>
+            </a:r>
+          </a:p>
+          <a:p>
+            <a:pPr marL="0" indent="0" algn="l">
+              <a:buNone/>
+            </a:pPr>
+            <a:r>
+              <a:rPr lang="de-DE" sz="980" dirty="0">
+                <a:solidFill>
+                  <a:srgbClr val="ABB2BF"/>
+                </a:solidFill>
+                <a:latin typeface="Consolas" pitchFamily="49" charset="0"/>
+              </a:rPr>
+              <a:t>        board_canvas.</a:t>
+            </a:r>
+            <a:r>
+              <a:rPr lang="de-DE" sz="980" dirty="0">
+                <a:solidFill>
+                  <a:srgbClr val="61AFEF"/>
+                </a:solidFill>
+                <a:latin typeface="Consolas" pitchFamily="49" charset="0"/>
+              </a:rPr>
+              <a:t>after</a:t>
+            </a:r>
+            <a:r>
+              <a:rPr lang="de-DE" sz="980" dirty="0">
+                <a:solidFill>
+                  <a:srgbClr val="ABB2BF"/>
+                </a:solidFill>
+                <a:latin typeface="Consolas" pitchFamily="49" charset="0"/>
+              </a:rPr>
+              <a:t>(</a:t>
+            </a:r>
+            <a:r>
+              <a:rPr lang="de-DE" sz="980" dirty="0">
+                <a:solidFill>
+                  <a:srgbClr val="98C379"/>
+                </a:solidFill>
+                <a:latin typeface="Consolas" pitchFamily="49" charset="0"/>
+              </a:rPr>
+              <a:t>0</a:t>
+            </a:r>
+            <a:r>
+              <a:rPr lang="de-DE" sz="980" dirty="0">
+                <a:solidFill>
+                  <a:srgbClr val="ABB2BF"/>
+                </a:solidFill>
+                <a:latin typeface="Consolas" pitchFamily="49" charset="0"/>
+              </a:rPr>
+              <a:t>, </a:t>
+            </a:r>
+          </a:p>
+          <a:p>
+            <a:pPr marL="0" indent="0" algn="l">
+              <a:buNone/>
+            </a:pPr>
+            <a:r>
+              <a:rPr lang="de-DE" sz="980" dirty="0">
+                <a:solidFill>
+                  <a:srgbClr val="ABB2BF"/>
+                </a:solidFill>
+                <a:latin typeface="Consolas" pitchFamily="49" charset="0"/>
+              </a:rPr>
+              <a:t>            </a:t>
+            </a:r>
+            <a:r>
+              <a:rPr lang="de-DE" sz="980" dirty="0">
+                <a:solidFill>
+                  <a:srgbClr val="56B6C2"/>
+                </a:solidFill>
+                <a:latin typeface="Consolas" pitchFamily="49" charset="0"/>
+              </a:rPr>
+              <a:t>lambda</a:t>
+            </a:r>
+            <a:r>
+              <a:rPr lang="de-DE" sz="980" dirty="0">
+                <a:solidFill>
+                  <a:srgbClr val="ABB2BF"/>
+                </a:solidFill>
+                <a:latin typeface="Consolas" pitchFamily="49" charset="0"/>
+              </a:rPr>
+              <a:t>: </a:t>
+            </a:r>
+            <a:r>
+              <a:rPr lang="de-DE" sz="980" dirty="0">
+                <a:solidFill>
+                  <a:srgbClr val="61AFEF"/>
+                </a:solidFill>
+                <a:latin typeface="Consolas" pitchFamily="49" charset="0"/>
+              </a:rPr>
+              <a:t>after_ai_turn</a:t>
+            </a:r>
+            <a:r>
+              <a:rPr lang="de-DE" sz="980" dirty="0">
+                <a:solidFill>
+                  <a:srgbClr val="ABB2BF"/>
+                </a:solidFill>
+                <a:latin typeface="Consolas" pitchFamily="49" charset="0"/>
+              </a:rPr>
+              <a:t>(winner))</a:t>
+            </a:r>
+          </a:p>
+          <a:p>
+            <a:pPr>
+              <a:buNone/>
+            </a:pPr>
+            <a:endParaRPr lang="de-DE" sz="600" dirty="0"/>
+          </a:p>
+          <a:p>
+            <a:pPr marL="0" indent="0" algn="l">
+              <a:buNone/>
+            </a:pPr>
+            <a:r>
+              <a:rPr lang="de-DE" sz="980" dirty="0">
+                <a:solidFill>
+                  <a:srgbClr val="ABB2BF"/>
+                </a:solidFill>
+                <a:latin typeface="Consolas" pitchFamily="49" charset="0"/>
+              </a:rPr>
+              <a:t>    thread = threading.</a:t>
+            </a:r>
+            <a:r>
+              <a:rPr lang="de-DE" sz="980" dirty="0">
+                <a:solidFill>
+                  <a:srgbClr val="61AFEF"/>
+                </a:solidFill>
+                <a:latin typeface="Consolas" pitchFamily="49" charset="0"/>
+              </a:rPr>
+              <a:t>Thread</a:t>
+            </a:r>
+            <a:r>
+              <a:rPr lang="de-DE" sz="980" dirty="0">
+                <a:solidFill>
+                  <a:srgbClr val="ABB2BF"/>
+                </a:solidFill>
+                <a:latin typeface="Consolas" pitchFamily="49" charset="0"/>
+              </a:rPr>
+              <a:t>(</a:t>
+            </a:r>
+          </a:p>
+          <a:p>
+            <a:pPr marL="0" indent="0" algn="l">
+              <a:buNone/>
+            </a:pPr>
+            <a:r>
+              <a:rPr lang="de-DE" sz="980" dirty="0">
+                <a:solidFill>
+                  <a:srgbClr val="ABB2BF"/>
+                </a:solidFill>
+                <a:latin typeface="Consolas" pitchFamily="49" charset="0"/>
+              </a:rPr>
+              <a:t>        target=</a:t>
+            </a:r>
+            <a:r>
+              <a:rPr lang="de-DE" sz="980" dirty="0">
+                <a:solidFill>
+                  <a:srgbClr val="61AFEF"/>
+                </a:solidFill>
+                <a:latin typeface="Consolas" pitchFamily="49" charset="0"/>
+              </a:rPr>
+              <a:t>ai_worker</a:t>
+            </a:r>
+            <a:r>
+              <a:rPr lang="de-DE" sz="980" dirty="0">
+                <a:solidFill>
+                  <a:srgbClr val="ABB2BF"/>
+                </a:solidFill>
+                <a:latin typeface="Consolas" pitchFamily="49" charset="0"/>
+              </a:rPr>
+              <a:t>, daemon=</a:t>
+            </a:r>
+            <a:r>
+              <a:rPr lang="de-DE" sz="980" dirty="0">
+                <a:solidFill>
+                  <a:srgbClr val="56B6C2"/>
+                </a:solidFill>
+                <a:latin typeface="Consolas" pitchFamily="49" charset="0"/>
+              </a:rPr>
+              <a:t>True</a:t>
+            </a:r>
+            <a:r>
+              <a:rPr lang="de-DE" sz="980" dirty="0">
+                <a:solidFill>
+                  <a:srgbClr val="ABB2BF"/>
+                </a:solidFill>
+                <a:latin typeface="Consolas" pitchFamily="49" charset="0"/>
+              </a:rPr>
+              <a:t>)</a:t>
+            </a:r>
+          </a:p>
+          <a:p>
+            <a:pPr marL="0" indent="0" algn="l">
+              <a:buNone/>
+            </a:pPr>
+            <a:r>
+              <a:rPr lang="de-DE" sz="980" dirty="0">
+                <a:solidFill>
+                  <a:srgbClr val="ABB2BF"/>
+                </a:solidFill>
+                <a:latin typeface="Consolas" pitchFamily="49" charset="0"/>
+              </a:rPr>
+              <a:t>    thread.</a:t>
+            </a:r>
+            <a:r>
+              <a:rPr lang="de-DE" sz="980" dirty="0">
+                <a:solidFill>
+                  <a:srgbClr val="61AFEF"/>
+                </a:solidFill>
+                <a:latin typeface="Consolas" pitchFamily="49" charset="0"/>
+              </a:rPr>
+              <a:t>start</a:t>
+            </a:r>
+            <a:r>
+              <a:rPr lang="de-DE" sz="980" dirty="0">
+                <a:solidFill>
+                  <a:srgbClr val="ABB2BF"/>
+                </a:solidFill>
+                <a:latin typeface="Consolas" pitchFamily="49" charset="0"/>
+              </a:rPr>
+              <a:t>()</a:t>
+            </a:r>
+          </a:p>
+        </p:txBody>
+      </p:sp>
+      <p:sp>
+        <p:nvSpPr>
+          <p:cNvPr id="7" name="BulletCard"/>
+          <p:cNvSpPr/>
+          <p:nvPr/>
+        </p:nvSpPr>
+        <p:spPr>
+          <a:xfrm>
+            <a:off x="5707200" y="1234440"/>
+            <a:ext cx="3071040" cy="3650000"/>
+          </a:xfrm>
+          <a:prstGeom prst="rect">
+            <a:avLst/>
+          </a:prstGeom>
+          <a:solidFill>
+            <a:srgbClr val="1E2A4A"/>
+          </a:solidFill>
+          <a:ln w="6350">
+            <a:solidFill>
+              <a:srgbClr val="2A3A5E"/>
+            </a:solidFill>
+            <a:prstDash val="solid"/>
+          </a:ln>
+        </p:spPr>
+      </p:sp>
+      <p:sp>
+        <p:nvSpPr>
+          <p:cNvPr id="8" name="BulletText"/>
+          <p:cNvSpPr/>
+          <p:nvPr/>
+        </p:nvSpPr>
+        <p:spPr>
+          <a:xfrm>
+            <a:off x="5798640" y="1325880"/>
+            <a:ext cx="2888160" cy="3467120"/>
+          </a:xfrm>
+          <a:prstGeom prst="rect">
+            <a:avLst/>
+          </a:prstGeom>
+          <a:noFill/>
+          <a:ln/>
+        </p:spPr>
+        <p:txBody>
+          <a:bodyPr wrap="square" lIns="114300" tIns="91440" rIns="114300" bIns="91440" rtlCol="0" anchor="t"/>
+          <a:lstStyle/>
+          <a:p>
+            <a:pPr marL="342900" indent="-342900" algn="l">
+              <a:buChar char="▸"/>
+            </a:pPr>
+            <a:r>
+              <a:rPr lang="de-DE" sz="1150" b="1" dirty="0">
+                <a:solidFill>
+                  <a:srgbClr val="B0C4DE"/>
+                </a:solidFill>
+                <a:latin typeface="Calibri" pitchFamily="49" charset="0"/>
+              </a:rPr>
+              <a:t>daemon=True</a:t>
+            </a:r>
+          </a:p>
+          <a:p>
+            <a:pPr marL="342900" indent="0" algn="l">
+              <a:buNone/>
+            </a:pPr>
+            <a:r>
+              <a:rPr lang="de-DE" sz="1000" dirty="0">
+                <a:solidFill>
+                  <a:srgbClr val="8892A4"/>
+                </a:solidFill>
+                <a:latin typeface="Calibri" pitchFamily="49" charset="0"/>
+              </a:rPr>
+              <a:t>Thread endet automatisch wenn das Fenster geschlossen wird</a:t>
+            </a:r>
+          </a:p>
+          <a:p>
+            <a:pPr marL="342900" indent="-342900" algn="l">
+              <a:spcBef>
+                <a:spcPts val="160"/>
+              </a:spcBef>
+              <a:buChar char="▸"/>
+            </a:pPr>
+            <a:r>
+              <a:rPr lang="de-DE" sz="1150" b="1" dirty="0">
+                <a:solidFill>
+                  <a:srgbClr val="B0C4DE"/>
+                </a:solidFill>
+                <a:latin typeface="Calibri" pitchFamily="49" charset="0"/>
+              </a:rPr>
+              <a:t>after(0, fn)</a:t>
+            </a:r>
+          </a:p>
+          <a:p>
+            <a:pPr marL="342900" indent="0" algn="l">
+              <a:buNone/>
+            </a:pPr>
+            <a:r>
+              <a:rPr lang="de-DE" sz="1000" dirty="0">
+                <a:solidFill>
+                  <a:srgbClr val="8892A4"/>
+                </a:solidFill>
+                <a:latin typeface="Calibri" pitchFamily="49" charset="0"/>
+              </a:rPr>
+              <a:t>Marshalt den GUI-Update sicher in den tkinter-Hauptthread</a:t>
+            </a:r>
+          </a:p>
+          <a:p>
+            <a:pPr marL="342900" indent="-342900" algn="l">
+              <a:spcBef>
+                <a:spcPts val="160"/>
+              </a:spcBef>
+              <a:buChar char="▸"/>
+            </a:pPr>
+            <a:r>
+              <a:rPr lang="de-DE" sz="1150" b="1" dirty="0">
+                <a:solidFill>
+                  <a:srgbClr val="B0C4DE"/>
+                </a:solidFill>
+                <a:latin typeface="Calibri" pitchFamily="49" charset="0"/>
+              </a:rPr>
+              <a:t>Thread-Safety</a:t>
+            </a:r>
+          </a:p>
+          <a:p>
+            <a:pPr marL="342900" indent="0" algn="l">
+              <a:buNone/>
+            </a:pPr>
+            <a:r>
+              <a:rPr lang="de-DE" sz="1000" dirty="0">
+                <a:solidFill>
+                  <a:srgbClr val="8892A4"/>
+                </a:solidFill>
+                <a:latin typeface="Calibri" pitchFamily="49" charset="0"/>
+              </a:rPr>
+              <a:t>tkinter ist nicht thread-safe – kein Widget-Zugriff im Thread</a:t>
+            </a:r>
+          </a:p>
+          <a:p>
+            <a:pPr marL="342900" indent="-342900" algn="l">
+              <a:spcBef>
+                <a:spcPts val="160"/>
+              </a:spcBef>
+              <a:buChar char="▸"/>
+            </a:pPr>
+            <a:r>
+              <a:rPr lang="de-DE" sz="1150" b="1" dirty="0">
+                <a:solidFill>
+                  <a:srgbClr val="B0C4DE"/>
+                </a:solidFill>
+                <a:latin typeface="Calibri" pitchFamily="49" charset="0"/>
+              </a:rPr>
+              <a:t>app_state dict</a:t>
+            </a:r>
+          </a:p>
+          <a:p>
+            <a:pPr marL="342900" indent="0" algn="l">
+              <a:buNone/>
+            </a:pPr>
+            <a:r>
+              <a:rPr lang="de-DE" sz="1000" dirty="0">
+                <a:solidFill>
+                  <a:srgbClr val="8892A4"/>
+                </a:solidFill>
+                <a:latin typeface="Calibri" pitchFamily="49" charset="0"/>
+              </a:rPr>
+              <a:t>Zentraler Zustand ohne Klassen – einfach, direkt, prozedural</a:t>
+            </a:r>
+          </a:p>
+          <a:p>
+            <a:pPr marL="342900" indent="-342900" algn="l">
+              <a:spcBef>
+                <a:spcPts val="160"/>
+              </a:spcBef>
+              <a:buChar char="▸"/>
+            </a:pPr>
+            <a:r>
+              <a:rPr lang="de-DE" sz="1150" b="1" dirty="0">
+                <a:solidFill>
+                  <a:srgbClr val="B0C4DE"/>
+                </a:solidFill>
+                <a:latin typeface="Calibri" pitchFamily="49" charset="0"/>
+              </a:rPr>
+              <a:t>ai_thinking</a:t>
+            </a:r>
+          </a:p>
+          <a:p>
+            <a:pPr marL="342900" indent="0" algn="l">
+              <a:buNone/>
+            </a:pPr>
+            <a:r>
+              <a:rPr lang="de-DE" sz="1000" dirty="0">
+                <a:solidFill>
+                  <a:srgbClr val="8892A4"/>
+                </a:solidFill>
+                <a:latin typeface="Calibri" pitchFamily="49" charset="0"/>
+              </a:rPr>
+              <a:t>Sperrt Mauseingaben während die KI berechnet</a:t>
+            </a:r>
           </a:p>
         </p:txBody>
       </p:sp>

--- a/Präsentation/Präsentation_Projekt/HHBKTendo_Praesentation_1.pptx
+++ b/Präsentation/Präsentation_Projekt/HHBKTendo_Praesentation_1.pptx
@@ -10110,9 +10110,6 @@
           <a:p>
             <a:r>
               <a:rPr lang="en-US" sz="800" dirty="0">
-                <a:solidFill>
-                  <a:srgbClr val="E94560"/>
-                </a:solidFill>
                 <a:latin typeface="Calibri" pitchFamily="34" charset="0"/>
                 <a:ea typeface="Calibri" pitchFamily="34" charset="-122"/>
                 <a:cs typeface="Calibri" pitchFamily="34" charset="-120"/>
@@ -12228,9 +12225,6 @@
           <a:p>
             <a:r>
               <a:rPr lang="en-US" sz="800" dirty="0">
-                <a:solidFill>
-                  <a:srgbClr val="E94560"/>
-                </a:solidFill>
                 <a:latin typeface="Calibri" pitchFamily="34" charset="0"/>
                 <a:ea typeface="Calibri" pitchFamily="34" charset="-122"/>
                 <a:cs typeface="Calibri" pitchFamily="34" charset="-120"/>
@@ -14592,10 +14586,10 @@
       </p:sp>
       <p:sp>
         <p:nvSpPr>
-          <p:cNvPr id="34" name="Textfeld 33">
+          <p:cNvPr id="35" name="Textfeld 34">
             <a:extLst>
               <a:ext uri="{FF2B5EF4-FFF2-40B4-BE49-F238E27FC236}">
-                <a16:creationId xmlns:a16="http://schemas.microsoft.com/office/drawing/2014/main" id="{64C833B5-8C81-538D-D48D-830FDF78CF6E}"/>
+                <a16:creationId xmlns:a16="http://schemas.microsoft.com/office/drawing/2014/main" id="{F5DE22FE-D745-FBD2-BA50-45CEF9E74425}"/>
               </a:ext>
             </a:extLst>
           </p:cNvPr>
@@ -14604,8 +14598,8 @@
         </p:nvSpPr>
         <p:spPr>
           <a:xfrm>
-            <a:off x="8641080" y="4875028"/>
-            <a:ext cx="324613" cy="215444"/>
+            <a:off x="8737093" y="4875028"/>
+            <a:ext cx="228600" cy="215444"/>
           </a:xfrm>
           <a:prstGeom prst="rect">
             <a:avLst/>
@@ -14619,9 +14613,14 @@
           <a:lstStyle/>
           <a:p>
             <a:r>
-              <a:rPr lang="de-DE" sz="800" dirty="0"/>
+              <a:rPr lang="en-US" sz="800">
+                <a:latin typeface="Calibri" pitchFamily="34" charset="0"/>
+                <a:ea typeface="Calibri" pitchFamily="34" charset="-122"/>
+                <a:cs typeface="Calibri" pitchFamily="34" charset="-120"/>
+              </a:rPr>
               <a:t>6</a:t>
             </a:r>
+            <a:endParaRPr lang="de-DE" sz="800" dirty="0"/>
           </a:p>
         </p:txBody>
       </p:sp>

--- a/Präsentation/Präsentation_Projekt/HHBKTendo_Praesentation_1.pptx
+++ b/Präsentation/Präsentation_Projekt/HHBKTendo_Praesentation_1.pptx
@@ -1368,6 +1368,13 @@
             <a:prstDash val="solid"/>
           </a:ln>
         </p:spPr>
+        <p:txBody>
+          <a:bodyPr/>
+          <a:lstStyle/>
+          <a:p>
+            <a:endParaRPr lang="de-DE"/>
+          </a:p>
+        </p:txBody>
       </p:sp>
       <p:sp>
         <p:nvSpPr>
@@ -1393,6 +1400,13 @@
             <a:prstDash val="solid"/>
           </a:ln>
         </p:spPr>
+        <p:txBody>
+          <a:bodyPr/>
+          <a:lstStyle/>
+          <a:p>
+            <a:endParaRPr lang="de-DE"/>
+          </a:p>
+        </p:txBody>
       </p:sp>
       <p:sp>
         <p:nvSpPr>
@@ -1420,6 +1434,13 @@
             <a:prstDash val="solid"/>
           </a:ln>
         </p:spPr>
+        <p:txBody>
+          <a:bodyPr/>
+          <a:lstStyle/>
+          <a:p>
+            <a:endParaRPr lang="de-DE"/>
+          </a:p>
+        </p:txBody>
       </p:sp>
       <p:sp>
         <p:nvSpPr>
@@ -1445,6 +1466,13 @@
             <a:prstDash val="solid"/>
           </a:ln>
         </p:spPr>
+        <p:txBody>
+          <a:bodyPr/>
+          <a:lstStyle/>
+          <a:p>
+            <a:endParaRPr lang="de-DE"/>
+          </a:p>
+        </p:txBody>
       </p:sp>
       <p:sp>
         <p:nvSpPr>
@@ -1470,6 +1498,13 @@
             <a:prstDash val="solid"/>
           </a:ln>
         </p:spPr>
+        <p:txBody>
+          <a:bodyPr/>
+          <a:lstStyle/>
+          <a:p>
+            <a:endParaRPr lang="de-DE"/>
+          </a:p>
+        </p:txBody>
       </p:sp>
       <p:sp>
         <p:nvSpPr>
@@ -1497,6 +1532,13 @@
             <a:prstDash val="solid"/>
           </a:ln>
         </p:spPr>
+        <p:txBody>
+          <a:bodyPr/>
+          <a:lstStyle/>
+          <a:p>
+            <a:endParaRPr lang="de-DE"/>
+          </a:p>
+        </p:txBody>
       </p:sp>
       <p:sp>
         <p:nvSpPr>
@@ -1562,7 +1604,7 @@
               <a:buNone/>
             </a:pPr>
             <a:r>
-              <a:rPr lang="en-US" sz="3200" dirty="0">
+              <a:rPr lang="en-US" sz="2800" dirty="0">
                 <a:solidFill>
                   <a:srgbClr val="E94560"/>
                 </a:solidFill>
@@ -1572,7 +1614,7 @@
               </a:rPr>
               <a:t>Spielesammlung</a:t>
             </a:r>
-            <a:endParaRPr lang="en-US" sz="3200" dirty="0"/>
+            <a:endParaRPr lang="en-US" sz="2800" dirty="0"/>
           </a:p>
         </p:txBody>
       </p:sp>
@@ -1639,6 +1681,13 @@
             <a:prstDash val="solid"/>
           </a:ln>
         </p:spPr>
+        <p:txBody>
+          <a:bodyPr/>
+          <a:lstStyle/>
+          <a:p>
+            <a:endParaRPr lang="de-DE"/>
+          </a:p>
+        </p:txBody>
       </p:sp>
       <p:sp>
         <p:nvSpPr>
@@ -1819,7 +1868,7 @@
               <a:buNone/>
             </a:pPr>
             <a:r>
-              <a:rPr lang="en-US" sz="3200" b="1" dirty="0">
+              <a:rPr lang="en-US" sz="2800" b="1" dirty="0">
                 <a:solidFill>
                   <a:srgbClr val="1A1A2E"/>
                 </a:solidFill>
@@ -1829,7 +1878,7 @@
               </a:rPr>
               <a:t>Tic-Tac-Toe (4 gewinnt)</a:t>
             </a:r>
-            <a:endParaRPr lang="en-US" sz="3200" dirty="0"/>
+            <a:endParaRPr lang="en-US" sz="2800" dirty="0"/>
           </a:p>
         </p:txBody>
       </p:sp>
@@ -1896,6 +1945,13 @@
             <a:prstDash val="solid"/>
           </a:ln>
         </p:spPr>
+        <p:txBody>
+          <a:bodyPr/>
+          <a:lstStyle/>
+          <a:p>
+            <a:endParaRPr lang="de-DE"/>
+          </a:p>
+        </p:txBody>
       </p:sp>
       <p:sp>
         <p:nvSpPr>
@@ -1921,6 +1977,13 @@
             <a:prstDash val="solid"/>
           </a:ln>
         </p:spPr>
+        <p:txBody>
+          <a:bodyPr/>
+          <a:lstStyle/>
+          <a:p>
+            <a:endParaRPr lang="de-DE"/>
+          </a:p>
+        </p:txBody>
       </p:sp>
       <p:sp>
         <p:nvSpPr>
@@ -1946,6 +2009,13 @@
             <a:prstDash val="solid"/>
           </a:ln>
         </p:spPr>
+        <p:txBody>
+          <a:bodyPr/>
+          <a:lstStyle/>
+          <a:p>
+            <a:endParaRPr lang="de-DE"/>
+          </a:p>
+        </p:txBody>
       </p:sp>
       <p:sp>
         <p:nvSpPr>
@@ -1971,6 +2041,13 @@
             <a:prstDash val="solid"/>
           </a:ln>
         </p:spPr>
+        <p:txBody>
+          <a:bodyPr/>
+          <a:lstStyle/>
+          <a:p>
+            <a:endParaRPr lang="de-DE"/>
+          </a:p>
+        </p:txBody>
       </p:sp>
       <p:sp>
         <p:nvSpPr>
@@ -1996,6 +2073,13 @@
             <a:prstDash val="solid"/>
           </a:ln>
         </p:spPr>
+        <p:txBody>
+          <a:bodyPr/>
+          <a:lstStyle/>
+          <a:p>
+            <a:endParaRPr lang="de-DE"/>
+          </a:p>
+        </p:txBody>
       </p:sp>
       <p:sp>
         <p:nvSpPr>
@@ -2021,6 +2105,13 @@
             <a:prstDash val="solid"/>
           </a:ln>
         </p:spPr>
+        <p:txBody>
+          <a:bodyPr/>
+          <a:lstStyle/>
+          <a:p>
+            <a:endParaRPr lang="de-DE"/>
+          </a:p>
+        </p:txBody>
       </p:sp>
       <p:sp>
         <p:nvSpPr>
@@ -2046,6 +2137,13 @@
             <a:prstDash val="solid"/>
           </a:ln>
         </p:spPr>
+        <p:txBody>
+          <a:bodyPr/>
+          <a:lstStyle/>
+          <a:p>
+            <a:endParaRPr lang="de-DE"/>
+          </a:p>
+        </p:txBody>
       </p:sp>
       <p:sp>
         <p:nvSpPr>
@@ -2071,6 +2169,13 @@
             <a:prstDash val="solid"/>
           </a:ln>
         </p:spPr>
+        <p:txBody>
+          <a:bodyPr/>
+          <a:lstStyle/>
+          <a:p>
+            <a:endParaRPr lang="de-DE"/>
+          </a:p>
+        </p:txBody>
       </p:sp>
       <p:sp>
         <p:nvSpPr>
@@ -2096,6 +2201,13 @@
             <a:prstDash val="solid"/>
           </a:ln>
         </p:spPr>
+        <p:txBody>
+          <a:bodyPr/>
+          <a:lstStyle/>
+          <a:p>
+            <a:endParaRPr lang="de-DE"/>
+          </a:p>
+        </p:txBody>
       </p:sp>
       <p:sp>
         <p:nvSpPr>
@@ -2121,6 +2233,13 @@
             <a:prstDash val="solid"/>
           </a:ln>
         </p:spPr>
+        <p:txBody>
+          <a:bodyPr/>
+          <a:lstStyle/>
+          <a:p>
+            <a:endParaRPr lang="de-DE"/>
+          </a:p>
+        </p:txBody>
       </p:sp>
       <p:sp>
         <p:nvSpPr>
@@ -2146,6 +2265,13 @@
             <a:prstDash val="solid"/>
           </a:ln>
         </p:spPr>
+        <p:txBody>
+          <a:bodyPr/>
+          <a:lstStyle/>
+          <a:p>
+            <a:endParaRPr lang="de-DE"/>
+          </a:p>
+        </p:txBody>
       </p:sp>
       <p:sp>
         <p:nvSpPr>
@@ -2171,6 +2297,13 @@
             <a:prstDash val="solid"/>
           </a:ln>
         </p:spPr>
+        <p:txBody>
+          <a:bodyPr/>
+          <a:lstStyle/>
+          <a:p>
+            <a:endParaRPr lang="de-DE"/>
+          </a:p>
+        </p:txBody>
       </p:sp>
       <p:sp>
         <p:nvSpPr>
@@ -2196,6 +2329,13 @@
             <a:prstDash val="solid"/>
           </a:ln>
         </p:spPr>
+        <p:txBody>
+          <a:bodyPr/>
+          <a:lstStyle/>
+          <a:p>
+            <a:endParaRPr lang="de-DE"/>
+          </a:p>
+        </p:txBody>
       </p:sp>
       <p:sp>
         <p:nvSpPr>
@@ -2221,6 +2361,13 @@
             <a:prstDash val="solid"/>
           </a:ln>
         </p:spPr>
+        <p:txBody>
+          <a:bodyPr/>
+          <a:lstStyle/>
+          <a:p>
+            <a:endParaRPr lang="de-DE"/>
+          </a:p>
+        </p:txBody>
       </p:sp>
       <p:sp>
         <p:nvSpPr>
@@ -2246,6 +2393,13 @@
             <a:prstDash val="solid"/>
           </a:ln>
         </p:spPr>
+        <p:txBody>
+          <a:bodyPr/>
+          <a:lstStyle/>
+          <a:p>
+            <a:endParaRPr lang="de-DE"/>
+          </a:p>
+        </p:txBody>
       </p:sp>
       <p:sp>
         <p:nvSpPr>
@@ -2271,6 +2425,13 @@
             <a:prstDash val="solid"/>
           </a:ln>
         </p:spPr>
+        <p:txBody>
+          <a:bodyPr/>
+          <a:lstStyle/>
+          <a:p>
+            <a:endParaRPr lang="de-DE"/>
+          </a:p>
+        </p:txBody>
       </p:sp>
       <p:sp>
         <p:nvSpPr>
@@ -2296,6 +2457,13 @@
             <a:prstDash val="solid"/>
           </a:ln>
         </p:spPr>
+        <p:txBody>
+          <a:bodyPr/>
+          <a:lstStyle/>
+          <a:p>
+            <a:endParaRPr lang="de-DE"/>
+          </a:p>
+        </p:txBody>
       </p:sp>
       <p:sp>
         <p:nvSpPr>
@@ -2321,6 +2489,13 @@
             <a:prstDash val="solid"/>
           </a:ln>
         </p:spPr>
+        <p:txBody>
+          <a:bodyPr/>
+          <a:lstStyle/>
+          <a:p>
+            <a:endParaRPr lang="de-DE"/>
+          </a:p>
+        </p:txBody>
       </p:sp>
       <p:sp>
         <p:nvSpPr>
@@ -2346,6 +2521,13 @@
             <a:prstDash val="solid"/>
           </a:ln>
         </p:spPr>
+        <p:txBody>
+          <a:bodyPr/>
+          <a:lstStyle/>
+          <a:p>
+            <a:endParaRPr lang="de-DE"/>
+          </a:p>
+        </p:txBody>
       </p:sp>
       <p:sp>
         <p:nvSpPr>
@@ -2371,6 +2553,13 @@
             <a:prstDash val="solid"/>
           </a:ln>
         </p:spPr>
+        <p:txBody>
+          <a:bodyPr/>
+          <a:lstStyle/>
+          <a:p>
+            <a:endParaRPr lang="de-DE"/>
+          </a:p>
+        </p:txBody>
       </p:sp>
       <p:sp>
         <p:nvSpPr>
@@ -2396,6 +2585,13 @@
             <a:prstDash val="solid"/>
           </a:ln>
         </p:spPr>
+        <p:txBody>
+          <a:bodyPr/>
+          <a:lstStyle/>
+          <a:p>
+            <a:endParaRPr lang="de-DE"/>
+          </a:p>
+        </p:txBody>
       </p:sp>
       <p:sp>
         <p:nvSpPr>
@@ -2421,6 +2617,13 @@
             <a:prstDash val="solid"/>
           </a:ln>
         </p:spPr>
+        <p:txBody>
+          <a:bodyPr/>
+          <a:lstStyle/>
+          <a:p>
+            <a:endParaRPr lang="de-DE"/>
+          </a:p>
+        </p:txBody>
       </p:sp>
       <p:sp>
         <p:nvSpPr>
@@ -2446,6 +2649,13 @@
             <a:prstDash val="solid"/>
           </a:ln>
         </p:spPr>
+        <p:txBody>
+          <a:bodyPr/>
+          <a:lstStyle/>
+          <a:p>
+            <a:endParaRPr lang="de-DE"/>
+          </a:p>
+        </p:txBody>
       </p:sp>
       <p:sp>
         <p:nvSpPr>
@@ -2471,6 +2681,13 @@
             <a:prstDash val="solid"/>
           </a:ln>
         </p:spPr>
+        <p:txBody>
+          <a:bodyPr/>
+          <a:lstStyle/>
+          <a:p>
+            <a:endParaRPr lang="de-DE"/>
+          </a:p>
+        </p:txBody>
       </p:sp>
       <p:sp>
         <p:nvSpPr>
@@ -2496,6 +2713,13 @@
             <a:prstDash val="solid"/>
           </a:ln>
         </p:spPr>
+        <p:txBody>
+          <a:bodyPr/>
+          <a:lstStyle/>
+          <a:p>
+            <a:endParaRPr lang="de-DE"/>
+          </a:p>
+        </p:txBody>
       </p:sp>
       <p:sp>
         <p:nvSpPr>
@@ -2521,6 +2745,13 @@
             <a:prstDash val="solid"/>
           </a:ln>
         </p:spPr>
+        <p:txBody>
+          <a:bodyPr/>
+          <a:lstStyle/>
+          <a:p>
+            <a:endParaRPr lang="de-DE"/>
+          </a:p>
+        </p:txBody>
       </p:sp>
       <p:sp>
         <p:nvSpPr>
@@ -2546,6 +2777,13 @@
             <a:prstDash val="solid"/>
           </a:ln>
         </p:spPr>
+        <p:txBody>
+          <a:bodyPr/>
+          <a:lstStyle/>
+          <a:p>
+            <a:endParaRPr lang="de-DE"/>
+          </a:p>
+        </p:txBody>
       </p:sp>
       <p:sp>
         <p:nvSpPr>
@@ -2571,6 +2809,13 @@
             <a:prstDash val="solid"/>
           </a:ln>
         </p:spPr>
+        <p:txBody>
+          <a:bodyPr/>
+          <a:lstStyle/>
+          <a:p>
+            <a:endParaRPr lang="de-DE"/>
+          </a:p>
+        </p:txBody>
       </p:sp>
       <p:sp>
         <p:nvSpPr>
@@ -2596,6 +2841,13 @@
             <a:prstDash val="solid"/>
           </a:ln>
         </p:spPr>
+        <p:txBody>
+          <a:bodyPr/>
+          <a:lstStyle/>
+          <a:p>
+            <a:endParaRPr lang="de-DE"/>
+          </a:p>
+        </p:txBody>
       </p:sp>
       <p:sp>
         <p:nvSpPr>
@@ -2621,6 +2873,13 @@
             <a:prstDash val="solid"/>
           </a:ln>
         </p:spPr>
+        <p:txBody>
+          <a:bodyPr/>
+          <a:lstStyle/>
+          <a:p>
+            <a:endParaRPr lang="de-DE"/>
+          </a:p>
+        </p:txBody>
       </p:sp>
       <p:sp>
         <p:nvSpPr>
@@ -2646,6 +2905,13 @@
             <a:prstDash val="solid"/>
           </a:ln>
         </p:spPr>
+        <p:txBody>
+          <a:bodyPr/>
+          <a:lstStyle/>
+          <a:p>
+            <a:endParaRPr lang="de-DE"/>
+          </a:p>
+        </p:txBody>
       </p:sp>
       <p:sp>
         <p:nvSpPr>
@@ -2671,6 +2937,13 @@
             <a:prstDash val="solid"/>
           </a:ln>
         </p:spPr>
+        <p:txBody>
+          <a:bodyPr/>
+          <a:lstStyle/>
+          <a:p>
+            <a:endParaRPr lang="de-DE"/>
+          </a:p>
+        </p:txBody>
       </p:sp>
       <p:sp>
         <p:nvSpPr>
@@ -2696,6 +2969,13 @@
             <a:prstDash val="solid"/>
           </a:ln>
         </p:spPr>
+        <p:txBody>
+          <a:bodyPr/>
+          <a:lstStyle/>
+          <a:p>
+            <a:endParaRPr lang="de-DE"/>
+          </a:p>
+        </p:txBody>
       </p:sp>
       <p:sp>
         <p:nvSpPr>
@@ -2721,6 +3001,13 @@
             <a:prstDash val="solid"/>
           </a:ln>
         </p:spPr>
+        <p:txBody>
+          <a:bodyPr/>
+          <a:lstStyle/>
+          <a:p>
+            <a:endParaRPr lang="de-DE"/>
+          </a:p>
+        </p:txBody>
       </p:sp>
       <p:sp>
         <p:nvSpPr>
@@ -2746,6 +3033,13 @@
             <a:prstDash val="solid"/>
           </a:ln>
         </p:spPr>
+        <p:txBody>
+          <a:bodyPr/>
+          <a:lstStyle/>
+          <a:p>
+            <a:endParaRPr lang="de-DE"/>
+          </a:p>
+        </p:txBody>
       </p:sp>
       <p:sp>
         <p:nvSpPr>
@@ -2771,6 +3065,13 @@
             <a:prstDash val="solid"/>
           </a:ln>
         </p:spPr>
+        <p:txBody>
+          <a:bodyPr/>
+          <a:lstStyle/>
+          <a:p>
+            <a:endParaRPr lang="de-DE"/>
+          </a:p>
+        </p:txBody>
       </p:sp>
       <p:sp>
         <p:nvSpPr>
@@ -3115,6 +3416,13 @@
             </a:outerShdw>
           </a:effectLst>
         </p:spPr>
+        <p:txBody>
+          <a:bodyPr/>
+          <a:lstStyle/>
+          <a:p>
+            <a:endParaRPr lang="de-DE"/>
+          </a:p>
+        </p:txBody>
       </p:sp>
       <p:sp>
         <p:nvSpPr>
@@ -3831,6 +4139,13 @@
             <a:srgbClr val="4472C4"/>
           </a:solidFill>
         </p:spPr>
+        <p:txBody>
+          <a:bodyPr/>
+          <a:lstStyle/>
+          <a:p>
+            <a:endParaRPr lang="de-DE"/>
+          </a:p>
+        </p:txBody>
       </p:sp>
       <p:sp>
         <p:nvSpPr>
@@ -3857,13 +4172,13 @@
               <a:buNone/>
             </a:pPr>
             <a:r>
-              <a:rPr lang="de-DE" sz="3000" b="1" dirty="0">
+              <a:rPr lang="de-DE" sz="2800" b="1" dirty="0">
                 <a:solidFill>
                   <a:srgbClr val="1A1A2E"/>
                 </a:solidFill>
                 <a:latin typeface="Arial Black" pitchFamily="49" charset="0"/>
               </a:rPr>
-              <a:t>tictactoe.py – Kandidatenzüge statt Brute-Force</a:t>
+              <a:t>tictactoe.py </a:t>
             </a:r>
           </a:p>
         </p:txBody>
@@ -3928,6 +4243,13 @@
             <a:prstDash val="solid"/>
           </a:ln>
         </p:spPr>
+        <p:txBody>
+          <a:bodyPr/>
+          <a:lstStyle/>
+          <a:p>
+            <a:endParaRPr lang="de-DE"/>
+          </a:p>
+        </p:txBody>
       </p:sp>
       <p:sp>
         <p:nvSpPr>
@@ -4780,6 +5102,13 @@
             <a:prstDash val="solid"/>
           </a:ln>
         </p:spPr>
+        <p:txBody>
+          <a:bodyPr/>
+          <a:lstStyle/>
+          <a:p>
+            <a:endParaRPr lang="de-DE"/>
+          </a:p>
+        </p:txBody>
       </p:sp>
       <p:sp>
         <p:nvSpPr>
@@ -5041,6 +5370,13 @@
             <a:srgbClr val="E94560"/>
           </a:solidFill>
         </p:spPr>
+        <p:txBody>
+          <a:bodyPr/>
+          <a:lstStyle/>
+          <a:p>
+            <a:endParaRPr lang="de-DE"/>
+          </a:p>
+        </p:txBody>
       </p:sp>
       <p:sp>
         <p:nvSpPr>
@@ -5067,13 +5403,13 @@
               <a:buNone/>
             </a:pPr>
             <a:r>
-              <a:rPr lang="de-DE" sz="3000" b="1" dirty="0">
+              <a:rPr lang="de-DE" sz="2800" b="1" dirty="0">
                 <a:solidFill>
                   <a:srgbClr val="FFFFFF"/>
                 </a:solidFill>
                 <a:latin typeface="Arial Black" pitchFamily="49" charset="0"/>
               </a:rPr>
-              <a:t>main.py – KI-Berechnung ohne GUI-Blockierung</a:t>
+              <a:t>main.py – KI im eigenen Thread </a:t>
             </a:r>
           </a:p>
         </p:txBody>
@@ -5138,6 +5474,13 @@
             <a:prstDash val="solid"/>
           </a:ln>
         </p:spPr>
+        <p:txBody>
+          <a:bodyPr/>
+          <a:lstStyle/>
+          <a:p>
+            <a:endParaRPr lang="de-DE"/>
+          </a:p>
+        </p:txBody>
       </p:sp>
       <p:sp>
         <p:nvSpPr>
@@ -5970,6 +6313,13 @@
             <a:prstDash val="solid"/>
           </a:ln>
         </p:spPr>
+        <p:txBody>
+          <a:bodyPr/>
+          <a:lstStyle/>
+          <a:p>
+            <a:endParaRPr lang="de-DE"/>
+          </a:p>
+        </p:txBody>
       </p:sp>
       <p:sp>
         <p:nvSpPr>
@@ -6284,6 +6634,13 @@
             <a:prstDash val="solid"/>
           </a:ln>
         </p:spPr>
+        <p:txBody>
+          <a:bodyPr/>
+          <a:lstStyle/>
+          <a:p>
+            <a:endParaRPr lang="de-DE"/>
+          </a:p>
+        </p:txBody>
       </p:sp>
       <p:sp>
         <p:nvSpPr>
@@ -6309,6 +6666,13 @@
             <a:prstDash val="solid"/>
           </a:ln>
         </p:spPr>
+        <p:txBody>
+          <a:bodyPr/>
+          <a:lstStyle/>
+          <a:p>
+            <a:endParaRPr lang="de-DE"/>
+          </a:p>
+        </p:txBody>
       </p:sp>
       <p:sp>
         <p:nvSpPr>
@@ -6841,6 +7205,13 @@
             <a:prstDash val="solid"/>
           </a:ln>
         </p:spPr>
+        <p:txBody>
+          <a:bodyPr/>
+          <a:lstStyle/>
+          <a:p>
+            <a:endParaRPr lang="de-DE"/>
+          </a:p>
+        </p:txBody>
       </p:sp>
       <p:sp>
         <p:nvSpPr>
@@ -6866,6 +7237,13 @@
             <a:prstDash val="solid"/>
           </a:ln>
         </p:spPr>
+        <p:txBody>
+          <a:bodyPr/>
+          <a:lstStyle/>
+          <a:p>
+            <a:endParaRPr lang="de-DE"/>
+          </a:p>
+        </p:txBody>
       </p:sp>
       <p:sp>
         <p:nvSpPr>
@@ -7514,7 +7892,7 @@
               <a:buNone/>
             </a:pPr>
             <a:r>
-              <a:rPr lang="en-US" sz="3200" b="1" dirty="0">
+              <a:rPr lang="en-US" sz="2800" b="1" dirty="0">
                 <a:solidFill>
                   <a:srgbClr val="1A1A2E"/>
                 </a:solidFill>
@@ -7598,6 +7976,13 @@
             </a:outerShdw>
           </a:effectLst>
         </p:spPr>
+        <p:txBody>
+          <a:bodyPr/>
+          <a:lstStyle/>
+          <a:p>
+            <a:endParaRPr lang="de-DE"/>
+          </a:p>
+        </p:txBody>
       </p:sp>
       <p:sp>
         <p:nvSpPr>
@@ -7623,6 +8008,13 @@
             <a:prstDash val="solid"/>
           </a:ln>
         </p:spPr>
+        <p:txBody>
+          <a:bodyPr/>
+          <a:lstStyle/>
+          <a:p>
+            <a:endParaRPr lang="de-DE"/>
+          </a:p>
+        </p:txBody>
       </p:sp>
       <p:sp>
         <p:nvSpPr>
@@ -7772,6 +8164,13 @@
             </a:outerShdw>
           </a:effectLst>
         </p:spPr>
+        <p:txBody>
+          <a:bodyPr/>
+          <a:lstStyle/>
+          <a:p>
+            <a:endParaRPr lang="de-DE"/>
+          </a:p>
+        </p:txBody>
       </p:sp>
       <p:sp>
         <p:nvSpPr>
@@ -7797,6 +8196,13 @@
             <a:prstDash val="solid"/>
           </a:ln>
         </p:spPr>
+        <p:txBody>
+          <a:bodyPr/>
+          <a:lstStyle/>
+          <a:p>
+            <a:endParaRPr lang="de-DE"/>
+          </a:p>
+        </p:txBody>
       </p:sp>
       <p:sp>
         <p:nvSpPr>
@@ -7946,6 +8352,13 @@
             </a:outerShdw>
           </a:effectLst>
         </p:spPr>
+        <p:txBody>
+          <a:bodyPr/>
+          <a:lstStyle/>
+          <a:p>
+            <a:endParaRPr lang="de-DE"/>
+          </a:p>
+        </p:txBody>
       </p:sp>
       <p:sp>
         <p:nvSpPr>
@@ -7971,6 +8384,13 @@
             <a:prstDash val="solid"/>
           </a:ln>
         </p:spPr>
+        <p:txBody>
+          <a:bodyPr/>
+          <a:lstStyle/>
+          <a:p>
+            <a:endParaRPr lang="de-DE"/>
+          </a:p>
+        </p:txBody>
       </p:sp>
       <p:sp>
         <p:nvSpPr>
@@ -8120,6 +8540,13 @@
             </a:outerShdw>
           </a:effectLst>
         </p:spPr>
+        <p:txBody>
+          <a:bodyPr/>
+          <a:lstStyle/>
+          <a:p>
+            <a:endParaRPr lang="de-DE"/>
+          </a:p>
+        </p:txBody>
       </p:sp>
       <p:sp>
         <p:nvSpPr>
@@ -8145,6 +8572,13 @@
             <a:prstDash val="solid"/>
           </a:ln>
         </p:spPr>
+        <p:txBody>
+          <a:bodyPr/>
+          <a:lstStyle/>
+          <a:p>
+            <a:endParaRPr lang="de-DE"/>
+          </a:p>
+        </p:txBody>
       </p:sp>
       <p:sp>
         <p:nvSpPr>
@@ -8294,6 +8728,13 @@
             </a:outerShdw>
           </a:effectLst>
         </p:spPr>
+        <p:txBody>
+          <a:bodyPr/>
+          <a:lstStyle/>
+          <a:p>
+            <a:endParaRPr lang="de-DE"/>
+          </a:p>
+        </p:txBody>
       </p:sp>
       <p:sp>
         <p:nvSpPr>
@@ -8319,6 +8760,13 @@
             <a:prstDash val="solid"/>
           </a:ln>
         </p:spPr>
+        <p:txBody>
+          <a:bodyPr/>
+          <a:lstStyle/>
+          <a:p>
+            <a:endParaRPr lang="de-DE"/>
+          </a:p>
+        </p:txBody>
       </p:sp>
       <p:sp>
         <p:nvSpPr>
@@ -8468,6 +8916,13 @@
             </a:outerShdw>
           </a:effectLst>
         </p:spPr>
+        <p:txBody>
+          <a:bodyPr/>
+          <a:lstStyle/>
+          <a:p>
+            <a:endParaRPr lang="de-DE"/>
+          </a:p>
+        </p:txBody>
       </p:sp>
       <p:sp>
         <p:nvSpPr>
@@ -8493,6 +8948,13 @@
             <a:prstDash val="solid"/>
           </a:ln>
         </p:spPr>
+        <p:txBody>
+          <a:bodyPr/>
+          <a:lstStyle/>
+          <a:p>
+            <a:endParaRPr lang="de-DE"/>
+          </a:p>
+        </p:txBody>
       </p:sp>
       <p:sp>
         <p:nvSpPr>
@@ -8708,6 +9170,13 @@
             <a:prstDash val="solid"/>
           </a:ln>
         </p:spPr>
+        <p:txBody>
+          <a:bodyPr/>
+          <a:lstStyle/>
+          <a:p>
+            <a:endParaRPr lang="de-DE"/>
+          </a:p>
+        </p:txBody>
       </p:sp>
       <p:sp>
         <p:nvSpPr>
@@ -8772,6 +9241,13 @@
             <a:prstDash val="solid"/>
           </a:ln>
         </p:spPr>
+        <p:txBody>
+          <a:bodyPr/>
+          <a:lstStyle/>
+          <a:p>
+            <a:endParaRPr lang="de-DE"/>
+          </a:p>
+        </p:txBody>
       </p:sp>
       <p:sp>
         <p:nvSpPr>
@@ -8872,6 +9348,13 @@
             <a:prstDash val="solid"/>
           </a:ln>
         </p:spPr>
+        <p:txBody>
+          <a:bodyPr/>
+          <a:lstStyle/>
+          <a:p>
+            <a:endParaRPr lang="de-DE"/>
+          </a:p>
+        </p:txBody>
       </p:sp>
       <p:sp>
         <p:nvSpPr>
@@ -8972,6 +9455,13 @@
             <a:prstDash val="solid"/>
           </a:ln>
         </p:spPr>
+        <p:txBody>
+          <a:bodyPr/>
+          <a:lstStyle/>
+          <a:p>
+            <a:endParaRPr lang="de-DE"/>
+          </a:p>
+        </p:txBody>
       </p:sp>
       <p:sp>
         <p:nvSpPr>
@@ -9072,6 +9562,13 @@
             <a:prstDash val="solid"/>
           </a:ln>
         </p:spPr>
+        <p:txBody>
+          <a:bodyPr/>
+          <a:lstStyle/>
+          <a:p>
+            <a:endParaRPr lang="de-DE"/>
+          </a:p>
+        </p:txBody>
       </p:sp>
       <p:sp>
         <p:nvSpPr>
@@ -9172,6 +9669,13 @@
             <a:prstDash val="solid"/>
           </a:ln>
         </p:spPr>
+        <p:txBody>
+          <a:bodyPr/>
+          <a:lstStyle/>
+          <a:p>
+            <a:endParaRPr lang="de-DE"/>
+          </a:p>
+        </p:txBody>
       </p:sp>
       <p:sp>
         <p:nvSpPr>
@@ -9272,6 +9776,13 @@
             <a:prstDash val="solid"/>
           </a:ln>
         </p:spPr>
+        <p:txBody>
+          <a:bodyPr/>
+          <a:lstStyle/>
+          <a:p>
+            <a:endParaRPr lang="de-DE"/>
+          </a:p>
+        </p:txBody>
       </p:sp>
       <p:sp>
         <p:nvSpPr>
@@ -9372,6 +9883,13 @@
             <a:prstDash val="solid"/>
           </a:ln>
         </p:spPr>
+        <p:txBody>
+          <a:bodyPr/>
+          <a:lstStyle/>
+          <a:p>
+            <a:endParaRPr lang="de-DE"/>
+          </a:p>
+        </p:txBody>
       </p:sp>
       <p:sp>
         <p:nvSpPr>
@@ -9509,7 +10027,7 @@
               <a:buNone/>
             </a:pPr>
             <a:r>
-              <a:rPr lang="en-US" sz="3200" b="1" dirty="0">
+              <a:rPr lang="en-US" sz="2800" b="1" dirty="0">
                 <a:solidFill>
                   <a:srgbClr val="1A1A2E"/>
                 </a:solidFill>
@@ -9519,7 +10037,7 @@
               </a:rPr>
               <a:t>Projektüberblick</a:t>
             </a:r>
-            <a:endParaRPr lang="en-US" sz="3200" dirty="0"/>
+            <a:endParaRPr lang="en-US" sz="3000" dirty="0"/>
           </a:p>
         </p:txBody>
       </p:sp>
@@ -9554,6 +10072,13 @@
             </a:outerShdw>
           </a:effectLst>
         </p:spPr>
+        <p:txBody>
+          <a:bodyPr/>
+          <a:lstStyle/>
+          <a:p>
+            <a:endParaRPr lang="de-DE"/>
+          </a:p>
+        </p:txBody>
       </p:sp>
       <p:sp>
         <p:nvSpPr>
@@ -9579,6 +10104,13 @@
             <a:prstDash val="solid"/>
           </a:ln>
         </p:spPr>
+        <p:txBody>
+          <a:bodyPr/>
+          <a:lstStyle/>
+          <a:p>
+            <a:endParaRPr lang="de-DE"/>
+          </a:p>
+        </p:txBody>
       </p:sp>
       <p:sp>
         <p:nvSpPr>
@@ -9706,6 +10238,13 @@
             </a:outerShdw>
           </a:effectLst>
         </p:spPr>
+        <p:txBody>
+          <a:bodyPr/>
+          <a:lstStyle/>
+          <a:p>
+            <a:endParaRPr lang="de-DE"/>
+          </a:p>
+        </p:txBody>
       </p:sp>
       <p:sp>
         <p:nvSpPr>
@@ -9731,6 +10270,13 @@
             <a:prstDash val="solid"/>
           </a:ln>
         </p:spPr>
+        <p:txBody>
+          <a:bodyPr/>
+          <a:lstStyle/>
+          <a:p>
+            <a:endParaRPr lang="de-DE"/>
+          </a:p>
+        </p:txBody>
       </p:sp>
       <p:sp>
         <p:nvSpPr>
@@ -9841,6 +10387,13 @@
             </a:outerShdw>
           </a:effectLst>
         </p:spPr>
+        <p:txBody>
+          <a:bodyPr/>
+          <a:lstStyle/>
+          <a:p>
+            <a:endParaRPr lang="de-DE"/>
+          </a:p>
+        </p:txBody>
       </p:sp>
       <p:sp>
         <p:nvSpPr>
@@ -9866,6 +10419,13 @@
             <a:prstDash val="solid"/>
           </a:ln>
         </p:spPr>
+        <p:txBody>
+          <a:bodyPr/>
+          <a:lstStyle/>
+          <a:p>
+            <a:endParaRPr lang="de-DE"/>
+          </a:p>
+        </p:txBody>
       </p:sp>
       <p:sp>
         <p:nvSpPr>
@@ -9976,6 +10536,13 @@
             </a:outerShdw>
           </a:effectLst>
         </p:spPr>
+        <p:txBody>
+          <a:bodyPr/>
+          <a:lstStyle/>
+          <a:p>
+            <a:endParaRPr lang="de-DE"/>
+          </a:p>
+        </p:txBody>
       </p:sp>
       <p:sp>
         <p:nvSpPr>
@@ -10001,6 +10568,13 @@
             <a:prstDash val="solid"/>
           </a:ln>
         </p:spPr>
+        <p:txBody>
+          <a:bodyPr/>
+          <a:lstStyle/>
+          <a:p>
+            <a:endParaRPr lang="de-DE"/>
+          </a:p>
+        </p:txBody>
       </p:sp>
       <p:sp>
         <p:nvSpPr>
@@ -10178,7 +10752,7 @@
               <a:buNone/>
             </a:pPr>
             <a:r>
-              <a:rPr lang="en-US" sz="3200" b="1" dirty="0">
+              <a:rPr lang="en-US" sz="2800" b="1" dirty="0">
                 <a:solidFill>
                   <a:srgbClr val="FFFFFF"/>
                 </a:solidFill>
@@ -10188,7 +10762,7 @@
               </a:rPr>
               <a:t>Projektstruktur</a:t>
             </a:r>
-            <a:endParaRPr lang="en-US" sz="3200" dirty="0"/>
+            <a:endParaRPr lang="en-US" sz="3000" dirty="0"/>
           </a:p>
         </p:txBody>
       </p:sp>
@@ -10216,6 +10790,13 @@
             <a:prstDash val="solid"/>
           </a:ln>
         </p:spPr>
+        <p:txBody>
+          <a:bodyPr/>
+          <a:lstStyle/>
+          <a:p>
+            <a:endParaRPr lang="de-DE"/>
+          </a:p>
+        </p:txBody>
       </p:sp>
       <p:sp>
         <p:nvSpPr>
@@ -10241,6 +10822,13 @@
             <a:prstDash val="solid"/>
           </a:ln>
         </p:spPr>
+        <p:txBody>
+          <a:bodyPr/>
+          <a:lstStyle/>
+          <a:p>
+            <a:endParaRPr lang="de-DE"/>
+          </a:p>
+        </p:txBody>
       </p:sp>
       <p:sp>
         <p:nvSpPr>
@@ -10344,6 +10932,13 @@
             <a:prstDash val="solid"/>
           </a:ln>
         </p:spPr>
+        <p:txBody>
+          <a:bodyPr/>
+          <a:lstStyle/>
+          <a:p>
+            <a:endParaRPr lang="de-DE"/>
+          </a:p>
+        </p:txBody>
       </p:sp>
       <p:sp>
         <p:nvSpPr>
@@ -10369,6 +10964,13 @@
             <a:prstDash val="solid"/>
           </a:ln>
         </p:spPr>
+        <p:txBody>
+          <a:bodyPr/>
+          <a:lstStyle/>
+          <a:p>
+            <a:endParaRPr lang="de-DE"/>
+          </a:p>
+        </p:txBody>
       </p:sp>
       <p:sp>
         <p:nvSpPr>
@@ -10472,6 +11074,13 @@
             <a:prstDash val="solid"/>
           </a:ln>
         </p:spPr>
+        <p:txBody>
+          <a:bodyPr/>
+          <a:lstStyle/>
+          <a:p>
+            <a:endParaRPr lang="de-DE"/>
+          </a:p>
+        </p:txBody>
       </p:sp>
       <p:sp>
         <p:nvSpPr>
@@ -10497,6 +11106,13 @@
             <a:prstDash val="solid"/>
           </a:ln>
         </p:spPr>
+        <p:txBody>
+          <a:bodyPr/>
+          <a:lstStyle/>
+          <a:p>
+            <a:endParaRPr lang="de-DE"/>
+          </a:p>
+        </p:txBody>
       </p:sp>
       <p:sp>
         <p:nvSpPr>
@@ -10600,6 +11216,13 @@
             <a:prstDash val="solid"/>
           </a:ln>
         </p:spPr>
+        <p:txBody>
+          <a:bodyPr/>
+          <a:lstStyle/>
+          <a:p>
+            <a:endParaRPr lang="de-DE"/>
+          </a:p>
+        </p:txBody>
       </p:sp>
       <p:sp>
         <p:nvSpPr>
@@ -10625,6 +11248,13 @@
             <a:prstDash val="solid"/>
           </a:ln>
         </p:spPr>
+        <p:txBody>
+          <a:bodyPr/>
+          <a:lstStyle/>
+          <a:p>
+            <a:endParaRPr lang="de-DE"/>
+          </a:p>
+        </p:txBody>
       </p:sp>
       <p:sp>
         <p:nvSpPr>
@@ -10728,6 +11358,13 @@
             <a:prstDash val="solid"/>
           </a:ln>
         </p:spPr>
+        <p:txBody>
+          <a:bodyPr/>
+          <a:lstStyle/>
+          <a:p>
+            <a:endParaRPr lang="de-DE"/>
+          </a:p>
+        </p:txBody>
       </p:sp>
       <p:sp>
         <p:nvSpPr>
@@ -10753,6 +11390,13 @@
             <a:prstDash val="solid"/>
           </a:ln>
         </p:spPr>
+        <p:txBody>
+          <a:bodyPr/>
+          <a:lstStyle/>
+          <a:p>
+            <a:endParaRPr lang="de-DE"/>
+          </a:p>
+        </p:txBody>
       </p:sp>
       <p:sp>
         <p:nvSpPr>
@@ -10856,6 +11500,13 @@
             <a:prstDash val="solid"/>
           </a:ln>
         </p:spPr>
+        <p:txBody>
+          <a:bodyPr/>
+          <a:lstStyle/>
+          <a:p>
+            <a:endParaRPr lang="de-DE"/>
+          </a:p>
+        </p:txBody>
       </p:sp>
       <p:sp>
         <p:nvSpPr>
@@ -10881,6 +11532,13 @@
             <a:prstDash val="solid"/>
           </a:ln>
         </p:spPr>
+        <p:txBody>
+          <a:bodyPr/>
+          <a:lstStyle/>
+          <a:p>
+            <a:endParaRPr lang="de-DE"/>
+          </a:p>
+        </p:txBody>
       </p:sp>
       <p:sp>
         <p:nvSpPr>
@@ -10984,6 +11642,13 @@
             <a:prstDash val="solid"/>
           </a:ln>
         </p:spPr>
+        <p:txBody>
+          <a:bodyPr/>
+          <a:lstStyle/>
+          <a:p>
+            <a:endParaRPr lang="de-DE"/>
+          </a:p>
+        </p:txBody>
       </p:sp>
       <p:sp>
         <p:nvSpPr>
@@ -11009,6 +11674,13 @@
             <a:prstDash val="solid"/>
           </a:ln>
         </p:spPr>
+        <p:txBody>
+          <a:bodyPr/>
+          <a:lstStyle/>
+          <a:p>
+            <a:endParaRPr lang="de-DE"/>
+          </a:p>
+        </p:txBody>
       </p:sp>
       <p:sp>
         <p:nvSpPr>
@@ -11112,6 +11784,13 @@
             <a:prstDash val="solid"/>
           </a:ln>
         </p:spPr>
+        <p:txBody>
+          <a:bodyPr/>
+          <a:lstStyle/>
+          <a:p>
+            <a:endParaRPr lang="de-DE"/>
+          </a:p>
+        </p:txBody>
       </p:sp>
       <p:sp>
         <p:nvSpPr>
@@ -11137,6 +11816,13 @@
             <a:prstDash val="solid"/>
           </a:ln>
         </p:spPr>
+        <p:txBody>
+          <a:bodyPr/>
+          <a:lstStyle/>
+          <a:p>
+            <a:endParaRPr lang="de-DE"/>
+          </a:p>
+        </p:txBody>
       </p:sp>
       <p:sp>
         <p:nvSpPr>
@@ -11310,6 +11996,13 @@
             <a:srgbClr val="4472C4"/>
           </a:solidFill>
         </p:spPr>
+        <p:txBody>
+          <a:bodyPr/>
+          <a:lstStyle/>
+          <a:p>
+            <a:endParaRPr lang="de-DE"/>
+          </a:p>
+        </p:txBody>
       </p:sp>
       <p:sp>
         <p:nvSpPr>
@@ -11336,7 +12029,7 @@
               <a:buNone/>
             </a:pPr>
             <a:r>
-              <a:rPr lang="de-DE" sz="3000" b="1" dirty="0">
+              <a:rPr lang="de-DE" sz="2800" b="1" dirty="0">
                 <a:solidFill>
                   <a:srgbClr val="1A1A2E"/>
                 </a:solidFill>
@@ -11407,6 +12100,13 @@
             <a:prstDash val="solid"/>
           </a:ln>
         </p:spPr>
+        <p:txBody>
+          <a:bodyPr/>
+          <a:lstStyle/>
+          <a:p>
+            <a:endParaRPr lang="de-DE"/>
+          </a:p>
+        </p:txBody>
       </p:sp>
       <p:sp>
         <p:nvSpPr>
@@ -12020,6 +12720,13 @@
             <a:prstDash val="solid"/>
           </a:ln>
         </p:spPr>
+        <p:txBody>
+          <a:bodyPr/>
+          <a:lstStyle/>
+          <a:p>
+            <a:endParaRPr lang="de-DE"/>
+          </a:p>
+        </p:txBody>
       </p:sp>
       <p:sp>
         <p:nvSpPr>
@@ -12286,6 +12993,13 @@
             <a:srgbClr val="E94560"/>
           </a:solidFill>
         </p:spPr>
+        <p:txBody>
+          <a:bodyPr/>
+          <a:lstStyle/>
+          <a:p>
+            <a:endParaRPr lang="de-DE"/>
+          </a:p>
+        </p:txBody>
       </p:sp>
       <p:sp>
         <p:nvSpPr>
@@ -12312,7 +13026,7 @@
               <a:buNone/>
             </a:pPr>
             <a:r>
-              <a:rPr lang="de-DE" sz="3000" b="1" dirty="0">
+              <a:rPr lang="de-DE" sz="2800" b="1" dirty="0">
                 <a:solidFill>
                   <a:srgbClr val="FFFFFF"/>
                 </a:solidFill>
@@ -12383,6 +13097,13 @@
             <a:prstDash val="solid"/>
           </a:ln>
         </p:spPr>
+        <p:txBody>
+          <a:bodyPr/>
+          <a:lstStyle/>
+          <a:p>
+            <a:endParaRPr lang="de-DE"/>
+          </a:p>
+        </p:txBody>
       </p:sp>
       <p:sp>
         <p:nvSpPr>
@@ -13055,6 +13776,13 @@
             <a:prstDash val="solid"/>
           </a:ln>
         </p:spPr>
+        <p:txBody>
+          <a:bodyPr/>
+          <a:lstStyle/>
+          <a:p>
+            <a:endParaRPr lang="de-DE"/>
+          </a:p>
+        </p:txBody>
       </p:sp>
       <p:sp>
         <p:nvSpPr>
@@ -13331,7 +14059,7 @@
               <a:buNone/>
             </a:pPr>
             <a:r>
-              <a:rPr lang="en-US" sz="3200" b="1" dirty="0">
+              <a:rPr lang="en-US" sz="2800" b="1" dirty="0">
                 <a:solidFill>
                   <a:srgbClr val="1A1A2E"/>
                 </a:solidFill>
@@ -13341,7 +14069,7 @@
               </a:rPr>
               <a:t>MiniMax-Algorithmus</a:t>
             </a:r>
-            <a:endParaRPr lang="en-US" sz="3200" dirty="0"/>
+            <a:endParaRPr lang="en-US" sz="2800" dirty="0"/>
           </a:p>
         </p:txBody>
       </p:sp>
@@ -13415,6 +14143,13 @@
             </a:outerShdw>
           </a:effectLst>
         </p:spPr>
+        <p:txBody>
+          <a:bodyPr/>
+          <a:lstStyle/>
+          <a:p>
+            <a:endParaRPr lang="de-DE"/>
+          </a:p>
+        </p:txBody>
       </p:sp>
       <p:sp>
         <p:nvSpPr>
@@ -13699,6 +14434,13 @@
             </a:outerShdw>
           </a:effectLst>
         </p:spPr>
+        <p:txBody>
+          <a:bodyPr/>
+          <a:lstStyle/>
+          <a:p>
+            <a:endParaRPr lang="de-DE"/>
+          </a:p>
+        </p:txBody>
       </p:sp>
       <p:sp>
         <p:nvSpPr>
@@ -13765,6 +14507,13 @@
             <a:prstDash val="solid"/>
           </a:ln>
         </p:spPr>
+        <p:txBody>
+          <a:bodyPr/>
+          <a:lstStyle/>
+          <a:p>
+            <a:endParaRPr lang="de-DE"/>
+          </a:p>
+        </p:txBody>
       </p:sp>
       <p:sp>
         <p:nvSpPr>
@@ -13790,6 +14539,13 @@
             <a:prstDash val="solid"/>
           </a:ln>
         </p:spPr>
+        <p:txBody>
+          <a:bodyPr/>
+          <a:lstStyle/>
+          <a:p>
+            <a:endParaRPr lang="de-DE"/>
+          </a:p>
+        </p:txBody>
       </p:sp>
       <p:sp>
         <p:nvSpPr>
@@ -13934,6 +14690,13 @@
             <a:prstDash val="solid"/>
           </a:ln>
         </p:spPr>
+        <p:txBody>
+          <a:bodyPr/>
+          <a:lstStyle/>
+          <a:p>
+            <a:endParaRPr lang="de-DE"/>
+          </a:p>
+        </p:txBody>
       </p:sp>
       <p:sp>
         <p:nvSpPr>
@@ -13959,6 +14722,13 @@
             <a:prstDash val="solid"/>
           </a:ln>
         </p:spPr>
+        <p:txBody>
+          <a:bodyPr/>
+          <a:lstStyle/>
+          <a:p>
+            <a:endParaRPr lang="de-DE"/>
+          </a:p>
+        </p:txBody>
       </p:sp>
       <p:sp>
         <p:nvSpPr>
@@ -14103,6 +14873,13 @@
             <a:prstDash val="solid"/>
           </a:ln>
         </p:spPr>
+        <p:txBody>
+          <a:bodyPr/>
+          <a:lstStyle/>
+          <a:p>
+            <a:endParaRPr lang="de-DE"/>
+          </a:p>
+        </p:txBody>
       </p:sp>
       <p:sp>
         <p:nvSpPr>
@@ -14128,6 +14905,13 @@
             <a:prstDash val="solid"/>
           </a:ln>
         </p:spPr>
+        <p:txBody>
+          <a:bodyPr/>
+          <a:lstStyle/>
+          <a:p>
+            <a:endParaRPr lang="de-DE"/>
+          </a:p>
+        </p:txBody>
       </p:sp>
       <p:sp>
         <p:nvSpPr>
@@ -14272,6 +15056,13 @@
             <a:prstDash val="solid"/>
           </a:ln>
         </p:spPr>
+        <p:txBody>
+          <a:bodyPr/>
+          <a:lstStyle/>
+          <a:p>
+            <a:endParaRPr lang="de-DE"/>
+          </a:p>
+        </p:txBody>
       </p:sp>
       <p:sp>
         <p:nvSpPr>
@@ -14297,6 +15088,13 @@
             <a:prstDash val="solid"/>
           </a:ln>
         </p:spPr>
+        <p:txBody>
+          <a:bodyPr/>
+          <a:lstStyle/>
+          <a:p>
+            <a:endParaRPr lang="de-DE"/>
+          </a:p>
+        </p:txBody>
       </p:sp>
       <p:sp>
         <p:nvSpPr>
@@ -14441,6 +15239,13 @@
             <a:prstDash val="solid"/>
           </a:ln>
         </p:spPr>
+        <p:txBody>
+          <a:bodyPr/>
+          <a:lstStyle/>
+          <a:p>
+            <a:endParaRPr lang="de-DE"/>
+          </a:p>
+        </p:txBody>
       </p:sp>
       <p:sp>
         <p:nvSpPr>
@@ -14466,6 +15271,13 @@
             <a:prstDash val="solid"/>
           </a:ln>
         </p:spPr>
+        <p:txBody>
+          <a:bodyPr/>
+          <a:lstStyle/>
+          <a:p>
+            <a:endParaRPr lang="de-DE"/>
+          </a:p>
+        </p:txBody>
       </p:sp>
       <p:sp>
         <p:nvSpPr>
@@ -14675,6 +15487,13 @@
             <a:srgbClr val="4472C4"/>
           </a:solidFill>
         </p:spPr>
+        <p:txBody>
+          <a:bodyPr/>
+          <a:lstStyle/>
+          <a:p>
+            <a:endParaRPr lang="de-DE"/>
+          </a:p>
+        </p:txBody>
       </p:sp>
       <p:sp>
         <p:nvSpPr>
@@ -14701,13 +15520,13 @@
               <a:buNone/>
             </a:pPr>
             <a:r>
-              <a:rPr lang="de-DE" sz="3000" b="1" dirty="0">
+              <a:rPr lang="de-DE" sz="2800" b="1" dirty="0">
                 <a:solidFill>
                   <a:srgbClr val="1A1A2E"/>
                 </a:solidFill>
                 <a:latin typeface="Arial Black" pitchFamily="49" charset="0"/>
               </a:rPr>
-              <a:t>minimax.py – Ein Algorithmus für alle Spiele</a:t>
+              <a:t>minimax.py – Algorithmus für alle Spiele</a:t>
             </a:r>
           </a:p>
         </p:txBody>
@@ -14772,6 +15591,13 @@
             <a:prstDash val="solid"/>
           </a:ln>
         </p:spPr>
+        <p:txBody>
+          <a:bodyPr/>
+          <a:lstStyle/>
+          <a:p>
+            <a:endParaRPr lang="de-DE"/>
+          </a:p>
+        </p:txBody>
       </p:sp>
       <p:sp>
         <p:nvSpPr>
@@ -15458,6 +16284,13 @@
             <a:prstDash val="solid"/>
           </a:ln>
         </p:spPr>
+        <p:txBody>
+          <a:bodyPr/>
+          <a:lstStyle/>
+          <a:p>
+            <a:endParaRPr lang="de-DE"/>
+          </a:p>
+        </p:txBody>
       </p:sp>
       <p:sp>
         <p:nvSpPr>
@@ -15726,7 +16559,7 @@
               <a:buNone/>
             </a:pPr>
             <a:r>
-              <a:rPr lang="en-US" sz="3200" b="1" dirty="0">
+              <a:rPr lang="en-US" sz="2800" b="1" dirty="0">
                 <a:solidFill>
                   <a:srgbClr val="FFFFFF"/>
                 </a:solidFill>
@@ -15803,6 +16636,13 @@
             <a:prstDash val="solid"/>
           </a:ln>
         </p:spPr>
+        <p:txBody>
+          <a:bodyPr/>
+          <a:lstStyle/>
+          <a:p>
+            <a:endParaRPr lang="de-DE"/>
+          </a:p>
+        </p:txBody>
       </p:sp>
       <p:sp>
         <p:nvSpPr>
@@ -15828,6 +16668,13 @@
             <a:prstDash val="solid"/>
           </a:ln>
         </p:spPr>
+        <p:txBody>
+          <a:bodyPr/>
+          <a:lstStyle/>
+          <a:p>
+            <a:endParaRPr lang="de-DE"/>
+          </a:p>
+        </p:txBody>
       </p:sp>
       <p:sp>
         <p:nvSpPr>
@@ -15853,6 +16700,13 @@
             <a:prstDash val="solid"/>
           </a:ln>
         </p:spPr>
+        <p:txBody>
+          <a:bodyPr/>
+          <a:lstStyle/>
+          <a:p>
+            <a:endParaRPr lang="de-DE"/>
+          </a:p>
+        </p:txBody>
       </p:sp>
       <p:sp>
         <p:nvSpPr>
@@ -15878,6 +16732,13 @@
             <a:prstDash val="solid"/>
           </a:ln>
         </p:spPr>
+        <p:txBody>
+          <a:bodyPr/>
+          <a:lstStyle/>
+          <a:p>
+            <a:endParaRPr lang="de-DE"/>
+          </a:p>
+        </p:txBody>
       </p:sp>
       <p:sp>
         <p:nvSpPr>
@@ -15903,6 +16764,13 @@
             <a:prstDash val="solid"/>
           </a:ln>
         </p:spPr>
+        <p:txBody>
+          <a:bodyPr/>
+          <a:lstStyle/>
+          <a:p>
+            <a:endParaRPr lang="de-DE"/>
+          </a:p>
+        </p:txBody>
       </p:sp>
       <p:sp>
         <p:nvSpPr>
@@ -15928,6 +16796,13 @@
             <a:prstDash val="solid"/>
           </a:ln>
         </p:spPr>
+        <p:txBody>
+          <a:bodyPr/>
+          <a:lstStyle/>
+          <a:p>
+            <a:endParaRPr lang="de-DE"/>
+          </a:p>
+        </p:txBody>
       </p:sp>
       <p:sp>
         <p:nvSpPr>
@@ -15953,6 +16828,13 @@
             <a:prstDash val="solid"/>
           </a:ln>
         </p:spPr>
+        <p:txBody>
+          <a:bodyPr/>
+          <a:lstStyle/>
+          <a:p>
+            <a:endParaRPr lang="de-DE"/>
+          </a:p>
+        </p:txBody>
       </p:sp>
       <p:sp>
         <p:nvSpPr>
@@ -15978,6 +16860,13 @@
             <a:prstDash val="solid"/>
           </a:ln>
         </p:spPr>
+        <p:txBody>
+          <a:bodyPr/>
+          <a:lstStyle/>
+          <a:p>
+            <a:endParaRPr lang="de-DE"/>
+          </a:p>
+        </p:txBody>
       </p:sp>
       <p:sp>
         <p:nvSpPr>
@@ -16003,6 +16892,13 @@
             <a:prstDash val="solid"/>
           </a:ln>
         </p:spPr>
+        <p:txBody>
+          <a:bodyPr/>
+          <a:lstStyle/>
+          <a:p>
+            <a:endParaRPr lang="de-DE"/>
+          </a:p>
+        </p:txBody>
       </p:sp>
       <p:sp>
         <p:nvSpPr>
@@ -16028,6 +16924,13 @@
             <a:prstDash val="solid"/>
           </a:ln>
         </p:spPr>
+        <p:txBody>
+          <a:bodyPr/>
+          <a:lstStyle/>
+          <a:p>
+            <a:endParaRPr lang="de-DE"/>
+          </a:p>
+        </p:txBody>
       </p:sp>
       <p:sp>
         <p:nvSpPr>
@@ -16053,6 +16956,13 @@
             <a:prstDash val="solid"/>
           </a:ln>
         </p:spPr>
+        <p:txBody>
+          <a:bodyPr/>
+          <a:lstStyle/>
+          <a:p>
+            <a:endParaRPr lang="de-DE"/>
+          </a:p>
+        </p:txBody>
       </p:sp>
       <p:sp>
         <p:nvSpPr>
@@ -16078,6 +16988,13 @@
             <a:prstDash val="solid"/>
           </a:ln>
         </p:spPr>
+        <p:txBody>
+          <a:bodyPr/>
+          <a:lstStyle/>
+          <a:p>
+            <a:endParaRPr lang="de-DE"/>
+          </a:p>
+        </p:txBody>
       </p:sp>
       <p:sp>
         <p:nvSpPr>
@@ -16103,6 +17020,13 @@
             <a:prstDash val="solid"/>
           </a:ln>
         </p:spPr>
+        <p:txBody>
+          <a:bodyPr/>
+          <a:lstStyle/>
+          <a:p>
+            <a:endParaRPr lang="de-DE"/>
+          </a:p>
+        </p:txBody>
       </p:sp>
       <p:sp>
         <p:nvSpPr>
@@ -16128,6 +17052,13 @@
             <a:prstDash val="solid"/>
           </a:ln>
         </p:spPr>
+        <p:txBody>
+          <a:bodyPr/>
+          <a:lstStyle/>
+          <a:p>
+            <a:endParaRPr lang="de-DE"/>
+          </a:p>
+        </p:txBody>
       </p:sp>
       <p:sp>
         <p:nvSpPr>
@@ -16153,6 +17084,13 @@
             <a:prstDash val="solid"/>
           </a:ln>
         </p:spPr>
+        <p:txBody>
+          <a:bodyPr/>
+          <a:lstStyle/>
+          <a:p>
+            <a:endParaRPr lang="de-DE"/>
+          </a:p>
+        </p:txBody>
       </p:sp>
       <p:sp>
         <p:nvSpPr>
@@ -16178,6 +17116,13 @@
             <a:prstDash val="solid"/>
           </a:ln>
         </p:spPr>
+        <p:txBody>
+          <a:bodyPr/>
+          <a:lstStyle/>
+          <a:p>
+            <a:endParaRPr lang="de-DE"/>
+          </a:p>
+        </p:txBody>
       </p:sp>
       <p:sp>
         <p:nvSpPr>
@@ -16203,6 +17148,13 @@
             <a:prstDash val="solid"/>
           </a:ln>
         </p:spPr>
+        <p:txBody>
+          <a:bodyPr/>
+          <a:lstStyle/>
+          <a:p>
+            <a:endParaRPr lang="de-DE"/>
+          </a:p>
+        </p:txBody>
       </p:sp>
       <p:sp>
         <p:nvSpPr>
@@ -16228,6 +17180,13 @@
             <a:prstDash val="solid"/>
           </a:ln>
         </p:spPr>
+        <p:txBody>
+          <a:bodyPr/>
+          <a:lstStyle/>
+          <a:p>
+            <a:endParaRPr lang="de-DE"/>
+          </a:p>
+        </p:txBody>
       </p:sp>
       <p:sp>
         <p:nvSpPr>
@@ -16253,6 +17212,13 @@
             <a:prstDash val="solid"/>
           </a:ln>
         </p:spPr>
+        <p:txBody>
+          <a:bodyPr/>
+          <a:lstStyle/>
+          <a:p>
+            <a:endParaRPr lang="de-DE"/>
+          </a:p>
+        </p:txBody>
       </p:sp>
       <p:sp>
         <p:nvSpPr>
@@ -16278,6 +17244,13 @@
             <a:prstDash val="solid"/>
           </a:ln>
         </p:spPr>
+        <p:txBody>
+          <a:bodyPr/>
+          <a:lstStyle/>
+          <a:p>
+            <a:endParaRPr lang="de-DE"/>
+          </a:p>
+        </p:txBody>
       </p:sp>
       <p:sp>
         <p:nvSpPr>
@@ -16303,6 +17276,13 @@
             <a:prstDash val="solid"/>
           </a:ln>
         </p:spPr>
+        <p:txBody>
+          <a:bodyPr/>
+          <a:lstStyle/>
+          <a:p>
+            <a:endParaRPr lang="de-DE"/>
+          </a:p>
+        </p:txBody>
       </p:sp>
       <p:sp>
         <p:nvSpPr>
@@ -16328,6 +17308,13 @@
             <a:prstDash val="solid"/>
           </a:ln>
         </p:spPr>
+        <p:txBody>
+          <a:bodyPr/>
+          <a:lstStyle/>
+          <a:p>
+            <a:endParaRPr lang="de-DE"/>
+          </a:p>
+        </p:txBody>
       </p:sp>
       <p:sp>
         <p:nvSpPr>
@@ -16353,6 +17340,13 @@
             <a:prstDash val="solid"/>
           </a:ln>
         </p:spPr>
+        <p:txBody>
+          <a:bodyPr/>
+          <a:lstStyle/>
+          <a:p>
+            <a:endParaRPr lang="de-DE"/>
+          </a:p>
+        </p:txBody>
       </p:sp>
       <p:sp>
         <p:nvSpPr>
@@ -16378,6 +17372,13 @@
             <a:prstDash val="solid"/>
           </a:ln>
         </p:spPr>
+        <p:txBody>
+          <a:bodyPr/>
+          <a:lstStyle/>
+          <a:p>
+            <a:endParaRPr lang="de-DE"/>
+          </a:p>
+        </p:txBody>
       </p:sp>
       <p:sp>
         <p:nvSpPr>
@@ -16403,6 +17404,13 @@
             <a:prstDash val="solid"/>
           </a:ln>
         </p:spPr>
+        <p:txBody>
+          <a:bodyPr/>
+          <a:lstStyle/>
+          <a:p>
+            <a:endParaRPr lang="de-DE"/>
+          </a:p>
+        </p:txBody>
       </p:sp>
       <p:sp>
         <p:nvSpPr>
@@ -16428,6 +17436,13 @@
             <a:prstDash val="solid"/>
           </a:ln>
         </p:spPr>
+        <p:txBody>
+          <a:bodyPr/>
+          <a:lstStyle/>
+          <a:p>
+            <a:endParaRPr lang="de-DE"/>
+          </a:p>
+        </p:txBody>
       </p:sp>
       <p:sp>
         <p:nvSpPr>
@@ -16453,6 +17468,13 @@
             <a:prstDash val="solid"/>
           </a:ln>
         </p:spPr>
+        <p:txBody>
+          <a:bodyPr/>
+          <a:lstStyle/>
+          <a:p>
+            <a:endParaRPr lang="de-DE"/>
+          </a:p>
+        </p:txBody>
       </p:sp>
       <p:sp>
         <p:nvSpPr>
@@ -16478,6 +17500,13 @@
             <a:prstDash val="solid"/>
           </a:ln>
         </p:spPr>
+        <p:txBody>
+          <a:bodyPr/>
+          <a:lstStyle/>
+          <a:p>
+            <a:endParaRPr lang="de-DE"/>
+          </a:p>
+        </p:txBody>
       </p:sp>
       <p:sp>
         <p:nvSpPr>
@@ -16503,6 +17532,13 @@
             <a:prstDash val="solid"/>
           </a:ln>
         </p:spPr>
+        <p:txBody>
+          <a:bodyPr/>
+          <a:lstStyle/>
+          <a:p>
+            <a:endParaRPr lang="de-DE"/>
+          </a:p>
+        </p:txBody>
       </p:sp>
       <p:sp>
         <p:nvSpPr>
@@ -16528,6 +17564,13 @@
             <a:prstDash val="solid"/>
           </a:ln>
         </p:spPr>
+        <p:txBody>
+          <a:bodyPr/>
+          <a:lstStyle/>
+          <a:p>
+            <a:endParaRPr lang="de-DE"/>
+          </a:p>
+        </p:txBody>
       </p:sp>
       <p:sp>
         <p:nvSpPr>
@@ -16553,6 +17596,13 @@
             <a:prstDash val="solid"/>
           </a:ln>
         </p:spPr>
+        <p:txBody>
+          <a:bodyPr/>
+          <a:lstStyle/>
+          <a:p>
+            <a:endParaRPr lang="de-DE"/>
+          </a:p>
+        </p:txBody>
       </p:sp>
       <p:sp>
         <p:nvSpPr>
@@ -16578,6 +17628,13 @@
             <a:prstDash val="solid"/>
           </a:ln>
         </p:spPr>
+        <p:txBody>
+          <a:bodyPr/>
+          <a:lstStyle/>
+          <a:p>
+            <a:endParaRPr lang="de-DE"/>
+          </a:p>
+        </p:txBody>
       </p:sp>
       <p:sp>
         <p:nvSpPr>
@@ -16603,6 +17660,13 @@
             <a:prstDash val="solid"/>
           </a:ln>
         </p:spPr>
+        <p:txBody>
+          <a:bodyPr/>
+          <a:lstStyle/>
+          <a:p>
+            <a:endParaRPr lang="de-DE"/>
+          </a:p>
+        </p:txBody>
       </p:sp>
       <p:sp>
         <p:nvSpPr>
@@ -16628,6 +17692,13 @@
             <a:prstDash val="solid"/>
           </a:ln>
         </p:spPr>
+        <p:txBody>
+          <a:bodyPr/>
+          <a:lstStyle/>
+          <a:p>
+            <a:endParaRPr lang="de-DE"/>
+          </a:p>
+        </p:txBody>
       </p:sp>
       <p:sp>
         <p:nvSpPr>
@@ -16653,6 +17724,13 @@
             <a:prstDash val="solid"/>
           </a:ln>
         </p:spPr>
+        <p:txBody>
+          <a:bodyPr/>
+          <a:lstStyle/>
+          <a:p>
+            <a:endParaRPr lang="de-DE"/>
+          </a:p>
+        </p:txBody>
       </p:sp>
       <p:sp>
         <p:nvSpPr>
@@ -16678,6 +17756,13 @@
             <a:prstDash val="solid"/>
           </a:ln>
         </p:spPr>
+        <p:txBody>
+          <a:bodyPr/>
+          <a:lstStyle/>
+          <a:p>
+            <a:endParaRPr lang="de-DE"/>
+          </a:p>
+        </p:txBody>
       </p:sp>
       <p:sp>
         <p:nvSpPr>
@@ -16703,6 +17788,13 @@
             <a:prstDash val="solid"/>
           </a:ln>
         </p:spPr>
+        <p:txBody>
+          <a:bodyPr/>
+          <a:lstStyle/>
+          <a:p>
+            <a:endParaRPr lang="de-DE"/>
+          </a:p>
+        </p:txBody>
       </p:sp>
       <p:sp>
         <p:nvSpPr>
@@ -16728,6 +17820,13 @@
             <a:prstDash val="solid"/>
           </a:ln>
         </p:spPr>
+        <p:txBody>
+          <a:bodyPr/>
+          <a:lstStyle/>
+          <a:p>
+            <a:endParaRPr lang="de-DE"/>
+          </a:p>
+        </p:txBody>
       </p:sp>
       <p:sp>
         <p:nvSpPr>
@@ -16753,6 +17852,13 @@
             <a:prstDash val="solid"/>
           </a:ln>
         </p:spPr>
+        <p:txBody>
+          <a:bodyPr/>
+          <a:lstStyle/>
+          <a:p>
+            <a:endParaRPr lang="de-DE"/>
+          </a:p>
+        </p:txBody>
       </p:sp>
       <p:sp>
         <p:nvSpPr>
@@ -16778,6 +17884,13 @@
             <a:prstDash val="solid"/>
           </a:ln>
         </p:spPr>
+        <p:txBody>
+          <a:bodyPr/>
+          <a:lstStyle/>
+          <a:p>
+            <a:endParaRPr lang="de-DE"/>
+          </a:p>
+        </p:txBody>
       </p:sp>
       <p:sp>
         <p:nvSpPr>
@@ -16803,6 +17916,13 @@
             <a:prstDash val="solid"/>
           </a:ln>
         </p:spPr>
+        <p:txBody>
+          <a:bodyPr/>
+          <a:lstStyle/>
+          <a:p>
+            <a:endParaRPr lang="de-DE"/>
+          </a:p>
+        </p:txBody>
       </p:sp>
       <p:sp>
         <p:nvSpPr>
@@ -16828,6 +17948,13 @@
             <a:prstDash val="solid"/>
           </a:ln>
         </p:spPr>
+        <p:txBody>
+          <a:bodyPr/>
+          <a:lstStyle/>
+          <a:p>
+            <a:endParaRPr lang="de-DE"/>
+          </a:p>
+        </p:txBody>
       </p:sp>
       <p:sp>
         <p:nvSpPr>
@@ -16853,6 +17980,13 @@
             <a:prstDash val="solid"/>
           </a:ln>
         </p:spPr>
+        <p:txBody>
+          <a:bodyPr/>
+          <a:lstStyle/>
+          <a:p>
+            <a:endParaRPr lang="de-DE"/>
+          </a:p>
+        </p:txBody>
       </p:sp>
       <p:sp>
         <p:nvSpPr>
@@ -16878,6 +18012,13 @@
             <a:prstDash val="solid"/>
           </a:ln>
         </p:spPr>
+        <p:txBody>
+          <a:bodyPr/>
+          <a:lstStyle/>
+          <a:p>
+            <a:endParaRPr lang="de-DE"/>
+          </a:p>
+        </p:txBody>
       </p:sp>
       <p:sp>
         <p:nvSpPr>
@@ -16903,6 +18044,13 @@
             <a:prstDash val="solid"/>
           </a:ln>
         </p:spPr>
+        <p:txBody>
+          <a:bodyPr/>
+          <a:lstStyle/>
+          <a:p>
+            <a:endParaRPr lang="de-DE"/>
+          </a:p>
+        </p:txBody>
       </p:sp>
       <p:sp>
         <p:nvSpPr>
@@ -16928,6 +18076,13 @@
             <a:prstDash val="solid"/>
           </a:ln>
         </p:spPr>
+        <p:txBody>
+          <a:bodyPr/>
+          <a:lstStyle/>
+          <a:p>
+            <a:endParaRPr lang="de-DE"/>
+          </a:p>
+        </p:txBody>
       </p:sp>
       <p:sp>
         <p:nvSpPr>
@@ -16953,6 +18108,13 @@
             <a:prstDash val="solid"/>
           </a:ln>
         </p:spPr>
+        <p:txBody>
+          <a:bodyPr/>
+          <a:lstStyle/>
+          <a:p>
+            <a:endParaRPr lang="de-DE"/>
+          </a:p>
+        </p:txBody>
       </p:sp>
       <p:sp>
         <p:nvSpPr>
@@ -16978,6 +18140,13 @@
             <a:prstDash val="solid"/>
           </a:ln>
         </p:spPr>
+        <p:txBody>
+          <a:bodyPr/>
+          <a:lstStyle/>
+          <a:p>
+            <a:endParaRPr lang="de-DE"/>
+          </a:p>
+        </p:txBody>
       </p:sp>
       <p:sp>
         <p:nvSpPr>
@@ -17081,6 +18250,13 @@
             <a:prstDash val="solid"/>
           </a:ln>
         </p:spPr>
+        <p:txBody>
+          <a:bodyPr/>
+          <a:lstStyle/>
+          <a:p>
+            <a:endParaRPr lang="de-DE"/>
+          </a:p>
+        </p:txBody>
       </p:sp>
       <p:sp>
         <p:nvSpPr>
@@ -17722,6 +18898,13 @@
             <a:srgbClr val="E94560"/>
           </a:solidFill>
         </p:spPr>
+        <p:txBody>
+          <a:bodyPr/>
+          <a:lstStyle/>
+          <a:p>
+            <a:endParaRPr lang="de-DE"/>
+          </a:p>
+        </p:txBody>
       </p:sp>
       <p:sp>
         <p:nvSpPr>
@@ -17748,13 +18931,13 @@
               <a:buNone/>
             </a:pPr>
             <a:r>
-              <a:rPr lang="de-DE" sz="3000" b="1" dirty="0">
+              <a:rPr lang="de-DE" sz="2800" b="1" dirty="0">
                 <a:solidFill>
                   <a:srgbClr val="FFFFFF"/>
                 </a:solidFill>
                 <a:latin typeface="Arial Black" pitchFamily="49" charset="0"/>
               </a:rPr>
-              <a:t>pawn_chess.py – Dreistufige Stellungsbewertung</a:t>
+              <a:t>pawn_chess.py </a:t>
             </a:r>
           </a:p>
         </p:txBody>
@@ -17819,6 +19002,13 @@
             <a:prstDash val="solid"/>
           </a:ln>
         </p:spPr>
+        <p:txBody>
+          <a:bodyPr/>
+          <a:lstStyle/>
+          <a:p>
+            <a:endParaRPr lang="de-DE"/>
+          </a:p>
+        </p:txBody>
       </p:sp>
       <p:sp>
         <p:nvSpPr>
@@ -19007,6 +20197,13 @@
             <a:prstDash val="solid"/>
           </a:ln>
         </p:spPr>
+        <p:txBody>
+          <a:bodyPr/>
+          <a:lstStyle/>
+          <a:p>
+            <a:endParaRPr lang="de-DE"/>
+          </a:p>
+        </p:txBody>
       </p:sp>
       <p:sp>
         <p:nvSpPr>

--- a/Präsentation/Präsentation_Projekt/HHBKTendo_Praesentation_1.pptx
+++ b/Präsentation/Präsentation_Projekt/HHBKTendo_Praesentation_1.pptx
@@ -12,15 +12,15 @@
     <p:sldId id="257" r:id="rId3"/>
     <p:sldId id="258" r:id="rId4"/>
     <p:sldId id="265" r:id="rId5"/>
-    <p:sldId id="266" r:id="rId6"/>
-    <p:sldId id="259" r:id="rId7"/>
-    <p:sldId id="267" r:id="rId8"/>
-    <p:sldId id="260" r:id="rId9"/>
-    <p:sldId id="268" r:id="rId10"/>
-    <p:sldId id="261" r:id="rId11"/>
-    <p:sldId id="269" r:id="rId12"/>
-    <p:sldId id="270" r:id="rId13"/>
-    <p:sldId id="262" r:id="rId14"/>
+    <p:sldId id="262" r:id="rId6"/>
+    <p:sldId id="266" r:id="rId7"/>
+    <p:sldId id="259" r:id="rId8"/>
+    <p:sldId id="267" r:id="rId9"/>
+    <p:sldId id="260" r:id="rId10"/>
+    <p:sldId id="268" r:id="rId11"/>
+    <p:sldId id="261" r:id="rId12"/>
+    <p:sldId id="269" r:id="rId13"/>
+    <p:sldId id="270" r:id="rId14"/>
     <p:sldId id="263" r:id="rId15"/>
     <p:sldId id="264" r:id="rId16"/>
   </p:sldIdLst>
@@ -568,7 +568,7 @@
           <a:p>
             <a:fld id="{F7021451-1387-4CA6-816F-3879F97B5CBC}" type="slidenum">
               <a:rPr lang="en-US"/>
-              <a:t>6</a:t>
+              <a:t>5</a:t>
             </a:fld>
             <a:endParaRPr lang="en-US"/>
           </a:p>
@@ -652,7 +652,7 @@
           <a:p>
             <a:fld id="{F7021451-1387-4CA6-816F-3879F97B5CBC}" type="slidenum">
               <a:rPr lang="en-US"/>
-              <a:t>8</a:t>
+              <a:t>7</a:t>
             </a:fld>
             <a:endParaRPr lang="en-US"/>
           </a:p>
@@ -736,7 +736,7 @@
           <a:p>
             <a:fld id="{F7021451-1387-4CA6-816F-3879F97B5CBC}" type="slidenum">
               <a:rPr lang="en-US"/>
-              <a:t>10</a:t>
+              <a:t>9</a:t>
             </a:fld>
             <a:endParaRPr lang="en-US"/>
           </a:p>
@@ -820,7 +820,7 @@
           <a:p>
             <a:fld id="{F7021451-1387-4CA6-816F-3879F97B5CBC}" type="slidenum">
               <a:rPr lang="en-US"/>
-              <a:t>13</a:t>
+              <a:t>11</a:t>
             </a:fld>
             <a:endParaRPr lang="en-US"/>
           </a:p>
@@ -1820,6 +1820,1581 @@
 
 <file path=ppt/slides/slide10.xml><?xml version="1.0" encoding="utf-8"?>
 <p:sld xmlns:a="http://schemas.openxmlformats.org/drawingml/2006/main" xmlns:r="http://schemas.openxmlformats.org/officeDocument/2006/relationships" xmlns:p="http://schemas.openxmlformats.org/presentationml/2006/main">
+  <p:cSld>
+    <p:bg>
+      <p:bgPr>
+        <a:solidFill>
+          <a:srgbClr val="0D0D1A"/>
+        </a:solidFill>
+        <a:effectLst/>
+      </p:bgPr>
+    </p:bg>
+    <p:spTree>
+      <p:nvGrpSpPr>
+        <p:cNvPr id="1" name=""/>
+        <p:cNvGrpSpPr/>
+        <p:nvPr/>
+      </p:nvGrpSpPr>
+      <p:grpSpPr>
+        <a:xfrm>
+          <a:off x="0" y="0"/>
+          <a:ext cx="0" cy="0"/>
+          <a:chOff x="0" y="0"/>
+          <a:chExt cx="0" cy="0"/>
+        </a:xfrm>
+      </p:grpSpPr>
+      <p:sp>
+        <p:nvSpPr>
+          <p:cNvPr id="2" name="AccentStripe"/>
+          <p:cNvSpPr/>
+          <p:nvPr/>
+        </p:nvSpPr>
+        <p:spPr>
+          <a:xfrm>
+            <a:off x="0" y="0"/>
+            <a:ext cx="91440" cy="5143500"/>
+          </a:xfrm>
+          <a:prstGeom prst="rect">
+            <a:avLst/>
+          </a:prstGeom>
+          <a:solidFill>
+            <a:srgbClr val="E94560"/>
+          </a:solidFill>
+        </p:spPr>
+        <p:txBody>
+          <a:bodyPr/>
+          <a:lstStyle/>
+          <a:p>
+            <a:endParaRPr lang="de-DE"/>
+          </a:p>
+        </p:txBody>
+      </p:sp>
+      <p:sp>
+        <p:nvSpPr>
+          <p:cNvPr id="3" name="Title"/>
+          <p:cNvSpPr/>
+          <p:nvPr/>
+        </p:nvSpPr>
+        <p:spPr>
+          <a:xfrm>
+            <a:off x="457200" y="256032"/>
+            <a:ext cx="8229600" cy="594360"/>
+          </a:xfrm>
+          <a:prstGeom prst="rect">
+            <a:avLst/>
+          </a:prstGeom>
+          <a:noFill/>
+          <a:ln/>
+        </p:spPr>
+        <p:txBody>
+          <a:bodyPr wrap="square" lIns="114300" tIns="91440" rIns="114300" bIns="91440" rtlCol="0" anchor="ctr"/>
+          <a:lstStyle/>
+          <a:p>
+            <a:pPr marL="0" indent="0" algn="l">
+              <a:buNone/>
+            </a:pPr>
+            <a:r>
+              <a:rPr lang="de-DE" sz="2800" b="1" dirty="0">
+                <a:solidFill>
+                  <a:srgbClr val="FFFFFF"/>
+                </a:solidFill>
+                <a:latin typeface="Arial Black" pitchFamily="49" charset="0"/>
+              </a:rPr>
+              <a:t>pawn_chess.py </a:t>
+            </a:r>
+          </a:p>
+        </p:txBody>
+      </p:sp>
+      <p:sp>
+        <p:nvSpPr>
+          <p:cNvPr id="4" name="Subtitle"/>
+          <p:cNvSpPr/>
+          <p:nvPr/>
+        </p:nvSpPr>
+        <p:spPr>
+          <a:xfrm>
+            <a:off x="457200" y="804672"/>
+            <a:ext cx="8229600" cy="320040"/>
+          </a:xfrm>
+          <a:prstGeom prst="rect">
+            <a:avLst/>
+          </a:prstGeom>
+          <a:noFill/>
+          <a:ln/>
+        </p:spPr>
+        <p:txBody>
+          <a:bodyPr wrap="square" lIns="114300" tIns="91440" rIns="114300" bIns="91440" rtlCol="0" anchor="ctr"/>
+          <a:lstStyle/>
+          <a:p>
+            <a:pPr marL="0" indent="0" algn="l">
+              <a:buNone/>
+            </a:pPr>
+            <a:r>
+              <a:rPr lang="de-DE" sz="1200" dirty="0">
+                <a:solidFill>
+                  <a:srgbClr val="8892A4"/>
+                </a:solidFill>
+                <a:latin typeface="Calibri" pitchFamily="49" charset="0"/>
+              </a:rPr>
+              <a:t>Heuristik: Figurenzahl · Fortschritt · Zentrumskontrolle</a:t>
+            </a:r>
+          </a:p>
+        </p:txBody>
+      </p:sp>
+      <p:sp>
+        <p:nvSpPr>
+          <p:cNvPr id="5" name="CodeCard"/>
+          <p:cNvSpPr/>
+          <p:nvPr/>
+        </p:nvSpPr>
+        <p:spPr>
+          <a:xfrm>
+            <a:off x="365760" y="1234440"/>
+            <a:ext cx="5250000" cy="3650000"/>
+          </a:xfrm>
+          <a:prstGeom prst="rect">
+            <a:avLst/>
+          </a:prstGeom>
+          <a:solidFill>
+            <a:srgbClr val="121224"/>
+          </a:solidFill>
+          <a:ln w="9525">
+            <a:solidFill>
+              <a:srgbClr val="4472C4"/>
+            </a:solidFill>
+            <a:prstDash val="solid"/>
+          </a:ln>
+        </p:spPr>
+        <p:txBody>
+          <a:bodyPr/>
+          <a:lstStyle/>
+          <a:p>
+            <a:endParaRPr lang="de-DE"/>
+          </a:p>
+        </p:txBody>
+      </p:sp>
+      <p:sp>
+        <p:nvSpPr>
+          <p:cNvPr id="6" name="CodeText"/>
+          <p:cNvSpPr/>
+          <p:nvPr/>
+        </p:nvSpPr>
+        <p:spPr>
+          <a:xfrm>
+            <a:off x="457200" y="1325880"/>
+            <a:ext cx="5067120" cy="3467120"/>
+          </a:xfrm>
+          <a:prstGeom prst="rect">
+            <a:avLst/>
+          </a:prstGeom>
+          <a:noFill/>
+          <a:ln/>
+        </p:spPr>
+        <p:txBody>
+          <a:bodyPr wrap="square" lIns="114300" tIns="91440" rIns="114300" bIns="91440" rtlCol="0" anchor="t"/>
+          <a:lstStyle/>
+          <a:p>
+            <a:pPr marL="0" indent="0" algn="l">
+              <a:buNone/>
+            </a:pPr>
+            <a:r>
+              <a:rPr lang="de-DE" sz="980" i="1" dirty="0">
+                <a:solidFill>
+                  <a:srgbClr val="5C6370"/>
+                </a:solidFill>
+                <a:latin typeface="Consolas" pitchFamily="49" charset="0"/>
+              </a:rPr>
+              <a:t># Zentrums-Bonus-Matrix (Mitte ist wertvoller)</a:t>
+            </a:r>
+          </a:p>
+          <a:p>
+            <a:pPr marL="0" indent="0" algn="l">
+              <a:buNone/>
+            </a:pPr>
+            <a:r>
+              <a:rPr lang="de-DE" sz="980" dirty="0">
+                <a:solidFill>
+                  <a:srgbClr val="61AFEF"/>
+                </a:solidFill>
+                <a:latin typeface="Consolas" pitchFamily="49" charset="0"/>
+              </a:rPr>
+              <a:t>CENTER_BONUS</a:t>
+            </a:r>
+            <a:r>
+              <a:rPr lang="de-DE" sz="980" dirty="0">
+                <a:solidFill>
+                  <a:srgbClr val="ABB2BF"/>
+                </a:solidFill>
+                <a:latin typeface="Consolas" pitchFamily="49" charset="0"/>
+              </a:rPr>
+              <a:t> = [</a:t>
+            </a:r>
+          </a:p>
+          <a:p>
+            <a:pPr marL="0" indent="0" algn="l">
+              <a:buNone/>
+            </a:pPr>
+            <a:r>
+              <a:rPr lang="de-DE" sz="980" dirty="0">
+                <a:solidFill>
+                  <a:srgbClr val="ABB2BF"/>
+                </a:solidFill>
+                <a:latin typeface="Consolas" pitchFamily="49" charset="0"/>
+              </a:rPr>
+              <a:t>    [</a:t>
+            </a:r>
+            <a:r>
+              <a:rPr lang="de-DE" sz="980" dirty="0">
+                <a:solidFill>
+                  <a:srgbClr val="98C379"/>
+                </a:solidFill>
+                <a:latin typeface="Consolas" pitchFamily="49" charset="0"/>
+              </a:rPr>
+              <a:t>0</a:t>
+            </a:r>
+            <a:r>
+              <a:rPr lang="de-DE" sz="980" dirty="0">
+                <a:solidFill>
+                  <a:srgbClr val="ABB2BF"/>
+                </a:solidFill>
+                <a:latin typeface="Consolas" pitchFamily="49" charset="0"/>
+              </a:rPr>
+              <a:t>, </a:t>
+            </a:r>
+            <a:r>
+              <a:rPr lang="de-DE" sz="980" dirty="0">
+                <a:solidFill>
+                  <a:srgbClr val="98C379"/>
+                </a:solidFill>
+                <a:latin typeface="Consolas" pitchFamily="49" charset="0"/>
+              </a:rPr>
+              <a:t>0</a:t>
+            </a:r>
+            <a:r>
+              <a:rPr lang="de-DE" sz="980" dirty="0">
+                <a:solidFill>
+                  <a:srgbClr val="ABB2BF"/>
+                </a:solidFill>
+                <a:latin typeface="Consolas" pitchFamily="49" charset="0"/>
+              </a:rPr>
+              <a:t>, </a:t>
+            </a:r>
+            <a:r>
+              <a:rPr lang="de-DE" sz="980" dirty="0">
+                <a:solidFill>
+                  <a:srgbClr val="98C379"/>
+                </a:solidFill>
+                <a:latin typeface="Consolas" pitchFamily="49" charset="0"/>
+              </a:rPr>
+              <a:t>0</a:t>
+            </a:r>
+            <a:r>
+              <a:rPr lang="de-DE" sz="980" dirty="0">
+                <a:solidFill>
+                  <a:srgbClr val="ABB2BF"/>
+                </a:solidFill>
+                <a:latin typeface="Consolas" pitchFamily="49" charset="0"/>
+              </a:rPr>
+              <a:t>, </a:t>
+            </a:r>
+            <a:r>
+              <a:rPr lang="de-DE" sz="980" dirty="0">
+                <a:solidFill>
+                  <a:srgbClr val="98C379"/>
+                </a:solidFill>
+                <a:latin typeface="Consolas" pitchFamily="49" charset="0"/>
+              </a:rPr>
+              <a:t>0</a:t>
+            </a:r>
+            <a:r>
+              <a:rPr lang="de-DE" sz="980" dirty="0">
+                <a:solidFill>
+                  <a:srgbClr val="ABB2BF"/>
+                </a:solidFill>
+                <a:latin typeface="Consolas" pitchFamily="49" charset="0"/>
+              </a:rPr>
+              <a:t>, </a:t>
+            </a:r>
+            <a:r>
+              <a:rPr lang="de-DE" sz="980" dirty="0">
+                <a:solidFill>
+                  <a:srgbClr val="98C379"/>
+                </a:solidFill>
+                <a:latin typeface="Consolas" pitchFamily="49" charset="0"/>
+              </a:rPr>
+              <a:t>0</a:t>
+            </a:r>
+            <a:r>
+              <a:rPr lang="de-DE" sz="980" dirty="0">
+                <a:solidFill>
+                  <a:srgbClr val="ABB2BF"/>
+                </a:solidFill>
+                <a:latin typeface="Consolas" pitchFamily="49" charset="0"/>
+              </a:rPr>
+              <a:t>, </a:t>
+            </a:r>
+            <a:r>
+              <a:rPr lang="de-DE" sz="980" dirty="0">
+                <a:solidFill>
+                  <a:srgbClr val="98C379"/>
+                </a:solidFill>
+                <a:latin typeface="Consolas" pitchFamily="49" charset="0"/>
+              </a:rPr>
+              <a:t>0</a:t>
+            </a:r>
+            <a:r>
+              <a:rPr lang="de-DE" sz="980" dirty="0">
+                <a:solidFill>
+                  <a:srgbClr val="ABB2BF"/>
+                </a:solidFill>
+                <a:latin typeface="Consolas" pitchFamily="49" charset="0"/>
+              </a:rPr>
+              <a:t>],</a:t>
+            </a:r>
+          </a:p>
+          <a:p>
+            <a:pPr marL="0" indent="0" algn="l">
+              <a:buNone/>
+            </a:pPr>
+            <a:r>
+              <a:rPr lang="de-DE" sz="980" dirty="0">
+                <a:solidFill>
+                  <a:srgbClr val="ABB2BF"/>
+                </a:solidFill>
+                <a:latin typeface="Consolas" pitchFamily="49" charset="0"/>
+              </a:rPr>
+              <a:t>    [</a:t>
+            </a:r>
+            <a:r>
+              <a:rPr lang="de-DE" sz="980" dirty="0">
+                <a:solidFill>
+                  <a:srgbClr val="98C379"/>
+                </a:solidFill>
+                <a:latin typeface="Consolas" pitchFamily="49" charset="0"/>
+              </a:rPr>
+              <a:t>0</a:t>
+            </a:r>
+            <a:r>
+              <a:rPr lang="de-DE" sz="980" dirty="0">
+                <a:solidFill>
+                  <a:srgbClr val="ABB2BF"/>
+                </a:solidFill>
+                <a:latin typeface="Consolas" pitchFamily="49" charset="0"/>
+              </a:rPr>
+              <a:t>, </a:t>
+            </a:r>
+            <a:r>
+              <a:rPr lang="de-DE" sz="980" dirty="0">
+                <a:solidFill>
+                  <a:srgbClr val="98C379"/>
+                </a:solidFill>
+                <a:latin typeface="Consolas" pitchFamily="49" charset="0"/>
+              </a:rPr>
+              <a:t>1</a:t>
+            </a:r>
+            <a:r>
+              <a:rPr lang="de-DE" sz="980" dirty="0">
+                <a:solidFill>
+                  <a:srgbClr val="ABB2BF"/>
+                </a:solidFill>
+                <a:latin typeface="Consolas" pitchFamily="49" charset="0"/>
+              </a:rPr>
+              <a:t>, </a:t>
+            </a:r>
+            <a:r>
+              <a:rPr lang="de-DE" sz="980" dirty="0">
+                <a:solidFill>
+                  <a:srgbClr val="98C379"/>
+                </a:solidFill>
+                <a:latin typeface="Consolas" pitchFamily="49" charset="0"/>
+              </a:rPr>
+              <a:t>1</a:t>
+            </a:r>
+            <a:r>
+              <a:rPr lang="de-DE" sz="980" dirty="0">
+                <a:solidFill>
+                  <a:srgbClr val="ABB2BF"/>
+                </a:solidFill>
+                <a:latin typeface="Consolas" pitchFamily="49" charset="0"/>
+              </a:rPr>
+              <a:t>, </a:t>
+            </a:r>
+            <a:r>
+              <a:rPr lang="de-DE" sz="980" dirty="0">
+                <a:solidFill>
+                  <a:srgbClr val="98C379"/>
+                </a:solidFill>
+                <a:latin typeface="Consolas" pitchFamily="49" charset="0"/>
+              </a:rPr>
+              <a:t>1</a:t>
+            </a:r>
+            <a:r>
+              <a:rPr lang="de-DE" sz="980" dirty="0">
+                <a:solidFill>
+                  <a:srgbClr val="ABB2BF"/>
+                </a:solidFill>
+                <a:latin typeface="Consolas" pitchFamily="49" charset="0"/>
+              </a:rPr>
+              <a:t>, </a:t>
+            </a:r>
+            <a:r>
+              <a:rPr lang="de-DE" sz="980" dirty="0">
+                <a:solidFill>
+                  <a:srgbClr val="98C379"/>
+                </a:solidFill>
+                <a:latin typeface="Consolas" pitchFamily="49" charset="0"/>
+              </a:rPr>
+              <a:t>1</a:t>
+            </a:r>
+            <a:r>
+              <a:rPr lang="de-DE" sz="980" dirty="0">
+                <a:solidFill>
+                  <a:srgbClr val="ABB2BF"/>
+                </a:solidFill>
+                <a:latin typeface="Consolas" pitchFamily="49" charset="0"/>
+              </a:rPr>
+              <a:t>, </a:t>
+            </a:r>
+            <a:r>
+              <a:rPr lang="de-DE" sz="980" dirty="0">
+                <a:solidFill>
+                  <a:srgbClr val="98C379"/>
+                </a:solidFill>
+                <a:latin typeface="Consolas" pitchFamily="49" charset="0"/>
+              </a:rPr>
+              <a:t>0</a:t>
+            </a:r>
+            <a:r>
+              <a:rPr lang="de-DE" sz="980" dirty="0">
+                <a:solidFill>
+                  <a:srgbClr val="ABB2BF"/>
+                </a:solidFill>
+                <a:latin typeface="Consolas" pitchFamily="49" charset="0"/>
+              </a:rPr>
+              <a:t>],</a:t>
+            </a:r>
+          </a:p>
+          <a:p>
+            <a:pPr marL="0" indent="0" algn="l">
+              <a:buNone/>
+            </a:pPr>
+            <a:r>
+              <a:rPr lang="de-DE" sz="980" dirty="0">
+                <a:solidFill>
+                  <a:srgbClr val="ABB2BF"/>
+                </a:solidFill>
+                <a:latin typeface="Consolas" pitchFamily="49" charset="0"/>
+              </a:rPr>
+              <a:t>    [</a:t>
+            </a:r>
+            <a:r>
+              <a:rPr lang="de-DE" sz="980" dirty="0">
+                <a:solidFill>
+                  <a:srgbClr val="98C379"/>
+                </a:solidFill>
+                <a:latin typeface="Consolas" pitchFamily="49" charset="0"/>
+              </a:rPr>
+              <a:t>0</a:t>
+            </a:r>
+            <a:r>
+              <a:rPr lang="de-DE" sz="980" dirty="0">
+                <a:solidFill>
+                  <a:srgbClr val="ABB2BF"/>
+                </a:solidFill>
+                <a:latin typeface="Consolas" pitchFamily="49" charset="0"/>
+              </a:rPr>
+              <a:t>, </a:t>
+            </a:r>
+            <a:r>
+              <a:rPr lang="de-DE" sz="980" dirty="0">
+                <a:solidFill>
+                  <a:srgbClr val="98C379"/>
+                </a:solidFill>
+                <a:latin typeface="Consolas" pitchFamily="49" charset="0"/>
+              </a:rPr>
+              <a:t>1</a:t>
+            </a:r>
+            <a:r>
+              <a:rPr lang="de-DE" sz="980" dirty="0">
+                <a:solidFill>
+                  <a:srgbClr val="ABB2BF"/>
+                </a:solidFill>
+                <a:latin typeface="Consolas" pitchFamily="49" charset="0"/>
+              </a:rPr>
+              <a:t>, </a:t>
+            </a:r>
+            <a:r>
+              <a:rPr lang="de-DE" sz="980" dirty="0">
+                <a:solidFill>
+                  <a:srgbClr val="98C379"/>
+                </a:solidFill>
+                <a:latin typeface="Consolas" pitchFamily="49" charset="0"/>
+              </a:rPr>
+              <a:t>3</a:t>
+            </a:r>
+            <a:r>
+              <a:rPr lang="de-DE" sz="980" dirty="0">
+                <a:solidFill>
+                  <a:srgbClr val="ABB2BF"/>
+                </a:solidFill>
+                <a:latin typeface="Consolas" pitchFamily="49" charset="0"/>
+              </a:rPr>
+              <a:t>, </a:t>
+            </a:r>
+            <a:r>
+              <a:rPr lang="de-DE" sz="980" dirty="0">
+                <a:solidFill>
+                  <a:srgbClr val="98C379"/>
+                </a:solidFill>
+                <a:latin typeface="Consolas" pitchFamily="49" charset="0"/>
+              </a:rPr>
+              <a:t>3</a:t>
+            </a:r>
+            <a:r>
+              <a:rPr lang="de-DE" sz="980" dirty="0">
+                <a:solidFill>
+                  <a:srgbClr val="ABB2BF"/>
+                </a:solidFill>
+                <a:latin typeface="Consolas" pitchFamily="49" charset="0"/>
+              </a:rPr>
+              <a:t>, </a:t>
+            </a:r>
+            <a:r>
+              <a:rPr lang="de-DE" sz="980" dirty="0">
+                <a:solidFill>
+                  <a:srgbClr val="98C379"/>
+                </a:solidFill>
+                <a:latin typeface="Consolas" pitchFamily="49" charset="0"/>
+              </a:rPr>
+              <a:t>1</a:t>
+            </a:r>
+            <a:r>
+              <a:rPr lang="de-DE" sz="980" dirty="0">
+                <a:solidFill>
+                  <a:srgbClr val="ABB2BF"/>
+                </a:solidFill>
+                <a:latin typeface="Consolas" pitchFamily="49" charset="0"/>
+              </a:rPr>
+              <a:t>, </a:t>
+            </a:r>
+            <a:r>
+              <a:rPr lang="de-DE" sz="980" dirty="0">
+                <a:solidFill>
+                  <a:srgbClr val="98C379"/>
+                </a:solidFill>
+                <a:latin typeface="Consolas" pitchFamily="49" charset="0"/>
+              </a:rPr>
+              <a:t>0</a:t>
+            </a:r>
+            <a:r>
+              <a:rPr lang="de-DE" sz="980" dirty="0">
+                <a:solidFill>
+                  <a:srgbClr val="ABB2BF"/>
+                </a:solidFill>
+                <a:latin typeface="Consolas" pitchFamily="49" charset="0"/>
+              </a:rPr>
+              <a:t>],</a:t>
+            </a:r>
+          </a:p>
+          <a:p>
+            <a:pPr marL="0" indent="0" algn="l">
+              <a:buNone/>
+            </a:pPr>
+            <a:r>
+              <a:rPr lang="de-DE" sz="980" dirty="0">
+                <a:solidFill>
+                  <a:srgbClr val="ABB2BF"/>
+                </a:solidFill>
+                <a:latin typeface="Consolas" pitchFamily="49" charset="0"/>
+              </a:rPr>
+              <a:t>    [</a:t>
+            </a:r>
+            <a:r>
+              <a:rPr lang="de-DE" sz="980" dirty="0">
+                <a:solidFill>
+                  <a:srgbClr val="98C379"/>
+                </a:solidFill>
+                <a:latin typeface="Consolas" pitchFamily="49" charset="0"/>
+              </a:rPr>
+              <a:t>0</a:t>
+            </a:r>
+            <a:r>
+              <a:rPr lang="de-DE" sz="980" dirty="0">
+                <a:solidFill>
+                  <a:srgbClr val="ABB2BF"/>
+                </a:solidFill>
+                <a:latin typeface="Consolas" pitchFamily="49" charset="0"/>
+              </a:rPr>
+              <a:t>, </a:t>
+            </a:r>
+            <a:r>
+              <a:rPr lang="de-DE" sz="980" dirty="0">
+                <a:solidFill>
+                  <a:srgbClr val="98C379"/>
+                </a:solidFill>
+                <a:latin typeface="Consolas" pitchFamily="49" charset="0"/>
+              </a:rPr>
+              <a:t>1</a:t>
+            </a:r>
+            <a:r>
+              <a:rPr lang="de-DE" sz="980" dirty="0">
+                <a:solidFill>
+                  <a:srgbClr val="ABB2BF"/>
+                </a:solidFill>
+                <a:latin typeface="Consolas" pitchFamily="49" charset="0"/>
+              </a:rPr>
+              <a:t>, </a:t>
+            </a:r>
+            <a:r>
+              <a:rPr lang="de-DE" sz="980" dirty="0">
+                <a:solidFill>
+                  <a:srgbClr val="98C379"/>
+                </a:solidFill>
+                <a:latin typeface="Consolas" pitchFamily="49" charset="0"/>
+              </a:rPr>
+              <a:t>3</a:t>
+            </a:r>
+            <a:r>
+              <a:rPr lang="de-DE" sz="980" dirty="0">
+                <a:solidFill>
+                  <a:srgbClr val="ABB2BF"/>
+                </a:solidFill>
+                <a:latin typeface="Consolas" pitchFamily="49" charset="0"/>
+              </a:rPr>
+              <a:t>, </a:t>
+            </a:r>
+            <a:r>
+              <a:rPr lang="de-DE" sz="980" dirty="0">
+                <a:solidFill>
+                  <a:srgbClr val="98C379"/>
+                </a:solidFill>
+                <a:latin typeface="Consolas" pitchFamily="49" charset="0"/>
+              </a:rPr>
+              <a:t>3</a:t>
+            </a:r>
+            <a:r>
+              <a:rPr lang="de-DE" sz="980" dirty="0">
+                <a:solidFill>
+                  <a:srgbClr val="ABB2BF"/>
+                </a:solidFill>
+                <a:latin typeface="Consolas" pitchFamily="49" charset="0"/>
+              </a:rPr>
+              <a:t>, </a:t>
+            </a:r>
+            <a:r>
+              <a:rPr lang="de-DE" sz="980" dirty="0">
+                <a:solidFill>
+                  <a:srgbClr val="98C379"/>
+                </a:solidFill>
+                <a:latin typeface="Consolas" pitchFamily="49" charset="0"/>
+              </a:rPr>
+              <a:t>1</a:t>
+            </a:r>
+            <a:r>
+              <a:rPr lang="de-DE" sz="980" dirty="0">
+                <a:solidFill>
+                  <a:srgbClr val="ABB2BF"/>
+                </a:solidFill>
+                <a:latin typeface="Consolas" pitchFamily="49" charset="0"/>
+              </a:rPr>
+              <a:t>, </a:t>
+            </a:r>
+            <a:r>
+              <a:rPr lang="de-DE" sz="980" dirty="0">
+                <a:solidFill>
+                  <a:srgbClr val="98C379"/>
+                </a:solidFill>
+                <a:latin typeface="Consolas" pitchFamily="49" charset="0"/>
+              </a:rPr>
+              <a:t>0</a:t>
+            </a:r>
+            <a:r>
+              <a:rPr lang="de-DE" sz="980" dirty="0">
+                <a:solidFill>
+                  <a:srgbClr val="ABB2BF"/>
+                </a:solidFill>
+                <a:latin typeface="Consolas" pitchFamily="49" charset="0"/>
+              </a:rPr>
+              <a:t>],</a:t>
+            </a:r>
+          </a:p>
+          <a:p>
+            <a:pPr marL="0" indent="0" algn="l">
+              <a:buNone/>
+            </a:pPr>
+            <a:r>
+              <a:rPr lang="de-DE" sz="980" dirty="0">
+                <a:solidFill>
+                  <a:srgbClr val="ABB2BF"/>
+                </a:solidFill>
+                <a:latin typeface="Consolas" pitchFamily="49" charset="0"/>
+              </a:rPr>
+              <a:t>    [</a:t>
+            </a:r>
+            <a:r>
+              <a:rPr lang="de-DE" sz="980" dirty="0">
+                <a:solidFill>
+                  <a:srgbClr val="98C379"/>
+                </a:solidFill>
+                <a:latin typeface="Consolas" pitchFamily="49" charset="0"/>
+              </a:rPr>
+              <a:t>0</a:t>
+            </a:r>
+            <a:r>
+              <a:rPr lang="de-DE" sz="980" dirty="0">
+                <a:solidFill>
+                  <a:srgbClr val="ABB2BF"/>
+                </a:solidFill>
+                <a:latin typeface="Consolas" pitchFamily="49" charset="0"/>
+              </a:rPr>
+              <a:t>, </a:t>
+            </a:r>
+            <a:r>
+              <a:rPr lang="de-DE" sz="980" dirty="0">
+                <a:solidFill>
+                  <a:srgbClr val="98C379"/>
+                </a:solidFill>
+                <a:latin typeface="Consolas" pitchFamily="49" charset="0"/>
+              </a:rPr>
+              <a:t>1</a:t>
+            </a:r>
+            <a:r>
+              <a:rPr lang="de-DE" sz="980" dirty="0">
+                <a:solidFill>
+                  <a:srgbClr val="ABB2BF"/>
+                </a:solidFill>
+                <a:latin typeface="Consolas" pitchFamily="49" charset="0"/>
+              </a:rPr>
+              <a:t>, </a:t>
+            </a:r>
+            <a:r>
+              <a:rPr lang="de-DE" sz="980" dirty="0">
+                <a:solidFill>
+                  <a:srgbClr val="98C379"/>
+                </a:solidFill>
+                <a:latin typeface="Consolas" pitchFamily="49" charset="0"/>
+              </a:rPr>
+              <a:t>1</a:t>
+            </a:r>
+            <a:r>
+              <a:rPr lang="de-DE" sz="980" dirty="0">
+                <a:solidFill>
+                  <a:srgbClr val="ABB2BF"/>
+                </a:solidFill>
+                <a:latin typeface="Consolas" pitchFamily="49" charset="0"/>
+              </a:rPr>
+              <a:t>, </a:t>
+            </a:r>
+            <a:r>
+              <a:rPr lang="de-DE" sz="980" dirty="0">
+                <a:solidFill>
+                  <a:srgbClr val="98C379"/>
+                </a:solidFill>
+                <a:latin typeface="Consolas" pitchFamily="49" charset="0"/>
+              </a:rPr>
+              <a:t>1</a:t>
+            </a:r>
+            <a:r>
+              <a:rPr lang="de-DE" sz="980" dirty="0">
+                <a:solidFill>
+                  <a:srgbClr val="ABB2BF"/>
+                </a:solidFill>
+                <a:latin typeface="Consolas" pitchFamily="49" charset="0"/>
+              </a:rPr>
+              <a:t>, </a:t>
+            </a:r>
+            <a:r>
+              <a:rPr lang="de-DE" sz="980" dirty="0">
+                <a:solidFill>
+                  <a:srgbClr val="98C379"/>
+                </a:solidFill>
+                <a:latin typeface="Consolas" pitchFamily="49" charset="0"/>
+              </a:rPr>
+              <a:t>1</a:t>
+            </a:r>
+            <a:r>
+              <a:rPr lang="de-DE" sz="980" dirty="0">
+                <a:solidFill>
+                  <a:srgbClr val="ABB2BF"/>
+                </a:solidFill>
+                <a:latin typeface="Consolas" pitchFamily="49" charset="0"/>
+              </a:rPr>
+              <a:t>, </a:t>
+            </a:r>
+            <a:r>
+              <a:rPr lang="de-DE" sz="980" dirty="0">
+                <a:solidFill>
+                  <a:srgbClr val="98C379"/>
+                </a:solidFill>
+                <a:latin typeface="Consolas" pitchFamily="49" charset="0"/>
+              </a:rPr>
+              <a:t>0</a:t>
+            </a:r>
+            <a:r>
+              <a:rPr lang="de-DE" sz="980" dirty="0">
+                <a:solidFill>
+                  <a:srgbClr val="ABB2BF"/>
+                </a:solidFill>
+                <a:latin typeface="Consolas" pitchFamily="49" charset="0"/>
+              </a:rPr>
+              <a:t>],</a:t>
+            </a:r>
+          </a:p>
+          <a:p>
+            <a:pPr marL="0" indent="0" algn="l">
+              <a:buNone/>
+            </a:pPr>
+            <a:r>
+              <a:rPr lang="de-DE" sz="980" dirty="0">
+                <a:solidFill>
+                  <a:srgbClr val="ABB2BF"/>
+                </a:solidFill>
+                <a:latin typeface="Consolas" pitchFamily="49" charset="0"/>
+              </a:rPr>
+              <a:t>    [</a:t>
+            </a:r>
+            <a:r>
+              <a:rPr lang="de-DE" sz="980" dirty="0">
+                <a:solidFill>
+                  <a:srgbClr val="98C379"/>
+                </a:solidFill>
+                <a:latin typeface="Consolas" pitchFamily="49" charset="0"/>
+              </a:rPr>
+              <a:t>0</a:t>
+            </a:r>
+            <a:r>
+              <a:rPr lang="de-DE" sz="980" dirty="0">
+                <a:solidFill>
+                  <a:srgbClr val="ABB2BF"/>
+                </a:solidFill>
+                <a:latin typeface="Consolas" pitchFamily="49" charset="0"/>
+              </a:rPr>
+              <a:t>, </a:t>
+            </a:r>
+            <a:r>
+              <a:rPr lang="de-DE" sz="980" dirty="0">
+                <a:solidFill>
+                  <a:srgbClr val="98C379"/>
+                </a:solidFill>
+                <a:latin typeface="Consolas" pitchFamily="49" charset="0"/>
+              </a:rPr>
+              <a:t>0</a:t>
+            </a:r>
+            <a:r>
+              <a:rPr lang="de-DE" sz="980" dirty="0">
+                <a:solidFill>
+                  <a:srgbClr val="ABB2BF"/>
+                </a:solidFill>
+                <a:latin typeface="Consolas" pitchFamily="49" charset="0"/>
+              </a:rPr>
+              <a:t>, </a:t>
+            </a:r>
+            <a:r>
+              <a:rPr lang="de-DE" sz="980" dirty="0">
+                <a:solidFill>
+                  <a:srgbClr val="98C379"/>
+                </a:solidFill>
+                <a:latin typeface="Consolas" pitchFamily="49" charset="0"/>
+              </a:rPr>
+              <a:t>0</a:t>
+            </a:r>
+            <a:r>
+              <a:rPr lang="de-DE" sz="980" dirty="0">
+                <a:solidFill>
+                  <a:srgbClr val="ABB2BF"/>
+                </a:solidFill>
+                <a:latin typeface="Consolas" pitchFamily="49" charset="0"/>
+              </a:rPr>
+              <a:t>, </a:t>
+            </a:r>
+            <a:r>
+              <a:rPr lang="de-DE" sz="980" dirty="0">
+                <a:solidFill>
+                  <a:srgbClr val="98C379"/>
+                </a:solidFill>
+                <a:latin typeface="Consolas" pitchFamily="49" charset="0"/>
+              </a:rPr>
+              <a:t>0</a:t>
+            </a:r>
+            <a:r>
+              <a:rPr lang="de-DE" sz="980" dirty="0">
+                <a:solidFill>
+                  <a:srgbClr val="ABB2BF"/>
+                </a:solidFill>
+                <a:latin typeface="Consolas" pitchFamily="49" charset="0"/>
+              </a:rPr>
+              <a:t>, </a:t>
+            </a:r>
+            <a:r>
+              <a:rPr lang="de-DE" sz="980" dirty="0">
+                <a:solidFill>
+                  <a:srgbClr val="98C379"/>
+                </a:solidFill>
+                <a:latin typeface="Consolas" pitchFamily="49" charset="0"/>
+              </a:rPr>
+              <a:t>0</a:t>
+            </a:r>
+            <a:r>
+              <a:rPr lang="de-DE" sz="980" dirty="0">
+                <a:solidFill>
+                  <a:srgbClr val="ABB2BF"/>
+                </a:solidFill>
+                <a:latin typeface="Consolas" pitchFamily="49" charset="0"/>
+              </a:rPr>
+              <a:t>, </a:t>
+            </a:r>
+            <a:r>
+              <a:rPr lang="de-DE" sz="980" dirty="0">
+                <a:solidFill>
+                  <a:srgbClr val="98C379"/>
+                </a:solidFill>
+                <a:latin typeface="Consolas" pitchFamily="49" charset="0"/>
+              </a:rPr>
+              <a:t>0</a:t>
+            </a:r>
+            <a:r>
+              <a:rPr lang="de-DE" sz="980" dirty="0">
+                <a:solidFill>
+                  <a:srgbClr val="ABB2BF"/>
+                </a:solidFill>
+                <a:latin typeface="Consolas" pitchFamily="49" charset="0"/>
+              </a:rPr>
+              <a:t>],</a:t>
+            </a:r>
+          </a:p>
+          <a:p>
+            <a:pPr marL="0" indent="0" algn="l">
+              <a:buNone/>
+            </a:pPr>
+            <a:r>
+              <a:rPr lang="de-DE" sz="980" dirty="0">
+                <a:solidFill>
+                  <a:srgbClr val="ABB2BF"/>
+                </a:solidFill>
+                <a:latin typeface="Consolas" pitchFamily="49" charset="0"/>
+              </a:rPr>
+              <a:t>]</a:t>
+            </a:r>
+          </a:p>
+          <a:p>
+            <a:pPr>
+              <a:buNone/>
+            </a:pPr>
+            <a:endParaRPr lang="de-DE" sz="600" dirty="0"/>
+          </a:p>
+          <a:p>
+            <a:pPr marL="0" indent="0" algn="l">
+              <a:buNone/>
+            </a:pPr>
+            <a:r>
+              <a:rPr lang="de-DE" sz="980" dirty="0">
+                <a:solidFill>
+                  <a:srgbClr val="56B6C2"/>
+                </a:solidFill>
+                <a:latin typeface="Consolas" pitchFamily="49" charset="0"/>
+              </a:rPr>
+              <a:t>def</a:t>
+            </a:r>
+            <a:r>
+              <a:rPr lang="de-DE" sz="980" dirty="0">
+                <a:solidFill>
+                  <a:srgbClr val="ABB2BF"/>
+                </a:solidFill>
+                <a:latin typeface="Consolas" pitchFamily="49" charset="0"/>
+              </a:rPr>
+              <a:t> </a:t>
+            </a:r>
+            <a:r>
+              <a:rPr lang="de-DE" sz="980" dirty="0">
+                <a:solidFill>
+                  <a:srgbClr val="61AFEF"/>
+                </a:solidFill>
+                <a:latin typeface="Consolas" pitchFamily="49" charset="0"/>
+              </a:rPr>
+              <a:t>evaluate</a:t>
+            </a:r>
+            <a:r>
+              <a:rPr lang="de-DE" sz="980" dirty="0">
+                <a:solidFill>
+                  <a:srgbClr val="ABB2BF"/>
+                </a:solidFill>
+                <a:latin typeface="Consolas" pitchFamily="49" charset="0"/>
+              </a:rPr>
+              <a:t>(board):</a:t>
+            </a:r>
+          </a:p>
+          <a:p>
+            <a:pPr marL="0" indent="0" algn="l">
+              <a:buNone/>
+            </a:pPr>
+            <a:r>
+              <a:rPr lang="de-DE" sz="980" dirty="0">
+                <a:solidFill>
+                  <a:srgbClr val="ABB2BF"/>
+                </a:solidFill>
+                <a:latin typeface="Consolas" pitchFamily="49" charset="0"/>
+              </a:rPr>
+              <a:t>    score = </a:t>
+            </a:r>
+            <a:r>
+              <a:rPr lang="de-DE" sz="980" dirty="0">
+                <a:solidFill>
+                  <a:srgbClr val="98C379"/>
+                </a:solidFill>
+                <a:latin typeface="Consolas" pitchFamily="49" charset="0"/>
+              </a:rPr>
+              <a:t>0</a:t>
+            </a:r>
+          </a:p>
+          <a:p>
+            <a:pPr marL="0" indent="0" algn="l">
+              <a:buNone/>
+            </a:pPr>
+            <a:r>
+              <a:rPr lang="de-DE" sz="980" dirty="0">
+                <a:solidFill>
+                  <a:srgbClr val="56B6C2"/>
+                </a:solidFill>
+                <a:latin typeface="Consolas" pitchFamily="49" charset="0"/>
+              </a:rPr>
+              <a:t>    for</a:t>
+            </a:r>
+            <a:r>
+              <a:rPr lang="de-DE" sz="980" dirty="0">
+                <a:solidFill>
+                  <a:srgbClr val="ABB2BF"/>
+                </a:solidFill>
+                <a:latin typeface="Consolas" pitchFamily="49" charset="0"/>
+              </a:rPr>
+              <a:t> row, col, piece </a:t>
+            </a:r>
+            <a:r>
+              <a:rPr lang="de-DE" sz="980" dirty="0">
+                <a:solidFill>
+                  <a:srgbClr val="56B6C2"/>
+                </a:solidFill>
+                <a:latin typeface="Consolas" pitchFamily="49" charset="0"/>
+              </a:rPr>
+              <a:t>in</a:t>
+            </a:r>
+            <a:r>
+              <a:rPr lang="de-DE" sz="980" dirty="0">
+                <a:solidFill>
+                  <a:srgbClr val="ABB2BF"/>
+                </a:solidFill>
+                <a:latin typeface="Consolas" pitchFamily="49" charset="0"/>
+              </a:rPr>
+              <a:t> all_pieces(board):</a:t>
+            </a:r>
+          </a:p>
+          <a:p>
+            <a:pPr marL="0" indent="0" algn="l">
+              <a:buNone/>
+            </a:pPr>
+            <a:r>
+              <a:rPr lang="de-DE" sz="980" dirty="0">
+                <a:solidFill>
+                  <a:srgbClr val="56B6C2"/>
+                </a:solidFill>
+                <a:latin typeface="Consolas" pitchFamily="49" charset="0"/>
+              </a:rPr>
+              <a:t>        if</a:t>
+            </a:r>
+            <a:r>
+              <a:rPr lang="de-DE" sz="980" dirty="0">
+                <a:solidFill>
+                  <a:srgbClr val="ABB2BF"/>
+                </a:solidFill>
+                <a:latin typeface="Consolas" pitchFamily="49" charset="0"/>
+              </a:rPr>
+              <a:t> piece == BLACK:  </a:t>
+            </a:r>
+            <a:r>
+              <a:rPr lang="de-DE" sz="980" i="1" dirty="0">
+                <a:solidFill>
+                  <a:srgbClr val="5C6370"/>
+                </a:solidFill>
+                <a:latin typeface="Consolas" pitchFamily="49" charset="0"/>
+              </a:rPr>
+              <a:t># KI</a:t>
+            </a:r>
+          </a:p>
+          <a:p>
+            <a:pPr marL="0" indent="0" algn="l">
+              <a:buNone/>
+            </a:pPr>
+            <a:r>
+              <a:rPr lang="de-DE" sz="980" dirty="0">
+                <a:solidFill>
+                  <a:srgbClr val="ABB2BF"/>
+                </a:solidFill>
+                <a:latin typeface="Consolas" pitchFamily="49" charset="0"/>
+              </a:rPr>
+              <a:t>            score += </a:t>
+            </a:r>
+            <a:r>
+              <a:rPr lang="de-DE" sz="980" dirty="0">
+                <a:solidFill>
+                  <a:srgbClr val="98C379"/>
+                </a:solidFill>
+                <a:latin typeface="Consolas" pitchFamily="49" charset="0"/>
+              </a:rPr>
+              <a:t>10</a:t>
+            </a:r>
+            <a:r>
+              <a:rPr lang="de-DE" sz="980" i="1" dirty="0">
+                <a:solidFill>
+                  <a:srgbClr val="5C6370"/>
+                </a:solidFill>
+                <a:latin typeface="Consolas" pitchFamily="49" charset="0"/>
+              </a:rPr>
+              <a:t>              # Figurenzahl</a:t>
+            </a:r>
+          </a:p>
+          <a:p>
+            <a:pPr marL="0" indent="0" algn="l">
+              <a:buNone/>
+            </a:pPr>
+            <a:r>
+              <a:rPr lang="de-DE" sz="980" dirty="0">
+                <a:solidFill>
+                  <a:srgbClr val="ABB2BF"/>
+                </a:solidFill>
+                <a:latin typeface="Consolas" pitchFamily="49" charset="0"/>
+              </a:rPr>
+              <a:t>            score += row * </a:t>
+            </a:r>
+            <a:r>
+              <a:rPr lang="de-DE" sz="980" dirty="0">
+                <a:solidFill>
+                  <a:srgbClr val="98C379"/>
+                </a:solidFill>
+                <a:latin typeface="Consolas" pitchFamily="49" charset="0"/>
+              </a:rPr>
+              <a:t>2</a:t>
+            </a:r>
+            <a:r>
+              <a:rPr lang="de-DE" sz="980" i="1" dirty="0">
+                <a:solidFill>
+                  <a:srgbClr val="5C6370"/>
+                </a:solidFill>
+                <a:latin typeface="Consolas" pitchFamily="49" charset="0"/>
+              </a:rPr>
+              <a:t>         # Fortschritt</a:t>
+            </a:r>
+          </a:p>
+          <a:p>
+            <a:pPr marL="0" indent="0" algn="l">
+              <a:buNone/>
+            </a:pPr>
+            <a:r>
+              <a:rPr lang="de-DE" sz="980" dirty="0">
+                <a:solidFill>
+                  <a:srgbClr val="ABB2BF"/>
+                </a:solidFill>
+                <a:latin typeface="Consolas" pitchFamily="49" charset="0"/>
+              </a:rPr>
+              <a:t>            score += CENTER_BONUS[row][col]  </a:t>
+            </a:r>
+            <a:r>
+              <a:rPr lang="de-DE" sz="980" i="1" dirty="0">
+                <a:solidFill>
+                  <a:srgbClr val="5C6370"/>
+                </a:solidFill>
+                <a:latin typeface="Consolas" pitchFamily="49" charset="0"/>
+              </a:rPr>
+              <a:t># Zentrum</a:t>
+            </a:r>
+          </a:p>
+          <a:p>
+            <a:pPr marL="0" indent="0" algn="l">
+              <a:buNone/>
+            </a:pPr>
+            <a:r>
+              <a:rPr lang="de-DE" sz="980" dirty="0">
+                <a:solidFill>
+                  <a:srgbClr val="56B6C2"/>
+                </a:solidFill>
+                <a:latin typeface="Consolas" pitchFamily="49" charset="0"/>
+              </a:rPr>
+              <a:t>        elif</a:t>
+            </a:r>
+            <a:r>
+              <a:rPr lang="de-DE" sz="980" dirty="0">
+                <a:solidFill>
+                  <a:srgbClr val="ABB2BF"/>
+                </a:solidFill>
+                <a:latin typeface="Consolas" pitchFamily="49" charset="0"/>
+              </a:rPr>
+              <a:t> piece == WHITE:  </a:t>
+            </a:r>
+            <a:r>
+              <a:rPr lang="de-DE" sz="980" i="1" dirty="0">
+                <a:solidFill>
+                  <a:srgbClr val="5C6370"/>
+                </a:solidFill>
+                <a:latin typeface="Consolas" pitchFamily="49" charset="0"/>
+              </a:rPr>
+              <a:t># Mensch → negativ</a:t>
+            </a:r>
+          </a:p>
+          <a:p>
+            <a:pPr marL="0" indent="0" algn="l">
+              <a:buNone/>
+            </a:pPr>
+            <a:r>
+              <a:rPr lang="de-DE" sz="980" dirty="0">
+                <a:solidFill>
+                  <a:srgbClr val="ABB2BF"/>
+                </a:solidFill>
+                <a:latin typeface="Consolas" pitchFamily="49" charset="0"/>
+              </a:rPr>
+              <a:t>            score -= </a:t>
+            </a:r>
+            <a:r>
+              <a:rPr lang="de-DE" sz="980" dirty="0">
+                <a:solidFill>
+                  <a:srgbClr val="98C379"/>
+                </a:solidFill>
+                <a:latin typeface="Consolas" pitchFamily="49" charset="0"/>
+              </a:rPr>
+              <a:t>10</a:t>
+            </a:r>
+            <a:r>
+              <a:rPr lang="de-DE" sz="980" dirty="0">
+                <a:solidFill>
+                  <a:srgbClr val="ABB2BF"/>
+                </a:solidFill>
+                <a:latin typeface="Consolas" pitchFamily="49" charset="0"/>
+              </a:rPr>
+              <a:t> + (BOARD_SIZE-</a:t>
+            </a:r>
+            <a:r>
+              <a:rPr lang="de-DE" sz="980" dirty="0">
+                <a:solidFill>
+                  <a:srgbClr val="98C379"/>
+                </a:solidFill>
+                <a:latin typeface="Consolas" pitchFamily="49" charset="0"/>
+              </a:rPr>
+              <a:t>1</a:t>
+            </a:r>
+            <a:r>
+              <a:rPr lang="de-DE" sz="980" dirty="0">
+                <a:solidFill>
+                  <a:srgbClr val="ABB2BF"/>
+                </a:solidFill>
+                <a:latin typeface="Consolas" pitchFamily="49" charset="0"/>
+              </a:rPr>
+              <a:t>-row)*</a:t>
+            </a:r>
+            <a:r>
+              <a:rPr lang="de-DE" sz="980" dirty="0">
+                <a:solidFill>
+                  <a:srgbClr val="98C379"/>
+                </a:solidFill>
+                <a:latin typeface="Consolas" pitchFamily="49" charset="0"/>
+              </a:rPr>
+              <a:t>2</a:t>
+            </a:r>
+          </a:p>
+          <a:p>
+            <a:pPr marL="0" indent="0" algn="l">
+              <a:buNone/>
+            </a:pPr>
+            <a:r>
+              <a:rPr lang="de-DE" sz="980" dirty="0">
+                <a:solidFill>
+                  <a:srgbClr val="ABB2BF"/>
+                </a:solidFill>
+                <a:latin typeface="Consolas" pitchFamily="49" charset="0"/>
+              </a:rPr>
+              <a:t>            score -= CENTER_BONUS[row][col]</a:t>
+            </a:r>
+          </a:p>
+          <a:p>
+            <a:pPr marL="0" indent="0" algn="l">
+              <a:buNone/>
+            </a:pPr>
+            <a:r>
+              <a:rPr lang="de-DE" sz="980" dirty="0">
+                <a:solidFill>
+                  <a:srgbClr val="56B6C2"/>
+                </a:solidFill>
+                <a:latin typeface="Consolas" pitchFamily="49" charset="0"/>
+              </a:rPr>
+              <a:t>    return</a:t>
+            </a:r>
+            <a:r>
+              <a:rPr lang="de-DE" sz="980" dirty="0">
+                <a:solidFill>
+                  <a:srgbClr val="ABB2BF"/>
+                </a:solidFill>
+                <a:latin typeface="Consolas" pitchFamily="49" charset="0"/>
+              </a:rPr>
+              <a:t> score</a:t>
+            </a:r>
+          </a:p>
+        </p:txBody>
+      </p:sp>
+      <p:sp>
+        <p:nvSpPr>
+          <p:cNvPr id="7" name="BulletCard"/>
+          <p:cNvSpPr/>
+          <p:nvPr/>
+        </p:nvSpPr>
+        <p:spPr>
+          <a:xfrm>
+            <a:off x="5707200" y="1234440"/>
+            <a:ext cx="3071040" cy="3650000"/>
+          </a:xfrm>
+          <a:prstGeom prst="rect">
+            <a:avLst/>
+          </a:prstGeom>
+          <a:solidFill>
+            <a:srgbClr val="1E2A4A"/>
+          </a:solidFill>
+          <a:ln w="6350">
+            <a:solidFill>
+              <a:srgbClr val="2A3A5E"/>
+            </a:solidFill>
+            <a:prstDash val="solid"/>
+          </a:ln>
+        </p:spPr>
+        <p:txBody>
+          <a:bodyPr/>
+          <a:lstStyle/>
+          <a:p>
+            <a:endParaRPr lang="de-DE"/>
+          </a:p>
+        </p:txBody>
+      </p:sp>
+      <p:sp>
+        <p:nvSpPr>
+          <p:cNvPr id="8" name="BulletText"/>
+          <p:cNvSpPr/>
+          <p:nvPr/>
+        </p:nvSpPr>
+        <p:spPr>
+          <a:xfrm>
+            <a:off x="5798640" y="1325880"/>
+            <a:ext cx="2888160" cy="3467120"/>
+          </a:xfrm>
+          <a:prstGeom prst="rect">
+            <a:avLst/>
+          </a:prstGeom>
+          <a:noFill/>
+          <a:ln/>
+        </p:spPr>
+        <p:txBody>
+          <a:bodyPr wrap="square" lIns="114300" tIns="91440" rIns="114300" bIns="91440" rtlCol="0" anchor="t"/>
+          <a:lstStyle/>
+          <a:p>
+            <a:pPr marL="342900" indent="-342900" algn="l">
+              <a:buChar char="▸"/>
+            </a:pPr>
+            <a:r>
+              <a:rPr lang="de-DE" sz="1150" b="1" dirty="0">
+                <a:solidFill>
+                  <a:srgbClr val="B0C4DE"/>
+                </a:solidFill>
+                <a:latin typeface="Calibri" pitchFamily="49" charset="0"/>
+              </a:rPr>
+              <a:t>Figurenzahl +10</a:t>
+            </a:r>
+          </a:p>
+          <a:p>
+            <a:pPr marL="342900" indent="0" algn="l">
+              <a:buNone/>
+            </a:pPr>
+            <a:r>
+              <a:rPr lang="de-DE" sz="1000" dirty="0">
+                <a:solidFill>
+                  <a:srgbClr val="8892A4"/>
+                </a:solidFill>
+                <a:latin typeface="Calibri" pitchFamily="49" charset="0"/>
+              </a:rPr>
+              <a:t>Jeder eigene Bauer zählt +10, jeder gegnerische -10</a:t>
+            </a:r>
+          </a:p>
+          <a:p>
+            <a:pPr marL="342900" indent="-342900" algn="l">
+              <a:spcBef>
+                <a:spcPts val="160"/>
+              </a:spcBef>
+              <a:buChar char="▸"/>
+            </a:pPr>
+            <a:r>
+              <a:rPr lang="de-DE" sz="1150" b="1" dirty="0">
+                <a:solidFill>
+                  <a:srgbClr val="B0C4DE"/>
+                </a:solidFill>
+                <a:latin typeface="Calibri" pitchFamily="49" charset="0"/>
+              </a:rPr>
+              <a:t>Fortschritt +row×2</a:t>
+            </a:r>
+          </a:p>
+          <a:p>
+            <a:pPr marL="342900" indent="0" algn="l">
+              <a:buNone/>
+            </a:pPr>
+            <a:r>
+              <a:rPr lang="de-DE" sz="1000" dirty="0">
+                <a:solidFill>
+                  <a:srgbClr val="8892A4"/>
+                </a:solidFill>
+                <a:latin typeface="Calibri" pitchFamily="49" charset="0"/>
+              </a:rPr>
+              <a:t>KI wird für Vorwärtsbewegung belohnt</a:t>
+            </a:r>
+          </a:p>
+          <a:p>
+            <a:pPr marL="342900" indent="-342900" algn="l">
+              <a:spcBef>
+                <a:spcPts val="160"/>
+              </a:spcBef>
+              <a:buChar char="▸"/>
+            </a:pPr>
+            <a:r>
+              <a:rPr lang="de-DE" sz="1150" b="1" dirty="0">
+                <a:solidFill>
+                  <a:srgbClr val="B0C4DE"/>
+                </a:solidFill>
+                <a:latin typeface="Calibri" pitchFamily="49" charset="0"/>
+              </a:rPr>
+              <a:t>Zentrum +0…+3</a:t>
+            </a:r>
+          </a:p>
+          <a:p>
+            <a:pPr marL="342900" indent="0" algn="l">
+              <a:buNone/>
+            </a:pPr>
+            <a:r>
+              <a:rPr lang="de-DE" sz="1000" dirty="0">
+                <a:solidFill>
+                  <a:srgbClr val="8892A4"/>
+                </a:solidFill>
+                <a:latin typeface="Calibri" pitchFamily="49" charset="0"/>
+              </a:rPr>
+              <a:t>Zentralposition ist strategisch wertvoller</a:t>
+            </a:r>
+          </a:p>
+          <a:p>
+            <a:pPr marL="342900" indent="-342900" algn="l">
+              <a:spcBef>
+                <a:spcPts val="160"/>
+              </a:spcBef>
+              <a:buChar char="▸"/>
+            </a:pPr>
+            <a:r>
+              <a:rPr lang="de-DE" sz="1150" b="1" dirty="0">
+                <a:solidFill>
+                  <a:srgbClr val="B0C4DE"/>
+                </a:solidFill>
+                <a:latin typeface="Calibri" pitchFamily="49" charset="0"/>
+              </a:rPr>
+              <a:t>Positiv = KI gut</a:t>
+            </a:r>
+          </a:p>
+          <a:p>
+            <a:pPr marL="342900" indent="0" algn="l">
+              <a:buNone/>
+            </a:pPr>
+            <a:r>
+              <a:rPr lang="de-DE" sz="1000" dirty="0">
+                <a:solidFill>
+                  <a:srgbClr val="8892A4"/>
+                </a:solidFill>
+                <a:latin typeface="Calibri" pitchFamily="49" charset="0"/>
+              </a:rPr>
+              <a:t>Score &gt; 0 → Vorteil für KI (BLACK = -1)</a:t>
+            </a:r>
+          </a:p>
+          <a:p>
+            <a:pPr marL="342900" indent="-342900" algn="l">
+              <a:spcBef>
+                <a:spcPts val="160"/>
+              </a:spcBef>
+              <a:buChar char="▸"/>
+            </a:pPr>
+            <a:r>
+              <a:rPr lang="de-DE" sz="1150" b="1" dirty="0">
+                <a:solidFill>
+                  <a:srgbClr val="B0C4DE"/>
+                </a:solidFill>
+                <a:latin typeface="Calibri" pitchFamily="49" charset="0"/>
+              </a:rPr>
+              <a:t>Heuristik = Stärke</a:t>
+            </a:r>
+          </a:p>
+          <a:p>
+            <a:pPr marL="342900" indent="0" algn="l">
+              <a:buNone/>
+            </a:pPr>
+            <a:r>
+              <a:rPr lang="de-DE" sz="1000" dirty="0">
+                <a:solidFill>
+                  <a:srgbClr val="8892A4"/>
+                </a:solidFill>
+                <a:latin typeface="Calibri" pitchFamily="49" charset="0"/>
+              </a:rPr>
+              <a:t>Bessere Bewertungsfunktion → stärkere KI</a:t>
+            </a:r>
+          </a:p>
+        </p:txBody>
+      </p:sp>
+      <p:sp>
+        <p:nvSpPr>
+          <p:cNvPr id="9" name="Textfeld 8">
+            <a:extLst>
+              <a:ext uri="{FF2B5EF4-FFF2-40B4-BE49-F238E27FC236}">
+                <a16:creationId xmlns:a16="http://schemas.microsoft.com/office/drawing/2014/main" id="{68FDAF88-68DE-DAC2-79FD-9A75E624AC6A}"/>
+              </a:ext>
+            </a:extLst>
+          </p:cNvPr>
+          <p:cNvSpPr txBox="1"/>
+          <p:nvPr/>
+        </p:nvSpPr>
+        <p:spPr>
+          <a:xfrm>
+            <a:off x="8730005" y="4875028"/>
+            <a:ext cx="228600" cy="215444"/>
+          </a:xfrm>
+          <a:prstGeom prst="rect">
+            <a:avLst/>
+          </a:prstGeom>
+          <a:noFill/>
+        </p:spPr>
+        <p:txBody>
+          <a:bodyPr wrap="square" rtlCol="0">
+            <a:spAutoFit/>
+          </a:bodyPr>
+          <a:lstStyle/>
+          <a:p>
+            <a:r>
+              <a:rPr lang="en-US" sz="800" dirty="0">
+                <a:solidFill>
+                  <a:srgbClr val="E94560"/>
+                </a:solidFill>
+                <a:latin typeface="Calibri" pitchFamily="34" charset="0"/>
+                <a:ea typeface="Calibri" pitchFamily="34" charset="-122"/>
+                <a:cs typeface="Calibri" pitchFamily="34" charset="-120"/>
+              </a:rPr>
+              <a:t>9</a:t>
+            </a:r>
+            <a:endParaRPr lang="de-DE" sz="800" dirty="0"/>
+          </a:p>
+        </p:txBody>
+      </p:sp>
+    </p:spTree>
+  </p:cSld>
+  <p:clrMapOvr>
+    <a:masterClrMapping/>
+  </p:clrMapOvr>
+</p:sld>
+</file>
+
+<file path=ppt/slides/slide11.xml><?xml version="1.0" encoding="utf-8"?>
+<p:sld xmlns:a="http://schemas.openxmlformats.org/drawingml/2006/main" xmlns:r="http://schemas.openxmlformats.org/officeDocument/2006/relationships" xmlns:p="http://schemas.openxmlformats.org/presentationml/2006/main">
   <p:cSld name="Slide 6">
     <p:bg>
       <p:bgPr>
@@ -4096,7 +5671,7 @@
 </p:sld>
 </file>
 
-<file path=ppt/slides/slide11.xml><?xml version="1.0" encoding="utf-8"?>
+<file path=ppt/slides/slide12.xml><?xml version="1.0" encoding="utf-8"?>
 <p:sld xmlns:a="http://schemas.openxmlformats.org/drawingml/2006/main" xmlns:r="http://schemas.openxmlformats.org/officeDocument/2006/relationships" xmlns:p="http://schemas.openxmlformats.org/presentationml/2006/main">
   <p:cSld>
     <p:bg>
@@ -5327,7 +6902,7 @@
 </p:sld>
 </file>
 
-<file path=ppt/slides/slide12.xml><?xml version="1.0" encoding="utf-8"?>
+<file path=ppt/slides/slide13.xml><?xml version="1.0" encoding="utf-8"?>
 <p:sld xmlns:a="http://schemas.openxmlformats.org/drawingml/2006/main" xmlns:r="http://schemas.openxmlformats.org/officeDocument/2006/relationships" xmlns:p="http://schemas.openxmlformats.org/presentationml/2006/main">
   <p:cSld>
     <p:bg>
@@ -6533,1302 +8108,6 @@
                 <a:cs typeface="Calibri" pitchFamily="34" charset="-120"/>
               </a:rPr>
               <a:t>12</a:t>
-            </a:r>
-            <a:endParaRPr lang="de-DE" sz="800" dirty="0"/>
-          </a:p>
-        </p:txBody>
-      </p:sp>
-    </p:spTree>
-  </p:cSld>
-  <p:clrMapOvr>
-    <a:masterClrMapping/>
-  </p:clrMapOvr>
-</p:sld>
-</file>
-
-<file path=ppt/slides/slide13.xml><?xml version="1.0" encoding="utf-8"?>
-<p:sld xmlns:a="http://schemas.openxmlformats.org/drawingml/2006/main" xmlns:r="http://schemas.openxmlformats.org/officeDocument/2006/relationships" xmlns:p="http://schemas.openxmlformats.org/presentationml/2006/main">
-  <p:cSld name="Slide 7">
-    <p:bg>
-      <p:bgPr>
-        <a:solidFill>
-          <a:srgbClr val="0D0D1A"/>
-        </a:solidFill>
-        <a:effectLst/>
-      </p:bgPr>
-    </p:bg>
-    <p:spTree>
-      <p:nvGrpSpPr>
-        <p:cNvPr id="1" name=""/>
-        <p:cNvGrpSpPr/>
-        <p:nvPr/>
-      </p:nvGrpSpPr>
-      <p:grpSpPr>
-        <a:xfrm>
-          <a:off x="0" y="0"/>
-          <a:ext cx="0" cy="0"/>
-          <a:chOff x="0" y="0"/>
-          <a:chExt cx="0" cy="0"/>
-        </a:xfrm>
-      </p:grpSpPr>
-      <p:sp>
-        <p:nvSpPr>
-          <p:cNvPr id="2" name="Text 0"/>
-          <p:cNvSpPr/>
-          <p:nvPr/>
-        </p:nvSpPr>
-        <p:spPr>
-          <a:xfrm>
-            <a:off x="457200" y="256032"/>
-            <a:ext cx="8229600" cy="594360"/>
-          </a:xfrm>
-          <a:prstGeom prst="rect">
-            <a:avLst/>
-          </a:prstGeom>
-          <a:noFill/>
-          <a:ln/>
-        </p:spPr>
-        <p:txBody>
-          <a:bodyPr wrap="square" lIns="0" tIns="0" rIns="0" bIns="0" rtlCol="0" anchor="ctr"/>
-          <a:lstStyle/>
-          <a:p>
-            <a:pPr marL="0" indent="0" algn="l">
-              <a:buNone/>
-            </a:pPr>
-            <a:r>
-              <a:rPr lang="en-US" sz="2800" b="1" dirty="0">
-                <a:solidFill>
-                  <a:srgbClr val="FFFFFF"/>
-                </a:solidFill>
-                <a:latin typeface="Arial Black" pitchFamily="34" charset="0"/>
-                <a:ea typeface="Arial Black" pitchFamily="34" charset="-122"/>
-                <a:cs typeface="Arial Black" pitchFamily="34" charset="-120"/>
-              </a:rPr>
-              <a:t>Benutzerverwaltung &amp; Datenbank</a:t>
-            </a:r>
-            <a:endParaRPr lang="en-US" sz="2800" dirty="0"/>
-          </a:p>
-        </p:txBody>
-      </p:sp>
-      <p:sp>
-        <p:nvSpPr>
-          <p:cNvPr id="3" name="Shape 1"/>
-          <p:cNvSpPr/>
-          <p:nvPr/>
-        </p:nvSpPr>
-        <p:spPr>
-          <a:xfrm>
-            <a:off x="365760" y="1005840"/>
-            <a:ext cx="4023360" cy="3749040"/>
-          </a:xfrm>
-          <a:prstGeom prst="rect">
-            <a:avLst/>
-          </a:prstGeom>
-          <a:solidFill>
-            <a:srgbClr val="1E2A4A"/>
-          </a:solidFill>
-          <a:ln w="6350">
-            <a:solidFill>
-              <a:srgbClr val="2A3A5E"/>
-            </a:solidFill>
-            <a:prstDash val="solid"/>
-          </a:ln>
-        </p:spPr>
-        <p:txBody>
-          <a:bodyPr/>
-          <a:lstStyle/>
-          <a:p>
-            <a:endParaRPr lang="de-DE"/>
-          </a:p>
-        </p:txBody>
-      </p:sp>
-      <p:sp>
-        <p:nvSpPr>
-          <p:cNvPr id="4" name="Shape 2"/>
-          <p:cNvSpPr/>
-          <p:nvPr/>
-        </p:nvSpPr>
-        <p:spPr>
-          <a:xfrm>
-            <a:off x="365760" y="1005840"/>
-            <a:ext cx="4023360" cy="457200"/>
-          </a:xfrm>
-          <a:prstGeom prst="rect">
-            <a:avLst/>
-          </a:prstGeom>
-          <a:solidFill>
-            <a:srgbClr val="F39C12"/>
-          </a:solidFill>
-          <a:ln w="12700">
-            <a:solidFill>
-              <a:srgbClr val="F39C12"/>
-            </a:solidFill>
-            <a:prstDash val="solid"/>
-          </a:ln>
-        </p:spPr>
-        <p:txBody>
-          <a:bodyPr/>
-          <a:lstStyle/>
-          <a:p>
-            <a:endParaRPr lang="de-DE"/>
-          </a:p>
-        </p:txBody>
-      </p:sp>
-      <p:sp>
-        <p:nvSpPr>
-          <p:cNvPr id="5" name="Text 3"/>
-          <p:cNvSpPr/>
-          <p:nvPr/>
-        </p:nvSpPr>
-        <p:spPr>
-          <a:xfrm>
-            <a:off x="502920" y="1051560"/>
-            <a:ext cx="3749040" cy="320040"/>
-          </a:xfrm>
-          <a:prstGeom prst="rect">
-            <a:avLst/>
-          </a:prstGeom>
-          <a:noFill/>
-          <a:ln/>
-        </p:spPr>
-        <p:txBody>
-          <a:bodyPr wrap="square" lIns="0" tIns="0" rIns="0" bIns="0" rtlCol="0" anchor="ctr"/>
-          <a:lstStyle/>
-          <a:p>
-            <a:pPr marL="0" indent="0" algn="l">
-              <a:buNone/>
-            </a:pPr>
-            <a:r>
-              <a:rPr lang="en-US" sz="1400" b="1" dirty="0">
-                <a:solidFill>
-                  <a:srgbClr val="FFFFFF"/>
-                </a:solidFill>
-                <a:latin typeface="Calibri" pitchFamily="34" charset="0"/>
-                <a:ea typeface="Calibri" pitchFamily="34" charset="-122"/>
-                <a:cs typeface="Calibri" pitchFamily="34" charset="-120"/>
-              </a:rPr>
-              <a:t>auth.py · Benutzerverwaltung</a:t>
-            </a:r>
-            <a:endParaRPr lang="en-US" sz="1400" dirty="0"/>
-          </a:p>
-        </p:txBody>
-      </p:sp>
-      <p:sp>
-        <p:nvSpPr>
-          <p:cNvPr id="6" name="Text 4"/>
-          <p:cNvSpPr/>
-          <p:nvPr/>
-        </p:nvSpPr>
-        <p:spPr>
-          <a:xfrm>
-            <a:off x="502920" y="1581912"/>
-            <a:ext cx="1737360" cy="256032"/>
-          </a:xfrm>
-          <a:prstGeom prst="rect">
-            <a:avLst/>
-          </a:prstGeom>
-          <a:noFill/>
-          <a:ln/>
-        </p:spPr>
-        <p:txBody>
-          <a:bodyPr wrap="square" lIns="0" tIns="0" rIns="0" bIns="0" rtlCol="0" anchor="ctr"/>
-          <a:lstStyle/>
-          <a:p>
-            <a:pPr marL="0" indent="0" algn="l">
-              <a:buNone/>
-            </a:pPr>
-            <a:r>
-              <a:rPr lang="en-US" sz="1200" b="1" dirty="0">
-                <a:solidFill>
-                  <a:srgbClr val="F39C12"/>
-                </a:solidFill>
-                <a:latin typeface="Consolas" pitchFamily="34" charset="0"/>
-                <a:ea typeface="Consolas" pitchFamily="34" charset="-122"/>
-                <a:cs typeface="Consolas" pitchFamily="34" charset="-120"/>
-              </a:rPr>
-              <a:t>register()</a:t>
-            </a:r>
-            <a:endParaRPr lang="en-US" sz="1200" dirty="0"/>
-          </a:p>
-        </p:txBody>
-      </p:sp>
-      <p:sp>
-        <p:nvSpPr>
-          <p:cNvPr id="7" name="Text 5"/>
-          <p:cNvSpPr/>
-          <p:nvPr/>
-        </p:nvSpPr>
-        <p:spPr>
-          <a:xfrm>
-            <a:off x="2331720" y="1581912"/>
-            <a:ext cx="1920240" cy="256032"/>
-          </a:xfrm>
-          <a:prstGeom prst="rect">
-            <a:avLst/>
-          </a:prstGeom>
-          <a:noFill/>
-          <a:ln/>
-        </p:spPr>
-        <p:txBody>
-          <a:bodyPr wrap="square" lIns="0" tIns="0" rIns="0" bIns="0" rtlCol="0" anchor="ctr"/>
-          <a:lstStyle/>
-          <a:p>
-            <a:pPr marL="0" indent="0" algn="l">
-              <a:buNone/>
-            </a:pPr>
-            <a:r>
-              <a:rPr lang="en-US" sz="1100" dirty="0">
-                <a:solidFill>
-                  <a:srgbClr val="D0D7E8"/>
-                </a:solidFill>
-                <a:latin typeface="Calibri" pitchFamily="34" charset="0"/>
-                <a:ea typeface="Calibri" pitchFamily="34" charset="-122"/>
-                <a:cs typeface="Calibri" pitchFamily="34" charset="-120"/>
-              </a:rPr>
-              <a:t>Validierung + SHA-256 + Salt</a:t>
-            </a:r>
-            <a:endParaRPr lang="en-US" sz="1100" dirty="0"/>
-          </a:p>
-        </p:txBody>
-      </p:sp>
-      <p:sp>
-        <p:nvSpPr>
-          <p:cNvPr id="8" name="Text 6"/>
-          <p:cNvSpPr/>
-          <p:nvPr/>
-        </p:nvSpPr>
-        <p:spPr>
-          <a:xfrm>
-            <a:off x="502920" y="2084832"/>
-            <a:ext cx="1737360" cy="256032"/>
-          </a:xfrm>
-          <a:prstGeom prst="rect">
-            <a:avLst/>
-          </a:prstGeom>
-          <a:noFill/>
-          <a:ln/>
-        </p:spPr>
-        <p:txBody>
-          <a:bodyPr wrap="square" lIns="0" tIns="0" rIns="0" bIns="0" rtlCol="0" anchor="ctr"/>
-          <a:lstStyle/>
-          <a:p>
-            <a:pPr marL="0" indent="0" algn="l">
-              <a:buNone/>
-            </a:pPr>
-            <a:r>
-              <a:rPr lang="en-US" sz="1200" b="1" dirty="0">
-                <a:solidFill>
-                  <a:srgbClr val="F39C12"/>
-                </a:solidFill>
-                <a:latin typeface="Consolas" pitchFamily="34" charset="0"/>
-                <a:ea typeface="Consolas" pitchFamily="34" charset="-122"/>
-                <a:cs typeface="Consolas" pitchFamily="34" charset="-120"/>
-              </a:rPr>
-              <a:t>login()</a:t>
-            </a:r>
-            <a:endParaRPr lang="en-US" sz="1200" dirty="0"/>
-          </a:p>
-        </p:txBody>
-      </p:sp>
-      <p:sp>
-        <p:nvSpPr>
-          <p:cNvPr id="9" name="Text 7"/>
-          <p:cNvSpPr/>
-          <p:nvPr/>
-        </p:nvSpPr>
-        <p:spPr>
-          <a:xfrm>
-            <a:off x="2331720" y="2084832"/>
-            <a:ext cx="1920240" cy="256032"/>
-          </a:xfrm>
-          <a:prstGeom prst="rect">
-            <a:avLst/>
-          </a:prstGeom>
-          <a:noFill/>
-          <a:ln/>
-        </p:spPr>
-        <p:txBody>
-          <a:bodyPr wrap="square" lIns="0" tIns="0" rIns="0" bIns="0" rtlCol="0" anchor="ctr"/>
-          <a:lstStyle/>
-          <a:p>
-            <a:pPr marL="0" indent="0" algn="l">
-              <a:buNone/>
-            </a:pPr>
-            <a:r>
-              <a:rPr lang="en-US" sz="1100" dirty="0">
-                <a:solidFill>
-                  <a:srgbClr val="D0D7E8"/>
-                </a:solidFill>
-                <a:latin typeface="Calibri" pitchFamily="34" charset="0"/>
-                <a:ea typeface="Calibri" pitchFamily="34" charset="-122"/>
-                <a:cs typeface="Calibri" pitchFamily="34" charset="-120"/>
-              </a:rPr>
-              <a:t>Passwort-Hash-Vergleich</a:t>
-            </a:r>
-            <a:endParaRPr lang="en-US" sz="1100" dirty="0"/>
-          </a:p>
-        </p:txBody>
-      </p:sp>
-      <p:sp>
-        <p:nvSpPr>
-          <p:cNvPr id="10" name="Text 8"/>
-          <p:cNvSpPr/>
-          <p:nvPr/>
-        </p:nvSpPr>
-        <p:spPr>
-          <a:xfrm>
-            <a:off x="502920" y="2587752"/>
-            <a:ext cx="1737360" cy="256032"/>
-          </a:xfrm>
-          <a:prstGeom prst="rect">
-            <a:avLst/>
-          </a:prstGeom>
-          <a:noFill/>
-          <a:ln/>
-        </p:spPr>
-        <p:txBody>
-          <a:bodyPr wrap="square" lIns="0" tIns="0" rIns="0" bIns="0" rtlCol="0" anchor="ctr"/>
-          <a:lstStyle/>
-          <a:p>
-            <a:pPr marL="0" indent="0" algn="l">
-              <a:buNone/>
-            </a:pPr>
-            <a:r>
-              <a:rPr lang="en-US" sz="1200" b="1" dirty="0">
-                <a:solidFill>
-                  <a:srgbClr val="F39C12"/>
-                </a:solidFill>
-                <a:latin typeface="Consolas" pitchFamily="34" charset="0"/>
-                <a:ea typeface="Consolas" pitchFamily="34" charset="-122"/>
-                <a:cs typeface="Consolas" pitchFamily="34" charset="-120"/>
-              </a:rPr>
-              <a:t>save_session()</a:t>
-            </a:r>
-            <a:endParaRPr lang="en-US" sz="1200" dirty="0"/>
-          </a:p>
-        </p:txBody>
-      </p:sp>
-      <p:sp>
-        <p:nvSpPr>
-          <p:cNvPr id="11" name="Text 9"/>
-          <p:cNvSpPr/>
-          <p:nvPr/>
-        </p:nvSpPr>
-        <p:spPr>
-          <a:xfrm>
-            <a:off x="2331720" y="2587752"/>
-            <a:ext cx="1920240" cy="256032"/>
-          </a:xfrm>
-          <a:prstGeom prst="rect">
-            <a:avLst/>
-          </a:prstGeom>
-          <a:noFill/>
-          <a:ln/>
-        </p:spPr>
-        <p:txBody>
-          <a:bodyPr wrap="square" lIns="0" tIns="0" rIns="0" bIns="0" rtlCol="0" anchor="ctr"/>
-          <a:lstStyle/>
-          <a:p>
-            <a:pPr marL="0" indent="0" algn="l">
-              <a:buNone/>
-            </a:pPr>
-            <a:r>
-              <a:rPr lang="en-US" sz="1100" dirty="0">
-                <a:solidFill>
-                  <a:srgbClr val="D0D7E8"/>
-                </a:solidFill>
-                <a:latin typeface="Calibri" pitchFamily="34" charset="0"/>
-                <a:ea typeface="Calibri" pitchFamily="34" charset="-122"/>
-                <a:cs typeface="Calibri" pitchFamily="34" charset="-120"/>
-              </a:rPr>
-              <a:t>user_id in session.json</a:t>
-            </a:r>
-            <a:endParaRPr lang="en-US" sz="1100" dirty="0"/>
-          </a:p>
-        </p:txBody>
-      </p:sp>
-      <p:sp>
-        <p:nvSpPr>
-          <p:cNvPr id="12" name="Text 10"/>
-          <p:cNvSpPr/>
-          <p:nvPr/>
-        </p:nvSpPr>
-        <p:spPr>
-          <a:xfrm>
-            <a:off x="502920" y="3090672"/>
-            <a:ext cx="1737360" cy="256032"/>
-          </a:xfrm>
-          <a:prstGeom prst="rect">
-            <a:avLst/>
-          </a:prstGeom>
-          <a:noFill/>
-          <a:ln/>
-        </p:spPr>
-        <p:txBody>
-          <a:bodyPr wrap="square" lIns="0" tIns="0" rIns="0" bIns="0" rtlCol="0" anchor="ctr"/>
-          <a:lstStyle/>
-          <a:p>
-            <a:pPr marL="0" indent="0" algn="l">
-              <a:buNone/>
-            </a:pPr>
-            <a:r>
-              <a:rPr lang="en-US" sz="1200" b="1" dirty="0">
-                <a:solidFill>
-                  <a:srgbClr val="F39C12"/>
-                </a:solidFill>
-                <a:latin typeface="Consolas" pitchFamily="34" charset="0"/>
-                <a:ea typeface="Consolas" pitchFamily="34" charset="-122"/>
-                <a:cs typeface="Consolas" pitchFamily="34" charset="-120"/>
-              </a:rPr>
-              <a:t>load_session()</a:t>
-            </a:r>
-            <a:endParaRPr lang="en-US" sz="1200" dirty="0"/>
-          </a:p>
-        </p:txBody>
-      </p:sp>
-      <p:sp>
-        <p:nvSpPr>
-          <p:cNvPr id="13" name="Text 11"/>
-          <p:cNvSpPr/>
-          <p:nvPr/>
-        </p:nvSpPr>
-        <p:spPr>
-          <a:xfrm>
-            <a:off x="2331720" y="3090672"/>
-            <a:ext cx="1920240" cy="256032"/>
-          </a:xfrm>
-          <a:prstGeom prst="rect">
-            <a:avLst/>
-          </a:prstGeom>
-          <a:noFill/>
-          <a:ln/>
-        </p:spPr>
-        <p:txBody>
-          <a:bodyPr wrap="square" lIns="0" tIns="0" rIns="0" bIns="0" rtlCol="0" anchor="ctr"/>
-          <a:lstStyle/>
-          <a:p>
-            <a:pPr marL="0" indent="0" algn="l">
-              <a:buNone/>
-            </a:pPr>
-            <a:r>
-              <a:rPr lang="en-US" sz="1100" dirty="0">
-                <a:solidFill>
-                  <a:srgbClr val="D0D7E8"/>
-                </a:solidFill>
-                <a:latin typeface="Calibri" pitchFamily="34" charset="0"/>
-                <a:ea typeface="Calibri" pitchFamily="34" charset="-122"/>
-                <a:cs typeface="Calibri" pitchFamily="34" charset="-120"/>
-              </a:rPr>
-              <a:t>Auto-Login beim Start</a:t>
-            </a:r>
-            <a:endParaRPr lang="en-US" sz="1100" dirty="0"/>
-          </a:p>
-        </p:txBody>
-      </p:sp>
-      <p:sp>
-        <p:nvSpPr>
-          <p:cNvPr id="14" name="Text 12"/>
-          <p:cNvSpPr/>
-          <p:nvPr/>
-        </p:nvSpPr>
-        <p:spPr>
-          <a:xfrm>
-            <a:off x="502920" y="3593592"/>
-            <a:ext cx="1737360" cy="256032"/>
-          </a:xfrm>
-          <a:prstGeom prst="rect">
-            <a:avLst/>
-          </a:prstGeom>
-          <a:noFill/>
-          <a:ln/>
-        </p:spPr>
-        <p:txBody>
-          <a:bodyPr wrap="square" lIns="0" tIns="0" rIns="0" bIns="0" rtlCol="0" anchor="ctr"/>
-          <a:lstStyle/>
-          <a:p>
-            <a:pPr marL="0" indent="0" algn="l">
-              <a:buNone/>
-            </a:pPr>
-            <a:r>
-              <a:rPr lang="en-US" sz="1200" b="1" dirty="0">
-                <a:solidFill>
-                  <a:srgbClr val="F39C12"/>
-                </a:solidFill>
-                <a:latin typeface="Consolas" pitchFamily="34" charset="0"/>
-                <a:ea typeface="Consolas" pitchFamily="34" charset="-122"/>
-                <a:cs typeface="Consolas" pitchFamily="34" charset="-120"/>
-              </a:rPr>
-              <a:t>logout()</a:t>
-            </a:r>
-            <a:endParaRPr lang="en-US" sz="1200" dirty="0"/>
-          </a:p>
-        </p:txBody>
-      </p:sp>
-      <p:sp>
-        <p:nvSpPr>
-          <p:cNvPr id="15" name="Text 13"/>
-          <p:cNvSpPr/>
-          <p:nvPr/>
-        </p:nvSpPr>
-        <p:spPr>
-          <a:xfrm>
-            <a:off x="2331720" y="3593592"/>
-            <a:ext cx="1920240" cy="256032"/>
-          </a:xfrm>
-          <a:prstGeom prst="rect">
-            <a:avLst/>
-          </a:prstGeom>
-          <a:noFill/>
-          <a:ln/>
-        </p:spPr>
-        <p:txBody>
-          <a:bodyPr wrap="square" lIns="0" tIns="0" rIns="0" bIns="0" rtlCol="0" anchor="ctr"/>
-          <a:lstStyle/>
-          <a:p>
-            <a:pPr marL="0" indent="0" algn="l">
-              <a:buNone/>
-            </a:pPr>
-            <a:r>
-              <a:rPr lang="en-US" sz="1100" dirty="0">
-                <a:solidFill>
-                  <a:srgbClr val="D0D7E8"/>
-                </a:solidFill>
-                <a:latin typeface="Calibri" pitchFamily="34" charset="0"/>
-                <a:ea typeface="Calibri" pitchFamily="34" charset="-122"/>
-                <a:cs typeface="Calibri" pitchFamily="34" charset="-120"/>
-              </a:rPr>
-              <a:t>Session löschen + Status reset</a:t>
-            </a:r>
-            <a:endParaRPr lang="en-US" sz="1100" dirty="0"/>
-          </a:p>
-        </p:txBody>
-      </p:sp>
-      <p:sp>
-        <p:nvSpPr>
-          <p:cNvPr id="16" name="Text 14"/>
-          <p:cNvSpPr/>
-          <p:nvPr/>
-        </p:nvSpPr>
-        <p:spPr>
-          <a:xfrm>
-            <a:off x="502920" y="4096512"/>
-            <a:ext cx="1737360" cy="256032"/>
-          </a:xfrm>
-          <a:prstGeom prst="rect">
-            <a:avLst/>
-          </a:prstGeom>
-          <a:noFill/>
-          <a:ln/>
-        </p:spPr>
-        <p:txBody>
-          <a:bodyPr wrap="square" lIns="0" tIns="0" rIns="0" bIns="0" rtlCol="0" anchor="ctr"/>
-          <a:lstStyle/>
-          <a:p>
-            <a:pPr marL="0" indent="0" algn="l">
-              <a:buNone/>
-            </a:pPr>
-            <a:r>
-              <a:rPr lang="en-US" sz="1200" b="1" dirty="0">
-                <a:solidFill>
-                  <a:srgbClr val="F39C12"/>
-                </a:solidFill>
-                <a:latin typeface="Consolas" pitchFamily="34" charset="0"/>
-                <a:ea typeface="Consolas" pitchFamily="34" charset="-122"/>
-                <a:cs typeface="Consolas" pitchFamily="34" charset="-120"/>
-              </a:rPr>
-              <a:t>is_guest()</a:t>
-            </a:r>
-            <a:endParaRPr lang="en-US" sz="1200" dirty="0"/>
-          </a:p>
-        </p:txBody>
-      </p:sp>
-      <p:sp>
-        <p:nvSpPr>
-          <p:cNvPr id="17" name="Text 15"/>
-          <p:cNvSpPr/>
-          <p:nvPr/>
-        </p:nvSpPr>
-        <p:spPr>
-          <a:xfrm>
-            <a:off x="2331720" y="4096512"/>
-            <a:ext cx="1920240" cy="256032"/>
-          </a:xfrm>
-          <a:prstGeom prst="rect">
-            <a:avLst/>
-          </a:prstGeom>
-          <a:noFill/>
-          <a:ln/>
-        </p:spPr>
-        <p:txBody>
-          <a:bodyPr wrap="square" lIns="0" tIns="0" rIns="0" bIns="0" rtlCol="0" anchor="ctr"/>
-          <a:lstStyle/>
-          <a:p>
-            <a:pPr marL="0" indent="0" algn="l">
-              <a:buNone/>
-            </a:pPr>
-            <a:r>
-              <a:rPr lang="en-US" sz="1100" dirty="0">
-                <a:solidFill>
-                  <a:srgbClr val="D0D7E8"/>
-                </a:solidFill>
-                <a:latin typeface="Calibri" pitchFamily="34" charset="0"/>
-                <a:ea typeface="Calibri" pitchFamily="34" charset="-122"/>
-                <a:cs typeface="Calibri" pitchFamily="34" charset="-120"/>
-              </a:rPr>
-              <a:t>Gastmodus · keine Statistiken</a:t>
-            </a:r>
-            <a:endParaRPr lang="en-US" sz="1100" dirty="0"/>
-          </a:p>
-        </p:txBody>
-      </p:sp>
-      <p:sp>
-        <p:nvSpPr>
-          <p:cNvPr id="18" name="Shape 16"/>
-          <p:cNvSpPr/>
-          <p:nvPr/>
-        </p:nvSpPr>
-        <p:spPr>
-          <a:xfrm>
-            <a:off x="4754880" y="1005840"/>
-            <a:ext cx="4023360" cy="3749040"/>
-          </a:xfrm>
-          <a:prstGeom prst="rect">
-            <a:avLst/>
-          </a:prstGeom>
-          <a:solidFill>
-            <a:srgbClr val="1E2A4A"/>
-          </a:solidFill>
-          <a:ln w="6350">
-            <a:solidFill>
-              <a:srgbClr val="2A3A5E"/>
-            </a:solidFill>
-            <a:prstDash val="solid"/>
-          </a:ln>
-        </p:spPr>
-        <p:txBody>
-          <a:bodyPr/>
-          <a:lstStyle/>
-          <a:p>
-            <a:endParaRPr lang="de-DE"/>
-          </a:p>
-        </p:txBody>
-      </p:sp>
-      <p:sp>
-        <p:nvSpPr>
-          <p:cNvPr id="19" name="Shape 17"/>
-          <p:cNvSpPr/>
-          <p:nvPr/>
-        </p:nvSpPr>
-        <p:spPr>
-          <a:xfrm>
-            <a:off x="4754880" y="1005840"/>
-            <a:ext cx="4023360" cy="457200"/>
-          </a:xfrm>
-          <a:prstGeom prst="rect">
-            <a:avLst/>
-          </a:prstGeom>
-          <a:solidFill>
-            <a:srgbClr val="4472C4"/>
-          </a:solidFill>
-          <a:ln w="12700">
-            <a:solidFill>
-              <a:srgbClr val="4472C4"/>
-            </a:solidFill>
-            <a:prstDash val="solid"/>
-          </a:ln>
-        </p:spPr>
-        <p:txBody>
-          <a:bodyPr/>
-          <a:lstStyle/>
-          <a:p>
-            <a:endParaRPr lang="de-DE"/>
-          </a:p>
-        </p:txBody>
-      </p:sp>
-      <p:sp>
-        <p:nvSpPr>
-          <p:cNvPr id="20" name="Text 18"/>
-          <p:cNvSpPr/>
-          <p:nvPr/>
-        </p:nvSpPr>
-        <p:spPr>
-          <a:xfrm>
-            <a:off x="4892040" y="1051560"/>
-            <a:ext cx="3749040" cy="320040"/>
-          </a:xfrm>
-          <a:prstGeom prst="rect">
-            <a:avLst/>
-          </a:prstGeom>
-          <a:noFill/>
-          <a:ln/>
-        </p:spPr>
-        <p:txBody>
-          <a:bodyPr wrap="square" lIns="0" tIns="0" rIns="0" bIns="0" rtlCol="0" anchor="ctr"/>
-          <a:lstStyle/>
-          <a:p>
-            <a:pPr marL="0" indent="0" algn="l">
-              <a:buNone/>
-            </a:pPr>
-            <a:r>
-              <a:rPr lang="en-US" sz="1400" b="1" dirty="0">
-                <a:solidFill>
-                  <a:srgbClr val="FFFFFF"/>
-                </a:solidFill>
-                <a:latin typeface="Calibri" pitchFamily="34" charset="0"/>
-                <a:ea typeface="Calibri" pitchFamily="34" charset="-122"/>
-                <a:cs typeface="Calibri" pitchFamily="34" charset="-120"/>
-              </a:rPr>
-              <a:t>database.py · SQLite</a:t>
-            </a:r>
-            <a:endParaRPr lang="en-US" sz="1400" dirty="0"/>
-          </a:p>
-        </p:txBody>
-      </p:sp>
-      <p:sp>
-        <p:nvSpPr>
-          <p:cNvPr id="21" name="Text 19"/>
-          <p:cNvSpPr/>
-          <p:nvPr/>
-        </p:nvSpPr>
-        <p:spPr>
-          <a:xfrm>
-            <a:off x="4892040" y="1600200"/>
-            <a:ext cx="3749040" cy="292608"/>
-          </a:xfrm>
-          <a:prstGeom prst="rect">
-            <a:avLst/>
-          </a:prstGeom>
-          <a:noFill/>
-          <a:ln/>
-        </p:spPr>
-        <p:txBody>
-          <a:bodyPr wrap="square" lIns="0" tIns="0" rIns="0" bIns="0" rtlCol="0" anchor="ctr"/>
-          <a:lstStyle/>
-          <a:p>
-            <a:pPr marL="0" indent="0" algn="l">
-              <a:buNone/>
-            </a:pPr>
-            <a:r>
-              <a:rPr lang="en-US" sz="1200" b="1" dirty="0">
-                <a:solidFill>
-                  <a:srgbClr val="4472C4"/>
-                </a:solidFill>
-                <a:latin typeface="Calibri" pitchFamily="34" charset="0"/>
-                <a:ea typeface="Calibri" pitchFamily="34" charset="-122"/>
-                <a:cs typeface="Calibri" pitchFamily="34" charset="-120"/>
-              </a:rPr>
-              <a:t>Tabelle: users</a:t>
-            </a:r>
-            <a:endParaRPr lang="en-US" sz="1200" dirty="0"/>
-          </a:p>
-        </p:txBody>
-      </p:sp>
-      <p:sp>
-        <p:nvSpPr>
-          <p:cNvPr id="22" name="Text 20"/>
-          <p:cNvSpPr/>
-          <p:nvPr/>
-        </p:nvSpPr>
-        <p:spPr>
-          <a:xfrm>
-            <a:off x="4983480" y="1920240"/>
-            <a:ext cx="3474720" cy="219456"/>
-          </a:xfrm>
-          <a:prstGeom prst="rect">
-            <a:avLst/>
-          </a:prstGeom>
-          <a:noFill/>
-          <a:ln/>
-        </p:spPr>
-        <p:txBody>
-          <a:bodyPr wrap="square" lIns="0" tIns="0" rIns="0" bIns="0" rtlCol="0" anchor="ctr"/>
-          <a:lstStyle/>
-          <a:p>
-            <a:pPr marL="0" indent="0" algn="l">
-              <a:buNone/>
-            </a:pPr>
-            <a:r>
-              <a:rPr lang="en-US" sz="1100" dirty="0">
-                <a:solidFill>
-                  <a:srgbClr val="D0D7E8"/>
-                </a:solidFill>
-                <a:latin typeface="Consolas" pitchFamily="34" charset="0"/>
-                <a:ea typeface="Consolas" pitchFamily="34" charset="-122"/>
-                <a:cs typeface="Consolas" pitchFamily="34" charset="-120"/>
-              </a:rPr>
-              <a:t>· id</a:t>
-            </a:r>
-            <a:endParaRPr lang="en-US" sz="1100" dirty="0"/>
-          </a:p>
-        </p:txBody>
-      </p:sp>
-      <p:sp>
-        <p:nvSpPr>
-          <p:cNvPr id="23" name="Text 21"/>
-          <p:cNvSpPr/>
-          <p:nvPr/>
-        </p:nvSpPr>
-        <p:spPr>
-          <a:xfrm>
-            <a:off x="4983480" y="2167128"/>
-            <a:ext cx="3474720" cy="219456"/>
-          </a:xfrm>
-          <a:prstGeom prst="rect">
-            <a:avLst/>
-          </a:prstGeom>
-          <a:noFill/>
-          <a:ln/>
-        </p:spPr>
-        <p:txBody>
-          <a:bodyPr wrap="square" lIns="0" tIns="0" rIns="0" bIns="0" rtlCol="0" anchor="ctr"/>
-          <a:lstStyle/>
-          <a:p>
-            <a:pPr marL="0" indent="0" algn="l">
-              <a:buNone/>
-            </a:pPr>
-            <a:r>
-              <a:rPr lang="en-US" sz="1100" dirty="0">
-                <a:solidFill>
-                  <a:srgbClr val="D0D7E8"/>
-                </a:solidFill>
-                <a:latin typeface="Consolas" pitchFamily="34" charset="0"/>
-                <a:ea typeface="Consolas" pitchFamily="34" charset="-122"/>
-                <a:cs typeface="Consolas" pitchFamily="34" charset="-120"/>
-              </a:rPr>
-              <a:t>· username</a:t>
-            </a:r>
-            <a:endParaRPr lang="en-US" sz="1100" dirty="0"/>
-          </a:p>
-        </p:txBody>
-      </p:sp>
-      <p:sp>
-        <p:nvSpPr>
-          <p:cNvPr id="24" name="Text 22"/>
-          <p:cNvSpPr/>
-          <p:nvPr/>
-        </p:nvSpPr>
-        <p:spPr>
-          <a:xfrm>
-            <a:off x="4983480" y="2414016"/>
-            <a:ext cx="3474720" cy="219456"/>
-          </a:xfrm>
-          <a:prstGeom prst="rect">
-            <a:avLst/>
-          </a:prstGeom>
-          <a:noFill/>
-          <a:ln/>
-        </p:spPr>
-        <p:txBody>
-          <a:bodyPr wrap="square" lIns="0" tIns="0" rIns="0" bIns="0" rtlCol="0" anchor="ctr"/>
-          <a:lstStyle/>
-          <a:p>
-            <a:pPr marL="0" indent="0" algn="l">
-              <a:buNone/>
-            </a:pPr>
-            <a:r>
-              <a:rPr lang="en-US" sz="1100" dirty="0">
-                <a:solidFill>
-                  <a:srgbClr val="D0D7E8"/>
-                </a:solidFill>
-                <a:latin typeface="Consolas" pitchFamily="34" charset="0"/>
-                <a:ea typeface="Consolas" pitchFamily="34" charset="-122"/>
-                <a:cs typeface="Consolas" pitchFamily="34" charset="-120"/>
-              </a:rPr>
-              <a:t>· password_hash</a:t>
-            </a:r>
-            <a:endParaRPr lang="en-US" sz="1100" dirty="0"/>
-          </a:p>
-        </p:txBody>
-      </p:sp>
-      <p:sp>
-        <p:nvSpPr>
-          <p:cNvPr id="25" name="Text 23"/>
-          <p:cNvSpPr/>
-          <p:nvPr/>
-        </p:nvSpPr>
-        <p:spPr>
-          <a:xfrm>
-            <a:off x="4983480" y="2660904"/>
-            <a:ext cx="3474720" cy="219456"/>
-          </a:xfrm>
-          <a:prstGeom prst="rect">
-            <a:avLst/>
-          </a:prstGeom>
-          <a:noFill/>
-          <a:ln/>
-        </p:spPr>
-        <p:txBody>
-          <a:bodyPr wrap="square" lIns="0" tIns="0" rIns="0" bIns="0" rtlCol="0" anchor="ctr"/>
-          <a:lstStyle/>
-          <a:p>
-            <a:pPr marL="0" indent="0" algn="l">
-              <a:buNone/>
-            </a:pPr>
-            <a:r>
-              <a:rPr lang="en-US" sz="1100" dirty="0">
-                <a:solidFill>
-                  <a:srgbClr val="D0D7E8"/>
-                </a:solidFill>
-                <a:latin typeface="Consolas" pitchFamily="34" charset="0"/>
-                <a:ea typeface="Consolas" pitchFamily="34" charset="-122"/>
-                <a:cs typeface="Consolas" pitchFamily="34" charset="-120"/>
-              </a:rPr>
-              <a:t>· language</a:t>
-            </a:r>
-            <a:endParaRPr lang="en-US" sz="1100" dirty="0"/>
-          </a:p>
-        </p:txBody>
-      </p:sp>
-      <p:sp>
-        <p:nvSpPr>
-          <p:cNvPr id="26" name="Text 24"/>
-          <p:cNvSpPr/>
-          <p:nvPr/>
-        </p:nvSpPr>
-        <p:spPr>
-          <a:xfrm>
-            <a:off x="4983480" y="2907792"/>
-            <a:ext cx="3474720" cy="219456"/>
-          </a:xfrm>
-          <a:prstGeom prst="rect">
-            <a:avLst/>
-          </a:prstGeom>
-          <a:noFill/>
-          <a:ln/>
-        </p:spPr>
-        <p:txBody>
-          <a:bodyPr wrap="square" lIns="0" tIns="0" rIns="0" bIns="0" rtlCol="0" anchor="ctr"/>
-          <a:lstStyle/>
-          <a:p>
-            <a:pPr marL="0" indent="0" algn="l">
-              <a:buNone/>
-            </a:pPr>
-            <a:r>
-              <a:rPr lang="en-US" sz="1100" dirty="0">
-                <a:solidFill>
-                  <a:srgbClr val="D0D7E8"/>
-                </a:solidFill>
-                <a:latin typeface="Consolas" pitchFamily="34" charset="0"/>
-                <a:ea typeface="Consolas" pitchFamily="34" charset="-122"/>
-                <a:cs typeface="Consolas" pitchFamily="34" charset="-120"/>
-              </a:rPr>
-              <a:t>· created_at</a:t>
-            </a:r>
-            <a:endParaRPr lang="en-US" sz="1100" dirty="0"/>
-          </a:p>
-        </p:txBody>
-      </p:sp>
-      <p:sp>
-        <p:nvSpPr>
-          <p:cNvPr id="27" name="Text 25"/>
-          <p:cNvSpPr/>
-          <p:nvPr/>
-        </p:nvSpPr>
-        <p:spPr>
-          <a:xfrm>
-            <a:off x="4892040" y="3127248"/>
-            <a:ext cx="3749040" cy="292608"/>
-          </a:xfrm>
-          <a:prstGeom prst="rect">
-            <a:avLst/>
-          </a:prstGeom>
-          <a:noFill/>
-          <a:ln/>
-        </p:spPr>
-        <p:txBody>
-          <a:bodyPr wrap="square" lIns="0" tIns="0" rIns="0" bIns="0" rtlCol="0" anchor="ctr"/>
-          <a:lstStyle/>
-          <a:p>
-            <a:pPr marL="0" indent="0" algn="l">
-              <a:buNone/>
-            </a:pPr>
-            <a:r>
-              <a:rPr lang="en-US" sz="1200" b="1" dirty="0">
-                <a:solidFill>
-                  <a:srgbClr val="4472C4"/>
-                </a:solidFill>
-                <a:latin typeface="Calibri" pitchFamily="34" charset="0"/>
-                <a:ea typeface="Calibri" pitchFamily="34" charset="-122"/>
-                <a:cs typeface="Calibri" pitchFamily="34" charset="-120"/>
-              </a:rPr>
-              <a:t>Tabelle: results</a:t>
-            </a:r>
-            <a:endParaRPr lang="en-US" sz="1200" dirty="0"/>
-          </a:p>
-        </p:txBody>
-      </p:sp>
-      <p:sp>
-        <p:nvSpPr>
-          <p:cNvPr id="28" name="Text 26"/>
-          <p:cNvSpPr/>
-          <p:nvPr/>
-        </p:nvSpPr>
-        <p:spPr>
-          <a:xfrm>
-            <a:off x="4983480" y="3350221"/>
-            <a:ext cx="3474720" cy="219456"/>
-          </a:xfrm>
-          <a:prstGeom prst="rect">
-            <a:avLst/>
-          </a:prstGeom>
-          <a:noFill/>
-          <a:ln/>
-        </p:spPr>
-        <p:txBody>
-          <a:bodyPr wrap="square" lIns="0" tIns="0" rIns="0" bIns="0" rtlCol="0" anchor="ctr"/>
-          <a:lstStyle/>
-          <a:p>
-            <a:pPr marL="0" indent="0" algn="l">
-              <a:buNone/>
-            </a:pPr>
-            <a:r>
-              <a:rPr lang="en-US" sz="1100" dirty="0">
-                <a:solidFill>
-                  <a:srgbClr val="D0D7E8"/>
-                </a:solidFill>
-                <a:latin typeface="Consolas" pitchFamily="34" charset="0"/>
-                <a:ea typeface="Consolas" pitchFamily="34" charset="-122"/>
-                <a:cs typeface="Consolas" pitchFamily="34" charset="-120"/>
-              </a:rPr>
-              <a:t>· id</a:t>
-            </a:r>
-            <a:endParaRPr lang="en-US" sz="1100" dirty="0"/>
-          </a:p>
-        </p:txBody>
-      </p:sp>
-      <p:sp>
-        <p:nvSpPr>
-          <p:cNvPr id="29" name="Text 27"/>
-          <p:cNvSpPr/>
-          <p:nvPr/>
-        </p:nvSpPr>
-        <p:spPr>
-          <a:xfrm>
-            <a:off x="4983480" y="3569677"/>
-            <a:ext cx="3474720" cy="219456"/>
-          </a:xfrm>
-          <a:prstGeom prst="rect">
-            <a:avLst/>
-          </a:prstGeom>
-          <a:noFill/>
-          <a:ln/>
-        </p:spPr>
-        <p:txBody>
-          <a:bodyPr wrap="square" lIns="0" tIns="0" rIns="0" bIns="0" rtlCol="0" anchor="ctr"/>
-          <a:lstStyle/>
-          <a:p>
-            <a:pPr marL="0" indent="0" algn="l">
-              <a:buNone/>
-            </a:pPr>
-            <a:r>
-              <a:rPr lang="en-US" sz="1100" dirty="0">
-                <a:solidFill>
-                  <a:srgbClr val="D0D7E8"/>
-                </a:solidFill>
-                <a:latin typeface="Consolas" pitchFamily="34" charset="0"/>
-                <a:ea typeface="Consolas" pitchFamily="34" charset="-122"/>
-                <a:cs typeface="Consolas" pitchFamily="34" charset="-120"/>
-              </a:rPr>
-              <a:t>· user_id (FK)</a:t>
-            </a:r>
-            <a:endParaRPr lang="en-US" sz="1100" dirty="0"/>
-          </a:p>
-        </p:txBody>
-      </p:sp>
-      <p:sp>
-        <p:nvSpPr>
-          <p:cNvPr id="30" name="Text 28"/>
-          <p:cNvSpPr/>
-          <p:nvPr/>
-        </p:nvSpPr>
-        <p:spPr>
-          <a:xfrm>
-            <a:off x="4983480" y="3803904"/>
-            <a:ext cx="3474720" cy="219456"/>
-          </a:xfrm>
-          <a:prstGeom prst="rect">
-            <a:avLst/>
-          </a:prstGeom>
-          <a:noFill/>
-          <a:ln/>
-        </p:spPr>
-        <p:txBody>
-          <a:bodyPr wrap="square" lIns="0" tIns="0" rIns="0" bIns="0" rtlCol="0" anchor="ctr"/>
-          <a:lstStyle/>
-          <a:p>
-            <a:pPr marL="0" indent="0" algn="l">
-              <a:buNone/>
-            </a:pPr>
-            <a:r>
-              <a:rPr lang="en-US" sz="1100" dirty="0">
-                <a:solidFill>
-                  <a:srgbClr val="D0D7E8"/>
-                </a:solidFill>
-                <a:latin typeface="Consolas" pitchFamily="34" charset="0"/>
-                <a:ea typeface="Consolas" pitchFamily="34" charset="-122"/>
-                <a:cs typeface="Consolas" pitchFamily="34" charset="-120"/>
-              </a:rPr>
-              <a:t>· game</a:t>
-            </a:r>
-            <a:endParaRPr lang="en-US" sz="1100" dirty="0"/>
-          </a:p>
-        </p:txBody>
-      </p:sp>
-      <p:sp>
-        <p:nvSpPr>
-          <p:cNvPr id="31" name="Text 29"/>
-          <p:cNvSpPr/>
-          <p:nvPr/>
-        </p:nvSpPr>
-        <p:spPr>
-          <a:xfrm>
-            <a:off x="4983480" y="4027932"/>
-            <a:ext cx="3474720" cy="219456"/>
-          </a:xfrm>
-          <a:prstGeom prst="rect">
-            <a:avLst/>
-          </a:prstGeom>
-          <a:noFill/>
-          <a:ln/>
-        </p:spPr>
-        <p:txBody>
-          <a:bodyPr wrap="square" lIns="0" tIns="0" rIns="0" bIns="0" rtlCol="0" anchor="ctr"/>
-          <a:lstStyle/>
-          <a:p>
-            <a:pPr marL="0" indent="0" algn="l">
-              <a:buNone/>
-            </a:pPr>
-            <a:r>
-              <a:rPr lang="en-US" sz="1100" dirty="0">
-                <a:solidFill>
-                  <a:srgbClr val="D0D7E8"/>
-                </a:solidFill>
-                <a:latin typeface="Consolas" pitchFamily="34" charset="0"/>
-                <a:ea typeface="Consolas" pitchFamily="34" charset="-122"/>
-                <a:cs typeface="Consolas" pitchFamily="34" charset="-120"/>
-              </a:rPr>
-              <a:t>· difficulty</a:t>
-            </a:r>
-            <a:endParaRPr lang="en-US" sz="1100" dirty="0"/>
-          </a:p>
-        </p:txBody>
-      </p:sp>
-      <p:sp>
-        <p:nvSpPr>
-          <p:cNvPr id="32" name="Text 30"/>
-          <p:cNvSpPr/>
-          <p:nvPr/>
-        </p:nvSpPr>
-        <p:spPr>
-          <a:xfrm>
-            <a:off x="4983480" y="4230858"/>
-            <a:ext cx="3474720" cy="219456"/>
-          </a:xfrm>
-          <a:prstGeom prst="rect">
-            <a:avLst/>
-          </a:prstGeom>
-          <a:noFill/>
-          <a:ln/>
-        </p:spPr>
-        <p:txBody>
-          <a:bodyPr wrap="square" lIns="0" tIns="0" rIns="0" bIns="0" rtlCol="0" anchor="ctr"/>
-          <a:lstStyle/>
-          <a:p>
-            <a:pPr marL="0" indent="0" algn="l">
-              <a:buNone/>
-            </a:pPr>
-            <a:r>
-              <a:rPr lang="en-US" sz="1100" dirty="0">
-                <a:solidFill>
-                  <a:srgbClr val="D0D7E8"/>
-                </a:solidFill>
-                <a:latin typeface="Consolas" pitchFamily="34" charset="0"/>
-                <a:ea typeface="Consolas" pitchFamily="34" charset="-122"/>
-                <a:cs typeface="Consolas" pitchFamily="34" charset="-120"/>
-              </a:rPr>
-              <a:t>· won</a:t>
-            </a:r>
-            <a:endParaRPr lang="en-US" sz="1100" dirty="0"/>
-          </a:p>
-        </p:txBody>
-      </p:sp>
-      <p:sp>
-        <p:nvSpPr>
-          <p:cNvPr id="33" name="Text 31"/>
-          <p:cNvSpPr/>
-          <p:nvPr/>
-        </p:nvSpPr>
-        <p:spPr>
-          <a:xfrm>
-            <a:off x="4983480" y="4450314"/>
-            <a:ext cx="3474720" cy="219456"/>
-          </a:xfrm>
-          <a:prstGeom prst="rect">
-            <a:avLst/>
-          </a:prstGeom>
-          <a:noFill/>
-          <a:ln/>
-        </p:spPr>
-        <p:txBody>
-          <a:bodyPr wrap="square" lIns="0" tIns="0" rIns="0" bIns="0" rtlCol="0" anchor="ctr"/>
-          <a:lstStyle/>
-          <a:p>
-            <a:pPr marL="0" indent="0" algn="l">
-              <a:buNone/>
-            </a:pPr>
-            <a:r>
-              <a:rPr lang="en-US" sz="1100" dirty="0">
-                <a:solidFill>
-                  <a:srgbClr val="D0D7E8"/>
-                </a:solidFill>
-                <a:latin typeface="Consolas" pitchFamily="34" charset="0"/>
-                <a:ea typeface="Consolas" pitchFamily="34" charset="-122"/>
-                <a:cs typeface="Consolas" pitchFamily="34" charset="-120"/>
-              </a:rPr>
-              <a:t>· played_at</a:t>
-            </a:r>
-            <a:endParaRPr lang="en-US" sz="1100" dirty="0"/>
-          </a:p>
-        </p:txBody>
-      </p:sp>
-      <p:sp>
-        <p:nvSpPr>
-          <p:cNvPr id="34" name="Textfeld 33">
-            <a:extLst>
-              <a:ext uri="{FF2B5EF4-FFF2-40B4-BE49-F238E27FC236}">
-                <a16:creationId xmlns:a16="http://schemas.microsoft.com/office/drawing/2014/main" id="{7E5C661B-4881-D1FC-50EB-6ADE5EC2C3EA}"/>
-              </a:ext>
-            </a:extLst>
-          </p:cNvPr>
-          <p:cNvSpPr txBox="1"/>
-          <p:nvPr/>
-        </p:nvSpPr>
-        <p:spPr>
-          <a:xfrm>
-            <a:off x="8641080" y="4875028"/>
-            <a:ext cx="324613" cy="215444"/>
-          </a:xfrm>
-          <a:prstGeom prst="rect">
-            <a:avLst/>
-          </a:prstGeom>
-          <a:noFill/>
-        </p:spPr>
-        <p:txBody>
-          <a:bodyPr wrap="square" rtlCol="0">
-            <a:spAutoFit/>
-          </a:bodyPr>
-          <a:lstStyle/>
-          <a:p>
-            <a:r>
-              <a:rPr lang="en-US" sz="800" dirty="0">
-                <a:solidFill>
-                  <a:srgbClr val="E94560"/>
-                </a:solidFill>
-                <a:latin typeface="Calibri" pitchFamily="34" charset="0"/>
-                <a:ea typeface="Calibri" pitchFamily="34" charset="-122"/>
-                <a:cs typeface="Calibri" pitchFamily="34" charset="-120"/>
-              </a:rPr>
-              <a:t>13</a:t>
             </a:r>
             <a:endParaRPr lang="de-DE" sz="800" dirty="0"/>
           </a:p>
@@ -12952,6 +13231,1302 @@
 
 <file path=ppt/slides/slide5.xml><?xml version="1.0" encoding="utf-8"?>
 <p:sld xmlns:a="http://schemas.openxmlformats.org/drawingml/2006/main" xmlns:r="http://schemas.openxmlformats.org/officeDocument/2006/relationships" xmlns:p="http://schemas.openxmlformats.org/presentationml/2006/main">
+  <p:cSld name="Slide 7">
+    <p:bg>
+      <p:bgPr>
+        <a:solidFill>
+          <a:srgbClr val="0D0D1A"/>
+        </a:solidFill>
+        <a:effectLst/>
+      </p:bgPr>
+    </p:bg>
+    <p:spTree>
+      <p:nvGrpSpPr>
+        <p:cNvPr id="1" name=""/>
+        <p:cNvGrpSpPr/>
+        <p:nvPr/>
+      </p:nvGrpSpPr>
+      <p:grpSpPr>
+        <a:xfrm>
+          <a:off x="0" y="0"/>
+          <a:ext cx="0" cy="0"/>
+          <a:chOff x="0" y="0"/>
+          <a:chExt cx="0" cy="0"/>
+        </a:xfrm>
+      </p:grpSpPr>
+      <p:sp>
+        <p:nvSpPr>
+          <p:cNvPr id="2" name="Text 0"/>
+          <p:cNvSpPr/>
+          <p:nvPr/>
+        </p:nvSpPr>
+        <p:spPr>
+          <a:xfrm>
+            <a:off x="457200" y="256032"/>
+            <a:ext cx="8229600" cy="594360"/>
+          </a:xfrm>
+          <a:prstGeom prst="rect">
+            <a:avLst/>
+          </a:prstGeom>
+          <a:noFill/>
+          <a:ln/>
+        </p:spPr>
+        <p:txBody>
+          <a:bodyPr wrap="square" lIns="0" tIns="0" rIns="0" bIns="0" rtlCol="0" anchor="ctr"/>
+          <a:lstStyle/>
+          <a:p>
+            <a:pPr marL="0" indent="0" algn="l">
+              <a:buNone/>
+            </a:pPr>
+            <a:r>
+              <a:rPr lang="en-US" sz="2800" b="1" dirty="0">
+                <a:solidFill>
+                  <a:srgbClr val="FFFFFF"/>
+                </a:solidFill>
+                <a:latin typeface="Arial Black" pitchFamily="34" charset="0"/>
+                <a:ea typeface="Arial Black" pitchFamily="34" charset="-122"/>
+                <a:cs typeface="Arial Black" pitchFamily="34" charset="-120"/>
+              </a:rPr>
+              <a:t>Benutzerverwaltung &amp; Datenbank</a:t>
+            </a:r>
+            <a:endParaRPr lang="en-US" sz="2800" dirty="0"/>
+          </a:p>
+        </p:txBody>
+      </p:sp>
+      <p:sp>
+        <p:nvSpPr>
+          <p:cNvPr id="3" name="Shape 1"/>
+          <p:cNvSpPr/>
+          <p:nvPr/>
+        </p:nvSpPr>
+        <p:spPr>
+          <a:xfrm>
+            <a:off x="365760" y="1005840"/>
+            <a:ext cx="4023360" cy="3749040"/>
+          </a:xfrm>
+          <a:prstGeom prst="rect">
+            <a:avLst/>
+          </a:prstGeom>
+          <a:solidFill>
+            <a:srgbClr val="1E2A4A"/>
+          </a:solidFill>
+          <a:ln w="6350">
+            <a:solidFill>
+              <a:srgbClr val="2A3A5E"/>
+            </a:solidFill>
+            <a:prstDash val="solid"/>
+          </a:ln>
+        </p:spPr>
+        <p:txBody>
+          <a:bodyPr/>
+          <a:lstStyle/>
+          <a:p>
+            <a:endParaRPr lang="de-DE"/>
+          </a:p>
+        </p:txBody>
+      </p:sp>
+      <p:sp>
+        <p:nvSpPr>
+          <p:cNvPr id="4" name="Shape 2"/>
+          <p:cNvSpPr/>
+          <p:nvPr/>
+        </p:nvSpPr>
+        <p:spPr>
+          <a:xfrm>
+            <a:off x="365760" y="1005840"/>
+            <a:ext cx="4023360" cy="457200"/>
+          </a:xfrm>
+          <a:prstGeom prst="rect">
+            <a:avLst/>
+          </a:prstGeom>
+          <a:solidFill>
+            <a:srgbClr val="F39C12"/>
+          </a:solidFill>
+          <a:ln w="12700">
+            <a:solidFill>
+              <a:srgbClr val="F39C12"/>
+            </a:solidFill>
+            <a:prstDash val="solid"/>
+          </a:ln>
+        </p:spPr>
+        <p:txBody>
+          <a:bodyPr/>
+          <a:lstStyle/>
+          <a:p>
+            <a:endParaRPr lang="de-DE"/>
+          </a:p>
+        </p:txBody>
+      </p:sp>
+      <p:sp>
+        <p:nvSpPr>
+          <p:cNvPr id="5" name="Text 3"/>
+          <p:cNvSpPr/>
+          <p:nvPr/>
+        </p:nvSpPr>
+        <p:spPr>
+          <a:xfrm>
+            <a:off x="502920" y="1051560"/>
+            <a:ext cx="3749040" cy="320040"/>
+          </a:xfrm>
+          <a:prstGeom prst="rect">
+            <a:avLst/>
+          </a:prstGeom>
+          <a:noFill/>
+          <a:ln/>
+        </p:spPr>
+        <p:txBody>
+          <a:bodyPr wrap="square" lIns="0" tIns="0" rIns="0" bIns="0" rtlCol="0" anchor="ctr"/>
+          <a:lstStyle/>
+          <a:p>
+            <a:pPr marL="0" indent="0" algn="l">
+              <a:buNone/>
+            </a:pPr>
+            <a:r>
+              <a:rPr lang="en-US" sz="1400" b="1" dirty="0">
+                <a:solidFill>
+                  <a:srgbClr val="FFFFFF"/>
+                </a:solidFill>
+                <a:latin typeface="Calibri" pitchFamily="34" charset="0"/>
+                <a:ea typeface="Calibri" pitchFamily="34" charset="-122"/>
+                <a:cs typeface="Calibri" pitchFamily="34" charset="-120"/>
+              </a:rPr>
+              <a:t>auth.py · Benutzerverwaltung</a:t>
+            </a:r>
+            <a:endParaRPr lang="en-US" sz="1400" dirty="0"/>
+          </a:p>
+        </p:txBody>
+      </p:sp>
+      <p:sp>
+        <p:nvSpPr>
+          <p:cNvPr id="6" name="Text 4"/>
+          <p:cNvSpPr/>
+          <p:nvPr/>
+        </p:nvSpPr>
+        <p:spPr>
+          <a:xfrm>
+            <a:off x="502920" y="1581912"/>
+            <a:ext cx="1737360" cy="256032"/>
+          </a:xfrm>
+          <a:prstGeom prst="rect">
+            <a:avLst/>
+          </a:prstGeom>
+          <a:noFill/>
+          <a:ln/>
+        </p:spPr>
+        <p:txBody>
+          <a:bodyPr wrap="square" lIns="0" tIns="0" rIns="0" bIns="0" rtlCol="0" anchor="ctr"/>
+          <a:lstStyle/>
+          <a:p>
+            <a:pPr marL="0" indent="0" algn="l">
+              <a:buNone/>
+            </a:pPr>
+            <a:r>
+              <a:rPr lang="en-US" sz="1200" b="1" dirty="0">
+                <a:solidFill>
+                  <a:srgbClr val="F39C12"/>
+                </a:solidFill>
+                <a:latin typeface="Consolas" pitchFamily="34" charset="0"/>
+                <a:ea typeface="Consolas" pitchFamily="34" charset="-122"/>
+                <a:cs typeface="Consolas" pitchFamily="34" charset="-120"/>
+              </a:rPr>
+              <a:t>register()</a:t>
+            </a:r>
+            <a:endParaRPr lang="en-US" sz="1200" dirty="0"/>
+          </a:p>
+        </p:txBody>
+      </p:sp>
+      <p:sp>
+        <p:nvSpPr>
+          <p:cNvPr id="7" name="Text 5"/>
+          <p:cNvSpPr/>
+          <p:nvPr/>
+        </p:nvSpPr>
+        <p:spPr>
+          <a:xfrm>
+            <a:off x="2331720" y="1581912"/>
+            <a:ext cx="1920240" cy="256032"/>
+          </a:xfrm>
+          <a:prstGeom prst="rect">
+            <a:avLst/>
+          </a:prstGeom>
+          <a:noFill/>
+          <a:ln/>
+        </p:spPr>
+        <p:txBody>
+          <a:bodyPr wrap="square" lIns="0" tIns="0" rIns="0" bIns="0" rtlCol="0" anchor="ctr"/>
+          <a:lstStyle/>
+          <a:p>
+            <a:pPr marL="0" indent="0" algn="l">
+              <a:buNone/>
+            </a:pPr>
+            <a:r>
+              <a:rPr lang="en-US" sz="1100" dirty="0">
+                <a:solidFill>
+                  <a:srgbClr val="D0D7E8"/>
+                </a:solidFill>
+                <a:latin typeface="Calibri" pitchFamily="34" charset="0"/>
+                <a:ea typeface="Calibri" pitchFamily="34" charset="-122"/>
+                <a:cs typeface="Calibri" pitchFamily="34" charset="-120"/>
+              </a:rPr>
+              <a:t>Validierung + SHA-256 + Salt</a:t>
+            </a:r>
+            <a:endParaRPr lang="en-US" sz="1100" dirty="0"/>
+          </a:p>
+        </p:txBody>
+      </p:sp>
+      <p:sp>
+        <p:nvSpPr>
+          <p:cNvPr id="8" name="Text 6"/>
+          <p:cNvSpPr/>
+          <p:nvPr/>
+        </p:nvSpPr>
+        <p:spPr>
+          <a:xfrm>
+            <a:off x="502920" y="2084832"/>
+            <a:ext cx="1737360" cy="256032"/>
+          </a:xfrm>
+          <a:prstGeom prst="rect">
+            <a:avLst/>
+          </a:prstGeom>
+          <a:noFill/>
+          <a:ln/>
+        </p:spPr>
+        <p:txBody>
+          <a:bodyPr wrap="square" lIns="0" tIns="0" rIns="0" bIns="0" rtlCol="0" anchor="ctr"/>
+          <a:lstStyle/>
+          <a:p>
+            <a:pPr marL="0" indent="0" algn="l">
+              <a:buNone/>
+            </a:pPr>
+            <a:r>
+              <a:rPr lang="en-US" sz="1200" b="1" dirty="0">
+                <a:solidFill>
+                  <a:srgbClr val="F39C12"/>
+                </a:solidFill>
+                <a:latin typeface="Consolas" pitchFamily="34" charset="0"/>
+                <a:ea typeface="Consolas" pitchFamily="34" charset="-122"/>
+                <a:cs typeface="Consolas" pitchFamily="34" charset="-120"/>
+              </a:rPr>
+              <a:t>login()</a:t>
+            </a:r>
+            <a:endParaRPr lang="en-US" sz="1200" dirty="0"/>
+          </a:p>
+        </p:txBody>
+      </p:sp>
+      <p:sp>
+        <p:nvSpPr>
+          <p:cNvPr id="9" name="Text 7"/>
+          <p:cNvSpPr/>
+          <p:nvPr/>
+        </p:nvSpPr>
+        <p:spPr>
+          <a:xfrm>
+            <a:off x="2331720" y="2084832"/>
+            <a:ext cx="1920240" cy="256032"/>
+          </a:xfrm>
+          <a:prstGeom prst="rect">
+            <a:avLst/>
+          </a:prstGeom>
+          <a:noFill/>
+          <a:ln/>
+        </p:spPr>
+        <p:txBody>
+          <a:bodyPr wrap="square" lIns="0" tIns="0" rIns="0" bIns="0" rtlCol="0" anchor="ctr"/>
+          <a:lstStyle/>
+          <a:p>
+            <a:pPr marL="0" indent="0" algn="l">
+              <a:buNone/>
+            </a:pPr>
+            <a:r>
+              <a:rPr lang="en-US" sz="1100" dirty="0">
+                <a:solidFill>
+                  <a:srgbClr val="D0D7E8"/>
+                </a:solidFill>
+                <a:latin typeface="Calibri" pitchFamily="34" charset="0"/>
+                <a:ea typeface="Calibri" pitchFamily="34" charset="-122"/>
+                <a:cs typeface="Calibri" pitchFamily="34" charset="-120"/>
+              </a:rPr>
+              <a:t>Passwort-Hash-Vergleich</a:t>
+            </a:r>
+            <a:endParaRPr lang="en-US" sz="1100" dirty="0"/>
+          </a:p>
+        </p:txBody>
+      </p:sp>
+      <p:sp>
+        <p:nvSpPr>
+          <p:cNvPr id="10" name="Text 8"/>
+          <p:cNvSpPr/>
+          <p:nvPr/>
+        </p:nvSpPr>
+        <p:spPr>
+          <a:xfrm>
+            <a:off x="502920" y="2587752"/>
+            <a:ext cx="1737360" cy="256032"/>
+          </a:xfrm>
+          <a:prstGeom prst="rect">
+            <a:avLst/>
+          </a:prstGeom>
+          <a:noFill/>
+          <a:ln/>
+        </p:spPr>
+        <p:txBody>
+          <a:bodyPr wrap="square" lIns="0" tIns="0" rIns="0" bIns="0" rtlCol="0" anchor="ctr"/>
+          <a:lstStyle/>
+          <a:p>
+            <a:pPr marL="0" indent="0" algn="l">
+              <a:buNone/>
+            </a:pPr>
+            <a:r>
+              <a:rPr lang="en-US" sz="1200" b="1" dirty="0">
+                <a:solidFill>
+                  <a:srgbClr val="F39C12"/>
+                </a:solidFill>
+                <a:latin typeface="Consolas" pitchFamily="34" charset="0"/>
+                <a:ea typeface="Consolas" pitchFamily="34" charset="-122"/>
+                <a:cs typeface="Consolas" pitchFamily="34" charset="-120"/>
+              </a:rPr>
+              <a:t>save_session()</a:t>
+            </a:r>
+            <a:endParaRPr lang="en-US" sz="1200" dirty="0"/>
+          </a:p>
+        </p:txBody>
+      </p:sp>
+      <p:sp>
+        <p:nvSpPr>
+          <p:cNvPr id="11" name="Text 9"/>
+          <p:cNvSpPr/>
+          <p:nvPr/>
+        </p:nvSpPr>
+        <p:spPr>
+          <a:xfrm>
+            <a:off x="2331720" y="2587752"/>
+            <a:ext cx="1920240" cy="256032"/>
+          </a:xfrm>
+          <a:prstGeom prst="rect">
+            <a:avLst/>
+          </a:prstGeom>
+          <a:noFill/>
+          <a:ln/>
+        </p:spPr>
+        <p:txBody>
+          <a:bodyPr wrap="square" lIns="0" tIns="0" rIns="0" bIns="0" rtlCol="0" anchor="ctr"/>
+          <a:lstStyle/>
+          <a:p>
+            <a:pPr marL="0" indent="0" algn="l">
+              <a:buNone/>
+            </a:pPr>
+            <a:r>
+              <a:rPr lang="en-US" sz="1100" dirty="0">
+                <a:solidFill>
+                  <a:srgbClr val="D0D7E8"/>
+                </a:solidFill>
+                <a:latin typeface="Calibri" pitchFamily="34" charset="0"/>
+                <a:ea typeface="Calibri" pitchFamily="34" charset="-122"/>
+                <a:cs typeface="Calibri" pitchFamily="34" charset="-120"/>
+              </a:rPr>
+              <a:t>user_id in session.json</a:t>
+            </a:r>
+            <a:endParaRPr lang="en-US" sz="1100" dirty="0"/>
+          </a:p>
+        </p:txBody>
+      </p:sp>
+      <p:sp>
+        <p:nvSpPr>
+          <p:cNvPr id="12" name="Text 10"/>
+          <p:cNvSpPr/>
+          <p:nvPr/>
+        </p:nvSpPr>
+        <p:spPr>
+          <a:xfrm>
+            <a:off x="502920" y="3090672"/>
+            <a:ext cx="1737360" cy="256032"/>
+          </a:xfrm>
+          <a:prstGeom prst="rect">
+            <a:avLst/>
+          </a:prstGeom>
+          <a:noFill/>
+          <a:ln/>
+        </p:spPr>
+        <p:txBody>
+          <a:bodyPr wrap="square" lIns="0" tIns="0" rIns="0" bIns="0" rtlCol="0" anchor="ctr"/>
+          <a:lstStyle/>
+          <a:p>
+            <a:pPr marL="0" indent="0" algn="l">
+              <a:buNone/>
+            </a:pPr>
+            <a:r>
+              <a:rPr lang="en-US" sz="1200" b="1" dirty="0">
+                <a:solidFill>
+                  <a:srgbClr val="F39C12"/>
+                </a:solidFill>
+                <a:latin typeface="Consolas" pitchFamily="34" charset="0"/>
+                <a:ea typeface="Consolas" pitchFamily="34" charset="-122"/>
+                <a:cs typeface="Consolas" pitchFamily="34" charset="-120"/>
+              </a:rPr>
+              <a:t>load_session()</a:t>
+            </a:r>
+            <a:endParaRPr lang="en-US" sz="1200" dirty="0"/>
+          </a:p>
+        </p:txBody>
+      </p:sp>
+      <p:sp>
+        <p:nvSpPr>
+          <p:cNvPr id="13" name="Text 11"/>
+          <p:cNvSpPr/>
+          <p:nvPr/>
+        </p:nvSpPr>
+        <p:spPr>
+          <a:xfrm>
+            <a:off x="2331720" y="3090672"/>
+            <a:ext cx="1920240" cy="256032"/>
+          </a:xfrm>
+          <a:prstGeom prst="rect">
+            <a:avLst/>
+          </a:prstGeom>
+          <a:noFill/>
+          <a:ln/>
+        </p:spPr>
+        <p:txBody>
+          <a:bodyPr wrap="square" lIns="0" tIns="0" rIns="0" bIns="0" rtlCol="0" anchor="ctr"/>
+          <a:lstStyle/>
+          <a:p>
+            <a:pPr marL="0" indent="0" algn="l">
+              <a:buNone/>
+            </a:pPr>
+            <a:r>
+              <a:rPr lang="en-US" sz="1100" dirty="0">
+                <a:solidFill>
+                  <a:srgbClr val="D0D7E8"/>
+                </a:solidFill>
+                <a:latin typeface="Calibri" pitchFamily="34" charset="0"/>
+                <a:ea typeface="Calibri" pitchFamily="34" charset="-122"/>
+                <a:cs typeface="Calibri" pitchFamily="34" charset="-120"/>
+              </a:rPr>
+              <a:t>Auto-Login beim Start</a:t>
+            </a:r>
+            <a:endParaRPr lang="en-US" sz="1100" dirty="0"/>
+          </a:p>
+        </p:txBody>
+      </p:sp>
+      <p:sp>
+        <p:nvSpPr>
+          <p:cNvPr id="14" name="Text 12"/>
+          <p:cNvSpPr/>
+          <p:nvPr/>
+        </p:nvSpPr>
+        <p:spPr>
+          <a:xfrm>
+            <a:off x="502920" y="3593592"/>
+            <a:ext cx="1737360" cy="256032"/>
+          </a:xfrm>
+          <a:prstGeom prst="rect">
+            <a:avLst/>
+          </a:prstGeom>
+          <a:noFill/>
+          <a:ln/>
+        </p:spPr>
+        <p:txBody>
+          <a:bodyPr wrap="square" lIns="0" tIns="0" rIns="0" bIns="0" rtlCol="0" anchor="ctr"/>
+          <a:lstStyle/>
+          <a:p>
+            <a:pPr marL="0" indent="0" algn="l">
+              <a:buNone/>
+            </a:pPr>
+            <a:r>
+              <a:rPr lang="en-US" sz="1200" b="1" dirty="0">
+                <a:solidFill>
+                  <a:srgbClr val="F39C12"/>
+                </a:solidFill>
+                <a:latin typeface="Consolas" pitchFamily="34" charset="0"/>
+                <a:ea typeface="Consolas" pitchFamily="34" charset="-122"/>
+                <a:cs typeface="Consolas" pitchFamily="34" charset="-120"/>
+              </a:rPr>
+              <a:t>logout()</a:t>
+            </a:r>
+            <a:endParaRPr lang="en-US" sz="1200" dirty="0"/>
+          </a:p>
+        </p:txBody>
+      </p:sp>
+      <p:sp>
+        <p:nvSpPr>
+          <p:cNvPr id="15" name="Text 13"/>
+          <p:cNvSpPr/>
+          <p:nvPr/>
+        </p:nvSpPr>
+        <p:spPr>
+          <a:xfrm>
+            <a:off x="2331720" y="3593592"/>
+            <a:ext cx="1920240" cy="256032"/>
+          </a:xfrm>
+          <a:prstGeom prst="rect">
+            <a:avLst/>
+          </a:prstGeom>
+          <a:noFill/>
+          <a:ln/>
+        </p:spPr>
+        <p:txBody>
+          <a:bodyPr wrap="square" lIns="0" tIns="0" rIns="0" bIns="0" rtlCol="0" anchor="ctr"/>
+          <a:lstStyle/>
+          <a:p>
+            <a:pPr marL="0" indent="0" algn="l">
+              <a:buNone/>
+            </a:pPr>
+            <a:r>
+              <a:rPr lang="en-US" sz="1100" dirty="0">
+                <a:solidFill>
+                  <a:srgbClr val="D0D7E8"/>
+                </a:solidFill>
+                <a:latin typeface="Calibri" pitchFamily="34" charset="0"/>
+                <a:ea typeface="Calibri" pitchFamily="34" charset="-122"/>
+                <a:cs typeface="Calibri" pitchFamily="34" charset="-120"/>
+              </a:rPr>
+              <a:t>Session löschen + Status reset</a:t>
+            </a:r>
+            <a:endParaRPr lang="en-US" sz="1100" dirty="0"/>
+          </a:p>
+        </p:txBody>
+      </p:sp>
+      <p:sp>
+        <p:nvSpPr>
+          <p:cNvPr id="16" name="Text 14"/>
+          <p:cNvSpPr/>
+          <p:nvPr/>
+        </p:nvSpPr>
+        <p:spPr>
+          <a:xfrm>
+            <a:off x="502920" y="4096512"/>
+            <a:ext cx="1737360" cy="256032"/>
+          </a:xfrm>
+          <a:prstGeom prst="rect">
+            <a:avLst/>
+          </a:prstGeom>
+          <a:noFill/>
+          <a:ln/>
+        </p:spPr>
+        <p:txBody>
+          <a:bodyPr wrap="square" lIns="0" tIns="0" rIns="0" bIns="0" rtlCol="0" anchor="ctr"/>
+          <a:lstStyle/>
+          <a:p>
+            <a:pPr marL="0" indent="0" algn="l">
+              <a:buNone/>
+            </a:pPr>
+            <a:r>
+              <a:rPr lang="en-US" sz="1200" b="1" dirty="0">
+                <a:solidFill>
+                  <a:srgbClr val="F39C12"/>
+                </a:solidFill>
+                <a:latin typeface="Consolas" pitchFamily="34" charset="0"/>
+                <a:ea typeface="Consolas" pitchFamily="34" charset="-122"/>
+                <a:cs typeface="Consolas" pitchFamily="34" charset="-120"/>
+              </a:rPr>
+              <a:t>is_guest()</a:t>
+            </a:r>
+            <a:endParaRPr lang="en-US" sz="1200" dirty="0"/>
+          </a:p>
+        </p:txBody>
+      </p:sp>
+      <p:sp>
+        <p:nvSpPr>
+          <p:cNvPr id="17" name="Text 15"/>
+          <p:cNvSpPr/>
+          <p:nvPr/>
+        </p:nvSpPr>
+        <p:spPr>
+          <a:xfrm>
+            <a:off x="2331720" y="4096512"/>
+            <a:ext cx="1920240" cy="256032"/>
+          </a:xfrm>
+          <a:prstGeom prst="rect">
+            <a:avLst/>
+          </a:prstGeom>
+          <a:noFill/>
+          <a:ln/>
+        </p:spPr>
+        <p:txBody>
+          <a:bodyPr wrap="square" lIns="0" tIns="0" rIns="0" bIns="0" rtlCol="0" anchor="ctr"/>
+          <a:lstStyle/>
+          <a:p>
+            <a:pPr marL="0" indent="0" algn="l">
+              <a:buNone/>
+            </a:pPr>
+            <a:r>
+              <a:rPr lang="en-US" sz="1100" dirty="0">
+                <a:solidFill>
+                  <a:srgbClr val="D0D7E8"/>
+                </a:solidFill>
+                <a:latin typeface="Calibri" pitchFamily="34" charset="0"/>
+                <a:ea typeface="Calibri" pitchFamily="34" charset="-122"/>
+                <a:cs typeface="Calibri" pitchFamily="34" charset="-120"/>
+              </a:rPr>
+              <a:t>Gastmodus · keine Statistiken</a:t>
+            </a:r>
+            <a:endParaRPr lang="en-US" sz="1100" dirty="0"/>
+          </a:p>
+        </p:txBody>
+      </p:sp>
+      <p:sp>
+        <p:nvSpPr>
+          <p:cNvPr id="18" name="Shape 16"/>
+          <p:cNvSpPr/>
+          <p:nvPr/>
+        </p:nvSpPr>
+        <p:spPr>
+          <a:xfrm>
+            <a:off x="4754880" y="1005840"/>
+            <a:ext cx="4023360" cy="3749040"/>
+          </a:xfrm>
+          <a:prstGeom prst="rect">
+            <a:avLst/>
+          </a:prstGeom>
+          <a:solidFill>
+            <a:srgbClr val="1E2A4A"/>
+          </a:solidFill>
+          <a:ln w="6350">
+            <a:solidFill>
+              <a:srgbClr val="2A3A5E"/>
+            </a:solidFill>
+            <a:prstDash val="solid"/>
+          </a:ln>
+        </p:spPr>
+        <p:txBody>
+          <a:bodyPr/>
+          <a:lstStyle/>
+          <a:p>
+            <a:endParaRPr lang="de-DE"/>
+          </a:p>
+        </p:txBody>
+      </p:sp>
+      <p:sp>
+        <p:nvSpPr>
+          <p:cNvPr id="19" name="Shape 17"/>
+          <p:cNvSpPr/>
+          <p:nvPr/>
+        </p:nvSpPr>
+        <p:spPr>
+          <a:xfrm>
+            <a:off x="4754880" y="1005840"/>
+            <a:ext cx="4023360" cy="457200"/>
+          </a:xfrm>
+          <a:prstGeom prst="rect">
+            <a:avLst/>
+          </a:prstGeom>
+          <a:solidFill>
+            <a:srgbClr val="4472C4"/>
+          </a:solidFill>
+          <a:ln w="12700">
+            <a:solidFill>
+              <a:srgbClr val="4472C4"/>
+            </a:solidFill>
+            <a:prstDash val="solid"/>
+          </a:ln>
+        </p:spPr>
+        <p:txBody>
+          <a:bodyPr/>
+          <a:lstStyle/>
+          <a:p>
+            <a:endParaRPr lang="de-DE"/>
+          </a:p>
+        </p:txBody>
+      </p:sp>
+      <p:sp>
+        <p:nvSpPr>
+          <p:cNvPr id="20" name="Text 18"/>
+          <p:cNvSpPr/>
+          <p:nvPr/>
+        </p:nvSpPr>
+        <p:spPr>
+          <a:xfrm>
+            <a:off x="4892040" y="1051560"/>
+            <a:ext cx="3749040" cy="320040"/>
+          </a:xfrm>
+          <a:prstGeom prst="rect">
+            <a:avLst/>
+          </a:prstGeom>
+          <a:noFill/>
+          <a:ln/>
+        </p:spPr>
+        <p:txBody>
+          <a:bodyPr wrap="square" lIns="0" tIns="0" rIns="0" bIns="0" rtlCol="0" anchor="ctr"/>
+          <a:lstStyle/>
+          <a:p>
+            <a:pPr marL="0" indent="0" algn="l">
+              <a:buNone/>
+            </a:pPr>
+            <a:r>
+              <a:rPr lang="en-US" sz="1400" b="1" dirty="0">
+                <a:solidFill>
+                  <a:srgbClr val="FFFFFF"/>
+                </a:solidFill>
+                <a:latin typeface="Calibri" pitchFamily="34" charset="0"/>
+                <a:ea typeface="Calibri" pitchFamily="34" charset="-122"/>
+                <a:cs typeface="Calibri" pitchFamily="34" charset="-120"/>
+              </a:rPr>
+              <a:t>database.py · SQLite</a:t>
+            </a:r>
+            <a:endParaRPr lang="en-US" sz="1400" dirty="0"/>
+          </a:p>
+        </p:txBody>
+      </p:sp>
+      <p:sp>
+        <p:nvSpPr>
+          <p:cNvPr id="21" name="Text 19"/>
+          <p:cNvSpPr/>
+          <p:nvPr/>
+        </p:nvSpPr>
+        <p:spPr>
+          <a:xfrm>
+            <a:off x="4892040" y="1600200"/>
+            <a:ext cx="3749040" cy="292608"/>
+          </a:xfrm>
+          <a:prstGeom prst="rect">
+            <a:avLst/>
+          </a:prstGeom>
+          <a:noFill/>
+          <a:ln/>
+        </p:spPr>
+        <p:txBody>
+          <a:bodyPr wrap="square" lIns="0" tIns="0" rIns="0" bIns="0" rtlCol="0" anchor="ctr"/>
+          <a:lstStyle/>
+          <a:p>
+            <a:pPr marL="0" indent="0" algn="l">
+              <a:buNone/>
+            </a:pPr>
+            <a:r>
+              <a:rPr lang="en-US" sz="1200" b="1" dirty="0">
+                <a:solidFill>
+                  <a:srgbClr val="4472C4"/>
+                </a:solidFill>
+                <a:latin typeface="Calibri" pitchFamily="34" charset="0"/>
+                <a:ea typeface="Calibri" pitchFamily="34" charset="-122"/>
+                <a:cs typeface="Calibri" pitchFamily="34" charset="-120"/>
+              </a:rPr>
+              <a:t>Tabelle: users</a:t>
+            </a:r>
+            <a:endParaRPr lang="en-US" sz="1200" dirty="0"/>
+          </a:p>
+        </p:txBody>
+      </p:sp>
+      <p:sp>
+        <p:nvSpPr>
+          <p:cNvPr id="22" name="Text 20"/>
+          <p:cNvSpPr/>
+          <p:nvPr/>
+        </p:nvSpPr>
+        <p:spPr>
+          <a:xfrm>
+            <a:off x="4983480" y="1920240"/>
+            <a:ext cx="3474720" cy="219456"/>
+          </a:xfrm>
+          <a:prstGeom prst="rect">
+            <a:avLst/>
+          </a:prstGeom>
+          <a:noFill/>
+          <a:ln/>
+        </p:spPr>
+        <p:txBody>
+          <a:bodyPr wrap="square" lIns="0" tIns="0" rIns="0" bIns="0" rtlCol="0" anchor="ctr"/>
+          <a:lstStyle/>
+          <a:p>
+            <a:pPr marL="0" indent="0" algn="l">
+              <a:buNone/>
+            </a:pPr>
+            <a:r>
+              <a:rPr lang="en-US" sz="1100" dirty="0">
+                <a:solidFill>
+                  <a:srgbClr val="D0D7E8"/>
+                </a:solidFill>
+                <a:latin typeface="Consolas" pitchFamily="34" charset="0"/>
+                <a:ea typeface="Consolas" pitchFamily="34" charset="-122"/>
+                <a:cs typeface="Consolas" pitchFamily="34" charset="-120"/>
+              </a:rPr>
+              <a:t>· id</a:t>
+            </a:r>
+            <a:endParaRPr lang="en-US" sz="1100" dirty="0"/>
+          </a:p>
+        </p:txBody>
+      </p:sp>
+      <p:sp>
+        <p:nvSpPr>
+          <p:cNvPr id="23" name="Text 21"/>
+          <p:cNvSpPr/>
+          <p:nvPr/>
+        </p:nvSpPr>
+        <p:spPr>
+          <a:xfrm>
+            <a:off x="4983480" y="2167128"/>
+            <a:ext cx="3474720" cy="219456"/>
+          </a:xfrm>
+          <a:prstGeom prst="rect">
+            <a:avLst/>
+          </a:prstGeom>
+          <a:noFill/>
+          <a:ln/>
+        </p:spPr>
+        <p:txBody>
+          <a:bodyPr wrap="square" lIns="0" tIns="0" rIns="0" bIns="0" rtlCol="0" anchor="ctr"/>
+          <a:lstStyle/>
+          <a:p>
+            <a:pPr marL="0" indent="0" algn="l">
+              <a:buNone/>
+            </a:pPr>
+            <a:r>
+              <a:rPr lang="en-US" sz="1100" dirty="0">
+                <a:solidFill>
+                  <a:srgbClr val="D0D7E8"/>
+                </a:solidFill>
+                <a:latin typeface="Consolas" pitchFamily="34" charset="0"/>
+                <a:ea typeface="Consolas" pitchFamily="34" charset="-122"/>
+                <a:cs typeface="Consolas" pitchFamily="34" charset="-120"/>
+              </a:rPr>
+              <a:t>· username</a:t>
+            </a:r>
+            <a:endParaRPr lang="en-US" sz="1100" dirty="0"/>
+          </a:p>
+        </p:txBody>
+      </p:sp>
+      <p:sp>
+        <p:nvSpPr>
+          <p:cNvPr id="24" name="Text 22"/>
+          <p:cNvSpPr/>
+          <p:nvPr/>
+        </p:nvSpPr>
+        <p:spPr>
+          <a:xfrm>
+            <a:off x="4983480" y="2414016"/>
+            <a:ext cx="3474720" cy="219456"/>
+          </a:xfrm>
+          <a:prstGeom prst="rect">
+            <a:avLst/>
+          </a:prstGeom>
+          <a:noFill/>
+          <a:ln/>
+        </p:spPr>
+        <p:txBody>
+          <a:bodyPr wrap="square" lIns="0" tIns="0" rIns="0" bIns="0" rtlCol="0" anchor="ctr"/>
+          <a:lstStyle/>
+          <a:p>
+            <a:pPr marL="0" indent="0" algn="l">
+              <a:buNone/>
+            </a:pPr>
+            <a:r>
+              <a:rPr lang="en-US" sz="1100" dirty="0">
+                <a:solidFill>
+                  <a:srgbClr val="D0D7E8"/>
+                </a:solidFill>
+                <a:latin typeface="Consolas" pitchFamily="34" charset="0"/>
+                <a:ea typeface="Consolas" pitchFamily="34" charset="-122"/>
+                <a:cs typeface="Consolas" pitchFamily="34" charset="-120"/>
+              </a:rPr>
+              <a:t>· password_hash</a:t>
+            </a:r>
+            <a:endParaRPr lang="en-US" sz="1100" dirty="0"/>
+          </a:p>
+        </p:txBody>
+      </p:sp>
+      <p:sp>
+        <p:nvSpPr>
+          <p:cNvPr id="25" name="Text 23"/>
+          <p:cNvSpPr/>
+          <p:nvPr/>
+        </p:nvSpPr>
+        <p:spPr>
+          <a:xfrm>
+            <a:off x="4983480" y="2660904"/>
+            <a:ext cx="3474720" cy="219456"/>
+          </a:xfrm>
+          <a:prstGeom prst="rect">
+            <a:avLst/>
+          </a:prstGeom>
+          <a:noFill/>
+          <a:ln/>
+        </p:spPr>
+        <p:txBody>
+          <a:bodyPr wrap="square" lIns="0" tIns="0" rIns="0" bIns="0" rtlCol="0" anchor="ctr"/>
+          <a:lstStyle/>
+          <a:p>
+            <a:pPr marL="0" indent="0" algn="l">
+              <a:buNone/>
+            </a:pPr>
+            <a:r>
+              <a:rPr lang="en-US" sz="1100" dirty="0">
+                <a:solidFill>
+                  <a:srgbClr val="D0D7E8"/>
+                </a:solidFill>
+                <a:latin typeface="Consolas" pitchFamily="34" charset="0"/>
+                <a:ea typeface="Consolas" pitchFamily="34" charset="-122"/>
+                <a:cs typeface="Consolas" pitchFamily="34" charset="-120"/>
+              </a:rPr>
+              <a:t>· language</a:t>
+            </a:r>
+            <a:endParaRPr lang="en-US" sz="1100" dirty="0"/>
+          </a:p>
+        </p:txBody>
+      </p:sp>
+      <p:sp>
+        <p:nvSpPr>
+          <p:cNvPr id="26" name="Text 24"/>
+          <p:cNvSpPr/>
+          <p:nvPr/>
+        </p:nvSpPr>
+        <p:spPr>
+          <a:xfrm>
+            <a:off x="4983480" y="2907792"/>
+            <a:ext cx="3474720" cy="219456"/>
+          </a:xfrm>
+          <a:prstGeom prst="rect">
+            <a:avLst/>
+          </a:prstGeom>
+          <a:noFill/>
+          <a:ln/>
+        </p:spPr>
+        <p:txBody>
+          <a:bodyPr wrap="square" lIns="0" tIns="0" rIns="0" bIns="0" rtlCol="0" anchor="ctr"/>
+          <a:lstStyle/>
+          <a:p>
+            <a:pPr marL="0" indent="0" algn="l">
+              <a:buNone/>
+            </a:pPr>
+            <a:r>
+              <a:rPr lang="en-US" sz="1100" dirty="0">
+                <a:solidFill>
+                  <a:srgbClr val="D0D7E8"/>
+                </a:solidFill>
+                <a:latin typeface="Consolas" pitchFamily="34" charset="0"/>
+                <a:ea typeface="Consolas" pitchFamily="34" charset="-122"/>
+                <a:cs typeface="Consolas" pitchFamily="34" charset="-120"/>
+              </a:rPr>
+              <a:t>· created_at</a:t>
+            </a:r>
+            <a:endParaRPr lang="en-US" sz="1100" dirty="0"/>
+          </a:p>
+        </p:txBody>
+      </p:sp>
+      <p:sp>
+        <p:nvSpPr>
+          <p:cNvPr id="27" name="Text 25"/>
+          <p:cNvSpPr/>
+          <p:nvPr/>
+        </p:nvSpPr>
+        <p:spPr>
+          <a:xfrm>
+            <a:off x="4892040" y="3127248"/>
+            <a:ext cx="3749040" cy="292608"/>
+          </a:xfrm>
+          <a:prstGeom prst="rect">
+            <a:avLst/>
+          </a:prstGeom>
+          <a:noFill/>
+          <a:ln/>
+        </p:spPr>
+        <p:txBody>
+          <a:bodyPr wrap="square" lIns="0" tIns="0" rIns="0" bIns="0" rtlCol="0" anchor="ctr"/>
+          <a:lstStyle/>
+          <a:p>
+            <a:pPr marL="0" indent="0" algn="l">
+              <a:buNone/>
+            </a:pPr>
+            <a:r>
+              <a:rPr lang="en-US" sz="1200" b="1" dirty="0">
+                <a:solidFill>
+                  <a:srgbClr val="4472C4"/>
+                </a:solidFill>
+                <a:latin typeface="Calibri" pitchFamily="34" charset="0"/>
+                <a:ea typeface="Calibri" pitchFamily="34" charset="-122"/>
+                <a:cs typeface="Calibri" pitchFamily="34" charset="-120"/>
+              </a:rPr>
+              <a:t>Tabelle: results</a:t>
+            </a:r>
+            <a:endParaRPr lang="en-US" sz="1200" dirty="0"/>
+          </a:p>
+        </p:txBody>
+      </p:sp>
+      <p:sp>
+        <p:nvSpPr>
+          <p:cNvPr id="28" name="Text 26"/>
+          <p:cNvSpPr/>
+          <p:nvPr/>
+        </p:nvSpPr>
+        <p:spPr>
+          <a:xfrm>
+            <a:off x="4983480" y="3350221"/>
+            <a:ext cx="3474720" cy="219456"/>
+          </a:xfrm>
+          <a:prstGeom prst="rect">
+            <a:avLst/>
+          </a:prstGeom>
+          <a:noFill/>
+          <a:ln/>
+        </p:spPr>
+        <p:txBody>
+          <a:bodyPr wrap="square" lIns="0" tIns="0" rIns="0" bIns="0" rtlCol="0" anchor="ctr"/>
+          <a:lstStyle/>
+          <a:p>
+            <a:pPr marL="0" indent="0" algn="l">
+              <a:buNone/>
+            </a:pPr>
+            <a:r>
+              <a:rPr lang="en-US" sz="1100" dirty="0">
+                <a:solidFill>
+                  <a:srgbClr val="D0D7E8"/>
+                </a:solidFill>
+                <a:latin typeface="Consolas" pitchFamily="34" charset="0"/>
+                <a:ea typeface="Consolas" pitchFamily="34" charset="-122"/>
+                <a:cs typeface="Consolas" pitchFamily="34" charset="-120"/>
+              </a:rPr>
+              <a:t>· id</a:t>
+            </a:r>
+            <a:endParaRPr lang="en-US" sz="1100" dirty="0"/>
+          </a:p>
+        </p:txBody>
+      </p:sp>
+      <p:sp>
+        <p:nvSpPr>
+          <p:cNvPr id="29" name="Text 27"/>
+          <p:cNvSpPr/>
+          <p:nvPr/>
+        </p:nvSpPr>
+        <p:spPr>
+          <a:xfrm>
+            <a:off x="4983480" y="3569677"/>
+            <a:ext cx="3474720" cy="219456"/>
+          </a:xfrm>
+          <a:prstGeom prst="rect">
+            <a:avLst/>
+          </a:prstGeom>
+          <a:noFill/>
+          <a:ln/>
+        </p:spPr>
+        <p:txBody>
+          <a:bodyPr wrap="square" lIns="0" tIns="0" rIns="0" bIns="0" rtlCol="0" anchor="ctr"/>
+          <a:lstStyle/>
+          <a:p>
+            <a:pPr marL="0" indent="0" algn="l">
+              <a:buNone/>
+            </a:pPr>
+            <a:r>
+              <a:rPr lang="en-US" sz="1100" dirty="0">
+                <a:solidFill>
+                  <a:srgbClr val="D0D7E8"/>
+                </a:solidFill>
+                <a:latin typeface="Consolas" pitchFamily="34" charset="0"/>
+                <a:ea typeface="Consolas" pitchFamily="34" charset="-122"/>
+                <a:cs typeface="Consolas" pitchFamily="34" charset="-120"/>
+              </a:rPr>
+              <a:t>· user_id (FK)</a:t>
+            </a:r>
+            <a:endParaRPr lang="en-US" sz="1100" dirty="0"/>
+          </a:p>
+        </p:txBody>
+      </p:sp>
+      <p:sp>
+        <p:nvSpPr>
+          <p:cNvPr id="30" name="Text 28"/>
+          <p:cNvSpPr/>
+          <p:nvPr/>
+        </p:nvSpPr>
+        <p:spPr>
+          <a:xfrm>
+            <a:off x="4983480" y="3803904"/>
+            <a:ext cx="3474720" cy="219456"/>
+          </a:xfrm>
+          <a:prstGeom prst="rect">
+            <a:avLst/>
+          </a:prstGeom>
+          <a:noFill/>
+          <a:ln/>
+        </p:spPr>
+        <p:txBody>
+          <a:bodyPr wrap="square" lIns="0" tIns="0" rIns="0" bIns="0" rtlCol="0" anchor="ctr"/>
+          <a:lstStyle/>
+          <a:p>
+            <a:pPr marL="0" indent="0" algn="l">
+              <a:buNone/>
+            </a:pPr>
+            <a:r>
+              <a:rPr lang="en-US" sz="1100" dirty="0">
+                <a:solidFill>
+                  <a:srgbClr val="D0D7E8"/>
+                </a:solidFill>
+                <a:latin typeface="Consolas" pitchFamily="34" charset="0"/>
+                <a:ea typeface="Consolas" pitchFamily="34" charset="-122"/>
+                <a:cs typeface="Consolas" pitchFamily="34" charset="-120"/>
+              </a:rPr>
+              <a:t>· game</a:t>
+            </a:r>
+            <a:endParaRPr lang="en-US" sz="1100" dirty="0"/>
+          </a:p>
+        </p:txBody>
+      </p:sp>
+      <p:sp>
+        <p:nvSpPr>
+          <p:cNvPr id="31" name="Text 29"/>
+          <p:cNvSpPr/>
+          <p:nvPr/>
+        </p:nvSpPr>
+        <p:spPr>
+          <a:xfrm>
+            <a:off x="4983480" y="4027932"/>
+            <a:ext cx="3474720" cy="219456"/>
+          </a:xfrm>
+          <a:prstGeom prst="rect">
+            <a:avLst/>
+          </a:prstGeom>
+          <a:noFill/>
+          <a:ln/>
+        </p:spPr>
+        <p:txBody>
+          <a:bodyPr wrap="square" lIns="0" tIns="0" rIns="0" bIns="0" rtlCol="0" anchor="ctr"/>
+          <a:lstStyle/>
+          <a:p>
+            <a:pPr marL="0" indent="0" algn="l">
+              <a:buNone/>
+            </a:pPr>
+            <a:r>
+              <a:rPr lang="en-US" sz="1100" dirty="0">
+                <a:solidFill>
+                  <a:srgbClr val="D0D7E8"/>
+                </a:solidFill>
+                <a:latin typeface="Consolas" pitchFamily="34" charset="0"/>
+                <a:ea typeface="Consolas" pitchFamily="34" charset="-122"/>
+                <a:cs typeface="Consolas" pitchFamily="34" charset="-120"/>
+              </a:rPr>
+              <a:t>· difficulty</a:t>
+            </a:r>
+            <a:endParaRPr lang="en-US" sz="1100" dirty="0"/>
+          </a:p>
+        </p:txBody>
+      </p:sp>
+      <p:sp>
+        <p:nvSpPr>
+          <p:cNvPr id="32" name="Text 30"/>
+          <p:cNvSpPr/>
+          <p:nvPr/>
+        </p:nvSpPr>
+        <p:spPr>
+          <a:xfrm>
+            <a:off x="4983480" y="4230858"/>
+            <a:ext cx="3474720" cy="219456"/>
+          </a:xfrm>
+          <a:prstGeom prst="rect">
+            <a:avLst/>
+          </a:prstGeom>
+          <a:noFill/>
+          <a:ln/>
+        </p:spPr>
+        <p:txBody>
+          <a:bodyPr wrap="square" lIns="0" tIns="0" rIns="0" bIns="0" rtlCol="0" anchor="ctr"/>
+          <a:lstStyle/>
+          <a:p>
+            <a:pPr marL="0" indent="0" algn="l">
+              <a:buNone/>
+            </a:pPr>
+            <a:r>
+              <a:rPr lang="en-US" sz="1100" dirty="0">
+                <a:solidFill>
+                  <a:srgbClr val="D0D7E8"/>
+                </a:solidFill>
+                <a:latin typeface="Consolas" pitchFamily="34" charset="0"/>
+                <a:ea typeface="Consolas" pitchFamily="34" charset="-122"/>
+                <a:cs typeface="Consolas" pitchFamily="34" charset="-120"/>
+              </a:rPr>
+              <a:t>· won</a:t>
+            </a:r>
+            <a:endParaRPr lang="en-US" sz="1100" dirty="0"/>
+          </a:p>
+        </p:txBody>
+      </p:sp>
+      <p:sp>
+        <p:nvSpPr>
+          <p:cNvPr id="33" name="Text 31"/>
+          <p:cNvSpPr/>
+          <p:nvPr/>
+        </p:nvSpPr>
+        <p:spPr>
+          <a:xfrm>
+            <a:off x="4983480" y="4450314"/>
+            <a:ext cx="3474720" cy="219456"/>
+          </a:xfrm>
+          <a:prstGeom prst="rect">
+            <a:avLst/>
+          </a:prstGeom>
+          <a:noFill/>
+          <a:ln/>
+        </p:spPr>
+        <p:txBody>
+          <a:bodyPr wrap="square" lIns="0" tIns="0" rIns="0" bIns="0" rtlCol="0" anchor="ctr"/>
+          <a:lstStyle/>
+          <a:p>
+            <a:pPr marL="0" indent="0" algn="l">
+              <a:buNone/>
+            </a:pPr>
+            <a:r>
+              <a:rPr lang="en-US" sz="1100" dirty="0">
+                <a:solidFill>
+                  <a:srgbClr val="D0D7E8"/>
+                </a:solidFill>
+                <a:latin typeface="Consolas" pitchFamily="34" charset="0"/>
+                <a:ea typeface="Consolas" pitchFamily="34" charset="-122"/>
+                <a:cs typeface="Consolas" pitchFamily="34" charset="-120"/>
+              </a:rPr>
+              <a:t>· played_at</a:t>
+            </a:r>
+            <a:endParaRPr lang="en-US" sz="1100" dirty="0"/>
+          </a:p>
+        </p:txBody>
+      </p:sp>
+      <p:sp>
+        <p:nvSpPr>
+          <p:cNvPr id="34" name="Textfeld 33">
+            <a:extLst>
+              <a:ext uri="{FF2B5EF4-FFF2-40B4-BE49-F238E27FC236}">
+                <a16:creationId xmlns:a16="http://schemas.microsoft.com/office/drawing/2014/main" id="{7E5C661B-4881-D1FC-50EB-6ADE5EC2C3EA}"/>
+              </a:ext>
+            </a:extLst>
+          </p:cNvPr>
+          <p:cNvSpPr txBox="1"/>
+          <p:nvPr/>
+        </p:nvSpPr>
+        <p:spPr>
+          <a:xfrm>
+            <a:off x="8641080" y="4875028"/>
+            <a:ext cx="324613" cy="215444"/>
+          </a:xfrm>
+          <a:prstGeom prst="rect">
+            <a:avLst/>
+          </a:prstGeom>
+          <a:noFill/>
+        </p:spPr>
+        <p:txBody>
+          <a:bodyPr wrap="square" rtlCol="0">
+            <a:spAutoFit/>
+          </a:bodyPr>
+          <a:lstStyle/>
+          <a:p>
+            <a:r>
+              <a:rPr lang="en-US" sz="800" dirty="0">
+                <a:solidFill>
+                  <a:srgbClr val="E94560"/>
+                </a:solidFill>
+                <a:latin typeface="Calibri" pitchFamily="34" charset="0"/>
+                <a:ea typeface="Calibri" pitchFamily="34" charset="-122"/>
+                <a:cs typeface="Calibri" pitchFamily="34" charset="-120"/>
+              </a:rPr>
+              <a:t>13</a:t>
+            </a:r>
+            <a:endParaRPr lang="de-DE" sz="800" dirty="0"/>
+          </a:p>
+        </p:txBody>
+      </p:sp>
+    </p:spTree>
+  </p:cSld>
+  <p:clrMapOvr>
+    <a:masterClrMapping/>
+  </p:clrMapOvr>
+</p:sld>
+</file>
+
+<file path=ppt/slides/slide6.xml><?xml version="1.0" encoding="utf-8"?>
+<p:sld xmlns:a="http://schemas.openxmlformats.org/drawingml/2006/main" xmlns:r="http://schemas.openxmlformats.org/officeDocument/2006/relationships" xmlns:p="http://schemas.openxmlformats.org/presentationml/2006/main">
   <p:cSld>
     <p:bg>
       <p:bgPr>
@@ -14009,7 +15584,7 @@
 </p:sld>
 </file>
 
-<file path=ppt/slides/slide6.xml><?xml version="1.0" encoding="utf-8"?>
+<file path=ppt/slides/slide7.xml><?xml version="1.0" encoding="utf-8"?>
 <p:sld xmlns:a="http://schemas.openxmlformats.org/drawingml/2006/main" xmlns:r="http://schemas.openxmlformats.org/officeDocument/2006/relationships" xmlns:p="http://schemas.openxmlformats.org/presentationml/2006/main">
   <p:cSld name="Slide 4">
     <p:bg>
@@ -15444,7 +17019,7 @@
 </p:sld>
 </file>
 
-<file path=ppt/slides/slide7.xml><?xml version="1.0" encoding="utf-8"?>
+<file path=ppt/slides/slide8.xml><?xml version="1.0" encoding="utf-8"?>
 <p:sld xmlns:a="http://schemas.openxmlformats.org/drawingml/2006/main" xmlns:r="http://schemas.openxmlformats.org/officeDocument/2006/relationships" xmlns:p="http://schemas.openxmlformats.org/presentationml/2006/main">
   <p:cSld>
     <p:bg>
@@ -16509,7 +18084,7 @@
 </p:sld>
 </file>
 
-<file path=ppt/slides/slide8.xml><?xml version="1.0" encoding="utf-8"?>
+<file path=ppt/slides/slide9.xml><?xml version="1.0" encoding="utf-8"?>
 <p:sld xmlns:a="http://schemas.openxmlformats.org/drawingml/2006/main" xmlns:r="http://schemas.openxmlformats.org/officeDocument/2006/relationships" xmlns:p="http://schemas.openxmlformats.org/presentationml/2006/main">
   <p:cSld name="Slide 5">
     <p:bg>
@@ -18842,1581 +20417,6 @@
                 <a:cs typeface="Calibri" pitchFamily="34" charset="-120"/>
               </a:rPr>
               <a:t>8</a:t>
-            </a:r>
-            <a:endParaRPr lang="de-DE" sz="800" dirty="0"/>
-          </a:p>
-        </p:txBody>
-      </p:sp>
-    </p:spTree>
-  </p:cSld>
-  <p:clrMapOvr>
-    <a:masterClrMapping/>
-  </p:clrMapOvr>
-</p:sld>
-</file>
-
-<file path=ppt/slides/slide9.xml><?xml version="1.0" encoding="utf-8"?>
-<p:sld xmlns:a="http://schemas.openxmlformats.org/drawingml/2006/main" xmlns:r="http://schemas.openxmlformats.org/officeDocument/2006/relationships" xmlns:p="http://schemas.openxmlformats.org/presentationml/2006/main">
-  <p:cSld>
-    <p:bg>
-      <p:bgPr>
-        <a:solidFill>
-          <a:srgbClr val="0D0D1A"/>
-        </a:solidFill>
-        <a:effectLst/>
-      </p:bgPr>
-    </p:bg>
-    <p:spTree>
-      <p:nvGrpSpPr>
-        <p:cNvPr id="1" name=""/>
-        <p:cNvGrpSpPr/>
-        <p:nvPr/>
-      </p:nvGrpSpPr>
-      <p:grpSpPr>
-        <a:xfrm>
-          <a:off x="0" y="0"/>
-          <a:ext cx="0" cy="0"/>
-          <a:chOff x="0" y="0"/>
-          <a:chExt cx="0" cy="0"/>
-        </a:xfrm>
-      </p:grpSpPr>
-      <p:sp>
-        <p:nvSpPr>
-          <p:cNvPr id="2" name="AccentStripe"/>
-          <p:cNvSpPr/>
-          <p:nvPr/>
-        </p:nvSpPr>
-        <p:spPr>
-          <a:xfrm>
-            <a:off x="0" y="0"/>
-            <a:ext cx="91440" cy="5143500"/>
-          </a:xfrm>
-          <a:prstGeom prst="rect">
-            <a:avLst/>
-          </a:prstGeom>
-          <a:solidFill>
-            <a:srgbClr val="E94560"/>
-          </a:solidFill>
-        </p:spPr>
-        <p:txBody>
-          <a:bodyPr/>
-          <a:lstStyle/>
-          <a:p>
-            <a:endParaRPr lang="de-DE"/>
-          </a:p>
-        </p:txBody>
-      </p:sp>
-      <p:sp>
-        <p:nvSpPr>
-          <p:cNvPr id="3" name="Title"/>
-          <p:cNvSpPr/>
-          <p:nvPr/>
-        </p:nvSpPr>
-        <p:spPr>
-          <a:xfrm>
-            <a:off x="457200" y="256032"/>
-            <a:ext cx="8229600" cy="594360"/>
-          </a:xfrm>
-          <a:prstGeom prst="rect">
-            <a:avLst/>
-          </a:prstGeom>
-          <a:noFill/>
-          <a:ln/>
-        </p:spPr>
-        <p:txBody>
-          <a:bodyPr wrap="square" lIns="114300" tIns="91440" rIns="114300" bIns="91440" rtlCol="0" anchor="ctr"/>
-          <a:lstStyle/>
-          <a:p>
-            <a:pPr marL="0" indent="0" algn="l">
-              <a:buNone/>
-            </a:pPr>
-            <a:r>
-              <a:rPr lang="de-DE" sz="2800" b="1" dirty="0">
-                <a:solidFill>
-                  <a:srgbClr val="FFFFFF"/>
-                </a:solidFill>
-                <a:latin typeface="Arial Black" pitchFamily="49" charset="0"/>
-              </a:rPr>
-              <a:t>pawn_chess.py </a:t>
-            </a:r>
-          </a:p>
-        </p:txBody>
-      </p:sp>
-      <p:sp>
-        <p:nvSpPr>
-          <p:cNvPr id="4" name="Subtitle"/>
-          <p:cNvSpPr/>
-          <p:nvPr/>
-        </p:nvSpPr>
-        <p:spPr>
-          <a:xfrm>
-            <a:off x="457200" y="804672"/>
-            <a:ext cx="8229600" cy="320040"/>
-          </a:xfrm>
-          <a:prstGeom prst="rect">
-            <a:avLst/>
-          </a:prstGeom>
-          <a:noFill/>
-          <a:ln/>
-        </p:spPr>
-        <p:txBody>
-          <a:bodyPr wrap="square" lIns="114300" tIns="91440" rIns="114300" bIns="91440" rtlCol="0" anchor="ctr"/>
-          <a:lstStyle/>
-          <a:p>
-            <a:pPr marL="0" indent="0" algn="l">
-              <a:buNone/>
-            </a:pPr>
-            <a:r>
-              <a:rPr lang="de-DE" sz="1200" dirty="0">
-                <a:solidFill>
-                  <a:srgbClr val="8892A4"/>
-                </a:solidFill>
-                <a:latin typeface="Calibri" pitchFamily="49" charset="0"/>
-              </a:rPr>
-              <a:t>Heuristik: Figurenzahl · Fortschritt · Zentrumskontrolle</a:t>
-            </a:r>
-          </a:p>
-        </p:txBody>
-      </p:sp>
-      <p:sp>
-        <p:nvSpPr>
-          <p:cNvPr id="5" name="CodeCard"/>
-          <p:cNvSpPr/>
-          <p:nvPr/>
-        </p:nvSpPr>
-        <p:spPr>
-          <a:xfrm>
-            <a:off x="365760" y="1234440"/>
-            <a:ext cx="5250000" cy="3650000"/>
-          </a:xfrm>
-          <a:prstGeom prst="rect">
-            <a:avLst/>
-          </a:prstGeom>
-          <a:solidFill>
-            <a:srgbClr val="121224"/>
-          </a:solidFill>
-          <a:ln w="9525">
-            <a:solidFill>
-              <a:srgbClr val="4472C4"/>
-            </a:solidFill>
-            <a:prstDash val="solid"/>
-          </a:ln>
-        </p:spPr>
-        <p:txBody>
-          <a:bodyPr/>
-          <a:lstStyle/>
-          <a:p>
-            <a:endParaRPr lang="de-DE"/>
-          </a:p>
-        </p:txBody>
-      </p:sp>
-      <p:sp>
-        <p:nvSpPr>
-          <p:cNvPr id="6" name="CodeText"/>
-          <p:cNvSpPr/>
-          <p:nvPr/>
-        </p:nvSpPr>
-        <p:spPr>
-          <a:xfrm>
-            <a:off x="457200" y="1325880"/>
-            <a:ext cx="5067120" cy="3467120"/>
-          </a:xfrm>
-          <a:prstGeom prst="rect">
-            <a:avLst/>
-          </a:prstGeom>
-          <a:noFill/>
-          <a:ln/>
-        </p:spPr>
-        <p:txBody>
-          <a:bodyPr wrap="square" lIns="114300" tIns="91440" rIns="114300" bIns="91440" rtlCol="0" anchor="t"/>
-          <a:lstStyle/>
-          <a:p>
-            <a:pPr marL="0" indent="0" algn="l">
-              <a:buNone/>
-            </a:pPr>
-            <a:r>
-              <a:rPr lang="de-DE" sz="980" i="1" dirty="0">
-                <a:solidFill>
-                  <a:srgbClr val="5C6370"/>
-                </a:solidFill>
-                <a:latin typeface="Consolas" pitchFamily="49" charset="0"/>
-              </a:rPr>
-              <a:t># Zentrums-Bonus-Matrix (Mitte ist wertvoller)</a:t>
-            </a:r>
-          </a:p>
-          <a:p>
-            <a:pPr marL="0" indent="0" algn="l">
-              <a:buNone/>
-            </a:pPr>
-            <a:r>
-              <a:rPr lang="de-DE" sz="980" dirty="0">
-                <a:solidFill>
-                  <a:srgbClr val="61AFEF"/>
-                </a:solidFill>
-                <a:latin typeface="Consolas" pitchFamily="49" charset="0"/>
-              </a:rPr>
-              <a:t>CENTER_BONUS</a:t>
-            </a:r>
-            <a:r>
-              <a:rPr lang="de-DE" sz="980" dirty="0">
-                <a:solidFill>
-                  <a:srgbClr val="ABB2BF"/>
-                </a:solidFill>
-                <a:latin typeface="Consolas" pitchFamily="49" charset="0"/>
-              </a:rPr>
-              <a:t> = [</a:t>
-            </a:r>
-          </a:p>
-          <a:p>
-            <a:pPr marL="0" indent="0" algn="l">
-              <a:buNone/>
-            </a:pPr>
-            <a:r>
-              <a:rPr lang="de-DE" sz="980" dirty="0">
-                <a:solidFill>
-                  <a:srgbClr val="ABB2BF"/>
-                </a:solidFill>
-                <a:latin typeface="Consolas" pitchFamily="49" charset="0"/>
-              </a:rPr>
-              <a:t>    [</a:t>
-            </a:r>
-            <a:r>
-              <a:rPr lang="de-DE" sz="980" dirty="0">
-                <a:solidFill>
-                  <a:srgbClr val="98C379"/>
-                </a:solidFill>
-                <a:latin typeface="Consolas" pitchFamily="49" charset="0"/>
-              </a:rPr>
-              <a:t>0</a:t>
-            </a:r>
-            <a:r>
-              <a:rPr lang="de-DE" sz="980" dirty="0">
-                <a:solidFill>
-                  <a:srgbClr val="ABB2BF"/>
-                </a:solidFill>
-                <a:latin typeface="Consolas" pitchFamily="49" charset="0"/>
-              </a:rPr>
-              <a:t>, </a:t>
-            </a:r>
-            <a:r>
-              <a:rPr lang="de-DE" sz="980" dirty="0">
-                <a:solidFill>
-                  <a:srgbClr val="98C379"/>
-                </a:solidFill>
-                <a:latin typeface="Consolas" pitchFamily="49" charset="0"/>
-              </a:rPr>
-              <a:t>0</a:t>
-            </a:r>
-            <a:r>
-              <a:rPr lang="de-DE" sz="980" dirty="0">
-                <a:solidFill>
-                  <a:srgbClr val="ABB2BF"/>
-                </a:solidFill>
-                <a:latin typeface="Consolas" pitchFamily="49" charset="0"/>
-              </a:rPr>
-              <a:t>, </a:t>
-            </a:r>
-            <a:r>
-              <a:rPr lang="de-DE" sz="980" dirty="0">
-                <a:solidFill>
-                  <a:srgbClr val="98C379"/>
-                </a:solidFill>
-                <a:latin typeface="Consolas" pitchFamily="49" charset="0"/>
-              </a:rPr>
-              <a:t>0</a:t>
-            </a:r>
-            <a:r>
-              <a:rPr lang="de-DE" sz="980" dirty="0">
-                <a:solidFill>
-                  <a:srgbClr val="ABB2BF"/>
-                </a:solidFill>
-                <a:latin typeface="Consolas" pitchFamily="49" charset="0"/>
-              </a:rPr>
-              <a:t>, </a:t>
-            </a:r>
-            <a:r>
-              <a:rPr lang="de-DE" sz="980" dirty="0">
-                <a:solidFill>
-                  <a:srgbClr val="98C379"/>
-                </a:solidFill>
-                <a:latin typeface="Consolas" pitchFamily="49" charset="0"/>
-              </a:rPr>
-              <a:t>0</a:t>
-            </a:r>
-            <a:r>
-              <a:rPr lang="de-DE" sz="980" dirty="0">
-                <a:solidFill>
-                  <a:srgbClr val="ABB2BF"/>
-                </a:solidFill>
-                <a:latin typeface="Consolas" pitchFamily="49" charset="0"/>
-              </a:rPr>
-              <a:t>, </a:t>
-            </a:r>
-            <a:r>
-              <a:rPr lang="de-DE" sz="980" dirty="0">
-                <a:solidFill>
-                  <a:srgbClr val="98C379"/>
-                </a:solidFill>
-                <a:latin typeface="Consolas" pitchFamily="49" charset="0"/>
-              </a:rPr>
-              <a:t>0</a:t>
-            </a:r>
-            <a:r>
-              <a:rPr lang="de-DE" sz="980" dirty="0">
-                <a:solidFill>
-                  <a:srgbClr val="ABB2BF"/>
-                </a:solidFill>
-                <a:latin typeface="Consolas" pitchFamily="49" charset="0"/>
-              </a:rPr>
-              <a:t>, </a:t>
-            </a:r>
-            <a:r>
-              <a:rPr lang="de-DE" sz="980" dirty="0">
-                <a:solidFill>
-                  <a:srgbClr val="98C379"/>
-                </a:solidFill>
-                <a:latin typeface="Consolas" pitchFamily="49" charset="0"/>
-              </a:rPr>
-              <a:t>0</a:t>
-            </a:r>
-            <a:r>
-              <a:rPr lang="de-DE" sz="980" dirty="0">
-                <a:solidFill>
-                  <a:srgbClr val="ABB2BF"/>
-                </a:solidFill>
-                <a:latin typeface="Consolas" pitchFamily="49" charset="0"/>
-              </a:rPr>
-              <a:t>],</a:t>
-            </a:r>
-          </a:p>
-          <a:p>
-            <a:pPr marL="0" indent="0" algn="l">
-              <a:buNone/>
-            </a:pPr>
-            <a:r>
-              <a:rPr lang="de-DE" sz="980" dirty="0">
-                <a:solidFill>
-                  <a:srgbClr val="ABB2BF"/>
-                </a:solidFill>
-                <a:latin typeface="Consolas" pitchFamily="49" charset="0"/>
-              </a:rPr>
-              <a:t>    [</a:t>
-            </a:r>
-            <a:r>
-              <a:rPr lang="de-DE" sz="980" dirty="0">
-                <a:solidFill>
-                  <a:srgbClr val="98C379"/>
-                </a:solidFill>
-                <a:latin typeface="Consolas" pitchFamily="49" charset="0"/>
-              </a:rPr>
-              <a:t>0</a:t>
-            </a:r>
-            <a:r>
-              <a:rPr lang="de-DE" sz="980" dirty="0">
-                <a:solidFill>
-                  <a:srgbClr val="ABB2BF"/>
-                </a:solidFill>
-                <a:latin typeface="Consolas" pitchFamily="49" charset="0"/>
-              </a:rPr>
-              <a:t>, </a:t>
-            </a:r>
-            <a:r>
-              <a:rPr lang="de-DE" sz="980" dirty="0">
-                <a:solidFill>
-                  <a:srgbClr val="98C379"/>
-                </a:solidFill>
-                <a:latin typeface="Consolas" pitchFamily="49" charset="0"/>
-              </a:rPr>
-              <a:t>1</a:t>
-            </a:r>
-            <a:r>
-              <a:rPr lang="de-DE" sz="980" dirty="0">
-                <a:solidFill>
-                  <a:srgbClr val="ABB2BF"/>
-                </a:solidFill>
-                <a:latin typeface="Consolas" pitchFamily="49" charset="0"/>
-              </a:rPr>
-              <a:t>, </a:t>
-            </a:r>
-            <a:r>
-              <a:rPr lang="de-DE" sz="980" dirty="0">
-                <a:solidFill>
-                  <a:srgbClr val="98C379"/>
-                </a:solidFill>
-                <a:latin typeface="Consolas" pitchFamily="49" charset="0"/>
-              </a:rPr>
-              <a:t>1</a:t>
-            </a:r>
-            <a:r>
-              <a:rPr lang="de-DE" sz="980" dirty="0">
-                <a:solidFill>
-                  <a:srgbClr val="ABB2BF"/>
-                </a:solidFill>
-                <a:latin typeface="Consolas" pitchFamily="49" charset="0"/>
-              </a:rPr>
-              <a:t>, </a:t>
-            </a:r>
-            <a:r>
-              <a:rPr lang="de-DE" sz="980" dirty="0">
-                <a:solidFill>
-                  <a:srgbClr val="98C379"/>
-                </a:solidFill>
-                <a:latin typeface="Consolas" pitchFamily="49" charset="0"/>
-              </a:rPr>
-              <a:t>1</a:t>
-            </a:r>
-            <a:r>
-              <a:rPr lang="de-DE" sz="980" dirty="0">
-                <a:solidFill>
-                  <a:srgbClr val="ABB2BF"/>
-                </a:solidFill>
-                <a:latin typeface="Consolas" pitchFamily="49" charset="0"/>
-              </a:rPr>
-              <a:t>, </a:t>
-            </a:r>
-            <a:r>
-              <a:rPr lang="de-DE" sz="980" dirty="0">
-                <a:solidFill>
-                  <a:srgbClr val="98C379"/>
-                </a:solidFill>
-                <a:latin typeface="Consolas" pitchFamily="49" charset="0"/>
-              </a:rPr>
-              <a:t>1</a:t>
-            </a:r>
-            <a:r>
-              <a:rPr lang="de-DE" sz="980" dirty="0">
-                <a:solidFill>
-                  <a:srgbClr val="ABB2BF"/>
-                </a:solidFill>
-                <a:latin typeface="Consolas" pitchFamily="49" charset="0"/>
-              </a:rPr>
-              <a:t>, </a:t>
-            </a:r>
-            <a:r>
-              <a:rPr lang="de-DE" sz="980" dirty="0">
-                <a:solidFill>
-                  <a:srgbClr val="98C379"/>
-                </a:solidFill>
-                <a:latin typeface="Consolas" pitchFamily="49" charset="0"/>
-              </a:rPr>
-              <a:t>0</a:t>
-            </a:r>
-            <a:r>
-              <a:rPr lang="de-DE" sz="980" dirty="0">
-                <a:solidFill>
-                  <a:srgbClr val="ABB2BF"/>
-                </a:solidFill>
-                <a:latin typeface="Consolas" pitchFamily="49" charset="0"/>
-              </a:rPr>
-              <a:t>],</a:t>
-            </a:r>
-          </a:p>
-          <a:p>
-            <a:pPr marL="0" indent="0" algn="l">
-              <a:buNone/>
-            </a:pPr>
-            <a:r>
-              <a:rPr lang="de-DE" sz="980" dirty="0">
-                <a:solidFill>
-                  <a:srgbClr val="ABB2BF"/>
-                </a:solidFill>
-                <a:latin typeface="Consolas" pitchFamily="49" charset="0"/>
-              </a:rPr>
-              <a:t>    [</a:t>
-            </a:r>
-            <a:r>
-              <a:rPr lang="de-DE" sz="980" dirty="0">
-                <a:solidFill>
-                  <a:srgbClr val="98C379"/>
-                </a:solidFill>
-                <a:latin typeface="Consolas" pitchFamily="49" charset="0"/>
-              </a:rPr>
-              <a:t>0</a:t>
-            </a:r>
-            <a:r>
-              <a:rPr lang="de-DE" sz="980" dirty="0">
-                <a:solidFill>
-                  <a:srgbClr val="ABB2BF"/>
-                </a:solidFill>
-                <a:latin typeface="Consolas" pitchFamily="49" charset="0"/>
-              </a:rPr>
-              <a:t>, </a:t>
-            </a:r>
-            <a:r>
-              <a:rPr lang="de-DE" sz="980" dirty="0">
-                <a:solidFill>
-                  <a:srgbClr val="98C379"/>
-                </a:solidFill>
-                <a:latin typeface="Consolas" pitchFamily="49" charset="0"/>
-              </a:rPr>
-              <a:t>1</a:t>
-            </a:r>
-            <a:r>
-              <a:rPr lang="de-DE" sz="980" dirty="0">
-                <a:solidFill>
-                  <a:srgbClr val="ABB2BF"/>
-                </a:solidFill>
-                <a:latin typeface="Consolas" pitchFamily="49" charset="0"/>
-              </a:rPr>
-              <a:t>, </a:t>
-            </a:r>
-            <a:r>
-              <a:rPr lang="de-DE" sz="980" dirty="0">
-                <a:solidFill>
-                  <a:srgbClr val="98C379"/>
-                </a:solidFill>
-                <a:latin typeface="Consolas" pitchFamily="49" charset="0"/>
-              </a:rPr>
-              <a:t>3</a:t>
-            </a:r>
-            <a:r>
-              <a:rPr lang="de-DE" sz="980" dirty="0">
-                <a:solidFill>
-                  <a:srgbClr val="ABB2BF"/>
-                </a:solidFill>
-                <a:latin typeface="Consolas" pitchFamily="49" charset="0"/>
-              </a:rPr>
-              <a:t>, </a:t>
-            </a:r>
-            <a:r>
-              <a:rPr lang="de-DE" sz="980" dirty="0">
-                <a:solidFill>
-                  <a:srgbClr val="98C379"/>
-                </a:solidFill>
-                <a:latin typeface="Consolas" pitchFamily="49" charset="0"/>
-              </a:rPr>
-              <a:t>3</a:t>
-            </a:r>
-            <a:r>
-              <a:rPr lang="de-DE" sz="980" dirty="0">
-                <a:solidFill>
-                  <a:srgbClr val="ABB2BF"/>
-                </a:solidFill>
-                <a:latin typeface="Consolas" pitchFamily="49" charset="0"/>
-              </a:rPr>
-              <a:t>, </a:t>
-            </a:r>
-            <a:r>
-              <a:rPr lang="de-DE" sz="980" dirty="0">
-                <a:solidFill>
-                  <a:srgbClr val="98C379"/>
-                </a:solidFill>
-                <a:latin typeface="Consolas" pitchFamily="49" charset="0"/>
-              </a:rPr>
-              <a:t>1</a:t>
-            </a:r>
-            <a:r>
-              <a:rPr lang="de-DE" sz="980" dirty="0">
-                <a:solidFill>
-                  <a:srgbClr val="ABB2BF"/>
-                </a:solidFill>
-                <a:latin typeface="Consolas" pitchFamily="49" charset="0"/>
-              </a:rPr>
-              <a:t>, </a:t>
-            </a:r>
-            <a:r>
-              <a:rPr lang="de-DE" sz="980" dirty="0">
-                <a:solidFill>
-                  <a:srgbClr val="98C379"/>
-                </a:solidFill>
-                <a:latin typeface="Consolas" pitchFamily="49" charset="0"/>
-              </a:rPr>
-              <a:t>0</a:t>
-            </a:r>
-            <a:r>
-              <a:rPr lang="de-DE" sz="980" dirty="0">
-                <a:solidFill>
-                  <a:srgbClr val="ABB2BF"/>
-                </a:solidFill>
-                <a:latin typeface="Consolas" pitchFamily="49" charset="0"/>
-              </a:rPr>
-              <a:t>],</a:t>
-            </a:r>
-          </a:p>
-          <a:p>
-            <a:pPr marL="0" indent="0" algn="l">
-              <a:buNone/>
-            </a:pPr>
-            <a:r>
-              <a:rPr lang="de-DE" sz="980" dirty="0">
-                <a:solidFill>
-                  <a:srgbClr val="ABB2BF"/>
-                </a:solidFill>
-                <a:latin typeface="Consolas" pitchFamily="49" charset="0"/>
-              </a:rPr>
-              <a:t>    [</a:t>
-            </a:r>
-            <a:r>
-              <a:rPr lang="de-DE" sz="980" dirty="0">
-                <a:solidFill>
-                  <a:srgbClr val="98C379"/>
-                </a:solidFill>
-                <a:latin typeface="Consolas" pitchFamily="49" charset="0"/>
-              </a:rPr>
-              <a:t>0</a:t>
-            </a:r>
-            <a:r>
-              <a:rPr lang="de-DE" sz="980" dirty="0">
-                <a:solidFill>
-                  <a:srgbClr val="ABB2BF"/>
-                </a:solidFill>
-                <a:latin typeface="Consolas" pitchFamily="49" charset="0"/>
-              </a:rPr>
-              <a:t>, </a:t>
-            </a:r>
-            <a:r>
-              <a:rPr lang="de-DE" sz="980" dirty="0">
-                <a:solidFill>
-                  <a:srgbClr val="98C379"/>
-                </a:solidFill>
-                <a:latin typeface="Consolas" pitchFamily="49" charset="0"/>
-              </a:rPr>
-              <a:t>1</a:t>
-            </a:r>
-            <a:r>
-              <a:rPr lang="de-DE" sz="980" dirty="0">
-                <a:solidFill>
-                  <a:srgbClr val="ABB2BF"/>
-                </a:solidFill>
-                <a:latin typeface="Consolas" pitchFamily="49" charset="0"/>
-              </a:rPr>
-              <a:t>, </a:t>
-            </a:r>
-            <a:r>
-              <a:rPr lang="de-DE" sz="980" dirty="0">
-                <a:solidFill>
-                  <a:srgbClr val="98C379"/>
-                </a:solidFill>
-                <a:latin typeface="Consolas" pitchFamily="49" charset="0"/>
-              </a:rPr>
-              <a:t>3</a:t>
-            </a:r>
-            <a:r>
-              <a:rPr lang="de-DE" sz="980" dirty="0">
-                <a:solidFill>
-                  <a:srgbClr val="ABB2BF"/>
-                </a:solidFill>
-                <a:latin typeface="Consolas" pitchFamily="49" charset="0"/>
-              </a:rPr>
-              <a:t>, </a:t>
-            </a:r>
-            <a:r>
-              <a:rPr lang="de-DE" sz="980" dirty="0">
-                <a:solidFill>
-                  <a:srgbClr val="98C379"/>
-                </a:solidFill>
-                <a:latin typeface="Consolas" pitchFamily="49" charset="0"/>
-              </a:rPr>
-              <a:t>3</a:t>
-            </a:r>
-            <a:r>
-              <a:rPr lang="de-DE" sz="980" dirty="0">
-                <a:solidFill>
-                  <a:srgbClr val="ABB2BF"/>
-                </a:solidFill>
-                <a:latin typeface="Consolas" pitchFamily="49" charset="0"/>
-              </a:rPr>
-              <a:t>, </a:t>
-            </a:r>
-            <a:r>
-              <a:rPr lang="de-DE" sz="980" dirty="0">
-                <a:solidFill>
-                  <a:srgbClr val="98C379"/>
-                </a:solidFill>
-                <a:latin typeface="Consolas" pitchFamily="49" charset="0"/>
-              </a:rPr>
-              <a:t>1</a:t>
-            </a:r>
-            <a:r>
-              <a:rPr lang="de-DE" sz="980" dirty="0">
-                <a:solidFill>
-                  <a:srgbClr val="ABB2BF"/>
-                </a:solidFill>
-                <a:latin typeface="Consolas" pitchFamily="49" charset="0"/>
-              </a:rPr>
-              <a:t>, </a:t>
-            </a:r>
-            <a:r>
-              <a:rPr lang="de-DE" sz="980" dirty="0">
-                <a:solidFill>
-                  <a:srgbClr val="98C379"/>
-                </a:solidFill>
-                <a:latin typeface="Consolas" pitchFamily="49" charset="0"/>
-              </a:rPr>
-              <a:t>0</a:t>
-            </a:r>
-            <a:r>
-              <a:rPr lang="de-DE" sz="980" dirty="0">
-                <a:solidFill>
-                  <a:srgbClr val="ABB2BF"/>
-                </a:solidFill>
-                <a:latin typeface="Consolas" pitchFamily="49" charset="0"/>
-              </a:rPr>
-              <a:t>],</a:t>
-            </a:r>
-          </a:p>
-          <a:p>
-            <a:pPr marL="0" indent="0" algn="l">
-              <a:buNone/>
-            </a:pPr>
-            <a:r>
-              <a:rPr lang="de-DE" sz="980" dirty="0">
-                <a:solidFill>
-                  <a:srgbClr val="ABB2BF"/>
-                </a:solidFill>
-                <a:latin typeface="Consolas" pitchFamily="49" charset="0"/>
-              </a:rPr>
-              <a:t>    [</a:t>
-            </a:r>
-            <a:r>
-              <a:rPr lang="de-DE" sz="980" dirty="0">
-                <a:solidFill>
-                  <a:srgbClr val="98C379"/>
-                </a:solidFill>
-                <a:latin typeface="Consolas" pitchFamily="49" charset="0"/>
-              </a:rPr>
-              <a:t>0</a:t>
-            </a:r>
-            <a:r>
-              <a:rPr lang="de-DE" sz="980" dirty="0">
-                <a:solidFill>
-                  <a:srgbClr val="ABB2BF"/>
-                </a:solidFill>
-                <a:latin typeface="Consolas" pitchFamily="49" charset="0"/>
-              </a:rPr>
-              <a:t>, </a:t>
-            </a:r>
-            <a:r>
-              <a:rPr lang="de-DE" sz="980" dirty="0">
-                <a:solidFill>
-                  <a:srgbClr val="98C379"/>
-                </a:solidFill>
-                <a:latin typeface="Consolas" pitchFamily="49" charset="0"/>
-              </a:rPr>
-              <a:t>1</a:t>
-            </a:r>
-            <a:r>
-              <a:rPr lang="de-DE" sz="980" dirty="0">
-                <a:solidFill>
-                  <a:srgbClr val="ABB2BF"/>
-                </a:solidFill>
-                <a:latin typeface="Consolas" pitchFamily="49" charset="0"/>
-              </a:rPr>
-              <a:t>, </a:t>
-            </a:r>
-            <a:r>
-              <a:rPr lang="de-DE" sz="980" dirty="0">
-                <a:solidFill>
-                  <a:srgbClr val="98C379"/>
-                </a:solidFill>
-                <a:latin typeface="Consolas" pitchFamily="49" charset="0"/>
-              </a:rPr>
-              <a:t>1</a:t>
-            </a:r>
-            <a:r>
-              <a:rPr lang="de-DE" sz="980" dirty="0">
-                <a:solidFill>
-                  <a:srgbClr val="ABB2BF"/>
-                </a:solidFill>
-                <a:latin typeface="Consolas" pitchFamily="49" charset="0"/>
-              </a:rPr>
-              <a:t>, </a:t>
-            </a:r>
-            <a:r>
-              <a:rPr lang="de-DE" sz="980" dirty="0">
-                <a:solidFill>
-                  <a:srgbClr val="98C379"/>
-                </a:solidFill>
-                <a:latin typeface="Consolas" pitchFamily="49" charset="0"/>
-              </a:rPr>
-              <a:t>1</a:t>
-            </a:r>
-            <a:r>
-              <a:rPr lang="de-DE" sz="980" dirty="0">
-                <a:solidFill>
-                  <a:srgbClr val="ABB2BF"/>
-                </a:solidFill>
-                <a:latin typeface="Consolas" pitchFamily="49" charset="0"/>
-              </a:rPr>
-              <a:t>, </a:t>
-            </a:r>
-            <a:r>
-              <a:rPr lang="de-DE" sz="980" dirty="0">
-                <a:solidFill>
-                  <a:srgbClr val="98C379"/>
-                </a:solidFill>
-                <a:latin typeface="Consolas" pitchFamily="49" charset="0"/>
-              </a:rPr>
-              <a:t>1</a:t>
-            </a:r>
-            <a:r>
-              <a:rPr lang="de-DE" sz="980" dirty="0">
-                <a:solidFill>
-                  <a:srgbClr val="ABB2BF"/>
-                </a:solidFill>
-                <a:latin typeface="Consolas" pitchFamily="49" charset="0"/>
-              </a:rPr>
-              <a:t>, </a:t>
-            </a:r>
-            <a:r>
-              <a:rPr lang="de-DE" sz="980" dirty="0">
-                <a:solidFill>
-                  <a:srgbClr val="98C379"/>
-                </a:solidFill>
-                <a:latin typeface="Consolas" pitchFamily="49" charset="0"/>
-              </a:rPr>
-              <a:t>0</a:t>
-            </a:r>
-            <a:r>
-              <a:rPr lang="de-DE" sz="980" dirty="0">
-                <a:solidFill>
-                  <a:srgbClr val="ABB2BF"/>
-                </a:solidFill>
-                <a:latin typeface="Consolas" pitchFamily="49" charset="0"/>
-              </a:rPr>
-              <a:t>],</a:t>
-            </a:r>
-          </a:p>
-          <a:p>
-            <a:pPr marL="0" indent="0" algn="l">
-              <a:buNone/>
-            </a:pPr>
-            <a:r>
-              <a:rPr lang="de-DE" sz="980" dirty="0">
-                <a:solidFill>
-                  <a:srgbClr val="ABB2BF"/>
-                </a:solidFill>
-                <a:latin typeface="Consolas" pitchFamily="49" charset="0"/>
-              </a:rPr>
-              <a:t>    [</a:t>
-            </a:r>
-            <a:r>
-              <a:rPr lang="de-DE" sz="980" dirty="0">
-                <a:solidFill>
-                  <a:srgbClr val="98C379"/>
-                </a:solidFill>
-                <a:latin typeface="Consolas" pitchFamily="49" charset="0"/>
-              </a:rPr>
-              <a:t>0</a:t>
-            </a:r>
-            <a:r>
-              <a:rPr lang="de-DE" sz="980" dirty="0">
-                <a:solidFill>
-                  <a:srgbClr val="ABB2BF"/>
-                </a:solidFill>
-                <a:latin typeface="Consolas" pitchFamily="49" charset="0"/>
-              </a:rPr>
-              <a:t>, </a:t>
-            </a:r>
-            <a:r>
-              <a:rPr lang="de-DE" sz="980" dirty="0">
-                <a:solidFill>
-                  <a:srgbClr val="98C379"/>
-                </a:solidFill>
-                <a:latin typeface="Consolas" pitchFamily="49" charset="0"/>
-              </a:rPr>
-              <a:t>0</a:t>
-            </a:r>
-            <a:r>
-              <a:rPr lang="de-DE" sz="980" dirty="0">
-                <a:solidFill>
-                  <a:srgbClr val="ABB2BF"/>
-                </a:solidFill>
-                <a:latin typeface="Consolas" pitchFamily="49" charset="0"/>
-              </a:rPr>
-              <a:t>, </a:t>
-            </a:r>
-            <a:r>
-              <a:rPr lang="de-DE" sz="980" dirty="0">
-                <a:solidFill>
-                  <a:srgbClr val="98C379"/>
-                </a:solidFill>
-                <a:latin typeface="Consolas" pitchFamily="49" charset="0"/>
-              </a:rPr>
-              <a:t>0</a:t>
-            </a:r>
-            <a:r>
-              <a:rPr lang="de-DE" sz="980" dirty="0">
-                <a:solidFill>
-                  <a:srgbClr val="ABB2BF"/>
-                </a:solidFill>
-                <a:latin typeface="Consolas" pitchFamily="49" charset="0"/>
-              </a:rPr>
-              <a:t>, </a:t>
-            </a:r>
-            <a:r>
-              <a:rPr lang="de-DE" sz="980" dirty="0">
-                <a:solidFill>
-                  <a:srgbClr val="98C379"/>
-                </a:solidFill>
-                <a:latin typeface="Consolas" pitchFamily="49" charset="0"/>
-              </a:rPr>
-              <a:t>0</a:t>
-            </a:r>
-            <a:r>
-              <a:rPr lang="de-DE" sz="980" dirty="0">
-                <a:solidFill>
-                  <a:srgbClr val="ABB2BF"/>
-                </a:solidFill>
-                <a:latin typeface="Consolas" pitchFamily="49" charset="0"/>
-              </a:rPr>
-              <a:t>, </a:t>
-            </a:r>
-            <a:r>
-              <a:rPr lang="de-DE" sz="980" dirty="0">
-                <a:solidFill>
-                  <a:srgbClr val="98C379"/>
-                </a:solidFill>
-                <a:latin typeface="Consolas" pitchFamily="49" charset="0"/>
-              </a:rPr>
-              <a:t>0</a:t>
-            </a:r>
-            <a:r>
-              <a:rPr lang="de-DE" sz="980" dirty="0">
-                <a:solidFill>
-                  <a:srgbClr val="ABB2BF"/>
-                </a:solidFill>
-                <a:latin typeface="Consolas" pitchFamily="49" charset="0"/>
-              </a:rPr>
-              <a:t>, </a:t>
-            </a:r>
-            <a:r>
-              <a:rPr lang="de-DE" sz="980" dirty="0">
-                <a:solidFill>
-                  <a:srgbClr val="98C379"/>
-                </a:solidFill>
-                <a:latin typeface="Consolas" pitchFamily="49" charset="0"/>
-              </a:rPr>
-              <a:t>0</a:t>
-            </a:r>
-            <a:r>
-              <a:rPr lang="de-DE" sz="980" dirty="0">
-                <a:solidFill>
-                  <a:srgbClr val="ABB2BF"/>
-                </a:solidFill>
-                <a:latin typeface="Consolas" pitchFamily="49" charset="0"/>
-              </a:rPr>
-              <a:t>],</a:t>
-            </a:r>
-          </a:p>
-          <a:p>
-            <a:pPr marL="0" indent="0" algn="l">
-              <a:buNone/>
-            </a:pPr>
-            <a:r>
-              <a:rPr lang="de-DE" sz="980" dirty="0">
-                <a:solidFill>
-                  <a:srgbClr val="ABB2BF"/>
-                </a:solidFill>
-                <a:latin typeface="Consolas" pitchFamily="49" charset="0"/>
-              </a:rPr>
-              <a:t>]</a:t>
-            </a:r>
-          </a:p>
-          <a:p>
-            <a:pPr>
-              <a:buNone/>
-            </a:pPr>
-            <a:endParaRPr lang="de-DE" sz="600" dirty="0"/>
-          </a:p>
-          <a:p>
-            <a:pPr marL="0" indent="0" algn="l">
-              <a:buNone/>
-            </a:pPr>
-            <a:r>
-              <a:rPr lang="de-DE" sz="980" dirty="0">
-                <a:solidFill>
-                  <a:srgbClr val="56B6C2"/>
-                </a:solidFill>
-                <a:latin typeface="Consolas" pitchFamily="49" charset="0"/>
-              </a:rPr>
-              <a:t>def</a:t>
-            </a:r>
-            <a:r>
-              <a:rPr lang="de-DE" sz="980" dirty="0">
-                <a:solidFill>
-                  <a:srgbClr val="ABB2BF"/>
-                </a:solidFill>
-                <a:latin typeface="Consolas" pitchFamily="49" charset="0"/>
-              </a:rPr>
-              <a:t> </a:t>
-            </a:r>
-            <a:r>
-              <a:rPr lang="de-DE" sz="980" dirty="0">
-                <a:solidFill>
-                  <a:srgbClr val="61AFEF"/>
-                </a:solidFill>
-                <a:latin typeface="Consolas" pitchFamily="49" charset="0"/>
-              </a:rPr>
-              <a:t>evaluate</a:t>
-            </a:r>
-            <a:r>
-              <a:rPr lang="de-DE" sz="980" dirty="0">
-                <a:solidFill>
-                  <a:srgbClr val="ABB2BF"/>
-                </a:solidFill>
-                <a:latin typeface="Consolas" pitchFamily="49" charset="0"/>
-              </a:rPr>
-              <a:t>(board):</a:t>
-            </a:r>
-          </a:p>
-          <a:p>
-            <a:pPr marL="0" indent="0" algn="l">
-              <a:buNone/>
-            </a:pPr>
-            <a:r>
-              <a:rPr lang="de-DE" sz="980" dirty="0">
-                <a:solidFill>
-                  <a:srgbClr val="ABB2BF"/>
-                </a:solidFill>
-                <a:latin typeface="Consolas" pitchFamily="49" charset="0"/>
-              </a:rPr>
-              <a:t>    score = </a:t>
-            </a:r>
-            <a:r>
-              <a:rPr lang="de-DE" sz="980" dirty="0">
-                <a:solidFill>
-                  <a:srgbClr val="98C379"/>
-                </a:solidFill>
-                <a:latin typeface="Consolas" pitchFamily="49" charset="0"/>
-              </a:rPr>
-              <a:t>0</a:t>
-            </a:r>
-          </a:p>
-          <a:p>
-            <a:pPr marL="0" indent="0" algn="l">
-              <a:buNone/>
-            </a:pPr>
-            <a:r>
-              <a:rPr lang="de-DE" sz="980" dirty="0">
-                <a:solidFill>
-                  <a:srgbClr val="56B6C2"/>
-                </a:solidFill>
-                <a:latin typeface="Consolas" pitchFamily="49" charset="0"/>
-              </a:rPr>
-              <a:t>    for</a:t>
-            </a:r>
-            <a:r>
-              <a:rPr lang="de-DE" sz="980" dirty="0">
-                <a:solidFill>
-                  <a:srgbClr val="ABB2BF"/>
-                </a:solidFill>
-                <a:latin typeface="Consolas" pitchFamily="49" charset="0"/>
-              </a:rPr>
-              <a:t> row, col, piece </a:t>
-            </a:r>
-            <a:r>
-              <a:rPr lang="de-DE" sz="980" dirty="0">
-                <a:solidFill>
-                  <a:srgbClr val="56B6C2"/>
-                </a:solidFill>
-                <a:latin typeface="Consolas" pitchFamily="49" charset="0"/>
-              </a:rPr>
-              <a:t>in</a:t>
-            </a:r>
-            <a:r>
-              <a:rPr lang="de-DE" sz="980" dirty="0">
-                <a:solidFill>
-                  <a:srgbClr val="ABB2BF"/>
-                </a:solidFill>
-                <a:latin typeface="Consolas" pitchFamily="49" charset="0"/>
-              </a:rPr>
-              <a:t> all_pieces(board):</a:t>
-            </a:r>
-          </a:p>
-          <a:p>
-            <a:pPr marL="0" indent="0" algn="l">
-              <a:buNone/>
-            </a:pPr>
-            <a:r>
-              <a:rPr lang="de-DE" sz="980" dirty="0">
-                <a:solidFill>
-                  <a:srgbClr val="56B6C2"/>
-                </a:solidFill>
-                <a:latin typeface="Consolas" pitchFamily="49" charset="0"/>
-              </a:rPr>
-              <a:t>        if</a:t>
-            </a:r>
-            <a:r>
-              <a:rPr lang="de-DE" sz="980" dirty="0">
-                <a:solidFill>
-                  <a:srgbClr val="ABB2BF"/>
-                </a:solidFill>
-                <a:latin typeface="Consolas" pitchFamily="49" charset="0"/>
-              </a:rPr>
-              <a:t> piece == BLACK:  </a:t>
-            </a:r>
-            <a:r>
-              <a:rPr lang="de-DE" sz="980" i="1" dirty="0">
-                <a:solidFill>
-                  <a:srgbClr val="5C6370"/>
-                </a:solidFill>
-                <a:latin typeface="Consolas" pitchFamily="49" charset="0"/>
-              </a:rPr>
-              <a:t># KI</a:t>
-            </a:r>
-          </a:p>
-          <a:p>
-            <a:pPr marL="0" indent="0" algn="l">
-              <a:buNone/>
-            </a:pPr>
-            <a:r>
-              <a:rPr lang="de-DE" sz="980" dirty="0">
-                <a:solidFill>
-                  <a:srgbClr val="ABB2BF"/>
-                </a:solidFill>
-                <a:latin typeface="Consolas" pitchFamily="49" charset="0"/>
-              </a:rPr>
-              <a:t>            score += </a:t>
-            </a:r>
-            <a:r>
-              <a:rPr lang="de-DE" sz="980" dirty="0">
-                <a:solidFill>
-                  <a:srgbClr val="98C379"/>
-                </a:solidFill>
-                <a:latin typeface="Consolas" pitchFamily="49" charset="0"/>
-              </a:rPr>
-              <a:t>10</a:t>
-            </a:r>
-            <a:r>
-              <a:rPr lang="de-DE" sz="980" i="1" dirty="0">
-                <a:solidFill>
-                  <a:srgbClr val="5C6370"/>
-                </a:solidFill>
-                <a:latin typeface="Consolas" pitchFamily="49" charset="0"/>
-              </a:rPr>
-              <a:t>              # Figurenzahl</a:t>
-            </a:r>
-          </a:p>
-          <a:p>
-            <a:pPr marL="0" indent="0" algn="l">
-              <a:buNone/>
-            </a:pPr>
-            <a:r>
-              <a:rPr lang="de-DE" sz="980" dirty="0">
-                <a:solidFill>
-                  <a:srgbClr val="ABB2BF"/>
-                </a:solidFill>
-                <a:latin typeface="Consolas" pitchFamily="49" charset="0"/>
-              </a:rPr>
-              <a:t>            score += row * </a:t>
-            </a:r>
-            <a:r>
-              <a:rPr lang="de-DE" sz="980" dirty="0">
-                <a:solidFill>
-                  <a:srgbClr val="98C379"/>
-                </a:solidFill>
-                <a:latin typeface="Consolas" pitchFamily="49" charset="0"/>
-              </a:rPr>
-              <a:t>2</a:t>
-            </a:r>
-            <a:r>
-              <a:rPr lang="de-DE" sz="980" i="1" dirty="0">
-                <a:solidFill>
-                  <a:srgbClr val="5C6370"/>
-                </a:solidFill>
-                <a:latin typeface="Consolas" pitchFamily="49" charset="0"/>
-              </a:rPr>
-              <a:t>         # Fortschritt</a:t>
-            </a:r>
-          </a:p>
-          <a:p>
-            <a:pPr marL="0" indent="0" algn="l">
-              <a:buNone/>
-            </a:pPr>
-            <a:r>
-              <a:rPr lang="de-DE" sz="980" dirty="0">
-                <a:solidFill>
-                  <a:srgbClr val="ABB2BF"/>
-                </a:solidFill>
-                <a:latin typeface="Consolas" pitchFamily="49" charset="0"/>
-              </a:rPr>
-              <a:t>            score += CENTER_BONUS[row][col]  </a:t>
-            </a:r>
-            <a:r>
-              <a:rPr lang="de-DE" sz="980" i="1" dirty="0">
-                <a:solidFill>
-                  <a:srgbClr val="5C6370"/>
-                </a:solidFill>
-                <a:latin typeface="Consolas" pitchFamily="49" charset="0"/>
-              </a:rPr>
-              <a:t># Zentrum</a:t>
-            </a:r>
-          </a:p>
-          <a:p>
-            <a:pPr marL="0" indent="0" algn="l">
-              <a:buNone/>
-            </a:pPr>
-            <a:r>
-              <a:rPr lang="de-DE" sz="980" dirty="0">
-                <a:solidFill>
-                  <a:srgbClr val="56B6C2"/>
-                </a:solidFill>
-                <a:latin typeface="Consolas" pitchFamily="49" charset="0"/>
-              </a:rPr>
-              <a:t>        elif</a:t>
-            </a:r>
-            <a:r>
-              <a:rPr lang="de-DE" sz="980" dirty="0">
-                <a:solidFill>
-                  <a:srgbClr val="ABB2BF"/>
-                </a:solidFill>
-                <a:latin typeface="Consolas" pitchFamily="49" charset="0"/>
-              </a:rPr>
-              <a:t> piece == WHITE:  </a:t>
-            </a:r>
-            <a:r>
-              <a:rPr lang="de-DE" sz="980" i="1" dirty="0">
-                <a:solidFill>
-                  <a:srgbClr val="5C6370"/>
-                </a:solidFill>
-                <a:latin typeface="Consolas" pitchFamily="49" charset="0"/>
-              </a:rPr>
-              <a:t># Mensch → negativ</a:t>
-            </a:r>
-          </a:p>
-          <a:p>
-            <a:pPr marL="0" indent="0" algn="l">
-              <a:buNone/>
-            </a:pPr>
-            <a:r>
-              <a:rPr lang="de-DE" sz="980" dirty="0">
-                <a:solidFill>
-                  <a:srgbClr val="ABB2BF"/>
-                </a:solidFill>
-                <a:latin typeface="Consolas" pitchFamily="49" charset="0"/>
-              </a:rPr>
-              <a:t>            score -= </a:t>
-            </a:r>
-            <a:r>
-              <a:rPr lang="de-DE" sz="980" dirty="0">
-                <a:solidFill>
-                  <a:srgbClr val="98C379"/>
-                </a:solidFill>
-                <a:latin typeface="Consolas" pitchFamily="49" charset="0"/>
-              </a:rPr>
-              <a:t>10</a:t>
-            </a:r>
-            <a:r>
-              <a:rPr lang="de-DE" sz="980" dirty="0">
-                <a:solidFill>
-                  <a:srgbClr val="ABB2BF"/>
-                </a:solidFill>
-                <a:latin typeface="Consolas" pitchFamily="49" charset="0"/>
-              </a:rPr>
-              <a:t> + (BOARD_SIZE-</a:t>
-            </a:r>
-            <a:r>
-              <a:rPr lang="de-DE" sz="980" dirty="0">
-                <a:solidFill>
-                  <a:srgbClr val="98C379"/>
-                </a:solidFill>
-                <a:latin typeface="Consolas" pitchFamily="49" charset="0"/>
-              </a:rPr>
-              <a:t>1</a:t>
-            </a:r>
-            <a:r>
-              <a:rPr lang="de-DE" sz="980" dirty="0">
-                <a:solidFill>
-                  <a:srgbClr val="ABB2BF"/>
-                </a:solidFill>
-                <a:latin typeface="Consolas" pitchFamily="49" charset="0"/>
-              </a:rPr>
-              <a:t>-row)*</a:t>
-            </a:r>
-            <a:r>
-              <a:rPr lang="de-DE" sz="980" dirty="0">
-                <a:solidFill>
-                  <a:srgbClr val="98C379"/>
-                </a:solidFill>
-                <a:latin typeface="Consolas" pitchFamily="49" charset="0"/>
-              </a:rPr>
-              <a:t>2</a:t>
-            </a:r>
-          </a:p>
-          <a:p>
-            <a:pPr marL="0" indent="0" algn="l">
-              <a:buNone/>
-            </a:pPr>
-            <a:r>
-              <a:rPr lang="de-DE" sz="980" dirty="0">
-                <a:solidFill>
-                  <a:srgbClr val="ABB2BF"/>
-                </a:solidFill>
-                <a:latin typeface="Consolas" pitchFamily="49" charset="0"/>
-              </a:rPr>
-              <a:t>            score -= CENTER_BONUS[row][col]</a:t>
-            </a:r>
-          </a:p>
-          <a:p>
-            <a:pPr marL="0" indent="0" algn="l">
-              <a:buNone/>
-            </a:pPr>
-            <a:r>
-              <a:rPr lang="de-DE" sz="980" dirty="0">
-                <a:solidFill>
-                  <a:srgbClr val="56B6C2"/>
-                </a:solidFill>
-                <a:latin typeface="Consolas" pitchFamily="49" charset="0"/>
-              </a:rPr>
-              <a:t>    return</a:t>
-            </a:r>
-            <a:r>
-              <a:rPr lang="de-DE" sz="980" dirty="0">
-                <a:solidFill>
-                  <a:srgbClr val="ABB2BF"/>
-                </a:solidFill>
-                <a:latin typeface="Consolas" pitchFamily="49" charset="0"/>
-              </a:rPr>
-              <a:t> score</a:t>
-            </a:r>
-          </a:p>
-        </p:txBody>
-      </p:sp>
-      <p:sp>
-        <p:nvSpPr>
-          <p:cNvPr id="7" name="BulletCard"/>
-          <p:cNvSpPr/>
-          <p:nvPr/>
-        </p:nvSpPr>
-        <p:spPr>
-          <a:xfrm>
-            <a:off x="5707200" y="1234440"/>
-            <a:ext cx="3071040" cy="3650000"/>
-          </a:xfrm>
-          <a:prstGeom prst="rect">
-            <a:avLst/>
-          </a:prstGeom>
-          <a:solidFill>
-            <a:srgbClr val="1E2A4A"/>
-          </a:solidFill>
-          <a:ln w="6350">
-            <a:solidFill>
-              <a:srgbClr val="2A3A5E"/>
-            </a:solidFill>
-            <a:prstDash val="solid"/>
-          </a:ln>
-        </p:spPr>
-        <p:txBody>
-          <a:bodyPr/>
-          <a:lstStyle/>
-          <a:p>
-            <a:endParaRPr lang="de-DE"/>
-          </a:p>
-        </p:txBody>
-      </p:sp>
-      <p:sp>
-        <p:nvSpPr>
-          <p:cNvPr id="8" name="BulletText"/>
-          <p:cNvSpPr/>
-          <p:nvPr/>
-        </p:nvSpPr>
-        <p:spPr>
-          <a:xfrm>
-            <a:off x="5798640" y="1325880"/>
-            <a:ext cx="2888160" cy="3467120"/>
-          </a:xfrm>
-          <a:prstGeom prst="rect">
-            <a:avLst/>
-          </a:prstGeom>
-          <a:noFill/>
-          <a:ln/>
-        </p:spPr>
-        <p:txBody>
-          <a:bodyPr wrap="square" lIns="114300" tIns="91440" rIns="114300" bIns="91440" rtlCol="0" anchor="t"/>
-          <a:lstStyle/>
-          <a:p>
-            <a:pPr marL="342900" indent="-342900" algn="l">
-              <a:buChar char="▸"/>
-            </a:pPr>
-            <a:r>
-              <a:rPr lang="de-DE" sz="1150" b="1" dirty="0">
-                <a:solidFill>
-                  <a:srgbClr val="B0C4DE"/>
-                </a:solidFill>
-                <a:latin typeface="Calibri" pitchFamily="49" charset="0"/>
-              </a:rPr>
-              <a:t>Figurenzahl +10</a:t>
-            </a:r>
-          </a:p>
-          <a:p>
-            <a:pPr marL="342900" indent="0" algn="l">
-              <a:buNone/>
-            </a:pPr>
-            <a:r>
-              <a:rPr lang="de-DE" sz="1000" dirty="0">
-                <a:solidFill>
-                  <a:srgbClr val="8892A4"/>
-                </a:solidFill>
-                <a:latin typeface="Calibri" pitchFamily="49" charset="0"/>
-              </a:rPr>
-              <a:t>Jeder eigene Bauer zählt +10, jeder gegnerische -10</a:t>
-            </a:r>
-          </a:p>
-          <a:p>
-            <a:pPr marL="342900" indent="-342900" algn="l">
-              <a:spcBef>
-                <a:spcPts val="160"/>
-              </a:spcBef>
-              <a:buChar char="▸"/>
-            </a:pPr>
-            <a:r>
-              <a:rPr lang="de-DE" sz="1150" b="1" dirty="0">
-                <a:solidFill>
-                  <a:srgbClr val="B0C4DE"/>
-                </a:solidFill>
-                <a:latin typeface="Calibri" pitchFamily="49" charset="0"/>
-              </a:rPr>
-              <a:t>Fortschritt +row×2</a:t>
-            </a:r>
-          </a:p>
-          <a:p>
-            <a:pPr marL="342900" indent="0" algn="l">
-              <a:buNone/>
-            </a:pPr>
-            <a:r>
-              <a:rPr lang="de-DE" sz="1000" dirty="0">
-                <a:solidFill>
-                  <a:srgbClr val="8892A4"/>
-                </a:solidFill>
-                <a:latin typeface="Calibri" pitchFamily="49" charset="0"/>
-              </a:rPr>
-              <a:t>KI wird für Vorwärtsbewegung belohnt</a:t>
-            </a:r>
-          </a:p>
-          <a:p>
-            <a:pPr marL="342900" indent="-342900" algn="l">
-              <a:spcBef>
-                <a:spcPts val="160"/>
-              </a:spcBef>
-              <a:buChar char="▸"/>
-            </a:pPr>
-            <a:r>
-              <a:rPr lang="de-DE" sz="1150" b="1" dirty="0">
-                <a:solidFill>
-                  <a:srgbClr val="B0C4DE"/>
-                </a:solidFill>
-                <a:latin typeface="Calibri" pitchFamily="49" charset="0"/>
-              </a:rPr>
-              <a:t>Zentrum +0…+3</a:t>
-            </a:r>
-          </a:p>
-          <a:p>
-            <a:pPr marL="342900" indent="0" algn="l">
-              <a:buNone/>
-            </a:pPr>
-            <a:r>
-              <a:rPr lang="de-DE" sz="1000" dirty="0">
-                <a:solidFill>
-                  <a:srgbClr val="8892A4"/>
-                </a:solidFill>
-                <a:latin typeface="Calibri" pitchFamily="49" charset="0"/>
-              </a:rPr>
-              <a:t>Zentralposition ist strategisch wertvoller</a:t>
-            </a:r>
-          </a:p>
-          <a:p>
-            <a:pPr marL="342900" indent="-342900" algn="l">
-              <a:spcBef>
-                <a:spcPts val="160"/>
-              </a:spcBef>
-              <a:buChar char="▸"/>
-            </a:pPr>
-            <a:r>
-              <a:rPr lang="de-DE" sz="1150" b="1" dirty="0">
-                <a:solidFill>
-                  <a:srgbClr val="B0C4DE"/>
-                </a:solidFill>
-                <a:latin typeface="Calibri" pitchFamily="49" charset="0"/>
-              </a:rPr>
-              <a:t>Positiv = KI gut</a:t>
-            </a:r>
-          </a:p>
-          <a:p>
-            <a:pPr marL="342900" indent="0" algn="l">
-              <a:buNone/>
-            </a:pPr>
-            <a:r>
-              <a:rPr lang="de-DE" sz="1000" dirty="0">
-                <a:solidFill>
-                  <a:srgbClr val="8892A4"/>
-                </a:solidFill>
-                <a:latin typeface="Calibri" pitchFamily="49" charset="0"/>
-              </a:rPr>
-              <a:t>Score &gt; 0 → Vorteil für KI (BLACK = -1)</a:t>
-            </a:r>
-          </a:p>
-          <a:p>
-            <a:pPr marL="342900" indent="-342900" algn="l">
-              <a:spcBef>
-                <a:spcPts val="160"/>
-              </a:spcBef>
-              <a:buChar char="▸"/>
-            </a:pPr>
-            <a:r>
-              <a:rPr lang="de-DE" sz="1150" b="1" dirty="0">
-                <a:solidFill>
-                  <a:srgbClr val="B0C4DE"/>
-                </a:solidFill>
-                <a:latin typeface="Calibri" pitchFamily="49" charset="0"/>
-              </a:rPr>
-              <a:t>Heuristik = Stärke</a:t>
-            </a:r>
-          </a:p>
-          <a:p>
-            <a:pPr marL="342900" indent="0" algn="l">
-              <a:buNone/>
-            </a:pPr>
-            <a:r>
-              <a:rPr lang="de-DE" sz="1000" dirty="0">
-                <a:solidFill>
-                  <a:srgbClr val="8892A4"/>
-                </a:solidFill>
-                <a:latin typeface="Calibri" pitchFamily="49" charset="0"/>
-              </a:rPr>
-              <a:t>Bessere Bewertungsfunktion → stärkere KI</a:t>
-            </a:r>
-          </a:p>
-        </p:txBody>
-      </p:sp>
-      <p:sp>
-        <p:nvSpPr>
-          <p:cNvPr id="9" name="Textfeld 8">
-            <a:extLst>
-              <a:ext uri="{FF2B5EF4-FFF2-40B4-BE49-F238E27FC236}">
-                <a16:creationId xmlns:a16="http://schemas.microsoft.com/office/drawing/2014/main" id="{68FDAF88-68DE-DAC2-79FD-9A75E624AC6A}"/>
-              </a:ext>
-            </a:extLst>
-          </p:cNvPr>
-          <p:cNvSpPr txBox="1"/>
-          <p:nvPr/>
-        </p:nvSpPr>
-        <p:spPr>
-          <a:xfrm>
-            <a:off x="8730005" y="4875028"/>
-            <a:ext cx="228600" cy="215444"/>
-          </a:xfrm>
-          <a:prstGeom prst="rect">
-            <a:avLst/>
-          </a:prstGeom>
-          <a:noFill/>
-        </p:spPr>
-        <p:txBody>
-          <a:bodyPr wrap="square" rtlCol="0">
-            <a:spAutoFit/>
-          </a:bodyPr>
-          <a:lstStyle/>
-          <a:p>
-            <a:r>
-              <a:rPr lang="en-US" sz="800" dirty="0">
-                <a:solidFill>
-                  <a:srgbClr val="E94560"/>
-                </a:solidFill>
-                <a:latin typeface="Calibri" pitchFamily="34" charset="0"/>
-                <a:ea typeface="Calibri" pitchFamily="34" charset="-122"/>
-                <a:cs typeface="Calibri" pitchFamily="34" charset="-120"/>
-              </a:rPr>
-              <a:t>9</a:t>
             </a:r>
             <a:endParaRPr lang="de-DE" sz="800" dirty="0"/>
           </a:p>

--- a/Präsentation/Präsentation_Projekt/HHBKTendo_Praesentation_1.pptx
+++ b/Präsentation/Präsentation_Projekt/HHBKTendo_Praesentation_1.pptx
@@ -3356,8 +3356,8 @@
         </p:nvSpPr>
         <p:spPr>
           <a:xfrm>
-            <a:off x="8730005" y="4875028"/>
-            <a:ext cx="228600" cy="215444"/>
+            <a:off x="8630529" y="4868158"/>
+            <a:ext cx="328076" cy="215444"/>
           </a:xfrm>
           <a:prstGeom prst="rect">
             <a:avLst/>
@@ -3379,7 +3379,7 @@
                 <a:ea typeface="Calibri" pitchFamily="34" charset="-122"/>
                 <a:cs typeface="Calibri" pitchFamily="34" charset="-120"/>
               </a:rPr>
-              <a:t>9</a:t>
+              <a:t>10</a:t>
             </a:r>
             <a:endParaRPr lang="de-DE" sz="800" dirty="0"/>
           </a:p>
@@ -5657,7 +5657,7 @@
                 <a:ea typeface="Calibri" pitchFamily="34" charset="-122"/>
                 <a:cs typeface="Calibri" pitchFamily="34" charset="-120"/>
               </a:rPr>
-              <a:t>10</a:t>
+              <a:t>11</a:t>
             </a:r>
             <a:endParaRPr lang="de-DE" sz="800" dirty="0"/>
           </a:p>
@@ -6889,7 +6889,7 @@
           <a:p>
             <a:r>
               <a:rPr lang="de-DE" sz="800" dirty="0"/>
-              <a:t>11</a:t>
+              <a:t>12</a:t>
             </a:r>
           </a:p>
         </p:txBody>
@@ -8084,7 +8084,7 @@
         </p:nvSpPr>
         <p:spPr>
           <a:xfrm>
-            <a:off x="8633637" y="4875028"/>
+            <a:off x="8626603" y="4875028"/>
             <a:ext cx="332056" cy="215444"/>
           </a:xfrm>
           <a:prstGeom prst="rect">
@@ -8107,7 +8107,7 @@
                 <a:ea typeface="Calibri" pitchFamily="34" charset="-122"/>
                 <a:cs typeface="Calibri" pitchFamily="34" charset="-120"/>
               </a:rPr>
-              <a:t>12</a:t>
+              <a:t>13</a:t>
             </a:r>
             <a:endParaRPr lang="de-DE" sz="800" dirty="0"/>
           </a:p>
@@ -14511,7 +14511,7 @@
                 <a:ea typeface="Calibri" pitchFamily="34" charset="-122"/>
                 <a:cs typeface="Calibri" pitchFamily="34" charset="-120"/>
               </a:rPr>
-              <a:t>13</a:t>
+              <a:t>5</a:t>
             </a:r>
             <a:endParaRPr lang="de-DE" sz="800" dirty="0"/>
           </a:p>
@@ -15570,7 +15570,7 @@
                 <a:ea typeface="Calibri" pitchFamily="34" charset="-122"/>
                 <a:cs typeface="Calibri" pitchFamily="34" charset="-120"/>
               </a:rPr>
-              <a:t>5</a:t>
+              <a:t>6</a:t>
             </a:r>
             <a:endParaRPr lang="de-DE" sz="800" dirty="0"/>
           </a:p>
@@ -17000,12 +17000,12 @@
           <a:lstStyle/>
           <a:p>
             <a:r>
-              <a:rPr lang="en-US" sz="800">
+              <a:rPr lang="en-US" sz="800" dirty="0">
                 <a:latin typeface="Calibri" pitchFamily="34" charset="0"/>
                 <a:ea typeface="Calibri" pitchFamily="34" charset="-122"/>
                 <a:cs typeface="Calibri" pitchFamily="34" charset="-120"/>
               </a:rPr>
-              <a:t>6</a:t>
+              <a:t>7</a:t>
             </a:r>
             <a:endParaRPr lang="de-DE" sz="800" dirty="0"/>
           </a:p>
@@ -18071,7 +18071,7 @@
           <a:p>
             <a:r>
               <a:rPr lang="de-DE" sz="800" dirty="0"/>
-              <a:t>7</a:t>
+              <a:t>8</a:t>
             </a:r>
           </a:p>
         </p:txBody>
@@ -20416,7 +20416,7 @@
                 <a:ea typeface="Calibri" pitchFamily="34" charset="-122"/>
                 <a:cs typeface="Calibri" pitchFamily="34" charset="-120"/>
               </a:rPr>
-              <a:t>8</a:t>
+              <a:t>9</a:t>
             </a:r>
             <a:endParaRPr lang="de-DE" sz="800" dirty="0"/>
           </a:p>

--- a/Präsentation/Präsentation_Projekt/HHBKTendo_Praesentation_1.pptx
+++ b/Präsentation/Präsentation_Projekt/HHBKTendo_Praesentation_1.pptx
@@ -14476,10 +14476,10 @@
       </p:sp>
       <p:sp>
         <p:nvSpPr>
-          <p:cNvPr id="34" name="Textfeld 33">
+          <p:cNvPr id="35" name="Textfeld 34">
             <a:extLst>
               <a:ext uri="{FF2B5EF4-FFF2-40B4-BE49-F238E27FC236}">
-                <a16:creationId xmlns:a16="http://schemas.microsoft.com/office/drawing/2014/main" id="{7E5C661B-4881-D1FC-50EB-6ADE5EC2C3EA}"/>
+                <a16:creationId xmlns:a16="http://schemas.microsoft.com/office/drawing/2014/main" id="{6F99A1F6-ABCD-9744-64A1-8C059F8F72AB}"/>
               </a:ext>
             </a:extLst>
           </p:cNvPr>
@@ -14488,8 +14488,8 @@
         </p:nvSpPr>
         <p:spPr>
           <a:xfrm>
-            <a:off x="8641080" y="4875028"/>
-            <a:ext cx="324613" cy="215444"/>
+            <a:off x="8737093" y="4875028"/>
+            <a:ext cx="228600" cy="215444"/>
           </a:xfrm>
           <a:prstGeom prst="rect">
             <a:avLst/>
@@ -14511,7 +14511,7 @@
                 <a:ea typeface="Calibri" pitchFamily="34" charset="-122"/>
                 <a:cs typeface="Calibri" pitchFamily="34" charset="-120"/>
               </a:rPr>
-              <a:t>5</a:t>
+              <a:t>6</a:t>
             </a:r>
             <a:endParaRPr lang="de-DE" sz="800" dirty="0"/>
           </a:p>

--- a/Präsentation/Präsentation_Projekt/HHBKTendo_Praesentation_1.pptx
+++ b/Präsentation/Präsentation_Projekt/HHBKTendo_Praesentation_1.pptx
@@ -22,6 +22,7 @@
     <p:sldId id="269" r:id="rId13"/>
     <p:sldId id="270" r:id="rId14"/>
     <p:sldId id="263" r:id="rId15"/>
+    <p:sldId id="271" r:id="rId22"/>
     <p:sldId id="264" r:id="rId16"/>
   </p:sldIdLst>
   <p:sldSz cx="9144000" cy="5143500" type="screen16x9"/>
@@ -10243,6 +10244,1136 @@
                   <a:srgbClr val="1E2A4A"/>
                 </a:solidFill>
               </a:rPr>
+              <a:t>16</a:t>
+            </a:r>
+          </a:p>
+        </p:txBody>
+      </p:sp>
+    </p:spTree>
+  </p:cSld>
+  <p:clrMapOvr>
+    <a:masterClrMapping/>
+  </p:clrMapOvr>
+</p:sld>
+</file>
+
+<file path=ppt/slides/slide16.xml><?xml version="1.0" encoding="utf-8"?>
+<p:sld xmlns:a="http://schemas.openxmlformats.org/drawingml/2006/main" xmlns:p="http://schemas.openxmlformats.org/presentationml/2006/main" xmlns:r="http://schemas.openxmlformats.org/officeDocument/2006/relationships">
+  <p:cSld>
+    <p:bg>
+      <p:bgPr>
+        <a:solidFill>
+          <a:srgbClr val="F0F4FF"/>
+        </a:solidFill>
+        <a:effectLst/>
+      </p:bgPr>
+    </p:bg>
+    <p:spTree>
+      <p:nvGrpSpPr>
+        <p:cNvPr id="1" name=""/>
+        <p:cNvGrpSpPr/>
+        <p:nvPr/>
+      </p:nvGrpSpPr>
+      <p:grpSpPr/>
+      <p:sp>
+        <p:nvSpPr>
+          <p:cNvPr id="2" name="AccentStripe"/>
+          <p:cNvSpPr/>
+          <p:nvPr/>
+        </p:nvSpPr>
+        <p:spPr>
+          <a:xfrm>
+            <a:off x="0" y="0"/>
+            <a:ext cx="91440" cy="5143500"/>
+          </a:xfrm>
+          <a:prstGeom prst="rect">
+            <a:avLst/>
+          </a:prstGeom>
+          <a:solidFill>
+            <a:srgbClr val="4472C4"/>
+          </a:solidFill>
+        </p:spPr>
+        <p:txBody>
+          <a:bodyPr/>
+          <a:lstStyle/>
+          <a:p>
+            <a:endParaRPr lang="de-DE"/>
+          </a:p>
+        </p:txBody>
+      </p:sp>
+      <p:sp>
+        <p:nvSpPr>
+          <p:cNvPr id="3" name="Title"/>
+          <p:cNvSpPr/>
+          <p:nvPr/>
+        </p:nvSpPr>
+        <p:spPr>
+          <a:xfrm>
+            <a:off x="457200" y="256032"/>
+            <a:ext cx="8229600" cy="594360"/>
+          </a:xfrm>
+          <a:prstGeom prst="rect">
+            <a:avLst/>
+          </a:prstGeom>
+          <a:noFill/>
+          <a:ln/>
+        </p:spPr>
+        <p:txBody>
+          <a:bodyPr wrap="square" lIns="114300" tIns="91440" rIns="114300" bIns="91440" rtlCol="0" anchor="ctr"/>
+          <a:lstStyle/>
+          <a:p>
+            <a:pPr marL="0" indent="0" algn="l">
+              <a:buNone/>
+            </a:pPr>
+            <a:r>
+              <a:rPr lang="de-DE" sz="2800" b="1" dirty="0">
+                <a:solidFill>
+                  <a:srgbClr val="1A1A2E"/>
+                </a:solidFill>
+                <a:latin typeface="Arial Black" pitchFamily="49" charset="0"/>
+              </a:rPr>
+              <a:t>test_all.py – Unittest-Framework</a:t>
+            </a:r>
+          </a:p>
+        </p:txBody>
+      </p:sp>
+      <p:sp>
+        <p:nvSpPr>
+          <p:cNvPr id="4" name="Subtitle"/>
+          <p:cNvSpPr/>
+          <p:nvPr/>
+        </p:nvSpPr>
+        <p:spPr>
+          <a:xfrm>
+            <a:off x="457200" y="804672"/>
+            <a:ext cx="8229600" cy="320040"/>
+          </a:xfrm>
+          <a:prstGeom prst="rect">
+            <a:avLst/>
+          </a:prstGeom>
+          <a:noFill/>
+          <a:ln/>
+        </p:spPr>
+        <p:txBody>
+          <a:bodyPr wrap="square" lIns="114300" tIns="91440" rIns="114300" bIns="91440" rtlCol="0" anchor="ctr"/>
+          <a:lstStyle/>
+          <a:p>
+            <a:pPr marL="0" indent="0" algn="l">
+              <a:buNone/>
+            </a:pPr>
+            <a:r>
+              <a:rPr lang="de-DE" sz="1200" dirty="0">
+                <a:solidFill>
+                  <a:srgbClr val="8892A4"/>
+                </a:solidFill>
+                <a:latin typeface="Calibri" pitchFamily="49" charset="0"/>
+              </a:rPr>
+              <a:t>unittest · Temp-DB-Isolation · Mocking · TC-01 bis TC-15</a:t>
+            </a:r>
+          </a:p>
+        </p:txBody>
+      </p:sp>
+      <p:sp>
+        <p:nvSpPr>
+          <p:cNvPr id="5" name="CodeCard"/>
+          <p:cNvSpPr/>
+          <p:nvPr/>
+        </p:nvSpPr>
+        <p:spPr>
+          <a:xfrm>
+            <a:off x="365760" y="1234440"/>
+            <a:ext cx="5250000" cy="3650000"/>
+          </a:xfrm>
+          <a:prstGeom prst="rect">
+            <a:avLst/>
+          </a:prstGeom>
+          <a:solidFill>
+            <a:srgbClr val="121224"/>
+          </a:solidFill>
+          <a:ln w="9525">
+            <a:solidFill>
+              <a:srgbClr val="4472C4"/>
+            </a:solidFill>
+            <a:prstDash val="solid"/>
+          </a:ln>
+        </p:spPr>
+        <p:txBody>
+          <a:bodyPr/>
+          <a:lstStyle/>
+          <a:p>
+            <a:endParaRPr lang="de-DE"/>
+          </a:p>
+        </p:txBody>
+      </p:sp>
+      <p:sp>
+        <p:nvSpPr>
+          <p:cNvPr id="6" name="CodeText"/>
+          <p:cNvSpPr/>
+          <p:nvPr/>
+        </p:nvSpPr>
+        <p:spPr>
+          <a:xfrm>
+            <a:off x="457200" y="1325880"/>
+            <a:ext cx="5067120" cy="3467120"/>
+          </a:xfrm>
+          <a:prstGeom prst="rect">
+            <a:avLst/>
+          </a:prstGeom>
+          <a:noFill/>
+          <a:ln/>
+        </p:spPr>
+        <p:txBody>
+          <a:bodyPr wrap="square" lIns="114300" tIns="91440" rIns="114300" bIns="91440" rtlCol="0" anchor="t"/>
+          <a:lstStyle/>
+          <a:p>
+            <a:pPr marL="0" indent="0" algn="l">
+              <a:buNone/>
+            </a:pPr>
+            <a:r>
+              <a:rPr lang="de-DE" sz="980" dirty="0" i="1">
+                <a:solidFill>
+                  <a:srgbClr val="5C6370"/>
+                </a:solidFill>
+                <a:latin typeface="Consolas" pitchFamily="49" charset="0"/>
+              </a:rPr>
+              <a:t># Temp-DB isoliert jeden Testfall</a:t>
+            </a:r>
+          </a:p>
+          <a:p>
+            <a:pPr marL="0" indent="0" algn="l">
+              <a:buNone/>
+            </a:pPr>
+            <a:r>
+              <a:rPr lang="de-DE" sz="980" dirty="0">
+                <a:solidFill>
+                  <a:srgbClr val="56B6C2"/>
+                </a:solidFill>
+                <a:latin typeface="Consolas" pitchFamily="49" charset="0"/>
+              </a:rPr>
+              <a:t>class</a:t>
+            </a:r>
+            <a:r>
+              <a:rPr lang="de-DE" sz="980" dirty="0">
+                <a:solidFill>
+                  <a:srgbClr val="ABB2BF"/>
+                </a:solidFill>
+                <a:latin typeface="Consolas" pitchFamily="49" charset="0"/>
+              </a:rPr>
+              <a:t> </a:t>
+            </a:r>
+            <a:r>
+              <a:rPr lang="de-DE" sz="980" dirty="0">
+                <a:solidFill>
+                  <a:srgbClr val="61AFEF"/>
+                </a:solidFill>
+                <a:latin typeface="Consolas" pitchFamily="49" charset="0"/>
+              </a:rPr>
+              <a:t>DBTestCase</a:t>
+            </a:r>
+            <a:r>
+              <a:rPr lang="de-DE" sz="980" dirty="0">
+                <a:solidFill>
+                  <a:srgbClr val="ABB2BF"/>
+                </a:solidFill>
+                <a:latin typeface="Consolas" pitchFamily="49" charset="0"/>
+              </a:rPr>
+              <a:t>(unittest.TestCase):</a:t>
+            </a:r>
+          </a:p>
+          <a:p>
+            <a:pPr marL="0" indent="0" algn="l">
+              <a:buNone/>
+            </a:pPr>
+            <a:r>
+              <a:rPr lang="de-DE" sz="980" dirty="0">
+                <a:solidFill>
+                  <a:srgbClr val="ABB2BF"/>
+                </a:solidFill>
+                <a:latin typeface="Consolas" pitchFamily="49" charset="0"/>
+              </a:rPr>
+              <a:t>    </a:t>
+            </a:r>
+            <a:r>
+              <a:rPr lang="de-DE" sz="980" dirty="0">
+                <a:solidFill>
+                  <a:srgbClr val="56B6C2"/>
+                </a:solidFill>
+                <a:latin typeface="Consolas" pitchFamily="49" charset="0"/>
+              </a:rPr>
+              <a:t>def</a:t>
+            </a:r>
+            <a:r>
+              <a:rPr lang="de-DE" sz="980" dirty="0">
+                <a:solidFill>
+                  <a:srgbClr val="ABB2BF"/>
+                </a:solidFill>
+                <a:latin typeface="Consolas" pitchFamily="49" charset="0"/>
+              </a:rPr>
+              <a:t> </a:t>
+            </a:r>
+            <a:r>
+              <a:rPr lang="de-DE" sz="980" dirty="0">
+                <a:solidFill>
+                  <a:srgbClr val="61AFEF"/>
+                </a:solidFill>
+                <a:latin typeface="Consolas" pitchFamily="49" charset="0"/>
+              </a:rPr>
+              <a:t>setUp</a:t>
+            </a:r>
+            <a:r>
+              <a:rPr lang="de-DE" sz="980" dirty="0">
+                <a:solidFill>
+                  <a:srgbClr val="ABB2BF"/>
+                </a:solidFill>
+                <a:latin typeface="Consolas" pitchFamily="49" charset="0"/>
+              </a:rPr>
+              <a:t>(self):</a:t>
+            </a:r>
+          </a:p>
+          <a:p>
+            <a:pPr marL="0" indent="0" algn="l">
+              <a:buNone/>
+            </a:pPr>
+            <a:r>
+              <a:rPr lang="de-DE" sz="980" dirty="0">
+                <a:solidFill>
+                  <a:srgbClr val="ABB2BF"/>
+                </a:solidFill>
+                <a:latin typeface="Consolas" pitchFamily="49" charset="0"/>
+              </a:rPr>
+              <a:t>        _, path = tempfile.</a:t>
+            </a:r>
+            <a:r>
+              <a:rPr lang="de-DE" sz="980" dirty="0">
+                <a:solidFill>
+                  <a:srgbClr val="61AFEF"/>
+                </a:solidFill>
+                <a:latin typeface="Consolas" pitchFamily="49" charset="0"/>
+              </a:rPr>
+              <a:t>mkstemp</a:t>
+            </a:r>
+            <a:r>
+              <a:rPr lang="de-DE" sz="980" dirty="0">
+                <a:solidFill>
+                  <a:srgbClr val="ABB2BF"/>
+                </a:solidFill>
+                <a:latin typeface="Consolas" pitchFamily="49" charset="0"/>
+              </a:rPr>
+              <a:t>(</a:t>
+            </a:r>
+            <a:r>
+              <a:rPr lang="de-DE" sz="980" dirty="0">
+                <a:solidFill>
+                  <a:srgbClr val="98C379"/>
+                </a:solidFill>
+                <a:latin typeface="Consolas" pitchFamily="49" charset="0"/>
+              </a:rPr>
+              <a:t>".db"</a:t>
+            </a:r>
+            <a:r>
+              <a:rPr lang="de-DE" sz="980" dirty="0">
+                <a:solidFill>
+                  <a:srgbClr val="ABB2BF"/>
+                </a:solidFill>
+                <a:latin typeface="Consolas" pitchFamily="49" charset="0"/>
+              </a:rPr>
+              <a:t>)</a:t>
+            </a:r>
+          </a:p>
+          <a:p>
+            <a:pPr marL="0" indent="0" algn="l">
+              <a:buNone/>
+            </a:pPr>
+            <a:r>
+              <a:rPr lang="de-DE" sz="980" dirty="0">
+                <a:solidFill>
+                  <a:srgbClr val="ABB2BF"/>
+                </a:solidFill>
+                <a:latin typeface="Consolas" pitchFamily="49" charset="0"/>
+              </a:rPr>
+              <a:t>        self._patch = </a:t>
+            </a:r>
+            <a:r>
+              <a:rPr lang="de-DE" sz="980" dirty="0">
+                <a:solidFill>
+                  <a:srgbClr val="61AFEF"/>
+                </a:solidFill>
+                <a:latin typeface="Consolas" pitchFamily="49" charset="0"/>
+              </a:rPr>
+              <a:t>patch.object</a:t>
+            </a:r>
+            <a:r>
+              <a:rPr lang="de-DE" sz="980" dirty="0">
+                <a:solidFill>
+                  <a:srgbClr val="ABB2BF"/>
+                </a:solidFill>
+                <a:latin typeface="Consolas" pitchFamily="49" charset="0"/>
+              </a:rPr>
+              <a:t>(</a:t>
+            </a:r>
+          </a:p>
+          <a:p>
+            <a:pPr marL="0" indent="0" algn="l">
+              <a:buNone/>
+            </a:pPr>
+            <a:r>
+              <a:rPr lang="de-DE" sz="980" dirty="0">
+                <a:solidFill>
+                  <a:srgbClr val="ABB2BF"/>
+                </a:solidFill>
+                <a:latin typeface="Consolas" pitchFamily="49" charset="0"/>
+              </a:rPr>
+              <a:t>            database, </a:t>
+            </a:r>
+            <a:r>
+              <a:rPr lang="de-DE" sz="980" dirty="0">
+                <a:solidFill>
+                  <a:srgbClr val="98C379"/>
+                </a:solidFill>
+                <a:latin typeface="Consolas" pitchFamily="49" charset="0"/>
+              </a:rPr>
+              <a:t>"DB_PATH"</a:t>
+            </a:r>
+            <a:r>
+              <a:rPr lang="de-DE" sz="980" dirty="0">
+                <a:solidFill>
+                  <a:srgbClr val="ABB2BF"/>
+                </a:solidFill>
+                <a:latin typeface="Consolas" pitchFamily="49" charset="0"/>
+              </a:rPr>
+              <a:t>, path)</a:t>
+            </a:r>
+          </a:p>
+          <a:p>
+            <a:pPr marL="0" indent="0" algn="l">
+              <a:buNone/>
+            </a:pPr>
+            <a:r>
+              <a:rPr lang="de-DE" sz="980" dirty="0">
+                <a:solidFill>
+                  <a:srgbClr val="ABB2BF"/>
+                </a:solidFill>
+                <a:latin typeface="Consolas" pitchFamily="49" charset="0"/>
+              </a:rPr>
+              <a:t>        self._patch.</a:t>
+            </a:r>
+            <a:r>
+              <a:rPr lang="de-DE" sz="980" dirty="0">
+                <a:solidFill>
+                  <a:srgbClr val="61AFEF"/>
+                </a:solidFill>
+                <a:latin typeface="Consolas" pitchFamily="49" charset="0"/>
+              </a:rPr>
+              <a:t>start</a:t>
+            </a:r>
+            <a:r>
+              <a:rPr lang="de-DE" sz="980" dirty="0">
+                <a:solidFill>
+                  <a:srgbClr val="ABB2BF"/>
+                </a:solidFill>
+                <a:latin typeface="Consolas" pitchFamily="49" charset="0"/>
+              </a:rPr>
+              <a:t>(); database.</a:t>
+            </a:r>
+            <a:r>
+              <a:rPr lang="de-DE" sz="980" dirty="0">
+                <a:solidFill>
+                  <a:srgbClr val="61AFEF"/>
+                </a:solidFill>
+                <a:latin typeface="Consolas" pitchFamily="49" charset="0"/>
+              </a:rPr>
+              <a:t>init_db</a:t>
+            </a:r>
+            <a:r>
+              <a:rPr lang="de-DE" sz="980" dirty="0">
+                <a:solidFill>
+                  <a:srgbClr val="ABB2BF"/>
+                </a:solidFill>
+                <a:latin typeface="Consolas" pitchFamily="49" charset="0"/>
+              </a:rPr>
+              <a:t>()</a:t>
+            </a:r>
+          </a:p>
+          <a:p>
+            <a:pPr marL="0" indent="0" algn="l">
+              <a:buNone/>
+            </a:pPr>
+            <a:endParaRPr lang="de-DE" sz="980" dirty="0">
+              <a:solidFill>
+                <a:srgbClr val="ABB2BF"/>
+              </a:solidFill>
+              <a:latin typeface="Consolas" pitchFamily="49" charset="0"/>
+            </a:endParaRPr>
+          </a:p>
+          <a:p>
+            <a:pPr marL="0" indent="0" algn="l">
+              <a:buNone/>
+            </a:pPr>
+            <a:r>
+              <a:rPr lang="de-DE" sz="980" dirty="0" i="1">
+                <a:solidFill>
+                  <a:srgbClr val="5C6370"/>
+                </a:solidFill>
+                <a:latin typeface="Consolas" pitchFamily="49" charset="0"/>
+              </a:rPr>
+              <a:t># TC-09: 4-in-Reihe → Mensch gewinnt</a:t>
+            </a:r>
+          </a:p>
+          <a:p>
+            <a:pPr marL="0" indent="0" algn="l">
+              <a:buNone/>
+            </a:pPr>
+            <a:r>
+              <a:rPr lang="de-DE" sz="980" dirty="0">
+                <a:solidFill>
+                  <a:srgbClr val="56B6C2"/>
+                </a:solidFill>
+                <a:latin typeface="Consolas" pitchFamily="49" charset="0"/>
+              </a:rPr>
+              <a:t>def</a:t>
+            </a:r>
+            <a:r>
+              <a:rPr lang="de-DE" sz="980" dirty="0">
+                <a:solidFill>
+                  <a:srgbClr val="ABB2BF"/>
+                </a:solidFill>
+                <a:latin typeface="Consolas" pitchFamily="49" charset="0"/>
+              </a:rPr>
+              <a:t> </a:t>
+            </a:r>
+            <a:r>
+              <a:rPr lang="de-DE" sz="980" dirty="0">
+                <a:solidFill>
+                  <a:srgbClr val="61AFEF"/>
+                </a:solidFill>
+                <a:latin typeface="Consolas" pitchFamily="49" charset="0"/>
+              </a:rPr>
+              <a:t>test_check_winner_horizontal</a:t>
+            </a:r>
+            <a:r>
+              <a:rPr lang="de-DE" sz="980" dirty="0">
+                <a:solidFill>
+                  <a:srgbClr val="ABB2BF"/>
+                </a:solidFill>
+                <a:latin typeface="Consolas" pitchFamily="49" charset="0"/>
+              </a:rPr>
+              <a:t>(self):</a:t>
+            </a:r>
+          </a:p>
+          <a:p>
+            <a:pPr marL="0" indent="0" algn="l">
+              <a:buNone/>
+            </a:pPr>
+            <a:r>
+              <a:rPr lang="de-DE" sz="980" dirty="0">
+                <a:solidFill>
+                  <a:srgbClr val="ABB2BF"/>
+                </a:solidFill>
+                <a:latin typeface="Consolas" pitchFamily="49" charset="0"/>
+              </a:rPr>
+              <a:t>    board = ttt.</a:t>
+            </a:r>
+            <a:r>
+              <a:rPr lang="de-DE" sz="980" dirty="0">
+                <a:solidFill>
+                  <a:srgbClr val="61AFEF"/>
+                </a:solidFill>
+                <a:latin typeface="Consolas" pitchFamily="49" charset="0"/>
+              </a:rPr>
+              <a:t>create_board</a:t>
+            </a:r>
+            <a:r>
+              <a:rPr lang="de-DE" sz="980" dirty="0">
+                <a:solidFill>
+                  <a:srgbClr val="ABB2BF"/>
+                </a:solidFill>
+                <a:latin typeface="Consolas" pitchFamily="49" charset="0"/>
+              </a:rPr>
+              <a:t>()</a:t>
+            </a:r>
+          </a:p>
+          <a:p>
+            <a:pPr marL="0" indent="0" algn="l">
+              <a:buNone/>
+            </a:pPr>
+            <a:r>
+              <a:rPr lang="de-DE" sz="980" dirty="0">
+                <a:solidFill>
+                  <a:srgbClr val="ABB2BF"/>
+                </a:solidFill>
+                <a:latin typeface="Consolas" pitchFamily="49" charset="0"/>
+              </a:rPr>
+              <a:t>    </a:t>
+            </a:r>
+            <a:r>
+              <a:rPr lang="de-DE" sz="980" dirty="0">
+                <a:solidFill>
+                  <a:srgbClr val="56B6C2"/>
+                </a:solidFill>
+                <a:latin typeface="Consolas" pitchFamily="49" charset="0"/>
+              </a:rPr>
+              <a:t>for</a:t>
+            </a:r>
+            <a:r>
+              <a:rPr lang="de-DE" sz="980" dirty="0">
+                <a:solidFill>
+                  <a:srgbClr val="ABB2BF"/>
+                </a:solidFill>
+                <a:latin typeface="Consolas" pitchFamily="49" charset="0"/>
+              </a:rPr>
+              <a:t> col </a:t>
+            </a:r>
+            <a:r>
+              <a:rPr lang="de-DE" sz="980" dirty="0">
+                <a:solidFill>
+                  <a:srgbClr val="56B6C2"/>
+                </a:solidFill>
+                <a:latin typeface="Consolas" pitchFamily="49" charset="0"/>
+              </a:rPr>
+              <a:t>in</a:t>
+            </a:r>
+            <a:r>
+              <a:rPr lang="de-DE" sz="980" dirty="0">
+                <a:solidFill>
+                  <a:srgbClr val="ABB2BF"/>
+                </a:solidFill>
+                <a:latin typeface="Consolas" pitchFamily="49" charset="0"/>
+              </a:rPr>
+              <a:t> </a:t>
+            </a:r>
+            <a:r>
+              <a:rPr lang="de-DE" sz="980" dirty="0">
+                <a:solidFill>
+                  <a:srgbClr val="61AFEF"/>
+                </a:solidFill>
+                <a:latin typeface="Consolas" pitchFamily="49" charset="0"/>
+              </a:rPr>
+              <a:t>range</a:t>
+            </a:r>
+            <a:r>
+              <a:rPr lang="de-DE" sz="980" dirty="0">
+                <a:solidFill>
+                  <a:srgbClr val="ABB2BF"/>
+                </a:solidFill>
+                <a:latin typeface="Consolas" pitchFamily="49" charset="0"/>
+              </a:rPr>
+              <a:t>(4):</a:t>
+            </a:r>
+          </a:p>
+          <a:p>
+            <a:pPr marL="0" indent="0" algn="l">
+              <a:buNone/>
+            </a:pPr>
+            <a:r>
+              <a:rPr lang="de-DE" sz="980" dirty="0">
+                <a:solidFill>
+                  <a:srgbClr val="ABB2BF"/>
+                </a:solidFill>
+                <a:latin typeface="Consolas" pitchFamily="49" charset="0"/>
+              </a:rPr>
+              <a:t>        board[0][col] = ttt.HUMAN</a:t>
+            </a:r>
+          </a:p>
+          <a:p>
+            <a:pPr marL="0" indent="0" algn="l">
+              <a:buNone/>
+            </a:pPr>
+            <a:r>
+              <a:rPr lang="de-DE" sz="980" dirty="0">
+                <a:solidFill>
+                  <a:srgbClr val="ABB2BF"/>
+                </a:solidFill>
+                <a:latin typeface="Consolas" pitchFamily="49" charset="0"/>
+              </a:rPr>
+              <a:t>    self.</a:t>
+            </a:r>
+            <a:r>
+              <a:rPr lang="de-DE" sz="980" dirty="0">
+                <a:solidFill>
+                  <a:srgbClr val="61AFEF"/>
+                </a:solidFill>
+                <a:latin typeface="Consolas" pitchFamily="49" charset="0"/>
+              </a:rPr>
+              <a:t>assertEqual</a:t>
+            </a:r>
+            <a:r>
+              <a:rPr lang="de-DE" sz="980" dirty="0">
+                <a:solidFill>
+                  <a:srgbClr val="ABB2BF"/>
+                </a:solidFill>
+                <a:latin typeface="Consolas" pitchFamily="49" charset="0"/>
+              </a:rPr>
+              <a:t>(</a:t>
+            </a:r>
+          </a:p>
+          <a:p>
+            <a:pPr marL="0" indent="0" algn="l">
+              <a:buNone/>
+            </a:pPr>
+            <a:r>
+              <a:rPr lang="de-DE" sz="980" dirty="0">
+                <a:solidFill>
+                  <a:srgbClr val="ABB2BF"/>
+                </a:solidFill>
+                <a:latin typeface="Consolas" pitchFamily="49" charset="0"/>
+              </a:rPr>
+              <a:t>        ttt.</a:t>
+            </a:r>
+            <a:r>
+              <a:rPr lang="de-DE" sz="980" dirty="0">
+                <a:solidFill>
+                  <a:srgbClr val="61AFEF"/>
+                </a:solidFill>
+                <a:latin typeface="Consolas" pitchFamily="49" charset="0"/>
+              </a:rPr>
+              <a:t>check_winner</a:t>
+            </a:r>
+            <a:r>
+              <a:rPr lang="de-DE" sz="980" dirty="0">
+                <a:solidFill>
+                  <a:srgbClr val="ABB2BF"/>
+                </a:solidFill>
+                <a:latin typeface="Consolas" pitchFamily="49" charset="0"/>
+              </a:rPr>
+              <a:t>(board), </a:t>
+            </a:r>
+            <a:r>
+              <a:rPr lang="de-DE" sz="980" dirty="0">
+                <a:solidFill>
+                  <a:srgbClr val="98C379"/>
+                </a:solidFill>
+                <a:latin typeface="Consolas" pitchFamily="49" charset="0"/>
+              </a:rPr>
+              <a:t>"human"</a:t>
+            </a:r>
+            <a:r>
+              <a:rPr lang="de-DE" sz="980" dirty="0">
+                <a:solidFill>
+                  <a:srgbClr val="ABB2BF"/>
+                </a:solidFill>
+                <a:latin typeface="Consolas" pitchFamily="49" charset="0"/>
+              </a:rPr>
+              <a:t>)</a:t>
+            </a:r>
+          </a:p>
+          <a:p>
+            <a:pPr marL="0" indent="0" algn="l">
+              <a:buNone/>
+            </a:pPr>
+            <a:endParaRPr lang="de-DE" sz="980" dirty="0">
+              <a:solidFill>
+                <a:srgbClr val="ABB2BF"/>
+              </a:solidFill>
+              <a:latin typeface="Consolas" pitchFamily="49" charset="0"/>
+            </a:endParaRPr>
+          </a:p>
+          <a:p>
+            <a:pPr marL="0" indent="0" algn="l">
+              <a:buNone/>
+            </a:pPr>
+            <a:r>
+              <a:rPr lang="de-DE" sz="980" dirty="0" i="1">
+                <a:solidFill>
+                  <a:srgbClr val="5C6370"/>
+                </a:solidFill>
+                <a:latin typeface="Consolas" pitchFamily="49" charset="0"/>
+              </a:rPr>
+              <a:t># TC-13: KI spielt Gewinnzug (Tiefe 1)</a:t>
+            </a:r>
+          </a:p>
+          <a:p>
+            <a:pPr marL="0" indent="0" algn="l">
+              <a:buNone/>
+            </a:pPr>
+            <a:r>
+              <a:rPr lang="de-DE" sz="980" dirty="0">
+                <a:solidFill>
+                  <a:srgbClr val="56B6C2"/>
+                </a:solidFill>
+                <a:latin typeface="Consolas" pitchFamily="49" charset="0"/>
+              </a:rPr>
+              <a:t>def</a:t>
+            </a:r>
+            <a:r>
+              <a:rPr lang="de-DE" sz="980" dirty="0">
+                <a:solidFill>
+                  <a:srgbClr val="ABB2BF"/>
+                </a:solidFill>
+                <a:latin typeface="Consolas" pitchFamily="49" charset="0"/>
+              </a:rPr>
+              <a:t> </a:t>
+            </a:r>
+            <a:r>
+              <a:rPr lang="de-DE" sz="980" dirty="0">
+                <a:solidFill>
+                  <a:srgbClr val="61AFEF"/>
+                </a:solidFill>
+                <a:latin typeface="Consolas" pitchFamily="49" charset="0"/>
+              </a:rPr>
+              <a:t>test_ai_takes_winning_move</a:t>
+            </a:r>
+            <a:r>
+              <a:rPr lang="de-DE" sz="980" dirty="0">
+                <a:solidFill>
+                  <a:srgbClr val="ABB2BF"/>
+                </a:solidFill>
+                <a:latin typeface="Consolas" pitchFamily="49" charset="0"/>
+              </a:rPr>
+              <a:t>(self):</a:t>
+            </a:r>
+          </a:p>
+          <a:p>
+            <a:pPr marL="0" indent="0" algn="l">
+              <a:buNone/>
+            </a:pPr>
+            <a:r>
+              <a:rPr lang="de-DE" sz="980" dirty="0">
+                <a:solidFill>
+                  <a:srgbClr val="ABB2BF"/>
+                </a:solidFill>
+                <a:latin typeface="Consolas" pitchFamily="49" charset="0"/>
+              </a:rPr>
+              <a:t>    </a:t>
+            </a:r>
+            <a:r>
+              <a:rPr lang="de-DE" sz="980" dirty="0">
+                <a:solidFill>
+                  <a:srgbClr val="56B6C2"/>
+                </a:solidFill>
+                <a:latin typeface="Consolas" pitchFamily="49" charset="0"/>
+              </a:rPr>
+              <a:t>for</a:t>
+            </a:r>
+            <a:r>
+              <a:rPr lang="de-DE" sz="980" dirty="0">
+                <a:solidFill>
+                  <a:srgbClr val="ABB2BF"/>
+                </a:solidFill>
+                <a:latin typeface="Consolas" pitchFamily="49" charset="0"/>
+              </a:rPr>
+              <a:t> col </a:t>
+            </a:r>
+            <a:r>
+              <a:rPr lang="de-DE" sz="980" dirty="0">
+                <a:solidFill>
+                  <a:srgbClr val="56B6C2"/>
+                </a:solidFill>
+                <a:latin typeface="Consolas" pitchFamily="49" charset="0"/>
+              </a:rPr>
+              <a:t>in</a:t>
+            </a:r>
+            <a:r>
+              <a:rPr lang="de-DE" sz="980" dirty="0">
+                <a:solidFill>
+                  <a:srgbClr val="ABB2BF"/>
+                </a:solidFill>
+                <a:latin typeface="Consolas" pitchFamily="49" charset="0"/>
+              </a:rPr>
+              <a:t> </a:t>
+            </a:r>
+            <a:r>
+              <a:rPr lang="de-DE" sz="980" dirty="0">
+                <a:solidFill>
+                  <a:srgbClr val="61AFEF"/>
+                </a:solidFill>
+                <a:latin typeface="Consolas" pitchFamily="49" charset="0"/>
+              </a:rPr>
+              <a:t>range</a:t>
+            </a:r>
+            <a:r>
+              <a:rPr lang="de-DE" sz="980" dirty="0">
+                <a:solidFill>
+                  <a:srgbClr val="ABB2BF"/>
+                </a:solidFill>
+                <a:latin typeface="Consolas" pitchFamily="49" charset="0"/>
+              </a:rPr>
+              <a:t>(3):</a:t>
+            </a:r>
+          </a:p>
+          <a:p>
+            <a:pPr marL="0" indent="0" algn="l">
+              <a:buNone/>
+            </a:pPr>
+            <a:r>
+              <a:rPr lang="de-DE" sz="980" dirty="0">
+                <a:solidFill>
+                  <a:srgbClr val="ABB2BF"/>
+                </a:solidFill>
+                <a:latin typeface="Consolas" pitchFamily="49" charset="0"/>
+              </a:rPr>
+              <a:t>        board[0][col] = ttt.AI</a:t>
+            </a:r>
+          </a:p>
+          <a:p>
+            <a:pPr marL="0" indent="0" algn="l">
+              <a:buNone/>
+            </a:pPr>
+            <a:r>
+              <a:rPr lang="de-DE" sz="980" dirty="0">
+                <a:solidFill>
+                  <a:srgbClr val="ABB2BF"/>
+                </a:solidFill>
+                <a:latin typeface="Consolas" pitchFamily="49" charset="0"/>
+              </a:rPr>
+              <a:t>    self.</a:t>
+            </a:r>
+            <a:r>
+              <a:rPr lang="de-DE" sz="980" dirty="0">
+                <a:solidFill>
+                  <a:srgbClr val="61AFEF"/>
+                </a:solidFill>
+                <a:latin typeface="Consolas" pitchFamily="49" charset="0"/>
+              </a:rPr>
+              <a:t>assertEqual</a:t>
+            </a:r>
+            <a:r>
+              <a:rPr lang="de-DE" sz="980" dirty="0">
+                <a:solidFill>
+                  <a:srgbClr val="ABB2BF"/>
+                </a:solidFill>
+                <a:latin typeface="Consolas" pitchFamily="49" charset="0"/>
+              </a:rPr>
+              <a:t>(</a:t>
+            </a:r>
+          </a:p>
+          <a:p>
+            <a:pPr marL="0" indent="0" algn="l">
+              <a:buNone/>
+            </a:pPr>
+            <a:r>
+              <a:rPr lang="de-DE" sz="980" dirty="0">
+                <a:solidFill>
+                  <a:srgbClr val="ABB2BF"/>
+                </a:solidFill>
+                <a:latin typeface="Consolas" pitchFamily="49" charset="0"/>
+              </a:rPr>
+              <a:t>        self.</a:t>
+            </a:r>
+            <a:r>
+              <a:rPr lang="de-DE" sz="980" dirty="0">
+                <a:solidFill>
+                  <a:srgbClr val="61AFEF"/>
+                </a:solidFill>
+                <a:latin typeface="Consolas" pitchFamily="49" charset="0"/>
+              </a:rPr>
+              <a:t>_best</a:t>
+            </a:r>
+            <a:r>
+              <a:rPr lang="de-DE" sz="980" dirty="0">
+                <a:solidFill>
+                  <a:srgbClr val="ABB2BF"/>
+                </a:solidFill>
+                <a:latin typeface="Consolas" pitchFamily="49" charset="0"/>
+              </a:rPr>
+              <a:t>(board, 1), (0, 3))</a:t>
+            </a:r>
+          </a:p>
+        </p:txBody>
+      </p:sp>
+      <p:sp>
+        <p:nvSpPr>
+          <p:cNvPr id="7" name="BulletCard"/>
+          <p:cNvSpPr/>
+          <p:nvPr/>
+        </p:nvSpPr>
+        <p:spPr>
+          <a:xfrm>
+            <a:off x="5707200" y="1234440"/>
+            <a:ext cx="3071040" cy="3650000"/>
+          </a:xfrm>
+          <a:prstGeom prst="rect">
+            <a:avLst/>
+          </a:prstGeom>
+          <a:solidFill>
+            <a:srgbClr val="FFFFFF"/>
+          </a:solidFill>
+          <a:ln w="6350">
+            <a:solidFill>
+              <a:srgbClr val="D0D7E8"/>
+            </a:solidFill>
+            <a:prstDash val="solid"/>
+          </a:ln>
+        </p:spPr>
+        <p:txBody>
+          <a:bodyPr/>
+          <a:lstStyle/>
+          <a:p>
+            <a:endParaRPr lang="de-DE"/>
+          </a:p>
+        </p:txBody>
+      </p:sp>
+      <p:sp>
+        <p:nvSpPr>
+          <p:cNvPr id="8" name="BulletText"/>
+          <p:cNvSpPr/>
+          <p:nvPr/>
+        </p:nvSpPr>
+        <p:spPr>
+          <a:xfrm>
+            <a:off x="5798640" y="1325880"/>
+            <a:ext cx="2888160" cy="3467120"/>
+          </a:xfrm>
+          <a:prstGeom prst="rect">
+            <a:avLst/>
+          </a:prstGeom>
+          <a:noFill/>
+          <a:ln/>
+        </p:spPr>
+        <p:txBody>
+          <a:bodyPr wrap="square" lIns="114300" tIns="91440" rIns="114300" bIns="91440" rtlCol="0" anchor="t"/>
+          <a:lstStyle/>
+          <a:p>
+            <a:pPr marL="0" indent="0">
+              <a:buNone/>
+            </a:pPr>
+            <a:r>
+              <a:rPr lang="de-DE" sz="1150" b="1" dirty="0">
+                <a:solidFill>
+                  <a:srgbClr val="2A3A5E"/>
+                </a:solidFill>
+                <a:latin typeface="Calibri"/>
+              </a:rPr>
+              <a:t>DBTestCase</a:t>
+            </a:r>
+            <a:r>
+              <a:rPr lang="de-DE" sz="1000" dirty="0">
+                <a:solidFill>
+                  <a:srgbClr val="8892A4"/>
+                </a:solidFill>
+                <a:latin typeface="Calibri"/>
+              </a:rPr>
+              <a:t>
+Jeder Test: frische Temp-DB via tempfile + unittest.mock.patch</a:t>
+            </a:r>
+          </a:p>
+          <a:p>
+            <a:pPr marL="0" indent="0">
+              <a:buNone/>
+            </a:pPr>
+            <a:r>
+              <a:rPr lang="de-DE" sz="1150" b="1" dirty="0">
+                <a:solidFill>
+                  <a:srgbClr val="2A3A5E"/>
+                </a:solidFill>
+                <a:latin typeface="Calibri"/>
+              </a:rPr>
+              <a:t>patch.object</a:t>
+            </a:r>
+            <a:r>
+              <a:rPr lang="de-DE" sz="1000" dirty="0">
+                <a:solidFill>
+                  <a:srgbClr val="8892A4"/>
+                </a:solidFill>
+                <a:latin typeface="Calibri"/>
+              </a:rPr>
+              <a:t>
+DB_PATH auf temporäre Datei umgeleitet – keine Produktions-DB</a:t>
+            </a:r>
+          </a:p>
+          <a:p>
+            <a:pPr marL="0" indent="0">
+              <a:buNone/>
+            </a:pPr>
+            <a:r>
+              <a:rPr lang="de-DE" sz="1150" b="1" dirty="0">
+                <a:solidFill>
+                  <a:srgbClr val="2A3A5E"/>
+                </a:solidFill>
+                <a:latin typeface="Calibri"/>
+              </a:rPr>
+              <a:t>TC-09 / assertEqual</a:t>
+            </a:r>
+            <a:r>
+              <a:rPr lang="de-DE" sz="1000" dirty="0">
+                <a:solidFill>
+                  <a:srgbClr val="8892A4"/>
+                </a:solidFill>
+                <a:latin typeface="Calibri"/>
+              </a:rPr>
+              <a:t>
+4 in einer Reihe korrekt als Sieg erkannt</a:t>
+            </a:r>
+          </a:p>
+          <a:p>
+            <a:pPr marL="0" indent="0">
+              <a:buNone/>
+            </a:pPr>
+            <a:r>
+              <a:rPr lang="de-DE" sz="1150" b="1" dirty="0">
+                <a:solidFill>
+                  <a:srgbClr val="2A3A5E"/>
+                </a:solidFill>
+                <a:latin typeface="Calibri"/>
+              </a:rPr>
+              <a:t>TC-13 / get_best_move</a:t>
+            </a:r>
+            <a:r>
+              <a:rPr lang="de-DE" sz="1000" dirty="0">
+                <a:solidFill>
+                  <a:srgbClr val="8892A4"/>
+                </a:solidFill>
+                <a:latin typeface="Calibri"/>
+              </a:rPr>
+              <a:t>
+KI findet sofortigen Gewinnzug bei Tiefe 1 (&lt;1 ms)</a:t>
+            </a:r>
+          </a:p>
+          <a:p>
+            <a:pPr marL="0" indent="0">
+              <a:buNone/>
+            </a:pPr>
+            <a:r>
+              <a:rPr lang="de-DE" sz="1150" b="1" dirty="0">
+                <a:solidFill>
+                  <a:srgbClr val="2A3A5E"/>
+                </a:solidFill>
+                <a:latin typeface="Calibri"/>
+              </a:rPr>
+              <a:t>60 Testfälle</a:t>
+            </a:r>
+            <a:r>
+              <a:rPr lang="de-DE" sz="1000" dirty="0">
+                <a:solidFill>
+                  <a:srgbClr val="8892A4"/>
+                </a:solidFill>
+                <a:latin typeface="Calibri"/>
+              </a:rPr>
+              <a:t>
+8 Klassen · alle ohne GUI · pytest-kompatibel</a:t>
+            </a:r>
+          </a:p>
+        </p:txBody>
+      </p:sp>
+      <p:sp>
+        <p:nvSpPr>
+          <p:cNvPr id="9" name="Textfeld 8">
+            <a:extLst>
+              <a:ext uri="{FF2B5EF4-FFF2-40B4-BE49-F238E27FC236}">
+                <a16:creationId xmlns:a16="http://schemas.microsoft.com/office/drawing/2014/main" id="{41A0E3FF-07AA-6F45-D8BC-FC914ECDF56E}"/>
+              </a:ext>
+            </a:extLst>
+          </p:cNvPr>
+          <p:cNvSpPr txBox="1"/>
+          <p:nvPr/>
+        </p:nvSpPr>
+        <p:spPr>
+          <a:xfrm>
+            <a:off x="8737093" y="4875028"/>
+            <a:ext cx="228600" cy="215444"/>
+          </a:xfrm>
+          <a:prstGeom prst="rect">
+            <a:avLst/>
+          </a:prstGeom>
+          <a:noFill/>
+        </p:spPr>
+        <p:txBody>
+          <a:bodyPr wrap="square" rtlCol="0">
+            <a:spAutoFit/>
+          </a:bodyPr>
+          <a:lstStyle/>
+          <a:p>
+            <a:r>
+              <a:rPr lang="de-DE" sz="800" dirty="0"/>
               <a:t>15</a:t>
             </a:r>
           </a:p>
@@ -14511,7 +15642,7 @@
                 <a:ea typeface="Calibri" pitchFamily="34" charset="-122"/>
                 <a:cs typeface="Calibri" pitchFamily="34" charset="-120"/>
               </a:rPr>
-              <a:t>6</a:t>
+              <a:t>5</a:t>
             </a:r>
             <a:endParaRPr lang="de-DE" sz="800" dirty="0"/>
           </a:p>

--- a/Präsentation/Präsentation_Projekt/HHBKTendo_Praesentation_1.pptx
+++ b/Präsentation/Präsentation_Projekt/HHBKTendo_Praesentation_1.pptx
@@ -5,7 +5,7 @@
     <p:sldMasterId id="2147483648" r:id="rId1"/>
   </p:sldMasterIdLst>
   <p:notesMasterIdLst>
-    <p:notesMasterId r:id="rId17"/>
+    <p:notesMasterId r:id="rId18"/>
   </p:notesMasterIdLst>
   <p:sldIdLst>
     <p:sldId id="256" r:id="rId2"/>
@@ -22,8 +22,8 @@
     <p:sldId id="269" r:id="rId13"/>
     <p:sldId id="270" r:id="rId14"/>
     <p:sldId id="263" r:id="rId15"/>
-    <p:sldId id="271" r:id="rId22"/>
-    <p:sldId id="264" r:id="rId16"/>
+    <p:sldId id="271" r:id="rId16"/>
+    <p:sldId id="264" r:id="rId17"/>
   </p:sldIdLst>
   <p:sldSz cx="9144000" cy="5143500" type="screen16x9"/>
   <p:notesSz cx="5143500" cy="9144000"/>
@@ -989,7 +989,7 @@
           <a:p>
             <a:fld id="{F7021451-1387-4CA6-816F-3879F97B5CBC}" type="slidenum">
               <a:rPr lang="en-US"/>
-              <a:t>15</a:t>
+              <a:t>16</a:t>
             </a:fld>
             <a:endParaRPr lang="en-US"/>
           </a:p>
@@ -9403,6 +9403,1143 @@
 
 <file path=ppt/slides/slide15.xml><?xml version="1.0" encoding="utf-8"?>
 <p:sld xmlns:a="http://schemas.openxmlformats.org/drawingml/2006/main" xmlns:r="http://schemas.openxmlformats.org/officeDocument/2006/relationships" xmlns:p="http://schemas.openxmlformats.org/presentationml/2006/main">
+  <p:cSld>
+    <p:bg>
+      <p:bgPr>
+        <a:solidFill>
+          <a:srgbClr val="F0F4FF"/>
+        </a:solidFill>
+        <a:effectLst/>
+      </p:bgPr>
+    </p:bg>
+    <p:spTree>
+      <p:nvGrpSpPr>
+        <p:cNvPr id="1" name=""/>
+        <p:cNvGrpSpPr/>
+        <p:nvPr/>
+      </p:nvGrpSpPr>
+      <p:grpSpPr>
+        <a:xfrm>
+          <a:off x="0" y="0"/>
+          <a:ext cx="0" cy="0"/>
+          <a:chOff x="0" y="0"/>
+          <a:chExt cx="0" cy="0"/>
+        </a:xfrm>
+      </p:grpSpPr>
+      <p:sp>
+        <p:nvSpPr>
+          <p:cNvPr id="2" name="AccentStripe"/>
+          <p:cNvSpPr/>
+          <p:nvPr/>
+        </p:nvSpPr>
+        <p:spPr>
+          <a:xfrm>
+            <a:off x="0" y="0"/>
+            <a:ext cx="91440" cy="5143500"/>
+          </a:xfrm>
+          <a:prstGeom prst="rect">
+            <a:avLst/>
+          </a:prstGeom>
+          <a:solidFill>
+            <a:srgbClr val="4472C4"/>
+          </a:solidFill>
+        </p:spPr>
+        <p:txBody>
+          <a:bodyPr/>
+          <a:lstStyle/>
+          <a:p>
+            <a:endParaRPr lang="de-DE"/>
+          </a:p>
+        </p:txBody>
+      </p:sp>
+      <p:sp>
+        <p:nvSpPr>
+          <p:cNvPr id="3" name="Title"/>
+          <p:cNvSpPr/>
+          <p:nvPr/>
+        </p:nvSpPr>
+        <p:spPr>
+          <a:xfrm>
+            <a:off x="457200" y="256032"/>
+            <a:ext cx="8229600" cy="594360"/>
+          </a:xfrm>
+          <a:prstGeom prst="rect">
+            <a:avLst/>
+          </a:prstGeom>
+          <a:noFill/>
+          <a:ln/>
+        </p:spPr>
+        <p:txBody>
+          <a:bodyPr wrap="square" lIns="114300" tIns="91440" rIns="114300" bIns="91440" rtlCol="0" anchor="ctr"/>
+          <a:lstStyle/>
+          <a:p>
+            <a:pPr marL="0" indent="0" algn="l">
+              <a:buNone/>
+            </a:pPr>
+            <a:r>
+              <a:rPr lang="de-DE" sz="2800" b="1" dirty="0">
+                <a:solidFill>
+                  <a:srgbClr val="1A1A2E"/>
+                </a:solidFill>
+                <a:latin typeface="Arial Black" pitchFamily="49" charset="0"/>
+              </a:rPr>
+              <a:t>test_all.py – Unittest-Framework</a:t>
+            </a:r>
+          </a:p>
+        </p:txBody>
+      </p:sp>
+      <p:sp>
+        <p:nvSpPr>
+          <p:cNvPr id="4" name="Subtitle"/>
+          <p:cNvSpPr/>
+          <p:nvPr/>
+        </p:nvSpPr>
+        <p:spPr>
+          <a:xfrm>
+            <a:off x="457200" y="804672"/>
+            <a:ext cx="8229600" cy="320040"/>
+          </a:xfrm>
+          <a:prstGeom prst="rect">
+            <a:avLst/>
+          </a:prstGeom>
+          <a:noFill/>
+          <a:ln/>
+        </p:spPr>
+        <p:txBody>
+          <a:bodyPr wrap="square" lIns="114300" tIns="91440" rIns="114300" bIns="91440" rtlCol="0" anchor="ctr"/>
+          <a:lstStyle/>
+          <a:p>
+            <a:pPr marL="0" indent="0" algn="l">
+              <a:buNone/>
+            </a:pPr>
+            <a:r>
+              <a:rPr lang="de-DE" sz="1200" dirty="0">
+                <a:solidFill>
+                  <a:srgbClr val="8892A4"/>
+                </a:solidFill>
+                <a:latin typeface="Calibri" pitchFamily="49" charset="0"/>
+              </a:rPr>
+              <a:t>unittest · Temp-DB-Isolation · Mocking · TC-01 bis TC-15</a:t>
+            </a:r>
+          </a:p>
+        </p:txBody>
+      </p:sp>
+      <p:sp>
+        <p:nvSpPr>
+          <p:cNvPr id="5" name="CodeCard"/>
+          <p:cNvSpPr/>
+          <p:nvPr/>
+        </p:nvSpPr>
+        <p:spPr>
+          <a:xfrm>
+            <a:off x="365760" y="1234440"/>
+            <a:ext cx="5250000" cy="3650000"/>
+          </a:xfrm>
+          <a:prstGeom prst="rect">
+            <a:avLst/>
+          </a:prstGeom>
+          <a:solidFill>
+            <a:srgbClr val="121224"/>
+          </a:solidFill>
+          <a:ln w="9525">
+            <a:solidFill>
+              <a:srgbClr val="4472C4"/>
+            </a:solidFill>
+            <a:prstDash val="solid"/>
+          </a:ln>
+        </p:spPr>
+        <p:txBody>
+          <a:bodyPr/>
+          <a:lstStyle/>
+          <a:p>
+            <a:endParaRPr lang="de-DE"/>
+          </a:p>
+        </p:txBody>
+      </p:sp>
+      <p:sp>
+        <p:nvSpPr>
+          <p:cNvPr id="6" name="CodeText"/>
+          <p:cNvSpPr/>
+          <p:nvPr/>
+        </p:nvSpPr>
+        <p:spPr>
+          <a:xfrm>
+            <a:off x="457200" y="1325880"/>
+            <a:ext cx="5067120" cy="3467120"/>
+          </a:xfrm>
+          <a:prstGeom prst="rect">
+            <a:avLst/>
+          </a:prstGeom>
+          <a:noFill/>
+          <a:ln/>
+        </p:spPr>
+        <p:txBody>
+          <a:bodyPr wrap="square" lIns="114300" tIns="91440" rIns="114300" bIns="91440" rtlCol="0" anchor="t"/>
+          <a:lstStyle/>
+          <a:p>
+            <a:pPr marL="0" indent="0" algn="l">
+              <a:buNone/>
+            </a:pPr>
+            <a:r>
+              <a:rPr lang="de-DE" sz="980" i="1" dirty="0">
+                <a:solidFill>
+                  <a:srgbClr val="5C6370"/>
+                </a:solidFill>
+                <a:latin typeface="Consolas" pitchFamily="49" charset="0"/>
+              </a:rPr>
+              <a:t># Temp-DB isoliert jeden Testfall</a:t>
+            </a:r>
+          </a:p>
+          <a:p>
+            <a:pPr marL="0" indent="0" algn="l">
+              <a:buNone/>
+            </a:pPr>
+            <a:r>
+              <a:rPr lang="de-DE" sz="980" dirty="0">
+                <a:solidFill>
+                  <a:srgbClr val="56B6C2"/>
+                </a:solidFill>
+                <a:latin typeface="Consolas" pitchFamily="49" charset="0"/>
+              </a:rPr>
+              <a:t>class</a:t>
+            </a:r>
+            <a:r>
+              <a:rPr lang="de-DE" sz="980" dirty="0">
+                <a:solidFill>
+                  <a:srgbClr val="ABB2BF"/>
+                </a:solidFill>
+                <a:latin typeface="Consolas" pitchFamily="49" charset="0"/>
+              </a:rPr>
+              <a:t> </a:t>
+            </a:r>
+            <a:r>
+              <a:rPr lang="de-DE" sz="980" dirty="0">
+                <a:solidFill>
+                  <a:srgbClr val="61AFEF"/>
+                </a:solidFill>
+                <a:latin typeface="Consolas" pitchFamily="49" charset="0"/>
+              </a:rPr>
+              <a:t>DBTestCase</a:t>
+            </a:r>
+            <a:r>
+              <a:rPr lang="de-DE" sz="980" dirty="0">
+                <a:solidFill>
+                  <a:srgbClr val="ABB2BF"/>
+                </a:solidFill>
+                <a:latin typeface="Consolas" pitchFamily="49" charset="0"/>
+              </a:rPr>
+              <a:t>(unittest.TestCase):</a:t>
+            </a:r>
+          </a:p>
+          <a:p>
+            <a:pPr marL="0" indent="0" algn="l">
+              <a:buNone/>
+            </a:pPr>
+            <a:r>
+              <a:rPr lang="de-DE" sz="980" dirty="0">
+                <a:solidFill>
+                  <a:srgbClr val="ABB2BF"/>
+                </a:solidFill>
+                <a:latin typeface="Consolas" pitchFamily="49" charset="0"/>
+              </a:rPr>
+              <a:t>    </a:t>
+            </a:r>
+            <a:r>
+              <a:rPr lang="de-DE" sz="980" dirty="0">
+                <a:solidFill>
+                  <a:srgbClr val="56B6C2"/>
+                </a:solidFill>
+                <a:latin typeface="Consolas" pitchFamily="49" charset="0"/>
+              </a:rPr>
+              <a:t>def</a:t>
+            </a:r>
+            <a:r>
+              <a:rPr lang="de-DE" sz="980" dirty="0">
+                <a:solidFill>
+                  <a:srgbClr val="ABB2BF"/>
+                </a:solidFill>
+                <a:latin typeface="Consolas" pitchFamily="49" charset="0"/>
+              </a:rPr>
+              <a:t> </a:t>
+            </a:r>
+            <a:r>
+              <a:rPr lang="de-DE" sz="980" dirty="0">
+                <a:solidFill>
+                  <a:srgbClr val="61AFEF"/>
+                </a:solidFill>
+                <a:latin typeface="Consolas" pitchFamily="49" charset="0"/>
+              </a:rPr>
+              <a:t>setUp</a:t>
+            </a:r>
+            <a:r>
+              <a:rPr lang="de-DE" sz="980" dirty="0">
+                <a:solidFill>
+                  <a:srgbClr val="ABB2BF"/>
+                </a:solidFill>
+                <a:latin typeface="Consolas" pitchFamily="49" charset="0"/>
+              </a:rPr>
+              <a:t>(self):</a:t>
+            </a:r>
+          </a:p>
+          <a:p>
+            <a:pPr marL="0" indent="0" algn="l">
+              <a:buNone/>
+            </a:pPr>
+            <a:r>
+              <a:rPr lang="de-DE" sz="980" dirty="0">
+                <a:solidFill>
+                  <a:srgbClr val="ABB2BF"/>
+                </a:solidFill>
+                <a:latin typeface="Consolas" pitchFamily="49" charset="0"/>
+              </a:rPr>
+              <a:t>        _, path = tempfile.</a:t>
+            </a:r>
+            <a:r>
+              <a:rPr lang="de-DE" sz="980" dirty="0">
+                <a:solidFill>
+                  <a:srgbClr val="61AFEF"/>
+                </a:solidFill>
+                <a:latin typeface="Consolas" pitchFamily="49" charset="0"/>
+              </a:rPr>
+              <a:t>mkstemp</a:t>
+            </a:r>
+            <a:r>
+              <a:rPr lang="de-DE" sz="980" dirty="0">
+                <a:solidFill>
+                  <a:srgbClr val="ABB2BF"/>
+                </a:solidFill>
+                <a:latin typeface="Consolas" pitchFamily="49" charset="0"/>
+              </a:rPr>
+              <a:t>(</a:t>
+            </a:r>
+            <a:r>
+              <a:rPr lang="de-DE" sz="980" dirty="0">
+                <a:solidFill>
+                  <a:srgbClr val="98C379"/>
+                </a:solidFill>
+                <a:latin typeface="Consolas" pitchFamily="49" charset="0"/>
+              </a:rPr>
+              <a:t>".db"</a:t>
+            </a:r>
+            <a:r>
+              <a:rPr lang="de-DE" sz="980" dirty="0">
+                <a:solidFill>
+                  <a:srgbClr val="ABB2BF"/>
+                </a:solidFill>
+                <a:latin typeface="Consolas" pitchFamily="49" charset="0"/>
+              </a:rPr>
+              <a:t>)</a:t>
+            </a:r>
+          </a:p>
+          <a:p>
+            <a:pPr marL="0" indent="0" algn="l">
+              <a:buNone/>
+            </a:pPr>
+            <a:r>
+              <a:rPr lang="de-DE" sz="980" dirty="0">
+                <a:solidFill>
+                  <a:srgbClr val="ABB2BF"/>
+                </a:solidFill>
+                <a:latin typeface="Consolas" pitchFamily="49" charset="0"/>
+              </a:rPr>
+              <a:t>        self._patch = </a:t>
+            </a:r>
+            <a:r>
+              <a:rPr lang="de-DE" sz="980" dirty="0">
+                <a:solidFill>
+                  <a:srgbClr val="61AFEF"/>
+                </a:solidFill>
+                <a:latin typeface="Consolas" pitchFamily="49" charset="0"/>
+              </a:rPr>
+              <a:t>patch.object</a:t>
+            </a:r>
+            <a:r>
+              <a:rPr lang="de-DE" sz="980" dirty="0">
+                <a:solidFill>
+                  <a:srgbClr val="ABB2BF"/>
+                </a:solidFill>
+                <a:latin typeface="Consolas" pitchFamily="49" charset="0"/>
+              </a:rPr>
+              <a:t>(</a:t>
+            </a:r>
+          </a:p>
+          <a:p>
+            <a:pPr marL="0" indent="0" algn="l">
+              <a:buNone/>
+            </a:pPr>
+            <a:r>
+              <a:rPr lang="de-DE" sz="980" dirty="0">
+                <a:solidFill>
+                  <a:srgbClr val="ABB2BF"/>
+                </a:solidFill>
+                <a:latin typeface="Consolas" pitchFamily="49" charset="0"/>
+              </a:rPr>
+              <a:t>            database, </a:t>
+            </a:r>
+            <a:r>
+              <a:rPr lang="de-DE" sz="980" dirty="0">
+                <a:solidFill>
+                  <a:srgbClr val="98C379"/>
+                </a:solidFill>
+                <a:latin typeface="Consolas" pitchFamily="49" charset="0"/>
+              </a:rPr>
+              <a:t>"DB_PATH"</a:t>
+            </a:r>
+            <a:r>
+              <a:rPr lang="de-DE" sz="980" dirty="0">
+                <a:solidFill>
+                  <a:srgbClr val="ABB2BF"/>
+                </a:solidFill>
+                <a:latin typeface="Consolas" pitchFamily="49" charset="0"/>
+              </a:rPr>
+              <a:t>, path)</a:t>
+            </a:r>
+          </a:p>
+          <a:p>
+            <a:pPr marL="0" indent="0" algn="l">
+              <a:buNone/>
+            </a:pPr>
+            <a:r>
+              <a:rPr lang="de-DE" sz="980" dirty="0">
+                <a:solidFill>
+                  <a:srgbClr val="ABB2BF"/>
+                </a:solidFill>
+                <a:latin typeface="Consolas" pitchFamily="49" charset="0"/>
+              </a:rPr>
+              <a:t>        self._patch.</a:t>
+            </a:r>
+            <a:r>
+              <a:rPr lang="de-DE" sz="980" dirty="0">
+                <a:solidFill>
+                  <a:srgbClr val="61AFEF"/>
+                </a:solidFill>
+                <a:latin typeface="Consolas" pitchFamily="49" charset="0"/>
+              </a:rPr>
+              <a:t>start</a:t>
+            </a:r>
+            <a:r>
+              <a:rPr lang="de-DE" sz="980" dirty="0">
+                <a:solidFill>
+                  <a:srgbClr val="ABB2BF"/>
+                </a:solidFill>
+                <a:latin typeface="Consolas" pitchFamily="49" charset="0"/>
+              </a:rPr>
+              <a:t>(); database.</a:t>
+            </a:r>
+            <a:r>
+              <a:rPr lang="de-DE" sz="980" dirty="0">
+                <a:solidFill>
+                  <a:srgbClr val="61AFEF"/>
+                </a:solidFill>
+                <a:latin typeface="Consolas" pitchFamily="49" charset="0"/>
+              </a:rPr>
+              <a:t>init_db</a:t>
+            </a:r>
+            <a:r>
+              <a:rPr lang="de-DE" sz="980" dirty="0">
+                <a:solidFill>
+                  <a:srgbClr val="ABB2BF"/>
+                </a:solidFill>
+                <a:latin typeface="Consolas" pitchFamily="49" charset="0"/>
+              </a:rPr>
+              <a:t>()</a:t>
+            </a:r>
+          </a:p>
+          <a:p>
+            <a:pPr marL="0" indent="0" algn="l">
+              <a:buNone/>
+            </a:pPr>
+            <a:endParaRPr lang="de-DE" sz="980" dirty="0">
+              <a:solidFill>
+                <a:srgbClr val="ABB2BF"/>
+              </a:solidFill>
+              <a:latin typeface="Consolas" pitchFamily="49" charset="0"/>
+            </a:endParaRPr>
+          </a:p>
+          <a:p>
+            <a:pPr marL="0" indent="0" algn="l">
+              <a:buNone/>
+            </a:pPr>
+            <a:r>
+              <a:rPr lang="de-DE" sz="980" i="1" dirty="0">
+                <a:solidFill>
+                  <a:srgbClr val="5C6370"/>
+                </a:solidFill>
+                <a:latin typeface="Consolas" pitchFamily="49" charset="0"/>
+              </a:rPr>
+              <a:t># TC-09: 4-in-Reihe → Mensch gewinnt</a:t>
+            </a:r>
+          </a:p>
+          <a:p>
+            <a:pPr marL="0" indent="0" algn="l">
+              <a:buNone/>
+            </a:pPr>
+            <a:r>
+              <a:rPr lang="de-DE" sz="980" dirty="0">
+                <a:solidFill>
+                  <a:srgbClr val="56B6C2"/>
+                </a:solidFill>
+                <a:latin typeface="Consolas" pitchFamily="49" charset="0"/>
+              </a:rPr>
+              <a:t>def</a:t>
+            </a:r>
+            <a:r>
+              <a:rPr lang="de-DE" sz="980" dirty="0">
+                <a:solidFill>
+                  <a:srgbClr val="ABB2BF"/>
+                </a:solidFill>
+                <a:latin typeface="Consolas" pitchFamily="49" charset="0"/>
+              </a:rPr>
+              <a:t> </a:t>
+            </a:r>
+            <a:r>
+              <a:rPr lang="de-DE" sz="980" dirty="0">
+                <a:solidFill>
+                  <a:srgbClr val="61AFEF"/>
+                </a:solidFill>
+                <a:latin typeface="Consolas" pitchFamily="49" charset="0"/>
+              </a:rPr>
+              <a:t>test_check_winner_horizontal</a:t>
+            </a:r>
+            <a:r>
+              <a:rPr lang="de-DE" sz="980" dirty="0">
+                <a:solidFill>
+                  <a:srgbClr val="ABB2BF"/>
+                </a:solidFill>
+                <a:latin typeface="Consolas" pitchFamily="49" charset="0"/>
+              </a:rPr>
+              <a:t>(self):</a:t>
+            </a:r>
+          </a:p>
+          <a:p>
+            <a:pPr marL="0" indent="0" algn="l">
+              <a:buNone/>
+            </a:pPr>
+            <a:r>
+              <a:rPr lang="de-DE" sz="980" dirty="0">
+                <a:solidFill>
+                  <a:srgbClr val="ABB2BF"/>
+                </a:solidFill>
+                <a:latin typeface="Consolas" pitchFamily="49" charset="0"/>
+              </a:rPr>
+              <a:t>    board = ttt.</a:t>
+            </a:r>
+            <a:r>
+              <a:rPr lang="de-DE" sz="980" dirty="0">
+                <a:solidFill>
+                  <a:srgbClr val="61AFEF"/>
+                </a:solidFill>
+                <a:latin typeface="Consolas" pitchFamily="49" charset="0"/>
+              </a:rPr>
+              <a:t>create_board</a:t>
+            </a:r>
+            <a:r>
+              <a:rPr lang="de-DE" sz="980" dirty="0">
+                <a:solidFill>
+                  <a:srgbClr val="ABB2BF"/>
+                </a:solidFill>
+                <a:latin typeface="Consolas" pitchFamily="49" charset="0"/>
+              </a:rPr>
+              <a:t>()</a:t>
+            </a:r>
+          </a:p>
+          <a:p>
+            <a:pPr marL="0" indent="0" algn="l">
+              <a:buNone/>
+            </a:pPr>
+            <a:r>
+              <a:rPr lang="de-DE" sz="980" dirty="0">
+                <a:solidFill>
+                  <a:srgbClr val="ABB2BF"/>
+                </a:solidFill>
+                <a:latin typeface="Consolas" pitchFamily="49" charset="0"/>
+              </a:rPr>
+              <a:t>    </a:t>
+            </a:r>
+            <a:r>
+              <a:rPr lang="de-DE" sz="980" dirty="0">
+                <a:solidFill>
+                  <a:srgbClr val="56B6C2"/>
+                </a:solidFill>
+                <a:latin typeface="Consolas" pitchFamily="49" charset="0"/>
+              </a:rPr>
+              <a:t>for</a:t>
+            </a:r>
+            <a:r>
+              <a:rPr lang="de-DE" sz="980" dirty="0">
+                <a:solidFill>
+                  <a:srgbClr val="ABB2BF"/>
+                </a:solidFill>
+                <a:latin typeface="Consolas" pitchFamily="49" charset="0"/>
+              </a:rPr>
+              <a:t> col </a:t>
+            </a:r>
+            <a:r>
+              <a:rPr lang="de-DE" sz="980" dirty="0">
+                <a:solidFill>
+                  <a:srgbClr val="56B6C2"/>
+                </a:solidFill>
+                <a:latin typeface="Consolas" pitchFamily="49" charset="0"/>
+              </a:rPr>
+              <a:t>in</a:t>
+            </a:r>
+            <a:r>
+              <a:rPr lang="de-DE" sz="980" dirty="0">
+                <a:solidFill>
+                  <a:srgbClr val="ABB2BF"/>
+                </a:solidFill>
+                <a:latin typeface="Consolas" pitchFamily="49" charset="0"/>
+              </a:rPr>
+              <a:t> </a:t>
+            </a:r>
+            <a:r>
+              <a:rPr lang="de-DE" sz="980" dirty="0">
+                <a:solidFill>
+                  <a:srgbClr val="61AFEF"/>
+                </a:solidFill>
+                <a:latin typeface="Consolas" pitchFamily="49" charset="0"/>
+              </a:rPr>
+              <a:t>range</a:t>
+            </a:r>
+            <a:r>
+              <a:rPr lang="de-DE" sz="980" dirty="0">
+                <a:solidFill>
+                  <a:srgbClr val="ABB2BF"/>
+                </a:solidFill>
+                <a:latin typeface="Consolas" pitchFamily="49" charset="0"/>
+              </a:rPr>
+              <a:t>(4):</a:t>
+            </a:r>
+          </a:p>
+          <a:p>
+            <a:pPr marL="0" indent="0" algn="l">
+              <a:buNone/>
+            </a:pPr>
+            <a:r>
+              <a:rPr lang="de-DE" sz="980" dirty="0">
+                <a:solidFill>
+                  <a:srgbClr val="ABB2BF"/>
+                </a:solidFill>
+                <a:latin typeface="Consolas" pitchFamily="49" charset="0"/>
+              </a:rPr>
+              <a:t>        board[0][col] = ttt.HUMAN</a:t>
+            </a:r>
+          </a:p>
+          <a:p>
+            <a:pPr marL="0" indent="0" algn="l">
+              <a:buNone/>
+            </a:pPr>
+            <a:r>
+              <a:rPr lang="de-DE" sz="980" dirty="0">
+                <a:solidFill>
+                  <a:srgbClr val="ABB2BF"/>
+                </a:solidFill>
+                <a:latin typeface="Consolas" pitchFamily="49" charset="0"/>
+              </a:rPr>
+              <a:t>    self.</a:t>
+            </a:r>
+            <a:r>
+              <a:rPr lang="de-DE" sz="980" dirty="0">
+                <a:solidFill>
+                  <a:srgbClr val="61AFEF"/>
+                </a:solidFill>
+                <a:latin typeface="Consolas" pitchFamily="49" charset="0"/>
+              </a:rPr>
+              <a:t>assertEqual</a:t>
+            </a:r>
+            <a:r>
+              <a:rPr lang="de-DE" sz="980" dirty="0">
+                <a:solidFill>
+                  <a:srgbClr val="ABB2BF"/>
+                </a:solidFill>
+                <a:latin typeface="Consolas" pitchFamily="49" charset="0"/>
+              </a:rPr>
+              <a:t>(</a:t>
+            </a:r>
+          </a:p>
+          <a:p>
+            <a:pPr marL="0" indent="0" algn="l">
+              <a:buNone/>
+            </a:pPr>
+            <a:r>
+              <a:rPr lang="de-DE" sz="980" dirty="0">
+                <a:solidFill>
+                  <a:srgbClr val="ABB2BF"/>
+                </a:solidFill>
+                <a:latin typeface="Consolas" pitchFamily="49" charset="0"/>
+              </a:rPr>
+              <a:t>        ttt.</a:t>
+            </a:r>
+            <a:r>
+              <a:rPr lang="de-DE" sz="980" dirty="0">
+                <a:solidFill>
+                  <a:srgbClr val="61AFEF"/>
+                </a:solidFill>
+                <a:latin typeface="Consolas" pitchFamily="49" charset="0"/>
+              </a:rPr>
+              <a:t>check_winner</a:t>
+            </a:r>
+            <a:r>
+              <a:rPr lang="de-DE" sz="980" dirty="0">
+                <a:solidFill>
+                  <a:srgbClr val="ABB2BF"/>
+                </a:solidFill>
+                <a:latin typeface="Consolas" pitchFamily="49" charset="0"/>
+              </a:rPr>
+              <a:t>(board), </a:t>
+            </a:r>
+            <a:r>
+              <a:rPr lang="de-DE" sz="980" dirty="0">
+                <a:solidFill>
+                  <a:srgbClr val="98C379"/>
+                </a:solidFill>
+                <a:latin typeface="Consolas" pitchFamily="49" charset="0"/>
+              </a:rPr>
+              <a:t>"human"</a:t>
+            </a:r>
+            <a:r>
+              <a:rPr lang="de-DE" sz="980" dirty="0">
+                <a:solidFill>
+                  <a:srgbClr val="ABB2BF"/>
+                </a:solidFill>
+                <a:latin typeface="Consolas" pitchFamily="49" charset="0"/>
+              </a:rPr>
+              <a:t>)</a:t>
+            </a:r>
+          </a:p>
+          <a:p>
+            <a:pPr marL="0" indent="0" algn="l">
+              <a:buNone/>
+            </a:pPr>
+            <a:endParaRPr lang="de-DE" sz="980" dirty="0">
+              <a:solidFill>
+                <a:srgbClr val="ABB2BF"/>
+              </a:solidFill>
+              <a:latin typeface="Consolas" pitchFamily="49" charset="0"/>
+            </a:endParaRPr>
+          </a:p>
+          <a:p>
+            <a:pPr marL="0" indent="0" algn="l">
+              <a:buNone/>
+            </a:pPr>
+            <a:r>
+              <a:rPr lang="de-DE" sz="980" i="1" dirty="0">
+                <a:solidFill>
+                  <a:srgbClr val="5C6370"/>
+                </a:solidFill>
+                <a:latin typeface="Consolas" pitchFamily="49" charset="0"/>
+              </a:rPr>
+              <a:t># TC-13: KI spielt Gewinnzug (Tiefe 1)</a:t>
+            </a:r>
+          </a:p>
+          <a:p>
+            <a:pPr marL="0" indent="0" algn="l">
+              <a:buNone/>
+            </a:pPr>
+            <a:r>
+              <a:rPr lang="de-DE" sz="980" dirty="0">
+                <a:solidFill>
+                  <a:srgbClr val="56B6C2"/>
+                </a:solidFill>
+                <a:latin typeface="Consolas" pitchFamily="49" charset="0"/>
+              </a:rPr>
+              <a:t>def</a:t>
+            </a:r>
+            <a:r>
+              <a:rPr lang="de-DE" sz="980" dirty="0">
+                <a:solidFill>
+                  <a:srgbClr val="ABB2BF"/>
+                </a:solidFill>
+                <a:latin typeface="Consolas" pitchFamily="49" charset="0"/>
+              </a:rPr>
+              <a:t> </a:t>
+            </a:r>
+            <a:r>
+              <a:rPr lang="de-DE" sz="980" dirty="0">
+                <a:solidFill>
+                  <a:srgbClr val="61AFEF"/>
+                </a:solidFill>
+                <a:latin typeface="Consolas" pitchFamily="49" charset="0"/>
+              </a:rPr>
+              <a:t>test_ai_takes_winning_move</a:t>
+            </a:r>
+            <a:r>
+              <a:rPr lang="de-DE" sz="980" dirty="0">
+                <a:solidFill>
+                  <a:srgbClr val="ABB2BF"/>
+                </a:solidFill>
+                <a:latin typeface="Consolas" pitchFamily="49" charset="0"/>
+              </a:rPr>
+              <a:t>(self):</a:t>
+            </a:r>
+          </a:p>
+          <a:p>
+            <a:pPr marL="0" indent="0" algn="l">
+              <a:buNone/>
+            </a:pPr>
+            <a:r>
+              <a:rPr lang="de-DE" sz="980" dirty="0">
+                <a:solidFill>
+                  <a:srgbClr val="ABB2BF"/>
+                </a:solidFill>
+                <a:latin typeface="Consolas" pitchFamily="49" charset="0"/>
+              </a:rPr>
+              <a:t>    </a:t>
+            </a:r>
+            <a:r>
+              <a:rPr lang="de-DE" sz="980" dirty="0">
+                <a:solidFill>
+                  <a:srgbClr val="56B6C2"/>
+                </a:solidFill>
+                <a:latin typeface="Consolas" pitchFamily="49" charset="0"/>
+              </a:rPr>
+              <a:t>for</a:t>
+            </a:r>
+            <a:r>
+              <a:rPr lang="de-DE" sz="980" dirty="0">
+                <a:solidFill>
+                  <a:srgbClr val="ABB2BF"/>
+                </a:solidFill>
+                <a:latin typeface="Consolas" pitchFamily="49" charset="0"/>
+              </a:rPr>
+              <a:t> col </a:t>
+            </a:r>
+            <a:r>
+              <a:rPr lang="de-DE" sz="980" dirty="0">
+                <a:solidFill>
+                  <a:srgbClr val="56B6C2"/>
+                </a:solidFill>
+                <a:latin typeface="Consolas" pitchFamily="49" charset="0"/>
+              </a:rPr>
+              <a:t>in</a:t>
+            </a:r>
+            <a:r>
+              <a:rPr lang="de-DE" sz="980" dirty="0">
+                <a:solidFill>
+                  <a:srgbClr val="ABB2BF"/>
+                </a:solidFill>
+                <a:latin typeface="Consolas" pitchFamily="49" charset="0"/>
+              </a:rPr>
+              <a:t> </a:t>
+            </a:r>
+            <a:r>
+              <a:rPr lang="de-DE" sz="980" dirty="0">
+                <a:solidFill>
+                  <a:srgbClr val="61AFEF"/>
+                </a:solidFill>
+                <a:latin typeface="Consolas" pitchFamily="49" charset="0"/>
+              </a:rPr>
+              <a:t>range</a:t>
+            </a:r>
+            <a:r>
+              <a:rPr lang="de-DE" sz="980" dirty="0">
+                <a:solidFill>
+                  <a:srgbClr val="ABB2BF"/>
+                </a:solidFill>
+                <a:latin typeface="Consolas" pitchFamily="49" charset="0"/>
+              </a:rPr>
+              <a:t>(3):</a:t>
+            </a:r>
+          </a:p>
+          <a:p>
+            <a:pPr marL="0" indent="0" algn="l">
+              <a:buNone/>
+            </a:pPr>
+            <a:r>
+              <a:rPr lang="de-DE" sz="980" dirty="0">
+                <a:solidFill>
+                  <a:srgbClr val="ABB2BF"/>
+                </a:solidFill>
+                <a:latin typeface="Consolas" pitchFamily="49" charset="0"/>
+              </a:rPr>
+              <a:t>        board[0][col] = ttt.AI</a:t>
+            </a:r>
+          </a:p>
+          <a:p>
+            <a:pPr marL="0" indent="0" algn="l">
+              <a:buNone/>
+            </a:pPr>
+            <a:r>
+              <a:rPr lang="de-DE" sz="980" dirty="0">
+                <a:solidFill>
+                  <a:srgbClr val="ABB2BF"/>
+                </a:solidFill>
+                <a:latin typeface="Consolas" pitchFamily="49" charset="0"/>
+              </a:rPr>
+              <a:t>    self.</a:t>
+            </a:r>
+            <a:r>
+              <a:rPr lang="de-DE" sz="980" dirty="0">
+                <a:solidFill>
+                  <a:srgbClr val="61AFEF"/>
+                </a:solidFill>
+                <a:latin typeface="Consolas" pitchFamily="49" charset="0"/>
+              </a:rPr>
+              <a:t>assertEqual</a:t>
+            </a:r>
+            <a:r>
+              <a:rPr lang="de-DE" sz="980" dirty="0">
+                <a:solidFill>
+                  <a:srgbClr val="ABB2BF"/>
+                </a:solidFill>
+                <a:latin typeface="Consolas" pitchFamily="49" charset="0"/>
+              </a:rPr>
+              <a:t>(</a:t>
+            </a:r>
+          </a:p>
+          <a:p>
+            <a:pPr marL="0" indent="0" algn="l">
+              <a:buNone/>
+            </a:pPr>
+            <a:r>
+              <a:rPr lang="de-DE" sz="980" dirty="0">
+                <a:solidFill>
+                  <a:srgbClr val="ABB2BF"/>
+                </a:solidFill>
+                <a:latin typeface="Consolas" pitchFamily="49" charset="0"/>
+              </a:rPr>
+              <a:t>        self.</a:t>
+            </a:r>
+            <a:r>
+              <a:rPr lang="de-DE" sz="980" dirty="0">
+                <a:solidFill>
+                  <a:srgbClr val="61AFEF"/>
+                </a:solidFill>
+                <a:latin typeface="Consolas" pitchFamily="49" charset="0"/>
+              </a:rPr>
+              <a:t>_best</a:t>
+            </a:r>
+            <a:r>
+              <a:rPr lang="de-DE" sz="980" dirty="0">
+                <a:solidFill>
+                  <a:srgbClr val="ABB2BF"/>
+                </a:solidFill>
+                <a:latin typeface="Consolas" pitchFamily="49" charset="0"/>
+              </a:rPr>
+              <a:t>(board, 1), (0, 3))</a:t>
+            </a:r>
+          </a:p>
+        </p:txBody>
+      </p:sp>
+      <p:sp>
+        <p:nvSpPr>
+          <p:cNvPr id="7" name="BulletCard"/>
+          <p:cNvSpPr/>
+          <p:nvPr/>
+        </p:nvSpPr>
+        <p:spPr>
+          <a:xfrm>
+            <a:off x="5707200" y="1234440"/>
+            <a:ext cx="3071040" cy="3650000"/>
+          </a:xfrm>
+          <a:prstGeom prst="rect">
+            <a:avLst/>
+          </a:prstGeom>
+          <a:solidFill>
+            <a:srgbClr val="FFFFFF"/>
+          </a:solidFill>
+          <a:ln w="6350">
+            <a:solidFill>
+              <a:srgbClr val="D0D7E8"/>
+            </a:solidFill>
+            <a:prstDash val="solid"/>
+          </a:ln>
+        </p:spPr>
+        <p:txBody>
+          <a:bodyPr/>
+          <a:lstStyle/>
+          <a:p>
+            <a:endParaRPr lang="de-DE"/>
+          </a:p>
+        </p:txBody>
+      </p:sp>
+      <p:sp>
+        <p:nvSpPr>
+          <p:cNvPr id="8" name="BulletText"/>
+          <p:cNvSpPr/>
+          <p:nvPr/>
+        </p:nvSpPr>
+        <p:spPr>
+          <a:xfrm>
+            <a:off x="5798640" y="1325880"/>
+            <a:ext cx="2888160" cy="3467120"/>
+          </a:xfrm>
+          <a:prstGeom prst="rect">
+            <a:avLst/>
+          </a:prstGeom>
+          <a:noFill/>
+          <a:ln/>
+        </p:spPr>
+        <p:txBody>
+          <a:bodyPr wrap="square" lIns="114300" tIns="91440" rIns="114300" bIns="91440" rtlCol="0" anchor="t"/>
+          <a:lstStyle/>
+          <a:p>
+            <a:pPr marL="0" indent="0">
+              <a:buNone/>
+            </a:pPr>
+            <a:r>
+              <a:rPr lang="de-DE" sz="1150" b="1" dirty="0">
+                <a:solidFill>
+                  <a:srgbClr val="2A3A5E"/>
+                </a:solidFill>
+                <a:latin typeface="Calibri"/>
+              </a:rPr>
+              <a:t>DBTestCase</a:t>
+            </a:r>
+            <a:r>
+              <a:rPr lang="de-DE" sz="1000" dirty="0">
+                <a:solidFill>
+                  <a:srgbClr val="8892A4"/>
+                </a:solidFill>
+                <a:latin typeface="Calibri"/>
+              </a:rPr>
+              <a:t>
+Jeder Test: frische Temp-DB via tempfile + unittest.mock.patch</a:t>
+            </a:r>
+          </a:p>
+          <a:p>
+            <a:pPr marL="0" indent="0">
+              <a:buNone/>
+            </a:pPr>
+            <a:r>
+              <a:rPr lang="de-DE" sz="1150" b="1" dirty="0">
+                <a:solidFill>
+                  <a:srgbClr val="2A3A5E"/>
+                </a:solidFill>
+                <a:latin typeface="Calibri"/>
+              </a:rPr>
+              <a:t>patch.object</a:t>
+            </a:r>
+            <a:r>
+              <a:rPr lang="de-DE" sz="1000" dirty="0">
+                <a:solidFill>
+                  <a:srgbClr val="8892A4"/>
+                </a:solidFill>
+                <a:latin typeface="Calibri"/>
+              </a:rPr>
+              <a:t>
+DB_PATH auf temporäre Datei umgeleitet – keine Produktions-DB</a:t>
+            </a:r>
+          </a:p>
+          <a:p>
+            <a:pPr marL="0" indent="0">
+              <a:buNone/>
+            </a:pPr>
+            <a:r>
+              <a:rPr lang="de-DE" sz="1150" b="1" dirty="0">
+                <a:solidFill>
+                  <a:srgbClr val="2A3A5E"/>
+                </a:solidFill>
+                <a:latin typeface="Calibri"/>
+              </a:rPr>
+              <a:t>TC-09 / assertEqual</a:t>
+            </a:r>
+            <a:r>
+              <a:rPr lang="de-DE" sz="1000" dirty="0">
+                <a:solidFill>
+                  <a:srgbClr val="8892A4"/>
+                </a:solidFill>
+                <a:latin typeface="Calibri"/>
+              </a:rPr>
+              <a:t>
+4 in einer Reihe korrekt als Sieg erkannt</a:t>
+            </a:r>
+          </a:p>
+          <a:p>
+            <a:pPr marL="0" indent="0">
+              <a:buNone/>
+            </a:pPr>
+            <a:r>
+              <a:rPr lang="de-DE" sz="1150" b="1" dirty="0">
+                <a:solidFill>
+                  <a:srgbClr val="2A3A5E"/>
+                </a:solidFill>
+                <a:latin typeface="Calibri"/>
+              </a:rPr>
+              <a:t>TC-13 / get_best_move</a:t>
+            </a:r>
+            <a:r>
+              <a:rPr lang="de-DE" sz="1000" dirty="0">
+                <a:solidFill>
+                  <a:srgbClr val="8892A4"/>
+                </a:solidFill>
+                <a:latin typeface="Calibri"/>
+              </a:rPr>
+              <a:t>
+KI findet sofortigen Gewinnzug bei Tiefe 1 (&lt;1 ms)</a:t>
+            </a:r>
+          </a:p>
+          <a:p>
+            <a:pPr marL="0" indent="0">
+              <a:buNone/>
+            </a:pPr>
+            <a:r>
+              <a:rPr lang="de-DE" sz="1150" b="1" dirty="0">
+                <a:solidFill>
+                  <a:srgbClr val="2A3A5E"/>
+                </a:solidFill>
+                <a:latin typeface="Calibri"/>
+              </a:rPr>
+              <a:t>60 Testfälle</a:t>
+            </a:r>
+            <a:r>
+              <a:rPr lang="de-DE" sz="1000" dirty="0">
+                <a:solidFill>
+                  <a:srgbClr val="8892A4"/>
+                </a:solidFill>
+                <a:latin typeface="Calibri"/>
+              </a:rPr>
+              <a:t>
+8 Klassen · alle ohne GUI · pytest-kompatibel</a:t>
+            </a:r>
+          </a:p>
+        </p:txBody>
+      </p:sp>
+      <p:sp>
+        <p:nvSpPr>
+          <p:cNvPr id="9" name="Textfeld 8">
+            <a:extLst>
+              <a:ext uri="{FF2B5EF4-FFF2-40B4-BE49-F238E27FC236}">
+                <a16:creationId xmlns:a16="http://schemas.microsoft.com/office/drawing/2014/main" id="{41A0E3FF-07AA-6F45-D8BC-FC914ECDF56E}"/>
+              </a:ext>
+            </a:extLst>
+          </p:cNvPr>
+          <p:cNvSpPr txBox="1"/>
+          <p:nvPr/>
+        </p:nvSpPr>
+        <p:spPr>
+          <a:xfrm>
+            <a:off x="8636000" y="4875028"/>
+            <a:ext cx="329693" cy="215444"/>
+          </a:xfrm>
+          <a:prstGeom prst="rect">
+            <a:avLst/>
+          </a:prstGeom>
+          <a:noFill/>
+        </p:spPr>
+        <p:txBody>
+          <a:bodyPr wrap="square" rtlCol="0">
+            <a:spAutoFit/>
+          </a:bodyPr>
+          <a:lstStyle/>
+          <a:p>
+            <a:r>
+              <a:rPr lang="de-DE" sz="800" dirty="0"/>
+              <a:t>15</a:t>
+            </a:r>
+          </a:p>
+        </p:txBody>
+      </p:sp>
+    </p:spTree>
+  </p:cSld>
+  <p:clrMapOvr>
+    <a:masterClrMapping/>
+  </p:clrMapOvr>
+</p:sld>
+</file>
+
+<file path=ppt/slides/slide16.xml><?xml version="1.0" encoding="utf-8"?>
+<p:sld xmlns:a="http://schemas.openxmlformats.org/drawingml/2006/main" xmlns:r="http://schemas.openxmlformats.org/officeDocument/2006/relationships" xmlns:p="http://schemas.openxmlformats.org/presentationml/2006/main">
   <p:cSld name="Slide 9">
     <p:bg>
       <p:bgPr>
@@ -10245,1136 +11382,6 @@
                 </a:solidFill>
               </a:rPr>
               <a:t>16</a:t>
-            </a:r>
-          </a:p>
-        </p:txBody>
-      </p:sp>
-    </p:spTree>
-  </p:cSld>
-  <p:clrMapOvr>
-    <a:masterClrMapping/>
-  </p:clrMapOvr>
-</p:sld>
-</file>
-
-<file path=ppt/slides/slide16.xml><?xml version="1.0" encoding="utf-8"?>
-<p:sld xmlns:a="http://schemas.openxmlformats.org/drawingml/2006/main" xmlns:p="http://schemas.openxmlformats.org/presentationml/2006/main" xmlns:r="http://schemas.openxmlformats.org/officeDocument/2006/relationships">
-  <p:cSld>
-    <p:bg>
-      <p:bgPr>
-        <a:solidFill>
-          <a:srgbClr val="F0F4FF"/>
-        </a:solidFill>
-        <a:effectLst/>
-      </p:bgPr>
-    </p:bg>
-    <p:spTree>
-      <p:nvGrpSpPr>
-        <p:cNvPr id="1" name=""/>
-        <p:cNvGrpSpPr/>
-        <p:nvPr/>
-      </p:nvGrpSpPr>
-      <p:grpSpPr/>
-      <p:sp>
-        <p:nvSpPr>
-          <p:cNvPr id="2" name="AccentStripe"/>
-          <p:cNvSpPr/>
-          <p:nvPr/>
-        </p:nvSpPr>
-        <p:spPr>
-          <a:xfrm>
-            <a:off x="0" y="0"/>
-            <a:ext cx="91440" cy="5143500"/>
-          </a:xfrm>
-          <a:prstGeom prst="rect">
-            <a:avLst/>
-          </a:prstGeom>
-          <a:solidFill>
-            <a:srgbClr val="4472C4"/>
-          </a:solidFill>
-        </p:spPr>
-        <p:txBody>
-          <a:bodyPr/>
-          <a:lstStyle/>
-          <a:p>
-            <a:endParaRPr lang="de-DE"/>
-          </a:p>
-        </p:txBody>
-      </p:sp>
-      <p:sp>
-        <p:nvSpPr>
-          <p:cNvPr id="3" name="Title"/>
-          <p:cNvSpPr/>
-          <p:nvPr/>
-        </p:nvSpPr>
-        <p:spPr>
-          <a:xfrm>
-            <a:off x="457200" y="256032"/>
-            <a:ext cx="8229600" cy="594360"/>
-          </a:xfrm>
-          <a:prstGeom prst="rect">
-            <a:avLst/>
-          </a:prstGeom>
-          <a:noFill/>
-          <a:ln/>
-        </p:spPr>
-        <p:txBody>
-          <a:bodyPr wrap="square" lIns="114300" tIns="91440" rIns="114300" bIns="91440" rtlCol="0" anchor="ctr"/>
-          <a:lstStyle/>
-          <a:p>
-            <a:pPr marL="0" indent="0" algn="l">
-              <a:buNone/>
-            </a:pPr>
-            <a:r>
-              <a:rPr lang="de-DE" sz="2800" b="1" dirty="0">
-                <a:solidFill>
-                  <a:srgbClr val="1A1A2E"/>
-                </a:solidFill>
-                <a:latin typeface="Arial Black" pitchFamily="49" charset="0"/>
-              </a:rPr>
-              <a:t>test_all.py – Unittest-Framework</a:t>
-            </a:r>
-          </a:p>
-        </p:txBody>
-      </p:sp>
-      <p:sp>
-        <p:nvSpPr>
-          <p:cNvPr id="4" name="Subtitle"/>
-          <p:cNvSpPr/>
-          <p:nvPr/>
-        </p:nvSpPr>
-        <p:spPr>
-          <a:xfrm>
-            <a:off x="457200" y="804672"/>
-            <a:ext cx="8229600" cy="320040"/>
-          </a:xfrm>
-          <a:prstGeom prst="rect">
-            <a:avLst/>
-          </a:prstGeom>
-          <a:noFill/>
-          <a:ln/>
-        </p:spPr>
-        <p:txBody>
-          <a:bodyPr wrap="square" lIns="114300" tIns="91440" rIns="114300" bIns="91440" rtlCol="0" anchor="ctr"/>
-          <a:lstStyle/>
-          <a:p>
-            <a:pPr marL="0" indent="0" algn="l">
-              <a:buNone/>
-            </a:pPr>
-            <a:r>
-              <a:rPr lang="de-DE" sz="1200" dirty="0">
-                <a:solidFill>
-                  <a:srgbClr val="8892A4"/>
-                </a:solidFill>
-                <a:latin typeface="Calibri" pitchFamily="49" charset="0"/>
-              </a:rPr>
-              <a:t>unittest · Temp-DB-Isolation · Mocking · TC-01 bis TC-15</a:t>
-            </a:r>
-          </a:p>
-        </p:txBody>
-      </p:sp>
-      <p:sp>
-        <p:nvSpPr>
-          <p:cNvPr id="5" name="CodeCard"/>
-          <p:cNvSpPr/>
-          <p:nvPr/>
-        </p:nvSpPr>
-        <p:spPr>
-          <a:xfrm>
-            <a:off x="365760" y="1234440"/>
-            <a:ext cx="5250000" cy="3650000"/>
-          </a:xfrm>
-          <a:prstGeom prst="rect">
-            <a:avLst/>
-          </a:prstGeom>
-          <a:solidFill>
-            <a:srgbClr val="121224"/>
-          </a:solidFill>
-          <a:ln w="9525">
-            <a:solidFill>
-              <a:srgbClr val="4472C4"/>
-            </a:solidFill>
-            <a:prstDash val="solid"/>
-          </a:ln>
-        </p:spPr>
-        <p:txBody>
-          <a:bodyPr/>
-          <a:lstStyle/>
-          <a:p>
-            <a:endParaRPr lang="de-DE"/>
-          </a:p>
-        </p:txBody>
-      </p:sp>
-      <p:sp>
-        <p:nvSpPr>
-          <p:cNvPr id="6" name="CodeText"/>
-          <p:cNvSpPr/>
-          <p:nvPr/>
-        </p:nvSpPr>
-        <p:spPr>
-          <a:xfrm>
-            <a:off x="457200" y="1325880"/>
-            <a:ext cx="5067120" cy="3467120"/>
-          </a:xfrm>
-          <a:prstGeom prst="rect">
-            <a:avLst/>
-          </a:prstGeom>
-          <a:noFill/>
-          <a:ln/>
-        </p:spPr>
-        <p:txBody>
-          <a:bodyPr wrap="square" lIns="114300" tIns="91440" rIns="114300" bIns="91440" rtlCol="0" anchor="t"/>
-          <a:lstStyle/>
-          <a:p>
-            <a:pPr marL="0" indent="0" algn="l">
-              <a:buNone/>
-            </a:pPr>
-            <a:r>
-              <a:rPr lang="de-DE" sz="980" dirty="0" i="1">
-                <a:solidFill>
-                  <a:srgbClr val="5C6370"/>
-                </a:solidFill>
-                <a:latin typeface="Consolas" pitchFamily="49" charset="0"/>
-              </a:rPr>
-              <a:t># Temp-DB isoliert jeden Testfall</a:t>
-            </a:r>
-          </a:p>
-          <a:p>
-            <a:pPr marL="0" indent="0" algn="l">
-              <a:buNone/>
-            </a:pPr>
-            <a:r>
-              <a:rPr lang="de-DE" sz="980" dirty="0">
-                <a:solidFill>
-                  <a:srgbClr val="56B6C2"/>
-                </a:solidFill>
-                <a:latin typeface="Consolas" pitchFamily="49" charset="0"/>
-              </a:rPr>
-              <a:t>class</a:t>
-            </a:r>
-            <a:r>
-              <a:rPr lang="de-DE" sz="980" dirty="0">
-                <a:solidFill>
-                  <a:srgbClr val="ABB2BF"/>
-                </a:solidFill>
-                <a:latin typeface="Consolas" pitchFamily="49" charset="0"/>
-              </a:rPr>
-              <a:t> </a:t>
-            </a:r>
-            <a:r>
-              <a:rPr lang="de-DE" sz="980" dirty="0">
-                <a:solidFill>
-                  <a:srgbClr val="61AFEF"/>
-                </a:solidFill>
-                <a:latin typeface="Consolas" pitchFamily="49" charset="0"/>
-              </a:rPr>
-              <a:t>DBTestCase</a:t>
-            </a:r>
-            <a:r>
-              <a:rPr lang="de-DE" sz="980" dirty="0">
-                <a:solidFill>
-                  <a:srgbClr val="ABB2BF"/>
-                </a:solidFill>
-                <a:latin typeface="Consolas" pitchFamily="49" charset="0"/>
-              </a:rPr>
-              <a:t>(unittest.TestCase):</a:t>
-            </a:r>
-          </a:p>
-          <a:p>
-            <a:pPr marL="0" indent="0" algn="l">
-              <a:buNone/>
-            </a:pPr>
-            <a:r>
-              <a:rPr lang="de-DE" sz="980" dirty="0">
-                <a:solidFill>
-                  <a:srgbClr val="ABB2BF"/>
-                </a:solidFill>
-                <a:latin typeface="Consolas" pitchFamily="49" charset="0"/>
-              </a:rPr>
-              <a:t>    </a:t>
-            </a:r>
-            <a:r>
-              <a:rPr lang="de-DE" sz="980" dirty="0">
-                <a:solidFill>
-                  <a:srgbClr val="56B6C2"/>
-                </a:solidFill>
-                <a:latin typeface="Consolas" pitchFamily="49" charset="0"/>
-              </a:rPr>
-              <a:t>def</a:t>
-            </a:r>
-            <a:r>
-              <a:rPr lang="de-DE" sz="980" dirty="0">
-                <a:solidFill>
-                  <a:srgbClr val="ABB2BF"/>
-                </a:solidFill>
-                <a:latin typeface="Consolas" pitchFamily="49" charset="0"/>
-              </a:rPr>
-              <a:t> </a:t>
-            </a:r>
-            <a:r>
-              <a:rPr lang="de-DE" sz="980" dirty="0">
-                <a:solidFill>
-                  <a:srgbClr val="61AFEF"/>
-                </a:solidFill>
-                <a:latin typeface="Consolas" pitchFamily="49" charset="0"/>
-              </a:rPr>
-              <a:t>setUp</a:t>
-            </a:r>
-            <a:r>
-              <a:rPr lang="de-DE" sz="980" dirty="0">
-                <a:solidFill>
-                  <a:srgbClr val="ABB2BF"/>
-                </a:solidFill>
-                <a:latin typeface="Consolas" pitchFamily="49" charset="0"/>
-              </a:rPr>
-              <a:t>(self):</a:t>
-            </a:r>
-          </a:p>
-          <a:p>
-            <a:pPr marL="0" indent="0" algn="l">
-              <a:buNone/>
-            </a:pPr>
-            <a:r>
-              <a:rPr lang="de-DE" sz="980" dirty="0">
-                <a:solidFill>
-                  <a:srgbClr val="ABB2BF"/>
-                </a:solidFill>
-                <a:latin typeface="Consolas" pitchFamily="49" charset="0"/>
-              </a:rPr>
-              <a:t>        _, path = tempfile.</a:t>
-            </a:r>
-            <a:r>
-              <a:rPr lang="de-DE" sz="980" dirty="0">
-                <a:solidFill>
-                  <a:srgbClr val="61AFEF"/>
-                </a:solidFill>
-                <a:latin typeface="Consolas" pitchFamily="49" charset="0"/>
-              </a:rPr>
-              <a:t>mkstemp</a:t>
-            </a:r>
-            <a:r>
-              <a:rPr lang="de-DE" sz="980" dirty="0">
-                <a:solidFill>
-                  <a:srgbClr val="ABB2BF"/>
-                </a:solidFill>
-                <a:latin typeface="Consolas" pitchFamily="49" charset="0"/>
-              </a:rPr>
-              <a:t>(</a:t>
-            </a:r>
-            <a:r>
-              <a:rPr lang="de-DE" sz="980" dirty="0">
-                <a:solidFill>
-                  <a:srgbClr val="98C379"/>
-                </a:solidFill>
-                <a:latin typeface="Consolas" pitchFamily="49" charset="0"/>
-              </a:rPr>
-              <a:t>".db"</a:t>
-            </a:r>
-            <a:r>
-              <a:rPr lang="de-DE" sz="980" dirty="0">
-                <a:solidFill>
-                  <a:srgbClr val="ABB2BF"/>
-                </a:solidFill>
-                <a:latin typeface="Consolas" pitchFamily="49" charset="0"/>
-              </a:rPr>
-              <a:t>)</a:t>
-            </a:r>
-          </a:p>
-          <a:p>
-            <a:pPr marL="0" indent="0" algn="l">
-              <a:buNone/>
-            </a:pPr>
-            <a:r>
-              <a:rPr lang="de-DE" sz="980" dirty="0">
-                <a:solidFill>
-                  <a:srgbClr val="ABB2BF"/>
-                </a:solidFill>
-                <a:latin typeface="Consolas" pitchFamily="49" charset="0"/>
-              </a:rPr>
-              <a:t>        self._patch = </a:t>
-            </a:r>
-            <a:r>
-              <a:rPr lang="de-DE" sz="980" dirty="0">
-                <a:solidFill>
-                  <a:srgbClr val="61AFEF"/>
-                </a:solidFill>
-                <a:latin typeface="Consolas" pitchFamily="49" charset="0"/>
-              </a:rPr>
-              <a:t>patch.object</a:t>
-            </a:r>
-            <a:r>
-              <a:rPr lang="de-DE" sz="980" dirty="0">
-                <a:solidFill>
-                  <a:srgbClr val="ABB2BF"/>
-                </a:solidFill>
-                <a:latin typeface="Consolas" pitchFamily="49" charset="0"/>
-              </a:rPr>
-              <a:t>(</a:t>
-            </a:r>
-          </a:p>
-          <a:p>
-            <a:pPr marL="0" indent="0" algn="l">
-              <a:buNone/>
-            </a:pPr>
-            <a:r>
-              <a:rPr lang="de-DE" sz="980" dirty="0">
-                <a:solidFill>
-                  <a:srgbClr val="ABB2BF"/>
-                </a:solidFill>
-                <a:latin typeface="Consolas" pitchFamily="49" charset="0"/>
-              </a:rPr>
-              <a:t>            database, </a:t>
-            </a:r>
-            <a:r>
-              <a:rPr lang="de-DE" sz="980" dirty="0">
-                <a:solidFill>
-                  <a:srgbClr val="98C379"/>
-                </a:solidFill>
-                <a:latin typeface="Consolas" pitchFamily="49" charset="0"/>
-              </a:rPr>
-              <a:t>"DB_PATH"</a:t>
-            </a:r>
-            <a:r>
-              <a:rPr lang="de-DE" sz="980" dirty="0">
-                <a:solidFill>
-                  <a:srgbClr val="ABB2BF"/>
-                </a:solidFill>
-                <a:latin typeface="Consolas" pitchFamily="49" charset="0"/>
-              </a:rPr>
-              <a:t>, path)</a:t>
-            </a:r>
-          </a:p>
-          <a:p>
-            <a:pPr marL="0" indent="0" algn="l">
-              <a:buNone/>
-            </a:pPr>
-            <a:r>
-              <a:rPr lang="de-DE" sz="980" dirty="0">
-                <a:solidFill>
-                  <a:srgbClr val="ABB2BF"/>
-                </a:solidFill>
-                <a:latin typeface="Consolas" pitchFamily="49" charset="0"/>
-              </a:rPr>
-              <a:t>        self._patch.</a:t>
-            </a:r>
-            <a:r>
-              <a:rPr lang="de-DE" sz="980" dirty="0">
-                <a:solidFill>
-                  <a:srgbClr val="61AFEF"/>
-                </a:solidFill>
-                <a:latin typeface="Consolas" pitchFamily="49" charset="0"/>
-              </a:rPr>
-              <a:t>start</a:t>
-            </a:r>
-            <a:r>
-              <a:rPr lang="de-DE" sz="980" dirty="0">
-                <a:solidFill>
-                  <a:srgbClr val="ABB2BF"/>
-                </a:solidFill>
-                <a:latin typeface="Consolas" pitchFamily="49" charset="0"/>
-              </a:rPr>
-              <a:t>(); database.</a:t>
-            </a:r>
-            <a:r>
-              <a:rPr lang="de-DE" sz="980" dirty="0">
-                <a:solidFill>
-                  <a:srgbClr val="61AFEF"/>
-                </a:solidFill>
-                <a:latin typeface="Consolas" pitchFamily="49" charset="0"/>
-              </a:rPr>
-              <a:t>init_db</a:t>
-            </a:r>
-            <a:r>
-              <a:rPr lang="de-DE" sz="980" dirty="0">
-                <a:solidFill>
-                  <a:srgbClr val="ABB2BF"/>
-                </a:solidFill>
-                <a:latin typeface="Consolas" pitchFamily="49" charset="0"/>
-              </a:rPr>
-              <a:t>()</a:t>
-            </a:r>
-          </a:p>
-          <a:p>
-            <a:pPr marL="0" indent="0" algn="l">
-              <a:buNone/>
-            </a:pPr>
-            <a:endParaRPr lang="de-DE" sz="980" dirty="0">
-              <a:solidFill>
-                <a:srgbClr val="ABB2BF"/>
-              </a:solidFill>
-              <a:latin typeface="Consolas" pitchFamily="49" charset="0"/>
-            </a:endParaRPr>
-          </a:p>
-          <a:p>
-            <a:pPr marL="0" indent="0" algn="l">
-              <a:buNone/>
-            </a:pPr>
-            <a:r>
-              <a:rPr lang="de-DE" sz="980" dirty="0" i="1">
-                <a:solidFill>
-                  <a:srgbClr val="5C6370"/>
-                </a:solidFill>
-                <a:latin typeface="Consolas" pitchFamily="49" charset="0"/>
-              </a:rPr>
-              <a:t># TC-09: 4-in-Reihe → Mensch gewinnt</a:t>
-            </a:r>
-          </a:p>
-          <a:p>
-            <a:pPr marL="0" indent="0" algn="l">
-              <a:buNone/>
-            </a:pPr>
-            <a:r>
-              <a:rPr lang="de-DE" sz="980" dirty="0">
-                <a:solidFill>
-                  <a:srgbClr val="56B6C2"/>
-                </a:solidFill>
-                <a:latin typeface="Consolas" pitchFamily="49" charset="0"/>
-              </a:rPr>
-              <a:t>def</a:t>
-            </a:r>
-            <a:r>
-              <a:rPr lang="de-DE" sz="980" dirty="0">
-                <a:solidFill>
-                  <a:srgbClr val="ABB2BF"/>
-                </a:solidFill>
-                <a:latin typeface="Consolas" pitchFamily="49" charset="0"/>
-              </a:rPr>
-              <a:t> </a:t>
-            </a:r>
-            <a:r>
-              <a:rPr lang="de-DE" sz="980" dirty="0">
-                <a:solidFill>
-                  <a:srgbClr val="61AFEF"/>
-                </a:solidFill>
-                <a:latin typeface="Consolas" pitchFamily="49" charset="0"/>
-              </a:rPr>
-              <a:t>test_check_winner_horizontal</a:t>
-            </a:r>
-            <a:r>
-              <a:rPr lang="de-DE" sz="980" dirty="0">
-                <a:solidFill>
-                  <a:srgbClr val="ABB2BF"/>
-                </a:solidFill>
-                <a:latin typeface="Consolas" pitchFamily="49" charset="0"/>
-              </a:rPr>
-              <a:t>(self):</a:t>
-            </a:r>
-          </a:p>
-          <a:p>
-            <a:pPr marL="0" indent="0" algn="l">
-              <a:buNone/>
-            </a:pPr>
-            <a:r>
-              <a:rPr lang="de-DE" sz="980" dirty="0">
-                <a:solidFill>
-                  <a:srgbClr val="ABB2BF"/>
-                </a:solidFill>
-                <a:latin typeface="Consolas" pitchFamily="49" charset="0"/>
-              </a:rPr>
-              <a:t>    board = ttt.</a:t>
-            </a:r>
-            <a:r>
-              <a:rPr lang="de-DE" sz="980" dirty="0">
-                <a:solidFill>
-                  <a:srgbClr val="61AFEF"/>
-                </a:solidFill>
-                <a:latin typeface="Consolas" pitchFamily="49" charset="0"/>
-              </a:rPr>
-              <a:t>create_board</a:t>
-            </a:r>
-            <a:r>
-              <a:rPr lang="de-DE" sz="980" dirty="0">
-                <a:solidFill>
-                  <a:srgbClr val="ABB2BF"/>
-                </a:solidFill>
-                <a:latin typeface="Consolas" pitchFamily="49" charset="0"/>
-              </a:rPr>
-              <a:t>()</a:t>
-            </a:r>
-          </a:p>
-          <a:p>
-            <a:pPr marL="0" indent="0" algn="l">
-              <a:buNone/>
-            </a:pPr>
-            <a:r>
-              <a:rPr lang="de-DE" sz="980" dirty="0">
-                <a:solidFill>
-                  <a:srgbClr val="ABB2BF"/>
-                </a:solidFill>
-                <a:latin typeface="Consolas" pitchFamily="49" charset="0"/>
-              </a:rPr>
-              <a:t>    </a:t>
-            </a:r>
-            <a:r>
-              <a:rPr lang="de-DE" sz="980" dirty="0">
-                <a:solidFill>
-                  <a:srgbClr val="56B6C2"/>
-                </a:solidFill>
-                <a:latin typeface="Consolas" pitchFamily="49" charset="0"/>
-              </a:rPr>
-              <a:t>for</a:t>
-            </a:r>
-            <a:r>
-              <a:rPr lang="de-DE" sz="980" dirty="0">
-                <a:solidFill>
-                  <a:srgbClr val="ABB2BF"/>
-                </a:solidFill>
-                <a:latin typeface="Consolas" pitchFamily="49" charset="0"/>
-              </a:rPr>
-              <a:t> col </a:t>
-            </a:r>
-            <a:r>
-              <a:rPr lang="de-DE" sz="980" dirty="0">
-                <a:solidFill>
-                  <a:srgbClr val="56B6C2"/>
-                </a:solidFill>
-                <a:latin typeface="Consolas" pitchFamily="49" charset="0"/>
-              </a:rPr>
-              <a:t>in</a:t>
-            </a:r>
-            <a:r>
-              <a:rPr lang="de-DE" sz="980" dirty="0">
-                <a:solidFill>
-                  <a:srgbClr val="ABB2BF"/>
-                </a:solidFill>
-                <a:latin typeface="Consolas" pitchFamily="49" charset="0"/>
-              </a:rPr>
-              <a:t> </a:t>
-            </a:r>
-            <a:r>
-              <a:rPr lang="de-DE" sz="980" dirty="0">
-                <a:solidFill>
-                  <a:srgbClr val="61AFEF"/>
-                </a:solidFill>
-                <a:latin typeface="Consolas" pitchFamily="49" charset="0"/>
-              </a:rPr>
-              <a:t>range</a:t>
-            </a:r>
-            <a:r>
-              <a:rPr lang="de-DE" sz="980" dirty="0">
-                <a:solidFill>
-                  <a:srgbClr val="ABB2BF"/>
-                </a:solidFill>
-                <a:latin typeface="Consolas" pitchFamily="49" charset="0"/>
-              </a:rPr>
-              <a:t>(4):</a:t>
-            </a:r>
-          </a:p>
-          <a:p>
-            <a:pPr marL="0" indent="0" algn="l">
-              <a:buNone/>
-            </a:pPr>
-            <a:r>
-              <a:rPr lang="de-DE" sz="980" dirty="0">
-                <a:solidFill>
-                  <a:srgbClr val="ABB2BF"/>
-                </a:solidFill>
-                <a:latin typeface="Consolas" pitchFamily="49" charset="0"/>
-              </a:rPr>
-              <a:t>        board[0][col] = ttt.HUMAN</a:t>
-            </a:r>
-          </a:p>
-          <a:p>
-            <a:pPr marL="0" indent="0" algn="l">
-              <a:buNone/>
-            </a:pPr>
-            <a:r>
-              <a:rPr lang="de-DE" sz="980" dirty="0">
-                <a:solidFill>
-                  <a:srgbClr val="ABB2BF"/>
-                </a:solidFill>
-                <a:latin typeface="Consolas" pitchFamily="49" charset="0"/>
-              </a:rPr>
-              <a:t>    self.</a:t>
-            </a:r>
-            <a:r>
-              <a:rPr lang="de-DE" sz="980" dirty="0">
-                <a:solidFill>
-                  <a:srgbClr val="61AFEF"/>
-                </a:solidFill>
-                <a:latin typeface="Consolas" pitchFamily="49" charset="0"/>
-              </a:rPr>
-              <a:t>assertEqual</a:t>
-            </a:r>
-            <a:r>
-              <a:rPr lang="de-DE" sz="980" dirty="0">
-                <a:solidFill>
-                  <a:srgbClr val="ABB2BF"/>
-                </a:solidFill>
-                <a:latin typeface="Consolas" pitchFamily="49" charset="0"/>
-              </a:rPr>
-              <a:t>(</a:t>
-            </a:r>
-          </a:p>
-          <a:p>
-            <a:pPr marL="0" indent="0" algn="l">
-              <a:buNone/>
-            </a:pPr>
-            <a:r>
-              <a:rPr lang="de-DE" sz="980" dirty="0">
-                <a:solidFill>
-                  <a:srgbClr val="ABB2BF"/>
-                </a:solidFill>
-                <a:latin typeface="Consolas" pitchFamily="49" charset="0"/>
-              </a:rPr>
-              <a:t>        ttt.</a:t>
-            </a:r>
-            <a:r>
-              <a:rPr lang="de-DE" sz="980" dirty="0">
-                <a:solidFill>
-                  <a:srgbClr val="61AFEF"/>
-                </a:solidFill>
-                <a:latin typeface="Consolas" pitchFamily="49" charset="0"/>
-              </a:rPr>
-              <a:t>check_winner</a:t>
-            </a:r>
-            <a:r>
-              <a:rPr lang="de-DE" sz="980" dirty="0">
-                <a:solidFill>
-                  <a:srgbClr val="ABB2BF"/>
-                </a:solidFill>
-                <a:latin typeface="Consolas" pitchFamily="49" charset="0"/>
-              </a:rPr>
-              <a:t>(board), </a:t>
-            </a:r>
-            <a:r>
-              <a:rPr lang="de-DE" sz="980" dirty="0">
-                <a:solidFill>
-                  <a:srgbClr val="98C379"/>
-                </a:solidFill>
-                <a:latin typeface="Consolas" pitchFamily="49" charset="0"/>
-              </a:rPr>
-              <a:t>"human"</a:t>
-            </a:r>
-            <a:r>
-              <a:rPr lang="de-DE" sz="980" dirty="0">
-                <a:solidFill>
-                  <a:srgbClr val="ABB2BF"/>
-                </a:solidFill>
-                <a:latin typeface="Consolas" pitchFamily="49" charset="0"/>
-              </a:rPr>
-              <a:t>)</a:t>
-            </a:r>
-          </a:p>
-          <a:p>
-            <a:pPr marL="0" indent="0" algn="l">
-              <a:buNone/>
-            </a:pPr>
-            <a:endParaRPr lang="de-DE" sz="980" dirty="0">
-              <a:solidFill>
-                <a:srgbClr val="ABB2BF"/>
-              </a:solidFill>
-              <a:latin typeface="Consolas" pitchFamily="49" charset="0"/>
-            </a:endParaRPr>
-          </a:p>
-          <a:p>
-            <a:pPr marL="0" indent="0" algn="l">
-              <a:buNone/>
-            </a:pPr>
-            <a:r>
-              <a:rPr lang="de-DE" sz="980" dirty="0" i="1">
-                <a:solidFill>
-                  <a:srgbClr val="5C6370"/>
-                </a:solidFill>
-                <a:latin typeface="Consolas" pitchFamily="49" charset="0"/>
-              </a:rPr>
-              <a:t># TC-13: KI spielt Gewinnzug (Tiefe 1)</a:t>
-            </a:r>
-          </a:p>
-          <a:p>
-            <a:pPr marL="0" indent="0" algn="l">
-              <a:buNone/>
-            </a:pPr>
-            <a:r>
-              <a:rPr lang="de-DE" sz="980" dirty="0">
-                <a:solidFill>
-                  <a:srgbClr val="56B6C2"/>
-                </a:solidFill>
-                <a:latin typeface="Consolas" pitchFamily="49" charset="0"/>
-              </a:rPr>
-              <a:t>def</a:t>
-            </a:r>
-            <a:r>
-              <a:rPr lang="de-DE" sz="980" dirty="0">
-                <a:solidFill>
-                  <a:srgbClr val="ABB2BF"/>
-                </a:solidFill>
-                <a:latin typeface="Consolas" pitchFamily="49" charset="0"/>
-              </a:rPr>
-              <a:t> </a:t>
-            </a:r>
-            <a:r>
-              <a:rPr lang="de-DE" sz="980" dirty="0">
-                <a:solidFill>
-                  <a:srgbClr val="61AFEF"/>
-                </a:solidFill>
-                <a:latin typeface="Consolas" pitchFamily="49" charset="0"/>
-              </a:rPr>
-              <a:t>test_ai_takes_winning_move</a:t>
-            </a:r>
-            <a:r>
-              <a:rPr lang="de-DE" sz="980" dirty="0">
-                <a:solidFill>
-                  <a:srgbClr val="ABB2BF"/>
-                </a:solidFill>
-                <a:latin typeface="Consolas" pitchFamily="49" charset="0"/>
-              </a:rPr>
-              <a:t>(self):</a:t>
-            </a:r>
-          </a:p>
-          <a:p>
-            <a:pPr marL="0" indent="0" algn="l">
-              <a:buNone/>
-            </a:pPr>
-            <a:r>
-              <a:rPr lang="de-DE" sz="980" dirty="0">
-                <a:solidFill>
-                  <a:srgbClr val="ABB2BF"/>
-                </a:solidFill>
-                <a:latin typeface="Consolas" pitchFamily="49" charset="0"/>
-              </a:rPr>
-              <a:t>    </a:t>
-            </a:r>
-            <a:r>
-              <a:rPr lang="de-DE" sz="980" dirty="0">
-                <a:solidFill>
-                  <a:srgbClr val="56B6C2"/>
-                </a:solidFill>
-                <a:latin typeface="Consolas" pitchFamily="49" charset="0"/>
-              </a:rPr>
-              <a:t>for</a:t>
-            </a:r>
-            <a:r>
-              <a:rPr lang="de-DE" sz="980" dirty="0">
-                <a:solidFill>
-                  <a:srgbClr val="ABB2BF"/>
-                </a:solidFill>
-                <a:latin typeface="Consolas" pitchFamily="49" charset="0"/>
-              </a:rPr>
-              <a:t> col </a:t>
-            </a:r>
-            <a:r>
-              <a:rPr lang="de-DE" sz="980" dirty="0">
-                <a:solidFill>
-                  <a:srgbClr val="56B6C2"/>
-                </a:solidFill>
-                <a:latin typeface="Consolas" pitchFamily="49" charset="0"/>
-              </a:rPr>
-              <a:t>in</a:t>
-            </a:r>
-            <a:r>
-              <a:rPr lang="de-DE" sz="980" dirty="0">
-                <a:solidFill>
-                  <a:srgbClr val="ABB2BF"/>
-                </a:solidFill>
-                <a:latin typeface="Consolas" pitchFamily="49" charset="0"/>
-              </a:rPr>
-              <a:t> </a:t>
-            </a:r>
-            <a:r>
-              <a:rPr lang="de-DE" sz="980" dirty="0">
-                <a:solidFill>
-                  <a:srgbClr val="61AFEF"/>
-                </a:solidFill>
-                <a:latin typeface="Consolas" pitchFamily="49" charset="0"/>
-              </a:rPr>
-              <a:t>range</a:t>
-            </a:r>
-            <a:r>
-              <a:rPr lang="de-DE" sz="980" dirty="0">
-                <a:solidFill>
-                  <a:srgbClr val="ABB2BF"/>
-                </a:solidFill>
-                <a:latin typeface="Consolas" pitchFamily="49" charset="0"/>
-              </a:rPr>
-              <a:t>(3):</a:t>
-            </a:r>
-          </a:p>
-          <a:p>
-            <a:pPr marL="0" indent="0" algn="l">
-              <a:buNone/>
-            </a:pPr>
-            <a:r>
-              <a:rPr lang="de-DE" sz="980" dirty="0">
-                <a:solidFill>
-                  <a:srgbClr val="ABB2BF"/>
-                </a:solidFill>
-                <a:latin typeface="Consolas" pitchFamily="49" charset="0"/>
-              </a:rPr>
-              <a:t>        board[0][col] = ttt.AI</a:t>
-            </a:r>
-          </a:p>
-          <a:p>
-            <a:pPr marL="0" indent="0" algn="l">
-              <a:buNone/>
-            </a:pPr>
-            <a:r>
-              <a:rPr lang="de-DE" sz="980" dirty="0">
-                <a:solidFill>
-                  <a:srgbClr val="ABB2BF"/>
-                </a:solidFill>
-                <a:latin typeface="Consolas" pitchFamily="49" charset="0"/>
-              </a:rPr>
-              <a:t>    self.</a:t>
-            </a:r>
-            <a:r>
-              <a:rPr lang="de-DE" sz="980" dirty="0">
-                <a:solidFill>
-                  <a:srgbClr val="61AFEF"/>
-                </a:solidFill>
-                <a:latin typeface="Consolas" pitchFamily="49" charset="0"/>
-              </a:rPr>
-              <a:t>assertEqual</a:t>
-            </a:r>
-            <a:r>
-              <a:rPr lang="de-DE" sz="980" dirty="0">
-                <a:solidFill>
-                  <a:srgbClr val="ABB2BF"/>
-                </a:solidFill>
-                <a:latin typeface="Consolas" pitchFamily="49" charset="0"/>
-              </a:rPr>
-              <a:t>(</a:t>
-            </a:r>
-          </a:p>
-          <a:p>
-            <a:pPr marL="0" indent="0" algn="l">
-              <a:buNone/>
-            </a:pPr>
-            <a:r>
-              <a:rPr lang="de-DE" sz="980" dirty="0">
-                <a:solidFill>
-                  <a:srgbClr val="ABB2BF"/>
-                </a:solidFill>
-                <a:latin typeface="Consolas" pitchFamily="49" charset="0"/>
-              </a:rPr>
-              <a:t>        self.</a:t>
-            </a:r>
-            <a:r>
-              <a:rPr lang="de-DE" sz="980" dirty="0">
-                <a:solidFill>
-                  <a:srgbClr val="61AFEF"/>
-                </a:solidFill>
-                <a:latin typeface="Consolas" pitchFamily="49" charset="0"/>
-              </a:rPr>
-              <a:t>_best</a:t>
-            </a:r>
-            <a:r>
-              <a:rPr lang="de-DE" sz="980" dirty="0">
-                <a:solidFill>
-                  <a:srgbClr val="ABB2BF"/>
-                </a:solidFill>
-                <a:latin typeface="Consolas" pitchFamily="49" charset="0"/>
-              </a:rPr>
-              <a:t>(board, 1), (0, 3))</a:t>
-            </a:r>
-          </a:p>
-        </p:txBody>
-      </p:sp>
-      <p:sp>
-        <p:nvSpPr>
-          <p:cNvPr id="7" name="BulletCard"/>
-          <p:cNvSpPr/>
-          <p:nvPr/>
-        </p:nvSpPr>
-        <p:spPr>
-          <a:xfrm>
-            <a:off x="5707200" y="1234440"/>
-            <a:ext cx="3071040" cy="3650000"/>
-          </a:xfrm>
-          <a:prstGeom prst="rect">
-            <a:avLst/>
-          </a:prstGeom>
-          <a:solidFill>
-            <a:srgbClr val="FFFFFF"/>
-          </a:solidFill>
-          <a:ln w="6350">
-            <a:solidFill>
-              <a:srgbClr val="D0D7E8"/>
-            </a:solidFill>
-            <a:prstDash val="solid"/>
-          </a:ln>
-        </p:spPr>
-        <p:txBody>
-          <a:bodyPr/>
-          <a:lstStyle/>
-          <a:p>
-            <a:endParaRPr lang="de-DE"/>
-          </a:p>
-        </p:txBody>
-      </p:sp>
-      <p:sp>
-        <p:nvSpPr>
-          <p:cNvPr id="8" name="BulletText"/>
-          <p:cNvSpPr/>
-          <p:nvPr/>
-        </p:nvSpPr>
-        <p:spPr>
-          <a:xfrm>
-            <a:off x="5798640" y="1325880"/>
-            <a:ext cx="2888160" cy="3467120"/>
-          </a:xfrm>
-          <a:prstGeom prst="rect">
-            <a:avLst/>
-          </a:prstGeom>
-          <a:noFill/>
-          <a:ln/>
-        </p:spPr>
-        <p:txBody>
-          <a:bodyPr wrap="square" lIns="114300" tIns="91440" rIns="114300" bIns="91440" rtlCol="0" anchor="t"/>
-          <a:lstStyle/>
-          <a:p>
-            <a:pPr marL="0" indent="0">
-              <a:buNone/>
-            </a:pPr>
-            <a:r>
-              <a:rPr lang="de-DE" sz="1150" b="1" dirty="0">
-                <a:solidFill>
-                  <a:srgbClr val="2A3A5E"/>
-                </a:solidFill>
-                <a:latin typeface="Calibri"/>
-              </a:rPr>
-              <a:t>DBTestCase</a:t>
-            </a:r>
-            <a:r>
-              <a:rPr lang="de-DE" sz="1000" dirty="0">
-                <a:solidFill>
-                  <a:srgbClr val="8892A4"/>
-                </a:solidFill>
-                <a:latin typeface="Calibri"/>
-              </a:rPr>
-              <a:t>
-Jeder Test: frische Temp-DB via tempfile + unittest.mock.patch</a:t>
-            </a:r>
-          </a:p>
-          <a:p>
-            <a:pPr marL="0" indent="0">
-              <a:buNone/>
-            </a:pPr>
-            <a:r>
-              <a:rPr lang="de-DE" sz="1150" b="1" dirty="0">
-                <a:solidFill>
-                  <a:srgbClr val="2A3A5E"/>
-                </a:solidFill>
-                <a:latin typeface="Calibri"/>
-              </a:rPr>
-              <a:t>patch.object</a:t>
-            </a:r>
-            <a:r>
-              <a:rPr lang="de-DE" sz="1000" dirty="0">
-                <a:solidFill>
-                  <a:srgbClr val="8892A4"/>
-                </a:solidFill>
-                <a:latin typeface="Calibri"/>
-              </a:rPr>
-              <a:t>
-DB_PATH auf temporäre Datei umgeleitet – keine Produktions-DB</a:t>
-            </a:r>
-          </a:p>
-          <a:p>
-            <a:pPr marL="0" indent="0">
-              <a:buNone/>
-            </a:pPr>
-            <a:r>
-              <a:rPr lang="de-DE" sz="1150" b="1" dirty="0">
-                <a:solidFill>
-                  <a:srgbClr val="2A3A5E"/>
-                </a:solidFill>
-                <a:latin typeface="Calibri"/>
-              </a:rPr>
-              <a:t>TC-09 / assertEqual</a:t>
-            </a:r>
-            <a:r>
-              <a:rPr lang="de-DE" sz="1000" dirty="0">
-                <a:solidFill>
-                  <a:srgbClr val="8892A4"/>
-                </a:solidFill>
-                <a:latin typeface="Calibri"/>
-              </a:rPr>
-              <a:t>
-4 in einer Reihe korrekt als Sieg erkannt</a:t>
-            </a:r>
-          </a:p>
-          <a:p>
-            <a:pPr marL="0" indent="0">
-              <a:buNone/>
-            </a:pPr>
-            <a:r>
-              <a:rPr lang="de-DE" sz="1150" b="1" dirty="0">
-                <a:solidFill>
-                  <a:srgbClr val="2A3A5E"/>
-                </a:solidFill>
-                <a:latin typeface="Calibri"/>
-              </a:rPr>
-              <a:t>TC-13 / get_best_move</a:t>
-            </a:r>
-            <a:r>
-              <a:rPr lang="de-DE" sz="1000" dirty="0">
-                <a:solidFill>
-                  <a:srgbClr val="8892A4"/>
-                </a:solidFill>
-                <a:latin typeface="Calibri"/>
-              </a:rPr>
-              <a:t>
-KI findet sofortigen Gewinnzug bei Tiefe 1 (&lt;1 ms)</a:t>
-            </a:r>
-          </a:p>
-          <a:p>
-            <a:pPr marL="0" indent="0">
-              <a:buNone/>
-            </a:pPr>
-            <a:r>
-              <a:rPr lang="de-DE" sz="1150" b="1" dirty="0">
-                <a:solidFill>
-                  <a:srgbClr val="2A3A5E"/>
-                </a:solidFill>
-                <a:latin typeface="Calibri"/>
-              </a:rPr>
-              <a:t>60 Testfälle</a:t>
-            </a:r>
-            <a:r>
-              <a:rPr lang="de-DE" sz="1000" dirty="0">
-                <a:solidFill>
-                  <a:srgbClr val="8892A4"/>
-                </a:solidFill>
-                <a:latin typeface="Calibri"/>
-              </a:rPr>
-              <a:t>
-8 Klassen · alle ohne GUI · pytest-kompatibel</a:t>
-            </a:r>
-          </a:p>
-        </p:txBody>
-      </p:sp>
-      <p:sp>
-        <p:nvSpPr>
-          <p:cNvPr id="9" name="Textfeld 8">
-            <a:extLst>
-              <a:ext uri="{FF2B5EF4-FFF2-40B4-BE49-F238E27FC236}">
-                <a16:creationId xmlns:a16="http://schemas.microsoft.com/office/drawing/2014/main" id="{41A0E3FF-07AA-6F45-D8BC-FC914ECDF56E}"/>
-              </a:ext>
-            </a:extLst>
-          </p:cNvPr>
-          <p:cNvSpPr txBox="1"/>
-          <p:nvPr/>
-        </p:nvSpPr>
-        <p:spPr>
-          <a:xfrm>
-            <a:off x="8737093" y="4875028"/>
-            <a:ext cx="228600" cy="215444"/>
-          </a:xfrm>
-          <a:prstGeom prst="rect">
-            <a:avLst/>
-          </a:prstGeom>
-          <a:noFill/>
-        </p:spPr>
-        <p:txBody>
-          <a:bodyPr wrap="square" rtlCol="0">
-            <a:spAutoFit/>
-          </a:bodyPr>
-          <a:lstStyle/>
-          <a:p>
-            <a:r>
-              <a:rPr lang="de-DE" sz="800" dirty="0"/>
-              <a:t>15</a:t>
             </a:r>
           </a:p>
         </p:txBody>

--- a/Präsentation/Präsentation_Projekt/HHBKTendo_Praesentation_1.pptx
+++ b/Präsentation/Präsentation_Projekt/HHBKTendo_Praesentation_1.pptx
@@ -5,7 +5,7 @@
     <p:sldMasterId id="2147483648" r:id="rId1"/>
   </p:sldMasterIdLst>
   <p:notesMasterIdLst>
-    <p:notesMasterId r:id="rId18"/>
+    <p:notesMasterId r:id="rId24"/>
   </p:notesMasterIdLst>
   <p:sldIdLst>
     <p:sldId id="256" r:id="rId2"/>
@@ -24,6 +24,12 @@
     <p:sldId id="263" r:id="rId15"/>
     <p:sldId id="271" r:id="rId16"/>
     <p:sldId id="264" r:id="rId17"/>
+    <p:sldId id="272" r:id="rId18"/>
+    <p:sldId id="273" r:id="rId19"/>
+    <p:sldId id="274" r:id="rId20"/>
+    <p:sldId id="275" r:id="rId21"/>
+    <p:sldId id="276" r:id="rId22"/>
+    <p:sldId id="277" r:id="rId23"/>
   </p:sldIdLst>
   <p:sldSz cx="9144000" cy="5143500" type="screen16x9"/>
   <p:notesSz cx="5143500" cy="9144000"/>
@@ -10565,38 +10571,6 @@
       </p:grpSpPr>
       <p:sp>
         <p:nvSpPr>
-          <p:cNvPr id="2" name="Shape 0"/>
-          <p:cNvSpPr/>
-          <p:nvPr/>
-        </p:nvSpPr>
-        <p:spPr>
-          <a:xfrm>
-            <a:off x="0" y="0"/>
-            <a:ext cx="109728" cy="5143500"/>
-          </a:xfrm>
-          <a:prstGeom prst="rect">
-            <a:avLst/>
-          </a:prstGeom>
-          <a:solidFill>
-            <a:srgbClr val="E94560"/>
-          </a:solidFill>
-          <a:ln w="12700">
-            <a:solidFill>
-              <a:srgbClr val="E94560"/>
-            </a:solidFill>
-            <a:prstDash val="solid"/>
-          </a:ln>
-        </p:spPr>
-        <p:txBody>
-          <a:bodyPr/>
-          <a:lstStyle/>
-          <a:p>
-            <a:endParaRPr lang="de-DE"/>
-          </a:p>
-        </p:txBody>
-      </p:sp>
-      <p:sp>
-        <p:nvSpPr>
           <p:cNvPr id="3" name="Text 1"/>
           <p:cNvSpPr/>
           <p:nvPr/>
@@ -11278,77 +11252,6 @@
       </p:sp>
       <p:sp>
         <p:nvSpPr>
-          <p:cNvPr id="22" name="Shape 20"/>
-          <p:cNvSpPr/>
-          <p:nvPr/>
-        </p:nvSpPr>
-        <p:spPr>
-          <a:xfrm>
-            <a:off x="0" y="4681728"/>
-            <a:ext cx="9144000" cy="457200"/>
-          </a:xfrm>
-          <a:prstGeom prst="rect">
-            <a:avLst/>
-          </a:prstGeom>
-          <a:solidFill>
-            <a:srgbClr val="E94560"/>
-          </a:solidFill>
-          <a:ln w="12700">
-            <a:solidFill>
-              <a:srgbClr val="E94560"/>
-            </a:solidFill>
-            <a:prstDash val="solid"/>
-          </a:ln>
-        </p:spPr>
-        <p:txBody>
-          <a:bodyPr/>
-          <a:lstStyle/>
-          <a:p>
-            <a:endParaRPr lang="de-DE"/>
-          </a:p>
-        </p:txBody>
-      </p:sp>
-      <p:sp>
-        <p:nvSpPr>
-          <p:cNvPr id="23" name="Text 21"/>
-          <p:cNvSpPr/>
-          <p:nvPr/>
-        </p:nvSpPr>
-        <p:spPr>
-          <a:xfrm>
-            <a:off x="457200" y="4727448"/>
-            <a:ext cx="8229600" cy="320040"/>
-          </a:xfrm>
-          <a:prstGeom prst="rect">
-            <a:avLst/>
-          </a:prstGeom>
-          <a:noFill/>
-          <a:ln/>
-        </p:spPr>
-        <p:txBody>
-          <a:bodyPr wrap="square" lIns="0" tIns="0" rIns="0" bIns="0" rtlCol="0" anchor="ctr"/>
-          <a:lstStyle/>
-          <a:p>
-            <a:pPr marL="0" indent="0" algn="ctr">
-              <a:buNone/>
-            </a:pPr>
-            <a:r>
-              <a:rPr lang="en-US" sz="1200" dirty="0">
-                <a:solidFill>
-                  <a:srgbClr val="FFFFFF"/>
-                </a:solidFill>
-                <a:latin typeface="Calibri" pitchFamily="34" charset="0"/>
-                <a:ea typeface="Calibri" pitchFamily="34" charset="-122"/>
-                <a:cs typeface="Calibri" pitchFamily="34" charset="-120"/>
-              </a:rPr>
-              <a:t>HHBKTendo Research Center · HHBK Düsseldorf · Lernfeld 5 · 2026</a:t>
-            </a:r>
-            <a:endParaRPr lang="en-US" sz="1200" dirty="0"/>
-          </a:p>
-        </p:txBody>
-      </p:sp>
-      <p:sp>
-        <p:nvSpPr>
           <p:cNvPr id="25" name="Textfeld 24">
             <a:extLst>
               <a:ext uri="{FF2B5EF4-FFF2-40B4-BE49-F238E27FC236}">
@@ -11382,6 +11285,3315 @@
                 </a:solidFill>
               </a:rPr>
               <a:t>16</a:t>
+            </a:r>
+          </a:p>
+        </p:txBody>
+      </p:sp>
+    </p:spTree>
+  </p:cSld>
+  <p:clrMapOvr>
+    <a:masterClrMapping/>
+  </p:clrMapOvr>
+</p:sld>
+</file>
+
+<file path=ppt/slides/slide17.xml><?xml version="1.0" encoding="utf-8"?>
+<p:sld xmlns:a="http://schemas.openxmlformats.org/drawingml/2006/main" xmlns:r="http://schemas.openxmlformats.org/officeDocument/2006/relationships" xmlns:p="http://schemas.openxmlformats.org/presentationml/2006/main">
+  <p:cSld>
+    <p:bg>
+      <p:bgPr>
+        <a:solidFill>
+          <a:srgbClr val="0D0D1A"/>
+        </a:solidFill>
+        <a:effectLst/>
+      </p:bgPr>
+    </p:bg>
+    <p:spTree>
+      <p:nvGrpSpPr>
+        <p:cNvPr id="1" name=""/>
+        <p:cNvGrpSpPr/>
+        <p:nvPr/>
+      </p:nvGrpSpPr>
+      <p:grpSpPr>
+        <a:xfrm>
+          <a:off x="0" y="0"/>
+          <a:ext cx="0" cy="0"/>
+          <a:chOff x="0" y="0"/>
+          <a:chExt cx="0" cy="0"/>
+        </a:xfrm>
+      </p:grpSpPr>
+      <p:sp>
+        <p:nvSpPr>
+          <p:cNvPr id="2" name="TextBox 1"/>
+          <p:cNvSpPr txBox="1"/>
+          <p:nvPr/>
+        </p:nvSpPr>
+        <p:spPr>
+          <a:xfrm>
+            <a:off x="457200" y="256032"/>
+            <a:ext cx="8229600" cy="400000"/>
+          </a:xfrm>
+          <a:prstGeom prst="rect">
+            <a:avLst/>
+          </a:prstGeom>
+          <a:noFill/>
+        </p:spPr>
+        <p:txBody>
+          <a:bodyPr wrap="square">
+            <a:spAutoFit/>
+          </a:bodyPr>
+          <a:lstStyle/>
+          <a:p>
+            <a:pPr algn="l"/>
+            <a:r>
+              <a:rPr sz="2800" b="1">
+                <a:solidFill>
+                  <a:srgbClr val="FFFFFF"/>
+                </a:solidFill>
+              </a:rPr>
+              <a:t>SOLL/IST Feature-Vergleich</a:t>
+            </a:r>
+          </a:p>
+        </p:txBody>
+      </p:sp>
+      <p:sp>
+        <p:nvSpPr>
+          <p:cNvPr id="3" name="TextBox 2"/>
+          <p:cNvSpPr txBox="1"/>
+          <p:nvPr/>
+        </p:nvSpPr>
+        <p:spPr>
+          <a:xfrm>
+            <a:off x="457200" y="670000"/>
+            <a:ext cx="8229600" cy="200000"/>
+          </a:xfrm>
+          <a:prstGeom prst="rect">
+            <a:avLst/>
+          </a:prstGeom>
+          <a:noFill/>
+        </p:spPr>
+        <p:txBody>
+          <a:bodyPr wrap="square">
+            <a:spAutoFit/>
+          </a:bodyPr>
+          <a:lstStyle/>
+          <a:p>
+            <a:pPr algn="l"/>
+            <a:r>
+              <a:rPr sz="900" b="0">
+                <a:solidFill>
+                  <a:srgbClr val="8A92A4"/>
+                </a:solidFill>
+              </a:rPr>
+              <a:t>Lastenheft → Pflichtenheft → Umsetzung → Test</a:t>
+            </a:r>
+          </a:p>
+        </p:txBody>
+      </p:sp>
+      <p:sp>
+        <p:nvSpPr>
+          <p:cNvPr id="4" name="TextBox 3"/>
+          <p:cNvSpPr txBox="1"/>
+          <p:nvPr/>
+        </p:nvSpPr>
+        <p:spPr>
+          <a:xfrm>
+            <a:off x="8626110" y="4875028"/>
+            <a:ext cx="339583" cy="215444"/>
+          </a:xfrm>
+          <a:prstGeom prst="rect">
+            <a:avLst/>
+          </a:prstGeom>
+          <a:noFill/>
+        </p:spPr>
+        <p:txBody>
+          <a:bodyPr wrap="square">
+            <a:spAutoFit/>
+          </a:bodyPr>
+          <a:lstStyle/>
+          <a:p>
+            <a:pPr algn="ctr"/>
+            <a:r>
+              <a:rPr sz="800" b="1">
+                <a:solidFill>
+                  <a:srgbClr val="E94560"/>
+                </a:solidFill>
+              </a:rPr>
+              <a:t>17</a:t>
+            </a:r>
+          </a:p>
+        </p:txBody>
+      </p:sp>
+      <p:sp>
+        <p:nvSpPr>
+          <p:cNvPr id="5" name="Rectangle 4"/>
+          <p:cNvSpPr/>
+          <p:nvPr/>
+        </p:nvSpPr>
+        <p:spPr>
+          <a:xfrm>
+            <a:off x="365760" y="880000"/>
+            <a:ext cx="8595360" cy="1560000"/>
+          </a:xfrm>
+          <a:prstGeom prst="rect">
+            <a:avLst/>
+          </a:prstGeom>
+          <a:solidFill>
+            <a:srgbClr val="161638"/>
+          </a:solidFill>
+          <a:ln>
+            <a:noFill/>
+          </a:ln>
+        </p:spPr>
+        <p:style>
+          <a:lnRef idx="1">
+            <a:schemeClr val="accent1"/>
+          </a:lnRef>
+          <a:fillRef idx="3">
+            <a:schemeClr val="accent1"/>
+          </a:fillRef>
+          <a:effectRef idx="2">
+            <a:schemeClr val="accent1"/>
+          </a:effectRef>
+          <a:fontRef idx="minor">
+            <a:schemeClr val="lt1"/>
+          </a:fontRef>
+        </p:style>
+        <p:txBody>
+          <a:bodyPr rtlCol="0" anchor="ctr"/>
+          <a:lstStyle/>
+          <a:p>
+            <a:pPr algn="ctr"/>
+            <a:endParaRPr/>
+          </a:p>
+        </p:txBody>
+      </p:sp>
+      <p:sp>
+        <p:nvSpPr>
+          <p:cNvPr id="6" name="Rectangle 5"/>
+          <p:cNvSpPr/>
+          <p:nvPr/>
+        </p:nvSpPr>
+        <p:spPr>
+          <a:xfrm>
+            <a:off x="365760" y="880000"/>
+            <a:ext cx="64008" cy="1560000"/>
+          </a:xfrm>
+          <a:prstGeom prst="rect">
+            <a:avLst/>
+          </a:prstGeom>
+          <a:solidFill>
+            <a:srgbClr val="2ECC71"/>
+          </a:solidFill>
+          <a:ln>
+            <a:noFill/>
+          </a:ln>
+        </p:spPr>
+        <p:style>
+          <a:lnRef idx="1">
+            <a:schemeClr val="accent1"/>
+          </a:lnRef>
+          <a:fillRef idx="3">
+            <a:schemeClr val="accent1"/>
+          </a:fillRef>
+          <a:effectRef idx="2">
+            <a:schemeClr val="accent1"/>
+          </a:effectRef>
+          <a:fontRef idx="minor">
+            <a:schemeClr val="lt1"/>
+          </a:fontRef>
+        </p:style>
+        <p:txBody>
+          <a:bodyPr rtlCol="0" anchor="ctr"/>
+          <a:lstStyle/>
+          <a:p>
+            <a:pPr algn="ctr"/>
+            <a:endParaRPr/>
+          </a:p>
+        </p:txBody>
+      </p:sp>
+      <p:sp>
+        <p:nvSpPr>
+          <p:cNvPr id="7" name="TextBox 6"/>
+          <p:cNvSpPr txBox="1"/>
+          <p:nvPr/>
+        </p:nvSpPr>
+        <p:spPr>
+          <a:xfrm>
+            <a:off x="520760" y="935000"/>
+            <a:ext cx="8360360" cy="265000"/>
+          </a:xfrm>
+          <a:prstGeom prst="rect">
+            <a:avLst/>
+          </a:prstGeom>
+          <a:noFill/>
+        </p:spPr>
+        <p:txBody>
+          <a:bodyPr wrap="square">
+            <a:spAutoFit/>
+          </a:bodyPr>
+          <a:lstStyle/>
+          <a:p>
+            <a:pPr algn="l"/>
+            <a:r>
+              <a:rPr sz="1300" b="1">
+                <a:solidFill>
+                  <a:srgbClr val="2ECC71"/>
+                </a:solidFill>
+              </a:rPr>
+              <a:t>MUSS-Ziele  ·  12 / 12 umgesetzt  ✅</a:t>
+            </a:r>
+          </a:p>
+        </p:txBody>
+      </p:sp>
+      <p:sp>
+        <p:nvSpPr>
+          <p:cNvPr id="8" name="TextBox 7"/>
+          <p:cNvSpPr txBox="1"/>
+          <p:nvPr/>
+        </p:nvSpPr>
+        <p:spPr>
+          <a:xfrm>
+            <a:off x="520760" y="1225000"/>
+            <a:ext cx="8360360" cy="1160000"/>
+          </a:xfrm>
+          <a:prstGeom prst="rect">
+            <a:avLst/>
+          </a:prstGeom>
+          <a:noFill/>
+        </p:spPr>
+        <p:txBody>
+          <a:bodyPr wrap="square">
+            <a:spAutoFit/>
+          </a:bodyPr>
+          <a:lstStyle/>
+          <a:p>
+            <a:pPr algn="l"/>
+            <a:r>
+              <a:rPr sz="1100" b="0">
+                <a:solidFill>
+                  <a:srgbClr val="D0D7E8"/>
+                </a:solidFill>
+              </a:rPr>
+              <a:t>Gameplay:   2 Spiele (Bauernschach, Tic-Tac-Toe)  ·  6×6 Brett  ·  5 Schwierigkeitsgrade  ·  Spielabbruch mit Dialog  ·  Regelanzeige im Spiel</a:t>
+            </a:r>
+          </a:p>
+          <a:p>
+            <a:pPr algn="l"/>
+            <a:r>
+              <a:rPr sz="1100" b="0">
+                <a:solidFill>
+                  <a:srgbClr val="D0D7E8"/>
+                </a:solidFill>
+              </a:rPr>
+              <a:t>Benutzerverwaltung:   Login  ·  Registrierung  ·  Gastmodus (kein Speichern von Ergebnissen)</a:t>
+            </a:r>
+          </a:p>
+          <a:p>
+            <a:pPr algn="l"/>
+            <a:r>
+              <a:rPr sz="1100" b="0">
+                <a:solidFill>
+                  <a:srgbClr val="D0D7E8"/>
+                </a:solidFill>
+              </a:rPr>
+              <a:t>KI-System:   MiniMax (Thread-basiert, max. 45 Sek./Zug)  ·  Menschlicher Spieler beginnt immer</a:t>
+            </a:r>
+          </a:p>
+          <a:p>
+            <a:pPr algn="l"/>
+            <a:r>
+              <a:rPr sz="1100" b="0">
+                <a:solidFill>
+                  <a:srgbClr val="D0D7E8"/>
+                </a:solidFill>
+              </a:rPr>
+              <a:t>Persistenz:   Ergebnisse in SQLite  ·  SHA-256 + Salt  ·  Bestenliste pro Spiel &amp; Level</a:t>
+            </a:r>
+          </a:p>
+        </p:txBody>
+      </p:sp>
+      <p:sp>
+        <p:nvSpPr>
+          <p:cNvPr id="9" name="Rectangle 8"/>
+          <p:cNvSpPr/>
+          <p:nvPr/>
+        </p:nvSpPr>
+        <p:spPr>
+          <a:xfrm>
+            <a:off x="365760" y="2570000"/>
+            <a:ext cx="4114800" cy="1065028"/>
+          </a:xfrm>
+          <a:prstGeom prst="rect">
+            <a:avLst/>
+          </a:prstGeom>
+          <a:solidFill>
+            <a:srgbClr val="161638"/>
+          </a:solidFill>
+          <a:ln>
+            <a:noFill/>
+          </a:ln>
+        </p:spPr>
+        <p:style>
+          <a:lnRef idx="1">
+            <a:schemeClr val="accent1"/>
+          </a:lnRef>
+          <a:fillRef idx="3">
+            <a:schemeClr val="accent1"/>
+          </a:fillRef>
+          <a:effectRef idx="2">
+            <a:schemeClr val="accent1"/>
+          </a:effectRef>
+          <a:fontRef idx="minor">
+            <a:schemeClr val="lt1"/>
+          </a:fontRef>
+        </p:style>
+        <p:txBody>
+          <a:bodyPr rtlCol="0" anchor="ctr"/>
+          <a:lstStyle/>
+          <a:p>
+            <a:pPr algn="ctr"/>
+            <a:endParaRPr/>
+          </a:p>
+        </p:txBody>
+      </p:sp>
+      <p:sp>
+        <p:nvSpPr>
+          <p:cNvPr id="10" name="Rectangle 9"/>
+          <p:cNvSpPr/>
+          <p:nvPr/>
+        </p:nvSpPr>
+        <p:spPr>
+          <a:xfrm>
+            <a:off x="365760" y="2570000"/>
+            <a:ext cx="75000" cy="1065028"/>
+          </a:xfrm>
+          <a:prstGeom prst="rect">
+            <a:avLst/>
+          </a:prstGeom>
+          <a:solidFill>
+            <a:srgbClr val="4472C4"/>
+          </a:solidFill>
+          <a:ln>
+            <a:noFill/>
+          </a:ln>
+        </p:spPr>
+        <p:style>
+          <a:lnRef idx="1">
+            <a:schemeClr val="accent1"/>
+          </a:lnRef>
+          <a:fillRef idx="3">
+            <a:schemeClr val="accent1"/>
+          </a:fillRef>
+          <a:effectRef idx="2">
+            <a:schemeClr val="accent1"/>
+          </a:effectRef>
+          <a:fontRef idx="minor">
+            <a:schemeClr val="lt1"/>
+          </a:fontRef>
+        </p:style>
+        <p:txBody>
+          <a:bodyPr rtlCol="0" anchor="ctr"/>
+          <a:lstStyle/>
+          <a:p>
+            <a:pPr algn="ctr"/>
+            <a:endParaRPr/>
+          </a:p>
+        </p:txBody>
+      </p:sp>
+      <p:sp>
+        <p:nvSpPr>
+          <p:cNvPr id="11" name="TextBox 10"/>
+          <p:cNvSpPr txBox="1"/>
+          <p:nvPr/>
+        </p:nvSpPr>
+        <p:spPr>
+          <a:xfrm>
+            <a:off x="520760" y="2625000"/>
+            <a:ext cx="3879800" cy="265000"/>
+          </a:xfrm>
+          <a:prstGeom prst="rect">
+            <a:avLst/>
+          </a:prstGeom>
+          <a:noFill/>
+        </p:spPr>
+        <p:txBody>
+          <a:bodyPr wrap="square">
+            <a:spAutoFit/>
+          </a:bodyPr>
+          <a:lstStyle/>
+          <a:p>
+            <a:pPr algn="l"/>
+            <a:r>
+              <a:rPr sz="1300" b="1">
+                <a:solidFill>
+                  <a:srgbClr val="4472C4"/>
+                </a:solidFill>
+              </a:rPr>
+              <a:t>SOLL-Ziele  ·  2 / 2 umgesetzt  ✅</a:t>
+            </a:r>
+          </a:p>
+        </p:txBody>
+      </p:sp>
+      <p:sp>
+        <p:nvSpPr>
+          <p:cNvPr id="12" name="TextBox 11"/>
+          <p:cNvSpPr txBox="1"/>
+          <p:nvPr/>
+        </p:nvSpPr>
+        <p:spPr>
+          <a:xfrm>
+            <a:off x="520760" y="2915000"/>
+            <a:ext cx="3879800" cy="570000"/>
+          </a:xfrm>
+          <a:prstGeom prst="rect">
+            <a:avLst/>
+          </a:prstGeom>
+          <a:noFill/>
+        </p:spPr>
+        <p:txBody>
+          <a:bodyPr wrap="square">
+            <a:spAutoFit/>
+          </a:bodyPr>
+          <a:lstStyle/>
+          <a:p>
+            <a:pPr algn="l"/>
+            <a:r>
+              <a:rPr sz="1100" b="0">
+                <a:solidFill>
+                  <a:srgbClr val="2ECC71"/>
+                </a:solidFill>
+              </a:rPr>
+              <a:t>Alpha-Beta-Pruning (MiniMax-Optimierung)  ✅</a:t>
+            </a:r>
+          </a:p>
+          <a:p>
+            <a:pPr algn="l"/>
+            <a:r>
+              <a:rPr sz="1100" b="0">
+                <a:solidFill>
+                  <a:srgbClr val="2ECC71"/>
+                </a:solidFill>
+              </a:rPr>
+              <a:t>Bestenliste via SQL-Abfrage aus Datenbank  ✅</a:t>
+            </a:r>
+          </a:p>
+        </p:txBody>
+      </p:sp>
+      <p:sp>
+        <p:nvSpPr>
+          <p:cNvPr id="13" name="Rectangle 12"/>
+          <p:cNvSpPr/>
+          <p:nvPr/>
+        </p:nvSpPr>
+        <p:spPr>
+          <a:xfrm>
+            <a:off x="4846320" y="2570000"/>
+            <a:ext cx="4114800" cy="1065028"/>
+          </a:xfrm>
+          <a:prstGeom prst="rect">
+            <a:avLst/>
+          </a:prstGeom>
+          <a:solidFill>
+            <a:srgbClr val="161638"/>
+          </a:solidFill>
+          <a:ln>
+            <a:noFill/>
+          </a:ln>
+        </p:spPr>
+        <p:style>
+          <a:lnRef idx="1">
+            <a:schemeClr val="accent1"/>
+          </a:lnRef>
+          <a:fillRef idx="3">
+            <a:schemeClr val="accent1"/>
+          </a:fillRef>
+          <a:effectRef idx="2">
+            <a:schemeClr val="accent1"/>
+          </a:effectRef>
+          <a:fontRef idx="minor">
+            <a:schemeClr val="lt1"/>
+          </a:fontRef>
+        </p:style>
+        <p:txBody>
+          <a:bodyPr rtlCol="0" anchor="ctr"/>
+          <a:lstStyle/>
+          <a:p>
+            <a:pPr algn="ctr"/>
+            <a:endParaRPr/>
+          </a:p>
+        </p:txBody>
+      </p:sp>
+      <p:sp>
+        <p:nvSpPr>
+          <p:cNvPr id="14" name="Rectangle 13"/>
+          <p:cNvSpPr/>
+          <p:nvPr/>
+        </p:nvSpPr>
+        <p:spPr>
+          <a:xfrm>
+            <a:off x="4846320" y="2570000"/>
+            <a:ext cx="75000" cy="1065028"/>
+          </a:xfrm>
+          <a:prstGeom prst="rect">
+            <a:avLst/>
+          </a:prstGeom>
+          <a:solidFill>
+            <a:srgbClr val="F39C12"/>
+          </a:solidFill>
+          <a:ln>
+            <a:noFill/>
+          </a:ln>
+        </p:spPr>
+        <p:style>
+          <a:lnRef idx="1">
+            <a:schemeClr val="accent1"/>
+          </a:lnRef>
+          <a:fillRef idx="3">
+            <a:schemeClr val="accent1"/>
+          </a:fillRef>
+          <a:effectRef idx="2">
+            <a:schemeClr val="accent1"/>
+          </a:effectRef>
+          <a:fontRef idx="minor">
+            <a:schemeClr val="lt1"/>
+          </a:fontRef>
+        </p:style>
+        <p:txBody>
+          <a:bodyPr rtlCol="0" anchor="ctr"/>
+          <a:lstStyle/>
+          <a:p>
+            <a:pPr algn="ctr"/>
+            <a:endParaRPr/>
+          </a:p>
+        </p:txBody>
+      </p:sp>
+      <p:sp>
+        <p:nvSpPr>
+          <p:cNvPr id="15" name="TextBox 14"/>
+          <p:cNvSpPr txBox="1"/>
+          <p:nvPr/>
+        </p:nvSpPr>
+        <p:spPr>
+          <a:xfrm>
+            <a:off x="5001320" y="2625000"/>
+            <a:ext cx="3879800" cy="265000"/>
+          </a:xfrm>
+          <a:prstGeom prst="rect">
+            <a:avLst/>
+          </a:prstGeom>
+          <a:noFill/>
+        </p:spPr>
+        <p:txBody>
+          <a:bodyPr wrap="square">
+            <a:spAutoFit/>
+          </a:bodyPr>
+          <a:lstStyle/>
+          <a:p>
+            <a:pPr algn="l"/>
+            <a:r>
+              <a:rPr sz="1300" b="1">
+                <a:solidFill>
+                  <a:srgbClr val="F39C12"/>
+                </a:solidFill>
+              </a:rPr>
+              <a:t>KANN-Ziele  ·  2 / 4 umgesetzt  ⚠</a:t>
+            </a:r>
+          </a:p>
+        </p:txBody>
+      </p:sp>
+      <p:sp>
+        <p:nvSpPr>
+          <p:cNvPr id="16" name="TextBox 15"/>
+          <p:cNvSpPr txBox="1"/>
+          <p:nvPr/>
+        </p:nvSpPr>
+        <p:spPr>
+          <a:xfrm>
+            <a:off x="5001320" y="2915000"/>
+            <a:ext cx="3879800" cy="570000"/>
+          </a:xfrm>
+          <a:prstGeom prst="rect">
+            <a:avLst/>
+          </a:prstGeom>
+          <a:noFill/>
+        </p:spPr>
+        <p:txBody>
+          <a:bodyPr wrap="square">
+            <a:spAutoFit/>
+          </a:bodyPr>
+          <a:lstStyle/>
+          <a:p>
+            <a:pPr algn="l"/>
+            <a:r>
+              <a:rPr sz="1100" b="0">
+                <a:solidFill>
+                  <a:srgbClr val="2ECC71"/>
+                </a:solidFill>
+              </a:rPr>
+              <a:t>Sprachwechsel EN/DE  ✅</a:t>
+            </a:r>
+          </a:p>
+          <a:p>
+            <a:pPr algn="l"/>
+            <a:r>
+              <a:rPr sz="1100" b="0">
+                <a:solidFill>
+                  <a:srgbClr val="2ECC71"/>
+                </a:solidFill>
+              </a:rPr>
+              <a:t>Sprachpräferenz in Datenbank  ✅</a:t>
+            </a:r>
+          </a:p>
+          <a:p>
+            <a:pPr algn="l"/>
+            <a:r>
+              <a:rPr sz="1100" b="0">
+                <a:solidFill>
+                  <a:srgbClr val="E94560"/>
+                </a:solidFill>
+              </a:rPr>
+              <a:t>Dame (drittes Spiel)  ❌</a:t>
+            </a:r>
+          </a:p>
+          <a:p>
+            <a:pPr algn="l"/>
+            <a:r>
+              <a:rPr sz="1100" b="0">
+                <a:solidFill>
+                  <a:srgbClr val="E94560"/>
+                </a:solidFill>
+              </a:rPr>
+              <a:t>Alternative KI-Schnittstelle  ❌</a:t>
+            </a:r>
+          </a:p>
+        </p:txBody>
+      </p:sp>
+      <p:sp>
+        <p:nvSpPr>
+          <p:cNvPr id="17" name="Rectangle 16"/>
+          <p:cNvSpPr/>
+          <p:nvPr/>
+        </p:nvSpPr>
+        <p:spPr>
+          <a:xfrm>
+            <a:off x="365760" y="3759584"/>
+            <a:ext cx="8595360" cy="310028"/>
+          </a:xfrm>
+          <a:prstGeom prst="rect">
+            <a:avLst/>
+          </a:prstGeom>
+          <a:solidFill>
+            <a:srgbClr val="141432"/>
+          </a:solidFill>
+          <a:ln>
+            <a:noFill/>
+          </a:ln>
+        </p:spPr>
+        <p:style>
+          <a:lnRef idx="1">
+            <a:schemeClr val="accent1"/>
+          </a:lnRef>
+          <a:fillRef idx="3">
+            <a:schemeClr val="accent1"/>
+          </a:fillRef>
+          <a:effectRef idx="2">
+            <a:schemeClr val="accent1"/>
+          </a:effectRef>
+          <a:fontRef idx="minor">
+            <a:schemeClr val="lt1"/>
+          </a:fontRef>
+        </p:style>
+        <p:txBody>
+          <a:bodyPr rtlCol="0" anchor="ctr"/>
+          <a:lstStyle/>
+          <a:p>
+            <a:pPr algn="ctr"/>
+            <a:endParaRPr/>
+          </a:p>
+        </p:txBody>
+      </p:sp>
+      <p:sp>
+        <p:nvSpPr>
+          <p:cNvPr id="18" name="TextBox 17"/>
+          <p:cNvSpPr txBox="1"/>
+          <p:nvPr/>
+        </p:nvSpPr>
+        <p:spPr>
+          <a:xfrm>
+            <a:off x="465760" y="3764584"/>
+            <a:ext cx="8395360" cy="120000"/>
+          </a:xfrm>
+          <a:prstGeom prst="rect">
+            <a:avLst/>
+          </a:prstGeom>
+          <a:noFill/>
+        </p:spPr>
+        <p:txBody>
+          <a:bodyPr wrap="square">
+            <a:spAutoFit/>
+          </a:bodyPr>
+          <a:lstStyle/>
+          <a:p>
+            <a:pPr algn="l"/>
+            <a:r>
+              <a:rPr sz="800" b="0" dirty="0">
+                <a:solidFill>
+                  <a:srgbClr val="8A92A4"/>
+                </a:solidFill>
+              </a:rPr>
+              <a:t>Alle MUSS- und SOLL-</a:t>
+            </a:r>
+            <a:r>
+              <a:rPr sz="800" b="0" dirty="0" err="1">
+                <a:solidFill>
+                  <a:srgbClr val="8A92A4"/>
+                </a:solidFill>
+              </a:rPr>
+              <a:t>Anforderungen</a:t>
+            </a:r>
+            <a:r>
+              <a:rPr sz="800" b="0" dirty="0">
+                <a:solidFill>
+                  <a:srgbClr val="8A92A4"/>
+                </a:solidFill>
+              </a:rPr>
+              <a:t> </a:t>
+            </a:r>
+            <a:r>
+              <a:rPr sz="800" b="0" dirty="0" err="1">
+                <a:solidFill>
+                  <a:srgbClr val="8A92A4"/>
+                </a:solidFill>
+              </a:rPr>
+              <a:t>erfüllt</a:t>
+            </a:r>
+            <a:r>
+              <a:rPr sz="800" b="0" dirty="0">
+                <a:solidFill>
+                  <a:srgbClr val="8A92A4"/>
+                </a:solidFill>
+              </a:rPr>
+              <a:t>  ·  KANN-</a:t>
+            </a:r>
+            <a:r>
+              <a:rPr sz="800" b="0" dirty="0" err="1">
+                <a:solidFill>
+                  <a:srgbClr val="8A92A4"/>
+                </a:solidFill>
+              </a:rPr>
+              <a:t>Ziele</a:t>
+            </a:r>
+            <a:r>
+              <a:rPr sz="800" b="0" dirty="0">
+                <a:solidFill>
+                  <a:srgbClr val="8A92A4"/>
+                </a:solidFill>
+              </a:rPr>
+              <a:t>: </a:t>
+            </a:r>
+            <a:r>
+              <a:rPr sz="800" b="0" dirty="0" err="1">
+                <a:solidFill>
+                  <a:srgbClr val="8A92A4"/>
+                </a:solidFill>
+              </a:rPr>
+              <a:t>Sprachwechsel</a:t>
+            </a:r>
+            <a:r>
+              <a:rPr sz="800" b="0" dirty="0">
+                <a:solidFill>
+                  <a:srgbClr val="8A92A4"/>
+                </a:solidFill>
+              </a:rPr>
+              <a:t> </a:t>
+            </a:r>
+            <a:r>
+              <a:rPr sz="800" b="0" dirty="0" err="1">
+                <a:solidFill>
+                  <a:srgbClr val="8A92A4"/>
+                </a:solidFill>
+              </a:rPr>
+              <a:t>implementiert</a:t>
+            </a:r>
+            <a:r>
+              <a:rPr sz="800" b="0" dirty="0">
+                <a:solidFill>
+                  <a:srgbClr val="8A92A4"/>
+                </a:solidFill>
+              </a:rPr>
+              <a:t>, Dame &amp; Alt-KI </a:t>
+            </a:r>
+            <a:r>
+              <a:rPr sz="800" b="0" dirty="0" err="1">
+                <a:solidFill>
+                  <a:srgbClr val="8A92A4"/>
+                </a:solidFill>
+              </a:rPr>
+              <a:t>zeitbedingt</a:t>
+            </a:r>
+            <a:r>
+              <a:rPr sz="800" b="0" dirty="0">
+                <a:solidFill>
+                  <a:srgbClr val="8A92A4"/>
+                </a:solidFill>
+              </a:rPr>
+              <a:t> nicht </a:t>
+            </a:r>
+            <a:r>
+              <a:rPr sz="800" b="0" dirty="0" err="1">
+                <a:solidFill>
+                  <a:srgbClr val="8A92A4"/>
+                </a:solidFill>
+              </a:rPr>
+              <a:t>umgesetzt</a:t>
+            </a:r>
+            <a:endParaRPr sz="800" b="0" dirty="0">
+              <a:solidFill>
+                <a:srgbClr val="8A92A4"/>
+              </a:solidFill>
+            </a:endParaRPr>
+          </a:p>
+        </p:txBody>
+      </p:sp>
+    </p:spTree>
+  </p:cSld>
+  <p:clrMapOvr>
+    <a:masterClrMapping/>
+  </p:clrMapOvr>
+</p:sld>
+</file>
+
+<file path=ppt/slides/slide18.xml><?xml version="1.0" encoding="utf-8"?>
+<p:sld xmlns:a="http://schemas.openxmlformats.org/drawingml/2006/main" xmlns:r="http://schemas.openxmlformats.org/officeDocument/2006/relationships" xmlns:p="http://schemas.openxmlformats.org/presentationml/2006/main">
+  <p:cSld>
+    <p:bg>
+      <p:bgPr>
+        <a:solidFill>
+          <a:srgbClr val="0D0D1A"/>
+        </a:solidFill>
+        <a:effectLst/>
+      </p:bgPr>
+    </p:bg>
+    <p:spTree>
+      <p:nvGrpSpPr>
+        <p:cNvPr id="1" name=""/>
+        <p:cNvGrpSpPr/>
+        <p:nvPr/>
+      </p:nvGrpSpPr>
+      <p:grpSpPr>
+        <a:xfrm>
+          <a:off x="0" y="0"/>
+          <a:ext cx="0" cy="0"/>
+          <a:chOff x="0" y="0"/>
+          <a:chExt cx="0" cy="0"/>
+        </a:xfrm>
+      </p:grpSpPr>
+      <p:sp>
+        <p:nvSpPr>
+          <p:cNvPr id="2" name="TextBox 1"/>
+          <p:cNvSpPr txBox="1"/>
+          <p:nvPr/>
+        </p:nvSpPr>
+        <p:spPr>
+          <a:xfrm>
+            <a:off x="457200" y="256032"/>
+            <a:ext cx="8229600" cy="400000"/>
+          </a:xfrm>
+          <a:prstGeom prst="rect">
+            <a:avLst/>
+          </a:prstGeom>
+          <a:noFill/>
+        </p:spPr>
+        <p:txBody>
+          <a:bodyPr wrap="square">
+            <a:spAutoFit/>
+          </a:bodyPr>
+          <a:lstStyle/>
+          <a:p>
+            <a:pPr algn="l"/>
+            <a:r>
+              <a:rPr sz="2800" b="1">
+                <a:solidFill>
+                  <a:srgbClr val="FFFFFF"/>
+                </a:solidFill>
+              </a:rPr>
+              <a:t>SOLL/IST Projektplanung</a:t>
+            </a:r>
+          </a:p>
+        </p:txBody>
+      </p:sp>
+      <p:sp>
+        <p:nvSpPr>
+          <p:cNvPr id="3" name="TextBox 2"/>
+          <p:cNvSpPr txBox="1"/>
+          <p:nvPr/>
+        </p:nvSpPr>
+        <p:spPr>
+          <a:xfrm>
+            <a:off x="457200" y="670000"/>
+            <a:ext cx="8229600" cy="200000"/>
+          </a:xfrm>
+          <a:prstGeom prst="rect">
+            <a:avLst/>
+          </a:prstGeom>
+          <a:noFill/>
+        </p:spPr>
+        <p:txBody>
+          <a:bodyPr wrap="square">
+            <a:spAutoFit/>
+          </a:bodyPr>
+          <a:lstStyle/>
+          <a:p>
+            <a:pPr algn="l"/>
+            <a:r>
+              <a:rPr sz="900" b="0">
+                <a:solidFill>
+                  <a:srgbClr val="8A92A4"/>
+                </a:solidFill>
+              </a:rPr>
+              <a:t>Wasserfallmodell  ·  2 Team-Meetings (27.04. &amp; 29.04. 10:00 Uhr)  ·  Koordination via Discord &amp; WhatsApp</a:t>
+            </a:r>
+          </a:p>
+        </p:txBody>
+      </p:sp>
+      <p:sp>
+        <p:nvSpPr>
+          <p:cNvPr id="4" name="TextBox 3"/>
+          <p:cNvSpPr txBox="1"/>
+          <p:nvPr/>
+        </p:nvSpPr>
+        <p:spPr>
+          <a:xfrm>
+            <a:off x="8626110" y="4875028"/>
+            <a:ext cx="339583" cy="215444"/>
+          </a:xfrm>
+          <a:prstGeom prst="rect">
+            <a:avLst/>
+          </a:prstGeom>
+          <a:noFill/>
+        </p:spPr>
+        <p:txBody>
+          <a:bodyPr wrap="square">
+            <a:spAutoFit/>
+          </a:bodyPr>
+          <a:lstStyle/>
+          <a:p>
+            <a:pPr algn="ctr"/>
+            <a:r>
+              <a:rPr sz="800" b="1" dirty="0">
+                <a:solidFill>
+                  <a:srgbClr val="E94560"/>
+                </a:solidFill>
+              </a:rPr>
+              <a:t>18</a:t>
+            </a:r>
+          </a:p>
+        </p:txBody>
+      </p:sp>
+      <p:sp>
+        <p:nvSpPr>
+          <p:cNvPr id="5" name="Rectangle 4"/>
+          <p:cNvSpPr/>
+          <p:nvPr/>
+        </p:nvSpPr>
+        <p:spPr>
+          <a:xfrm>
+            <a:off x="365760" y="880000"/>
+            <a:ext cx="8595360" cy="360000"/>
+          </a:xfrm>
+          <a:prstGeom prst="rect">
+            <a:avLst/>
+          </a:prstGeom>
+          <a:solidFill>
+            <a:srgbClr val="1A1A45"/>
+          </a:solidFill>
+          <a:ln>
+            <a:noFill/>
+          </a:ln>
+        </p:spPr>
+        <p:style>
+          <a:lnRef idx="1">
+            <a:schemeClr val="accent1"/>
+          </a:lnRef>
+          <a:fillRef idx="3">
+            <a:schemeClr val="accent1"/>
+          </a:fillRef>
+          <a:effectRef idx="2">
+            <a:schemeClr val="accent1"/>
+          </a:effectRef>
+          <a:fontRef idx="minor">
+            <a:schemeClr val="lt1"/>
+          </a:fontRef>
+        </p:style>
+        <p:txBody>
+          <a:bodyPr rtlCol="0" anchor="ctr"/>
+          <a:lstStyle/>
+          <a:p>
+            <a:pPr algn="ctr"/>
+            <a:endParaRPr/>
+          </a:p>
+        </p:txBody>
+      </p:sp>
+      <p:sp>
+        <p:nvSpPr>
+          <p:cNvPr id="6" name="TextBox 5"/>
+          <p:cNvSpPr txBox="1"/>
+          <p:nvPr/>
+        </p:nvSpPr>
+        <p:spPr>
+          <a:xfrm>
+            <a:off x="385760" y="970000"/>
+            <a:ext cx="1780000" cy="180000"/>
+          </a:xfrm>
+          <a:prstGeom prst="rect">
+            <a:avLst/>
+          </a:prstGeom>
+          <a:noFill/>
+        </p:spPr>
+        <p:txBody>
+          <a:bodyPr wrap="square">
+            <a:spAutoFit/>
+          </a:bodyPr>
+          <a:lstStyle/>
+          <a:p>
+            <a:pPr algn="l"/>
+            <a:r>
+              <a:rPr sz="1200" b="1">
+                <a:solidFill>
+                  <a:srgbClr val="FFFFFF"/>
+                </a:solidFill>
+              </a:rPr>
+              <a:t>Phase</a:t>
+            </a:r>
+          </a:p>
+        </p:txBody>
+      </p:sp>
+      <p:sp>
+        <p:nvSpPr>
+          <p:cNvPr id="7" name="TextBox 6"/>
+          <p:cNvSpPr txBox="1"/>
+          <p:nvPr/>
+        </p:nvSpPr>
+        <p:spPr>
+          <a:xfrm>
+            <a:off x="2285760" y="970000"/>
+            <a:ext cx="2180000" cy="180000"/>
+          </a:xfrm>
+          <a:prstGeom prst="rect">
+            <a:avLst/>
+          </a:prstGeom>
+          <a:noFill/>
+        </p:spPr>
+        <p:txBody>
+          <a:bodyPr wrap="square">
+            <a:spAutoFit/>
+          </a:bodyPr>
+          <a:lstStyle/>
+          <a:p>
+            <a:pPr algn="l"/>
+            <a:r>
+              <a:rPr sz="1200" b="1">
+                <a:solidFill>
+                  <a:srgbClr val="4472C4"/>
+                </a:solidFill>
+              </a:rPr>
+              <a:t>SOLL (geplant)</a:t>
+            </a:r>
+          </a:p>
+        </p:txBody>
+      </p:sp>
+      <p:sp>
+        <p:nvSpPr>
+          <p:cNvPr id="8" name="TextBox 7"/>
+          <p:cNvSpPr txBox="1"/>
+          <p:nvPr/>
+        </p:nvSpPr>
+        <p:spPr>
+          <a:xfrm>
+            <a:off x="4585760" y="970000"/>
+            <a:ext cx="2780000" cy="180000"/>
+          </a:xfrm>
+          <a:prstGeom prst="rect">
+            <a:avLst/>
+          </a:prstGeom>
+          <a:noFill/>
+        </p:spPr>
+        <p:txBody>
+          <a:bodyPr wrap="square">
+            <a:spAutoFit/>
+          </a:bodyPr>
+          <a:lstStyle/>
+          <a:p>
+            <a:pPr algn="l"/>
+            <a:r>
+              <a:rPr sz="1200" b="1">
+                <a:solidFill>
+                  <a:srgbClr val="2ECC71"/>
+                </a:solidFill>
+              </a:rPr>
+              <a:t>IST (tatsächlich)</a:t>
+            </a:r>
+          </a:p>
+        </p:txBody>
+      </p:sp>
+      <p:sp>
+        <p:nvSpPr>
+          <p:cNvPr id="9" name="TextBox 8"/>
+          <p:cNvSpPr txBox="1"/>
+          <p:nvPr/>
+        </p:nvSpPr>
+        <p:spPr>
+          <a:xfrm>
+            <a:off x="7485760" y="970000"/>
+            <a:ext cx="1530000" cy="180000"/>
+          </a:xfrm>
+          <a:prstGeom prst="rect">
+            <a:avLst/>
+          </a:prstGeom>
+          <a:noFill/>
+        </p:spPr>
+        <p:txBody>
+          <a:bodyPr wrap="square">
+            <a:spAutoFit/>
+          </a:bodyPr>
+          <a:lstStyle/>
+          <a:p>
+            <a:pPr algn="l"/>
+            <a:r>
+              <a:rPr sz="1200" b="1">
+                <a:solidFill>
+                  <a:srgbClr val="F39C12"/>
+                </a:solidFill>
+              </a:rPr>
+              <a:t>Abweichung</a:t>
+            </a:r>
+          </a:p>
+        </p:txBody>
+      </p:sp>
+      <p:sp>
+        <p:nvSpPr>
+          <p:cNvPr id="10" name="Rectangle 9"/>
+          <p:cNvSpPr/>
+          <p:nvPr/>
+        </p:nvSpPr>
+        <p:spPr>
+          <a:xfrm>
+            <a:off x="365760" y="1246000"/>
+            <a:ext cx="8595360" cy="614000"/>
+          </a:xfrm>
+          <a:prstGeom prst="rect">
+            <a:avLst/>
+          </a:prstGeom>
+          <a:solidFill>
+            <a:srgbClr val="141432"/>
+          </a:solidFill>
+          <a:ln>
+            <a:noFill/>
+          </a:ln>
+        </p:spPr>
+        <p:style>
+          <a:lnRef idx="1">
+            <a:schemeClr val="accent1"/>
+          </a:lnRef>
+          <a:fillRef idx="3">
+            <a:schemeClr val="accent1"/>
+          </a:fillRef>
+          <a:effectRef idx="2">
+            <a:schemeClr val="accent1"/>
+          </a:effectRef>
+          <a:fontRef idx="minor">
+            <a:schemeClr val="lt1"/>
+          </a:fontRef>
+        </p:style>
+        <p:txBody>
+          <a:bodyPr rtlCol="0" anchor="ctr"/>
+          <a:lstStyle/>
+          <a:p>
+            <a:pPr algn="ctr"/>
+            <a:endParaRPr/>
+          </a:p>
+        </p:txBody>
+      </p:sp>
+      <p:sp>
+        <p:nvSpPr>
+          <p:cNvPr id="11" name="Rectangle 10"/>
+          <p:cNvSpPr/>
+          <p:nvPr/>
+        </p:nvSpPr>
+        <p:spPr>
+          <a:xfrm>
+            <a:off x="365760" y="1246000"/>
+            <a:ext cx="6000" cy="614000"/>
+          </a:xfrm>
+          <a:prstGeom prst="rect">
+            <a:avLst/>
+          </a:prstGeom>
+          <a:solidFill>
+            <a:srgbClr val="2ECC71"/>
+          </a:solidFill>
+          <a:ln>
+            <a:noFill/>
+          </a:ln>
+        </p:spPr>
+        <p:style>
+          <a:lnRef idx="1">
+            <a:schemeClr val="accent1"/>
+          </a:lnRef>
+          <a:fillRef idx="3">
+            <a:schemeClr val="accent1"/>
+          </a:fillRef>
+          <a:effectRef idx="2">
+            <a:schemeClr val="accent1"/>
+          </a:effectRef>
+          <a:fontRef idx="minor">
+            <a:schemeClr val="lt1"/>
+          </a:fontRef>
+        </p:style>
+        <p:txBody>
+          <a:bodyPr rtlCol="0" anchor="ctr"/>
+          <a:lstStyle/>
+          <a:p>
+            <a:pPr algn="ctr"/>
+            <a:endParaRPr/>
+          </a:p>
+        </p:txBody>
+      </p:sp>
+      <p:sp>
+        <p:nvSpPr>
+          <p:cNvPr id="12" name="TextBox 11"/>
+          <p:cNvSpPr txBox="1"/>
+          <p:nvPr/>
+        </p:nvSpPr>
+        <p:spPr>
+          <a:xfrm>
+            <a:off x="390760" y="1276000"/>
+            <a:ext cx="1775000" cy="560000"/>
+          </a:xfrm>
+          <a:prstGeom prst="rect">
+            <a:avLst/>
+          </a:prstGeom>
+          <a:noFill/>
+        </p:spPr>
+        <p:txBody>
+          <a:bodyPr wrap="square">
+            <a:spAutoFit/>
+          </a:bodyPr>
+          <a:lstStyle/>
+          <a:p>
+            <a:pPr algn="l"/>
+            <a:r>
+              <a:rPr sz="1100" b="1">
+                <a:solidFill>
+                  <a:srgbClr val="FFFFFF"/>
+                </a:solidFill>
+              </a:rPr>
+              <a:t>Analysephase</a:t>
+            </a:r>
+          </a:p>
+        </p:txBody>
+      </p:sp>
+      <p:sp>
+        <p:nvSpPr>
+          <p:cNvPr id="13" name="TextBox 12"/>
+          <p:cNvSpPr txBox="1"/>
+          <p:nvPr/>
+        </p:nvSpPr>
+        <p:spPr>
+          <a:xfrm>
+            <a:off x="2285760" y="1276000"/>
+            <a:ext cx="2180000" cy="560000"/>
+          </a:xfrm>
+          <a:prstGeom prst="rect">
+            <a:avLst/>
+          </a:prstGeom>
+          <a:noFill/>
+        </p:spPr>
+        <p:txBody>
+          <a:bodyPr wrap="square">
+            <a:spAutoFit/>
+          </a:bodyPr>
+          <a:lstStyle/>
+          <a:p>
+            <a:pPr algn="l"/>
+            <a:r>
+              <a:rPr sz="1000" b="0">
+                <a:solidFill>
+                  <a:srgbClr val="D0D7E8"/>
+                </a:solidFill>
+              </a:rPr>
+              <a:t>Woche 1</a:t>
+            </a:r>
+          </a:p>
+          <a:p>
+            <a:pPr algn="l"/>
+            <a:r>
+              <a:rPr sz="1000" b="0">
+                <a:solidFill>
+                  <a:srgbClr val="D0D7E8"/>
+                </a:solidFill>
+              </a:rPr>
+              <a:t>20.04.–24.04.</a:t>
+            </a:r>
+          </a:p>
+        </p:txBody>
+      </p:sp>
+      <p:sp>
+        <p:nvSpPr>
+          <p:cNvPr id="14" name="TextBox 13"/>
+          <p:cNvSpPr txBox="1"/>
+          <p:nvPr/>
+        </p:nvSpPr>
+        <p:spPr>
+          <a:xfrm>
+            <a:off x="4585760" y="1276000"/>
+            <a:ext cx="2780000" cy="560000"/>
+          </a:xfrm>
+          <a:prstGeom prst="rect">
+            <a:avLst/>
+          </a:prstGeom>
+          <a:noFill/>
+        </p:spPr>
+        <p:txBody>
+          <a:bodyPr wrap="square">
+            <a:spAutoFit/>
+          </a:bodyPr>
+          <a:lstStyle/>
+          <a:p>
+            <a:pPr algn="l"/>
+            <a:r>
+              <a:rPr sz="1000" b="0">
+                <a:solidFill>
+                  <a:srgbClr val="D0D7E8"/>
+                </a:solidFill>
+              </a:rPr>
+              <a:t>20.04.–24.04.</a:t>
+            </a:r>
+          </a:p>
+          <a:p>
+            <a:pPr algn="l"/>
+            <a:r>
+              <a:rPr sz="1000" b="0">
+                <a:solidFill>
+                  <a:srgbClr val="D0D7E8"/>
+                </a:solidFill>
+              </a:rPr>
+              <a:t>Pflichtenheft, WBS, Zeitplan</a:t>
+            </a:r>
+          </a:p>
+        </p:txBody>
+      </p:sp>
+      <p:sp>
+        <p:nvSpPr>
+          <p:cNvPr id="15" name="TextBox 14"/>
+          <p:cNvSpPr txBox="1"/>
+          <p:nvPr/>
+        </p:nvSpPr>
+        <p:spPr>
+          <a:xfrm>
+            <a:off x="7485760" y="1276000"/>
+            <a:ext cx="1530000" cy="560000"/>
+          </a:xfrm>
+          <a:prstGeom prst="rect">
+            <a:avLst/>
+          </a:prstGeom>
+          <a:noFill/>
+        </p:spPr>
+        <p:txBody>
+          <a:bodyPr wrap="square">
+            <a:spAutoFit/>
+          </a:bodyPr>
+          <a:lstStyle/>
+          <a:p>
+            <a:pPr algn="l"/>
+            <a:r>
+              <a:rPr sz="1100" b="1">
+                <a:solidFill>
+                  <a:srgbClr val="2ECC71"/>
+                </a:solidFill>
+              </a:rPr>
+              <a:t>✅  Plangemäß</a:t>
+            </a:r>
+          </a:p>
+        </p:txBody>
+      </p:sp>
+      <p:sp>
+        <p:nvSpPr>
+          <p:cNvPr id="16" name="Rectangle 15"/>
+          <p:cNvSpPr/>
+          <p:nvPr/>
+        </p:nvSpPr>
+        <p:spPr>
+          <a:xfrm>
+            <a:off x="365760" y="1866000"/>
+            <a:ext cx="8595360" cy="614000"/>
+          </a:xfrm>
+          <a:prstGeom prst="rect">
+            <a:avLst/>
+          </a:prstGeom>
+          <a:solidFill>
+            <a:srgbClr val="161638"/>
+          </a:solidFill>
+          <a:ln>
+            <a:noFill/>
+          </a:ln>
+        </p:spPr>
+        <p:style>
+          <a:lnRef idx="1">
+            <a:schemeClr val="accent1"/>
+          </a:lnRef>
+          <a:fillRef idx="3">
+            <a:schemeClr val="accent1"/>
+          </a:fillRef>
+          <a:effectRef idx="2">
+            <a:schemeClr val="accent1"/>
+          </a:effectRef>
+          <a:fontRef idx="minor">
+            <a:schemeClr val="lt1"/>
+          </a:fontRef>
+        </p:style>
+        <p:txBody>
+          <a:bodyPr rtlCol="0" anchor="ctr"/>
+          <a:lstStyle/>
+          <a:p>
+            <a:pPr algn="ctr"/>
+            <a:endParaRPr/>
+          </a:p>
+        </p:txBody>
+      </p:sp>
+      <p:sp>
+        <p:nvSpPr>
+          <p:cNvPr id="17" name="Rectangle 16"/>
+          <p:cNvSpPr/>
+          <p:nvPr/>
+        </p:nvSpPr>
+        <p:spPr>
+          <a:xfrm>
+            <a:off x="365760" y="1866000"/>
+            <a:ext cx="6000" cy="614000"/>
+          </a:xfrm>
+          <a:prstGeom prst="rect">
+            <a:avLst/>
+          </a:prstGeom>
+          <a:solidFill>
+            <a:srgbClr val="F1C40F"/>
+          </a:solidFill>
+          <a:ln>
+            <a:noFill/>
+          </a:ln>
+        </p:spPr>
+        <p:style>
+          <a:lnRef idx="1">
+            <a:schemeClr val="accent1"/>
+          </a:lnRef>
+          <a:fillRef idx="3">
+            <a:schemeClr val="accent1"/>
+          </a:fillRef>
+          <a:effectRef idx="2">
+            <a:schemeClr val="accent1"/>
+          </a:effectRef>
+          <a:fontRef idx="minor">
+            <a:schemeClr val="lt1"/>
+          </a:fontRef>
+        </p:style>
+        <p:txBody>
+          <a:bodyPr rtlCol="0" anchor="ctr"/>
+          <a:lstStyle/>
+          <a:p>
+            <a:pPr algn="ctr"/>
+            <a:endParaRPr/>
+          </a:p>
+        </p:txBody>
+      </p:sp>
+      <p:sp>
+        <p:nvSpPr>
+          <p:cNvPr id="18" name="TextBox 17"/>
+          <p:cNvSpPr txBox="1"/>
+          <p:nvPr/>
+        </p:nvSpPr>
+        <p:spPr>
+          <a:xfrm>
+            <a:off x="390760" y="1896000"/>
+            <a:ext cx="1775000" cy="560000"/>
+          </a:xfrm>
+          <a:prstGeom prst="rect">
+            <a:avLst/>
+          </a:prstGeom>
+          <a:noFill/>
+        </p:spPr>
+        <p:txBody>
+          <a:bodyPr wrap="square">
+            <a:spAutoFit/>
+          </a:bodyPr>
+          <a:lstStyle/>
+          <a:p>
+            <a:pPr algn="l"/>
+            <a:r>
+              <a:rPr sz="1100" b="1">
+                <a:solidFill>
+                  <a:srgbClr val="FFFFFF"/>
+                </a:solidFill>
+              </a:rPr>
+              <a:t>Implementierung</a:t>
+            </a:r>
+          </a:p>
+        </p:txBody>
+      </p:sp>
+      <p:sp>
+        <p:nvSpPr>
+          <p:cNvPr id="19" name="TextBox 18"/>
+          <p:cNvSpPr txBox="1"/>
+          <p:nvPr/>
+        </p:nvSpPr>
+        <p:spPr>
+          <a:xfrm>
+            <a:off x="2285760" y="1896000"/>
+            <a:ext cx="2180000" cy="560000"/>
+          </a:xfrm>
+          <a:prstGeom prst="rect">
+            <a:avLst/>
+          </a:prstGeom>
+          <a:noFill/>
+        </p:spPr>
+        <p:txBody>
+          <a:bodyPr wrap="square">
+            <a:spAutoFit/>
+          </a:bodyPr>
+          <a:lstStyle/>
+          <a:p>
+            <a:pPr algn="l"/>
+            <a:r>
+              <a:rPr sz="1000" b="0">
+                <a:solidFill>
+                  <a:srgbClr val="D0D7E8"/>
+                </a:solidFill>
+              </a:rPr>
+              <a:t>Woche 2</a:t>
+            </a:r>
+          </a:p>
+          <a:p>
+            <a:pPr algn="l"/>
+            <a:r>
+              <a:rPr sz="1000" b="0">
+                <a:solidFill>
+                  <a:srgbClr val="D0D7E8"/>
+                </a:solidFill>
+              </a:rPr>
+              <a:t>27.04.–01.05.</a:t>
+            </a:r>
+          </a:p>
+        </p:txBody>
+      </p:sp>
+      <p:sp>
+        <p:nvSpPr>
+          <p:cNvPr id="20" name="TextBox 19"/>
+          <p:cNvSpPr txBox="1"/>
+          <p:nvPr/>
+        </p:nvSpPr>
+        <p:spPr>
+          <a:xfrm>
+            <a:off x="4585760" y="1896000"/>
+            <a:ext cx="2780000" cy="560000"/>
+          </a:xfrm>
+          <a:prstGeom prst="rect">
+            <a:avLst/>
+          </a:prstGeom>
+          <a:noFill/>
+        </p:spPr>
+        <p:txBody>
+          <a:bodyPr wrap="square">
+            <a:spAutoFit/>
+          </a:bodyPr>
+          <a:lstStyle/>
+          <a:p>
+            <a:pPr algn="l"/>
+            <a:r>
+              <a:rPr sz="1000" b="0">
+                <a:solidFill>
+                  <a:srgbClr val="D0D7E8"/>
+                </a:solidFill>
+              </a:rPr>
+              <a:t>27.04.–04.05.</a:t>
+            </a:r>
+          </a:p>
+          <a:p>
+            <a:pPr algn="l"/>
+            <a:r>
+              <a:rPr sz="1000" b="0">
+                <a:solidFill>
+                  <a:srgbClr val="D0D7E8"/>
+                </a:solidFill>
+              </a:rPr>
+              <a:t>(01.05. = Feiertag → +04.05.)</a:t>
+            </a:r>
+          </a:p>
+        </p:txBody>
+      </p:sp>
+      <p:sp>
+        <p:nvSpPr>
+          <p:cNvPr id="21" name="TextBox 20"/>
+          <p:cNvSpPr txBox="1"/>
+          <p:nvPr/>
+        </p:nvSpPr>
+        <p:spPr>
+          <a:xfrm>
+            <a:off x="7485760" y="1896000"/>
+            <a:ext cx="1530000" cy="560000"/>
+          </a:xfrm>
+          <a:prstGeom prst="rect">
+            <a:avLst/>
+          </a:prstGeom>
+          <a:noFill/>
+        </p:spPr>
+        <p:txBody>
+          <a:bodyPr wrap="square">
+            <a:spAutoFit/>
+          </a:bodyPr>
+          <a:lstStyle/>
+          <a:p>
+            <a:pPr algn="l"/>
+            <a:r>
+              <a:rPr sz="1100" b="1">
+                <a:solidFill>
+                  <a:srgbClr val="F1C40F"/>
+                </a:solidFill>
+              </a:rPr>
+              <a:t>⚠  +1 Tag</a:t>
+            </a:r>
+          </a:p>
+        </p:txBody>
+      </p:sp>
+      <p:sp>
+        <p:nvSpPr>
+          <p:cNvPr id="22" name="Rectangle 21"/>
+          <p:cNvSpPr/>
+          <p:nvPr/>
+        </p:nvSpPr>
+        <p:spPr>
+          <a:xfrm>
+            <a:off x="365760" y="2486000"/>
+            <a:ext cx="8595360" cy="614000"/>
+          </a:xfrm>
+          <a:prstGeom prst="rect">
+            <a:avLst/>
+          </a:prstGeom>
+          <a:solidFill>
+            <a:srgbClr val="141432"/>
+          </a:solidFill>
+          <a:ln>
+            <a:noFill/>
+          </a:ln>
+        </p:spPr>
+        <p:style>
+          <a:lnRef idx="1">
+            <a:schemeClr val="accent1"/>
+          </a:lnRef>
+          <a:fillRef idx="3">
+            <a:schemeClr val="accent1"/>
+          </a:fillRef>
+          <a:effectRef idx="2">
+            <a:schemeClr val="accent1"/>
+          </a:effectRef>
+          <a:fontRef idx="minor">
+            <a:schemeClr val="lt1"/>
+          </a:fontRef>
+        </p:style>
+        <p:txBody>
+          <a:bodyPr rtlCol="0" anchor="ctr"/>
+          <a:lstStyle/>
+          <a:p>
+            <a:pPr algn="ctr"/>
+            <a:endParaRPr/>
+          </a:p>
+        </p:txBody>
+      </p:sp>
+      <p:sp>
+        <p:nvSpPr>
+          <p:cNvPr id="23" name="Rectangle 22"/>
+          <p:cNvSpPr/>
+          <p:nvPr/>
+        </p:nvSpPr>
+        <p:spPr>
+          <a:xfrm>
+            <a:off x="365760" y="2486000"/>
+            <a:ext cx="6000" cy="614000"/>
+          </a:xfrm>
+          <a:prstGeom prst="rect">
+            <a:avLst/>
+          </a:prstGeom>
+          <a:solidFill>
+            <a:srgbClr val="F1C40F"/>
+          </a:solidFill>
+          <a:ln>
+            <a:noFill/>
+          </a:ln>
+        </p:spPr>
+        <p:style>
+          <a:lnRef idx="1">
+            <a:schemeClr val="accent1"/>
+          </a:lnRef>
+          <a:fillRef idx="3">
+            <a:schemeClr val="accent1"/>
+          </a:fillRef>
+          <a:effectRef idx="2">
+            <a:schemeClr val="accent1"/>
+          </a:effectRef>
+          <a:fontRef idx="minor">
+            <a:schemeClr val="lt1"/>
+          </a:fontRef>
+        </p:style>
+        <p:txBody>
+          <a:bodyPr rtlCol="0" anchor="ctr"/>
+          <a:lstStyle/>
+          <a:p>
+            <a:pPr algn="ctr"/>
+            <a:endParaRPr/>
+          </a:p>
+        </p:txBody>
+      </p:sp>
+      <p:sp>
+        <p:nvSpPr>
+          <p:cNvPr id="24" name="TextBox 23"/>
+          <p:cNvSpPr txBox="1"/>
+          <p:nvPr/>
+        </p:nvSpPr>
+        <p:spPr>
+          <a:xfrm>
+            <a:off x="390760" y="2516000"/>
+            <a:ext cx="1775000" cy="560000"/>
+          </a:xfrm>
+          <a:prstGeom prst="rect">
+            <a:avLst/>
+          </a:prstGeom>
+          <a:noFill/>
+        </p:spPr>
+        <p:txBody>
+          <a:bodyPr wrap="square">
+            <a:spAutoFit/>
+          </a:bodyPr>
+          <a:lstStyle/>
+          <a:p>
+            <a:pPr algn="l"/>
+            <a:r>
+              <a:rPr sz="1100" b="1">
+                <a:solidFill>
+                  <a:srgbClr val="FFFFFF"/>
+                </a:solidFill>
+              </a:rPr>
+              <a:t>Test</a:t>
+            </a:r>
+          </a:p>
+        </p:txBody>
+      </p:sp>
+      <p:sp>
+        <p:nvSpPr>
+          <p:cNvPr id="25" name="TextBox 24"/>
+          <p:cNvSpPr txBox="1"/>
+          <p:nvPr/>
+        </p:nvSpPr>
+        <p:spPr>
+          <a:xfrm>
+            <a:off x="2285760" y="2516000"/>
+            <a:ext cx="2180000" cy="560000"/>
+          </a:xfrm>
+          <a:prstGeom prst="rect">
+            <a:avLst/>
+          </a:prstGeom>
+          <a:noFill/>
+        </p:spPr>
+        <p:txBody>
+          <a:bodyPr wrap="square">
+            <a:spAutoFit/>
+          </a:bodyPr>
+          <a:lstStyle/>
+          <a:p>
+            <a:pPr algn="l"/>
+            <a:r>
+              <a:rPr sz="1000" b="0">
+                <a:solidFill>
+                  <a:srgbClr val="D0D7E8"/>
+                </a:solidFill>
+              </a:rPr>
+              <a:t>Woche 2</a:t>
+            </a:r>
+          </a:p>
+          <a:p>
+            <a:pPr algn="l"/>
+            <a:r>
+              <a:rPr sz="1000" b="0">
+                <a:solidFill>
+                  <a:srgbClr val="D0D7E8"/>
+                </a:solidFill>
+              </a:rPr>
+              <a:t>Mitte / Ende</a:t>
+            </a:r>
+          </a:p>
+        </p:txBody>
+      </p:sp>
+      <p:sp>
+        <p:nvSpPr>
+          <p:cNvPr id="26" name="TextBox 25"/>
+          <p:cNvSpPr txBox="1"/>
+          <p:nvPr/>
+        </p:nvSpPr>
+        <p:spPr>
+          <a:xfrm>
+            <a:off x="4585760" y="2516000"/>
+            <a:ext cx="2780000" cy="560000"/>
+          </a:xfrm>
+          <a:prstGeom prst="rect">
+            <a:avLst/>
+          </a:prstGeom>
+          <a:noFill/>
+        </p:spPr>
+        <p:txBody>
+          <a:bodyPr wrap="square">
+            <a:spAutoFit/>
+          </a:bodyPr>
+          <a:lstStyle/>
+          <a:p>
+            <a:pPr algn="l"/>
+            <a:r>
+              <a:rPr sz="1000" b="0">
+                <a:solidFill>
+                  <a:srgbClr val="D0D7E8"/>
+                </a:solidFill>
+              </a:rPr>
+              <a:t>Parallel zur Implementierung</a:t>
+            </a:r>
+          </a:p>
+          <a:p>
+            <a:pPr algn="l"/>
+            <a:r>
+              <a:rPr sz="1000" b="0">
+                <a:solidFill>
+                  <a:srgbClr val="D0D7E8"/>
+                </a:solidFill>
+              </a:rPr>
+              <a:t>(kein separater Sprint)</a:t>
+            </a:r>
+          </a:p>
+        </p:txBody>
+      </p:sp>
+      <p:sp>
+        <p:nvSpPr>
+          <p:cNvPr id="27" name="TextBox 26"/>
+          <p:cNvSpPr txBox="1"/>
+          <p:nvPr/>
+        </p:nvSpPr>
+        <p:spPr>
+          <a:xfrm>
+            <a:off x="7485760" y="2516000"/>
+            <a:ext cx="1530000" cy="560000"/>
+          </a:xfrm>
+          <a:prstGeom prst="rect">
+            <a:avLst/>
+          </a:prstGeom>
+          <a:noFill/>
+        </p:spPr>
+        <p:txBody>
+          <a:bodyPr wrap="square">
+            <a:spAutoFit/>
+          </a:bodyPr>
+          <a:lstStyle/>
+          <a:p>
+            <a:pPr algn="l"/>
+            <a:r>
+              <a:rPr sz="1100" b="1">
+                <a:solidFill>
+                  <a:srgbClr val="F1C40F"/>
+                </a:solidFill>
+              </a:rPr>
+              <a:t>⚠  Parallel</a:t>
+            </a:r>
+          </a:p>
+        </p:txBody>
+      </p:sp>
+      <p:sp>
+        <p:nvSpPr>
+          <p:cNvPr id="28" name="Rectangle 27"/>
+          <p:cNvSpPr/>
+          <p:nvPr/>
+        </p:nvSpPr>
+        <p:spPr>
+          <a:xfrm>
+            <a:off x="365760" y="3106000"/>
+            <a:ext cx="8595360" cy="614000"/>
+          </a:xfrm>
+          <a:prstGeom prst="rect">
+            <a:avLst/>
+          </a:prstGeom>
+          <a:solidFill>
+            <a:srgbClr val="161638"/>
+          </a:solidFill>
+          <a:ln>
+            <a:noFill/>
+          </a:ln>
+        </p:spPr>
+        <p:style>
+          <a:lnRef idx="1">
+            <a:schemeClr val="accent1"/>
+          </a:lnRef>
+          <a:fillRef idx="3">
+            <a:schemeClr val="accent1"/>
+          </a:fillRef>
+          <a:effectRef idx="2">
+            <a:schemeClr val="accent1"/>
+          </a:effectRef>
+          <a:fontRef idx="minor">
+            <a:schemeClr val="lt1"/>
+          </a:fontRef>
+        </p:style>
+        <p:txBody>
+          <a:bodyPr rtlCol="0" anchor="ctr"/>
+          <a:lstStyle/>
+          <a:p>
+            <a:pPr algn="ctr"/>
+            <a:endParaRPr/>
+          </a:p>
+        </p:txBody>
+      </p:sp>
+      <p:sp>
+        <p:nvSpPr>
+          <p:cNvPr id="29" name="Rectangle 28"/>
+          <p:cNvSpPr/>
+          <p:nvPr/>
+        </p:nvSpPr>
+        <p:spPr>
+          <a:xfrm>
+            <a:off x="365760" y="3106000"/>
+            <a:ext cx="6000" cy="614000"/>
+          </a:xfrm>
+          <a:prstGeom prst="rect">
+            <a:avLst/>
+          </a:prstGeom>
+          <a:solidFill>
+            <a:srgbClr val="F1C40F"/>
+          </a:solidFill>
+          <a:ln>
+            <a:noFill/>
+          </a:ln>
+        </p:spPr>
+        <p:style>
+          <a:lnRef idx="1">
+            <a:schemeClr val="accent1"/>
+          </a:lnRef>
+          <a:fillRef idx="3">
+            <a:schemeClr val="accent1"/>
+          </a:fillRef>
+          <a:effectRef idx="2">
+            <a:schemeClr val="accent1"/>
+          </a:effectRef>
+          <a:fontRef idx="minor">
+            <a:schemeClr val="lt1"/>
+          </a:fontRef>
+        </p:style>
+        <p:txBody>
+          <a:bodyPr rtlCol="0" anchor="ctr"/>
+          <a:lstStyle/>
+          <a:p>
+            <a:pPr algn="ctr"/>
+            <a:endParaRPr/>
+          </a:p>
+        </p:txBody>
+      </p:sp>
+      <p:sp>
+        <p:nvSpPr>
+          <p:cNvPr id="30" name="TextBox 29"/>
+          <p:cNvSpPr txBox="1"/>
+          <p:nvPr/>
+        </p:nvSpPr>
+        <p:spPr>
+          <a:xfrm>
+            <a:off x="390760" y="3136000"/>
+            <a:ext cx="1775000" cy="560000"/>
+          </a:xfrm>
+          <a:prstGeom prst="rect">
+            <a:avLst/>
+          </a:prstGeom>
+          <a:noFill/>
+        </p:spPr>
+        <p:txBody>
+          <a:bodyPr wrap="square">
+            <a:spAutoFit/>
+          </a:bodyPr>
+          <a:lstStyle/>
+          <a:p>
+            <a:pPr algn="l"/>
+            <a:r>
+              <a:rPr sz="1100" b="1">
+                <a:solidFill>
+                  <a:srgbClr val="FFFFFF"/>
+                </a:solidFill>
+              </a:rPr>
+              <a:t>Dokumentation</a:t>
+            </a:r>
+          </a:p>
+        </p:txBody>
+      </p:sp>
+      <p:sp>
+        <p:nvSpPr>
+          <p:cNvPr id="31" name="TextBox 30"/>
+          <p:cNvSpPr txBox="1"/>
+          <p:nvPr/>
+        </p:nvSpPr>
+        <p:spPr>
+          <a:xfrm>
+            <a:off x="2285760" y="3136000"/>
+            <a:ext cx="2180000" cy="560000"/>
+          </a:xfrm>
+          <a:prstGeom prst="rect">
+            <a:avLst/>
+          </a:prstGeom>
+          <a:noFill/>
+        </p:spPr>
+        <p:txBody>
+          <a:bodyPr wrap="square">
+            <a:spAutoFit/>
+          </a:bodyPr>
+          <a:lstStyle/>
+          <a:p>
+            <a:pPr algn="l"/>
+            <a:r>
+              <a:rPr sz="1000" b="0">
+                <a:solidFill>
+                  <a:srgbClr val="D0D7E8"/>
+                </a:solidFill>
+              </a:rPr>
+              <a:t>Woche 2</a:t>
+            </a:r>
+          </a:p>
+          <a:p>
+            <a:pPr algn="l"/>
+            <a:r>
+              <a:rPr sz="1000" b="0">
+                <a:solidFill>
+                  <a:srgbClr val="D0D7E8"/>
+                </a:solidFill>
+              </a:rPr>
+              <a:t>Ende</a:t>
+            </a:r>
+          </a:p>
+        </p:txBody>
+      </p:sp>
+      <p:sp>
+        <p:nvSpPr>
+          <p:cNvPr id="32" name="TextBox 31"/>
+          <p:cNvSpPr txBox="1"/>
+          <p:nvPr/>
+        </p:nvSpPr>
+        <p:spPr>
+          <a:xfrm>
+            <a:off x="4585760" y="3136000"/>
+            <a:ext cx="2780000" cy="560000"/>
+          </a:xfrm>
+          <a:prstGeom prst="rect">
+            <a:avLst/>
+          </a:prstGeom>
+          <a:noFill/>
+        </p:spPr>
+        <p:txBody>
+          <a:bodyPr wrap="square">
+            <a:spAutoFit/>
+          </a:bodyPr>
+          <a:lstStyle/>
+          <a:p>
+            <a:pPr algn="l"/>
+            <a:r>
+              <a:rPr sz="1000" b="0">
+                <a:solidFill>
+                  <a:srgbClr val="D0D7E8"/>
+                </a:solidFill>
+              </a:rPr>
+              <a:t>Parallel zur Implementierung</a:t>
+            </a:r>
+          </a:p>
+          <a:p>
+            <a:pPr algn="l"/>
+            <a:r>
+              <a:rPr sz="1000" b="0">
+                <a:solidFill>
+                  <a:srgbClr val="D0D7E8"/>
+                </a:solidFill>
+              </a:rPr>
+              <a:t>(kein separater Sprint)</a:t>
+            </a:r>
+          </a:p>
+        </p:txBody>
+      </p:sp>
+      <p:sp>
+        <p:nvSpPr>
+          <p:cNvPr id="33" name="TextBox 32"/>
+          <p:cNvSpPr txBox="1"/>
+          <p:nvPr/>
+        </p:nvSpPr>
+        <p:spPr>
+          <a:xfrm>
+            <a:off x="7485760" y="3136000"/>
+            <a:ext cx="1530000" cy="560000"/>
+          </a:xfrm>
+          <a:prstGeom prst="rect">
+            <a:avLst/>
+          </a:prstGeom>
+          <a:noFill/>
+        </p:spPr>
+        <p:txBody>
+          <a:bodyPr wrap="square">
+            <a:spAutoFit/>
+          </a:bodyPr>
+          <a:lstStyle/>
+          <a:p>
+            <a:pPr algn="l"/>
+            <a:r>
+              <a:rPr sz="1100" b="1">
+                <a:solidFill>
+                  <a:srgbClr val="F1C40F"/>
+                </a:solidFill>
+              </a:rPr>
+              <a:t>⚠  Parallel</a:t>
+            </a:r>
+          </a:p>
+        </p:txBody>
+      </p:sp>
+      <p:sp>
+        <p:nvSpPr>
+          <p:cNvPr id="34" name="Rectangle 33"/>
+          <p:cNvSpPr/>
+          <p:nvPr/>
+        </p:nvSpPr>
+        <p:spPr>
+          <a:xfrm>
+            <a:off x="365760" y="3726000"/>
+            <a:ext cx="8595360" cy="614000"/>
+          </a:xfrm>
+          <a:prstGeom prst="rect">
+            <a:avLst/>
+          </a:prstGeom>
+          <a:solidFill>
+            <a:srgbClr val="141432"/>
+          </a:solidFill>
+          <a:ln>
+            <a:noFill/>
+          </a:ln>
+        </p:spPr>
+        <p:style>
+          <a:lnRef idx="1">
+            <a:schemeClr val="accent1"/>
+          </a:lnRef>
+          <a:fillRef idx="3">
+            <a:schemeClr val="accent1"/>
+          </a:fillRef>
+          <a:effectRef idx="2">
+            <a:schemeClr val="accent1"/>
+          </a:effectRef>
+          <a:fontRef idx="minor">
+            <a:schemeClr val="lt1"/>
+          </a:fontRef>
+        </p:style>
+        <p:txBody>
+          <a:bodyPr rtlCol="0" anchor="ctr"/>
+          <a:lstStyle/>
+          <a:p>
+            <a:pPr algn="ctr"/>
+            <a:endParaRPr/>
+          </a:p>
+        </p:txBody>
+      </p:sp>
+      <p:sp>
+        <p:nvSpPr>
+          <p:cNvPr id="35" name="Rectangle 34"/>
+          <p:cNvSpPr/>
+          <p:nvPr/>
+        </p:nvSpPr>
+        <p:spPr>
+          <a:xfrm>
+            <a:off x="365760" y="3726000"/>
+            <a:ext cx="6000" cy="614000"/>
+          </a:xfrm>
+          <a:prstGeom prst="rect">
+            <a:avLst/>
+          </a:prstGeom>
+          <a:solidFill>
+            <a:srgbClr val="2ECC71"/>
+          </a:solidFill>
+          <a:ln>
+            <a:noFill/>
+          </a:ln>
+        </p:spPr>
+        <p:style>
+          <a:lnRef idx="1">
+            <a:schemeClr val="accent1"/>
+          </a:lnRef>
+          <a:fillRef idx="3">
+            <a:schemeClr val="accent1"/>
+          </a:fillRef>
+          <a:effectRef idx="2">
+            <a:schemeClr val="accent1"/>
+          </a:effectRef>
+          <a:fontRef idx="minor">
+            <a:schemeClr val="lt1"/>
+          </a:fontRef>
+        </p:style>
+        <p:txBody>
+          <a:bodyPr rtlCol="0" anchor="ctr"/>
+          <a:lstStyle/>
+          <a:p>
+            <a:pPr algn="ctr"/>
+            <a:endParaRPr/>
+          </a:p>
+        </p:txBody>
+      </p:sp>
+      <p:sp>
+        <p:nvSpPr>
+          <p:cNvPr id="36" name="TextBox 35"/>
+          <p:cNvSpPr txBox="1"/>
+          <p:nvPr/>
+        </p:nvSpPr>
+        <p:spPr>
+          <a:xfrm>
+            <a:off x="390760" y="3756000"/>
+            <a:ext cx="1775000" cy="560000"/>
+          </a:xfrm>
+          <a:prstGeom prst="rect">
+            <a:avLst/>
+          </a:prstGeom>
+          <a:noFill/>
+        </p:spPr>
+        <p:txBody>
+          <a:bodyPr wrap="square">
+            <a:spAutoFit/>
+          </a:bodyPr>
+          <a:lstStyle/>
+          <a:p>
+            <a:pPr algn="l"/>
+            <a:r>
+              <a:rPr sz="1100" b="1">
+                <a:solidFill>
+                  <a:srgbClr val="FFFFFF"/>
+                </a:solidFill>
+              </a:rPr>
+              <a:t>Abschluss</a:t>
+            </a:r>
+          </a:p>
+        </p:txBody>
+      </p:sp>
+      <p:sp>
+        <p:nvSpPr>
+          <p:cNvPr id="37" name="TextBox 36"/>
+          <p:cNvSpPr txBox="1"/>
+          <p:nvPr/>
+        </p:nvSpPr>
+        <p:spPr>
+          <a:xfrm>
+            <a:off x="2285760" y="3756000"/>
+            <a:ext cx="2180000" cy="560000"/>
+          </a:xfrm>
+          <a:prstGeom prst="rect">
+            <a:avLst/>
+          </a:prstGeom>
+          <a:noFill/>
+        </p:spPr>
+        <p:txBody>
+          <a:bodyPr wrap="square">
+            <a:spAutoFit/>
+          </a:bodyPr>
+          <a:lstStyle/>
+          <a:p>
+            <a:pPr algn="l"/>
+            <a:r>
+              <a:rPr sz="1000" b="0">
+                <a:solidFill>
+                  <a:srgbClr val="D0D7E8"/>
+                </a:solidFill>
+              </a:rPr>
+              <a:t>Woche 3</a:t>
+            </a:r>
+          </a:p>
+        </p:txBody>
+      </p:sp>
+      <p:sp>
+        <p:nvSpPr>
+          <p:cNvPr id="38" name="TextBox 37"/>
+          <p:cNvSpPr txBox="1"/>
+          <p:nvPr/>
+        </p:nvSpPr>
+        <p:spPr>
+          <a:xfrm>
+            <a:off x="4585760" y="3756000"/>
+            <a:ext cx="2780000" cy="560000"/>
+          </a:xfrm>
+          <a:prstGeom prst="rect">
+            <a:avLst/>
+          </a:prstGeom>
+          <a:noFill/>
+        </p:spPr>
+        <p:txBody>
+          <a:bodyPr wrap="square">
+            <a:spAutoFit/>
+          </a:bodyPr>
+          <a:lstStyle/>
+          <a:p>
+            <a:pPr algn="l"/>
+            <a:r>
+              <a:rPr sz="1000" b="0">
+                <a:solidFill>
+                  <a:srgbClr val="D0D7E8"/>
+                </a:solidFill>
+              </a:rPr>
+              <a:t>Woche 3</a:t>
+            </a:r>
+          </a:p>
+          <a:p>
+            <a:pPr algn="l"/>
+            <a:r>
+              <a:rPr sz="1000" b="0">
+                <a:solidFill>
+                  <a:srgbClr val="D0D7E8"/>
+                </a:solidFill>
+              </a:rPr>
+              <a:t>Abschlusspräsentation</a:t>
+            </a:r>
+          </a:p>
+        </p:txBody>
+      </p:sp>
+      <p:sp>
+        <p:nvSpPr>
+          <p:cNvPr id="39" name="TextBox 38"/>
+          <p:cNvSpPr txBox="1"/>
+          <p:nvPr/>
+        </p:nvSpPr>
+        <p:spPr>
+          <a:xfrm>
+            <a:off x="7485760" y="3756000"/>
+            <a:ext cx="1530000" cy="560000"/>
+          </a:xfrm>
+          <a:prstGeom prst="rect">
+            <a:avLst/>
+          </a:prstGeom>
+          <a:noFill/>
+        </p:spPr>
+        <p:txBody>
+          <a:bodyPr wrap="square">
+            <a:spAutoFit/>
+          </a:bodyPr>
+          <a:lstStyle/>
+          <a:p>
+            <a:pPr algn="l"/>
+            <a:r>
+              <a:rPr sz="1100" b="1">
+                <a:solidFill>
+                  <a:srgbClr val="2ECC71"/>
+                </a:solidFill>
+              </a:rPr>
+              <a:t>✅  Plangemäß</a:t>
+            </a:r>
+          </a:p>
+        </p:txBody>
+      </p:sp>
+      <p:sp>
+        <p:nvSpPr>
+          <p:cNvPr id="40" name="TextBox 39"/>
+          <p:cNvSpPr txBox="1"/>
+          <p:nvPr/>
+        </p:nvSpPr>
+        <p:spPr>
+          <a:xfrm>
+            <a:off x="365760" y="4370000"/>
+            <a:ext cx="8595360" cy="160000"/>
+          </a:xfrm>
+          <a:prstGeom prst="rect">
+            <a:avLst/>
+          </a:prstGeom>
+          <a:noFill/>
+        </p:spPr>
+        <p:txBody>
+          <a:bodyPr wrap="square">
+            <a:spAutoFit/>
+          </a:bodyPr>
+          <a:lstStyle/>
+          <a:p>
+            <a:pPr algn="l"/>
+            <a:r>
+              <a:rPr sz="800" b="0">
+                <a:solidFill>
+                  <a:srgbClr val="8A92A4"/>
+                </a:solidFill>
+              </a:rPr>
+              <a:t>Hauptabweichung: Test und Dokumentation liefen parallel zur Implementierung statt sequenziell  ·  Statt Kanban-Board wurde ein Discord-Channel genutzt</a:t>
+            </a:r>
+          </a:p>
+        </p:txBody>
+      </p:sp>
+    </p:spTree>
+  </p:cSld>
+  <p:clrMapOvr>
+    <a:masterClrMapping/>
+  </p:clrMapOvr>
+</p:sld>
+</file>
+
+<file path=ppt/slides/slide19.xml><?xml version="1.0" encoding="utf-8"?>
+<p:sld xmlns:a="http://schemas.openxmlformats.org/drawingml/2006/main" xmlns:r="http://schemas.openxmlformats.org/officeDocument/2006/relationships" xmlns:p="http://schemas.openxmlformats.org/presentationml/2006/main">
+  <p:cSld>
+    <p:bg>
+      <p:bgPr>
+        <a:solidFill>
+          <a:srgbClr val="0D0D1A"/>
+        </a:solidFill>
+        <a:effectLst/>
+      </p:bgPr>
+    </p:bg>
+    <p:spTree>
+      <p:nvGrpSpPr>
+        <p:cNvPr id="1" name=""/>
+        <p:cNvGrpSpPr/>
+        <p:nvPr/>
+      </p:nvGrpSpPr>
+      <p:grpSpPr>
+        <a:xfrm>
+          <a:off x="0" y="0"/>
+          <a:ext cx="0" cy="0"/>
+          <a:chOff x="0" y="0"/>
+          <a:chExt cx="0" cy="0"/>
+        </a:xfrm>
+      </p:grpSpPr>
+      <p:sp>
+        <p:nvSpPr>
+          <p:cNvPr id="2" name="TextBox 1"/>
+          <p:cNvSpPr txBox="1"/>
+          <p:nvPr/>
+        </p:nvSpPr>
+        <p:spPr>
+          <a:xfrm>
+            <a:off x="457200" y="256032"/>
+            <a:ext cx="8229600" cy="400000"/>
+          </a:xfrm>
+          <a:prstGeom prst="rect">
+            <a:avLst/>
+          </a:prstGeom>
+          <a:noFill/>
+        </p:spPr>
+        <p:txBody>
+          <a:bodyPr wrap="square">
+            <a:spAutoFit/>
+          </a:bodyPr>
+          <a:lstStyle/>
+          <a:p>
+            <a:pPr algn="l"/>
+            <a:r>
+              <a:rPr sz="2800" b="1">
+                <a:solidFill>
+                  <a:srgbClr val="FFFFFF"/>
+                </a:solidFill>
+              </a:rPr>
+              <a:t>Benutzeroberfläche (GUI)</a:t>
+            </a:r>
+          </a:p>
+        </p:txBody>
+      </p:sp>
+      <p:sp>
+        <p:nvSpPr>
+          <p:cNvPr id="3" name="TextBox 2"/>
+          <p:cNvSpPr txBox="1"/>
+          <p:nvPr/>
+        </p:nvSpPr>
+        <p:spPr>
+          <a:xfrm>
+            <a:off x="457200" y="670000"/>
+            <a:ext cx="8229600" cy="200000"/>
+          </a:xfrm>
+          <a:prstGeom prst="rect">
+            <a:avLst/>
+          </a:prstGeom>
+          <a:noFill/>
+        </p:spPr>
+        <p:txBody>
+          <a:bodyPr wrap="square">
+            <a:spAutoFit/>
+          </a:bodyPr>
+          <a:lstStyle/>
+          <a:p>
+            <a:pPr algn="l"/>
+            <a:r>
+              <a:rPr sz="900" b="0">
+                <a:solidFill>
+                  <a:srgbClr val="8A92A4"/>
+                </a:solidFill>
+              </a:rPr>
+              <a:t>tkinter  ·  HHBKTendo Design System  ·  Dark Theme</a:t>
+            </a:r>
+          </a:p>
+        </p:txBody>
+      </p:sp>
+      <p:sp>
+        <p:nvSpPr>
+          <p:cNvPr id="4" name="TextBox 3"/>
+          <p:cNvSpPr txBox="1"/>
+          <p:nvPr/>
+        </p:nvSpPr>
+        <p:spPr>
+          <a:xfrm>
+            <a:off x="8626110" y="4875028"/>
+            <a:ext cx="339583" cy="215444"/>
+          </a:xfrm>
+          <a:prstGeom prst="rect">
+            <a:avLst/>
+          </a:prstGeom>
+          <a:noFill/>
+        </p:spPr>
+        <p:txBody>
+          <a:bodyPr wrap="square">
+            <a:spAutoFit/>
+          </a:bodyPr>
+          <a:lstStyle/>
+          <a:p>
+            <a:pPr algn="ctr"/>
+            <a:r>
+              <a:rPr sz="800" b="1" dirty="0">
+                <a:solidFill>
+                  <a:srgbClr val="E94560"/>
+                </a:solidFill>
+              </a:rPr>
+              <a:t>19</a:t>
+            </a:r>
+          </a:p>
+        </p:txBody>
+      </p:sp>
+      <p:sp>
+        <p:nvSpPr>
+          <p:cNvPr id="5" name="Rectangle 4"/>
+          <p:cNvSpPr/>
+          <p:nvPr/>
+        </p:nvSpPr>
+        <p:spPr>
+          <a:xfrm>
+            <a:off x="365760" y="879999"/>
+            <a:ext cx="4114800" cy="3698485"/>
+          </a:xfrm>
+          <a:prstGeom prst="rect">
+            <a:avLst/>
+          </a:prstGeom>
+          <a:solidFill>
+            <a:srgbClr val="161638"/>
+          </a:solidFill>
+          <a:ln>
+            <a:noFill/>
+          </a:ln>
+        </p:spPr>
+        <p:style>
+          <a:lnRef idx="1">
+            <a:schemeClr val="accent1"/>
+          </a:lnRef>
+          <a:fillRef idx="3">
+            <a:schemeClr val="accent1"/>
+          </a:fillRef>
+          <a:effectRef idx="2">
+            <a:schemeClr val="accent1"/>
+          </a:effectRef>
+          <a:fontRef idx="minor">
+            <a:schemeClr val="lt1"/>
+          </a:fontRef>
+        </p:style>
+        <p:txBody>
+          <a:bodyPr rtlCol="0" anchor="ctr"/>
+          <a:lstStyle/>
+          <a:p>
+            <a:pPr algn="ctr"/>
+            <a:endParaRPr/>
+          </a:p>
+        </p:txBody>
+      </p:sp>
+      <p:sp>
+        <p:nvSpPr>
+          <p:cNvPr id="6" name="Rectangle 5"/>
+          <p:cNvSpPr/>
+          <p:nvPr/>
+        </p:nvSpPr>
+        <p:spPr>
+          <a:xfrm>
+            <a:off x="365760" y="879999"/>
+            <a:ext cx="64008" cy="3698485"/>
+          </a:xfrm>
+          <a:prstGeom prst="rect">
+            <a:avLst/>
+          </a:prstGeom>
+          <a:solidFill>
+            <a:srgbClr val="4472C4"/>
+          </a:solidFill>
+          <a:ln>
+            <a:noFill/>
+          </a:ln>
+        </p:spPr>
+        <p:style>
+          <a:lnRef idx="1">
+            <a:schemeClr val="accent1"/>
+          </a:lnRef>
+          <a:fillRef idx="3">
+            <a:schemeClr val="accent1"/>
+          </a:fillRef>
+          <a:effectRef idx="2">
+            <a:schemeClr val="accent1"/>
+          </a:effectRef>
+          <a:fontRef idx="minor">
+            <a:schemeClr val="lt1"/>
+          </a:fontRef>
+        </p:style>
+        <p:txBody>
+          <a:bodyPr rtlCol="0" anchor="ctr"/>
+          <a:lstStyle/>
+          <a:p>
+            <a:pPr algn="ctr"/>
+            <a:endParaRPr/>
+          </a:p>
+        </p:txBody>
+      </p:sp>
+      <p:sp>
+        <p:nvSpPr>
+          <p:cNvPr id="7" name="TextBox 6"/>
+          <p:cNvSpPr txBox="1"/>
+          <p:nvPr/>
+        </p:nvSpPr>
+        <p:spPr>
+          <a:xfrm>
+            <a:off x="520760" y="935000"/>
+            <a:ext cx="3879800" cy="265000"/>
+          </a:xfrm>
+          <a:prstGeom prst="rect">
+            <a:avLst/>
+          </a:prstGeom>
+          <a:noFill/>
+        </p:spPr>
+        <p:txBody>
+          <a:bodyPr wrap="square">
+            <a:spAutoFit/>
+          </a:bodyPr>
+          <a:lstStyle/>
+          <a:p>
+            <a:pPr algn="l"/>
+            <a:r>
+              <a:rPr sz="1300" b="1">
+                <a:solidFill>
+                  <a:srgbClr val="4472C4"/>
+                </a:solidFill>
+              </a:rPr>
+              <a:t>Screenflow</a:t>
+            </a:r>
+          </a:p>
+        </p:txBody>
+      </p:sp>
+      <p:sp>
+        <p:nvSpPr>
+          <p:cNvPr id="8" name="TextBox 7"/>
+          <p:cNvSpPr txBox="1"/>
+          <p:nvPr/>
+        </p:nvSpPr>
+        <p:spPr>
+          <a:xfrm>
+            <a:off x="520760" y="1225000"/>
+            <a:ext cx="3879800" cy="3080000"/>
+          </a:xfrm>
+          <a:prstGeom prst="rect">
+            <a:avLst/>
+          </a:prstGeom>
+          <a:noFill/>
+        </p:spPr>
+        <p:txBody>
+          <a:bodyPr wrap="square">
+            <a:spAutoFit/>
+          </a:bodyPr>
+          <a:lstStyle/>
+          <a:p>
+            <a:pPr algn="l"/>
+            <a:r>
+              <a:rPr sz="1100" b="1">
+                <a:solidFill>
+                  <a:srgbClr val="FFFFFF"/>
+                </a:solidFill>
+              </a:rPr>
+              <a:t>① Login-Screen</a:t>
+            </a:r>
+          </a:p>
+          <a:p>
+            <a:pPr algn="l"/>
+            <a:r>
+              <a:rPr sz="1100" b="0">
+                <a:solidFill>
+                  <a:srgbClr val="D0D7E8"/>
+                </a:solidFill>
+              </a:rPr>
+              <a:t>   → Login  /  Register  /  Als Gast spielen</a:t>
+            </a:r>
+          </a:p>
+          <a:p>
+            <a:pPr algn="l"/>
+            <a:endParaRPr sz="1100" b="0">
+              <a:solidFill>
+                <a:srgbClr val="D0D7E8"/>
+              </a:solidFill>
+            </a:endParaRPr>
+          </a:p>
+          <a:p>
+            <a:pPr algn="l"/>
+            <a:r>
+              <a:rPr sz="1100" b="1">
+                <a:solidFill>
+                  <a:srgbClr val="FFFFFF"/>
+                </a:solidFill>
+              </a:rPr>
+              <a:t>② Hauptmenü</a:t>
+            </a:r>
+          </a:p>
+          <a:p>
+            <a:pPr algn="l"/>
+            <a:r>
+              <a:rPr sz="1100" b="0">
+                <a:solidFill>
+                  <a:srgbClr val="D0D7E8"/>
+                </a:solidFill>
+              </a:rPr>
+              <a:t>   → Spiel wählen  ·  Schwierigkeitsgrad  ·  Play</a:t>
+            </a:r>
+          </a:p>
+          <a:p>
+            <a:pPr algn="l"/>
+            <a:r>
+              <a:rPr sz="1100" b="0">
+                <a:solidFill>
+                  <a:srgbClr val="D0D7E8"/>
+                </a:solidFill>
+              </a:rPr>
+              <a:t>   → Bestenliste  ·  Abmelden</a:t>
+            </a:r>
+          </a:p>
+          <a:p>
+            <a:pPr algn="l"/>
+            <a:endParaRPr sz="1100" b="0">
+              <a:solidFill>
+                <a:srgbClr val="D0D7E8"/>
+              </a:solidFill>
+            </a:endParaRPr>
+          </a:p>
+          <a:p>
+            <a:pPr algn="l"/>
+            <a:r>
+              <a:rPr sz="1100" b="1">
+                <a:solidFill>
+                  <a:srgbClr val="FFFFFF"/>
+                </a:solidFill>
+              </a:rPr>
+              <a:t>③ Spielscreen</a:t>
+            </a:r>
+          </a:p>
+          <a:p>
+            <a:pPr algn="l"/>
+            <a:r>
+              <a:rPr sz="1100" b="0">
+                <a:solidFill>
+                  <a:srgbClr val="D0D7E8"/>
+                </a:solidFill>
+              </a:rPr>
+              <a:t>   → 6×6 Brett  ·  Züge per Klick</a:t>
+            </a:r>
+          </a:p>
+          <a:p>
+            <a:pPr algn="l"/>
+            <a:r>
+              <a:rPr sz="1100" b="0">
+                <a:solidFill>
+                  <a:srgbClr val="D0D7E8"/>
+                </a:solidFill>
+              </a:rPr>
+              <a:t>   → Regeln-Button  ·  Spielabbruch mit Dialog</a:t>
+            </a:r>
+          </a:p>
+          <a:p>
+            <a:pPr algn="l"/>
+            <a:r>
+              <a:rPr sz="1100" b="0">
+                <a:solidFill>
+                  <a:srgbClr val="D0D7E8"/>
+                </a:solidFill>
+              </a:rPr>
+              <a:t>   → KI-Zug läuft im Hintergrund-Thread</a:t>
+            </a:r>
+          </a:p>
+          <a:p>
+            <a:pPr algn="l"/>
+            <a:endParaRPr sz="1100" b="0">
+              <a:solidFill>
+                <a:srgbClr val="D0D7E8"/>
+              </a:solidFill>
+            </a:endParaRPr>
+          </a:p>
+          <a:p>
+            <a:pPr algn="l"/>
+            <a:r>
+              <a:rPr sz="1100" b="1">
+                <a:solidFill>
+                  <a:srgbClr val="FFFFFF"/>
+                </a:solidFill>
+              </a:rPr>
+              <a:t>④ Ergebnis-Overlay</a:t>
+            </a:r>
+          </a:p>
+          <a:p>
+            <a:pPr algn="l"/>
+            <a:r>
+              <a:rPr sz="1100" b="0">
+                <a:solidFill>
+                  <a:srgbClr val="D0D7E8"/>
+                </a:solidFill>
+              </a:rPr>
+              <a:t>   → Sieg / Niederlage / Unentschieden</a:t>
+            </a:r>
+          </a:p>
+          <a:p>
+            <a:pPr algn="l"/>
+            <a:r>
+              <a:rPr sz="1100" b="0">
+                <a:solidFill>
+                  <a:srgbClr val="D0D7E8"/>
+                </a:solidFill>
+              </a:rPr>
+              <a:t>   → Zurück zum Hauptmenü</a:t>
+            </a:r>
+          </a:p>
+        </p:txBody>
+      </p:sp>
+      <p:sp>
+        <p:nvSpPr>
+          <p:cNvPr id="9" name="Rectangle 8"/>
+          <p:cNvSpPr/>
+          <p:nvPr/>
+        </p:nvSpPr>
+        <p:spPr>
+          <a:xfrm>
+            <a:off x="4846320" y="880000"/>
+            <a:ext cx="4114800" cy="1590000"/>
+          </a:xfrm>
+          <a:prstGeom prst="rect">
+            <a:avLst/>
+          </a:prstGeom>
+          <a:solidFill>
+            <a:srgbClr val="161638"/>
+          </a:solidFill>
+          <a:ln>
+            <a:noFill/>
+          </a:ln>
+        </p:spPr>
+        <p:style>
+          <a:lnRef idx="1">
+            <a:schemeClr val="accent1"/>
+          </a:lnRef>
+          <a:fillRef idx="3">
+            <a:schemeClr val="accent1"/>
+          </a:fillRef>
+          <a:effectRef idx="2">
+            <a:schemeClr val="accent1"/>
+          </a:effectRef>
+          <a:fontRef idx="minor">
+            <a:schemeClr val="lt1"/>
+          </a:fontRef>
+        </p:style>
+        <p:txBody>
+          <a:bodyPr rtlCol="0" anchor="ctr"/>
+          <a:lstStyle/>
+          <a:p>
+            <a:pPr algn="ctr"/>
+            <a:endParaRPr/>
+          </a:p>
+        </p:txBody>
+      </p:sp>
+      <p:sp>
+        <p:nvSpPr>
+          <p:cNvPr id="10" name="Rectangle 9"/>
+          <p:cNvSpPr/>
+          <p:nvPr/>
+        </p:nvSpPr>
+        <p:spPr>
+          <a:xfrm>
+            <a:off x="4846320" y="880000"/>
+            <a:ext cx="64008" cy="1590000"/>
+          </a:xfrm>
+          <a:prstGeom prst="rect">
+            <a:avLst/>
+          </a:prstGeom>
+          <a:solidFill>
+            <a:srgbClr val="E94560"/>
+          </a:solidFill>
+          <a:ln>
+            <a:noFill/>
+          </a:ln>
+        </p:spPr>
+        <p:style>
+          <a:lnRef idx="1">
+            <a:schemeClr val="accent1"/>
+          </a:lnRef>
+          <a:fillRef idx="3">
+            <a:schemeClr val="accent1"/>
+          </a:fillRef>
+          <a:effectRef idx="2">
+            <a:schemeClr val="accent1"/>
+          </a:effectRef>
+          <a:fontRef idx="minor">
+            <a:schemeClr val="lt1"/>
+          </a:fontRef>
+        </p:style>
+        <p:txBody>
+          <a:bodyPr rtlCol="0" anchor="ctr"/>
+          <a:lstStyle/>
+          <a:p>
+            <a:pPr algn="ctr"/>
+            <a:endParaRPr/>
+          </a:p>
+        </p:txBody>
+      </p:sp>
+      <p:sp>
+        <p:nvSpPr>
+          <p:cNvPr id="11" name="TextBox 10"/>
+          <p:cNvSpPr txBox="1"/>
+          <p:nvPr/>
+        </p:nvSpPr>
+        <p:spPr>
+          <a:xfrm>
+            <a:off x="5001320" y="935000"/>
+            <a:ext cx="3879800" cy="265000"/>
+          </a:xfrm>
+          <a:prstGeom prst="rect">
+            <a:avLst/>
+          </a:prstGeom>
+          <a:noFill/>
+        </p:spPr>
+        <p:txBody>
+          <a:bodyPr wrap="square">
+            <a:spAutoFit/>
+          </a:bodyPr>
+          <a:lstStyle/>
+          <a:p>
+            <a:pPr algn="l"/>
+            <a:r>
+              <a:rPr sz="1300" b="1">
+                <a:solidFill>
+                  <a:srgbClr val="E94560"/>
+                </a:solidFill>
+              </a:rPr>
+              <a:t>HHBKTendo Design System</a:t>
+            </a:r>
+          </a:p>
+        </p:txBody>
+      </p:sp>
+      <p:sp>
+        <p:nvSpPr>
+          <p:cNvPr id="12" name="TextBox 11"/>
+          <p:cNvSpPr txBox="1"/>
+          <p:nvPr/>
+        </p:nvSpPr>
+        <p:spPr>
+          <a:xfrm>
+            <a:off x="5001320" y="1225000"/>
+            <a:ext cx="3879800" cy="1190000"/>
+          </a:xfrm>
+          <a:prstGeom prst="rect">
+            <a:avLst/>
+          </a:prstGeom>
+          <a:noFill/>
+        </p:spPr>
+        <p:txBody>
+          <a:bodyPr wrap="square">
+            <a:spAutoFit/>
+          </a:bodyPr>
+          <a:lstStyle/>
+          <a:p>
+            <a:pPr algn="l"/>
+            <a:r>
+              <a:rPr sz="1100" b="0">
+                <a:solidFill>
+                  <a:srgbClr val="D0D7E8"/>
+                </a:solidFill>
+              </a:rPr>
+              <a:t>#0D0D1A   BG Deep Navy      – Hintergrund</a:t>
+            </a:r>
+          </a:p>
+          <a:p>
+            <a:pPr algn="l"/>
+            <a:r>
+              <a:rPr sz="1100" b="0">
+                <a:solidFill>
+                  <a:srgbClr val="E94560"/>
+                </a:solidFill>
+              </a:rPr>
+              <a:t>#E94560   Hot Pink          – Primär / CTA</a:t>
+            </a:r>
+          </a:p>
+          <a:p>
+            <a:pPr algn="l"/>
+            <a:r>
+              <a:rPr sz="1100" b="0">
+                <a:solidFill>
+                  <a:srgbClr val="9B59B6"/>
+                </a:solidFill>
+              </a:rPr>
+              <a:t>#6C3FC5   Royal Purple      – Sekundär</a:t>
+            </a:r>
+          </a:p>
+          <a:p>
+            <a:pPr algn="l"/>
+            <a:r>
+              <a:rPr sz="1100" b="0">
+                <a:solidFill>
+                  <a:srgbClr val="4472C4"/>
+                </a:solidFill>
+              </a:rPr>
+              <a:t>#00D4FF   Cyber Cyan        – Akzent / Hover</a:t>
+            </a:r>
+          </a:p>
+          <a:p>
+            <a:pPr algn="l"/>
+            <a:r>
+              <a:rPr sz="1100" b="0">
+                <a:solidFill>
+                  <a:srgbClr val="8A92A4"/>
+                </a:solidFill>
+              </a:rPr>
+              <a:t>#161638   Card Navy         – Karten &amp; Container</a:t>
+            </a:r>
+          </a:p>
+        </p:txBody>
+      </p:sp>
+      <p:sp>
+        <p:nvSpPr>
+          <p:cNvPr id="13" name="Rectangle 12"/>
+          <p:cNvSpPr/>
+          <p:nvPr/>
+        </p:nvSpPr>
+        <p:spPr>
+          <a:xfrm>
+            <a:off x="4846320" y="2600000"/>
+            <a:ext cx="4114800" cy="1978484"/>
+          </a:xfrm>
+          <a:prstGeom prst="rect">
+            <a:avLst/>
+          </a:prstGeom>
+          <a:solidFill>
+            <a:srgbClr val="161638"/>
+          </a:solidFill>
+          <a:ln>
+            <a:noFill/>
+          </a:ln>
+        </p:spPr>
+        <p:style>
+          <a:lnRef idx="1">
+            <a:schemeClr val="accent1"/>
+          </a:lnRef>
+          <a:fillRef idx="3">
+            <a:schemeClr val="accent1"/>
+          </a:fillRef>
+          <a:effectRef idx="2">
+            <a:schemeClr val="accent1"/>
+          </a:effectRef>
+          <a:fontRef idx="minor">
+            <a:schemeClr val="lt1"/>
+          </a:fontRef>
+        </p:style>
+        <p:txBody>
+          <a:bodyPr rtlCol="0" anchor="ctr"/>
+          <a:lstStyle/>
+          <a:p>
+            <a:pPr algn="ctr"/>
+            <a:endParaRPr/>
+          </a:p>
+        </p:txBody>
+      </p:sp>
+      <p:sp>
+        <p:nvSpPr>
+          <p:cNvPr id="14" name="Rectangle 13"/>
+          <p:cNvSpPr/>
+          <p:nvPr/>
+        </p:nvSpPr>
+        <p:spPr>
+          <a:xfrm>
+            <a:off x="4846320" y="2600000"/>
+            <a:ext cx="64008" cy="1978484"/>
+          </a:xfrm>
+          <a:prstGeom prst="rect">
+            <a:avLst/>
+          </a:prstGeom>
+          <a:solidFill>
+            <a:srgbClr val="F39C12"/>
+          </a:solidFill>
+          <a:ln>
+            <a:noFill/>
+          </a:ln>
+        </p:spPr>
+        <p:style>
+          <a:lnRef idx="1">
+            <a:schemeClr val="accent1"/>
+          </a:lnRef>
+          <a:fillRef idx="3">
+            <a:schemeClr val="accent1"/>
+          </a:fillRef>
+          <a:effectRef idx="2">
+            <a:schemeClr val="accent1"/>
+          </a:effectRef>
+          <a:fontRef idx="minor">
+            <a:schemeClr val="lt1"/>
+          </a:fontRef>
+        </p:style>
+        <p:txBody>
+          <a:bodyPr rtlCol="0" anchor="ctr"/>
+          <a:lstStyle/>
+          <a:p>
+            <a:pPr algn="ctr"/>
+            <a:endParaRPr/>
+          </a:p>
+        </p:txBody>
+      </p:sp>
+      <p:sp>
+        <p:nvSpPr>
+          <p:cNvPr id="15" name="TextBox 14"/>
+          <p:cNvSpPr txBox="1"/>
+          <p:nvPr/>
+        </p:nvSpPr>
+        <p:spPr>
+          <a:xfrm>
+            <a:off x="5001320" y="2655000"/>
+            <a:ext cx="3879800" cy="265000"/>
+          </a:xfrm>
+          <a:prstGeom prst="rect">
+            <a:avLst/>
+          </a:prstGeom>
+          <a:noFill/>
+        </p:spPr>
+        <p:txBody>
+          <a:bodyPr wrap="square">
+            <a:spAutoFit/>
+          </a:bodyPr>
+          <a:lstStyle/>
+          <a:p>
+            <a:pPr algn="l"/>
+            <a:r>
+              <a:rPr sz="1300" b="1">
+                <a:solidFill>
+                  <a:srgbClr val="F39C12"/>
+                </a:solidFill>
+              </a:rPr>
+              <a:t>tkinter-Besonderheiten</a:t>
+            </a:r>
+          </a:p>
+        </p:txBody>
+      </p:sp>
+      <p:sp>
+        <p:nvSpPr>
+          <p:cNvPr id="16" name="TextBox 15"/>
+          <p:cNvSpPr txBox="1"/>
+          <p:nvPr/>
+        </p:nvSpPr>
+        <p:spPr>
+          <a:xfrm>
+            <a:off x="5001320" y="2945000"/>
+            <a:ext cx="3879800" cy="1360000"/>
+          </a:xfrm>
+          <a:prstGeom prst="rect">
+            <a:avLst/>
+          </a:prstGeom>
+          <a:noFill/>
+        </p:spPr>
+        <p:txBody>
+          <a:bodyPr wrap="square">
+            <a:spAutoFit/>
+          </a:bodyPr>
+          <a:lstStyle/>
+          <a:p>
+            <a:pPr algn="l"/>
+            <a:r>
+              <a:rPr sz="1100" b="1">
+                <a:solidFill>
+                  <a:srgbClr val="F39C12"/>
+                </a:solidFill>
+              </a:rPr>
+              <a:t>Buttons als tk.Label + Bindings</a:t>
+            </a:r>
+          </a:p>
+          <a:p>
+            <a:pPr algn="l"/>
+            <a:r>
+              <a:rPr sz="1100" b="0">
+                <a:solidFill>
+                  <a:srgbClr val="D0D7E8"/>
+                </a:solidFill>
+              </a:rPr>
+              <a:t>   → tk.Button ignoriert bg/fg auf macOS</a:t>
+            </a:r>
+          </a:p>
+          <a:p>
+            <a:pPr algn="l"/>
+            <a:endParaRPr sz="1100" b="0">
+              <a:solidFill>
+                <a:srgbClr val="D0D7E8"/>
+              </a:solidFill>
+            </a:endParaRPr>
+          </a:p>
+          <a:p>
+            <a:pPr algn="l"/>
+            <a:r>
+              <a:rPr sz="1100" b="1">
+                <a:solidFill>
+                  <a:srgbClr val="F39C12"/>
+                </a:solidFill>
+              </a:rPr>
+              <a:t>KI-Zug in separatem Thread</a:t>
+            </a:r>
+          </a:p>
+          <a:p>
+            <a:pPr algn="l"/>
+            <a:r>
+              <a:rPr sz="1100" b="0">
+                <a:solidFill>
+                  <a:srgbClr val="D0D7E8"/>
+                </a:solidFill>
+              </a:rPr>
+              <a:t>   → GUI bleibt reaktionsfähig</a:t>
+            </a:r>
+          </a:p>
+          <a:p>
+            <a:pPr algn="l"/>
+            <a:r>
+              <a:rPr sz="1100" b="0">
+                <a:solidFill>
+                  <a:srgbClr val="D0D7E8"/>
+                </a:solidFill>
+              </a:rPr>
+              <a:t>   → after(0, callback) für Rückkehr in Hauptthread</a:t>
+            </a:r>
+          </a:p>
+          <a:p>
+            <a:pPr algn="l"/>
+            <a:endParaRPr sz="1100" b="0">
+              <a:solidFill>
+                <a:srgbClr val="D0D7E8"/>
+              </a:solidFill>
+            </a:endParaRPr>
+          </a:p>
+          <a:p>
+            <a:pPr algn="l"/>
+            <a:r>
+              <a:rPr sz="1100" b="1">
+                <a:solidFill>
+                  <a:srgbClr val="F39C12"/>
+                </a:solidFill>
+              </a:rPr>
+              <a:t>app_state{} als zentrales Zustandsmodell</a:t>
+            </a:r>
+          </a:p>
+          <a:p>
+            <a:pPr algn="l"/>
+            <a:r>
+              <a:rPr sz="1100" b="0">
+                <a:solidFill>
+                  <a:srgbClr val="D0D7E8"/>
+                </a:solidFill>
+              </a:rPr>
+              <a:t>   → Prozedurale Architektur (keine Klassen)</a:t>
             </a:r>
           </a:p>
         </p:txBody>
@@ -12108,6 +15320,2824 @@
               <a:t>2</a:t>
             </a:r>
             <a:endParaRPr lang="de-DE" sz="800" dirty="0"/>
+          </a:p>
+        </p:txBody>
+      </p:sp>
+    </p:spTree>
+  </p:cSld>
+  <p:clrMapOvr>
+    <a:masterClrMapping/>
+  </p:clrMapOvr>
+</p:sld>
+</file>
+
+<file path=ppt/slides/slide20.xml><?xml version="1.0" encoding="utf-8"?>
+<p:sld xmlns:a="http://schemas.openxmlformats.org/drawingml/2006/main" xmlns:r="http://schemas.openxmlformats.org/officeDocument/2006/relationships" xmlns:p="http://schemas.openxmlformats.org/presentationml/2006/main">
+  <p:cSld>
+    <p:bg>
+      <p:bgPr>
+        <a:solidFill>
+          <a:srgbClr val="0D0D1A"/>
+        </a:solidFill>
+        <a:effectLst/>
+      </p:bgPr>
+    </p:bg>
+    <p:spTree>
+      <p:nvGrpSpPr>
+        <p:cNvPr id="1" name=""/>
+        <p:cNvGrpSpPr/>
+        <p:nvPr/>
+      </p:nvGrpSpPr>
+      <p:grpSpPr>
+        <a:xfrm>
+          <a:off x="0" y="0"/>
+          <a:ext cx="0" cy="0"/>
+          <a:chOff x="0" y="0"/>
+          <a:chExt cx="0" cy="0"/>
+        </a:xfrm>
+      </p:grpSpPr>
+      <p:sp>
+        <p:nvSpPr>
+          <p:cNvPr id="2" name="TextBox 1"/>
+          <p:cNvSpPr txBox="1"/>
+          <p:nvPr/>
+        </p:nvSpPr>
+        <p:spPr>
+          <a:xfrm>
+            <a:off x="457200" y="256032"/>
+            <a:ext cx="8229600" cy="400000"/>
+          </a:xfrm>
+          <a:prstGeom prst="rect">
+            <a:avLst/>
+          </a:prstGeom>
+          <a:noFill/>
+        </p:spPr>
+        <p:txBody>
+          <a:bodyPr wrap="square">
+            <a:spAutoFit/>
+          </a:bodyPr>
+          <a:lstStyle/>
+          <a:p>
+            <a:pPr algn="l"/>
+            <a:r>
+              <a:rPr sz="2800" b="1">
+                <a:solidFill>
+                  <a:srgbClr val="FFFFFF"/>
+                </a:solidFill>
+              </a:rPr>
+              <a:t>Quellen &amp; Werkzeuge</a:t>
+            </a:r>
+          </a:p>
+        </p:txBody>
+      </p:sp>
+      <p:sp>
+        <p:nvSpPr>
+          <p:cNvPr id="3" name="TextBox 2"/>
+          <p:cNvSpPr txBox="1"/>
+          <p:nvPr/>
+        </p:nvSpPr>
+        <p:spPr>
+          <a:xfrm>
+            <a:off x="8618018" y="4875028"/>
+            <a:ext cx="347675" cy="215444"/>
+          </a:xfrm>
+          <a:prstGeom prst="rect">
+            <a:avLst/>
+          </a:prstGeom>
+          <a:noFill/>
+        </p:spPr>
+        <p:txBody>
+          <a:bodyPr wrap="square">
+            <a:spAutoFit/>
+          </a:bodyPr>
+          <a:lstStyle/>
+          <a:p>
+            <a:pPr algn="ctr"/>
+            <a:r>
+              <a:rPr sz="800" b="1">
+                <a:solidFill>
+                  <a:srgbClr val="E94560"/>
+                </a:solidFill>
+              </a:rPr>
+              <a:t>20</a:t>
+            </a:r>
+          </a:p>
+        </p:txBody>
+      </p:sp>
+      <p:sp>
+        <p:nvSpPr>
+          <p:cNvPr id="4" name="Rectangle 3"/>
+          <p:cNvSpPr/>
+          <p:nvPr/>
+        </p:nvSpPr>
+        <p:spPr>
+          <a:xfrm>
+            <a:off x="365760" y="880000"/>
+            <a:ext cx="4114800" cy="870000"/>
+          </a:xfrm>
+          <a:prstGeom prst="rect">
+            <a:avLst/>
+          </a:prstGeom>
+          <a:solidFill>
+            <a:srgbClr val="161638"/>
+          </a:solidFill>
+          <a:ln>
+            <a:noFill/>
+          </a:ln>
+        </p:spPr>
+        <p:style>
+          <a:lnRef idx="1">
+            <a:schemeClr val="accent1"/>
+          </a:lnRef>
+          <a:fillRef idx="3">
+            <a:schemeClr val="accent1"/>
+          </a:fillRef>
+          <a:effectRef idx="2">
+            <a:schemeClr val="accent1"/>
+          </a:effectRef>
+          <a:fontRef idx="minor">
+            <a:schemeClr val="lt1"/>
+          </a:fontRef>
+        </p:style>
+        <p:txBody>
+          <a:bodyPr rtlCol="0" anchor="ctr"/>
+          <a:lstStyle/>
+          <a:p>
+            <a:pPr algn="ctr"/>
+            <a:endParaRPr/>
+          </a:p>
+        </p:txBody>
+      </p:sp>
+      <p:sp>
+        <p:nvSpPr>
+          <p:cNvPr id="5" name="Rectangle 4"/>
+          <p:cNvSpPr/>
+          <p:nvPr/>
+        </p:nvSpPr>
+        <p:spPr>
+          <a:xfrm>
+            <a:off x="365760" y="880000"/>
+            <a:ext cx="64008" cy="870000"/>
+          </a:xfrm>
+          <a:prstGeom prst="rect">
+            <a:avLst/>
+          </a:prstGeom>
+          <a:solidFill>
+            <a:srgbClr val="4472C4"/>
+          </a:solidFill>
+          <a:ln>
+            <a:noFill/>
+          </a:ln>
+        </p:spPr>
+        <p:style>
+          <a:lnRef idx="1">
+            <a:schemeClr val="accent1"/>
+          </a:lnRef>
+          <a:fillRef idx="3">
+            <a:schemeClr val="accent1"/>
+          </a:fillRef>
+          <a:effectRef idx="2">
+            <a:schemeClr val="accent1"/>
+          </a:effectRef>
+          <a:fontRef idx="minor">
+            <a:schemeClr val="lt1"/>
+          </a:fontRef>
+        </p:style>
+        <p:txBody>
+          <a:bodyPr rtlCol="0" anchor="ctr"/>
+          <a:lstStyle/>
+          <a:p>
+            <a:pPr algn="ctr"/>
+            <a:endParaRPr/>
+          </a:p>
+        </p:txBody>
+      </p:sp>
+      <p:sp>
+        <p:nvSpPr>
+          <p:cNvPr id="6" name="TextBox 5"/>
+          <p:cNvSpPr txBox="1"/>
+          <p:nvPr/>
+        </p:nvSpPr>
+        <p:spPr>
+          <a:xfrm>
+            <a:off x="520760" y="935000"/>
+            <a:ext cx="3879800" cy="265000"/>
+          </a:xfrm>
+          <a:prstGeom prst="rect">
+            <a:avLst/>
+          </a:prstGeom>
+          <a:noFill/>
+        </p:spPr>
+        <p:txBody>
+          <a:bodyPr wrap="square">
+            <a:spAutoFit/>
+          </a:bodyPr>
+          <a:lstStyle/>
+          <a:p>
+            <a:pPr algn="l"/>
+            <a:r>
+              <a:rPr sz="1300" b="1">
+                <a:solidFill>
+                  <a:srgbClr val="4472C4"/>
+                </a:solidFill>
+              </a:rPr>
+              <a:t>Entwicklungsumgebungen</a:t>
+            </a:r>
+          </a:p>
+        </p:txBody>
+      </p:sp>
+      <p:sp>
+        <p:nvSpPr>
+          <p:cNvPr id="7" name="TextBox 6"/>
+          <p:cNvSpPr txBox="1"/>
+          <p:nvPr/>
+        </p:nvSpPr>
+        <p:spPr>
+          <a:xfrm>
+            <a:off x="520760" y="1225000"/>
+            <a:ext cx="3879800" cy="470000"/>
+          </a:xfrm>
+          <a:prstGeom prst="rect">
+            <a:avLst/>
+          </a:prstGeom>
+          <a:noFill/>
+        </p:spPr>
+        <p:txBody>
+          <a:bodyPr wrap="square">
+            <a:spAutoFit/>
+          </a:bodyPr>
+          <a:lstStyle/>
+          <a:p>
+            <a:pPr algn="l"/>
+            <a:r>
+              <a:rPr sz="1100" b="0">
+                <a:solidFill>
+                  <a:srgbClr val="D0D7E8"/>
+                </a:solidFill>
+              </a:rPr>
+              <a:t>PyCharm  (JetBrains)</a:t>
+            </a:r>
+          </a:p>
+          <a:p>
+            <a:pPr algn="l"/>
+            <a:r>
+              <a:rPr sz="1100" b="0">
+                <a:solidFill>
+                  <a:srgbClr val="D0D7E8"/>
+                </a:solidFill>
+              </a:rPr>
+              <a:t>Visual Studio Code  (Microsoft)</a:t>
+            </a:r>
+          </a:p>
+        </p:txBody>
+      </p:sp>
+      <p:sp>
+        <p:nvSpPr>
+          <p:cNvPr id="8" name="Rectangle 7"/>
+          <p:cNvSpPr/>
+          <p:nvPr/>
+        </p:nvSpPr>
+        <p:spPr>
+          <a:xfrm>
+            <a:off x="4846320" y="880000"/>
+            <a:ext cx="4114800" cy="870000"/>
+          </a:xfrm>
+          <a:prstGeom prst="rect">
+            <a:avLst/>
+          </a:prstGeom>
+          <a:solidFill>
+            <a:srgbClr val="161638"/>
+          </a:solidFill>
+          <a:ln>
+            <a:noFill/>
+          </a:ln>
+        </p:spPr>
+        <p:style>
+          <a:lnRef idx="1">
+            <a:schemeClr val="accent1"/>
+          </a:lnRef>
+          <a:fillRef idx="3">
+            <a:schemeClr val="accent1"/>
+          </a:fillRef>
+          <a:effectRef idx="2">
+            <a:schemeClr val="accent1"/>
+          </a:effectRef>
+          <a:fontRef idx="minor">
+            <a:schemeClr val="lt1"/>
+          </a:fontRef>
+        </p:style>
+        <p:txBody>
+          <a:bodyPr rtlCol="0" anchor="ctr"/>
+          <a:lstStyle/>
+          <a:p>
+            <a:pPr algn="ctr"/>
+            <a:endParaRPr/>
+          </a:p>
+        </p:txBody>
+      </p:sp>
+      <p:sp>
+        <p:nvSpPr>
+          <p:cNvPr id="9" name="Rectangle 8"/>
+          <p:cNvSpPr/>
+          <p:nvPr/>
+        </p:nvSpPr>
+        <p:spPr>
+          <a:xfrm>
+            <a:off x="4846320" y="880000"/>
+            <a:ext cx="64008" cy="870000"/>
+          </a:xfrm>
+          <a:prstGeom prst="rect">
+            <a:avLst/>
+          </a:prstGeom>
+          <a:solidFill>
+            <a:srgbClr val="F39C12"/>
+          </a:solidFill>
+          <a:ln>
+            <a:noFill/>
+          </a:ln>
+        </p:spPr>
+        <p:style>
+          <a:lnRef idx="1">
+            <a:schemeClr val="accent1"/>
+          </a:lnRef>
+          <a:fillRef idx="3">
+            <a:schemeClr val="accent1"/>
+          </a:fillRef>
+          <a:effectRef idx="2">
+            <a:schemeClr val="accent1"/>
+          </a:effectRef>
+          <a:fontRef idx="minor">
+            <a:schemeClr val="lt1"/>
+          </a:fontRef>
+        </p:style>
+        <p:txBody>
+          <a:bodyPr rtlCol="0" anchor="ctr"/>
+          <a:lstStyle/>
+          <a:p>
+            <a:pPr algn="ctr"/>
+            <a:endParaRPr/>
+          </a:p>
+        </p:txBody>
+      </p:sp>
+      <p:sp>
+        <p:nvSpPr>
+          <p:cNvPr id="10" name="TextBox 9"/>
+          <p:cNvSpPr txBox="1"/>
+          <p:nvPr/>
+        </p:nvSpPr>
+        <p:spPr>
+          <a:xfrm>
+            <a:off x="5001320" y="935000"/>
+            <a:ext cx="3879800" cy="265000"/>
+          </a:xfrm>
+          <a:prstGeom prst="rect">
+            <a:avLst/>
+          </a:prstGeom>
+          <a:noFill/>
+        </p:spPr>
+        <p:txBody>
+          <a:bodyPr wrap="square">
+            <a:spAutoFit/>
+          </a:bodyPr>
+          <a:lstStyle/>
+          <a:p>
+            <a:pPr algn="l"/>
+            <a:r>
+              <a:rPr sz="1300" b="1">
+                <a:solidFill>
+                  <a:srgbClr val="F39C12"/>
+                </a:solidFill>
+              </a:rPr>
+              <a:t>KI-Assistenten</a:t>
+            </a:r>
+          </a:p>
+        </p:txBody>
+      </p:sp>
+      <p:sp>
+        <p:nvSpPr>
+          <p:cNvPr id="11" name="TextBox 10"/>
+          <p:cNvSpPr txBox="1"/>
+          <p:nvPr/>
+        </p:nvSpPr>
+        <p:spPr>
+          <a:xfrm>
+            <a:off x="5001320" y="1225000"/>
+            <a:ext cx="3879800" cy="470000"/>
+          </a:xfrm>
+          <a:prstGeom prst="rect">
+            <a:avLst/>
+          </a:prstGeom>
+          <a:noFill/>
+        </p:spPr>
+        <p:txBody>
+          <a:bodyPr wrap="square">
+            <a:spAutoFit/>
+          </a:bodyPr>
+          <a:lstStyle/>
+          <a:p>
+            <a:pPr algn="l"/>
+            <a:r>
+              <a:rPr sz="1100" b="0">
+                <a:solidFill>
+                  <a:srgbClr val="D0D7E8"/>
+                </a:solidFill>
+              </a:rPr>
+              <a:t>Claude  (Anthropic)</a:t>
+            </a:r>
+          </a:p>
+          <a:p>
+            <a:pPr algn="l"/>
+            <a:r>
+              <a:rPr sz="1100" b="0">
+                <a:solidFill>
+                  <a:srgbClr val="D0D7E8"/>
+                </a:solidFill>
+              </a:rPr>
+              <a:t>ChatGPT  (OpenAI)</a:t>
+            </a:r>
+          </a:p>
+        </p:txBody>
+      </p:sp>
+      <p:sp>
+        <p:nvSpPr>
+          <p:cNvPr id="12" name="Rectangle 11"/>
+          <p:cNvSpPr/>
+          <p:nvPr/>
+        </p:nvSpPr>
+        <p:spPr>
+          <a:xfrm>
+            <a:off x="365760" y="1869999"/>
+            <a:ext cx="4114800" cy="1268791"/>
+          </a:xfrm>
+          <a:prstGeom prst="rect">
+            <a:avLst/>
+          </a:prstGeom>
+          <a:solidFill>
+            <a:srgbClr val="161638"/>
+          </a:solidFill>
+          <a:ln>
+            <a:noFill/>
+          </a:ln>
+        </p:spPr>
+        <p:style>
+          <a:lnRef idx="1">
+            <a:schemeClr val="accent1"/>
+          </a:lnRef>
+          <a:fillRef idx="3">
+            <a:schemeClr val="accent1"/>
+          </a:fillRef>
+          <a:effectRef idx="2">
+            <a:schemeClr val="accent1"/>
+          </a:effectRef>
+          <a:fontRef idx="minor">
+            <a:schemeClr val="lt1"/>
+          </a:fontRef>
+        </p:style>
+        <p:txBody>
+          <a:bodyPr rtlCol="0" anchor="ctr"/>
+          <a:lstStyle/>
+          <a:p>
+            <a:pPr algn="ctr"/>
+            <a:endParaRPr/>
+          </a:p>
+        </p:txBody>
+      </p:sp>
+      <p:sp>
+        <p:nvSpPr>
+          <p:cNvPr id="13" name="Rectangle 12"/>
+          <p:cNvSpPr/>
+          <p:nvPr/>
+        </p:nvSpPr>
+        <p:spPr>
+          <a:xfrm>
+            <a:off x="365760" y="1869999"/>
+            <a:ext cx="64008" cy="1268791"/>
+          </a:xfrm>
+          <a:prstGeom prst="rect">
+            <a:avLst/>
+          </a:prstGeom>
+          <a:solidFill>
+            <a:srgbClr val="2ECC71"/>
+          </a:solidFill>
+          <a:ln>
+            <a:noFill/>
+          </a:ln>
+        </p:spPr>
+        <p:style>
+          <a:lnRef idx="1">
+            <a:schemeClr val="accent1"/>
+          </a:lnRef>
+          <a:fillRef idx="3">
+            <a:schemeClr val="accent1"/>
+          </a:fillRef>
+          <a:effectRef idx="2">
+            <a:schemeClr val="accent1"/>
+          </a:effectRef>
+          <a:fontRef idx="minor">
+            <a:schemeClr val="lt1"/>
+          </a:fontRef>
+        </p:style>
+        <p:txBody>
+          <a:bodyPr rtlCol="0" anchor="ctr"/>
+          <a:lstStyle/>
+          <a:p>
+            <a:pPr algn="ctr"/>
+            <a:endParaRPr/>
+          </a:p>
+        </p:txBody>
+      </p:sp>
+      <p:sp>
+        <p:nvSpPr>
+          <p:cNvPr id="14" name="TextBox 13"/>
+          <p:cNvSpPr txBox="1"/>
+          <p:nvPr/>
+        </p:nvSpPr>
+        <p:spPr>
+          <a:xfrm>
+            <a:off x="520760" y="1925000"/>
+            <a:ext cx="3879800" cy="265000"/>
+          </a:xfrm>
+          <a:prstGeom prst="rect">
+            <a:avLst/>
+          </a:prstGeom>
+          <a:noFill/>
+        </p:spPr>
+        <p:txBody>
+          <a:bodyPr wrap="square">
+            <a:spAutoFit/>
+          </a:bodyPr>
+          <a:lstStyle/>
+          <a:p>
+            <a:pPr algn="l"/>
+            <a:r>
+              <a:rPr sz="1300" b="1">
+                <a:solidFill>
+                  <a:srgbClr val="2ECC71"/>
+                </a:solidFill>
+              </a:rPr>
+              <a:t>Python-Bibliotheken</a:t>
+            </a:r>
+          </a:p>
+        </p:txBody>
+      </p:sp>
+      <p:sp>
+        <p:nvSpPr>
+          <p:cNvPr id="15" name="TextBox 14"/>
+          <p:cNvSpPr txBox="1"/>
+          <p:nvPr/>
+        </p:nvSpPr>
+        <p:spPr>
+          <a:xfrm>
+            <a:off x="520760" y="2215000"/>
+            <a:ext cx="3879800" cy="700000"/>
+          </a:xfrm>
+          <a:prstGeom prst="rect">
+            <a:avLst/>
+          </a:prstGeom>
+          <a:noFill/>
+        </p:spPr>
+        <p:txBody>
+          <a:bodyPr wrap="square">
+            <a:spAutoFit/>
+          </a:bodyPr>
+          <a:lstStyle/>
+          <a:p>
+            <a:pPr algn="l"/>
+            <a:r>
+              <a:rPr sz="1100" b="0">
+                <a:solidFill>
+                  <a:srgbClr val="D0D7E8"/>
+                </a:solidFill>
+              </a:rPr>
+              <a:t>tkinter     – GUI-Framework (stdlib)</a:t>
+            </a:r>
+          </a:p>
+          <a:p>
+            <a:pPr algn="l"/>
+            <a:r>
+              <a:rPr sz="1100" b="0">
+                <a:solidFill>
+                  <a:srgbClr val="D0D7E8"/>
+                </a:solidFill>
+              </a:rPr>
+              <a:t>sqlite3     – Datenbankzugriff (stdlib)</a:t>
+            </a:r>
+          </a:p>
+          <a:p>
+            <a:pPr algn="l"/>
+            <a:r>
+              <a:rPr sz="1100" b="0">
+                <a:solidFill>
+                  <a:srgbClr val="D0D7E8"/>
+                </a:solidFill>
+              </a:rPr>
+              <a:t>hashlib     – SHA-256 Passwort-Hashing (stdlib)</a:t>
+            </a:r>
+          </a:p>
+          <a:p>
+            <a:pPr algn="l"/>
+            <a:r>
+              <a:rPr sz="1100" b="0">
+                <a:solidFill>
+                  <a:srgbClr val="D0D7E8"/>
+                </a:solidFill>
+              </a:rPr>
+              <a:t>threading   – KI-Zug im Hintergrund (stdlib)</a:t>
+            </a:r>
+          </a:p>
+          <a:p>
+            <a:pPr algn="l"/>
+            <a:r>
+              <a:rPr sz="1100" b="0">
+                <a:solidFill>
+                  <a:srgbClr val="D0D7E8"/>
+                </a:solidFill>
+              </a:rPr>
+              <a:t>Pillow      – GIF-Animation (pip)</a:t>
+            </a:r>
+          </a:p>
+        </p:txBody>
+      </p:sp>
+      <p:sp>
+        <p:nvSpPr>
+          <p:cNvPr id="16" name="Rectangle 15"/>
+          <p:cNvSpPr/>
+          <p:nvPr/>
+        </p:nvSpPr>
+        <p:spPr>
+          <a:xfrm>
+            <a:off x="4846320" y="1870000"/>
+            <a:ext cx="4114800" cy="1268790"/>
+          </a:xfrm>
+          <a:prstGeom prst="rect">
+            <a:avLst/>
+          </a:prstGeom>
+          <a:solidFill>
+            <a:srgbClr val="161638"/>
+          </a:solidFill>
+          <a:ln>
+            <a:noFill/>
+          </a:ln>
+        </p:spPr>
+        <p:style>
+          <a:lnRef idx="1">
+            <a:schemeClr val="accent1"/>
+          </a:lnRef>
+          <a:fillRef idx="3">
+            <a:schemeClr val="accent1"/>
+          </a:fillRef>
+          <a:effectRef idx="2">
+            <a:schemeClr val="accent1"/>
+          </a:effectRef>
+          <a:fontRef idx="minor">
+            <a:schemeClr val="lt1"/>
+          </a:fontRef>
+        </p:style>
+        <p:txBody>
+          <a:bodyPr rtlCol="0" anchor="ctr"/>
+          <a:lstStyle/>
+          <a:p>
+            <a:pPr algn="ctr"/>
+            <a:endParaRPr/>
+          </a:p>
+        </p:txBody>
+      </p:sp>
+      <p:sp>
+        <p:nvSpPr>
+          <p:cNvPr id="17" name="Rectangle 16"/>
+          <p:cNvSpPr/>
+          <p:nvPr/>
+        </p:nvSpPr>
+        <p:spPr>
+          <a:xfrm>
+            <a:off x="4846320" y="1870000"/>
+            <a:ext cx="64008" cy="1268790"/>
+          </a:xfrm>
+          <a:prstGeom prst="rect">
+            <a:avLst/>
+          </a:prstGeom>
+          <a:solidFill>
+            <a:srgbClr val="9B59B6"/>
+          </a:solidFill>
+          <a:ln>
+            <a:noFill/>
+          </a:ln>
+        </p:spPr>
+        <p:style>
+          <a:lnRef idx="1">
+            <a:schemeClr val="accent1"/>
+          </a:lnRef>
+          <a:fillRef idx="3">
+            <a:schemeClr val="accent1"/>
+          </a:fillRef>
+          <a:effectRef idx="2">
+            <a:schemeClr val="accent1"/>
+          </a:effectRef>
+          <a:fontRef idx="minor">
+            <a:schemeClr val="lt1"/>
+          </a:fontRef>
+        </p:style>
+        <p:txBody>
+          <a:bodyPr rtlCol="0" anchor="ctr"/>
+          <a:lstStyle/>
+          <a:p>
+            <a:pPr algn="ctr"/>
+            <a:endParaRPr/>
+          </a:p>
+        </p:txBody>
+      </p:sp>
+      <p:sp>
+        <p:nvSpPr>
+          <p:cNvPr id="18" name="TextBox 17"/>
+          <p:cNvSpPr txBox="1"/>
+          <p:nvPr/>
+        </p:nvSpPr>
+        <p:spPr>
+          <a:xfrm>
+            <a:off x="5001320" y="1925000"/>
+            <a:ext cx="3879800" cy="265000"/>
+          </a:xfrm>
+          <a:prstGeom prst="rect">
+            <a:avLst/>
+          </a:prstGeom>
+          <a:noFill/>
+        </p:spPr>
+        <p:txBody>
+          <a:bodyPr wrap="square">
+            <a:spAutoFit/>
+          </a:bodyPr>
+          <a:lstStyle/>
+          <a:p>
+            <a:pPr algn="l"/>
+            <a:r>
+              <a:rPr sz="1300" b="1">
+                <a:solidFill>
+                  <a:srgbClr val="9B59B6"/>
+                </a:solidFill>
+              </a:rPr>
+              <a:t>Quellen</a:t>
+            </a:r>
+          </a:p>
+        </p:txBody>
+      </p:sp>
+      <p:sp>
+        <p:nvSpPr>
+          <p:cNvPr id="19" name="TextBox 18"/>
+          <p:cNvSpPr txBox="1"/>
+          <p:nvPr/>
+        </p:nvSpPr>
+        <p:spPr>
+          <a:xfrm>
+            <a:off x="5001320" y="2215000"/>
+            <a:ext cx="3879800" cy="700000"/>
+          </a:xfrm>
+          <a:prstGeom prst="rect">
+            <a:avLst/>
+          </a:prstGeom>
+          <a:noFill/>
+        </p:spPr>
+        <p:txBody>
+          <a:bodyPr wrap="square">
+            <a:spAutoFit/>
+          </a:bodyPr>
+          <a:lstStyle/>
+          <a:p>
+            <a:pPr algn="l"/>
+            <a:r>
+              <a:rPr sz="1100" b="0">
+                <a:solidFill>
+                  <a:srgbClr val="D0D7E8"/>
+                </a:solidFill>
+              </a:rPr>
+              <a:t>Wikipedia – Minimax-Algorithmus</a:t>
+            </a:r>
+          </a:p>
+          <a:p>
+            <a:pPr algn="l"/>
+            <a:r>
+              <a:rPr sz="1100" b="0">
+                <a:solidFill>
+                  <a:srgbClr val="D0D7E8"/>
+                </a:solidFill>
+              </a:rPr>
+              <a:t>Wikipedia – Alpha-Beta-Pruning</a:t>
+            </a:r>
+          </a:p>
+          <a:p>
+            <a:pPr algn="l"/>
+            <a:r>
+              <a:rPr sz="1100" b="0">
+                <a:solidFill>
+                  <a:srgbClr val="D0D7E8"/>
+                </a:solidFill>
+              </a:rPr>
+              <a:t>HHBK Lernfeld 5 – Unterrichtsmaterial</a:t>
+            </a:r>
+          </a:p>
+          <a:p>
+            <a:pPr algn="l"/>
+            <a:r>
+              <a:rPr sz="1100" b="0">
+                <a:solidFill>
+                  <a:srgbClr val="D0D7E8"/>
+                </a:solidFill>
+              </a:rPr>
+              <a:t>docs.python.org – Python-Dokumentation</a:t>
+            </a:r>
+          </a:p>
+        </p:txBody>
+      </p:sp>
+      <p:sp>
+        <p:nvSpPr>
+          <p:cNvPr id="20" name="Rectangle 19"/>
+          <p:cNvSpPr/>
+          <p:nvPr/>
+        </p:nvSpPr>
+        <p:spPr>
+          <a:xfrm>
+            <a:off x="365760" y="3258789"/>
+            <a:ext cx="8595360" cy="870000"/>
+          </a:xfrm>
+          <a:prstGeom prst="rect">
+            <a:avLst/>
+          </a:prstGeom>
+          <a:solidFill>
+            <a:srgbClr val="161638"/>
+          </a:solidFill>
+          <a:ln>
+            <a:noFill/>
+          </a:ln>
+        </p:spPr>
+        <p:style>
+          <a:lnRef idx="1">
+            <a:schemeClr val="accent1"/>
+          </a:lnRef>
+          <a:fillRef idx="3">
+            <a:schemeClr val="accent1"/>
+          </a:fillRef>
+          <a:effectRef idx="2">
+            <a:schemeClr val="accent1"/>
+          </a:effectRef>
+          <a:fontRef idx="minor">
+            <a:schemeClr val="lt1"/>
+          </a:fontRef>
+        </p:style>
+        <p:txBody>
+          <a:bodyPr rtlCol="0" anchor="ctr"/>
+          <a:lstStyle/>
+          <a:p>
+            <a:pPr algn="ctr"/>
+            <a:endParaRPr/>
+          </a:p>
+        </p:txBody>
+      </p:sp>
+      <p:sp>
+        <p:nvSpPr>
+          <p:cNvPr id="21" name="Rectangle 20"/>
+          <p:cNvSpPr/>
+          <p:nvPr/>
+        </p:nvSpPr>
+        <p:spPr>
+          <a:xfrm>
+            <a:off x="365760" y="3258789"/>
+            <a:ext cx="64008" cy="870000"/>
+          </a:xfrm>
+          <a:prstGeom prst="rect">
+            <a:avLst/>
+          </a:prstGeom>
+          <a:solidFill>
+            <a:srgbClr val="8A92A4"/>
+          </a:solidFill>
+          <a:ln>
+            <a:noFill/>
+          </a:ln>
+        </p:spPr>
+        <p:style>
+          <a:lnRef idx="1">
+            <a:schemeClr val="accent1"/>
+          </a:lnRef>
+          <a:fillRef idx="3">
+            <a:schemeClr val="accent1"/>
+          </a:fillRef>
+          <a:effectRef idx="2">
+            <a:schemeClr val="accent1"/>
+          </a:effectRef>
+          <a:fontRef idx="minor">
+            <a:schemeClr val="lt1"/>
+          </a:fontRef>
+        </p:style>
+        <p:txBody>
+          <a:bodyPr rtlCol="0" anchor="ctr"/>
+          <a:lstStyle/>
+          <a:p>
+            <a:pPr algn="ctr"/>
+            <a:endParaRPr/>
+          </a:p>
+        </p:txBody>
+      </p:sp>
+      <p:sp>
+        <p:nvSpPr>
+          <p:cNvPr id="22" name="TextBox 21"/>
+          <p:cNvSpPr txBox="1"/>
+          <p:nvPr/>
+        </p:nvSpPr>
+        <p:spPr>
+          <a:xfrm>
+            <a:off x="520760" y="3313789"/>
+            <a:ext cx="8360360" cy="265000"/>
+          </a:xfrm>
+          <a:prstGeom prst="rect">
+            <a:avLst/>
+          </a:prstGeom>
+          <a:noFill/>
+        </p:spPr>
+        <p:txBody>
+          <a:bodyPr wrap="square">
+            <a:spAutoFit/>
+          </a:bodyPr>
+          <a:lstStyle/>
+          <a:p>
+            <a:pPr algn="l"/>
+            <a:r>
+              <a:rPr sz="1300" b="1">
+                <a:solidFill>
+                  <a:srgbClr val="8A92A4"/>
+                </a:solidFill>
+              </a:rPr>
+              <a:t>Koordination &amp; Projektmanagement</a:t>
+            </a:r>
+          </a:p>
+        </p:txBody>
+      </p:sp>
+      <p:sp>
+        <p:nvSpPr>
+          <p:cNvPr id="23" name="TextBox 22"/>
+          <p:cNvSpPr txBox="1"/>
+          <p:nvPr/>
+        </p:nvSpPr>
+        <p:spPr>
+          <a:xfrm>
+            <a:off x="520760" y="3603789"/>
+            <a:ext cx="8360360" cy="350000"/>
+          </a:xfrm>
+          <a:prstGeom prst="rect">
+            <a:avLst/>
+          </a:prstGeom>
+          <a:noFill/>
+        </p:spPr>
+        <p:txBody>
+          <a:bodyPr wrap="square">
+            <a:spAutoFit/>
+          </a:bodyPr>
+          <a:lstStyle/>
+          <a:p>
+            <a:pPr algn="l"/>
+            <a:r>
+              <a:rPr sz="1100" b="0">
+                <a:solidFill>
+                  <a:srgbClr val="D0D7E8"/>
+                </a:solidFill>
+              </a:rPr>
+              <a:t>Discord-Channel  (tägliche Kommunikation)  ·  WhatsApp  ·  2 Team-Meetings: 27.04. &amp; 29.04. je 10:00 Uhr</a:t>
+            </a:r>
+          </a:p>
+          <a:p>
+            <a:pPr algn="l"/>
+            <a:r>
+              <a:rPr sz="1100" b="0">
+                <a:solidFill>
+                  <a:srgbClr val="D0D7E8"/>
+                </a:solidFill>
+              </a:rPr>
+              <a:t>Kein Kanban-Board – Discord als leichtgewichtige Alternative gewählt</a:t>
+            </a:r>
+          </a:p>
+        </p:txBody>
+      </p:sp>
+    </p:spTree>
+  </p:cSld>
+  <p:clrMapOvr>
+    <a:masterClrMapping/>
+  </p:clrMapOvr>
+</p:sld>
+</file>
+
+<file path=ppt/slides/slide21.xml><?xml version="1.0" encoding="utf-8"?>
+<p:sld xmlns:a="http://schemas.openxmlformats.org/drawingml/2006/main" xmlns:r="http://schemas.openxmlformats.org/officeDocument/2006/relationships" xmlns:p="http://schemas.openxmlformats.org/presentationml/2006/main">
+  <p:cSld>
+    <p:bg>
+      <p:bgPr>
+        <a:solidFill>
+          <a:srgbClr val="0D0D1A"/>
+        </a:solidFill>
+        <a:effectLst/>
+      </p:bgPr>
+    </p:bg>
+    <p:spTree>
+      <p:nvGrpSpPr>
+        <p:cNvPr id="1" name=""/>
+        <p:cNvGrpSpPr/>
+        <p:nvPr/>
+      </p:nvGrpSpPr>
+      <p:grpSpPr>
+        <a:xfrm>
+          <a:off x="0" y="0"/>
+          <a:ext cx="0" cy="0"/>
+          <a:chOff x="0" y="0"/>
+          <a:chExt cx="0" cy="0"/>
+        </a:xfrm>
+      </p:grpSpPr>
+      <p:sp>
+        <p:nvSpPr>
+          <p:cNvPr id="2" name="TextBox 1"/>
+          <p:cNvSpPr txBox="1"/>
+          <p:nvPr/>
+        </p:nvSpPr>
+        <p:spPr>
+          <a:xfrm>
+            <a:off x="457200" y="256032"/>
+            <a:ext cx="8229600" cy="400000"/>
+          </a:xfrm>
+          <a:prstGeom prst="rect">
+            <a:avLst/>
+          </a:prstGeom>
+          <a:noFill/>
+        </p:spPr>
+        <p:txBody>
+          <a:bodyPr wrap="square">
+            <a:spAutoFit/>
+          </a:bodyPr>
+          <a:lstStyle/>
+          <a:p>
+            <a:pPr algn="l"/>
+            <a:r>
+              <a:rPr sz="2800" b="1">
+                <a:solidFill>
+                  <a:srgbClr val="FFFFFF"/>
+                </a:solidFill>
+              </a:rPr>
+              <a:t>Fazit – Projektverlauf</a:t>
+            </a:r>
+          </a:p>
+        </p:txBody>
+      </p:sp>
+      <p:sp>
+        <p:nvSpPr>
+          <p:cNvPr id="3" name="TextBox 2"/>
+          <p:cNvSpPr txBox="1"/>
+          <p:nvPr/>
+        </p:nvSpPr>
+        <p:spPr>
+          <a:xfrm>
+            <a:off x="8626110" y="4875028"/>
+            <a:ext cx="339583" cy="215444"/>
+          </a:xfrm>
+          <a:prstGeom prst="rect">
+            <a:avLst/>
+          </a:prstGeom>
+          <a:noFill/>
+        </p:spPr>
+        <p:txBody>
+          <a:bodyPr wrap="square">
+            <a:spAutoFit/>
+          </a:bodyPr>
+          <a:lstStyle/>
+          <a:p>
+            <a:pPr algn="ctr"/>
+            <a:r>
+              <a:rPr sz="800" b="1">
+                <a:solidFill>
+                  <a:srgbClr val="E94560"/>
+                </a:solidFill>
+              </a:rPr>
+              <a:t>21</a:t>
+            </a:r>
+          </a:p>
+        </p:txBody>
+      </p:sp>
+      <p:sp>
+        <p:nvSpPr>
+          <p:cNvPr id="4" name="Rectangle 3"/>
+          <p:cNvSpPr/>
+          <p:nvPr/>
+        </p:nvSpPr>
+        <p:spPr>
+          <a:xfrm>
+            <a:off x="365760" y="880000"/>
+            <a:ext cx="4114800" cy="1691750"/>
+          </a:xfrm>
+          <a:prstGeom prst="rect">
+            <a:avLst/>
+          </a:prstGeom>
+          <a:solidFill>
+            <a:srgbClr val="161638"/>
+          </a:solidFill>
+          <a:ln>
+            <a:noFill/>
+          </a:ln>
+        </p:spPr>
+        <p:style>
+          <a:lnRef idx="1">
+            <a:schemeClr val="accent1"/>
+          </a:lnRef>
+          <a:fillRef idx="3">
+            <a:schemeClr val="accent1"/>
+          </a:fillRef>
+          <a:effectRef idx="2">
+            <a:schemeClr val="accent1"/>
+          </a:effectRef>
+          <a:fontRef idx="minor">
+            <a:schemeClr val="lt1"/>
+          </a:fontRef>
+        </p:style>
+        <p:txBody>
+          <a:bodyPr rtlCol="0" anchor="ctr"/>
+          <a:lstStyle/>
+          <a:p>
+            <a:pPr algn="ctr"/>
+            <a:endParaRPr/>
+          </a:p>
+        </p:txBody>
+      </p:sp>
+      <p:sp>
+        <p:nvSpPr>
+          <p:cNvPr id="5" name="Rectangle 4"/>
+          <p:cNvSpPr/>
+          <p:nvPr/>
+        </p:nvSpPr>
+        <p:spPr>
+          <a:xfrm>
+            <a:off x="365760" y="880000"/>
+            <a:ext cx="64008" cy="1691750"/>
+          </a:xfrm>
+          <a:prstGeom prst="rect">
+            <a:avLst/>
+          </a:prstGeom>
+          <a:solidFill>
+            <a:srgbClr val="9B59B6"/>
+          </a:solidFill>
+          <a:ln>
+            <a:noFill/>
+          </a:ln>
+        </p:spPr>
+        <p:style>
+          <a:lnRef idx="1">
+            <a:schemeClr val="accent1"/>
+          </a:lnRef>
+          <a:fillRef idx="3">
+            <a:schemeClr val="accent1"/>
+          </a:fillRef>
+          <a:effectRef idx="2">
+            <a:schemeClr val="accent1"/>
+          </a:effectRef>
+          <a:fontRef idx="minor">
+            <a:schemeClr val="lt1"/>
+          </a:fontRef>
+        </p:style>
+        <p:txBody>
+          <a:bodyPr rtlCol="0" anchor="ctr"/>
+          <a:lstStyle/>
+          <a:p>
+            <a:pPr algn="ctr"/>
+            <a:endParaRPr/>
+          </a:p>
+        </p:txBody>
+      </p:sp>
+      <p:sp>
+        <p:nvSpPr>
+          <p:cNvPr id="6" name="TextBox 5"/>
+          <p:cNvSpPr txBox="1"/>
+          <p:nvPr/>
+        </p:nvSpPr>
+        <p:spPr>
+          <a:xfrm>
+            <a:off x="520760" y="935000"/>
+            <a:ext cx="3879800" cy="265000"/>
+          </a:xfrm>
+          <a:prstGeom prst="rect">
+            <a:avLst/>
+          </a:prstGeom>
+          <a:noFill/>
+        </p:spPr>
+        <p:txBody>
+          <a:bodyPr wrap="square">
+            <a:spAutoFit/>
+          </a:bodyPr>
+          <a:lstStyle/>
+          <a:p>
+            <a:pPr algn="l"/>
+            <a:r>
+              <a:rPr sz="1300" b="1">
+                <a:solidFill>
+                  <a:srgbClr val="9B59B6"/>
+                </a:solidFill>
+              </a:rPr>
+              <a:t>Team &amp; Rollenverteilung</a:t>
+            </a:r>
+          </a:p>
+        </p:txBody>
+      </p:sp>
+      <p:sp>
+        <p:nvSpPr>
+          <p:cNvPr id="7" name="TextBox 6"/>
+          <p:cNvSpPr txBox="1"/>
+          <p:nvPr/>
+        </p:nvSpPr>
+        <p:spPr>
+          <a:xfrm>
+            <a:off x="520760" y="1225000"/>
+            <a:ext cx="3879800" cy="1277273"/>
+          </a:xfrm>
+          <a:prstGeom prst="rect">
+            <a:avLst/>
+          </a:prstGeom>
+          <a:noFill/>
+        </p:spPr>
+        <p:txBody>
+          <a:bodyPr wrap="square">
+            <a:spAutoFit/>
+          </a:bodyPr>
+          <a:lstStyle/>
+          <a:p>
+            <a:pPr algn="l"/>
+            <a:r>
+              <a:rPr sz="1100" b="0" dirty="0">
+                <a:solidFill>
+                  <a:srgbClr val="D0D7E8"/>
+                </a:solidFill>
+              </a:rPr>
+              <a:t>Lucas    – </a:t>
+            </a:r>
+            <a:r>
+              <a:rPr sz="1100" b="0" dirty="0" err="1">
+                <a:solidFill>
+                  <a:srgbClr val="D0D7E8"/>
+                </a:solidFill>
+              </a:rPr>
+              <a:t>Projektleitung</a:t>
+            </a:r>
+            <a:r>
+              <a:rPr sz="1100" b="0" dirty="0">
+                <a:solidFill>
+                  <a:srgbClr val="D0D7E8"/>
+                </a:solidFill>
+              </a:rPr>
+              <a:t>, </a:t>
+            </a:r>
+            <a:r>
+              <a:rPr sz="1100" b="0" dirty="0" err="1">
+                <a:solidFill>
+                  <a:srgbClr val="D0D7E8"/>
+                </a:solidFill>
+              </a:rPr>
+              <a:t>auth.py</a:t>
+            </a:r>
+            <a:r>
+              <a:rPr sz="1100" b="0" dirty="0">
+                <a:solidFill>
+                  <a:srgbClr val="D0D7E8"/>
+                </a:solidFill>
+              </a:rPr>
+              <a:t>, Testing</a:t>
+            </a:r>
+          </a:p>
+          <a:p>
+            <a:pPr algn="l"/>
+            <a:r>
+              <a:rPr sz="1100" b="0" dirty="0">
+                <a:solidFill>
+                  <a:srgbClr val="D0D7E8"/>
+                </a:solidFill>
+              </a:rPr>
+              <a:t>Jesse    – </a:t>
+            </a:r>
+            <a:r>
+              <a:rPr sz="1100" b="0" dirty="0" err="1">
+                <a:solidFill>
+                  <a:srgbClr val="D0D7E8"/>
+                </a:solidFill>
+              </a:rPr>
+              <a:t>database.py</a:t>
+            </a:r>
+            <a:r>
+              <a:rPr sz="1100" b="0" dirty="0">
+                <a:solidFill>
+                  <a:srgbClr val="D0D7E8"/>
+                </a:solidFill>
+              </a:rPr>
+              <a:t>, Pitch, Testing</a:t>
+            </a:r>
+            <a:endParaRPr lang="de-DE" sz="1100" b="0" dirty="0">
+              <a:solidFill>
+                <a:srgbClr val="D0D7E8"/>
+              </a:solidFill>
+            </a:endParaRPr>
+          </a:p>
+          <a:p>
+            <a:r>
+              <a:rPr lang="de-DE" sz="1100" dirty="0">
+                <a:solidFill>
+                  <a:srgbClr val="D0D7E8"/>
+                </a:solidFill>
+              </a:rPr>
+              <a:t>Arda     – </a:t>
+            </a:r>
+            <a:r>
+              <a:rPr lang="de-DE" sz="1100" dirty="0" err="1">
+                <a:solidFill>
+                  <a:srgbClr val="D0D7E8"/>
+                </a:solidFill>
+              </a:rPr>
+              <a:t>database.py</a:t>
+            </a:r>
+            <a:r>
+              <a:rPr lang="de-DE" sz="1100" dirty="0">
+                <a:solidFill>
+                  <a:srgbClr val="D0D7E8"/>
+                </a:solidFill>
+              </a:rPr>
+              <a:t>, </a:t>
+            </a:r>
+            <a:r>
+              <a:rPr lang="de-DE" sz="1100" dirty="0" err="1">
+                <a:solidFill>
+                  <a:srgbClr val="D0D7E8"/>
+                </a:solidFill>
+              </a:rPr>
+              <a:t>Testing</a:t>
+            </a:r>
+            <a:endParaRPr sz="1100" b="0" dirty="0">
+              <a:solidFill>
+                <a:srgbClr val="D0D7E8"/>
+              </a:solidFill>
+            </a:endParaRPr>
+          </a:p>
+          <a:p>
+            <a:pPr algn="l"/>
+            <a:r>
+              <a:rPr sz="1100" b="0" dirty="0">
+                <a:solidFill>
+                  <a:srgbClr val="D0D7E8"/>
+                </a:solidFill>
+              </a:rPr>
+              <a:t>Uilliam  – GUI (</a:t>
+            </a:r>
+            <a:r>
+              <a:rPr sz="1100" b="0" dirty="0" err="1">
+                <a:solidFill>
+                  <a:srgbClr val="D0D7E8"/>
+                </a:solidFill>
+              </a:rPr>
+              <a:t>main.py</a:t>
+            </a:r>
+            <a:r>
+              <a:rPr sz="1100" b="0" dirty="0">
+                <a:solidFill>
+                  <a:srgbClr val="D0D7E8"/>
+                </a:solidFill>
+              </a:rPr>
+              <a:t>), Design</a:t>
+            </a:r>
+          </a:p>
+          <a:p>
+            <a:pPr algn="l"/>
+            <a:r>
+              <a:rPr sz="1100" b="0" dirty="0">
+                <a:solidFill>
+                  <a:srgbClr val="D0D7E8"/>
+                </a:solidFill>
+              </a:rPr>
+              <a:t>Jakub    – </a:t>
+            </a:r>
+            <a:r>
+              <a:rPr sz="1100" b="0" dirty="0" err="1">
+                <a:solidFill>
+                  <a:srgbClr val="D0D7E8"/>
+                </a:solidFill>
+              </a:rPr>
+              <a:t>pawn_chess.py</a:t>
+            </a:r>
+            <a:endParaRPr sz="1100" b="0" dirty="0">
+              <a:solidFill>
+                <a:srgbClr val="D0D7E8"/>
+              </a:solidFill>
+            </a:endParaRPr>
+          </a:p>
+          <a:p>
+            <a:pPr algn="l"/>
+            <a:r>
+              <a:rPr sz="1100" b="0" dirty="0">
+                <a:solidFill>
+                  <a:srgbClr val="D0D7E8"/>
+                </a:solidFill>
+              </a:rPr>
+              <a:t>Niklas   – </a:t>
+            </a:r>
+            <a:r>
+              <a:rPr sz="1100" b="0" dirty="0" err="1">
+                <a:solidFill>
+                  <a:srgbClr val="D0D7E8"/>
+                </a:solidFill>
+              </a:rPr>
+              <a:t>minimax.py</a:t>
+            </a:r>
+            <a:endParaRPr sz="1100" b="0" dirty="0">
+              <a:solidFill>
+                <a:srgbClr val="D0D7E8"/>
+              </a:solidFill>
+            </a:endParaRPr>
+          </a:p>
+          <a:p>
+            <a:pPr algn="l"/>
+            <a:r>
+              <a:rPr sz="1100" b="0" dirty="0">
+                <a:solidFill>
+                  <a:srgbClr val="D0D7E8"/>
+                </a:solidFill>
+              </a:rPr>
+              <a:t>Jamie    – </a:t>
+            </a:r>
+            <a:r>
+              <a:rPr sz="1100" b="0" dirty="0" err="1">
+                <a:solidFill>
+                  <a:srgbClr val="D0D7E8"/>
+                </a:solidFill>
+              </a:rPr>
+              <a:t>tictactoe.py</a:t>
+            </a:r>
+            <a:endParaRPr sz="1100" b="0" dirty="0">
+              <a:solidFill>
+                <a:srgbClr val="D0D7E8"/>
+              </a:solidFill>
+            </a:endParaRPr>
+          </a:p>
+        </p:txBody>
+      </p:sp>
+      <p:sp>
+        <p:nvSpPr>
+          <p:cNvPr id="8" name="Rectangle 7"/>
+          <p:cNvSpPr/>
+          <p:nvPr/>
+        </p:nvSpPr>
+        <p:spPr>
+          <a:xfrm>
+            <a:off x="4846320" y="880000"/>
+            <a:ext cx="4114800" cy="1117468"/>
+          </a:xfrm>
+          <a:prstGeom prst="rect">
+            <a:avLst/>
+          </a:prstGeom>
+          <a:solidFill>
+            <a:srgbClr val="161638"/>
+          </a:solidFill>
+          <a:ln>
+            <a:noFill/>
+          </a:ln>
+        </p:spPr>
+        <p:style>
+          <a:lnRef idx="1">
+            <a:schemeClr val="accent1"/>
+          </a:lnRef>
+          <a:fillRef idx="3">
+            <a:schemeClr val="accent1"/>
+          </a:fillRef>
+          <a:effectRef idx="2">
+            <a:schemeClr val="accent1"/>
+          </a:effectRef>
+          <a:fontRef idx="minor">
+            <a:schemeClr val="lt1"/>
+          </a:fontRef>
+        </p:style>
+        <p:txBody>
+          <a:bodyPr rtlCol="0" anchor="ctr"/>
+          <a:lstStyle/>
+          <a:p>
+            <a:pPr algn="ctr"/>
+            <a:endParaRPr/>
+          </a:p>
+        </p:txBody>
+      </p:sp>
+      <p:sp>
+        <p:nvSpPr>
+          <p:cNvPr id="9" name="Rectangle 8"/>
+          <p:cNvSpPr/>
+          <p:nvPr/>
+        </p:nvSpPr>
+        <p:spPr>
+          <a:xfrm>
+            <a:off x="4846320" y="880000"/>
+            <a:ext cx="64008" cy="1117468"/>
+          </a:xfrm>
+          <a:prstGeom prst="rect">
+            <a:avLst/>
+          </a:prstGeom>
+          <a:solidFill>
+            <a:srgbClr val="2ECC71"/>
+          </a:solidFill>
+          <a:ln>
+            <a:noFill/>
+          </a:ln>
+        </p:spPr>
+        <p:style>
+          <a:lnRef idx="1">
+            <a:schemeClr val="accent1"/>
+          </a:lnRef>
+          <a:fillRef idx="3">
+            <a:schemeClr val="accent1"/>
+          </a:fillRef>
+          <a:effectRef idx="2">
+            <a:schemeClr val="accent1"/>
+          </a:effectRef>
+          <a:fontRef idx="minor">
+            <a:schemeClr val="lt1"/>
+          </a:fontRef>
+        </p:style>
+        <p:txBody>
+          <a:bodyPr rtlCol="0" anchor="ctr"/>
+          <a:lstStyle/>
+          <a:p>
+            <a:pPr algn="ctr"/>
+            <a:endParaRPr/>
+          </a:p>
+        </p:txBody>
+      </p:sp>
+      <p:sp>
+        <p:nvSpPr>
+          <p:cNvPr id="10" name="TextBox 9"/>
+          <p:cNvSpPr txBox="1"/>
+          <p:nvPr/>
+        </p:nvSpPr>
+        <p:spPr>
+          <a:xfrm>
+            <a:off x="5001320" y="935000"/>
+            <a:ext cx="3879800" cy="265000"/>
+          </a:xfrm>
+          <a:prstGeom prst="rect">
+            <a:avLst/>
+          </a:prstGeom>
+          <a:noFill/>
+        </p:spPr>
+        <p:txBody>
+          <a:bodyPr wrap="square">
+            <a:spAutoFit/>
+          </a:bodyPr>
+          <a:lstStyle/>
+          <a:p>
+            <a:pPr algn="l"/>
+            <a:r>
+              <a:rPr sz="1300" b="1">
+                <a:solidFill>
+                  <a:srgbClr val="2ECC71"/>
+                </a:solidFill>
+              </a:rPr>
+              <a:t>Highlights</a:t>
+            </a:r>
+          </a:p>
+        </p:txBody>
+      </p:sp>
+      <p:sp>
+        <p:nvSpPr>
+          <p:cNvPr id="11" name="TextBox 10"/>
+          <p:cNvSpPr txBox="1"/>
+          <p:nvPr/>
+        </p:nvSpPr>
+        <p:spPr>
+          <a:xfrm>
+            <a:off x="5001320" y="1225000"/>
+            <a:ext cx="3879800" cy="450000"/>
+          </a:xfrm>
+          <a:prstGeom prst="rect">
+            <a:avLst/>
+          </a:prstGeom>
+          <a:noFill/>
+        </p:spPr>
+        <p:txBody>
+          <a:bodyPr wrap="square">
+            <a:spAutoFit/>
+          </a:bodyPr>
+          <a:lstStyle/>
+          <a:p>
+            <a:pPr algn="l"/>
+            <a:r>
+              <a:rPr sz="1100" b="0" dirty="0" err="1">
+                <a:solidFill>
+                  <a:srgbClr val="2ECC71"/>
+                </a:solidFill>
+              </a:rPr>
+              <a:t>Spielunabhängige</a:t>
+            </a:r>
+            <a:r>
+              <a:rPr sz="1100" b="0" dirty="0">
+                <a:solidFill>
+                  <a:srgbClr val="2ECC71"/>
+                </a:solidFill>
+              </a:rPr>
+              <a:t> </a:t>
+            </a:r>
+            <a:r>
+              <a:rPr sz="1100" b="0" dirty="0" err="1">
+                <a:solidFill>
+                  <a:srgbClr val="2ECC71"/>
+                </a:solidFill>
+              </a:rPr>
+              <a:t>MiniMax-Schnittstelle</a:t>
+            </a:r>
+            <a:r>
+              <a:rPr sz="1100" b="0" dirty="0">
+                <a:solidFill>
+                  <a:srgbClr val="2ECC71"/>
+                </a:solidFill>
+              </a:rPr>
+              <a:t>  –  </a:t>
+            </a:r>
+            <a:r>
+              <a:rPr sz="1100" b="0" dirty="0" err="1">
+                <a:solidFill>
+                  <a:srgbClr val="2ECC71"/>
+                </a:solidFill>
+              </a:rPr>
+              <a:t>eine</a:t>
+            </a:r>
+            <a:r>
+              <a:rPr sz="1100" b="0" dirty="0">
+                <a:solidFill>
+                  <a:srgbClr val="2ECC71"/>
+                </a:solidFill>
+              </a:rPr>
+              <a:t> KI-Engine für alle </a:t>
+            </a:r>
+            <a:r>
+              <a:rPr sz="1100" b="0" dirty="0" err="1">
+                <a:solidFill>
+                  <a:srgbClr val="2ECC71"/>
+                </a:solidFill>
+              </a:rPr>
+              <a:t>Spiele</a:t>
+            </a:r>
+            <a:endParaRPr sz="1100" b="0" dirty="0">
+              <a:solidFill>
+                <a:srgbClr val="2ECC71"/>
+              </a:solidFill>
+            </a:endParaRPr>
+          </a:p>
+          <a:p>
+            <a:pPr algn="l"/>
+            <a:r>
+              <a:rPr sz="1100" b="0" dirty="0" err="1">
+                <a:solidFill>
+                  <a:srgbClr val="D0D7E8"/>
+                </a:solidFill>
+              </a:rPr>
+              <a:t>Teamarbeit</a:t>
+            </a:r>
+            <a:r>
+              <a:rPr sz="1100" b="0" dirty="0">
+                <a:solidFill>
+                  <a:srgbClr val="D0D7E8"/>
+                </a:solidFill>
+              </a:rPr>
+              <a:t> </a:t>
+            </a:r>
+            <a:r>
+              <a:rPr sz="1100" b="0" dirty="0" err="1">
+                <a:solidFill>
+                  <a:srgbClr val="D0D7E8"/>
+                </a:solidFill>
+              </a:rPr>
+              <a:t>reibungslos</a:t>
+            </a:r>
+            <a:r>
+              <a:rPr sz="1100" b="0" dirty="0">
+                <a:solidFill>
+                  <a:srgbClr val="D0D7E8"/>
+                </a:solidFill>
+              </a:rPr>
+              <a:t> dank </a:t>
+            </a:r>
+            <a:r>
+              <a:rPr sz="1100" b="0" dirty="0" err="1">
+                <a:solidFill>
+                  <a:srgbClr val="D0D7E8"/>
+                </a:solidFill>
+              </a:rPr>
+              <a:t>klarem</a:t>
+            </a:r>
+            <a:r>
+              <a:rPr sz="1100" b="0" dirty="0">
+                <a:solidFill>
+                  <a:srgbClr val="D0D7E8"/>
+                </a:solidFill>
+              </a:rPr>
+              <a:t> </a:t>
+            </a:r>
+            <a:r>
+              <a:rPr sz="1100" b="0" dirty="0" err="1">
+                <a:solidFill>
+                  <a:srgbClr val="D0D7E8"/>
+                </a:solidFill>
+              </a:rPr>
+              <a:t>Pflichtenheft</a:t>
+            </a:r>
+            <a:r>
+              <a:rPr sz="1100" b="0" dirty="0">
+                <a:solidFill>
+                  <a:srgbClr val="D0D7E8"/>
+                </a:solidFill>
+              </a:rPr>
+              <a:t> und </a:t>
+            </a:r>
+            <a:r>
+              <a:rPr sz="1100" b="0" dirty="0" err="1">
+                <a:solidFill>
+                  <a:srgbClr val="D0D7E8"/>
+                </a:solidFill>
+              </a:rPr>
+              <a:t>gegenseitiger</a:t>
+            </a:r>
+            <a:r>
+              <a:rPr sz="1100" b="0" dirty="0">
+                <a:solidFill>
+                  <a:srgbClr val="D0D7E8"/>
+                </a:solidFill>
+              </a:rPr>
+              <a:t> </a:t>
+            </a:r>
+            <a:r>
+              <a:rPr sz="1100" b="0" dirty="0" err="1">
+                <a:solidFill>
+                  <a:srgbClr val="D0D7E8"/>
+                </a:solidFill>
+              </a:rPr>
+              <a:t>Hilfe</a:t>
+            </a:r>
+            <a:endParaRPr sz="1100" b="0" dirty="0">
+              <a:solidFill>
+                <a:srgbClr val="D0D7E8"/>
+              </a:solidFill>
+            </a:endParaRPr>
+          </a:p>
+        </p:txBody>
+      </p:sp>
+      <p:sp>
+        <p:nvSpPr>
+          <p:cNvPr id="12" name="Rectangle 11"/>
+          <p:cNvSpPr/>
+          <p:nvPr/>
+        </p:nvSpPr>
+        <p:spPr>
+          <a:xfrm>
+            <a:off x="4846320" y="2117468"/>
+            <a:ext cx="4114800" cy="830000"/>
+          </a:xfrm>
+          <a:prstGeom prst="rect">
+            <a:avLst/>
+          </a:prstGeom>
+          <a:solidFill>
+            <a:srgbClr val="161638"/>
+          </a:solidFill>
+          <a:ln>
+            <a:noFill/>
+          </a:ln>
+        </p:spPr>
+        <p:style>
+          <a:lnRef idx="1">
+            <a:schemeClr val="accent1"/>
+          </a:lnRef>
+          <a:fillRef idx="3">
+            <a:schemeClr val="accent1"/>
+          </a:fillRef>
+          <a:effectRef idx="2">
+            <a:schemeClr val="accent1"/>
+          </a:effectRef>
+          <a:fontRef idx="minor">
+            <a:schemeClr val="lt1"/>
+          </a:fontRef>
+        </p:style>
+        <p:txBody>
+          <a:bodyPr rtlCol="0" anchor="ctr"/>
+          <a:lstStyle/>
+          <a:p>
+            <a:pPr algn="ctr"/>
+            <a:endParaRPr/>
+          </a:p>
+        </p:txBody>
+      </p:sp>
+      <p:sp>
+        <p:nvSpPr>
+          <p:cNvPr id="13" name="Rectangle 12"/>
+          <p:cNvSpPr/>
+          <p:nvPr/>
+        </p:nvSpPr>
+        <p:spPr>
+          <a:xfrm>
+            <a:off x="4846320" y="2117468"/>
+            <a:ext cx="64008" cy="830000"/>
+          </a:xfrm>
+          <a:prstGeom prst="rect">
+            <a:avLst/>
+          </a:prstGeom>
+          <a:solidFill>
+            <a:srgbClr val="F39C12"/>
+          </a:solidFill>
+          <a:ln>
+            <a:noFill/>
+          </a:ln>
+        </p:spPr>
+        <p:style>
+          <a:lnRef idx="1">
+            <a:schemeClr val="accent1"/>
+          </a:lnRef>
+          <a:fillRef idx="3">
+            <a:schemeClr val="accent1"/>
+          </a:fillRef>
+          <a:effectRef idx="2">
+            <a:schemeClr val="accent1"/>
+          </a:effectRef>
+          <a:fontRef idx="minor">
+            <a:schemeClr val="lt1"/>
+          </a:fontRef>
+        </p:style>
+        <p:txBody>
+          <a:bodyPr rtlCol="0" anchor="ctr"/>
+          <a:lstStyle/>
+          <a:p>
+            <a:pPr algn="ctr"/>
+            <a:endParaRPr/>
+          </a:p>
+        </p:txBody>
+      </p:sp>
+      <p:sp>
+        <p:nvSpPr>
+          <p:cNvPr id="14" name="TextBox 13"/>
+          <p:cNvSpPr txBox="1"/>
+          <p:nvPr/>
+        </p:nvSpPr>
+        <p:spPr>
+          <a:xfrm>
+            <a:off x="5001320" y="2172468"/>
+            <a:ext cx="3879800" cy="265000"/>
+          </a:xfrm>
+          <a:prstGeom prst="rect">
+            <a:avLst/>
+          </a:prstGeom>
+          <a:noFill/>
+        </p:spPr>
+        <p:txBody>
+          <a:bodyPr wrap="square">
+            <a:spAutoFit/>
+          </a:bodyPr>
+          <a:lstStyle/>
+          <a:p>
+            <a:pPr algn="l"/>
+            <a:r>
+              <a:rPr sz="1300" b="1">
+                <a:solidFill>
+                  <a:srgbClr val="F39C12"/>
+                </a:solidFill>
+              </a:rPr>
+              <a:t>Lessons Learnt</a:t>
+            </a:r>
+          </a:p>
+        </p:txBody>
+      </p:sp>
+      <p:sp>
+        <p:nvSpPr>
+          <p:cNvPr id="15" name="TextBox 14"/>
+          <p:cNvSpPr txBox="1"/>
+          <p:nvPr/>
+        </p:nvSpPr>
+        <p:spPr>
+          <a:xfrm>
+            <a:off x="5001320" y="2462468"/>
+            <a:ext cx="3879800" cy="430000"/>
+          </a:xfrm>
+          <a:prstGeom prst="rect">
+            <a:avLst/>
+          </a:prstGeom>
+          <a:noFill/>
+        </p:spPr>
+        <p:txBody>
+          <a:bodyPr wrap="square">
+            <a:spAutoFit/>
+          </a:bodyPr>
+          <a:lstStyle/>
+          <a:p>
+            <a:pPr algn="l"/>
+            <a:r>
+              <a:rPr sz="1100" b="0">
+                <a:solidFill>
+                  <a:srgbClr val="F39C12"/>
+                </a:solidFill>
+              </a:rPr>
+              <a:t>Kanban-Board früher einsetzen</a:t>
+            </a:r>
+          </a:p>
+          <a:p>
+            <a:pPr algn="l"/>
+            <a:r>
+              <a:rPr sz="1100" b="0">
+                <a:solidFill>
+                  <a:srgbClr val="F39C12"/>
+                </a:solidFill>
+              </a:rPr>
+              <a:t>Schnittstellen detaillierter im Pflichtenheft definieren</a:t>
+            </a:r>
+          </a:p>
+        </p:txBody>
+      </p:sp>
+      <p:sp>
+        <p:nvSpPr>
+          <p:cNvPr id="16" name="Rectangle 15"/>
+          <p:cNvSpPr/>
+          <p:nvPr/>
+        </p:nvSpPr>
+        <p:spPr>
+          <a:xfrm>
+            <a:off x="365760" y="2743082"/>
+            <a:ext cx="4114800" cy="1324658"/>
+          </a:xfrm>
+          <a:prstGeom prst="rect">
+            <a:avLst/>
+          </a:prstGeom>
+          <a:solidFill>
+            <a:srgbClr val="161638"/>
+          </a:solidFill>
+          <a:ln>
+            <a:noFill/>
+          </a:ln>
+        </p:spPr>
+        <p:style>
+          <a:lnRef idx="1">
+            <a:schemeClr val="accent1"/>
+          </a:lnRef>
+          <a:fillRef idx="3">
+            <a:schemeClr val="accent1"/>
+          </a:fillRef>
+          <a:effectRef idx="2">
+            <a:schemeClr val="accent1"/>
+          </a:effectRef>
+          <a:fontRef idx="minor">
+            <a:schemeClr val="lt1"/>
+          </a:fontRef>
+        </p:style>
+        <p:txBody>
+          <a:bodyPr rtlCol="0" anchor="ctr"/>
+          <a:lstStyle/>
+          <a:p>
+            <a:pPr algn="ctr"/>
+            <a:endParaRPr/>
+          </a:p>
+        </p:txBody>
+      </p:sp>
+      <p:sp>
+        <p:nvSpPr>
+          <p:cNvPr id="17" name="Rectangle 16"/>
+          <p:cNvSpPr/>
+          <p:nvPr/>
+        </p:nvSpPr>
+        <p:spPr>
+          <a:xfrm>
+            <a:off x="365760" y="2743082"/>
+            <a:ext cx="64008" cy="1324658"/>
+          </a:xfrm>
+          <a:prstGeom prst="rect">
+            <a:avLst/>
+          </a:prstGeom>
+          <a:solidFill>
+            <a:srgbClr val="4472C4"/>
+          </a:solidFill>
+          <a:ln>
+            <a:noFill/>
+          </a:ln>
+        </p:spPr>
+        <p:style>
+          <a:lnRef idx="1">
+            <a:schemeClr val="accent1"/>
+          </a:lnRef>
+          <a:fillRef idx="3">
+            <a:schemeClr val="accent1"/>
+          </a:fillRef>
+          <a:effectRef idx="2">
+            <a:schemeClr val="accent1"/>
+          </a:effectRef>
+          <a:fontRef idx="minor">
+            <a:schemeClr val="lt1"/>
+          </a:fontRef>
+        </p:style>
+        <p:txBody>
+          <a:bodyPr rtlCol="0" anchor="ctr"/>
+          <a:lstStyle/>
+          <a:p>
+            <a:pPr algn="ctr"/>
+            <a:endParaRPr/>
+          </a:p>
+        </p:txBody>
+      </p:sp>
+      <p:sp>
+        <p:nvSpPr>
+          <p:cNvPr id="18" name="TextBox 17"/>
+          <p:cNvSpPr txBox="1"/>
+          <p:nvPr/>
+        </p:nvSpPr>
+        <p:spPr>
+          <a:xfrm>
+            <a:off x="515264" y="2814968"/>
+            <a:ext cx="3879800" cy="265000"/>
+          </a:xfrm>
+          <a:prstGeom prst="rect">
+            <a:avLst/>
+          </a:prstGeom>
+          <a:noFill/>
+        </p:spPr>
+        <p:txBody>
+          <a:bodyPr wrap="square">
+            <a:spAutoFit/>
+          </a:bodyPr>
+          <a:lstStyle/>
+          <a:p>
+            <a:pPr algn="l"/>
+            <a:r>
+              <a:rPr sz="1300" b="1" dirty="0" err="1">
+                <a:solidFill>
+                  <a:srgbClr val="4472C4"/>
+                </a:solidFill>
+              </a:rPr>
+              <a:t>Projektzeitraum</a:t>
+            </a:r>
+            <a:endParaRPr sz="1300" b="1" dirty="0">
+              <a:solidFill>
+                <a:srgbClr val="4472C4"/>
+              </a:solidFill>
+            </a:endParaRPr>
+          </a:p>
+        </p:txBody>
+      </p:sp>
+      <p:sp>
+        <p:nvSpPr>
+          <p:cNvPr id="19" name="TextBox 18"/>
+          <p:cNvSpPr txBox="1"/>
+          <p:nvPr/>
+        </p:nvSpPr>
+        <p:spPr>
+          <a:xfrm>
+            <a:off x="515264" y="3104968"/>
+            <a:ext cx="3879800" cy="500000"/>
+          </a:xfrm>
+          <a:prstGeom prst="rect">
+            <a:avLst/>
+          </a:prstGeom>
+          <a:noFill/>
+        </p:spPr>
+        <p:txBody>
+          <a:bodyPr wrap="square">
+            <a:spAutoFit/>
+          </a:bodyPr>
+          <a:lstStyle/>
+          <a:p>
+            <a:pPr algn="l"/>
+            <a:r>
+              <a:rPr sz="1100" b="0" dirty="0">
+                <a:solidFill>
+                  <a:srgbClr val="D0D7E8"/>
+                </a:solidFill>
+              </a:rPr>
+              <a:t>Phase 1:  20.04.–24.04.   </a:t>
+            </a:r>
+            <a:r>
+              <a:rPr sz="1100" b="0" dirty="0" err="1">
+                <a:solidFill>
+                  <a:srgbClr val="D0D7E8"/>
+                </a:solidFill>
+              </a:rPr>
+              <a:t>Analyse</a:t>
+            </a:r>
+            <a:r>
+              <a:rPr sz="1100" b="0" dirty="0">
+                <a:solidFill>
+                  <a:srgbClr val="D0D7E8"/>
+                </a:solidFill>
+              </a:rPr>
+              <a:t> &amp; </a:t>
+            </a:r>
+            <a:r>
+              <a:rPr sz="1100" b="0" dirty="0" err="1">
+                <a:solidFill>
+                  <a:srgbClr val="D0D7E8"/>
+                </a:solidFill>
+              </a:rPr>
+              <a:t>Planung</a:t>
+            </a:r>
+            <a:endParaRPr sz="1100" b="0" dirty="0">
+              <a:solidFill>
+                <a:srgbClr val="D0D7E8"/>
+              </a:solidFill>
+            </a:endParaRPr>
+          </a:p>
+          <a:p>
+            <a:pPr algn="l"/>
+            <a:r>
+              <a:rPr sz="1100" b="0" dirty="0">
+                <a:solidFill>
+                  <a:srgbClr val="D0D7E8"/>
+                </a:solidFill>
+              </a:rPr>
+              <a:t>Phase 2:  27.04.–04.05.   </a:t>
+            </a:r>
+            <a:r>
+              <a:rPr sz="1100" b="0" dirty="0" err="1">
+                <a:solidFill>
+                  <a:srgbClr val="D0D7E8"/>
+                </a:solidFill>
+              </a:rPr>
+              <a:t>Implementierung</a:t>
+            </a:r>
+            <a:r>
+              <a:rPr sz="1100" b="0" dirty="0">
+                <a:solidFill>
+                  <a:srgbClr val="D0D7E8"/>
+                </a:solidFill>
+              </a:rPr>
+              <a:t> &amp; Test</a:t>
+            </a:r>
+          </a:p>
+          <a:p>
+            <a:pPr algn="l"/>
+            <a:r>
+              <a:rPr sz="1100" b="0" dirty="0" err="1">
+                <a:solidFill>
+                  <a:srgbClr val="D0D7E8"/>
+                </a:solidFill>
+              </a:rPr>
+              <a:t>Gesamtdauer</a:t>
+            </a:r>
+            <a:r>
+              <a:rPr sz="1100" b="0" dirty="0">
+                <a:solidFill>
+                  <a:srgbClr val="D0D7E8"/>
+                </a:solidFill>
+              </a:rPr>
+              <a:t>: ~2 </a:t>
+            </a:r>
+            <a:r>
+              <a:rPr sz="1100" b="0" dirty="0" err="1">
+                <a:solidFill>
+                  <a:srgbClr val="D0D7E8"/>
+                </a:solidFill>
+              </a:rPr>
+              <a:t>Wochen</a:t>
+            </a:r>
+            <a:r>
+              <a:rPr sz="1100" b="0" dirty="0">
+                <a:solidFill>
+                  <a:srgbClr val="D0D7E8"/>
+                </a:solidFill>
+              </a:rPr>
+              <a:t> </a:t>
+            </a:r>
+            <a:r>
+              <a:rPr sz="1100" b="0" dirty="0" err="1">
+                <a:solidFill>
+                  <a:srgbClr val="D0D7E8"/>
+                </a:solidFill>
+              </a:rPr>
+              <a:t>Vollzeit</a:t>
+            </a:r>
+            <a:r>
+              <a:rPr sz="1100" b="0" dirty="0">
+                <a:solidFill>
+                  <a:srgbClr val="D0D7E8"/>
+                </a:solidFill>
+              </a:rPr>
+              <a:t>  ·  6 </a:t>
+            </a:r>
+            <a:r>
+              <a:rPr sz="1100" b="0" dirty="0" err="1">
+                <a:solidFill>
+                  <a:srgbClr val="D0D7E8"/>
+                </a:solidFill>
+              </a:rPr>
+              <a:t>Personen</a:t>
+            </a:r>
+            <a:endParaRPr sz="1100" b="0" dirty="0">
+              <a:solidFill>
+                <a:srgbClr val="D0D7E8"/>
+              </a:solidFill>
+            </a:endParaRPr>
+          </a:p>
+        </p:txBody>
+      </p:sp>
+      <p:sp>
+        <p:nvSpPr>
+          <p:cNvPr id="20" name="Rectangle 19"/>
+          <p:cNvSpPr/>
+          <p:nvPr/>
+        </p:nvSpPr>
+        <p:spPr>
+          <a:xfrm>
+            <a:off x="4846320" y="3067468"/>
+            <a:ext cx="4114800" cy="1000272"/>
+          </a:xfrm>
+          <a:prstGeom prst="rect">
+            <a:avLst/>
+          </a:prstGeom>
+          <a:solidFill>
+            <a:srgbClr val="161638"/>
+          </a:solidFill>
+          <a:ln>
+            <a:noFill/>
+          </a:ln>
+        </p:spPr>
+        <p:style>
+          <a:lnRef idx="1">
+            <a:schemeClr val="accent1"/>
+          </a:lnRef>
+          <a:fillRef idx="3">
+            <a:schemeClr val="accent1"/>
+          </a:fillRef>
+          <a:effectRef idx="2">
+            <a:schemeClr val="accent1"/>
+          </a:effectRef>
+          <a:fontRef idx="minor">
+            <a:schemeClr val="lt1"/>
+          </a:fontRef>
+        </p:style>
+        <p:txBody>
+          <a:bodyPr rtlCol="0" anchor="ctr"/>
+          <a:lstStyle/>
+          <a:p>
+            <a:pPr algn="ctr"/>
+            <a:endParaRPr/>
+          </a:p>
+        </p:txBody>
+      </p:sp>
+      <p:sp>
+        <p:nvSpPr>
+          <p:cNvPr id="21" name="Rectangle 20"/>
+          <p:cNvSpPr/>
+          <p:nvPr/>
+        </p:nvSpPr>
+        <p:spPr>
+          <a:xfrm>
+            <a:off x="4846320" y="3067468"/>
+            <a:ext cx="64008" cy="1000272"/>
+          </a:xfrm>
+          <a:prstGeom prst="rect">
+            <a:avLst/>
+          </a:prstGeom>
+          <a:solidFill>
+            <a:srgbClr val="8A92A4"/>
+          </a:solidFill>
+          <a:ln>
+            <a:noFill/>
+          </a:ln>
+        </p:spPr>
+        <p:style>
+          <a:lnRef idx="1">
+            <a:schemeClr val="accent1"/>
+          </a:lnRef>
+          <a:fillRef idx="3">
+            <a:schemeClr val="accent1"/>
+          </a:fillRef>
+          <a:effectRef idx="2">
+            <a:schemeClr val="accent1"/>
+          </a:effectRef>
+          <a:fontRef idx="minor">
+            <a:schemeClr val="lt1"/>
+          </a:fontRef>
+        </p:style>
+        <p:txBody>
+          <a:bodyPr rtlCol="0" anchor="ctr"/>
+          <a:lstStyle/>
+          <a:p>
+            <a:pPr algn="ctr"/>
+            <a:endParaRPr/>
+          </a:p>
+        </p:txBody>
+      </p:sp>
+      <p:sp>
+        <p:nvSpPr>
+          <p:cNvPr id="22" name="TextBox 21"/>
+          <p:cNvSpPr txBox="1"/>
+          <p:nvPr/>
+        </p:nvSpPr>
+        <p:spPr>
+          <a:xfrm>
+            <a:off x="5001320" y="3122468"/>
+            <a:ext cx="3879800" cy="265000"/>
+          </a:xfrm>
+          <a:prstGeom prst="rect">
+            <a:avLst/>
+          </a:prstGeom>
+          <a:noFill/>
+        </p:spPr>
+        <p:txBody>
+          <a:bodyPr wrap="square">
+            <a:spAutoFit/>
+          </a:bodyPr>
+          <a:lstStyle/>
+          <a:p>
+            <a:pPr algn="l"/>
+            <a:r>
+              <a:rPr sz="1300" b="1">
+                <a:solidFill>
+                  <a:srgbClr val="8A92A4"/>
+                </a:solidFill>
+              </a:rPr>
+              <a:t>Ausblick</a:t>
+            </a:r>
+          </a:p>
+        </p:txBody>
+      </p:sp>
+      <p:sp>
+        <p:nvSpPr>
+          <p:cNvPr id="23" name="TextBox 22"/>
+          <p:cNvSpPr txBox="1"/>
+          <p:nvPr/>
+        </p:nvSpPr>
+        <p:spPr>
+          <a:xfrm>
+            <a:off x="5001320" y="3412468"/>
+            <a:ext cx="3879800" cy="500000"/>
+          </a:xfrm>
+          <a:prstGeom prst="rect">
+            <a:avLst/>
+          </a:prstGeom>
+          <a:noFill/>
+        </p:spPr>
+        <p:txBody>
+          <a:bodyPr wrap="square">
+            <a:spAutoFit/>
+          </a:bodyPr>
+          <a:lstStyle/>
+          <a:p>
+            <a:pPr algn="l"/>
+            <a:r>
+              <a:rPr sz="1100" b="0">
+                <a:solidFill>
+                  <a:srgbClr val="D0D7E8"/>
+                </a:solidFill>
+              </a:rPr>
+              <a:t>Dame als drittes Spiel (PF-K03)</a:t>
+            </a:r>
+          </a:p>
+          <a:p>
+            <a:pPr algn="l"/>
+            <a:r>
+              <a:rPr sz="1100" b="0">
+                <a:solidFill>
+                  <a:srgbClr val="D0D7E8"/>
+                </a:solidFill>
+              </a:rPr>
+              <a:t>Sprach-Auswahl im Menü weiter ausbauen</a:t>
+            </a:r>
+          </a:p>
+          <a:p>
+            <a:pPr algn="l"/>
+            <a:r>
+              <a:rPr sz="1100" b="0">
+                <a:solidFill>
+                  <a:srgbClr val="D0D7E8"/>
+                </a:solidFill>
+              </a:rPr>
+              <a:t>Kanban-Board für Folgeprojekte</a:t>
+            </a:r>
+          </a:p>
+        </p:txBody>
+      </p:sp>
+    </p:spTree>
+  </p:cSld>
+  <p:clrMapOvr>
+    <a:masterClrMapping/>
+  </p:clrMapOvr>
+</p:sld>
+</file>
+
+<file path=ppt/slides/slide22.xml><?xml version="1.0" encoding="utf-8"?>
+<p:sld xmlns:a="http://schemas.openxmlformats.org/drawingml/2006/main" xmlns:r="http://schemas.openxmlformats.org/officeDocument/2006/relationships" xmlns:p="http://schemas.openxmlformats.org/presentationml/2006/main">
+  <p:cSld>
+    <p:bg>
+      <p:bgPr>
+        <a:solidFill>
+          <a:srgbClr val="0D0D1A"/>
+        </a:solidFill>
+        <a:effectLst/>
+      </p:bgPr>
+    </p:bg>
+    <p:spTree>
+      <p:nvGrpSpPr>
+        <p:cNvPr id="1" name=""/>
+        <p:cNvGrpSpPr/>
+        <p:nvPr/>
+      </p:nvGrpSpPr>
+      <p:grpSpPr>
+        <a:xfrm>
+          <a:off x="0" y="0"/>
+          <a:ext cx="0" cy="0"/>
+          <a:chOff x="0" y="0"/>
+          <a:chExt cx="0" cy="0"/>
+        </a:xfrm>
+      </p:grpSpPr>
+      <p:sp>
+        <p:nvSpPr>
+          <p:cNvPr id="2" name="Rectangle 1"/>
+          <p:cNvSpPr/>
+          <p:nvPr/>
+        </p:nvSpPr>
+        <p:spPr>
+          <a:xfrm>
+            <a:off x="0" y="0"/>
+            <a:ext cx="9144000" cy="90000"/>
+          </a:xfrm>
+          <a:prstGeom prst="rect">
+            <a:avLst/>
+          </a:prstGeom>
+          <a:solidFill>
+            <a:srgbClr val="161638"/>
+          </a:solidFill>
+          <a:ln>
+            <a:noFill/>
+          </a:ln>
+        </p:spPr>
+        <p:style>
+          <a:lnRef idx="1">
+            <a:schemeClr val="accent1"/>
+          </a:lnRef>
+          <a:fillRef idx="3">
+            <a:schemeClr val="accent1"/>
+          </a:fillRef>
+          <a:effectRef idx="2">
+            <a:schemeClr val="accent1"/>
+          </a:effectRef>
+          <a:fontRef idx="minor">
+            <a:schemeClr val="lt1"/>
+          </a:fontRef>
+        </p:style>
+        <p:txBody>
+          <a:bodyPr rtlCol="0" anchor="ctr"/>
+          <a:lstStyle/>
+          <a:p>
+            <a:pPr algn="ctr"/>
+            <a:endParaRPr/>
+          </a:p>
+        </p:txBody>
+      </p:sp>
+      <p:sp>
+        <p:nvSpPr>
+          <p:cNvPr id="3" name="TextBox 2"/>
+          <p:cNvSpPr txBox="1"/>
+          <p:nvPr/>
+        </p:nvSpPr>
+        <p:spPr>
+          <a:xfrm>
+            <a:off x="0" y="1100000"/>
+            <a:ext cx="9144000" cy="700000"/>
+          </a:xfrm>
+          <a:prstGeom prst="rect">
+            <a:avLst/>
+          </a:prstGeom>
+          <a:noFill/>
+        </p:spPr>
+        <p:txBody>
+          <a:bodyPr wrap="square">
+            <a:spAutoFit/>
+          </a:bodyPr>
+          <a:lstStyle/>
+          <a:p>
+            <a:pPr algn="ctr"/>
+            <a:r>
+              <a:rPr sz="5400" b="1">
+                <a:solidFill>
+                  <a:srgbClr val="FFFFFF"/>
+                </a:solidFill>
+              </a:rPr>
+              <a:t>HHBKTendo</a:t>
+            </a:r>
+          </a:p>
+        </p:txBody>
+      </p:sp>
+      <p:sp>
+        <p:nvSpPr>
+          <p:cNvPr id="4" name="Rectangle 3"/>
+          <p:cNvSpPr/>
+          <p:nvPr/>
+        </p:nvSpPr>
+        <p:spPr>
+          <a:xfrm>
+            <a:off x="3372000" y="1900000"/>
+            <a:ext cx="2400000" cy="8000"/>
+          </a:xfrm>
+          <a:prstGeom prst="rect">
+            <a:avLst/>
+          </a:prstGeom>
+          <a:solidFill>
+            <a:srgbClr val="E94560"/>
+          </a:solidFill>
+          <a:ln>
+            <a:noFill/>
+          </a:ln>
+        </p:spPr>
+        <p:style>
+          <a:lnRef idx="1">
+            <a:schemeClr val="accent1"/>
+          </a:lnRef>
+          <a:fillRef idx="3">
+            <a:schemeClr val="accent1"/>
+          </a:fillRef>
+          <a:effectRef idx="2">
+            <a:schemeClr val="accent1"/>
+          </a:effectRef>
+          <a:fontRef idx="minor">
+            <a:schemeClr val="lt1"/>
+          </a:fontRef>
+        </p:style>
+        <p:txBody>
+          <a:bodyPr rtlCol="0" anchor="ctr"/>
+          <a:lstStyle/>
+          <a:p>
+            <a:pPr algn="ctr"/>
+            <a:endParaRPr/>
+          </a:p>
+        </p:txBody>
+      </p:sp>
+      <p:sp>
+        <p:nvSpPr>
+          <p:cNvPr id="5" name="TextBox 4"/>
+          <p:cNvSpPr txBox="1"/>
+          <p:nvPr/>
+        </p:nvSpPr>
+        <p:spPr>
+          <a:xfrm>
+            <a:off x="0" y="1970000"/>
+            <a:ext cx="9144000" cy="350000"/>
+          </a:xfrm>
+          <a:prstGeom prst="rect">
+            <a:avLst/>
+          </a:prstGeom>
+          <a:noFill/>
+        </p:spPr>
+        <p:txBody>
+          <a:bodyPr wrap="square">
+            <a:spAutoFit/>
+          </a:bodyPr>
+          <a:lstStyle/>
+          <a:p>
+            <a:pPr algn="ctr"/>
+            <a:r>
+              <a:rPr sz="1600" b="0">
+                <a:solidFill>
+                  <a:srgbClr val="E94560"/>
+                </a:solidFill>
+              </a:rPr>
+              <a:t>Spielesammlung – Strategiespiele mit MiniMax-KI</a:t>
+            </a:r>
+          </a:p>
+        </p:txBody>
+      </p:sp>
+      <p:sp>
+        <p:nvSpPr>
+          <p:cNvPr id="6" name="TextBox 5"/>
+          <p:cNvSpPr txBox="1"/>
+          <p:nvPr/>
+        </p:nvSpPr>
+        <p:spPr>
+          <a:xfrm>
+            <a:off x="0" y="2520000"/>
+            <a:ext cx="9144000" cy="500000"/>
+          </a:xfrm>
+          <a:prstGeom prst="rect">
+            <a:avLst/>
+          </a:prstGeom>
+          <a:noFill/>
+        </p:spPr>
+        <p:txBody>
+          <a:bodyPr wrap="square">
+            <a:spAutoFit/>
+          </a:bodyPr>
+          <a:lstStyle/>
+          <a:p>
+            <a:pPr algn="ctr"/>
+            <a:r>
+              <a:rPr sz="2200" b="1">
+                <a:solidFill>
+                  <a:srgbClr val="D0D7E8"/>
+                </a:solidFill>
+              </a:rPr>
+              <a:t>Vielen Dank für eure Aufmerksamkeit!</a:t>
+            </a:r>
+          </a:p>
+        </p:txBody>
+      </p:sp>
+      <p:sp>
+        <p:nvSpPr>
+          <p:cNvPr id="7" name="TextBox 6"/>
+          <p:cNvSpPr txBox="1"/>
+          <p:nvPr/>
+        </p:nvSpPr>
+        <p:spPr>
+          <a:xfrm>
+            <a:off x="0" y="3150000"/>
+            <a:ext cx="9144000" cy="280000"/>
+          </a:xfrm>
+          <a:prstGeom prst="rect">
+            <a:avLst/>
+          </a:prstGeom>
+          <a:noFill/>
+        </p:spPr>
+        <p:txBody>
+          <a:bodyPr wrap="square">
+            <a:spAutoFit/>
+          </a:bodyPr>
+          <a:lstStyle/>
+          <a:p>
+            <a:pPr algn="ctr"/>
+            <a:r>
+              <a:rPr sz="1300" b="0">
+                <a:solidFill>
+                  <a:srgbClr val="8A92A4"/>
+                </a:solidFill>
+              </a:rPr>
+              <a:t>Lucas  ·  Jesse  ·  Uilliam  ·  Jakub  ·  Niklas  ·  Jamie</a:t>
+            </a:r>
+          </a:p>
+        </p:txBody>
+      </p:sp>
+      <p:sp>
+        <p:nvSpPr>
+          <p:cNvPr id="8" name="TextBox 7"/>
+          <p:cNvSpPr txBox="1"/>
+          <p:nvPr/>
+        </p:nvSpPr>
+        <p:spPr>
+          <a:xfrm>
+            <a:off x="0" y="3530000"/>
+            <a:ext cx="9144000" cy="260000"/>
+          </a:xfrm>
+          <a:prstGeom prst="rect">
+            <a:avLst/>
+          </a:prstGeom>
+          <a:noFill/>
+        </p:spPr>
+        <p:txBody>
+          <a:bodyPr wrap="square">
+            <a:spAutoFit/>
+          </a:bodyPr>
+          <a:lstStyle/>
+          <a:p>
+            <a:pPr algn="ctr"/>
+            <a:r>
+              <a:rPr sz="1100" b="0">
+                <a:solidFill>
+                  <a:srgbClr val="4A5680"/>
+                </a:solidFill>
+              </a:rPr>
+              <a:t>Classic Games. Real Intelligence.</a:t>
+            </a:r>
+          </a:p>
+        </p:txBody>
+      </p:sp>
+      <p:sp>
+        <p:nvSpPr>
+          <p:cNvPr id="9" name="Rectangle 8"/>
+          <p:cNvSpPr/>
+          <p:nvPr/>
+        </p:nvSpPr>
+        <p:spPr>
+          <a:xfrm>
+            <a:off x="0" y="4480500"/>
+            <a:ext cx="9144000" cy="663000"/>
+          </a:xfrm>
+          <a:prstGeom prst="rect">
+            <a:avLst/>
+          </a:prstGeom>
+          <a:solidFill>
+            <a:srgbClr val="161638"/>
+          </a:solidFill>
+          <a:ln>
+            <a:noFill/>
+          </a:ln>
+        </p:spPr>
+        <p:style>
+          <a:lnRef idx="1">
+            <a:schemeClr val="accent1"/>
+          </a:lnRef>
+          <a:fillRef idx="3">
+            <a:schemeClr val="accent1"/>
+          </a:fillRef>
+          <a:effectRef idx="2">
+            <a:schemeClr val="accent1"/>
+          </a:effectRef>
+          <a:fontRef idx="minor">
+            <a:schemeClr val="lt1"/>
+          </a:fontRef>
+        </p:style>
+        <p:txBody>
+          <a:bodyPr rtlCol="0" anchor="ctr"/>
+          <a:lstStyle/>
+          <a:p>
+            <a:pPr algn="ctr"/>
+            <a:endParaRPr/>
+          </a:p>
+        </p:txBody>
+      </p:sp>
+      <p:sp>
+        <p:nvSpPr>
+          <p:cNvPr id="10" name="TextBox 9"/>
+          <p:cNvSpPr txBox="1"/>
+          <p:nvPr/>
+        </p:nvSpPr>
+        <p:spPr>
+          <a:xfrm>
+            <a:off x="457200" y="4553500"/>
+            <a:ext cx="4000000" cy="420000"/>
+          </a:xfrm>
+          <a:prstGeom prst="rect">
+            <a:avLst/>
+          </a:prstGeom>
+          <a:noFill/>
+        </p:spPr>
+        <p:txBody>
+          <a:bodyPr wrap="square">
+            <a:spAutoFit/>
+          </a:bodyPr>
+          <a:lstStyle/>
+          <a:p>
+            <a:pPr algn="l"/>
+            <a:r>
+              <a:rPr sz="1100" b="0">
+                <a:solidFill>
+                  <a:srgbClr val="8A92A4"/>
+                </a:solidFill>
+              </a:rPr>
+              <a:t>HHBK Düsseldorf  ·  Lernfeld 5  ·  2026</a:t>
+            </a:r>
+          </a:p>
+        </p:txBody>
+      </p:sp>
+      <p:sp>
+        <p:nvSpPr>
+          <p:cNvPr id="11" name="TextBox 10"/>
+          <p:cNvSpPr txBox="1"/>
+          <p:nvPr/>
+        </p:nvSpPr>
+        <p:spPr>
+          <a:xfrm>
+            <a:off x="5500000" y="4553500"/>
+            <a:ext cx="3200000" cy="420000"/>
+          </a:xfrm>
+          <a:prstGeom prst="rect">
+            <a:avLst/>
+          </a:prstGeom>
+          <a:noFill/>
+        </p:spPr>
+        <p:txBody>
+          <a:bodyPr wrap="square">
+            <a:spAutoFit/>
+          </a:bodyPr>
+          <a:lstStyle/>
+          <a:p>
+            <a:pPr algn="r"/>
+            <a:r>
+              <a:rPr sz="1100" b="0">
+                <a:solidFill>
+                  <a:srgbClr val="E94560"/>
+                </a:solidFill>
+              </a:rPr>
+              <a:t>Python 3.10+ · SQLite · tkinter</a:t>
+            </a:r>
+          </a:p>
+        </p:txBody>
+      </p:sp>
+      <p:sp>
+        <p:nvSpPr>
+          <p:cNvPr id="12" name="TextBox 11"/>
+          <p:cNvSpPr txBox="1"/>
+          <p:nvPr/>
+        </p:nvSpPr>
+        <p:spPr>
+          <a:xfrm>
+            <a:off x="8626110" y="4875500"/>
+            <a:ext cx="339583" cy="215444"/>
+          </a:xfrm>
+          <a:prstGeom prst="rect">
+            <a:avLst/>
+          </a:prstGeom>
+          <a:noFill/>
+        </p:spPr>
+        <p:txBody>
+          <a:bodyPr wrap="square">
+            <a:spAutoFit/>
+          </a:bodyPr>
+          <a:lstStyle/>
+          <a:p>
+            <a:pPr algn="ctr"/>
+            <a:r>
+              <a:rPr sz="800" b="1" dirty="0">
+                <a:solidFill>
+                  <a:srgbClr val="E94560"/>
+                </a:solidFill>
+              </a:rPr>
+              <a:t>22</a:t>
+            </a:r>
           </a:p>
         </p:txBody>
       </p:sp>

--- a/Präsentation/Präsentation_Projekt/HHBKTendo_Praesentation_1.pptx
+++ b/Präsentation/Präsentation_Projekt/HHBKTendo_Praesentation_1.pptx
@@ -11,8 +11,8 @@
     <p:sldId id="256" r:id="rId2"/>
     <p:sldId id="257" r:id="rId3"/>
     <p:sldId id="258" r:id="rId4"/>
-    <p:sldId id="265" r:id="rId5"/>
-    <p:sldId id="262" r:id="rId6"/>
+    <p:sldId id="262" r:id="rId5"/>
+    <p:sldId id="265" r:id="rId6"/>
     <p:sldId id="266" r:id="rId7"/>
     <p:sldId id="259" r:id="rId8"/>
     <p:sldId id="267" r:id="rId9"/>
@@ -575,7 +575,7 @@
           <a:p>
             <a:fld id="{F7021451-1387-4CA6-816F-3879F97B5CBC}" type="slidenum">
               <a:rPr lang="en-US"/>
-              <a:t>5</a:t>
+              <a:t>4</a:t>
             </a:fld>
             <a:endParaRPr lang="en-US"/>
           </a:p>
@@ -1867,6 +1867,9 @@
           <a:solidFill>
             <a:srgbClr val="E94560"/>
           </a:solidFill>
+          <a:ln>
+            <a:solidFill/>
+          </a:ln>
         </p:spPr>
         <p:txBody>
           <a:bodyPr/>
@@ -3162,7 +3165,7 @@
           </a:solidFill>
           <a:ln w="6350">
             <a:solidFill>
-              <a:srgbClr val="2A3A5E"/>
+              <a:srgbClr val="D0D7E8"/>
             </a:solidFill>
             <a:prstDash val="solid"/>
           </a:ln>
@@ -3380,7 +3383,7 @@
             <a:r>
               <a:rPr lang="en-US" sz="800" dirty="0">
                 <a:solidFill>
-                  <a:srgbClr val="E94560"/>
+                  <a:srgbClr val="FFFFFF"/>
                 </a:solidFill>
                 <a:latin typeface="Calibri" pitchFamily="34" charset="0"/>
                 <a:ea typeface="Calibri" pitchFamily="34" charset="-122"/>
@@ -3406,7 +3409,7 @@
     <p:bg>
       <p:bgPr>
         <a:solidFill>
-          <a:srgbClr val="F0F4FF"/>
+          <a:srgbClr val="0D0D1A"/>
         </a:solidFill>
         <a:effectLst/>
       </p:bgPr>
@@ -3452,7 +3455,7 @@
             <a:r>
               <a:rPr lang="en-US" sz="2800" b="1" dirty="0">
                 <a:solidFill>
-                  <a:srgbClr val="1A1A2E"/>
+                  <a:srgbClr val="FFFFFF"/>
                 </a:solidFill>
                 <a:latin typeface="Arial Black" pitchFamily="34" charset="0"/>
                 <a:ea typeface="Arial Black" pitchFamily="34" charset="-122"/>
@@ -3518,7 +3521,7 @@
             <a:avLst/>
           </a:prstGeom>
           <a:solidFill>
-            <a:srgbClr val="FFFFFF"/>
+            <a:srgbClr val="161638"/>
           </a:solidFill>
           <a:ln w="12700">
             <a:solidFill>
@@ -3550,7 +3553,7 @@
             <a:avLst/>
           </a:prstGeom>
           <a:solidFill>
-            <a:srgbClr val="FFFFFF"/>
+            <a:srgbClr val="161638"/>
           </a:solidFill>
           <a:ln w="12700">
             <a:solidFill>
@@ -3582,7 +3585,7 @@
             <a:avLst/>
           </a:prstGeom>
           <a:solidFill>
-            <a:srgbClr val="FFFFFF"/>
+            <a:srgbClr val="161638"/>
           </a:solidFill>
           <a:ln w="12700">
             <a:solidFill>
@@ -3614,7 +3617,7 @@
             <a:avLst/>
           </a:prstGeom>
           <a:solidFill>
-            <a:srgbClr val="FFFFFF"/>
+            <a:srgbClr val="161638"/>
           </a:solidFill>
           <a:ln w="12700">
             <a:solidFill>
@@ -3646,7 +3649,7 @@
             <a:avLst/>
           </a:prstGeom>
           <a:solidFill>
-            <a:srgbClr val="FFFFFF"/>
+            <a:srgbClr val="161638"/>
           </a:solidFill>
           <a:ln w="12700">
             <a:solidFill>
@@ -3678,7 +3681,7 @@
             <a:avLst/>
           </a:prstGeom>
           <a:solidFill>
-            <a:srgbClr val="FFFFFF"/>
+            <a:srgbClr val="161638"/>
           </a:solidFill>
           <a:ln w="12700">
             <a:solidFill>
@@ -3710,7 +3713,7 @@
             <a:avLst/>
           </a:prstGeom>
           <a:solidFill>
-            <a:srgbClr val="FFFFFF"/>
+            <a:srgbClr val="161638"/>
           </a:solidFill>
           <a:ln w="12700">
             <a:solidFill>
@@ -3742,7 +3745,7 @@
             <a:avLst/>
           </a:prstGeom>
           <a:solidFill>
-            <a:srgbClr val="FFFFFF"/>
+            <a:srgbClr val="161638"/>
           </a:solidFill>
           <a:ln w="12700">
             <a:solidFill>
@@ -3774,7 +3777,7 @@
             <a:avLst/>
           </a:prstGeom>
           <a:solidFill>
-            <a:srgbClr val="FFFFFF"/>
+            <a:srgbClr val="161638"/>
           </a:solidFill>
           <a:ln w="12700">
             <a:solidFill>
@@ -3806,7 +3809,7 @@
             <a:avLst/>
           </a:prstGeom>
           <a:solidFill>
-            <a:srgbClr val="FFFFFF"/>
+            <a:srgbClr val="161638"/>
           </a:solidFill>
           <a:ln w="12700">
             <a:solidFill>
@@ -3838,7 +3841,7 @@
             <a:avLst/>
           </a:prstGeom>
           <a:solidFill>
-            <a:srgbClr val="FFFFFF"/>
+            <a:srgbClr val="161638"/>
           </a:solidFill>
           <a:ln w="12700">
             <a:solidFill>
@@ -3870,7 +3873,7 @@
             <a:avLst/>
           </a:prstGeom>
           <a:solidFill>
-            <a:srgbClr val="FFFFFF"/>
+            <a:srgbClr val="161638"/>
           </a:solidFill>
           <a:ln w="12700">
             <a:solidFill>
@@ -3902,7 +3905,7 @@
             <a:avLst/>
           </a:prstGeom>
           <a:solidFill>
-            <a:srgbClr val="FFFFFF"/>
+            <a:srgbClr val="161638"/>
           </a:solidFill>
           <a:ln w="12700">
             <a:solidFill>
@@ -3934,7 +3937,7 @@
             <a:avLst/>
           </a:prstGeom>
           <a:solidFill>
-            <a:srgbClr val="FFFFFF"/>
+            <a:srgbClr val="161638"/>
           </a:solidFill>
           <a:ln w="12700">
             <a:solidFill>
@@ -3966,7 +3969,7 @@
             <a:avLst/>
           </a:prstGeom>
           <a:solidFill>
-            <a:srgbClr val="FFFFFF"/>
+            <a:srgbClr val="161638"/>
           </a:solidFill>
           <a:ln w="12700">
             <a:solidFill>
@@ -3998,7 +4001,7 @@
             <a:avLst/>
           </a:prstGeom>
           <a:solidFill>
-            <a:srgbClr val="FFFFFF"/>
+            <a:srgbClr val="161638"/>
           </a:solidFill>
           <a:ln w="12700">
             <a:solidFill>
@@ -4030,7 +4033,7 @@
             <a:avLst/>
           </a:prstGeom>
           <a:solidFill>
-            <a:srgbClr val="FFFFFF"/>
+            <a:srgbClr val="161638"/>
           </a:solidFill>
           <a:ln w="12700">
             <a:solidFill>
@@ -4062,7 +4065,7 @@
             <a:avLst/>
           </a:prstGeom>
           <a:solidFill>
-            <a:srgbClr val="FFFFFF"/>
+            <a:srgbClr val="161638"/>
           </a:solidFill>
           <a:ln w="12700">
             <a:solidFill>
@@ -4094,7 +4097,7 @@
             <a:avLst/>
           </a:prstGeom>
           <a:solidFill>
-            <a:srgbClr val="FFFFFF"/>
+            <a:srgbClr val="161638"/>
           </a:solidFill>
           <a:ln w="12700">
             <a:solidFill>
@@ -4126,7 +4129,7 @@
             <a:avLst/>
           </a:prstGeom>
           <a:solidFill>
-            <a:srgbClr val="FFFFFF"/>
+            <a:srgbClr val="161638"/>
           </a:solidFill>
           <a:ln w="12700">
             <a:solidFill>
@@ -4158,7 +4161,7 @@
             <a:avLst/>
           </a:prstGeom>
           <a:solidFill>
-            <a:srgbClr val="FFFFFF"/>
+            <a:srgbClr val="161638"/>
           </a:solidFill>
           <a:ln w="12700">
             <a:solidFill>
@@ -4190,7 +4193,7 @@
             <a:avLst/>
           </a:prstGeom>
           <a:solidFill>
-            <a:srgbClr val="FFFFFF"/>
+            <a:srgbClr val="161638"/>
           </a:solidFill>
           <a:ln w="12700">
             <a:solidFill>
@@ -4222,7 +4225,7 @@
             <a:avLst/>
           </a:prstGeom>
           <a:solidFill>
-            <a:srgbClr val="FFFFFF"/>
+            <a:srgbClr val="161638"/>
           </a:solidFill>
           <a:ln w="12700">
             <a:solidFill>
@@ -4254,7 +4257,7 @@
             <a:avLst/>
           </a:prstGeom>
           <a:solidFill>
-            <a:srgbClr val="FFFFFF"/>
+            <a:srgbClr val="161638"/>
           </a:solidFill>
           <a:ln w="12700">
             <a:solidFill>
@@ -4286,7 +4289,7 @@
             <a:avLst/>
           </a:prstGeom>
           <a:solidFill>
-            <a:srgbClr val="FFFFFF"/>
+            <a:srgbClr val="161638"/>
           </a:solidFill>
           <a:ln w="12700">
             <a:solidFill>
@@ -4318,7 +4321,7 @@
             <a:avLst/>
           </a:prstGeom>
           <a:solidFill>
-            <a:srgbClr val="FFFFFF"/>
+            <a:srgbClr val="161638"/>
           </a:solidFill>
           <a:ln w="12700">
             <a:solidFill>
@@ -4350,7 +4353,7 @@
             <a:avLst/>
           </a:prstGeom>
           <a:solidFill>
-            <a:srgbClr val="FFFFFF"/>
+            <a:srgbClr val="161638"/>
           </a:solidFill>
           <a:ln w="12700">
             <a:solidFill>
@@ -4382,7 +4385,7 @@
             <a:avLst/>
           </a:prstGeom>
           <a:solidFill>
-            <a:srgbClr val="FFFFFF"/>
+            <a:srgbClr val="161638"/>
           </a:solidFill>
           <a:ln w="12700">
             <a:solidFill>
@@ -4414,7 +4417,7 @@
             <a:avLst/>
           </a:prstGeom>
           <a:solidFill>
-            <a:srgbClr val="FFFFFF"/>
+            <a:srgbClr val="161638"/>
           </a:solidFill>
           <a:ln w="12700">
             <a:solidFill>
@@ -4446,7 +4449,7 @@
             <a:avLst/>
           </a:prstGeom>
           <a:solidFill>
-            <a:srgbClr val="FFFFFF"/>
+            <a:srgbClr val="161638"/>
           </a:solidFill>
           <a:ln w="12700">
             <a:solidFill>
@@ -4478,7 +4481,7 @@
             <a:avLst/>
           </a:prstGeom>
           <a:solidFill>
-            <a:srgbClr val="FFFFFF"/>
+            <a:srgbClr val="161638"/>
           </a:solidFill>
           <a:ln w="12700">
             <a:solidFill>
@@ -4510,7 +4513,7 @@
             <a:avLst/>
           </a:prstGeom>
           <a:solidFill>
-            <a:srgbClr val="FFFFFF"/>
+            <a:srgbClr val="161638"/>
           </a:solidFill>
           <a:ln w="12700">
             <a:solidFill>
@@ -4542,7 +4545,7 @@
             <a:avLst/>
           </a:prstGeom>
           <a:solidFill>
-            <a:srgbClr val="FFFFFF"/>
+            <a:srgbClr val="161638"/>
           </a:solidFill>
           <a:ln w="12700">
             <a:solidFill>
@@ -4574,7 +4577,7 @@
             <a:avLst/>
           </a:prstGeom>
           <a:solidFill>
-            <a:srgbClr val="FFFFFF"/>
+            <a:srgbClr val="161638"/>
           </a:solidFill>
           <a:ln w="12700">
             <a:solidFill>
@@ -4606,7 +4609,7 @@
             <a:avLst/>
           </a:prstGeom>
           <a:solidFill>
-            <a:srgbClr val="FFFFFF"/>
+            <a:srgbClr val="161638"/>
           </a:solidFill>
           <a:ln w="12700">
             <a:solidFill>
@@ -4638,7 +4641,7 @@
             <a:avLst/>
           </a:prstGeom>
           <a:solidFill>
-            <a:srgbClr val="FFFFFF"/>
+            <a:srgbClr val="161638"/>
           </a:solidFill>
           <a:ln w="12700">
             <a:solidFill>
@@ -4982,7 +4985,7 @@
             <a:avLst/>
           </a:prstGeom>
           <a:solidFill>
-            <a:srgbClr val="FFFFFF"/>
+            <a:srgbClr val="161638"/>
           </a:solidFill>
           <a:ln w="6350">
             <a:solidFill>
@@ -5033,7 +5036,7 @@
             <a:r>
               <a:rPr lang="en-US" sz="1300" b="1" dirty="0">
                 <a:solidFill>
-                  <a:srgbClr val="1A1A2E"/>
+                  <a:srgbClr val="FFFFFF"/>
                 </a:solidFill>
                 <a:latin typeface="Calibri" pitchFamily="34" charset="0"/>
                 <a:ea typeface="Calibri" pitchFamily="34" charset="-122"/>
@@ -5072,7 +5075,7 @@
             <a:r>
               <a:rPr lang="en-US" sz="1100" dirty="0">
                 <a:solidFill>
-                  <a:srgbClr val="444444"/>
+                  <a:srgbClr val="D0D7E8"/>
                 </a:solidFill>
                 <a:latin typeface="Calibri" pitchFamily="34" charset="0"/>
                 <a:ea typeface="Calibri" pitchFamily="34" charset="-122"/>
@@ -5111,7 +5114,7 @@
             <a:r>
               <a:rPr lang="en-US" sz="1100" dirty="0">
                 <a:solidFill>
-                  <a:srgbClr val="444444"/>
+                  <a:srgbClr val="D0D7E8"/>
                 </a:solidFill>
                 <a:latin typeface="Calibri" pitchFamily="34" charset="0"/>
                 <a:ea typeface="Calibri" pitchFamily="34" charset="-122"/>
@@ -5150,7 +5153,7 @@
             <a:r>
               <a:rPr lang="en-US" sz="1100" dirty="0">
                 <a:solidFill>
-                  <a:srgbClr val="444444"/>
+                  <a:srgbClr val="D0D7E8"/>
                 </a:solidFill>
                 <a:latin typeface="Calibri" pitchFamily="34" charset="0"/>
                 <a:ea typeface="Calibri" pitchFamily="34" charset="-122"/>
@@ -5189,7 +5192,7 @@
             <a:r>
               <a:rPr lang="en-US" sz="1300" b="1" dirty="0">
                 <a:solidFill>
-                  <a:srgbClr val="1A1A2E"/>
+                  <a:srgbClr val="FFFFFF"/>
                 </a:solidFill>
                 <a:latin typeface="Calibri" pitchFamily="34" charset="0"/>
                 <a:ea typeface="Calibri" pitchFamily="34" charset="-122"/>
@@ -5228,7 +5231,7 @@
             <a:r>
               <a:rPr lang="en-US" sz="1100" dirty="0">
                 <a:solidFill>
-                  <a:srgbClr val="444444"/>
+                  <a:srgbClr val="D0D7E8"/>
                 </a:solidFill>
                 <a:latin typeface="Calibri" pitchFamily="34" charset="0"/>
                 <a:ea typeface="Calibri" pitchFamily="34" charset="-122"/>
@@ -5267,7 +5270,7 @@
             <a:r>
               <a:rPr lang="en-US" sz="1100" dirty="0">
                 <a:solidFill>
-                  <a:srgbClr val="444444"/>
+                  <a:srgbClr val="D0D7E8"/>
                 </a:solidFill>
                 <a:latin typeface="Calibri" pitchFamily="34" charset="0"/>
                 <a:ea typeface="Calibri" pitchFamily="34" charset="-122"/>
@@ -5306,7 +5309,7 @@
             <a:r>
               <a:rPr lang="en-US" sz="1100" dirty="0">
                 <a:solidFill>
-                  <a:srgbClr val="444444"/>
+                  <a:srgbClr val="D0D7E8"/>
                 </a:solidFill>
                 <a:latin typeface="Calibri" pitchFamily="34" charset="0"/>
                 <a:ea typeface="Calibri" pitchFamily="34" charset="-122"/>
@@ -5345,7 +5348,7 @@
             <a:r>
               <a:rPr lang="en-US" sz="1300" b="1" dirty="0">
                 <a:solidFill>
-                  <a:srgbClr val="1A1A2E"/>
+                  <a:srgbClr val="FFFFFF"/>
                 </a:solidFill>
                 <a:latin typeface="Calibri" pitchFamily="34" charset="0"/>
                 <a:ea typeface="Calibri" pitchFamily="34" charset="-122"/>
@@ -5384,7 +5387,7 @@
             <a:r>
               <a:rPr lang="en-US" sz="1100" dirty="0">
                 <a:solidFill>
-                  <a:srgbClr val="444444"/>
+                  <a:srgbClr val="D0D7E8"/>
                 </a:solidFill>
                 <a:latin typeface="Calibri" pitchFamily="34" charset="0"/>
                 <a:ea typeface="Calibri" pitchFamily="34" charset="-122"/>
@@ -5423,7 +5426,7 @@
             <a:r>
               <a:rPr lang="en-US" sz="1100" dirty="0">
                 <a:solidFill>
-                  <a:srgbClr val="444444"/>
+                  <a:srgbClr val="D0D7E8"/>
                 </a:solidFill>
                 <a:latin typeface="Calibri" pitchFamily="34" charset="0"/>
                 <a:ea typeface="Calibri" pitchFamily="34" charset="-122"/>
@@ -5462,7 +5465,7 @@
             <a:r>
               <a:rPr lang="en-US" sz="1100" dirty="0">
                 <a:solidFill>
-                  <a:srgbClr val="444444"/>
+                  <a:srgbClr val="D0D7E8"/>
                 </a:solidFill>
                 <a:latin typeface="Calibri" pitchFamily="34" charset="0"/>
                 <a:ea typeface="Calibri" pitchFamily="34" charset="-122"/>
@@ -5501,7 +5504,7 @@
             <a:r>
               <a:rPr lang="en-US" sz="1300" b="1" dirty="0">
                 <a:solidFill>
-                  <a:srgbClr val="1A1A2E"/>
+                  <a:srgbClr val="FFFFFF"/>
                 </a:solidFill>
                 <a:latin typeface="Calibri" pitchFamily="34" charset="0"/>
                 <a:ea typeface="Calibri" pitchFamily="34" charset="-122"/>
@@ -5540,7 +5543,7 @@
             <a:r>
               <a:rPr lang="en-US" sz="1100" dirty="0">
                 <a:solidFill>
-                  <a:srgbClr val="444444"/>
+                  <a:srgbClr val="D0D7E8"/>
                 </a:solidFill>
                 <a:latin typeface="Calibri" pitchFamily="34" charset="0"/>
                 <a:ea typeface="Calibri" pitchFamily="34" charset="-122"/>
@@ -5579,7 +5582,7 @@
             <a:r>
               <a:rPr lang="en-US" sz="1100" dirty="0">
                 <a:solidFill>
-                  <a:srgbClr val="444444"/>
+                  <a:srgbClr val="D0D7E8"/>
                 </a:solidFill>
                 <a:latin typeface="Calibri" pitchFamily="34" charset="0"/>
                 <a:ea typeface="Calibri" pitchFamily="34" charset="-122"/>
@@ -5618,7 +5621,7 @@
             <a:r>
               <a:rPr lang="en-US" sz="1100" dirty="0">
                 <a:solidFill>
-                  <a:srgbClr val="444444"/>
+                  <a:srgbClr val="D0D7E8"/>
                 </a:solidFill>
                 <a:latin typeface="Calibri" pitchFamily="34" charset="0"/>
                 <a:ea typeface="Calibri" pitchFamily="34" charset="-122"/>
@@ -5660,6 +5663,9 @@
           <a:p>
             <a:r>
               <a:rPr lang="en-US" sz="800" dirty="0">
+                <a:solidFill>
+                  <a:srgbClr val="FFFFFF"/>
+                </a:solidFill>
                 <a:latin typeface="Calibri" pitchFamily="34" charset="0"/>
                 <a:ea typeface="Calibri" pitchFamily="34" charset="-122"/>
                 <a:cs typeface="Calibri" pitchFamily="34" charset="-120"/>
@@ -5684,7 +5690,7 @@
     <p:bg>
       <p:bgPr>
         <a:solidFill>
-          <a:srgbClr val="F0F4FF"/>
+          <a:srgbClr val="0D0D1A"/>
         </a:solidFill>
         <a:effectLst/>
       </p:bgPr>
@@ -5720,6 +5726,9 @@
           <a:solidFill>
             <a:srgbClr val="4472C4"/>
           </a:solidFill>
+          <a:ln>
+            <a:solidFill/>
+          </a:ln>
         </p:spPr>
         <p:txBody>
           <a:bodyPr/>
@@ -5756,7 +5765,7 @@
             <a:r>
               <a:rPr lang="de-DE" sz="2800" b="1" dirty="0">
                 <a:solidFill>
-                  <a:srgbClr val="1A1A2E"/>
+                  <a:srgbClr val="FFFFFF"/>
                 </a:solidFill>
                 <a:latin typeface="Arial Black" pitchFamily="49" charset="0"/>
               </a:rPr>
@@ -6675,7 +6684,7 @@
             <a:avLst/>
           </a:prstGeom>
           <a:solidFill>
-            <a:srgbClr val="FFFFFF"/>
+            <a:srgbClr val="161638"/>
           </a:solidFill>
           <a:ln w="6350">
             <a:solidFill>
@@ -6719,7 +6728,7 @@
             <a:r>
               <a:rPr lang="de-DE" sz="1150" b="1" dirty="0">
                 <a:solidFill>
-                  <a:srgbClr val="2A3A5E"/>
+                  <a:srgbClr val="FFFFFF"/>
                 </a:solidFill>
                 <a:latin typeface="Calibri" pitchFamily="49" charset="0"/>
               </a:rPr>
@@ -6750,7 +6759,7 @@
             <a:r>
               <a:rPr lang="de-DE" sz="1150" b="1" dirty="0">
                 <a:solidFill>
-                  <a:srgbClr val="2A3A5E"/>
+                  <a:srgbClr val="FFFFFF"/>
                 </a:solidFill>
                 <a:latin typeface="Calibri" pitchFamily="49" charset="0"/>
               </a:rPr>
@@ -6781,7 +6790,7 @@
             <a:r>
               <a:rPr lang="de-DE" sz="1150" b="1" dirty="0">
                 <a:solidFill>
-                  <a:srgbClr val="2A3A5E"/>
+                  <a:srgbClr val="FFFFFF"/>
                 </a:solidFill>
                 <a:latin typeface="Calibri" pitchFamily="49" charset="0"/>
               </a:rPr>
@@ -6812,7 +6821,7 @@
             <a:r>
               <a:rPr lang="de-DE" sz="1150" b="1" dirty="0">
                 <a:solidFill>
-                  <a:srgbClr val="2A3A5E"/>
+                  <a:srgbClr val="FFFFFF"/>
                 </a:solidFill>
                 <a:latin typeface="Calibri" pitchFamily="49" charset="0"/>
               </a:rPr>
@@ -6843,7 +6852,7 @@
             <a:r>
               <a:rPr lang="de-DE" sz="1150" b="1" dirty="0">
                 <a:solidFill>
-                  <a:srgbClr val="2A3A5E"/>
+                  <a:srgbClr val="FFFFFF"/>
                 </a:solidFill>
                 <a:latin typeface="Calibri" pitchFamily="49" charset="0"/>
               </a:rPr>
@@ -6895,7 +6904,11 @@
           <a:lstStyle/>
           <a:p>
             <a:r>
-              <a:rPr lang="de-DE" sz="800" dirty="0"/>
+              <a:rPr lang="de-DE" sz="800" dirty="0">
+                <a:solidFill>
+                  <a:srgbClr val="FFFFFF"/>
+                </a:solidFill>
+              </a:rPr>
               <a:t>12</a:t>
             </a:r>
           </a:p>
@@ -6951,6 +6964,9 @@
           <a:solidFill>
             <a:srgbClr val="E94560"/>
           </a:solidFill>
+          <a:ln>
+            <a:solidFill/>
+          </a:ln>
         </p:spPr>
         <p:txBody>
           <a:bodyPr/>
@@ -7890,7 +7906,7 @@
           </a:solidFill>
           <a:ln w="6350">
             <a:solidFill>
-              <a:srgbClr val="2A3A5E"/>
+              <a:srgbClr val="D0D7E8"/>
             </a:solidFill>
             <a:prstDash val="solid"/>
           </a:ln>
@@ -8108,7 +8124,7 @@
             <a:r>
               <a:rPr lang="en-US" sz="800" dirty="0">
                 <a:solidFill>
-                  <a:srgbClr val="E94560"/>
+                  <a:srgbClr val="FFFFFF"/>
                 </a:solidFill>
                 <a:latin typeface="Calibri" pitchFamily="34" charset="0"/>
                 <a:ea typeface="Calibri" pitchFamily="34" charset="-122"/>
@@ -8134,7 +8150,7 @@
     <p:bg>
       <p:bgPr>
         <a:solidFill>
-          <a:srgbClr val="F0F4FF"/>
+          <a:srgbClr val="0D0D1A"/>
         </a:solidFill>
         <a:effectLst/>
       </p:bgPr>
@@ -8180,7 +8196,7 @@
             <a:r>
               <a:rPr lang="en-US" sz="2800" b="1" dirty="0">
                 <a:solidFill>
-                  <a:srgbClr val="1A1A2E"/>
+                  <a:srgbClr val="FFFFFF"/>
                 </a:solidFill>
                 <a:latin typeface="Arial Black" pitchFamily="34" charset="0"/>
                 <a:ea typeface="Arial Black" pitchFamily="34" charset="-122"/>
@@ -8246,7 +8262,7 @@
             <a:avLst/>
           </a:prstGeom>
           <a:solidFill>
-            <a:srgbClr val="FFFFFF"/>
+            <a:srgbClr val="161638"/>
           </a:solidFill>
           <a:ln w="6350">
             <a:solidFill>
@@ -8368,7 +8384,7 @@
             <a:r>
               <a:rPr lang="en-US" sz="1300" b="1" dirty="0">
                 <a:solidFill>
-                  <a:srgbClr val="1A1A2E"/>
+                  <a:srgbClr val="FFFFFF"/>
                 </a:solidFill>
                 <a:latin typeface="Calibri" pitchFamily="34" charset="0"/>
                 <a:ea typeface="Calibri" pitchFamily="34" charset="-122"/>
@@ -8407,7 +8423,7 @@
             <a:r>
               <a:rPr lang="en-US" sz="1100" dirty="0">
                 <a:solidFill>
-                  <a:srgbClr val="555555"/>
+                  <a:srgbClr val="D0D7E8"/>
                 </a:solidFill>
                 <a:latin typeface="Calibri" pitchFamily="34" charset="0"/>
                 <a:ea typeface="Calibri" pitchFamily="34" charset="-122"/>
@@ -8434,7 +8450,7 @@
             <a:avLst/>
           </a:prstGeom>
           <a:solidFill>
-            <a:srgbClr val="FFFFFF"/>
+            <a:srgbClr val="161638"/>
           </a:solidFill>
           <a:ln w="6350">
             <a:solidFill>
@@ -8556,7 +8572,7 @@
             <a:r>
               <a:rPr lang="en-US" sz="1300" b="1" dirty="0">
                 <a:solidFill>
-                  <a:srgbClr val="1A1A2E"/>
+                  <a:srgbClr val="FFFFFF"/>
                 </a:solidFill>
                 <a:latin typeface="Calibri" pitchFamily="34" charset="0"/>
                 <a:ea typeface="Calibri" pitchFamily="34" charset="-122"/>
@@ -8595,7 +8611,7 @@
             <a:r>
               <a:rPr lang="en-US" sz="1100" dirty="0">
                 <a:solidFill>
-                  <a:srgbClr val="555555"/>
+                  <a:srgbClr val="D0D7E8"/>
                 </a:solidFill>
                 <a:latin typeface="Calibri" pitchFamily="34" charset="0"/>
                 <a:ea typeface="Calibri" pitchFamily="34" charset="-122"/>
@@ -8622,7 +8638,7 @@
             <a:avLst/>
           </a:prstGeom>
           <a:solidFill>
-            <a:srgbClr val="FFFFFF"/>
+            <a:srgbClr val="161638"/>
           </a:solidFill>
           <a:ln w="6350">
             <a:solidFill>
@@ -8744,7 +8760,7 @@
             <a:r>
               <a:rPr lang="en-US" sz="1300" b="1" dirty="0">
                 <a:solidFill>
-                  <a:srgbClr val="1A1A2E"/>
+                  <a:srgbClr val="FFFFFF"/>
                 </a:solidFill>
                 <a:latin typeface="Calibri" pitchFamily="34" charset="0"/>
                 <a:ea typeface="Calibri" pitchFamily="34" charset="-122"/>
@@ -8783,7 +8799,7 @@
             <a:r>
               <a:rPr lang="en-US" sz="1100" dirty="0">
                 <a:solidFill>
-                  <a:srgbClr val="555555"/>
+                  <a:srgbClr val="D0D7E8"/>
                 </a:solidFill>
                 <a:latin typeface="Calibri" pitchFamily="34" charset="0"/>
                 <a:ea typeface="Calibri" pitchFamily="34" charset="-122"/>
@@ -8810,7 +8826,7 @@
             <a:avLst/>
           </a:prstGeom>
           <a:solidFill>
-            <a:srgbClr val="FFFFFF"/>
+            <a:srgbClr val="161638"/>
           </a:solidFill>
           <a:ln w="6350">
             <a:solidFill>
@@ -8932,7 +8948,7 @@
             <a:r>
               <a:rPr lang="en-US" sz="1300" b="1" dirty="0">
                 <a:solidFill>
-                  <a:srgbClr val="1A1A2E"/>
+                  <a:srgbClr val="FFFFFF"/>
                 </a:solidFill>
                 <a:latin typeface="Calibri" pitchFamily="34" charset="0"/>
                 <a:ea typeface="Calibri" pitchFamily="34" charset="-122"/>
@@ -8971,7 +8987,7 @@
             <a:r>
               <a:rPr lang="en-US" sz="1100" dirty="0">
                 <a:solidFill>
-                  <a:srgbClr val="555555"/>
+                  <a:srgbClr val="D0D7E8"/>
                 </a:solidFill>
                 <a:latin typeface="Calibri" pitchFamily="34" charset="0"/>
                 <a:ea typeface="Calibri" pitchFamily="34" charset="-122"/>
@@ -8998,7 +9014,7 @@
             <a:avLst/>
           </a:prstGeom>
           <a:solidFill>
-            <a:srgbClr val="FFFFFF"/>
+            <a:srgbClr val="161638"/>
           </a:solidFill>
           <a:ln w="6350">
             <a:solidFill>
@@ -9120,7 +9136,7 @@
             <a:r>
               <a:rPr lang="en-US" sz="1300" b="1" dirty="0">
                 <a:solidFill>
-                  <a:srgbClr val="1A1A2E"/>
+                  <a:srgbClr val="FFFFFF"/>
                 </a:solidFill>
                 <a:latin typeface="Calibri" pitchFamily="34" charset="0"/>
                 <a:ea typeface="Calibri" pitchFamily="34" charset="-122"/>
@@ -9159,7 +9175,7 @@
             <a:r>
               <a:rPr lang="en-US" sz="1100" dirty="0">
                 <a:solidFill>
-                  <a:srgbClr val="555555"/>
+                  <a:srgbClr val="D0D7E8"/>
                 </a:solidFill>
                 <a:latin typeface="Calibri" pitchFamily="34" charset="0"/>
                 <a:ea typeface="Calibri" pitchFamily="34" charset="-122"/>
@@ -9186,7 +9202,7 @@
             <a:avLst/>
           </a:prstGeom>
           <a:solidFill>
-            <a:srgbClr val="FFFFFF"/>
+            <a:srgbClr val="161638"/>
           </a:solidFill>
           <a:ln w="6350">
             <a:solidFill>
@@ -9308,7 +9324,7 @@
             <a:r>
               <a:rPr lang="en-US" sz="1300" b="1" dirty="0">
                 <a:solidFill>
-                  <a:srgbClr val="1A1A2E"/>
+                  <a:srgbClr val="FFFFFF"/>
                 </a:solidFill>
                 <a:latin typeface="Calibri" pitchFamily="34" charset="0"/>
                 <a:ea typeface="Calibri" pitchFamily="34" charset="-122"/>
@@ -9347,7 +9363,7 @@
             <a:r>
               <a:rPr lang="en-US" sz="1100" dirty="0">
                 <a:solidFill>
-                  <a:srgbClr val="555555"/>
+                  <a:srgbClr val="D0D7E8"/>
                 </a:solidFill>
                 <a:latin typeface="Calibri" pitchFamily="34" charset="0"/>
                 <a:ea typeface="Calibri" pitchFamily="34" charset="-122"/>
@@ -9389,6 +9405,9 @@
           <a:p>
             <a:r>
               <a:rPr lang="en-US" sz="800" dirty="0">
+                <a:solidFill>
+                  <a:srgbClr val="FFFFFF"/>
+                </a:solidFill>
                 <a:latin typeface="Calibri" pitchFamily="34" charset="0"/>
                 <a:ea typeface="Calibri" pitchFamily="34" charset="-122"/>
                 <a:cs typeface="Calibri" pitchFamily="34" charset="-120"/>
@@ -9413,7 +9432,7 @@
     <p:bg>
       <p:bgPr>
         <a:solidFill>
-          <a:srgbClr val="F0F4FF"/>
+          <a:srgbClr val="0D0D1A"/>
         </a:solidFill>
         <a:effectLst/>
       </p:bgPr>
@@ -9449,6 +9468,9 @@
           <a:solidFill>
             <a:srgbClr val="4472C4"/>
           </a:solidFill>
+          <a:ln>
+            <a:solidFill/>
+          </a:ln>
         </p:spPr>
         <p:txBody>
           <a:bodyPr/>
@@ -9485,7 +9507,7 @@
             <a:r>
               <a:rPr lang="de-DE" sz="2800" b="1" dirty="0">
                 <a:solidFill>
-                  <a:srgbClr val="1A1A2E"/>
+                  <a:srgbClr val="FFFFFF"/>
                 </a:solidFill>
                 <a:latin typeface="Arial Black" pitchFamily="49" charset="0"/>
               </a:rPr>
@@ -10342,7 +10364,7 @@
             <a:avLst/>
           </a:prstGeom>
           <a:solidFill>
-            <a:srgbClr val="FFFFFF"/>
+            <a:srgbClr val="161638"/>
           </a:solidFill>
           <a:ln w="6350">
             <a:solidFill>
@@ -10386,7 +10408,7 @@
             <a:r>
               <a:rPr lang="de-DE" sz="1150" b="1" dirty="0">
                 <a:solidFill>
-                  <a:srgbClr val="2A3A5E"/>
+                  <a:srgbClr val="FFFFFF"/>
                 </a:solidFill>
                 <a:latin typeface="Calibri"/>
               </a:rPr>
@@ -10410,7 +10432,7 @@
             <a:r>
               <a:rPr lang="de-DE" sz="1150" b="1" dirty="0">
                 <a:solidFill>
-                  <a:srgbClr val="2A3A5E"/>
+                  <a:srgbClr val="FFFFFF"/>
                 </a:solidFill>
                 <a:latin typeface="Calibri"/>
               </a:rPr>
@@ -10434,7 +10456,7 @@
             <a:r>
               <a:rPr lang="de-DE" sz="1150" b="1" dirty="0">
                 <a:solidFill>
-                  <a:srgbClr val="2A3A5E"/>
+                  <a:srgbClr val="FFFFFF"/>
                 </a:solidFill>
                 <a:latin typeface="Calibri"/>
               </a:rPr>
@@ -10458,7 +10480,7 @@
             <a:r>
               <a:rPr lang="de-DE" sz="1150" b="1" dirty="0">
                 <a:solidFill>
-                  <a:srgbClr val="2A3A5E"/>
+                  <a:srgbClr val="FFFFFF"/>
                 </a:solidFill>
                 <a:latin typeface="Calibri"/>
               </a:rPr>
@@ -10482,7 +10504,7 @@
             <a:r>
               <a:rPr lang="de-DE" sz="1150" b="1" dirty="0">
                 <a:solidFill>
-                  <a:srgbClr val="2A3A5E"/>
+                  <a:srgbClr val="FFFFFF"/>
                 </a:solidFill>
                 <a:latin typeface="Calibri"/>
               </a:rPr>
@@ -10530,7 +10552,11 @@
           <a:lstStyle/>
           <a:p>
             <a:r>
-              <a:rPr lang="de-DE" sz="800" dirty="0"/>
+              <a:rPr lang="de-DE" sz="800" dirty="0">
+                <a:solidFill>
+                  <a:srgbClr val="FFFFFF"/>
+                </a:solidFill>
+              </a:rPr>
               <a:t>15</a:t>
             </a:r>
           </a:p>
@@ -10625,9 +10651,9 @@
           <a:solidFill>
             <a:srgbClr val="1E2A4A"/>
           </a:solidFill>
-          <a:ln w="3810">
+          <a:ln w="6350">
             <a:solidFill>
-              <a:srgbClr val="2A3A5E"/>
+              <a:srgbClr val="D0D7E8"/>
             </a:solidFill>
             <a:prstDash val="solid"/>
           </a:ln>
@@ -10667,7 +10693,7 @@
             <a:r>
               <a:rPr lang="en-US" sz="1700" dirty="0">
                 <a:solidFill>
-                  <a:srgbClr val="000000"/>
+                  <a:srgbClr val="2ECC71"/>
                 </a:solidFill>
               </a:rPr>
               <a:t>✅</a:t>
@@ -10732,9 +10758,9 @@
           <a:solidFill>
             <a:srgbClr val="1E2A4A"/>
           </a:solidFill>
-          <a:ln w="3810">
+          <a:ln w="6350">
             <a:solidFill>
-              <a:srgbClr val="2A3A5E"/>
+              <a:srgbClr val="D0D7E8"/>
             </a:solidFill>
             <a:prstDash val="solid"/>
           </a:ln>
@@ -10774,7 +10800,7 @@
             <a:r>
               <a:rPr lang="en-US" sz="1700" dirty="0">
                 <a:solidFill>
-                  <a:srgbClr val="000000"/>
+                  <a:srgbClr val="2ECC71"/>
                 </a:solidFill>
               </a:rPr>
               <a:t>🤖</a:t>
@@ -10839,9 +10865,9 @@
           <a:solidFill>
             <a:srgbClr val="1E2A4A"/>
           </a:solidFill>
-          <a:ln w="3810">
+          <a:ln w="6350">
             <a:solidFill>
-              <a:srgbClr val="2A3A5E"/>
+              <a:srgbClr val="D0D7E8"/>
             </a:solidFill>
             <a:prstDash val="solid"/>
           </a:ln>
@@ -10881,7 +10907,7 @@
             <a:r>
               <a:rPr lang="en-US" sz="1700" dirty="0">
                 <a:solidFill>
-                  <a:srgbClr val="000000"/>
+                  <a:srgbClr val="2ECC71"/>
                 </a:solidFill>
               </a:rPr>
               <a:t>🔒</a:t>
@@ -10946,9 +10972,9 @@
           <a:solidFill>
             <a:srgbClr val="1E2A4A"/>
           </a:solidFill>
-          <a:ln w="3810">
+          <a:ln w="6350">
             <a:solidFill>
-              <a:srgbClr val="2A3A5E"/>
+              <a:srgbClr val="D0D7E8"/>
             </a:solidFill>
             <a:prstDash val="solid"/>
           </a:ln>
@@ -10988,7 +11014,7 @@
             <a:r>
               <a:rPr lang="en-US" sz="1700" dirty="0">
                 <a:solidFill>
-                  <a:srgbClr val="000000"/>
+                  <a:srgbClr val="2ECC71"/>
                 </a:solidFill>
               </a:rPr>
               <a:t>📦</a:t>
@@ -11053,9 +11079,9 @@
           <a:solidFill>
             <a:srgbClr val="1E2A4A"/>
           </a:solidFill>
-          <a:ln w="3810">
+          <a:ln w="6350">
             <a:solidFill>
-              <a:srgbClr val="2A3A5E"/>
+              <a:srgbClr val="D0D7E8"/>
             </a:solidFill>
             <a:prstDash val="solid"/>
           </a:ln>
@@ -11095,7 +11121,7 @@
             <a:r>
               <a:rPr lang="en-US" sz="1700" dirty="0">
                 <a:solidFill>
-                  <a:srgbClr val="000000"/>
+                  <a:srgbClr val="2ECC71"/>
                 </a:solidFill>
               </a:rPr>
               <a:t>🖥️</a:t>
@@ -11160,9 +11186,9 @@
           <a:solidFill>
             <a:srgbClr val="1E2A4A"/>
           </a:solidFill>
-          <a:ln w="3810">
+          <a:ln w="6350">
             <a:solidFill>
-              <a:srgbClr val="2A3A5E"/>
+              <a:srgbClr val="D0D7E8"/>
             </a:solidFill>
             <a:prstDash val="solid"/>
           </a:ln>
@@ -11202,7 +11228,7 @@
             <a:r>
               <a:rPr lang="en-US" sz="1700" dirty="0">
                 <a:solidFill>
-                  <a:srgbClr val="000000"/>
+                  <a:srgbClr val="2ECC71"/>
                 </a:solidFill>
               </a:rPr>
               <a:t>🧪</a:t>
@@ -11281,7 +11307,7 @@
             <a:r>
               <a:rPr lang="de-DE" sz="800" dirty="0">
                 <a:solidFill>
-                  <a:srgbClr val="1E2A4A"/>
+                  <a:srgbClr val="FFFFFF"/>
                 </a:solidFill>
               </a:rPr>
               <a:t>16</a:t>
@@ -11416,7 +11442,7 @@
             <a:r>
               <a:rPr sz="800" b="1">
                 <a:solidFill>
-                  <a:srgbClr val="E94560"/>
+                  <a:srgbClr val="FFFFFF"/>
                 </a:solidFill>
               </a:rPr>
               <a:t>17</a:t>
@@ -11441,8 +11467,10 @@
           <a:solidFill>
             <a:srgbClr val="161638"/>
           </a:solidFill>
-          <a:ln>
-            <a:noFill/>
+          <a:ln w="6350">
+            <a:solidFill>
+              <a:srgbClr val="D0D7E8"/>
+            </a:solidFill>
           </a:ln>
         </p:spPr>
         <p:style>
@@ -11486,7 +11514,7 @@
             <a:srgbClr val="2ECC71"/>
           </a:solidFill>
           <a:ln>
-            <a:noFill/>
+            <a:solidFill/>
           </a:ln>
         </p:spPr>
         <p:style>
@@ -11630,8 +11658,10 @@
           <a:solidFill>
             <a:srgbClr val="161638"/>
           </a:solidFill>
-          <a:ln>
-            <a:noFill/>
+          <a:ln w="6350">
+            <a:solidFill>
+              <a:srgbClr val="D0D7E8"/>
+            </a:solidFill>
           </a:ln>
         </p:spPr>
         <p:style>
@@ -11666,7 +11696,7 @@
         <p:spPr>
           <a:xfrm>
             <a:off x="365760" y="2570000"/>
-            <a:ext cx="75000" cy="1065028"/>
+            <a:ext cx="64008" cy="1065028"/>
           </a:xfrm>
           <a:prstGeom prst="rect">
             <a:avLst/>
@@ -11675,7 +11705,7 @@
             <a:srgbClr val="4472C4"/>
           </a:solidFill>
           <a:ln>
-            <a:noFill/>
+            <a:solidFill/>
           </a:ln>
         </p:spPr>
         <p:style>
@@ -11797,8 +11827,10 @@
           <a:solidFill>
             <a:srgbClr val="161638"/>
           </a:solidFill>
-          <a:ln>
-            <a:noFill/>
+          <a:ln w="6350">
+            <a:solidFill>
+              <a:srgbClr val="D0D7E8"/>
+            </a:solidFill>
           </a:ln>
         </p:spPr>
         <p:style>
@@ -11833,7 +11865,7 @@
         <p:spPr>
           <a:xfrm>
             <a:off x="4846320" y="2570000"/>
-            <a:ext cx="75000" cy="1065028"/>
+            <a:ext cx="64008" cy="1065028"/>
           </a:xfrm>
           <a:prstGeom prst="rect">
             <a:avLst/>
@@ -11842,7 +11874,7 @@
             <a:srgbClr val="F39C12"/>
           </a:solidFill>
           <a:ln>
-            <a:noFill/>
+            <a:solidFill/>
           </a:ln>
         </p:spPr>
         <p:style>
@@ -11986,8 +12018,10 @@
           <a:solidFill>
             <a:srgbClr val="141432"/>
           </a:solidFill>
-          <a:ln>
-            <a:noFill/>
+          <a:ln w="6350">
+            <a:solidFill>
+              <a:srgbClr val="D0D7E8"/>
+            </a:solidFill>
           </a:ln>
         </p:spPr>
         <p:style>
@@ -12283,7 +12317,7 @@
             <a:r>
               <a:rPr sz="800" b="1" dirty="0">
                 <a:solidFill>
-                  <a:srgbClr val="E94560"/>
+                  <a:srgbClr val="FFFFFF"/>
                 </a:solidFill>
               </a:rPr>
               <a:t>18</a:t>
@@ -12308,8 +12342,10 @@
           <a:solidFill>
             <a:srgbClr val="1A1A45"/>
           </a:solidFill>
-          <a:ln>
-            <a:noFill/>
+          <a:ln w="6350">
+            <a:solidFill>
+              <a:srgbClr val="D0D7E8"/>
+            </a:solidFill>
           </a:ln>
         </p:spPr>
         <p:style>
@@ -12488,8 +12524,10 @@
           <a:solidFill>
             <a:srgbClr val="141432"/>
           </a:solidFill>
-          <a:ln>
-            <a:noFill/>
+          <a:ln w="6350">
+            <a:solidFill>
+              <a:srgbClr val="D0D7E8"/>
+            </a:solidFill>
           </a:ln>
         </p:spPr>
         <p:style>
@@ -12533,7 +12571,7 @@
             <a:srgbClr val="2ECC71"/>
           </a:solidFill>
           <a:ln>
-            <a:noFill/>
+            <a:solidFill/>
           </a:ln>
         </p:spPr>
         <p:style>
@@ -12734,8 +12772,10 @@
           <a:solidFill>
             <a:srgbClr val="161638"/>
           </a:solidFill>
-          <a:ln>
-            <a:noFill/>
+          <a:ln w="6350">
+            <a:solidFill>
+              <a:srgbClr val="D0D7E8"/>
+            </a:solidFill>
           </a:ln>
         </p:spPr>
         <p:style>
@@ -12779,7 +12819,7 @@
             <a:srgbClr val="F1C40F"/>
           </a:solidFill>
           <a:ln>
-            <a:noFill/>
+            <a:solidFill/>
           </a:ln>
         </p:spPr>
         <p:style>
@@ -12980,8 +13020,10 @@
           <a:solidFill>
             <a:srgbClr val="141432"/>
           </a:solidFill>
-          <a:ln>
-            <a:noFill/>
+          <a:ln w="6350">
+            <a:solidFill>
+              <a:srgbClr val="D0D7E8"/>
+            </a:solidFill>
           </a:ln>
         </p:spPr>
         <p:style>
@@ -13025,7 +13067,7 @@
             <a:srgbClr val="F1C40F"/>
           </a:solidFill>
           <a:ln>
-            <a:noFill/>
+            <a:solidFill/>
           </a:ln>
         </p:spPr>
         <p:style>
@@ -13226,8 +13268,10 @@
           <a:solidFill>
             <a:srgbClr val="161638"/>
           </a:solidFill>
-          <a:ln>
-            <a:noFill/>
+          <a:ln w="6350">
+            <a:solidFill>
+              <a:srgbClr val="D0D7E8"/>
+            </a:solidFill>
           </a:ln>
         </p:spPr>
         <p:style>
@@ -13271,7 +13315,7 @@
             <a:srgbClr val="F1C40F"/>
           </a:solidFill>
           <a:ln>
-            <a:noFill/>
+            <a:solidFill/>
           </a:ln>
         </p:spPr>
         <p:style>
@@ -13472,8 +13516,10 @@
           <a:solidFill>
             <a:srgbClr val="141432"/>
           </a:solidFill>
-          <a:ln>
-            <a:noFill/>
+          <a:ln w="6350">
+            <a:solidFill>
+              <a:srgbClr val="D0D7E8"/>
+            </a:solidFill>
           </a:ln>
         </p:spPr>
         <p:style>
@@ -13517,7 +13563,7 @@
             <a:srgbClr val="2ECC71"/>
           </a:solidFill>
           <a:ln>
-            <a:noFill/>
+            <a:solidFill/>
           </a:ln>
         </p:spPr>
         <p:style>
@@ -13851,7 +13897,7 @@
             <a:r>
               <a:rPr sz="800" b="1" dirty="0">
                 <a:solidFill>
-                  <a:srgbClr val="E94560"/>
+                  <a:srgbClr val="FFFFFF"/>
                 </a:solidFill>
               </a:rPr>
               <a:t>19</a:t>
@@ -13876,8 +13922,10 @@
           <a:solidFill>
             <a:srgbClr val="161638"/>
           </a:solidFill>
-          <a:ln>
-            <a:noFill/>
+          <a:ln w="6350">
+            <a:solidFill>
+              <a:srgbClr val="D0D7E8"/>
+            </a:solidFill>
           </a:ln>
         </p:spPr>
         <p:style>
@@ -13921,7 +13969,7 @@
             <a:srgbClr val="4472C4"/>
           </a:solidFill>
           <a:ln>
-            <a:noFill/>
+            <a:solidFill/>
           </a:ln>
         </p:spPr>
         <p:style>
@@ -14177,8 +14225,10 @@
           <a:solidFill>
             <a:srgbClr val="161638"/>
           </a:solidFill>
-          <a:ln>
-            <a:noFill/>
+          <a:ln w="6350">
+            <a:solidFill>
+              <a:srgbClr val="D0D7E8"/>
+            </a:solidFill>
           </a:ln>
         </p:spPr>
         <p:style>
@@ -14222,7 +14272,7 @@
             <a:srgbClr val="E94560"/>
           </a:solidFill>
           <a:ln>
-            <a:noFill/>
+            <a:solidFill/>
           </a:ln>
         </p:spPr>
         <p:style>
@@ -14377,8 +14427,10 @@
           <a:solidFill>
             <a:srgbClr val="161638"/>
           </a:solidFill>
-          <a:ln>
-            <a:noFill/>
+          <a:ln w="6350">
+            <a:solidFill>
+              <a:srgbClr val="D0D7E8"/>
+            </a:solidFill>
           </a:ln>
         </p:spPr>
         <p:style>
@@ -14422,7 +14474,7 @@
             <a:srgbClr val="F39C12"/>
           </a:solidFill>
           <a:ln>
-            <a:noFill/>
+            <a:solidFill/>
           </a:ln>
         </p:spPr>
         <p:style>
@@ -14612,7 +14664,7 @@
     <p:bg>
       <p:bgPr>
         <a:solidFill>
-          <a:srgbClr val="F0F4FF"/>
+          <a:srgbClr val="0D0D1A"/>
         </a:solidFill>
         <a:effectLst/>
       </p:bgPr>
@@ -14658,7 +14710,7 @@
             <a:r>
               <a:rPr lang="en-US" sz="2800" b="1" dirty="0">
                 <a:solidFill>
-                  <a:srgbClr val="1A1A2E"/>
+                  <a:srgbClr val="FFFFFF"/>
                 </a:solidFill>
                 <a:latin typeface="Arial Black" pitchFamily="34" charset="0"/>
                 <a:ea typeface="Arial Black" pitchFamily="34" charset="-122"/>
@@ -14685,7 +14737,7 @@
             <a:avLst/>
           </a:prstGeom>
           <a:solidFill>
-            <a:srgbClr val="FFFFFF"/>
+            <a:srgbClr val="161638"/>
           </a:solidFill>
           <a:ln w="6350">
             <a:solidFill>
@@ -14718,7 +14770,7 @@
         <p:spPr>
           <a:xfrm>
             <a:off x="365760" y="1097280"/>
-            <a:ext cx="73152" cy="1554480"/>
+            <a:ext cx="64008" cy="1554480"/>
           </a:xfrm>
           <a:prstGeom prst="rect">
             <a:avLst/>
@@ -14768,7 +14820,7 @@
             <a:r>
               <a:rPr lang="en-US" sz="1500" b="1" dirty="0">
                 <a:solidFill>
-                  <a:srgbClr val="1A1A2E"/>
+                  <a:srgbClr val="FFFFFF"/>
                 </a:solidFill>
                 <a:latin typeface="Calibri" pitchFamily="34" charset="0"/>
                 <a:ea typeface="Calibri" pitchFamily="34" charset="-122"/>
@@ -14807,7 +14859,7 @@
             <a:r>
               <a:rPr lang="en-US" sz="1200" dirty="0">
                 <a:solidFill>
-                  <a:srgbClr val="444444"/>
+                  <a:srgbClr val="D0D7E8"/>
                 </a:solidFill>
                 <a:latin typeface="Calibri" pitchFamily="34" charset="0"/>
                 <a:ea typeface="Calibri" pitchFamily="34" charset="-122"/>
@@ -14824,7 +14876,7 @@
             <a:r>
               <a:rPr lang="en-US" sz="1200" dirty="0">
                 <a:solidFill>
-                  <a:srgbClr val="444444"/>
+                  <a:srgbClr val="D0D7E8"/>
                 </a:solidFill>
                 <a:latin typeface="Calibri" pitchFamily="34" charset="0"/>
                 <a:ea typeface="Calibri" pitchFamily="34" charset="-122"/>
@@ -14851,7 +14903,7 @@
             <a:avLst/>
           </a:prstGeom>
           <a:solidFill>
-            <a:srgbClr val="FFFFFF"/>
+            <a:srgbClr val="161638"/>
           </a:solidFill>
           <a:ln w="6350">
             <a:solidFill>
@@ -14884,7 +14936,7 @@
         <p:spPr>
           <a:xfrm>
             <a:off x="4754880" y="1097280"/>
-            <a:ext cx="73152" cy="1554480"/>
+            <a:ext cx="64008" cy="1554480"/>
           </a:xfrm>
           <a:prstGeom prst="rect">
             <a:avLst/>
@@ -14934,7 +14986,7 @@
             <a:r>
               <a:rPr lang="en-US" sz="1500" b="1" dirty="0">
                 <a:solidFill>
-                  <a:srgbClr val="1A1A2E"/>
+                  <a:srgbClr val="FFFFFF"/>
                 </a:solidFill>
                 <a:latin typeface="Calibri" pitchFamily="34" charset="0"/>
                 <a:ea typeface="Calibri" pitchFamily="34" charset="-122"/>
@@ -14973,7 +15025,7 @@
             <a:r>
               <a:rPr lang="en-US" sz="1200" dirty="0">
                 <a:solidFill>
-                  <a:srgbClr val="444444"/>
+                  <a:srgbClr val="D0D7E8"/>
                 </a:solidFill>
                 <a:latin typeface="Calibri" pitchFamily="34" charset="0"/>
                 <a:ea typeface="Calibri" pitchFamily="34" charset="-122"/>
@@ -15000,7 +15052,7 @@
             <a:avLst/>
           </a:prstGeom>
           <a:solidFill>
-            <a:srgbClr val="FFFFFF"/>
+            <a:srgbClr val="161638"/>
           </a:solidFill>
           <a:ln w="6350">
             <a:solidFill>
@@ -15033,7 +15085,7 @@
         <p:spPr>
           <a:xfrm>
             <a:off x="365760" y="2834640"/>
-            <a:ext cx="73152" cy="1554480"/>
+            <a:ext cx="64008" cy="1554480"/>
           </a:xfrm>
           <a:prstGeom prst="rect">
             <a:avLst/>
@@ -15083,7 +15135,7 @@
             <a:r>
               <a:rPr lang="en-US" sz="1500" b="1" dirty="0">
                 <a:solidFill>
-                  <a:srgbClr val="1A1A2E"/>
+                  <a:srgbClr val="FFFFFF"/>
                 </a:solidFill>
                 <a:latin typeface="Calibri" pitchFamily="34" charset="0"/>
                 <a:ea typeface="Calibri" pitchFamily="34" charset="-122"/>
@@ -15122,7 +15174,7 @@
             <a:r>
               <a:rPr lang="en-US" sz="1200" dirty="0">
                 <a:solidFill>
-                  <a:srgbClr val="444444"/>
+                  <a:srgbClr val="D0D7E8"/>
                 </a:solidFill>
                 <a:latin typeface="Calibri" pitchFamily="34" charset="0"/>
                 <a:ea typeface="Calibri" pitchFamily="34" charset="-122"/>
@@ -15149,7 +15201,7 @@
             <a:avLst/>
           </a:prstGeom>
           <a:solidFill>
-            <a:srgbClr val="FFFFFF"/>
+            <a:srgbClr val="161638"/>
           </a:solidFill>
           <a:ln w="6350">
             <a:solidFill>
@@ -15182,7 +15234,7 @@
         <p:spPr>
           <a:xfrm>
             <a:off x="4754880" y="2834640"/>
-            <a:ext cx="73152" cy="1554480"/>
+            <a:ext cx="64008" cy="1554480"/>
           </a:xfrm>
           <a:prstGeom prst="rect">
             <a:avLst/>
@@ -15232,7 +15284,7 @@
             <a:r>
               <a:rPr lang="en-US" sz="1500" b="1" dirty="0">
                 <a:solidFill>
-                  <a:srgbClr val="1A1A2E"/>
+                  <a:srgbClr val="FFFFFF"/>
                 </a:solidFill>
                 <a:latin typeface="Calibri" pitchFamily="34" charset="0"/>
                 <a:ea typeface="Calibri" pitchFamily="34" charset="-122"/>
@@ -15271,7 +15323,7 @@
             <a:r>
               <a:rPr lang="en-US" sz="1200" dirty="0">
                 <a:solidFill>
-                  <a:srgbClr val="444444"/>
+                  <a:srgbClr val="D0D7E8"/>
                 </a:solidFill>
                 <a:latin typeface="Calibri" pitchFamily="34" charset="0"/>
                 <a:ea typeface="Calibri" pitchFamily="34" charset="-122"/>
@@ -15313,6 +15365,9 @@
           <a:p>
             <a:r>
               <a:rPr lang="en-US" sz="800" dirty="0">
+                <a:solidFill>
+                  <a:srgbClr val="FFFFFF"/>
+                </a:solidFill>
                 <a:latin typeface="Calibri" pitchFamily="34" charset="0"/>
                 <a:ea typeface="Calibri" pitchFamily="34" charset="-122"/>
                 <a:cs typeface="Calibri" pitchFamily="34" charset="-120"/>
@@ -15416,7 +15471,7 @@
             <a:r>
               <a:rPr sz="800" b="1">
                 <a:solidFill>
-                  <a:srgbClr val="E94560"/>
+                  <a:srgbClr val="FFFFFF"/>
                 </a:solidFill>
               </a:rPr>
               <a:t>20</a:t>
@@ -15441,8 +15496,10 @@
           <a:solidFill>
             <a:srgbClr val="161638"/>
           </a:solidFill>
-          <a:ln>
-            <a:noFill/>
+          <a:ln w="6350">
+            <a:solidFill>
+              <a:srgbClr val="D0D7E8"/>
+            </a:solidFill>
           </a:ln>
         </p:spPr>
         <p:style>
@@ -15486,7 +15543,7 @@
             <a:srgbClr val="4472C4"/>
           </a:solidFill>
           <a:ln>
-            <a:noFill/>
+            <a:solidFill/>
           </a:ln>
         </p:spPr>
         <p:style>
@@ -15608,8 +15665,10 @@
           <a:solidFill>
             <a:srgbClr val="161638"/>
           </a:solidFill>
-          <a:ln>
-            <a:noFill/>
+          <a:ln w="6350">
+            <a:solidFill>
+              <a:srgbClr val="D0D7E8"/>
+            </a:solidFill>
           </a:ln>
         </p:spPr>
         <p:style>
@@ -15653,7 +15712,7 @@
             <a:srgbClr val="F39C12"/>
           </a:solidFill>
           <a:ln>
-            <a:noFill/>
+            <a:solidFill/>
           </a:ln>
         </p:spPr>
         <p:style>
@@ -15775,8 +15834,10 @@
           <a:solidFill>
             <a:srgbClr val="161638"/>
           </a:solidFill>
-          <a:ln>
-            <a:noFill/>
+          <a:ln w="6350">
+            <a:solidFill>
+              <a:srgbClr val="D0D7E8"/>
+            </a:solidFill>
           </a:ln>
         </p:spPr>
         <p:style>
@@ -15820,7 +15881,7 @@
             <a:srgbClr val="2ECC71"/>
           </a:solidFill>
           <a:ln>
-            <a:noFill/>
+            <a:solidFill/>
           </a:ln>
         </p:spPr>
         <p:style>
@@ -15975,8 +16036,10 @@
           <a:solidFill>
             <a:srgbClr val="161638"/>
           </a:solidFill>
-          <a:ln>
-            <a:noFill/>
+          <a:ln w="6350">
+            <a:solidFill>
+              <a:srgbClr val="D0D7E8"/>
+            </a:solidFill>
           </a:ln>
         </p:spPr>
         <p:style>
@@ -16020,7 +16083,7 @@
             <a:srgbClr val="9B59B6"/>
           </a:solidFill>
           <a:ln>
-            <a:noFill/>
+            <a:solidFill/>
           </a:ln>
         </p:spPr>
         <p:style>
@@ -16164,8 +16227,10 @@
           <a:solidFill>
             <a:srgbClr val="161638"/>
           </a:solidFill>
-          <a:ln>
-            <a:noFill/>
+          <a:ln w="6350">
+            <a:solidFill>
+              <a:srgbClr val="D0D7E8"/>
+            </a:solidFill>
           </a:ln>
         </p:spPr>
         <p:style>
@@ -16209,7 +16274,7 @@
             <a:srgbClr val="8A92A4"/>
           </a:solidFill>
           <a:ln>
-            <a:noFill/>
+            <a:solidFill/>
           </a:ln>
         </p:spPr>
         <p:style>
@@ -16407,7 +16472,7 @@
             <a:r>
               <a:rPr sz="800" b="1">
                 <a:solidFill>
-                  <a:srgbClr val="E94560"/>
+                  <a:srgbClr val="FFFFFF"/>
                 </a:solidFill>
               </a:rPr>
               <a:t>21</a:t>
@@ -16432,8 +16497,10 @@
           <a:solidFill>
             <a:srgbClr val="161638"/>
           </a:solidFill>
-          <a:ln>
-            <a:noFill/>
+          <a:ln w="6350">
+            <a:solidFill>
+              <a:srgbClr val="D0D7E8"/>
+            </a:solidFill>
           </a:ln>
         </p:spPr>
         <p:style>
@@ -16477,7 +16544,7 @@
             <a:srgbClr val="9B59B6"/>
           </a:solidFill>
           <a:ln>
-            <a:noFill/>
+            <a:solidFill/>
           </a:ln>
         </p:spPr>
         <p:style>
@@ -16790,8 +16857,10 @@
           <a:solidFill>
             <a:srgbClr val="161638"/>
           </a:solidFill>
-          <a:ln>
-            <a:noFill/>
+          <a:ln w="6350">
+            <a:solidFill>
+              <a:srgbClr val="D0D7E8"/>
+            </a:solidFill>
           </a:ln>
         </p:spPr>
         <p:style>
@@ -16835,7 +16904,7 @@
             <a:srgbClr val="2ECC71"/>
           </a:solidFill>
           <a:ln>
-            <a:noFill/>
+            <a:solidFill/>
           </a:ln>
         </p:spPr>
         <p:style>
@@ -17095,8 +17164,10 @@
           <a:solidFill>
             <a:srgbClr val="161638"/>
           </a:solidFill>
-          <a:ln>
-            <a:noFill/>
+          <a:ln w="6350">
+            <a:solidFill>
+              <a:srgbClr val="D0D7E8"/>
+            </a:solidFill>
           </a:ln>
         </p:spPr>
         <p:style>
@@ -17140,7 +17211,7 @@
             <a:srgbClr val="F39C12"/>
           </a:solidFill>
           <a:ln>
-            <a:noFill/>
+            <a:solidFill/>
           </a:ln>
         </p:spPr>
         <p:style>
@@ -17262,8 +17333,10 @@
           <a:solidFill>
             <a:srgbClr val="161638"/>
           </a:solidFill>
-          <a:ln>
-            <a:noFill/>
+          <a:ln w="6350">
+            <a:solidFill>
+              <a:srgbClr val="D0D7E8"/>
+            </a:solidFill>
           </a:ln>
         </p:spPr>
         <p:style>
@@ -17307,7 +17380,7 @@
             <a:srgbClr val="4472C4"/>
           </a:solidFill>
           <a:ln>
-            <a:noFill/>
+            <a:solidFill/>
           </a:ln>
         </p:spPr>
         <p:style>
@@ -17381,7 +17454,7 @@
         <p:spPr>
           <a:xfrm>
             <a:off x="515264" y="3104968"/>
-            <a:ext cx="3879800" cy="500000"/>
+            <a:ext cx="3879800" cy="600164"/>
           </a:xfrm>
           <a:prstGeom prst="rect">
             <a:avLst/>
@@ -17508,7 +17581,23 @@
                   <a:srgbClr val="D0D7E8"/>
                 </a:solidFill>
               </a:rPr>
-              <a:t>  ·  6 </a:t>
+              <a:t>  ·  </a:t>
+            </a:r>
+            <a:r>
+              <a:rPr lang="de-DE" sz="1100" b="0" dirty="0">
+                <a:solidFill>
+                  <a:srgbClr val="D0D7E8"/>
+                </a:solidFill>
+              </a:rPr>
+              <a:t>7</a:t>
+            </a:r>
+            <a:r>
+              <a:rPr sz="1100" b="0" dirty="0">
+                <a:solidFill>
+                  <a:srgbClr val="D0D7E8"/>
+                </a:solidFill>
+              </a:rPr>
+              <a:t> </a:t>
             </a:r>
             <a:r>
               <a:rPr sz="1100" b="0" dirty="0" err="1">
@@ -17543,8 +17632,10 @@
           <a:solidFill>
             <a:srgbClr val="161638"/>
           </a:solidFill>
-          <a:ln>
-            <a:noFill/>
+          <a:ln w="6350">
+            <a:solidFill>
+              <a:srgbClr val="D0D7E8"/>
+            </a:solidFill>
           </a:ln>
         </p:spPr>
         <p:style>
@@ -17588,7 +17679,7 @@
             <a:srgbClr val="8A92A4"/>
           </a:solidFill>
           <a:ln>
-            <a:noFill/>
+            <a:solidFill/>
           </a:ln>
         </p:spPr>
         <p:style>
@@ -17755,7 +17846,7 @@
             <a:srgbClr val="161638"/>
           </a:solidFill>
           <a:ln>
-            <a:noFill/>
+            <a:solidFill/>
           </a:ln>
         </p:spPr>
         <p:style>
@@ -17833,7 +17924,7 @@
             <a:srgbClr val="E94560"/>
           </a:solidFill>
           <a:ln>
-            <a:noFill/>
+            <a:solidFill/>
           </a:ln>
         </p:spPr>
         <p:style>
@@ -17936,7 +18027,7 @@
         <p:spPr>
           <a:xfrm>
             <a:off x="0" y="3150000"/>
-            <a:ext cx="9144000" cy="280000"/>
+            <a:ext cx="9144000" cy="292388"/>
           </a:xfrm>
           <a:prstGeom prst="rect">
             <a:avLst/>
@@ -17951,13 +18042,26 @@
           <a:p>
             <a:pPr algn="ctr"/>
             <a:r>
-              <a:rPr sz="1300" b="0">
+              <a:rPr sz="1300" b="0" dirty="0">
                 <a:solidFill>
                   <a:srgbClr val="8A92A4"/>
                 </a:solidFill>
               </a:rPr>
               <a:t>Lucas  ·  Jesse  ·  Uilliam  ·  Jakub  ·  Niklas  ·  Jamie</a:t>
             </a:r>
+            <a:r>
+              <a:rPr lang="de-DE" sz="1300" dirty="0">
+                <a:solidFill>
+                  <a:srgbClr val="8A92A4"/>
+                </a:solidFill>
+              </a:rPr>
+              <a:t> ·  Arda</a:t>
+            </a:r>
+            <a:endParaRPr sz="1300" b="0" dirty="0">
+              <a:solidFill>
+                <a:srgbClr val="8A92A4"/>
+              </a:solidFill>
+            </a:endParaRPr>
           </a:p>
         </p:txBody>
       </p:sp>
@@ -18012,8 +18116,10 @@
           <a:solidFill>
             <a:srgbClr val="161638"/>
           </a:solidFill>
-          <a:ln>
-            <a:noFill/>
+          <a:ln w="6350">
+            <a:solidFill>
+              <a:srgbClr val="D0D7E8"/>
+            </a:solidFill>
           </a:ln>
         </p:spPr>
         <p:style>
@@ -18232,7 +18338,7 @@
           </a:solidFill>
           <a:ln w="6350">
             <a:solidFill>
-              <a:srgbClr val="2A3A5E"/>
+              <a:srgbClr val="D0D7E8"/>
             </a:solidFill>
             <a:prstDash val="solid"/>
           </a:ln>
@@ -18374,7 +18480,7 @@
           </a:solidFill>
           <a:ln w="6350">
             <a:solidFill>
-              <a:srgbClr val="2A3A5E"/>
+              <a:srgbClr val="D0D7E8"/>
             </a:solidFill>
             <a:prstDash val="solid"/>
           </a:ln>
@@ -18516,7 +18622,7 @@
           </a:solidFill>
           <a:ln w="6350">
             <a:solidFill>
-              <a:srgbClr val="2A3A5E"/>
+              <a:srgbClr val="D0D7E8"/>
             </a:solidFill>
             <a:prstDash val="solid"/>
           </a:ln>
@@ -18658,7 +18764,7 @@
           </a:solidFill>
           <a:ln w="6350">
             <a:solidFill>
-              <a:srgbClr val="2A3A5E"/>
+              <a:srgbClr val="D0D7E8"/>
             </a:solidFill>
             <a:prstDash val="solid"/>
           </a:ln>
@@ -18800,7 +18906,7 @@
           </a:solidFill>
           <a:ln w="6350">
             <a:solidFill>
-              <a:srgbClr val="2A3A5E"/>
+              <a:srgbClr val="D0D7E8"/>
             </a:solidFill>
             <a:prstDash val="solid"/>
           </a:ln>
@@ -18942,7 +19048,7 @@
           </a:solidFill>
           <a:ln w="6350">
             <a:solidFill>
-              <a:srgbClr val="2A3A5E"/>
+              <a:srgbClr val="D0D7E8"/>
             </a:solidFill>
             <a:prstDash val="solid"/>
           </a:ln>
@@ -19084,7 +19190,7 @@
           </a:solidFill>
           <a:ln w="6350">
             <a:solidFill>
-              <a:srgbClr val="2A3A5E"/>
+              <a:srgbClr val="D0D7E8"/>
             </a:solidFill>
             <a:prstDash val="solid"/>
           </a:ln>
@@ -19226,7 +19332,7 @@
           </a:solidFill>
           <a:ln w="6350">
             <a:solidFill>
-              <a:srgbClr val="2A3A5E"/>
+              <a:srgbClr val="D0D7E8"/>
             </a:solidFill>
             <a:prstDash val="solid"/>
           </a:ln>
@@ -19380,7 +19486,7 @@
             <a:r>
               <a:rPr lang="en-US" sz="800" dirty="0">
                 <a:solidFill>
-                  <a:srgbClr val="E94560"/>
+                  <a:srgbClr val="FFFFFF"/>
                 </a:solidFill>
                 <a:latin typeface="Calibri" pitchFamily="34" charset="0"/>
                 <a:ea typeface="Calibri" pitchFamily="34" charset="-122"/>
@@ -19401,1003 +19507,6 @@
 </file>
 
 <file path=ppt/slides/slide4.xml><?xml version="1.0" encoding="utf-8"?>
-<p:sld xmlns:a="http://schemas.openxmlformats.org/drawingml/2006/main" xmlns:r="http://schemas.openxmlformats.org/officeDocument/2006/relationships" xmlns:p="http://schemas.openxmlformats.org/presentationml/2006/main">
-  <p:cSld>
-    <p:bg>
-      <p:bgPr>
-        <a:solidFill>
-          <a:srgbClr val="F0F4FF"/>
-        </a:solidFill>
-        <a:effectLst/>
-      </p:bgPr>
-    </p:bg>
-    <p:spTree>
-      <p:nvGrpSpPr>
-        <p:cNvPr id="1" name=""/>
-        <p:cNvGrpSpPr/>
-        <p:nvPr/>
-      </p:nvGrpSpPr>
-      <p:grpSpPr>
-        <a:xfrm>
-          <a:off x="0" y="0"/>
-          <a:ext cx="0" cy="0"/>
-          <a:chOff x="0" y="0"/>
-          <a:chExt cx="0" cy="0"/>
-        </a:xfrm>
-      </p:grpSpPr>
-      <p:sp>
-        <p:nvSpPr>
-          <p:cNvPr id="2" name="AccentStripe"/>
-          <p:cNvSpPr/>
-          <p:nvPr/>
-        </p:nvSpPr>
-        <p:spPr>
-          <a:xfrm>
-            <a:off x="0" y="0"/>
-            <a:ext cx="91440" cy="5143500"/>
-          </a:xfrm>
-          <a:prstGeom prst="rect">
-            <a:avLst/>
-          </a:prstGeom>
-          <a:solidFill>
-            <a:srgbClr val="4472C4"/>
-          </a:solidFill>
-        </p:spPr>
-        <p:txBody>
-          <a:bodyPr/>
-          <a:lstStyle/>
-          <a:p>
-            <a:endParaRPr lang="de-DE"/>
-          </a:p>
-        </p:txBody>
-      </p:sp>
-      <p:sp>
-        <p:nvSpPr>
-          <p:cNvPr id="3" name="Title"/>
-          <p:cNvSpPr/>
-          <p:nvPr/>
-        </p:nvSpPr>
-        <p:spPr>
-          <a:xfrm>
-            <a:off x="457200" y="256032"/>
-            <a:ext cx="8229600" cy="594360"/>
-          </a:xfrm>
-          <a:prstGeom prst="rect">
-            <a:avLst/>
-          </a:prstGeom>
-          <a:noFill/>
-          <a:ln/>
-        </p:spPr>
-        <p:txBody>
-          <a:bodyPr wrap="square" lIns="114300" tIns="91440" rIns="114300" bIns="91440" rtlCol="0" anchor="ctr"/>
-          <a:lstStyle/>
-          <a:p>
-            <a:pPr marL="0" indent="0" algn="l">
-              <a:buNone/>
-            </a:pPr>
-            <a:r>
-              <a:rPr lang="de-DE" sz="2800" b="1" dirty="0">
-                <a:solidFill>
-                  <a:srgbClr val="1A1A2E"/>
-                </a:solidFill>
-                <a:latin typeface="Arial Black" pitchFamily="49" charset="0"/>
-              </a:rPr>
-              <a:t>database.py – Flexible Datenbankzugriffe</a:t>
-            </a:r>
-          </a:p>
-        </p:txBody>
-      </p:sp>
-      <p:sp>
-        <p:nvSpPr>
-          <p:cNvPr id="4" name="Subtitle"/>
-          <p:cNvSpPr/>
-          <p:nvPr/>
-        </p:nvSpPr>
-        <p:spPr>
-          <a:xfrm>
-            <a:off x="457200" y="804672"/>
-            <a:ext cx="8229600" cy="320040"/>
-          </a:xfrm>
-          <a:prstGeom prst="rect">
-            <a:avLst/>
-          </a:prstGeom>
-          <a:noFill/>
-          <a:ln/>
-        </p:spPr>
-        <p:txBody>
-          <a:bodyPr wrap="square" lIns="114300" tIns="91440" rIns="114300" bIns="91440" rtlCol="0" anchor="ctr"/>
-          <a:lstStyle/>
-          <a:p>
-            <a:pPr marL="0" indent="0" algn="l">
-              <a:buNone/>
-            </a:pPr>
-            <a:r>
-              <a:rPr lang="de-DE" sz="1200" dirty="0">
-                <a:solidFill>
-                  <a:srgbClr val="8892A4"/>
-                </a:solidFill>
-                <a:latin typeface="Calibri" pitchFamily="49" charset="0"/>
-              </a:rPr>
-              <a:t>row_factory · Schema-Migration · SQL-Injection-Schutz</a:t>
-            </a:r>
-          </a:p>
-        </p:txBody>
-      </p:sp>
-      <p:sp>
-        <p:nvSpPr>
-          <p:cNvPr id="5" name="CodeCard"/>
-          <p:cNvSpPr/>
-          <p:nvPr/>
-        </p:nvSpPr>
-        <p:spPr>
-          <a:xfrm>
-            <a:off x="365760" y="1234440"/>
-            <a:ext cx="5250000" cy="3650000"/>
-          </a:xfrm>
-          <a:prstGeom prst="rect">
-            <a:avLst/>
-          </a:prstGeom>
-          <a:solidFill>
-            <a:srgbClr val="121224"/>
-          </a:solidFill>
-          <a:ln w="9525">
-            <a:solidFill>
-              <a:srgbClr val="4472C4"/>
-            </a:solidFill>
-            <a:prstDash val="solid"/>
-          </a:ln>
-        </p:spPr>
-        <p:txBody>
-          <a:bodyPr/>
-          <a:lstStyle/>
-          <a:p>
-            <a:endParaRPr lang="de-DE"/>
-          </a:p>
-        </p:txBody>
-      </p:sp>
-      <p:sp>
-        <p:nvSpPr>
-          <p:cNvPr id="6" name="CodeText"/>
-          <p:cNvSpPr/>
-          <p:nvPr/>
-        </p:nvSpPr>
-        <p:spPr>
-          <a:xfrm>
-            <a:off x="457200" y="1325880"/>
-            <a:ext cx="5067120" cy="3467120"/>
-          </a:xfrm>
-          <a:prstGeom prst="rect">
-            <a:avLst/>
-          </a:prstGeom>
-          <a:noFill/>
-          <a:ln/>
-        </p:spPr>
-        <p:txBody>
-          <a:bodyPr wrap="square" lIns="114300" tIns="91440" rIns="114300" bIns="91440" rtlCol="0" anchor="t"/>
-          <a:lstStyle/>
-          <a:p>
-            <a:pPr marL="0" indent="0" algn="l">
-              <a:buNone/>
-            </a:pPr>
-            <a:r>
-              <a:rPr lang="de-DE" sz="980" i="1" dirty="0">
-                <a:solidFill>
-                  <a:srgbClr val="5C6370"/>
-                </a:solidFill>
-                <a:latin typeface="Consolas" pitchFamily="49" charset="0"/>
-              </a:rPr>
-              <a:t># row_factory: Spaltenzugriff per Name statt Index</a:t>
-            </a:r>
-          </a:p>
-          <a:p>
-            <a:pPr marL="0" indent="0" algn="l">
-              <a:buNone/>
-            </a:pPr>
-            <a:r>
-              <a:rPr lang="de-DE" sz="980" dirty="0">
-                <a:solidFill>
-                  <a:srgbClr val="56B6C2"/>
-                </a:solidFill>
-                <a:latin typeface="Consolas" pitchFamily="49" charset="0"/>
-              </a:rPr>
-              <a:t>conn</a:t>
-            </a:r>
-            <a:r>
-              <a:rPr lang="de-DE" sz="980" dirty="0">
-                <a:solidFill>
-                  <a:srgbClr val="ABB2BF"/>
-                </a:solidFill>
-                <a:latin typeface="Consolas" pitchFamily="49" charset="0"/>
-              </a:rPr>
-              <a:t>.row_factory = </a:t>
-            </a:r>
-            <a:r>
-              <a:rPr lang="de-DE" sz="980" dirty="0">
-                <a:solidFill>
-                  <a:srgbClr val="61AFEF"/>
-                </a:solidFill>
-                <a:latin typeface="Consolas" pitchFamily="49" charset="0"/>
-              </a:rPr>
-              <a:t>sqlite3</a:t>
-            </a:r>
-            <a:r>
-              <a:rPr lang="de-DE" sz="980" dirty="0">
-                <a:solidFill>
-                  <a:srgbClr val="ABB2BF"/>
-                </a:solidFill>
-                <a:latin typeface="Consolas" pitchFamily="49" charset="0"/>
-              </a:rPr>
-              <a:t>.Row</a:t>
-            </a:r>
-          </a:p>
-          <a:p>
-            <a:pPr marL="0" indent="0" algn="l">
-              <a:buNone/>
-            </a:pPr>
-            <a:r>
-              <a:rPr lang="de-DE" sz="980" dirty="0">
-                <a:solidFill>
-                  <a:srgbClr val="56B6C2"/>
-                </a:solidFill>
-                <a:latin typeface="Consolas" pitchFamily="49" charset="0"/>
-              </a:rPr>
-              <a:t>row</a:t>
-            </a:r>
-            <a:r>
-              <a:rPr lang="de-DE" sz="980" dirty="0">
-                <a:solidFill>
-                  <a:srgbClr val="ABB2BF"/>
-                </a:solidFill>
-                <a:latin typeface="Consolas" pitchFamily="49" charset="0"/>
-              </a:rPr>
-              <a:t> = cursor.</a:t>
-            </a:r>
-            <a:r>
-              <a:rPr lang="de-DE" sz="980" dirty="0">
-                <a:solidFill>
-                  <a:srgbClr val="61AFEF"/>
-                </a:solidFill>
-                <a:latin typeface="Consolas" pitchFamily="49" charset="0"/>
-              </a:rPr>
-              <a:t>fetchone</a:t>
-            </a:r>
-            <a:r>
-              <a:rPr lang="de-DE" sz="980" dirty="0">
-                <a:solidFill>
-                  <a:srgbClr val="ABB2BF"/>
-                </a:solidFill>
-                <a:latin typeface="Consolas" pitchFamily="49" charset="0"/>
-              </a:rPr>
-              <a:t>()</a:t>
-            </a:r>
-          </a:p>
-          <a:p>
-            <a:pPr marL="0" indent="0" algn="l">
-              <a:buNone/>
-            </a:pPr>
-            <a:r>
-              <a:rPr lang="de-DE" sz="980" dirty="0">
-                <a:solidFill>
-                  <a:srgbClr val="56B6C2"/>
-                </a:solidFill>
-                <a:latin typeface="Consolas" pitchFamily="49" charset="0"/>
-              </a:rPr>
-              <a:t>print</a:t>
-            </a:r>
-            <a:r>
-              <a:rPr lang="de-DE" sz="980" dirty="0">
-                <a:solidFill>
-                  <a:srgbClr val="ABB2BF"/>
-                </a:solidFill>
-                <a:latin typeface="Consolas" pitchFamily="49" charset="0"/>
-              </a:rPr>
-              <a:t>(row[</a:t>
-            </a:r>
-            <a:r>
-              <a:rPr lang="de-DE" sz="980" dirty="0">
-                <a:solidFill>
-                  <a:srgbClr val="98C379"/>
-                </a:solidFill>
-                <a:latin typeface="Consolas" pitchFamily="49" charset="0"/>
-              </a:rPr>
-              <a:t>"username"</a:t>
-            </a:r>
-            <a:r>
-              <a:rPr lang="de-DE" sz="980" dirty="0">
-                <a:solidFill>
-                  <a:srgbClr val="ABB2BF"/>
-                </a:solidFill>
-                <a:latin typeface="Consolas" pitchFamily="49" charset="0"/>
-              </a:rPr>
-              <a:t>])  </a:t>
-            </a:r>
-            <a:r>
-              <a:rPr lang="de-DE" sz="980" i="1" dirty="0">
-                <a:solidFill>
-                  <a:srgbClr val="5C6370"/>
-                </a:solidFill>
-                <a:latin typeface="Consolas" pitchFamily="49" charset="0"/>
-              </a:rPr>
-              <a:t># statt row[1]</a:t>
-            </a:r>
-          </a:p>
-          <a:p>
-            <a:pPr marL="0" indent="0" algn="l">
-              <a:buNone/>
-            </a:pPr>
-            <a:r>
-              <a:rPr lang="de-DE" sz="980" dirty="0">
-                <a:solidFill>
-                  <a:srgbClr val="56B6C2"/>
-                </a:solidFill>
-                <a:latin typeface="Consolas" pitchFamily="49" charset="0"/>
-              </a:rPr>
-              <a:t>return</a:t>
-            </a:r>
-            <a:r>
-              <a:rPr lang="de-DE" sz="980" dirty="0">
-                <a:solidFill>
-                  <a:srgbClr val="ABB2BF"/>
-                </a:solidFill>
-                <a:latin typeface="Consolas" pitchFamily="49" charset="0"/>
-              </a:rPr>
-              <a:t> </a:t>
-            </a:r>
-            <a:r>
-              <a:rPr lang="de-DE" sz="980" dirty="0">
-                <a:solidFill>
-                  <a:srgbClr val="61AFEF"/>
-                </a:solidFill>
-                <a:latin typeface="Consolas" pitchFamily="49" charset="0"/>
-              </a:rPr>
-              <a:t>dict</a:t>
-            </a:r>
-            <a:r>
-              <a:rPr lang="de-DE" sz="980" dirty="0">
-                <a:solidFill>
-                  <a:srgbClr val="ABB2BF"/>
-                </a:solidFill>
-                <a:latin typeface="Consolas" pitchFamily="49" charset="0"/>
-              </a:rPr>
-              <a:t>(row)      </a:t>
-            </a:r>
-            <a:r>
-              <a:rPr lang="de-DE" sz="980" i="1" dirty="0">
-                <a:solidFill>
-                  <a:srgbClr val="5C6370"/>
-                </a:solidFill>
-                <a:latin typeface="Consolas" pitchFamily="49" charset="0"/>
-              </a:rPr>
-              <a:t># einfache Serialisierung</a:t>
-            </a:r>
-          </a:p>
-          <a:p>
-            <a:pPr>
-              <a:buNone/>
-            </a:pPr>
-            <a:endParaRPr lang="de-DE" sz="600" dirty="0"/>
-          </a:p>
-          <a:p>
-            <a:pPr marL="0" indent="0" algn="l">
-              <a:buNone/>
-            </a:pPr>
-            <a:r>
-              <a:rPr lang="de-DE" sz="980" i="1" dirty="0">
-                <a:solidFill>
-                  <a:srgbClr val="5C6370"/>
-                </a:solidFill>
-                <a:latin typeface="Consolas" pitchFamily="49" charset="0"/>
-              </a:rPr>
-              <a:t># Schema-Migration: neue Spalte nachrüsten</a:t>
-            </a:r>
-          </a:p>
-          <a:p>
-            <a:pPr marL="0" indent="0" algn="l">
-              <a:buNone/>
-            </a:pPr>
-            <a:r>
-              <a:rPr lang="de-DE" sz="980" dirty="0">
-                <a:solidFill>
-                  <a:srgbClr val="56B6C2"/>
-                </a:solidFill>
-                <a:latin typeface="Consolas" pitchFamily="49" charset="0"/>
-              </a:rPr>
-              <a:t>try</a:t>
-            </a:r>
-            <a:r>
-              <a:rPr lang="de-DE" sz="980" dirty="0">
-                <a:solidFill>
-                  <a:srgbClr val="ABB2BF"/>
-                </a:solidFill>
-                <a:latin typeface="Consolas" pitchFamily="49" charset="0"/>
-              </a:rPr>
-              <a:t>:</a:t>
-            </a:r>
-          </a:p>
-          <a:p>
-            <a:pPr marL="0" indent="0" algn="l">
-              <a:buNone/>
-            </a:pPr>
-            <a:r>
-              <a:rPr lang="de-DE" sz="980" dirty="0">
-                <a:solidFill>
-                  <a:srgbClr val="ABB2BF"/>
-                </a:solidFill>
-                <a:latin typeface="Consolas" pitchFamily="49" charset="0"/>
-              </a:rPr>
-              <a:t>    cursor.</a:t>
-            </a:r>
-            <a:r>
-              <a:rPr lang="de-DE" sz="980" dirty="0">
-                <a:solidFill>
-                  <a:srgbClr val="61AFEF"/>
-                </a:solidFill>
-                <a:latin typeface="Consolas" pitchFamily="49" charset="0"/>
-              </a:rPr>
-              <a:t>execute</a:t>
-            </a:r>
-            <a:r>
-              <a:rPr lang="de-DE" sz="980" dirty="0">
-                <a:solidFill>
-                  <a:srgbClr val="ABB2BF"/>
-                </a:solidFill>
-                <a:latin typeface="Consolas" pitchFamily="49" charset="0"/>
-              </a:rPr>
-              <a:t>(</a:t>
-            </a:r>
-          </a:p>
-          <a:p>
-            <a:pPr marL="0" indent="0" algn="l">
-              <a:buNone/>
-            </a:pPr>
-            <a:r>
-              <a:rPr lang="de-DE" sz="980" dirty="0">
-                <a:solidFill>
-                  <a:srgbClr val="ABB2BF"/>
-                </a:solidFill>
-                <a:latin typeface="Consolas" pitchFamily="49" charset="0"/>
-              </a:rPr>
-              <a:t>        </a:t>
-            </a:r>
-            <a:r>
-              <a:rPr lang="de-DE" sz="980" dirty="0">
-                <a:solidFill>
-                  <a:srgbClr val="98C379"/>
-                </a:solidFill>
-                <a:latin typeface="Consolas" pitchFamily="49" charset="0"/>
-              </a:rPr>
-              <a:t>"ALTER TABLE users"</a:t>
-            </a:r>
-          </a:p>
-          <a:p>
-            <a:pPr marL="0" indent="0" algn="l">
-              <a:buNone/>
-            </a:pPr>
-            <a:r>
-              <a:rPr lang="de-DE" sz="980" dirty="0">
-                <a:solidFill>
-                  <a:srgbClr val="ABB2BF"/>
-                </a:solidFill>
-                <a:latin typeface="Consolas" pitchFamily="49" charset="0"/>
-              </a:rPr>
-              <a:t>        </a:t>
-            </a:r>
-            <a:r>
-              <a:rPr lang="de-DE" sz="980" dirty="0">
-                <a:solidFill>
-                  <a:srgbClr val="98C379"/>
-                </a:solidFill>
-                <a:latin typeface="Consolas" pitchFamily="49" charset="0"/>
-              </a:rPr>
-              <a:t>"ADD COLUMN language TEXT DEFAULT 'en'"</a:t>
-            </a:r>
-          </a:p>
-          <a:p>
-            <a:pPr marL="0" indent="0" algn="l">
-              <a:buNone/>
-            </a:pPr>
-            <a:r>
-              <a:rPr lang="de-DE" sz="980" dirty="0">
-                <a:solidFill>
-                  <a:srgbClr val="ABB2BF"/>
-                </a:solidFill>
-                <a:latin typeface="Consolas" pitchFamily="49" charset="0"/>
-              </a:rPr>
-              <a:t>    )</a:t>
-            </a:r>
-          </a:p>
-          <a:p>
-            <a:pPr marL="0" indent="0" algn="l">
-              <a:buNone/>
-            </a:pPr>
-            <a:r>
-              <a:rPr lang="de-DE" sz="980" dirty="0">
-                <a:solidFill>
-                  <a:srgbClr val="ABB2BF"/>
-                </a:solidFill>
-                <a:latin typeface="Consolas" pitchFamily="49" charset="0"/>
-              </a:rPr>
-              <a:t>    conn.</a:t>
-            </a:r>
-            <a:r>
-              <a:rPr lang="de-DE" sz="980" dirty="0">
-                <a:solidFill>
-                  <a:srgbClr val="61AFEF"/>
-                </a:solidFill>
-                <a:latin typeface="Consolas" pitchFamily="49" charset="0"/>
-              </a:rPr>
-              <a:t>commit</a:t>
-            </a:r>
-            <a:r>
-              <a:rPr lang="de-DE" sz="980" dirty="0">
-                <a:solidFill>
-                  <a:srgbClr val="ABB2BF"/>
-                </a:solidFill>
-                <a:latin typeface="Consolas" pitchFamily="49" charset="0"/>
-              </a:rPr>
-              <a:t>()</a:t>
-            </a:r>
-          </a:p>
-          <a:p>
-            <a:pPr marL="0" indent="0" algn="l">
-              <a:buNone/>
-            </a:pPr>
-            <a:r>
-              <a:rPr lang="de-DE" sz="980" dirty="0">
-                <a:solidFill>
-                  <a:srgbClr val="56B6C2"/>
-                </a:solidFill>
-                <a:latin typeface="Consolas" pitchFamily="49" charset="0"/>
-              </a:rPr>
-              <a:t>except</a:t>
-            </a:r>
-            <a:r>
-              <a:rPr lang="de-DE" sz="980" dirty="0">
-                <a:solidFill>
-                  <a:srgbClr val="ABB2BF"/>
-                </a:solidFill>
-                <a:latin typeface="Consolas" pitchFamily="49" charset="0"/>
-              </a:rPr>
-              <a:t> sqlite3.</a:t>
-            </a:r>
-            <a:r>
-              <a:rPr lang="de-DE" sz="980" dirty="0">
-                <a:solidFill>
-                  <a:srgbClr val="61AFEF"/>
-                </a:solidFill>
-                <a:latin typeface="Consolas" pitchFamily="49" charset="0"/>
-              </a:rPr>
-              <a:t>OperationalError</a:t>
-            </a:r>
-            <a:r>
-              <a:rPr lang="de-DE" sz="980" dirty="0">
-                <a:solidFill>
-                  <a:srgbClr val="ABB2BF"/>
-                </a:solidFill>
-                <a:latin typeface="Consolas" pitchFamily="49" charset="0"/>
-              </a:rPr>
-              <a:t>:</a:t>
-            </a:r>
-          </a:p>
-          <a:p>
-            <a:pPr marL="0" indent="0" algn="l">
-              <a:buNone/>
-            </a:pPr>
-            <a:r>
-              <a:rPr lang="de-DE" sz="980" dirty="0">
-                <a:solidFill>
-                  <a:srgbClr val="ABB2BF"/>
-                </a:solidFill>
-                <a:latin typeface="Consolas" pitchFamily="49" charset="0"/>
-              </a:rPr>
-              <a:t>    </a:t>
-            </a:r>
-            <a:r>
-              <a:rPr lang="de-DE" sz="980" dirty="0">
-                <a:solidFill>
-                  <a:srgbClr val="56B6C2"/>
-                </a:solidFill>
-                <a:latin typeface="Consolas" pitchFamily="49" charset="0"/>
-              </a:rPr>
-              <a:t>pass</a:t>
-            </a:r>
-            <a:r>
-              <a:rPr lang="de-DE" sz="980" dirty="0">
-                <a:solidFill>
-                  <a:srgbClr val="ABB2BF"/>
-                </a:solidFill>
-                <a:latin typeface="Consolas" pitchFamily="49" charset="0"/>
-              </a:rPr>
-              <a:t>  </a:t>
-            </a:r>
-            <a:r>
-              <a:rPr lang="de-DE" sz="980" i="1" dirty="0">
-                <a:solidFill>
-                  <a:srgbClr val="5C6370"/>
-                </a:solidFill>
-                <a:latin typeface="Consolas" pitchFamily="49" charset="0"/>
-              </a:rPr>
-              <a:t># Spalte existiert bereits</a:t>
-            </a:r>
-          </a:p>
-          <a:p>
-            <a:pPr>
-              <a:buNone/>
-            </a:pPr>
-            <a:endParaRPr lang="de-DE" sz="600" dirty="0"/>
-          </a:p>
-          <a:p>
-            <a:pPr marL="0" indent="0" algn="l">
-              <a:buNone/>
-            </a:pPr>
-            <a:r>
-              <a:rPr lang="de-DE" sz="980" i="1" dirty="0">
-                <a:solidFill>
-                  <a:srgbClr val="5C6370"/>
-                </a:solidFill>
-                <a:latin typeface="Consolas" pitchFamily="49" charset="0"/>
-              </a:rPr>
-              <a:t># SQL-Injection-Schutz: Parameterized Queries</a:t>
-            </a:r>
-          </a:p>
-          <a:p>
-            <a:pPr marL="0" indent="0" algn="l">
-              <a:buNone/>
-            </a:pPr>
-            <a:r>
-              <a:rPr lang="de-DE" sz="980" dirty="0">
-                <a:solidFill>
-                  <a:srgbClr val="ABB2BF"/>
-                </a:solidFill>
-                <a:latin typeface="Consolas" pitchFamily="49" charset="0"/>
-              </a:rPr>
-              <a:t>cursor.</a:t>
-            </a:r>
-            <a:r>
-              <a:rPr lang="de-DE" sz="980" dirty="0">
-                <a:solidFill>
-                  <a:srgbClr val="61AFEF"/>
-                </a:solidFill>
-                <a:latin typeface="Consolas" pitchFamily="49" charset="0"/>
-              </a:rPr>
-              <a:t>execute</a:t>
-            </a:r>
-            <a:r>
-              <a:rPr lang="de-DE" sz="980" dirty="0">
-                <a:solidFill>
-                  <a:srgbClr val="ABB2BF"/>
-                </a:solidFill>
-                <a:latin typeface="Consolas" pitchFamily="49" charset="0"/>
-              </a:rPr>
-              <a:t>(</a:t>
-            </a:r>
-          </a:p>
-          <a:p>
-            <a:pPr marL="0" indent="0" algn="l">
-              <a:buNone/>
-            </a:pPr>
-            <a:r>
-              <a:rPr lang="de-DE" sz="980" dirty="0">
-                <a:solidFill>
-                  <a:srgbClr val="ABB2BF"/>
-                </a:solidFill>
-                <a:latin typeface="Consolas" pitchFamily="49" charset="0"/>
-              </a:rPr>
-              <a:t>    </a:t>
-            </a:r>
-            <a:r>
-              <a:rPr lang="de-DE" sz="980" dirty="0">
-                <a:solidFill>
-                  <a:srgbClr val="98C379"/>
-                </a:solidFill>
-                <a:latin typeface="Consolas" pitchFamily="49" charset="0"/>
-              </a:rPr>
-              <a:t>"SELECT * FROM users WHERE username = ?"</a:t>
-            </a:r>
-            <a:r>
-              <a:rPr lang="de-DE" sz="980" dirty="0">
-                <a:solidFill>
-                  <a:srgbClr val="ABB2BF"/>
-                </a:solidFill>
-                <a:latin typeface="Consolas" pitchFamily="49" charset="0"/>
-              </a:rPr>
-              <a:t>,</a:t>
-            </a:r>
-          </a:p>
-          <a:p>
-            <a:pPr marL="0" indent="0" algn="l">
-              <a:buNone/>
-            </a:pPr>
-            <a:r>
-              <a:rPr lang="de-DE" sz="980" dirty="0">
-                <a:solidFill>
-                  <a:srgbClr val="ABB2BF"/>
-                </a:solidFill>
-                <a:latin typeface="Consolas" pitchFamily="49" charset="0"/>
-              </a:rPr>
-              <a:t>    (username,)  </a:t>
-            </a:r>
-            <a:r>
-              <a:rPr lang="de-DE" sz="980" i="1" dirty="0">
-                <a:solidFill>
-                  <a:srgbClr val="5C6370"/>
-                </a:solidFill>
-                <a:latin typeface="Consolas" pitchFamily="49" charset="0"/>
-              </a:rPr>
-              <a:t># ? wird sicher ersetzt</a:t>
-            </a:r>
-          </a:p>
-          <a:p>
-            <a:pPr marL="0" indent="0" algn="l">
-              <a:buNone/>
-            </a:pPr>
-            <a:r>
-              <a:rPr lang="de-DE" sz="980" dirty="0">
-                <a:solidFill>
-                  <a:srgbClr val="ABB2BF"/>
-                </a:solidFill>
-                <a:latin typeface="Consolas" pitchFamily="49" charset="0"/>
-              </a:rPr>
-              <a:t>)</a:t>
-            </a:r>
-          </a:p>
-        </p:txBody>
-      </p:sp>
-      <p:sp>
-        <p:nvSpPr>
-          <p:cNvPr id="7" name="BulletCard"/>
-          <p:cNvSpPr/>
-          <p:nvPr/>
-        </p:nvSpPr>
-        <p:spPr>
-          <a:xfrm>
-            <a:off x="5707200" y="1234440"/>
-            <a:ext cx="3071040" cy="3650000"/>
-          </a:xfrm>
-          <a:prstGeom prst="rect">
-            <a:avLst/>
-          </a:prstGeom>
-          <a:solidFill>
-            <a:srgbClr val="FFFFFF"/>
-          </a:solidFill>
-          <a:ln w="6350">
-            <a:solidFill>
-              <a:srgbClr val="D0D7E8"/>
-            </a:solidFill>
-            <a:prstDash val="solid"/>
-          </a:ln>
-        </p:spPr>
-        <p:txBody>
-          <a:bodyPr/>
-          <a:lstStyle/>
-          <a:p>
-            <a:endParaRPr lang="de-DE"/>
-          </a:p>
-        </p:txBody>
-      </p:sp>
-      <p:sp>
-        <p:nvSpPr>
-          <p:cNvPr id="8" name="BulletText"/>
-          <p:cNvSpPr/>
-          <p:nvPr/>
-        </p:nvSpPr>
-        <p:spPr>
-          <a:xfrm>
-            <a:off x="5798640" y="1325880"/>
-            <a:ext cx="2888160" cy="3467120"/>
-          </a:xfrm>
-          <a:prstGeom prst="rect">
-            <a:avLst/>
-          </a:prstGeom>
-          <a:noFill/>
-          <a:ln/>
-        </p:spPr>
-        <p:txBody>
-          <a:bodyPr wrap="square" lIns="114300" tIns="91440" rIns="114300" bIns="91440" rtlCol="0" anchor="t"/>
-          <a:lstStyle/>
-          <a:p>
-            <a:pPr marL="342900" indent="-342900" algn="l">
-              <a:buChar char="▸"/>
-            </a:pPr>
-            <a:r>
-              <a:rPr lang="de-DE" sz="1150" b="1" dirty="0">
-                <a:solidFill>
-                  <a:srgbClr val="2A3A5E"/>
-                </a:solidFill>
-                <a:latin typeface="Calibri" pitchFamily="49" charset="0"/>
-              </a:rPr>
-              <a:t>sqlite3.Row</a:t>
-            </a:r>
-          </a:p>
-          <a:p>
-            <a:pPr marL="342900" indent="0" algn="l">
-              <a:buNone/>
-            </a:pPr>
-            <a:r>
-              <a:rPr lang="de-DE" sz="1000" dirty="0">
-                <a:solidFill>
-                  <a:srgbClr val="8892A4"/>
-                </a:solidFill>
-                <a:latin typeface="Calibri" pitchFamily="49" charset="0"/>
-              </a:rPr>
-              <a:t>Spaltenzugriff per Name: row["username"] statt row[1]</a:t>
-            </a:r>
-          </a:p>
-          <a:p>
-            <a:pPr marL="342900" indent="-342900" algn="l">
-              <a:spcBef>
-                <a:spcPts val="160"/>
-              </a:spcBef>
-              <a:buChar char="▸"/>
-            </a:pPr>
-            <a:r>
-              <a:rPr lang="de-DE" sz="1150" b="1" dirty="0">
-                <a:solidFill>
-                  <a:srgbClr val="2A3A5E"/>
-                </a:solidFill>
-                <a:latin typeface="Calibri" pitchFamily="49" charset="0"/>
-              </a:rPr>
-              <a:t>dict(row)</a:t>
-            </a:r>
-          </a:p>
-          <a:p>
-            <a:pPr marL="342900" indent="0" algn="l">
-              <a:buNone/>
-            </a:pPr>
-            <a:r>
-              <a:rPr lang="de-DE" sz="1000" dirty="0">
-                <a:solidFill>
-                  <a:srgbClr val="8892A4"/>
-                </a:solidFill>
-                <a:latin typeface="Calibri" pitchFamily="49" charset="0"/>
-              </a:rPr>
-              <a:t>Einfache Konvertierung für den Rest der App</a:t>
-            </a:r>
-          </a:p>
-          <a:p>
-            <a:pPr marL="342900" indent="-342900" algn="l">
-              <a:spcBef>
-                <a:spcPts val="160"/>
-              </a:spcBef>
-              <a:buChar char="▸"/>
-            </a:pPr>
-            <a:r>
-              <a:rPr lang="de-DE" sz="1150" b="1" dirty="0">
-                <a:solidFill>
-                  <a:srgbClr val="2A3A5E"/>
-                </a:solidFill>
-                <a:latin typeface="Calibri" pitchFamily="49" charset="0"/>
-              </a:rPr>
-              <a:t>try/except Migration</a:t>
-            </a:r>
-          </a:p>
-          <a:p>
-            <a:pPr marL="342900" indent="0" algn="l">
-              <a:buNone/>
-            </a:pPr>
-            <a:r>
-              <a:rPr lang="de-DE" sz="1000" dirty="0">
-                <a:solidFill>
-                  <a:srgbClr val="8892A4"/>
-                </a:solidFill>
-                <a:latin typeface="Calibri" pitchFamily="49" charset="0"/>
-              </a:rPr>
-              <a:t>DB bleibt kompatibel wenn Spalte schon existiert</a:t>
-            </a:r>
-          </a:p>
-          <a:p>
-            <a:pPr marL="342900" indent="-342900" algn="l">
-              <a:spcBef>
-                <a:spcPts val="160"/>
-              </a:spcBef>
-              <a:buChar char="▸"/>
-            </a:pPr>
-            <a:r>
-              <a:rPr lang="de-DE" sz="1150" b="1" dirty="0">
-                <a:solidFill>
-                  <a:srgbClr val="2A3A5E"/>
-                </a:solidFill>
-                <a:latin typeface="Calibri" pitchFamily="49" charset="0"/>
-              </a:rPr>
-              <a:t>?-Platzhalter</a:t>
-            </a:r>
-          </a:p>
-          <a:p>
-            <a:pPr marL="342900" indent="0" algn="l">
-              <a:buNone/>
-            </a:pPr>
-            <a:r>
-              <a:rPr lang="de-DE" sz="1000" dirty="0">
-                <a:solidFill>
-                  <a:srgbClr val="8892A4"/>
-                </a:solidFill>
-                <a:latin typeface="Calibri" pitchFamily="49" charset="0"/>
-              </a:rPr>
-              <a:t>Schutz vor SQL-Injection (OWASP Top 10)</a:t>
-            </a:r>
-          </a:p>
-          <a:p>
-            <a:pPr marL="342900" indent="-342900" algn="l">
-              <a:spcBef>
-                <a:spcPts val="160"/>
-              </a:spcBef>
-              <a:buChar char="▸"/>
-            </a:pPr>
-            <a:r>
-              <a:rPr lang="de-DE" sz="1150" b="1" dirty="0">
-                <a:solidFill>
-                  <a:srgbClr val="2A3A5E"/>
-                </a:solidFill>
-                <a:latin typeface="Calibri" pitchFamily="49" charset="0"/>
-              </a:rPr>
-              <a:t>IntegrityError</a:t>
-            </a:r>
-          </a:p>
-          <a:p>
-            <a:pPr marL="342900" indent="0" algn="l">
-              <a:buNone/>
-            </a:pPr>
-            <a:r>
-              <a:rPr lang="de-DE" sz="1000" dirty="0">
-                <a:solidFill>
-                  <a:srgbClr val="8892A4"/>
-                </a:solidFill>
-                <a:latin typeface="Calibri" pitchFamily="49" charset="0"/>
-              </a:rPr>
-              <a:t>Doppelte Benutzernamen werden sauber abgefangen</a:t>
-            </a:r>
-          </a:p>
-        </p:txBody>
-      </p:sp>
-      <p:sp>
-        <p:nvSpPr>
-          <p:cNvPr id="9" name="Textfeld 8">
-            <a:extLst>
-              <a:ext uri="{FF2B5EF4-FFF2-40B4-BE49-F238E27FC236}">
-                <a16:creationId xmlns:a16="http://schemas.microsoft.com/office/drawing/2014/main" id="{3FE34108-9161-8AE9-4D11-BFE9571AD1A5}"/>
-              </a:ext>
-            </a:extLst>
-          </p:cNvPr>
-          <p:cNvSpPr txBox="1"/>
-          <p:nvPr/>
-        </p:nvSpPr>
-        <p:spPr>
-          <a:xfrm>
-            <a:off x="8737093" y="4875028"/>
-            <a:ext cx="228600" cy="215444"/>
-          </a:xfrm>
-          <a:prstGeom prst="rect">
-            <a:avLst/>
-          </a:prstGeom>
-          <a:noFill/>
-        </p:spPr>
-        <p:txBody>
-          <a:bodyPr wrap="square" rtlCol="0">
-            <a:spAutoFit/>
-          </a:bodyPr>
-          <a:lstStyle/>
-          <a:p>
-            <a:r>
-              <a:rPr lang="en-US" sz="800" dirty="0">
-                <a:latin typeface="Calibri" pitchFamily="34" charset="0"/>
-                <a:ea typeface="Calibri" pitchFamily="34" charset="-122"/>
-                <a:cs typeface="Calibri" pitchFamily="34" charset="-120"/>
-              </a:rPr>
-              <a:t>4</a:t>
-            </a:r>
-            <a:endParaRPr lang="de-DE" sz="800" dirty="0"/>
-          </a:p>
-        </p:txBody>
-      </p:sp>
-    </p:spTree>
-  </p:cSld>
-  <p:clrMapOvr>
-    <a:masterClrMapping/>
-  </p:clrMapOvr>
-</p:sld>
-</file>
-
-<file path=ppt/slides/slide5.xml><?xml version="1.0" encoding="utf-8"?>
 <p:sld xmlns:a="http://schemas.openxmlformats.org/drawingml/2006/main" xmlns:r="http://schemas.openxmlformats.org/officeDocument/2006/relationships" xmlns:p="http://schemas.openxmlformats.org/presentationml/2006/main">
   <p:cSld name="Slide 7">
     <p:bg>
@@ -20480,7 +19589,7 @@
           </a:solidFill>
           <a:ln w="6350">
             <a:solidFill>
-              <a:srgbClr val="2A3A5E"/>
+              <a:srgbClr val="D0D7E8"/>
             </a:solidFill>
             <a:prstDash val="solid"/>
           </a:ln>
@@ -21051,7 +20160,7 @@
           </a:solidFill>
           <a:ln w="6350">
             <a:solidFill>
-              <a:srgbClr val="2A3A5E"/>
+              <a:srgbClr val="D0D7E8"/>
             </a:solidFill>
             <a:prstDash val="solid"/>
           </a:ln>
@@ -21673,7 +20782,1010 @@
             <a:r>
               <a:rPr lang="en-US" sz="800" dirty="0">
                 <a:solidFill>
-                  <a:srgbClr val="E94560"/>
+                  <a:srgbClr val="FFFFFF"/>
+                </a:solidFill>
+                <a:latin typeface="Calibri" pitchFamily="34" charset="0"/>
+                <a:ea typeface="Calibri" pitchFamily="34" charset="-122"/>
+                <a:cs typeface="Calibri" pitchFamily="34" charset="-120"/>
+              </a:rPr>
+              <a:t>4</a:t>
+            </a:r>
+            <a:endParaRPr lang="de-DE" sz="800" dirty="0"/>
+          </a:p>
+        </p:txBody>
+      </p:sp>
+    </p:spTree>
+  </p:cSld>
+  <p:clrMapOvr>
+    <a:masterClrMapping/>
+  </p:clrMapOvr>
+</p:sld>
+</file>
+
+<file path=ppt/slides/slide5.xml><?xml version="1.0" encoding="utf-8"?>
+<p:sld xmlns:a="http://schemas.openxmlformats.org/drawingml/2006/main" xmlns:r="http://schemas.openxmlformats.org/officeDocument/2006/relationships" xmlns:p="http://schemas.openxmlformats.org/presentationml/2006/main">
+  <p:cSld>
+    <p:bg>
+      <p:bgPr>
+        <a:solidFill>
+          <a:srgbClr val="0D0D1A"/>
+        </a:solidFill>
+        <a:effectLst/>
+      </p:bgPr>
+    </p:bg>
+    <p:spTree>
+      <p:nvGrpSpPr>
+        <p:cNvPr id="1" name=""/>
+        <p:cNvGrpSpPr/>
+        <p:nvPr/>
+      </p:nvGrpSpPr>
+      <p:grpSpPr>
+        <a:xfrm>
+          <a:off x="0" y="0"/>
+          <a:ext cx="0" cy="0"/>
+          <a:chOff x="0" y="0"/>
+          <a:chExt cx="0" cy="0"/>
+        </a:xfrm>
+      </p:grpSpPr>
+      <p:sp>
+        <p:nvSpPr>
+          <p:cNvPr id="2" name="AccentStripe"/>
+          <p:cNvSpPr/>
+          <p:nvPr/>
+        </p:nvSpPr>
+        <p:spPr>
+          <a:xfrm>
+            <a:off x="0" y="0"/>
+            <a:ext cx="91440" cy="5143500"/>
+          </a:xfrm>
+          <a:prstGeom prst="rect">
+            <a:avLst/>
+          </a:prstGeom>
+          <a:solidFill>
+            <a:srgbClr val="4472C4"/>
+          </a:solidFill>
+          <a:ln>
+            <a:solidFill/>
+          </a:ln>
+        </p:spPr>
+        <p:txBody>
+          <a:bodyPr/>
+          <a:lstStyle/>
+          <a:p>
+            <a:endParaRPr lang="de-DE"/>
+          </a:p>
+        </p:txBody>
+      </p:sp>
+      <p:sp>
+        <p:nvSpPr>
+          <p:cNvPr id="3" name="Title"/>
+          <p:cNvSpPr/>
+          <p:nvPr/>
+        </p:nvSpPr>
+        <p:spPr>
+          <a:xfrm>
+            <a:off x="457200" y="256032"/>
+            <a:ext cx="8229600" cy="594360"/>
+          </a:xfrm>
+          <a:prstGeom prst="rect">
+            <a:avLst/>
+          </a:prstGeom>
+          <a:noFill/>
+          <a:ln/>
+        </p:spPr>
+        <p:txBody>
+          <a:bodyPr wrap="square" lIns="114300" tIns="91440" rIns="114300" bIns="91440" rtlCol="0" anchor="ctr"/>
+          <a:lstStyle/>
+          <a:p>
+            <a:pPr marL="0" indent="0" algn="l">
+              <a:buNone/>
+            </a:pPr>
+            <a:r>
+              <a:rPr lang="de-DE" sz="2800" b="1" dirty="0">
+                <a:solidFill>
+                  <a:srgbClr val="FFFFFF"/>
+                </a:solidFill>
+                <a:latin typeface="Arial Black" pitchFamily="49" charset="0"/>
+              </a:rPr>
+              <a:t>database.py – Flexible Datenbankzugriffe</a:t>
+            </a:r>
+          </a:p>
+        </p:txBody>
+      </p:sp>
+      <p:sp>
+        <p:nvSpPr>
+          <p:cNvPr id="4" name="Subtitle"/>
+          <p:cNvSpPr/>
+          <p:nvPr/>
+        </p:nvSpPr>
+        <p:spPr>
+          <a:xfrm>
+            <a:off x="457200" y="804672"/>
+            <a:ext cx="8229600" cy="320040"/>
+          </a:xfrm>
+          <a:prstGeom prst="rect">
+            <a:avLst/>
+          </a:prstGeom>
+          <a:noFill/>
+          <a:ln/>
+        </p:spPr>
+        <p:txBody>
+          <a:bodyPr wrap="square" lIns="114300" tIns="91440" rIns="114300" bIns="91440" rtlCol="0" anchor="ctr"/>
+          <a:lstStyle/>
+          <a:p>
+            <a:pPr marL="0" indent="0" algn="l">
+              <a:buNone/>
+            </a:pPr>
+            <a:r>
+              <a:rPr lang="de-DE" sz="1200" dirty="0">
+                <a:solidFill>
+                  <a:srgbClr val="8892A4"/>
+                </a:solidFill>
+                <a:latin typeface="Calibri" pitchFamily="49" charset="0"/>
+              </a:rPr>
+              <a:t>row_factory · Schema-Migration · SQL-Injection-Schutz</a:t>
+            </a:r>
+          </a:p>
+        </p:txBody>
+      </p:sp>
+      <p:sp>
+        <p:nvSpPr>
+          <p:cNvPr id="5" name="CodeCard"/>
+          <p:cNvSpPr/>
+          <p:nvPr/>
+        </p:nvSpPr>
+        <p:spPr>
+          <a:xfrm>
+            <a:off x="365760" y="1234440"/>
+            <a:ext cx="5250000" cy="3650000"/>
+          </a:xfrm>
+          <a:prstGeom prst="rect">
+            <a:avLst/>
+          </a:prstGeom>
+          <a:solidFill>
+            <a:srgbClr val="121224"/>
+          </a:solidFill>
+          <a:ln w="9525">
+            <a:solidFill>
+              <a:srgbClr val="4472C4"/>
+            </a:solidFill>
+            <a:prstDash val="solid"/>
+          </a:ln>
+        </p:spPr>
+        <p:txBody>
+          <a:bodyPr/>
+          <a:lstStyle/>
+          <a:p>
+            <a:endParaRPr lang="de-DE"/>
+          </a:p>
+        </p:txBody>
+      </p:sp>
+      <p:sp>
+        <p:nvSpPr>
+          <p:cNvPr id="6" name="CodeText"/>
+          <p:cNvSpPr/>
+          <p:nvPr/>
+        </p:nvSpPr>
+        <p:spPr>
+          <a:xfrm>
+            <a:off x="457200" y="1325880"/>
+            <a:ext cx="5067120" cy="3467120"/>
+          </a:xfrm>
+          <a:prstGeom prst="rect">
+            <a:avLst/>
+          </a:prstGeom>
+          <a:noFill/>
+          <a:ln/>
+        </p:spPr>
+        <p:txBody>
+          <a:bodyPr wrap="square" lIns="114300" tIns="91440" rIns="114300" bIns="91440" rtlCol="0" anchor="t"/>
+          <a:lstStyle/>
+          <a:p>
+            <a:pPr marL="0" indent="0" algn="l">
+              <a:buNone/>
+            </a:pPr>
+            <a:r>
+              <a:rPr lang="de-DE" sz="980" i="1" dirty="0">
+                <a:solidFill>
+                  <a:srgbClr val="5C6370"/>
+                </a:solidFill>
+                <a:latin typeface="Consolas" pitchFamily="49" charset="0"/>
+              </a:rPr>
+              <a:t># row_factory: Spaltenzugriff per Name statt Index</a:t>
+            </a:r>
+          </a:p>
+          <a:p>
+            <a:pPr marL="0" indent="0" algn="l">
+              <a:buNone/>
+            </a:pPr>
+            <a:r>
+              <a:rPr lang="de-DE" sz="980" dirty="0">
+                <a:solidFill>
+                  <a:srgbClr val="56B6C2"/>
+                </a:solidFill>
+                <a:latin typeface="Consolas" pitchFamily="49" charset="0"/>
+              </a:rPr>
+              <a:t>conn</a:t>
+            </a:r>
+            <a:r>
+              <a:rPr lang="de-DE" sz="980" dirty="0">
+                <a:solidFill>
+                  <a:srgbClr val="ABB2BF"/>
+                </a:solidFill>
+                <a:latin typeface="Consolas" pitchFamily="49" charset="0"/>
+              </a:rPr>
+              <a:t>.row_factory = </a:t>
+            </a:r>
+            <a:r>
+              <a:rPr lang="de-DE" sz="980" dirty="0">
+                <a:solidFill>
+                  <a:srgbClr val="61AFEF"/>
+                </a:solidFill>
+                <a:latin typeface="Consolas" pitchFamily="49" charset="0"/>
+              </a:rPr>
+              <a:t>sqlite3</a:t>
+            </a:r>
+            <a:r>
+              <a:rPr lang="de-DE" sz="980" dirty="0">
+                <a:solidFill>
+                  <a:srgbClr val="ABB2BF"/>
+                </a:solidFill>
+                <a:latin typeface="Consolas" pitchFamily="49" charset="0"/>
+              </a:rPr>
+              <a:t>.Row</a:t>
+            </a:r>
+          </a:p>
+          <a:p>
+            <a:pPr marL="0" indent="0" algn="l">
+              <a:buNone/>
+            </a:pPr>
+            <a:r>
+              <a:rPr lang="de-DE" sz="980" dirty="0">
+                <a:solidFill>
+                  <a:srgbClr val="56B6C2"/>
+                </a:solidFill>
+                <a:latin typeface="Consolas" pitchFamily="49" charset="0"/>
+              </a:rPr>
+              <a:t>row</a:t>
+            </a:r>
+            <a:r>
+              <a:rPr lang="de-DE" sz="980" dirty="0">
+                <a:solidFill>
+                  <a:srgbClr val="ABB2BF"/>
+                </a:solidFill>
+                <a:latin typeface="Consolas" pitchFamily="49" charset="0"/>
+              </a:rPr>
+              <a:t> = cursor.</a:t>
+            </a:r>
+            <a:r>
+              <a:rPr lang="de-DE" sz="980" dirty="0">
+                <a:solidFill>
+                  <a:srgbClr val="61AFEF"/>
+                </a:solidFill>
+                <a:latin typeface="Consolas" pitchFamily="49" charset="0"/>
+              </a:rPr>
+              <a:t>fetchone</a:t>
+            </a:r>
+            <a:r>
+              <a:rPr lang="de-DE" sz="980" dirty="0">
+                <a:solidFill>
+                  <a:srgbClr val="ABB2BF"/>
+                </a:solidFill>
+                <a:latin typeface="Consolas" pitchFamily="49" charset="0"/>
+              </a:rPr>
+              <a:t>()</a:t>
+            </a:r>
+          </a:p>
+          <a:p>
+            <a:pPr marL="0" indent="0" algn="l">
+              <a:buNone/>
+            </a:pPr>
+            <a:r>
+              <a:rPr lang="de-DE" sz="980" dirty="0">
+                <a:solidFill>
+                  <a:srgbClr val="56B6C2"/>
+                </a:solidFill>
+                <a:latin typeface="Consolas" pitchFamily="49" charset="0"/>
+              </a:rPr>
+              <a:t>print</a:t>
+            </a:r>
+            <a:r>
+              <a:rPr lang="de-DE" sz="980" dirty="0">
+                <a:solidFill>
+                  <a:srgbClr val="ABB2BF"/>
+                </a:solidFill>
+                <a:latin typeface="Consolas" pitchFamily="49" charset="0"/>
+              </a:rPr>
+              <a:t>(row[</a:t>
+            </a:r>
+            <a:r>
+              <a:rPr lang="de-DE" sz="980" dirty="0">
+                <a:solidFill>
+                  <a:srgbClr val="98C379"/>
+                </a:solidFill>
+                <a:latin typeface="Consolas" pitchFamily="49" charset="0"/>
+              </a:rPr>
+              <a:t>"username"</a:t>
+            </a:r>
+            <a:r>
+              <a:rPr lang="de-DE" sz="980" dirty="0">
+                <a:solidFill>
+                  <a:srgbClr val="ABB2BF"/>
+                </a:solidFill>
+                <a:latin typeface="Consolas" pitchFamily="49" charset="0"/>
+              </a:rPr>
+              <a:t>])  </a:t>
+            </a:r>
+            <a:r>
+              <a:rPr lang="de-DE" sz="980" i="1" dirty="0">
+                <a:solidFill>
+                  <a:srgbClr val="5C6370"/>
+                </a:solidFill>
+                <a:latin typeface="Consolas" pitchFamily="49" charset="0"/>
+              </a:rPr>
+              <a:t># statt row[1]</a:t>
+            </a:r>
+          </a:p>
+          <a:p>
+            <a:pPr marL="0" indent="0" algn="l">
+              <a:buNone/>
+            </a:pPr>
+            <a:r>
+              <a:rPr lang="de-DE" sz="980" dirty="0">
+                <a:solidFill>
+                  <a:srgbClr val="56B6C2"/>
+                </a:solidFill>
+                <a:latin typeface="Consolas" pitchFamily="49" charset="0"/>
+              </a:rPr>
+              <a:t>return</a:t>
+            </a:r>
+            <a:r>
+              <a:rPr lang="de-DE" sz="980" dirty="0">
+                <a:solidFill>
+                  <a:srgbClr val="ABB2BF"/>
+                </a:solidFill>
+                <a:latin typeface="Consolas" pitchFamily="49" charset="0"/>
+              </a:rPr>
+              <a:t> </a:t>
+            </a:r>
+            <a:r>
+              <a:rPr lang="de-DE" sz="980" dirty="0">
+                <a:solidFill>
+                  <a:srgbClr val="61AFEF"/>
+                </a:solidFill>
+                <a:latin typeface="Consolas" pitchFamily="49" charset="0"/>
+              </a:rPr>
+              <a:t>dict</a:t>
+            </a:r>
+            <a:r>
+              <a:rPr lang="de-DE" sz="980" dirty="0">
+                <a:solidFill>
+                  <a:srgbClr val="ABB2BF"/>
+                </a:solidFill>
+                <a:latin typeface="Consolas" pitchFamily="49" charset="0"/>
+              </a:rPr>
+              <a:t>(row)      </a:t>
+            </a:r>
+            <a:r>
+              <a:rPr lang="de-DE" sz="980" i="1" dirty="0">
+                <a:solidFill>
+                  <a:srgbClr val="5C6370"/>
+                </a:solidFill>
+                <a:latin typeface="Consolas" pitchFamily="49" charset="0"/>
+              </a:rPr>
+              <a:t># einfache Serialisierung</a:t>
+            </a:r>
+          </a:p>
+          <a:p>
+            <a:pPr>
+              <a:buNone/>
+            </a:pPr>
+            <a:endParaRPr lang="de-DE" sz="600" dirty="0"/>
+          </a:p>
+          <a:p>
+            <a:pPr marL="0" indent="0" algn="l">
+              <a:buNone/>
+            </a:pPr>
+            <a:r>
+              <a:rPr lang="de-DE" sz="980" i="1" dirty="0">
+                <a:solidFill>
+                  <a:srgbClr val="5C6370"/>
+                </a:solidFill>
+                <a:latin typeface="Consolas" pitchFamily="49" charset="0"/>
+              </a:rPr>
+              <a:t># Schema-Migration: neue Spalte nachrüsten</a:t>
+            </a:r>
+          </a:p>
+          <a:p>
+            <a:pPr marL="0" indent="0" algn="l">
+              <a:buNone/>
+            </a:pPr>
+            <a:r>
+              <a:rPr lang="de-DE" sz="980" dirty="0">
+                <a:solidFill>
+                  <a:srgbClr val="56B6C2"/>
+                </a:solidFill>
+                <a:latin typeface="Consolas" pitchFamily="49" charset="0"/>
+              </a:rPr>
+              <a:t>try</a:t>
+            </a:r>
+            <a:r>
+              <a:rPr lang="de-DE" sz="980" dirty="0">
+                <a:solidFill>
+                  <a:srgbClr val="ABB2BF"/>
+                </a:solidFill>
+                <a:latin typeface="Consolas" pitchFamily="49" charset="0"/>
+              </a:rPr>
+              <a:t>:</a:t>
+            </a:r>
+          </a:p>
+          <a:p>
+            <a:pPr marL="0" indent="0" algn="l">
+              <a:buNone/>
+            </a:pPr>
+            <a:r>
+              <a:rPr lang="de-DE" sz="980" dirty="0">
+                <a:solidFill>
+                  <a:srgbClr val="ABB2BF"/>
+                </a:solidFill>
+                <a:latin typeface="Consolas" pitchFamily="49" charset="0"/>
+              </a:rPr>
+              <a:t>    cursor.</a:t>
+            </a:r>
+            <a:r>
+              <a:rPr lang="de-DE" sz="980" dirty="0">
+                <a:solidFill>
+                  <a:srgbClr val="61AFEF"/>
+                </a:solidFill>
+                <a:latin typeface="Consolas" pitchFamily="49" charset="0"/>
+              </a:rPr>
+              <a:t>execute</a:t>
+            </a:r>
+            <a:r>
+              <a:rPr lang="de-DE" sz="980" dirty="0">
+                <a:solidFill>
+                  <a:srgbClr val="ABB2BF"/>
+                </a:solidFill>
+                <a:latin typeface="Consolas" pitchFamily="49" charset="0"/>
+              </a:rPr>
+              <a:t>(</a:t>
+            </a:r>
+          </a:p>
+          <a:p>
+            <a:pPr marL="0" indent="0" algn="l">
+              <a:buNone/>
+            </a:pPr>
+            <a:r>
+              <a:rPr lang="de-DE" sz="980" dirty="0">
+                <a:solidFill>
+                  <a:srgbClr val="ABB2BF"/>
+                </a:solidFill>
+                <a:latin typeface="Consolas" pitchFamily="49" charset="0"/>
+              </a:rPr>
+              <a:t>        </a:t>
+            </a:r>
+            <a:r>
+              <a:rPr lang="de-DE" sz="980" dirty="0">
+                <a:solidFill>
+                  <a:srgbClr val="98C379"/>
+                </a:solidFill>
+                <a:latin typeface="Consolas" pitchFamily="49" charset="0"/>
+              </a:rPr>
+              <a:t>"ALTER TABLE users"</a:t>
+            </a:r>
+          </a:p>
+          <a:p>
+            <a:pPr marL="0" indent="0" algn="l">
+              <a:buNone/>
+            </a:pPr>
+            <a:r>
+              <a:rPr lang="de-DE" sz="980" dirty="0">
+                <a:solidFill>
+                  <a:srgbClr val="ABB2BF"/>
+                </a:solidFill>
+                <a:latin typeface="Consolas" pitchFamily="49" charset="0"/>
+              </a:rPr>
+              <a:t>        </a:t>
+            </a:r>
+            <a:r>
+              <a:rPr lang="de-DE" sz="980" dirty="0">
+                <a:solidFill>
+                  <a:srgbClr val="98C379"/>
+                </a:solidFill>
+                <a:latin typeface="Consolas" pitchFamily="49" charset="0"/>
+              </a:rPr>
+              <a:t>"ADD COLUMN language TEXT DEFAULT 'en'"</a:t>
+            </a:r>
+          </a:p>
+          <a:p>
+            <a:pPr marL="0" indent="0" algn="l">
+              <a:buNone/>
+            </a:pPr>
+            <a:r>
+              <a:rPr lang="de-DE" sz="980" dirty="0">
+                <a:solidFill>
+                  <a:srgbClr val="ABB2BF"/>
+                </a:solidFill>
+                <a:latin typeface="Consolas" pitchFamily="49" charset="0"/>
+              </a:rPr>
+              <a:t>    )</a:t>
+            </a:r>
+          </a:p>
+          <a:p>
+            <a:pPr marL="0" indent="0" algn="l">
+              <a:buNone/>
+            </a:pPr>
+            <a:r>
+              <a:rPr lang="de-DE" sz="980" dirty="0">
+                <a:solidFill>
+                  <a:srgbClr val="ABB2BF"/>
+                </a:solidFill>
+                <a:latin typeface="Consolas" pitchFamily="49" charset="0"/>
+              </a:rPr>
+              <a:t>    conn.</a:t>
+            </a:r>
+            <a:r>
+              <a:rPr lang="de-DE" sz="980" dirty="0">
+                <a:solidFill>
+                  <a:srgbClr val="61AFEF"/>
+                </a:solidFill>
+                <a:latin typeface="Consolas" pitchFamily="49" charset="0"/>
+              </a:rPr>
+              <a:t>commit</a:t>
+            </a:r>
+            <a:r>
+              <a:rPr lang="de-DE" sz="980" dirty="0">
+                <a:solidFill>
+                  <a:srgbClr val="ABB2BF"/>
+                </a:solidFill>
+                <a:latin typeface="Consolas" pitchFamily="49" charset="0"/>
+              </a:rPr>
+              <a:t>()</a:t>
+            </a:r>
+          </a:p>
+          <a:p>
+            <a:pPr marL="0" indent="0" algn="l">
+              <a:buNone/>
+            </a:pPr>
+            <a:r>
+              <a:rPr lang="de-DE" sz="980" dirty="0">
+                <a:solidFill>
+                  <a:srgbClr val="56B6C2"/>
+                </a:solidFill>
+                <a:latin typeface="Consolas" pitchFamily="49" charset="0"/>
+              </a:rPr>
+              <a:t>except</a:t>
+            </a:r>
+            <a:r>
+              <a:rPr lang="de-DE" sz="980" dirty="0">
+                <a:solidFill>
+                  <a:srgbClr val="ABB2BF"/>
+                </a:solidFill>
+                <a:latin typeface="Consolas" pitchFamily="49" charset="0"/>
+              </a:rPr>
+              <a:t> sqlite3.</a:t>
+            </a:r>
+            <a:r>
+              <a:rPr lang="de-DE" sz="980" dirty="0">
+                <a:solidFill>
+                  <a:srgbClr val="61AFEF"/>
+                </a:solidFill>
+                <a:latin typeface="Consolas" pitchFamily="49" charset="0"/>
+              </a:rPr>
+              <a:t>OperationalError</a:t>
+            </a:r>
+            <a:r>
+              <a:rPr lang="de-DE" sz="980" dirty="0">
+                <a:solidFill>
+                  <a:srgbClr val="ABB2BF"/>
+                </a:solidFill>
+                <a:latin typeface="Consolas" pitchFamily="49" charset="0"/>
+              </a:rPr>
+              <a:t>:</a:t>
+            </a:r>
+          </a:p>
+          <a:p>
+            <a:pPr marL="0" indent="0" algn="l">
+              <a:buNone/>
+            </a:pPr>
+            <a:r>
+              <a:rPr lang="de-DE" sz="980" dirty="0">
+                <a:solidFill>
+                  <a:srgbClr val="ABB2BF"/>
+                </a:solidFill>
+                <a:latin typeface="Consolas" pitchFamily="49" charset="0"/>
+              </a:rPr>
+              <a:t>    </a:t>
+            </a:r>
+            <a:r>
+              <a:rPr lang="de-DE" sz="980" dirty="0">
+                <a:solidFill>
+                  <a:srgbClr val="56B6C2"/>
+                </a:solidFill>
+                <a:latin typeface="Consolas" pitchFamily="49" charset="0"/>
+              </a:rPr>
+              <a:t>pass</a:t>
+            </a:r>
+            <a:r>
+              <a:rPr lang="de-DE" sz="980" dirty="0">
+                <a:solidFill>
+                  <a:srgbClr val="ABB2BF"/>
+                </a:solidFill>
+                <a:latin typeface="Consolas" pitchFamily="49" charset="0"/>
+              </a:rPr>
+              <a:t>  </a:t>
+            </a:r>
+            <a:r>
+              <a:rPr lang="de-DE" sz="980" i="1" dirty="0">
+                <a:solidFill>
+                  <a:srgbClr val="5C6370"/>
+                </a:solidFill>
+                <a:latin typeface="Consolas" pitchFamily="49" charset="0"/>
+              </a:rPr>
+              <a:t># Spalte existiert bereits</a:t>
+            </a:r>
+          </a:p>
+          <a:p>
+            <a:pPr>
+              <a:buNone/>
+            </a:pPr>
+            <a:endParaRPr lang="de-DE" sz="600" dirty="0"/>
+          </a:p>
+          <a:p>
+            <a:pPr marL="0" indent="0" algn="l">
+              <a:buNone/>
+            </a:pPr>
+            <a:r>
+              <a:rPr lang="de-DE" sz="980" i="1" dirty="0">
+                <a:solidFill>
+                  <a:srgbClr val="5C6370"/>
+                </a:solidFill>
+                <a:latin typeface="Consolas" pitchFamily="49" charset="0"/>
+              </a:rPr>
+              <a:t># SQL-Injection-Schutz: Parameterized Queries</a:t>
+            </a:r>
+          </a:p>
+          <a:p>
+            <a:pPr marL="0" indent="0" algn="l">
+              <a:buNone/>
+            </a:pPr>
+            <a:r>
+              <a:rPr lang="de-DE" sz="980" dirty="0">
+                <a:solidFill>
+                  <a:srgbClr val="ABB2BF"/>
+                </a:solidFill>
+                <a:latin typeface="Consolas" pitchFamily="49" charset="0"/>
+              </a:rPr>
+              <a:t>cursor.</a:t>
+            </a:r>
+            <a:r>
+              <a:rPr lang="de-DE" sz="980" dirty="0">
+                <a:solidFill>
+                  <a:srgbClr val="61AFEF"/>
+                </a:solidFill>
+                <a:latin typeface="Consolas" pitchFamily="49" charset="0"/>
+              </a:rPr>
+              <a:t>execute</a:t>
+            </a:r>
+            <a:r>
+              <a:rPr lang="de-DE" sz="980" dirty="0">
+                <a:solidFill>
+                  <a:srgbClr val="ABB2BF"/>
+                </a:solidFill>
+                <a:latin typeface="Consolas" pitchFamily="49" charset="0"/>
+              </a:rPr>
+              <a:t>(</a:t>
+            </a:r>
+          </a:p>
+          <a:p>
+            <a:pPr marL="0" indent="0" algn="l">
+              <a:buNone/>
+            </a:pPr>
+            <a:r>
+              <a:rPr lang="de-DE" sz="980" dirty="0">
+                <a:solidFill>
+                  <a:srgbClr val="ABB2BF"/>
+                </a:solidFill>
+                <a:latin typeface="Consolas" pitchFamily="49" charset="0"/>
+              </a:rPr>
+              <a:t>    </a:t>
+            </a:r>
+            <a:r>
+              <a:rPr lang="de-DE" sz="980" dirty="0">
+                <a:solidFill>
+                  <a:srgbClr val="98C379"/>
+                </a:solidFill>
+                <a:latin typeface="Consolas" pitchFamily="49" charset="0"/>
+              </a:rPr>
+              <a:t>"SELECT * FROM users WHERE username = ?"</a:t>
+            </a:r>
+            <a:r>
+              <a:rPr lang="de-DE" sz="980" dirty="0">
+                <a:solidFill>
+                  <a:srgbClr val="ABB2BF"/>
+                </a:solidFill>
+                <a:latin typeface="Consolas" pitchFamily="49" charset="0"/>
+              </a:rPr>
+              <a:t>,</a:t>
+            </a:r>
+          </a:p>
+          <a:p>
+            <a:pPr marL="0" indent="0" algn="l">
+              <a:buNone/>
+            </a:pPr>
+            <a:r>
+              <a:rPr lang="de-DE" sz="980" dirty="0">
+                <a:solidFill>
+                  <a:srgbClr val="ABB2BF"/>
+                </a:solidFill>
+                <a:latin typeface="Consolas" pitchFamily="49" charset="0"/>
+              </a:rPr>
+              <a:t>    (username,)  </a:t>
+            </a:r>
+            <a:r>
+              <a:rPr lang="de-DE" sz="980" i="1" dirty="0">
+                <a:solidFill>
+                  <a:srgbClr val="5C6370"/>
+                </a:solidFill>
+                <a:latin typeface="Consolas" pitchFamily="49" charset="0"/>
+              </a:rPr>
+              <a:t># ? wird sicher ersetzt</a:t>
+            </a:r>
+          </a:p>
+          <a:p>
+            <a:pPr marL="0" indent="0" algn="l">
+              <a:buNone/>
+            </a:pPr>
+            <a:r>
+              <a:rPr lang="de-DE" sz="980" dirty="0">
+                <a:solidFill>
+                  <a:srgbClr val="ABB2BF"/>
+                </a:solidFill>
+                <a:latin typeface="Consolas" pitchFamily="49" charset="0"/>
+              </a:rPr>
+              <a:t>)</a:t>
+            </a:r>
+          </a:p>
+        </p:txBody>
+      </p:sp>
+      <p:sp>
+        <p:nvSpPr>
+          <p:cNvPr id="7" name="BulletCard"/>
+          <p:cNvSpPr/>
+          <p:nvPr/>
+        </p:nvSpPr>
+        <p:spPr>
+          <a:xfrm>
+            <a:off x="5707200" y="1234440"/>
+            <a:ext cx="3071040" cy="3650000"/>
+          </a:xfrm>
+          <a:prstGeom prst="rect">
+            <a:avLst/>
+          </a:prstGeom>
+          <a:solidFill>
+            <a:srgbClr val="161638"/>
+          </a:solidFill>
+          <a:ln w="6350">
+            <a:solidFill>
+              <a:srgbClr val="D0D7E8"/>
+            </a:solidFill>
+            <a:prstDash val="solid"/>
+          </a:ln>
+        </p:spPr>
+        <p:txBody>
+          <a:bodyPr/>
+          <a:lstStyle/>
+          <a:p>
+            <a:endParaRPr lang="de-DE"/>
+          </a:p>
+        </p:txBody>
+      </p:sp>
+      <p:sp>
+        <p:nvSpPr>
+          <p:cNvPr id="8" name="BulletText"/>
+          <p:cNvSpPr/>
+          <p:nvPr/>
+        </p:nvSpPr>
+        <p:spPr>
+          <a:xfrm>
+            <a:off x="5798640" y="1325880"/>
+            <a:ext cx="2888160" cy="3467120"/>
+          </a:xfrm>
+          <a:prstGeom prst="rect">
+            <a:avLst/>
+          </a:prstGeom>
+          <a:noFill/>
+          <a:ln/>
+        </p:spPr>
+        <p:txBody>
+          <a:bodyPr wrap="square" lIns="114300" tIns="91440" rIns="114300" bIns="91440" rtlCol="0" anchor="t"/>
+          <a:lstStyle/>
+          <a:p>
+            <a:pPr marL="342900" indent="-342900" algn="l">
+              <a:buChar char="▸"/>
+            </a:pPr>
+            <a:r>
+              <a:rPr lang="de-DE" sz="1150" b="1" dirty="0">
+                <a:solidFill>
+                  <a:srgbClr val="FFFFFF"/>
+                </a:solidFill>
+                <a:latin typeface="Calibri" pitchFamily="49" charset="0"/>
+              </a:rPr>
+              <a:t>sqlite3.Row</a:t>
+            </a:r>
+          </a:p>
+          <a:p>
+            <a:pPr marL="342900" indent="0" algn="l">
+              <a:buNone/>
+            </a:pPr>
+            <a:r>
+              <a:rPr lang="de-DE" sz="1000" dirty="0">
+                <a:solidFill>
+                  <a:srgbClr val="8892A4"/>
+                </a:solidFill>
+                <a:latin typeface="Calibri" pitchFamily="49" charset="0"/>
+              </a:rPr>
+              <a:t>Spaltenzugriff per Name: row["username"] statt row[1]</a:t>
+            </a:r>
+          </a:p>
+          <a:p>
+            <a:pPr marL="342900" indent="-342900" algn="l">
+              <a:spcBef>
+                <a:spcPts val="160"/>
+              </a:spcBef>
+              <a:buChar char="▸"/>
+            </a:pPr>
+            <a:r>
+              <a:rPr lang="de-DE" sz="1150" b="1" dirty="0">
+                <a:solidFill>
+                  <a:srgbClr val="FFFFFF"/>
+                </a:solidFill>
+                <a:latin typeface="Calibri" pitchFamily="49" charset="0"/>
+              </a:rPr>
+              <a:t>dict(row)</a:t>
+            </a:r>
+          </a:p>
+          <a:p>
+            <a:pPr marL="342900" indent="0" algn="l">
+              <a:buNone/>
+            </a:pPr>
+            <a:r>
+              <a:rPr lang="de-DE" sz="1000" dirty="0">
+                <a:solidFill>
+                  <a:srgbClr val="8892A4"/>
+                </a:solidFill>
+                <a:latin typeface="Calibri" pitchFamily="49" charset="0"/>
+              </a:rPr>
+              <a:t>Einfache Konvertierung für den Rest der App</a:t>
+            </a:r>
+          </a:p>
+          <a:p>
+            <a:pPr marL="342900" indent="-342900" algn="l">
+              <a:spcBef>
+                <a:spcPts val="160"/>
+              </a:spcBef>
+              <a:buChar char="▸"/>
+            </a:pPr>
+            <a:r>
+              <a:rPr lang="de-DE" sz="1150" b="1" dirty="0">
+                <a:solidFill>
+                  <a:srgbClr val="FFFFFF"/>
+                </a:solidFill>
+                <a:latin typeface="Calibri" pitchFamily="49" charset="0"/>
+              </a:rPr>
+              <a:t>try/except Migration</a:t>
+            </a:r>
+          </a:p>
+          <a:p>
+            <a:pPr marL="342900" indent="0" algn="l">
+              <a:buNone/>
+            </a:pPr>
+            <a:r>
+              <a:rPr lang="de-DE" sz="1000" dirty="0">
+                <a:solidFill>
+                  <a:srgbClr val="8892A4"/>
+                </a:solidFill>
+                <a:latin typeface="Calibri" pitchFamily="49" charset="0"/>
+              </a:rPr>
+              <a:t>DB bleibt kompatibel wenn Spalte schon existiert</a:t>
+            </a:r>
+          </a:p>
+          <a:p>
+            <a:pPr marL="342900" indent="-342900" algn="l">
+              <a:spcBef>
+                <a:spcPts val="160"/>
+              </a:spcBef>
+              <a:buChar char="▸"/>
+            </a:pPr>
+            <a:r>
+              <a:rPr lang="de-DE" sz="1150" b="1" dirty="0">
+                <a:solidFill>
+                  <a:srgbClr val="FFFFFF"/>
+                </a:solidFill>
+                <a:latin typeface="Calibri" pitchFamily="49" charset="0"/>
+              </a:rPr>
+              <a:t>?-Platzhalter</a:t>
+            </a:r>
+          </a:p>
+          <a:p>
+            <a:pPr marL="342900" indent="0" algn="l">
+              <a:buNone/>
+            </a:pPr>
+            <a:r>
+              <a:rPr lang="de-DE" sz="1000" dirty="0">
+                <a:solidFill>
+                  <a:srgbClr val="8892A4"/>
+                </a:solidFill>
+                <a:latin typeface="Calibri" pitchFamily="49" charset="0"/>
+              </a:rPr>
+              <a:t>Schutz vor SQL-Injection (OWASP Top 10)</a:t>
+            </a:r>
+          </a:p>
+          <a:p>
+            <a:pPr marL="342900" indent="-342900" algn="l">
+              <a:spcBef>
+                <a:spcPts val="160"/>
+              </a:spcBef>
+              <a:buChar char="▸"/>
+            </a:pPr>
+            <a:r>
+              <a:rPr lang="de-DE" sz="1150" b="1" dirty="0">
+                <a:solidFill>
+                  <a:srgbClr val="FFFFFF"/>
+                </a:solidFill>
+                <a:latin typeface="Calibri" pitchFamily="49" charset="0"/>
+              </a:rPr>
+              <a:t>IntegrityError</a:t>
+            </a:r>
+          </a:p>
+          <a:p>
+            <a:pPr marL="342900" indent="0" algn="l">
+              <a:buNone/>
+            </a:pPr>
+            <a:r>
+              <a:rPr lang="de-DE" sz="1000" dirty="0">
+                <a:solidFill>
+                  <a:srgbClr val="8892A4"/>
+                </a:solidFill>
+                <a:latin typeface="Calibri" pitchFamily="49" charset="0"/>
+              </a:rPr>
+              <a:t>Doppelte Benutzernamen werden sauber abgefangen</a:t>
+            </a:r>
+          </a:p>
+        </p:txBody>
+      </p:sp>
+      <p:sp>
+        <p:nvSpPr>
+          <p:cNvPr id="9" name="Textfeld 8">
+            <a:extLst>
+              <a:ext uri="{FF2B5EF4-FFF2-40B4-BE49-F238E27FC236}">
+                <a16:creationId xmlns:a16="http://schemas.microsoft.com/office/drawing/2014/main" id="{3FE34108-9161-8AE9-4D11-BFE9571AD1A5}"/>
+              </a:ext>
+            </a:extLst>
+          </p:cNvPr>
+          <p:cNvSpPr txBox="1"/>
+          <p:nvPr/>
+        </p:nvSpPr>
+        <p:spPr>
+          <a:xfrm>
+            <a:off x="8737093" y="4875028"/>
+            <a:ext cx="228600" cy="215444"/>
+          </a:xfrm>
+          <a:prstGeom prst="rect">
+            <a:avLst/>
+          </a:prstGeom>
+          <a:noFill/>
+        </p:spPr>
+        <p:txBody>
+          <a:bodyPr wrap="square" rtlCol="0">
+            <a:spAutoFit/>
+          </a:bodyPr>
+          <a:lstStyle/>
+          <a:p>
+            <a:r>
+              <a:rPr lang="en-US" sz="800" dirty="0">
+                <a:solidFill>
+                  <a:srgbClr val="FFFFFF"/>
                 </a:solidFill>
                 <a:latin typeface="Calibri" pitchFamily="34" charset="0"/>
                 <a:ea typeface="Calibri" pitchFamily="34" charset="-122"/>
@@ -21735,6 +21847,9 @@
           <a:solidFill>
             <a:srgbClr val="E94560"/>
           </a:solidFill>
+          <a:ln>
+            <a:solidFill/>
+          </a:ln>
         </p:spPr>
         <p:txBody>
           <a:bodyPr/>
@@ -22514,7 +22629,7 @@
           </a:solidFill>
           <a:ln w="6350">
             <a:solidFill>
-              <a:srgbClr val="2A3A5E"/>
+              <a:srgbClr val="D0D7E8"/>
             </a:solidFill>
             <a:prstDash val="solid"/>
           </a:ln>
@@ -22732,7 +22847,7 @@
             <a:r>
               <a:rPr lang="en-US" sz="800" dirty="0">
                 <a:solidFill>
-                  <a:srgbClr val="E94560"/>
+                  <a:srgbClr val="FFFFFF"/>
                 </a:solidFill>
                 <a:latin typeface="Calibri" pitchFamily="34" charset="0"/>
                 <a:ea typeface="Calibri" pitchFamily="34" charset="-122"/>
@@ -22758,7 +22873,7 @@
     <p:bg>
       <p:bgPr>
         <a:solidFill>
-          <a:srgbClr val="F0F4FF"/>
+          <a:srgbClr val="0D0D1A"/>
         </a:solidFill>
         <a:effectLst/>
       </p:bgPr>
@@ -22804,7 +22919,7 @@
             <a:r>
               <a:rPr lang="en-US" sz="2800" b="1" dirty="0">
                 <a:solidFill>
-                  <a:srgbClr val="1A1A2E"/>
+                  <a:srgbClr val="FFFFFF"/>
                 </a:solidFill>
                 <a:latin typeface="Arial Black" pitchFamily="34" charset="0"/>
                 <a:ea typeface="Arial Black" pitchFamily="34" charset="-122"/>
@@ -22870,7 +22985,7 @@
             <a:avLst/>
           </a:prstGeom>
           <a:solidFill>
-            <a:srgbClr val="FFFFFF"/>
+            <a:srgbClr val="161638"/>
           </a:solidFill>
           <a:ln w="6350">
             <a:solidFill>
@@ -22921,7 +23036,7 @@
             <a:r>
               <a:rPr lang="en-US" sz="1500" b="1" dirty="0">
                 <a:solidFill>
-                  <a:srgbClr val="1A1A2E"/>
+                  <a:srgbClr val="FFFFFF"/>
                 </a:solidFill>
                 <a:latin typeface="Calibri" pitchFamily="34" charset="0"/>
                 <a:ea typeface="Calibri" pitchFamily="34" charset="-122"/>
@@ -22961,7 +23076,7 @@
             <a:r>
               <a:rPr lang="en-US" sz="1200" b="1" dirty="0">
                 <a:solidFill>
-                  <a:srgbClr val="1A1A2E"/>
+                  <a:srgbClr val="FFFFFF"/>
                 </a:solidFill>
                 <a:latin typeface="Calibri" pitchFamily="34" charset="0"/>
                 <a:ea typeface="Calibri" pitchFamily="34" charset="-122"/>
@@ -22978,7 +23093,7 @@
             <a:r>
               <a:rPr lang="en-US" sz="1200" dirty="0">
                 <a:solidFill>
-                  <a:srgbClr val="444444"/>
+                  <a:srgbClr val="D0D7E8"/>
                 </a:solidFill>
                 <a:latin typeface="Calibri" pitchFamily="34" charset="0"/>
                 <a:ea typeface="Calibri" pitchFamily="34" charset="-122"/>
@@ -23013,7 +23128,7 @@
             <a:r>
               <a:rPr lang="en-US" sz="1200" b="1" dirty="0">
                 <a:solidFill>
-                  <a:srgbClr val="1A1A2E"/>
+                  <a:srgbClr val="FFFFFF"/>
                 </a:solidFill>
                 <a:latin typeface="Calibri" pitchFamily="34" charset="0"/>
                 <a:ea typeface="Calibri" pitchFamily="34" charset="-122"/>
@@ -23030,7 +23145,7 @@
             <a:r>
               <a:rPr lang="en-US" sz="1200" dirty="0">
                 <a:solidFill>
-                  <a:srgbClr val="444444"/>
+                  <a:srgbClr val="D0D7E8"/>
                 </a:solidFill>
                 <a:latin typeface="Calibri" pitchFamily="34" charset="0"/>
                 <a:ea typeface="Calibri" pitchFamily="34" charset="-122"/>
@@ -23082,7 +23197,7 @@
             <a:r>
               <a:rPr lang="en-US" sz="1200" dirty="0">
                 <a:solidFill>
-                  <a:srgbClr val="444444"/>
+                  <a:srgbClr val="D0D7E8"/>
                 </a:solidFill>
                 <a:latin typeface="Calibri" pitchFamily="34" charset="0"/>
                 <a:ea typeface="Calibri" pitchFamily="34" charset="-122"/>
@@ -23117,7 +23232,7 @@
             <a:r>
               <a:rPr lang="en-US" sz="1200" b="1" dirty="0">
                 <a:solidFill>
-                  <a:srgbClr val="1A1A2E"/>
+                  <a:srgbClr val="FFFFFF"/>
                 </a:solidFill>
                 <a:latin typeface="Calibri" pitchFamily="34" charset="0"/>
                 <a:ea typeface="Calibri" pitchFamily="34" charset="-122"/>
@@ -23134,7 +23249,7 @@
             <a:r>
               <a:rPr lang="en-US" sz="1200" dirty="0">
                 <a:solidFill>
-                  <a:srgbClr val="444444"/>
+                  <a:srgbClr val="D0D7E8"/>
                 </a:solidFill>
                 <a:latin typeface="Calibri" pitchFamily="34" charset="0"/>
                 <a:ea typeface="Calibri" pitchFamily="34" charset="-122"/>
@@ -23161,7 +23276,7 @@
             <a:avLst/>
           </a:prstGeom>
           <a:solidFill>
-            <a:srgbClr val="FFFFFF"/>
+            <a:srgbClr val="161638"/>
           </a:solidFill>
           <a:ln w="6350">
             <a:solidFill>
@@ -23212,7 +23327,7 @@
             <a:r>
               <a:rPr lang="en-US" sz="1500" b="1" dirty="0">
                 <a:solidFill>
-                  <a:srgbClr val="1A1A2E"/>
+                  <a:srgbClr val="FFFFFF"/>
                 </a:solidFill>
                 <a:latin typeface="Calibri" pitchFamily="34" charset="0"/>
                 <a:ea typeface="Calibri" pitchFamily="34" charset="-122"/>
@@ -23241,11 +23356,11 @@
             </a:avLst>
           </a:prstGeom>
           <a:solidFill>
-            <a:srgbClr val="F8FAFF"/>
+            <a:srgbClr val="161638"/>
           </a:solidFill>
           <a:ln w="6350">
             <a:solidFill>
-              <a:srgbClr val="E0E8F8"/>
+              <a:srgbClr val="D0D7E8"/>
             </a:solidFill>
             <a:prstDash val="solid"/>
           </a:ln>
@@ -23317,7 +23432,7 @@
             <a:r>
               <a:rPr lang="en-US" sz="1200" b="1" dirty="0">
                 <a:solidFill>
-                  <a:srgbClr val="1A1A2E"/>
+                  <a:srgbClr val="FFFFFF"/>
                 </a:solidFill>
                 <a:latin typeface="Calibri" pitchFamily="34" charset="0"/>
                 <a:ea typeface="Calibri" pitchFamily="34" charset="-122"/>
@@ -23424,11 +23539,11 @@
             </a:avLst>
           </a:prstGeom>
           <a:solidFill>
-            <a:srgbClr val="F8FAFF"/>
+            <a:srgbClr val="161638"/>
           </a:solidFill>
           <a:ln w="6350">
             <a:solidFill>
-              <a:srgbClr val="E0E8F8"/>
+              <a:srgbClr val="D0D7E8"/>
             </a:solidFill>
             <a:prstDash val="solid"/>
           </a:ln>
@@ -23500,7 +23615,7 @@
             <a:r>
               <a:rPr lang="en-US" sz="1200" b="1" dirty="0">
                 <a:solidFill>
-                  <a:srgbClr val="1A1A2E"/>
+                  <a:srgbClr val="FFFFFF"/>
                 </a:solidFill>
                 <a:latin typeface="Calibri" pitchFamily="34" charset="0"/>
                 <a:ea typeface="Calibri" pitchFamily="34" charset="-122"/>
@@ -23607,11 +23722,11 @@
             </a:avLst>
           </a:prstGeom>
           <a:solidFill>
-            <a:srgbClr val="F8FAFF"/>
+            <a:srgbClr val="161638"/>
           </a:solidFill>
           <a:ln w="6350">
             <a:solidFill>
-              <a:srgbClr val="E0E8F8"/>
+              <a:srgbClr val="D0D7E8"/>
             </a:solidFill>
             <a:prstDash val="solid"/>
           </a:ln>
@@ -23683,7 +23798,7 @@
             <a:r>
               <a:rPr lang="en-US" sz="1200" b="1" dirty="0">
                 <a:solidFill>
-                  <a:srgbClr val="1A1A2E"/>
+                  <a:srgbClr val="FFFFFF"/>
                 </a:solidFill>
                 <a:latin typeface="Calibri" pitchFamily="34" charset="0"/>
                 <a:ea typeface="Calibri" pitchFamily="34" charset="-122"/>
@@ -23790,11 +23905,11 @@
             </a:avLst>
           </a:prstGeom>
           <a:solidFill>
-            <a:srgbClr val="F8FAFF"/>
+            <a:srgbClr val="161638"/>
           </a:solidFill>
           <a:ln w="6350">
             <a:solidFill>
-              <a:srgbClr val="E0E8F8"/>
+              <a:srgbClr val="D0D7E8"/>
             </a:solidFill>
             <a:prstDash val="solid"/>
           </a:ln>
@@ -23866,7 +23981,7 @@
             <a:r>
               <a:rPr lang="en-US" sz="1200" b="1" dirty="0">
                 <a:solidFill>
-                  <a:srgbClr val="1A1A2E"/>
+                  <a:srgbClr val="FFFFFF"/>
                 </a:solidFill>
                 <a:latin typeface="Calibri" pitchFamily="34" charset="0"/>
                 <a:ea typeface="Calibri" pitchFamily="34" charset="-122"/>
@@ -23973,11 +24088,11 @@
             </a:avLst>
           </a:prstGeom>
           <a:solidFill>
-            <a:srgbClr val="F8FAFF"/>
+            <a:srgbClr val="161638"/>
           </a:solidFill>
           <a:ln w="6350">
             <a:solidFill>
-              <a:srgbClr val="E0E8F8"/>
+              <a:srgbClr val="D0D7E8"/>
             </a:solidFill>
             <a:prstDash val="solid"/>
           </a:ln>
@@ -24049,7 +24164,7 @@
             <a:r>
               <a:rPr lang="en-US" sz="1200" b="1" dirty="0">
                 <a:solidFill>
-                  <a:srgbClr val="1A1A2E"/>
+                  <a:srgbClr val="FFFFFF"/>
                 </a:solidFill>
                 <a:latin typeface="Calibri" pitchFamily="34" charset="0"/>
                 <a:ea typeface="Calibri" pitchFamily="34" charset="-122"/>
@@ -24169,6 +24284,9 @@
           <a:p>
             <a:r>
               <a:rPr lang="en-US" sz="800" dirty="0">
+                <a:solidFill>
+                  <a:srgbClr val="FFFFFF"/>
+                </a:solidFill>
                 <a:latin typeface="Calibri" pitchFamily="34" charset="0"/>
                 <a:ea typeface="Calibri" pitchFamily="34" charset="-122"/>
                 <a:cs typeface="Calibri" pitchFamily="34" charset="-120"/>
@@ -24193,7 +24311,7 @@
     <p:bg>
       <p:bgPr>
         <a:solidFill>
-          <a:srgbClr val="F0F4FF"/>
+          <a:srgbClr val="0D0D1A"/>
         </a:solidFill>
         <a:effectLst/>
       </p:bgPr>
@@ -24229,6 +24347,9 @@
           <a:solidFill>
             <a:srgbClr val="4472C4"/>
           </a:solidFill>
+          <a:ln>
+            <a:solidFill/>
+          </a:ln>
         </p:spPr>
         <p:txBody>
           <a:bodyPr/>
@@ -24265,7 +24386,7 @@
             <a:r>
               <a:rPr lang="de-DE" sz="2800" b="1" dirty="0">
                 <a:solidFill>
-                  <a:srgbClr val="1A1A2E"/>
+                  <a:srgbClr val="FFFFFF"/>
                 </a:solidFill>
                 <a:latin typeface="Arial Black" pitchFamily="49" charset="0"/>
               </a:rPr>
@@ -25018,7 +25139,7 @@
             <a:avLst/>
           </a:prstGeom>
           <a:solidFill>
-            <a:srgbClr val="FFFFFF"/>
+            <a:srgbClr val="161638"/>
           </a:solidFill>
           <a:ln w="6350">
             <a:solidFill>
@@ -25062,7 +25183,7 @@
             <a:r>
               <a:rPr lang="de-DE" sz="1150" b="1" dirty="0">
                 <a:solidFill>
-                  <a:srgbClr val="2A3A5E"/>
+                  <a:srgbClr val="FFFFFF"/>
                 </a:solidFill>
                 <a:latin typeface="Calibri" pitchFamily="49" charset="0"/>
               </a:rPr>
@@ -25093,7 +25214,7 @@
             <a:r>
               <a:rPr lang="de-DE" sz="1150" b="1" dirty="0">
                 <a:solidFill>
-                  <a:srgbClr val="2A3A5E"/>
+                  <a:srgbClr val="FFFFFF"/>
                 </a:solidFill>
                 <a:latin typeface="Calibri" pitchFamily="49" charset="0"/>
               </a:rPr>
@@ -25124,7 +25245,7 @@
             <a:r>
               <a:rPr lang="de-DE" sz="1150" b="1" dirty="0">
                 <a:solidFill>
-                  <a:srgbClr val="2A3A5E"/>
+                  <a:srgbClr val="FFFFFF"/>
                 </a:solidFill>
                 <a:latin typeface="Calibri" pitchFamily="49" charset="0"/>
               </a:rPr>
@@ -25155,7 +25276,7 @@
             <a:r>
               <a:rPr lang="de-DE" sz="1150" b="1" dirty="0">
                 <a:solidFill>
-                  <a:srgbClr val="2A3A5E"/>
+                  <a:srgbClr val="FFFFFF"/>
                 </a:solidFill>
                 <a:latin typeface="Calibri" pitchFamily="49" charset="0"/>
               </a:rPr>
@@ -25186,7 +25307,7 @@
             <a:r>
               <a:rPr lang="de-DE" sz="1150" b="1" dirty="0">
                 <a:solidFill>
-                  <a:srgbClr val="2A3A5E"/>
+                  <a:srgbClr val="FFFFFF"/>
                 </a:solidFill>
                 <a:latin typeface="Calibri" pitchFamily="49" charset="0"/>
               </a:rPr>
@@ -25238,7 +25359,11 @@
           <a:lstStyle/>
           <a:p>
             <a:r>
-              <a:rPr lang="de-DE" sz="800" dirty="0"/>
+              <a:rPr lang="de-DE" sz="800" dirty="0">
+                <a:solidFill>
+                  <a:srgbClr val="FFFFFF"/>
+                </a:solidFill>
+              </a:rPr>
               <a:t>8</a:t>
             </a:r>
           </a:p>
@@ -26988,7 +27113,7 @@
           </a:solidFill>
           <a:ln w="6350">
             <a:solidFill>
-              <a:srgbClr val="2A3A5E"/>
+              <a:srgbClr val="D0D7E8"/>
             </a:solidFill>
             <a:prstDash val="solid"/>
           </a:ln>
@@ -27578,7 +27703,7 @@
             <a:r>
               <a:rPr lang="en-US" sz="800" dirty="0">
                 <a:solidFill>
-                  <a:srgbClr val="E94560"/>
+                  <a:srgbClr val="FFFFFF"/>
                 </a:solidFill>
                 <a:latin typeface="Calibri" pitchFamily="34" charset="0"/>
                 <a:ea typeface="Calibri" pitchFamily="34" charset="-122"/>
